--- a/speed_monitoring.pptx
+++ b/speed_monitoring.pptx
@@ -5,18 +5,16 @@
     <p:sldMasterId id="2147483648" r:id="rId1"/>
   </p:sldMasterIdLst>
   <p:notesMasterIdLst>
-    <p:notesMasterId r:id="rId11"/>
+    <p:notesMasterId r:id="rId9"/>
   </p:notesMasterIdLst>
   <p:sldIdLst>
     <p:sldId id="256" r:id="rId2"/>
     <p:sldId id="257" r:id="rId3"/>
     <p:sldId id="258" r:id="rId4"/>
-    <p:sldId id="259" r:id="rId5"/>
-    <p:sldId id="260" r:id="rId6"/>
-    <p:sldId id="261" r:id="rId7"/>
-    <p:sldId id="262" r:id="rId8"/>
-    <p:sldId id="263" r:id="rId9"/>
-    <p:sldId id="264" r:id="rId10"/>
+    <p:sldId id="260" r:id="rId5"/>
+    <p:sldId id="261" r:id="rId6"/>
+    <p:sldId id="263" r:id="rId7"/>
+    <p:sldId id="264" r:id="rId8"/>
   </p:sldIdLst>
   <p:sldSz cx="9144000" cy="5143500" type="screen16x9"/>
   <p:notesSz cx="5143500" cy="9144000"/>
@@ -833,174 +831,6 @@
 </p:notes>
 </file>
 
-<file path=ppt/notesSlides/notesSlide8.xml><?xml version="1.0" encoding="utf-8"?>
-<p:notes xmlns:a="http://schemas.openxmlformats.org/drawingml/2006/main" xmlns:r="http://schemas.openxmlformats.org/officeDocument/2006/relationships" xmlns:p="http://schemas.openxmlformats.org/presentationml/2006/main">
-  <p:cSld>
-    <p:spTree>
-      <p:nvGrpSpPr>
-        <p:cNvPr id="1" name=""/>
-        <p:cNvGrpSpPr/>
-        <p:nvPr/>
-      </p:nvGrpSpPr>
-      <p:grpSpPr>
-        <a:xfrm>
-          <a:off x="0" y="0"/>
-          <a:ext cx="0" cy="0"/>
-          <a:chOff x="0" y="0"/>
-          <a:chExt cx="0" cy="0"/>
-        </a:xfrm>
-      </p:grpSpPr>
-      <p:sp>
-        <p:nvSpPr>
-          <p:cNvPr id="2" name="Slide Image Placeholder 1"/>
-          <p:cNvSpPr>
-            <a:spLocks noGrp="1" noRot="1" noChangeAspect="1"/>
-          </p:cNvSpPr>
-          <p:nvPr>
-            <p:ph type="sldImg"/>
-          </p:nvPr>
-        </p:nvSpPr>
-        <p:spPr/>
-      </p:sp>
-      <p:sp>
-        <p:nvSpPr>
-          <p:cNvPr id="3" name="Notes Placeholder 2"/>
-          <p:cNvSpPr>
-            <a:spLocks noGrp="1"/>
-          </p:cNvSpPr>
-          <p:nvPr>
-            <p:ph type="body" idx="1"/>
-          </p:nvPr>
-        </p:nvSpPr>
-        <p:spPr/>
-        <p:txBody>
-          <a:bodyPr/>
-          <a:lstStyle/>
-          <a:p>
-            <a:endParaRPr lang="en-US" dirty="0"/>
-          </a:p>
-        </p:txBody>
-      </p:sp>
-      <p:sp>
-        <p:nvSpPr>
-          <p:cNvPr id="4" name="Slide Number Placeholder 3"/>
-          <p:cNvSpPr>
-            <a:spLocks noGrp="1"/>
-          </p:cNvSpPr>
-          <p:nvPr>
-            <p:ph type="sldNum" sz="quarter" idx="10"/>
-          </p:nvPr>
-        </p:nvSpPr>
-        <p:spPr/>
-        <p:txBody>
-          <a:bodyPr/>
-          <a:lstStyle/>
-          <a:p>
-            <a:fld id="{F7021451-1387-4CA6-816F-3879F97B5CBC}" type="slidenum">
-              <a:rPr lang="en-US"/>
-              <a:t>8</a:t>
-            </a:fld>
-            <a:endParaRPr lang="en-US"/>
-          </a:p>
-        </p:txBody>
-      </p:sp>
-    </p:spTree>
-    <p:extLst>
-      <p:ext uri="{BB962C8B-B14F-4D97-AF65-F5344CB8AC3E}">
-        <p14:creationId xmlns:p14="http://schemas.microsoft.com/office/powerpoint/2010/main" val="1024086991"/>
-      </p:ext>
-    </p:extLst>
-  </p:cSld>
-  <p:clrMapOvr>
-    <a:masterClrMapping/>
-  </p:clrMapOvr>
-</p:notes>
-</file>
-
-<file path=ppt/notesSlides/notesSlide9.xml><?xml version="1.0" encoding="utf-8"?>
-<p:notes xmlns:a="http://schemas.openxmlformats.org/drawingml/2006/main" xmlns:r="http://schemas.openxmlformats.org/officeDocument/2006/relationships" xmlns:p="http://schemas.openxmlformats.org/presentationml/2006/main">
-  <p:cSld>
-    <p:spTree>
-      <p:nvGrpSpPr>
-        <p:cNvPr id="1" name=""/>
-        <p:cNvGrpSpPr/>
-        <p:nvPr/>
-      </p:nvGrpSpPr>
-      <p:grpSpPr>
-        <a:xfrm>
-          <a:off x="0" y="0"/>
-          <a:ext cx="0" cy="0"/>
-          <a:chOff x="0" y="0"/>
-          <a:chExt cx="0" cy="0"/>
-        </a:xfrm>
-      </p:grpSpPr>
-      <p:sp>
-        <p:nvSpPr>
-          <p:cNvPr id="2" name="Slide Image Placeholder 1"/>
-          <p:cNvSpPr>
-            <a:spLocks noGrp="1" noRot="1" noChangeAspect="1"/>
-          </p:cNvSpPr>
-          <p:nvPr>
-            <p:ph type="sldImg"/>
-          </p:nvPr>
-        </p:nvSpPr>
-        <p:spPr/>
-      </p:sp>
-      <p:sp>
-        <p:nvSpPr>
-          <p:cNvPr id="3" name="Notes Placeholder 2"/>
-          <p:cNvSpPr>
-            <a:spLocks noGrp="1"/>
-          </p:cNvSpPr>
-          <p:nvPr>
-            <p:ph type="body" idx="1"/>
-          </p:nvPr>
-        </p:nvSpPr>
-        <p:spPr/>
-        <p:txBody>
-          <a:bodyPr/>
-          <a:lstStyle/>
-          <a:p>
-            <a:endParaRPr lang="en-US" dirty="0"/>
-          </a:p>
-        </p:txBody>
-      </p:sp>
-      <p:sp>
-        <p:nvSpPr>
-          <p:cNvPr id="4" name="Slide Number Placeholder 3"/>
-          <p:cNvSpPr>
-            <a:spLocks noGrp="1"/>
-          </p:cNvSpPr>
-          <p:nvPr>
-            <p:ph type="sldNum" sz="quarter" idx="10"/>
-          </p:nvPr>
-        </p:nvSpPr>
-        <p:spPr/>
-        <p:txBody>
-          <a:bodyPr/>
-          <a:lstStyle/>
-          <a:p>
-            <a:fld id="{F7021451-1387-4CA6-816F-3879F97B5CBC}" type="slidenum">
-              <a:rPr lang="en-US"/>
-              <a:t>9</a:t>
-            </a:fld>
-            <a:endParaRPr lang="en-US"/>
-          </a:p>
-        </p:txBody>
-      </p:sp>
-    </p:spTree>
-    <p:extLst>
-      <p:ext uri="{BB962C8B-B14F-4D97-AF65-F5344CB8AC3E}">
-        <p14:creationId xmlns:p14="http://schemas.microsoft.com/office/powerpoint/2010/main" val="1024086991"/>
-      </p:ext>
-    </p:extLst>
-  </p:cSld>
-  <p:clrMapOvr>
-    <a:masterClrMapping/>
-  </p:clrMapOvr>
-</p:notes>
-</file>
-
 <file path=ppt/slideLayouts/slideLayout1.xml><?xml version="1.0" encoding="utf-8"?>
 <p:sldLayout xmlns:a="http://schemas.openxmlformats.org/drawingml/2006/main" xmlns:r="http://schemas.openxmlformats.org/officeDocument/2006/relationships" xmlns:p="http://schemas.openxmlformats.org/presentationml/2006/main" preserve="1">
   <p:cSld name="DEFAULT">
@@ -1578,7 +1408,40 @@
                 <a:ea typeface="Calibri" pitchFamily="34" charset="-122"/>
                 <a:cs typeface="Calibri" pitchFamily="34" charset="-120"/>
               </a:rPr>
-              <a:t>Dataset: Geschwindigkeitsmonitoring – ab 2024</a:t>
+              <a:t>Dataset: </a:t>
+            </a:r>
+            <a:r>
+              <a:rPr lang="en-US" sz="1200" i="1" dirty="0" err="1">
+                <a:solidFill>
+                  <a:srgbClr val="B0BEC5"/>
+                </a:solidFill>
+                <a:latin typeface="Calibri" pitchFamily="34" charset="0"/>
+                <a:ea typeface="Calibri" pitchFamily="34" charset="-122"/>
+                <a:cs typeface="Calibri" pitchFamily="34" charset="-120"/>
+              </a:rPr>
+              <a:t>Geschwindigkeitsmonitoring</a:t>
+            </a:r>
+            <a:r>
+              <a:rPr lang="en-US" sz="1200" i="1" dirty="0">
+                <a:solidFill>
+                  <a:srgbClr val="B0BEC5"/>
+                </a:solidFill>
+                <a:latin typeface="Calibri" pitchFamily="34" charset="0"/>
+                <a:ea typeface="Calibri" pitchFamily="34" charset="-122"/>
+                <a:cs typeface="Calibri" pitchFamily="34" charset="-120"/>
+              </a:rPr>
+              <a:t> – </a:t>
+            </a:r>
+            <a:r>
+              <a:rPr lang="en-US" sz="1200" i="1" dirty="0" err="1">
+                <a:solidFill>
+                  <a:srgbClr val="B0BEC5"/>
+                </a:solidFill>
+                <a:latin typeface="Calibri" pitchFamily="34" charset="0"/>
+                <a:ea typeface="Calibri" pitchFamily="34" charset="-122"/>
+                <a:cs typeface="Calibri" pitchFamily="34" charset="-120"/>
+              </a:rPr>
+              <a:t>opendata.swiss</a:t>
             </a:r>
             <a:endParaRPr lang="en-US" sz="1200" dirty="0"/>
           </a:p>
@@ -1866,10 +1729,19 @@
                   <a:srgbClr val="00B4D8"/>
                 </a:solidFill>
                 <a:latin typeface="Calibri" pitchFamily="34" charset="0"/>
-                <a:ea typeface="Calibri" pitchFamily="34" charset="-122"/>
-                <a:cs typeface="Calibri" pitchFamily="34" charset="-120"/>
-              </a:rPr>
-              <a:t>&gt;600k</a:t>
+                <a:cs typeface="Calibri" pitchFamily="34" charset="-120"/>
+              </a:rPr>
+              <a:t>~5.5 </a:t>
+            </a:r>
+            <a:r>
+              <a:rPr lang="en-US" sz="2800" b="1" dirty="0" err="1">
+                <a:solidFill>
+                  <a:srgbClr val="00B4D8"/>
+                </a:solidFill>
+                <a:latin typeface="Calibri" pitchFamily="34" charset="0"/>
+                <a:cs typeface="Calibri" pitchFamily="34" charset="-120"/>
+              </a:rPr>
+              <a:t>mln</a:t>
             </a:r>
             <a:endParaRPr lang="en-US" sz="2800" dirty="0"/>
           </a:p>
@@ -1911,6 +1783,43 @@
               <a:t>Misurazioni</a:t>
             </a:r>
             <a:endParaRPr lang="en-US" sz="1200" dirty="0"/>
+          </a:p>
+        </p:txBody>
+      </p:sp>
+      <p:sp>
+        <p:nvSpPr>
+          <p:cNvPr id="17" name="Text 2">
+            <a:extLst>
+              <a:ext uri="{FF2B5EF4-FFF2-40B4-BE49-F238E27FC236}">
+                <a16:creationId xmlns:a16="http://schemas.microsoft.com/office/drawing/2014/main" id="{1FBF2587-6F26-7E5B-8C40-8299E73D94BA}"/>
+              </a:ext>
+            </a:extLst>
+          </p:cNvPr>
+          <p:cNvSpPr/>
+          <p:nvPr/>
+        </p:nvSpPr>
+        <p:spPr>
+          <a:xfrm>
+            <a:off x="6966373" y="2926080"/>
+            <a:ext cx="697653" cy="457200"/>
+          </a:xfrm>
+          <a:prstGeom prst="rect">
+            <a:avLst/>
+          </a:prstGeom>
+          <a:noFill/>
+          <a:ln/>
+        </p:spPr>
+        <p:txBody>
+          <a:bodyPr wrap="square" lIns="0" tIns="0" rIns="0" bIns="0" rtlCol="0" anchor="ctr"/>
+          <a:lstStyle/>
+          <a:p>
+            <a:pPr marL="0" indent="0">
+              <a:buNone/>
+            </a:pPr>
+            <a:r>
+              <a:rPr lang="en-US" sz="2400" dirty="0"/>
+              <a:t>🇨🇭📸</a:t>
+            </a:r>
           </a:p>
         </p:txBody>
       </p:sp>
@@ -2154,7 +2063,7 @@
                 <a:ea typeface="Calibri" pitchFamily="34" charset="-122"/>
                 <a:cs typeface="Calibri" pitchFamily="34" charset="-120"/>
               </a:rPr>
-              <a:t>⏱️  Timestamp e data/ora misurazione</a:t>
+              <a:t>⏱️  Data/ora misurazione</a:t>
             </a:r>
             <a:endParaRPr lang="en-US" sz="1150" dirty="0"/>
           </a:p>
@@ -2296,7 +2205,18 @@
                 <a:ea typeface="Calibri" pitchFamily="34" charset="-122"/>
                 <a:cs typeface="Calibri" pitchFamily="34" charset="-120"/>
               </a:rPr>
-              <a:t>📍  Coordinate geografiche (geo_point_2d)</a:t>
+              <a:t>📍  Coordinate </a:t>
+            </a:r>
+            <a:r>
+              <a:rPr lang="en-US" sz="1150" dirty="0" err="1">
+                <a:solidFill>
+                  <a:srgbClr val="FFFFFF"/>
+                </a:solidFill>
+                <a:latin typeface="Calibri" pitchFamily="34" charset="0"/>
+                <a:ea typeface="Calibri" pitchFamily="34" charset="-122"/>
+                <a:cs typeface="Calibri" pitchFamily="34" charset="-120"/>
+              </a:rPr>
+              <a:t>geografiche</a:t>
             </a:r>
             <a:endParaRPr lang="en-US" sz="1150" dirty="0"/>
           </a:p>
@@ -2749,34 +2669,82 @@
           <a:bodyPr wrap="square" lIns="0" tIns="0" rIns="0" bIns="0" rtlCol="0" anchor="ctr"/>
           <a:lstStyle/>
           <a:p>
+            <a:pPr algn="ctr"/>
+            <a:r>
+              <a:rPr lang="en-US" sz="2400" b="1" dirty="0">
+                <a:solidFill>
+                  <a:srgbClr val="00B4D8"/>
+                </a:solidFill>
+                <a:latin typeface="Calibri" pitchFamily="34" charset="0"/>
+                <a:ea typeface="Calibri" pitchFamily="34" charset="-122"/>
+                <a:cs typeface="Calibri" pitchFamily="34" charset="-120"/>
+              </a:rPr>
+              <a:t>~5.5 </a:t>
+            </a:r>
+            <a:r>
+              <a:rPr lang="en-US" sz="2400" b="1" dirty="0" err="1">
+                <a:solidFill>
+                  <a:srgbClr val="00B4D8"/>
+                </a:solidFill>
+                <a:latin typeface="Calibri" pitchFamily="34" charset="0"/>
+                <a:ea typeface="Calibri" pitchFamily="34" charset="-122"/>
+                <a:cs typeface="Calibri" pitchFamily="34" charset="-120"/>
+              </a:rPr>
+              <a:t>mln</a:t>
+            </a:r>
+            <a:endParaRPr lang="en-US" sz="2400" dirty="0"/>
+          </a:p>
+        </p:txBody>
+      </p:sp>
+      <p:sp>
+        <p:nvSpPr>
+          <p:cNvPr id="25" name="Text 23"/>
+          <p:cNvSpPr/>
+          <p:nvPr/>
+        </p:nvSpPr>
+        <p:spPr>
+          <a:xfrm>
+            <a:off x="4937760" y="1700784"/>
+            <a:ext cx="3931920" cy="256032"/>
+          </a:xfrm>
+          <a:prstGeom prst="rect">
+            <a:avLst/>
+          </a:prstGeom>
+          <a:noFill/>
+          <a:ln/>
+        </p:spPr>
+        <p:txBody>
+          <a:bodyPr wrap="square" lIns="0" tIns="0" rIns="0" bIns="0" rtlCol="0" anchor="ctr"/>
+          <a:lstStyle/>
+          <a:p>
             <a:pPr marL="0" indent="0" algn="ctr">
               <a:buNone/>
             </a:pPr>
             <a:r>
-              <a:rPr lang="en-US" sz="2400" b="1" dirty="0">
-                <a:solidFill>
-                  <a:srgbClr val="00B4D8"/>
-                </a:solidFill>
-                <a:latin typeface="Calibri" pitchFamily="34" charset="0"/>
-                <a:ea typeface="Calibri" pitchFamily="34" charset="-122"/>
-                <a:cs typeface="Calibri" pitchFamily="34" charset="-120"/>
-              </a:rPr>
-              <a:t>&gt;600k</a:t>
-            </a:r>
-            <a:endParaRPr lang="en-US" sz="2400" dirty="0"/>
-          </a:p>
-        </p:txBody>
-      </p:sp>
-      <p:sp>
-        <p:nvSpPr>
-          <p:cNvPr id="25" name="Text 23"/>
-          <p:cNvSpPr/>
-          <p:nvPr/>
-        </p:nvSpPr>
-        <p:spPr>
-          <a:xfrm>
-            <a:off x="4937760" y="1700784"/>
-            <a:ext cx="3931920" cy="256032"/>
+              <a:rPr lang="en-US" sz="1200" dirty="0">
+                <a:solidFill>
+                  <a:srgbClr val="B0BEC5"/>
+                </a:solidFill>
+                <a:latin typeface="Calibri" pitchFamily="34" charset="0"/>
+                <a:ea typeface="Calibri" pitchFamily="34" charset="-122"/>
+                <a:cs typeface="Calibri" pitchFamily="34" charset="-120"/>
+              </a:rPr>
+              <a:t>Misurazioni singole</a:t>
+            </a:r>
+            <a:endParaRPr lang="en-US" sz="1200" dirty="0"/>
+          </a:p>
+        </p:txBody>
+      </p:sp>
+      <p:sp>
+        <p:nvSpPr>
+          <p:cNvPr id="26" name="Text 24"/>
+          <p:cNvSpPr/>
+          <p:nvPr/>
+        </p:nvSpPr>
+        <p:spPr>
+          <a:xfrm>
+            <a:off x="4937760" y="2020824"/>
+            <a:ext cx="3931920" cy="402336"/>
           </a:xfrm>
           <a:prstGeom prst="rect">
             <a:avLst/>
@@ -2792,30 +2760,29 @@
               <a:buNone/>
             </a:pPr>
             <a:r>
-              <a:rPr lang="en-US" sz="1200" dirty="0">
-                <a:solidFill>
-                  <a:srgbClr val="B0BEC5"/>
-                </a:solidFill>
-                <a:latin typeface="Calibri" pitchFamily="34" charset="0"/>
-                <a:ea typeface="Calibri" pitchFamily="34" charset="-122"/>
-                <a:cs typeface="Calibri" pitchFamily="34" charset="-120"/>
-              </a:rPr>
-              <a:t>Misurazioni singole</a:t>
-            </a:r>
-            <a:endParaRPr lang="en-US" sz="1200" dirty="0"/>
-          </a:p>
-        </p:txBody>
-      </p:sp>
-      <p:sp>
-        <p:nvSpPr>
-          <p:cNvPr id="26" name="Text 24"/>
-          <p:cNvSpPr/>
-          <p:nvPr/>
-        </p:nvSpPr>
-        <p:spPr>
-          <a:xfrm>
-            <a:off x="4937760" y="2020824"/>
-            <a:ext cx="3931920" cy="402336"/>
+              <a:rPr lang="en-US" sz="2400" b="1" dirty="0">
+                <a:solidFill>
+                  <a:srgbClr val="00B4D8"/>
+                </a:solidFill>
+                <a:latin typeface="Calibri" pitchFamily="34" charset="0"/>
+                <a:cs typeface="Calibri" pitchFamily="34" charset="-120"/>
+              </a:rPr>
+              <a:t>295</a:t>
+            </a:r>
+            <a:endParaRPr lang="en-US" sz="2400" dirty="0"/>
+          </a:p>
+        </p:txBody>
+      </p:sp>
+      <p:sp>
+        <p:nvSpPr>
+          <p:cNvPr id="27" name="Text 25"/>
+          <p:cNvSpPr/>
+          <p:nvPr/>
+        </p:nvSpPr>
+        <p:spPr>
+          <a:xfrm>
+            <a:off x="4937760" y="2414016"/>
+            <a:ext cx="3931920" cy="256032"/>
           </a:xfrm>
           <a:prstGeom prst="rect">
             <a:avLst/>
@@ -2831,30 +2798,41 @@
               <a:buNone/>
             </a:pPr>
             <a:r>
-              <a:rPr lang="en-US" sz="2400" b="1" dirty="0">
-                <a:solidFill>
-                  <a:srgbClr val="00B4D8"/>
-                </a:solidFill>
-                <a:latin typeface="Calibri" pitchFamily="34" charset="0"/>
-                <a:ea typeface="Calibri" pitchFamily="34" charset="-122"/>
-                <a:cs typeface="Calibri" pitchFamily="34" charset="-120"/>
-              </a:rPr>
-              <a:t>~90</a:t>
-            </a:r>
-            <a:endParaRPr lang="en-US" sz="2400" dirty="0"/>
-          </a:p>
-        </p:txBody>
-      </p:sp>
-      <p:sp>
-        <p:nvSpPr>
-          <p:cNvPr id="27" name="Text 25"/>
-          <p:cNvSpPr/>
-          <p:nvPr/>
-        </p:nvSpPr>
-        <p:spPr>
-          <a:xfrm>
-            <a:off x="4937760" y="2414016"/>
-            <a:ext cx="3931920" cy="256032"/>
+              <a:rPr lang="en-US" sz="1200" dirty="0" err="1">
+                <a:solidFill>
+                  <a:srgbClr val="B0BEC5"/>
+                </a:solidFill>
+                <a:latin typeface="Calibri" pitchFamily="34" charset="0"/>
+                <a:ea typeface="Calibri" pitchFamily="34" charset="-122"/>
+                <a:cs typeface="Calibri" pitchFamily="34" charset="-120"/>
+              </a:rPr>
+              <a:t>Postazioni</a:t>
+            </a:r>
+            <a:r>
+              <a:rPr lang="en-US" sz="1200" dirty="0">
+                <a:solidFill>
+                  <a:srgbClr val="B0BEC5"/>
+                </a:solidFill>
+                <a:latin typeface="Calibri" pitchFamily="34" charset="0"/>
+                <a:ea typeface="Calibri" pitchFamily="34" charset="-122"/>
+                <a:cs typeface="Calibri" pitchFamily="34" charset="-120"/>
+              </a:rPr>
+              <a:t> radar</a:t>
+            </a:r>
+            <a:endParaRPr lang="en-US" sz="1200" dirty="0"/>
+          </a:p>
+        </p:txBody>
+      </p:sp>
+      <p:sp>
+        <p:nvSpPr>
+          <p:cNvPr id="28" name="Text 26"/>
+          <p:cNvSpPr/>
+          <p:nvPr/>
+        </p:nvSpPr>
+        <p:spPr>
+          <a:xfrm>
+            <a:off x="4937760" y="2734056"/>
+            <a:ext cx="3931920" cy="402336"/>
           </a:xfrm>
           <a:prstGeom prst="rect">
             <a:avLst/>
@@ -2870,30 +2848,30 @@
               <a:buNone/>
             </a:pPr>
             <a:r>
-              <a:rPr lang="en-US" sz="1200" dirty="0">
-                <a:solidFill>
-                  <a:srgbClr val="B0BEC5"/>
-                </a:solidFill>
-                <a:latin typeface="Calibri" pitchFamily="34" charset="0"/>
-                <a:ea typeface="Calibri" pitchFamily="34" charset="-122"/>
-                <a:cs typeface="Calibri" pitchFamily="34" charset="-120"/>
-              </a:rPr>
-              <a:t>Postazioni attive a Basilea</a:t>
-            </a:r>
-            <a:endParaRPr lang="en-US" sz="1200" dirty="0"/>
-          </a:p>
-        </p:txBody>
-      </p:sp>
-      <p:sp>
-        <p:nvSpPr>
-          <p:cNvPr id="28" name="Text 26"/>
-          <p:cNvSpPr/>
-          <p:nvPr/>
-        </p:nvSpPr>
-        <p:spPr>
-          <a:xfrm>
-            <a:off x="4937760" y="2734056"/>
-            <a:ext cx="3931920" cy="402336"/>
+              <a:rPr lang="en-US" sz="2400" b="1" dirty="0">
+                <a:solidFill>
+                  <a:srgbClr val="00B4D8"/>
+                </a:solidFill>
+                <a:latin typeface="Calibri" pitchFamily="34" charset="0"/>
+                <a:ea typeface="Calibri" pitchFamily="34" charset="-122"/>
+                <a:cs typeface="Calibri" pitchFamily="34" charset="-120"/>
+              </a:rPr>
+              <a:t>20/ 30 / 40 / 50 / 60 / 80</a:t>
+            </a:r>
+            <a:endParaRPr lang="en-US" sz="2400" dirty="0"/>
+          </a:p>
+        </p:txBody>
+      </p:sp>
+      <p:sp>
+        <p:nvSpPr>
+          <p:cNvPr id="29" name="Text 27"/>
+          <p:cNvSpPr/>
+          <p:nvPr/>
+        </p:nvSpPr>
+        <p:spPr>
+          <a:xfrm>
+            <a:off x="4937760" y="3127248"/>
+            <a:ext cx="3931920" cy="256032"/>
           </a:xfrm>
           <a:prstGeom prst="rect">
             <a:avLst/>
@@ -2909,30 +2887,36 @@
               <a:buNone/>
             </a:pPr>
             <a:r>
-              <a:rPr lang="en-US" sz="2400" b="1" dirty="0">
-                <a:solidFill>
-                  <a:srgbClr val="00B4D8"/>
-                </a:solidFill>
-                <a:latin typeface="Calibri" pitchFamily="34" charset="0"/>
-                <a:ea typeface="Calibri" pitchFamily="34" charset="-122"/>
-                <a:cs typeface="Calibri" pitchFamily="34" charset="-120"/>
-              </a:rPr>
-              <a:t>30 / 50</a:t>
-            </a:r>
-            <a:endParaRPr lang="en-US" sz="2400" dirty="0"/>
-          </a:p>
-        </p:txBody>
-      </p:sp>
-      <p:sp>
-        <p:nvSpPr>
-          <p:cNvPr id="29" name="Text 27"/>
-          <p:cNvSpPr/>
-          <p:nvPr/>
-        </p:nvSpPr>
-        <p:spPr>
-          <a:xfrm>
-            <a:off x="4937760" y="3127248"/>
-            <a:ext cx="3931920" cy="256032"/>
+              <a:rPr lang="en-US" sz="1200" dirty="0">
+                <a:solidFill>
+                  <a:srgbClr val="B0BEC5"/>
+                </a:solidFill>
+                <a:latin typeface="Calibri" pitchFamily="34" charset="0"/>
+                <a:ea typeface="Calibri" pitchFamily="34" charset="-122"/>
+                <a:cs typeface="Calibri" pitchFamily="34" charset="-120"/>
+              </a:rPr>
+              <a:t>Zone limite (km/h)</a:t>
+            </a:r>
+            <a:endParaRPr lang="en-US" sz="1200" dirty="0"/>
+          </a:p>
+        </p:txBody>
+      </p:sp>
+      <p:sp>
+        <p:nvSpPr>
+          <p:cNvPr id="34" name="Text 24">
+            <a:extLst>
+              <a:ext uri="{FF2B5EF4-FFF2-40B4-BE49-F238E27FC236}">
+                <a16:creationId xmlns:a16="http://schemas.microsoft.com/office/drawing/2014/main" id="{1BE88253-9CF9-F35F-5A33-F262EFB275B0}"/>
+              </a:ext>
+            </a:extLst>
+          </p:cNvPr>
+          <p:cNvSpPr/>
+          <p:nvPr/>
+        </p:nvSpPr>
+        <p:spPr>
+          <a:xfrm>
+            <a:off x="4846320" y="3447288"/>
+            <a:ext cx="3931920" cy="402336"/>
           </a:xfrm>
           <a:prstGeom prst="rect">
             <a:avLst/>
@@ -2948,30 +2932,36 @@
               <a:buNone/>
             </a:pPr>
             <a:r>
-              <a:rPr lang="en-US" sz="1200" dirty="0">
-                <a:solidFill>
-                  <a:srgbClr val="B0BEC5"/>
-                </a:solidFill>
-                <a:latin typeface="Calibri" pitchFamily="34" charset="0"/>
-                <a:ea typeface="Calibri" pitchFamily="34" charset="-122"/>
-                <a:cs typeface="Calibri" pitchFamily="34" charset="-120"/>
-              </a:rPr>
-              <a:t>Zone limite (km/h)</a:t>
-            </a:r>
-            <a:endParaRPr lang="en-US" sz="1200" dirty="0"/>
-          </a:p>
-        </p:txBody>
-      </p:sp>
-      <p:sp>
-        <p:nvSpPr>
-          <p:cNvPr id="30" name="Text 28"/>
-          <p:cNvSpPr/>
-          <p:nvPr/>
-        </p:nvSpPr>
-        <p:spPr>
-          <a:xfrm>
-            <a:off x="4937760" y="3447288"/>
-            <a:ext cx="3931920" cy="402336"/>
+              <a:rPr lang="en-US" sz="2400" b="1" dirty="0">
+                <a:solidFill>
+                  <a:srgbClr val="00B4D8"/>
+                </a:solidFill>
+                <a:latin typeface="Calibri" pitchFamily="34" charset="0"/>
+                <a:ea typeface="Calibri" pitchFamily="34" charset="-122"/>
+                <a:cs typeface="Calibri" pitchFamily="34" charset="-120"/>
+              </a:rPr>
+              <a:t>3</a:t>
+            </a:r>
+            <a:endParaRPr lang="en-US" sz="2400" dirty="0"/>
+          </a:p>
+        </p:txBody>
+      </p:sp>
+      <p:sp>
+        <p:nvSpPr>
+          <p:cNvPr id="35" name="Text 25">
+            <a:extLst>
+              <a:ext uri="{FF2B5EF4-FFF2-40B4-BE49-F238E27FC236}">
+                <a16:creationId xmlns:a16="http://schemas.microsoft.com/office/drawing/2014/main" id="{74C3B044-AB82-6331-7271-2BA41A980AD7}"/>
+              </a:ext>
+            </a:extLst>
+          </p:cNvPr>
+          <p:cNvSpPr/>
+          <p:nvPr/>
+        </p:nvSpPr>
+        <p:spPr>
+          <a:xfrm>
+            <a:off x="4846320" y="3840480"/>
+            <a:ext cx="3931920" cy="256032"/>
           </a:xfrm>
           <a:prstGeom prst="rect">
             <a:avLst/>
@@ -2987,45 +2977,6 @@
               <a:buNone/>
             </a:pPr>
             <a:r>
-              <a:rPr lang="en-US" sz="2400" b="1" dirty="0">
-                <a:solidFill>
-                  <a:srgbClr val="00B4D8"/>
-                </a:solidFill>
-                <a:latin typeface="Calibri" pitchFamily="34" charset="0"/>
-                <a:ea typeface="Calibri" pitchFamily="34" charset="-122"/>
-                <a:cs typeface="Calibri" pitchFamily="34" charset="-120"/>
-              </a:rPr>
-              <a:t>~10%</a:t>
-            </a:r>
-            <a:endParaRPr lang="en-US" sz="2400" dirty="0"/>
-          </a:p>
-        </p:txBody>
-      </p:sp>
-      <p:sp>
-        <p:nvSpPr>
-          <p:cNvPr id="31" name="Text 29"/>
-          <p:cNvSpPr/>
-          <p:nvPr/>
-        </p:nvSpPr>
-        <p:spPr>
-          <a:xfrm>
-            <a:off x="4937760" y="3840480"/>
-            <a:ext cx="3931920" cy="256032"/>
-          </a:xfrm>
-          <a:prstGeom prst="rect">
-            <a:avLst/>
-          </a:prstGeom>
-          <a:noFill/>
-          <a:ln/>
-        </p:spPr>
-        <p:txBody>
-          <a:bodyPr wrap="square" lIns="0" tIns="0" rIns="0" bIns="0" rtlCol="0" anchor="ctr"/>
-          <a:lstStyle/>
-          <a:p>
-            <a:pPr marL="0" indent="0" algn="ctr">
-              <a:buNone/>
-            </a:pPr>
-            <a:r>
               <a:rPr lang="en-US" sz="1200" dirty="0">
                 <a:solidFill>
                   <a:srgbClr val="B0BEC5"/>
@@ -3034,75 +2985,19 @@
                 <a:ea typeface="Calibri" pitchFamily="34" charset="-122"/>
                 <a:cs typeface="Calibri" pitchFamily="34" charset="-120"/>
               </a:rPr>
-              <a:t>Tasso medio di infrazioni</a:t>
-            </a:r>
-            <a:endParaRPr lang="en-US" sz="1200" dirty="0"/>
-          </a:p>
-        </p:txBody>
-      </p:sp>
-      <p:sp>
-        <p:nvSpPr>
-          <p:cNvPr id="32" name="Text 30"/>
-          <p:cNvSpPr/>
-          <p:nvPr/>
-        </p:nvSpPr>
-        <p:spPr>
-          <a:xfrm>
-            <a:off x="4937760" y="4160520"/>
-            <a:ext cx="3931920" cy="402336"/>
-          </a:xfrm>
-          <a:prstGeom prst="rect">
-            <a:avLst/>
-          </a:prstGeom>
-          <a:noFill/>
-          <a:ln/>
-        </p:spPr>
-        <p:txBody>
-          <a:bodyPr wrap="square" lIns="0" tIns="0" rIns="0" bIns="0" rtlCol="0" anchor="ctr"/>
-          <a:lstStyle/>
-          <a:p>
-            <a:pPr marL="0" indent="0" algn="ctr">
-              <a:buNone/>
-            </a:pPr>
-            <a:r>
-              <a:rPr lang="en-US" sz="2400" b="1" dirty="0">
-                <a:solidFill>
-                  <a:srgbClr val="00B4D8"/>
-                </a:solidFill>
-                <a:latin typeface="Calibri" pitchFamily="34" charset="0"/>
-                <a:ea typeface="Calibri" pitchFamily="34" charset="-122"/>
-                <a:cs typeface="Calibri" pitchFamily="34" charset="-120"/>
-              </a:rPr>
-              <a:t>29 km/h</a:t>
-            </a:r>
-            <a:endParaRPr lang="en-US" sz="2400" dirty="0"/>
-          </a:p>
-        </p:txBody>
-      </p:sp>
-      <p:sp>
-        <p:nvSpPr>
-          <p:cNvPr id="33" name="Text 31"/>
-          <p:cNvSpPr/>
-          <p:nvPr/>
-        </p:nvSpPr>
-        <p:spPr>
-          <a:xfrm>
-            <a:off x="4937760" y="4553712"/>
-            <a:ext cx="3931920" cy="256032"/>
-          </a:xfrm>
-          <a:prstGeom prst="rect">
-            <a:avLst/>
-          </a:prstGeom>
-          <a:noFill/>
-          <a:ln/>
-        </p:spPr>
-        <p:txBody>
-          <a:bodyPr wrap="square" lIns="0" tIns="0" rIns="0" bIns="0" rtlCol="0" anchor="ctr"/>
-          <a:lstStyle/>
-          <a:p>
-            <a:pPr marL="0" indent="0" algn="ctr">
-              <a:buNone/>
-            </a:pPr>
+              <a:t>Anni di </a:t>
+            </a:r>
+            <a:r>
+              <a:rPr lang="en-US" sz="1200" dirty="0" err="1">
+                <a:solidFill>
+                  <a:srgbClr val="B0BEC5"/>
+                </a:solidFill>
+                <a:latin typeface="Calibri" pitchFamily="34" charset="0"/>
+                <a:ea typeface="Calibri" pitchFamily="34" charset="-122"/>
+                <a:cs typeface="Calibri" pitchFamily="34" charset="-120"/>
+              </a:rPr>
+              <a:t>misurazioni</a:t>
+            </a:r>
             <a:r>
               <a:rPr lang="en-US" sz="1200" dirty="0">
                 <a:solidFill>
@@ -3112,7 +3007,7 @@
                 <a:ea typeface="Calibri" pitchFamily="34" charset="-122"/>
                 <a:cs typeface="Calibri" pitchFamily="34" charset="-120"/>
               </a:rPr>
-              <a:t>Velocità mediana (V50)</a:t>
+              <a:t> (dal 2024)</a:t>
             </a:r>
             <a:endParaRPr lang="en-US" sz="1200" dirty="0"/>
           </a:p>
@@ -4423,7 +4318,7 @@
                 <a:ea typeface="Calibri" pitchFamily="34" charset="-122"/>
                 <a:cs typeface="Calibri" pitchFamily="34" charset="-120"/>
               </a:rPr>
-              <a:t>coordinate_json</a:t>
+              <a:t>coordinate</a:t>
             </a:r>
             <a:endParaRPr lang="en-US" sz="1050" dirty="0"/>
           </a:p>
@@ -4778,7 +4673,7 @@
                 <a:ea typeface="Calibri" pitchFamily="34" charset="-122"/>
                 <a:cs typeface="Calibri" pitchFamily="34" charset="-120"/>
               </a:rPr>
-              <a:t>v50_kmh</a:t>
+              <a:t>v50</a:t>
             </a:r>
             <a:endParaRPr lang="en-US" sz="1050" dirty="0"/>
           </a:p>
@@ -4849,7 +4744,7 @@
                 <a:ea typeface="Calibri" pitchFamily="34" charset="-122"/>
                 <a:cs typeface="Calibri" pitchFamily="34" charset="-120"/>
               </a:rPr>
-              <a:t>v85_kmh</a:t>
+              <a:t>v85</a:t>
             </a:r>
             <a:endParaRPr lang="en-US" sz="1050" dirty="0"/>
           </a:p>
@@ -5018,9 +4913,6 @@
           <a:bodyPr wrap="square" lIns="0" tIns="0" rIns="0" bIns="0" rtlCol="0" anchor="ctr"/>
           <a:lstStyle/>
           <a:p>
-            <a:pPr marL="0" indent="0">
-              <a:buNone/>
-            </a:pPr>
             <a:r>
               <a:rPr lang="en-US" sz="1000" dirty="0">
                 <a:solidFill>
@@ -5030,7 +4922,183 @@
                 <a:ea typeface="Consolas" pitchFamily="34" charset="-122"/>
                 <a:cs typeface="Consolas" pitchFamily="34" charset="-120"/>
               </a:rPr>
-              <a:t>2025-04-06 20:07:05  |  ID: 1003  |  Velocità: 32 km/h  |  Zona: 30  |  V50: 29  |  V85: 34  |  Infrazioni: 9.93%  |  Veicoli: 25442</a:t>
+              <a:t>2025-04-06 20:07:05  |  ID: 1003  | </a:t>
+            </a:r>
+            <a:r>
+              <a:rPr lang="en-US" sz="1000" dirty="0" err="1">
+                <a:solidFill>
+                  <a:srgbClr val="B0BEC5"/>
+                </a:solidFill>
+                <a:latin typeface="Consolas" pitchFamily="34" charset="0"/>
+                <a:ea typeface="Consolas" pitchFamily="34" charset="-122"/>
+                <a:cs typeface="Consolas" pitchFamily="34" charset="-120"/>
+              </a:rPr>
+              <a:t>Direzione_ID</a:t>
+            </a:r>
+            <a:r>
+              <a:rPr lang="en-US" sz="1000" dirty="0">
+                <a:solidFill>
+                  <a:srgbClr val="B0BEC5"/>
+                </a:solidFill>
+                <a:latin typeface="Consolas" pitchFamily="34" charset="0"/>
+                <a:ea typeface="Consolas" pitchFamily="34" charset="-122"/>
+                <a:cs typeface="Consolas" pitchFamily="34" charset="-120"/>
+              </a:rPr>
+              <a:t>: 1 | </a:t>
+            </a:r>
+            <a:r>
+              <a:rPr lang="en-US" sz="1000" dirty="0" err="1">
+                <a:solidFill>
+                  <a:srgbClr val="B0BEC5"/>
+                </a:solidFill>
+                <a:latin typeface="Consolas" pitchFamily="34" charset="0"/>
+                <a:ea typeface="Consolas" pitchFamily="34" charset="-122"/>
+                <a:cs typeface="Consolas" pitchFamily="34" charset="-120"/>
+              </a:rPr>
+              <a:t>Inizio</a:t>
+            </a:r>
+            <a:r>
+              <a:rPr lang="en-US" sz="1000" dirty="0">
+                <a:solidFill>
+                  <a:srgbClr val="B0BEC5"/>
+                </a:solidFill>
+                <a:latin typeface="Consolas" pitchFamily="34" charset="0"/>
+                <a:ea typeface="Consolas" pitchFamily="34" charset="-122"/>
+                <a:cs typeface="Consolas" pitchFamily="34" charset="-120"/>
+              </a:rPr>
+              <a:t> </a:t>
+            </a:r>
+            <a:r>
+              <a:rPr lang="en-US" sz="1000" dirty="0" err="1">
+                <a:solidFill>
+                  <a:srgbClr val="B0BEC5"/>
+                </a:solidFill>
+                <a:latin typeface="Consolas" pitchFamily="34" charset="0"/>
+                <a:ea typeface="Consolas" pitchFamily="34" charset="-122"/>
+                <a:cs typeface="Consolas" pitchFamily="34" charset="-120"/>
+              </a:rPr>
+              <a:t>misurazione</a:t>
+            </a:r>
+            <a:r>
+              <a:rPr lang="en-US" sz="1000" dirty="0">
+                <a:solidFill>
+                  <a:srgbClr val="B0BEC5"/>
+                </a:solidFill>
+                <a:latin typeface="Consolas" pitchFamily="34" charset="0"/>
+                <a:ea typeface="Consolas" pitchFamily="34" charset="-122"/>
+                <a:cs typeface="Consolas" pitchFamily="34" charset="-120"/>
+              </a:rPr>
+              <a:t>: 2025-04-05 | Fine </a:t>
+            </a:r>
+            <a:r>
+              <a:rPr lang="en-US" sz="1000" dirty="0" err="1">
+                <a:solidFill>
+                  <a:srgbClr val="B0BEC5"/>
+                </a:solidFill>
+                <a:latin typeface="Consolas" pitchFamily="34" charset="0"/>
+                <a:ea typeface="Consolas" pitchFamily="34" charset="-122"/>
+                <a:cs typeface="Consolas" pitchFamily="34" charset="-120"/>
+              </a:rPr>
+              <a:t>misurazione</a:t>
+            </a:r>
+            <a:r>
+              <a:rPr lang="en-US" sz="1000" dirty="0">
+                <a:solidFill>
+                  <a:srgbClr val="B0BEC5"/>
+                </a:solidFill>
+                <a:latin typeface="Consolas" pitchFamily="34" charset="0"/>
+                <a:ea typeface="Consolas" pitchFamily="34" charset="-122"/>
+                <a:cs typeface="Consolas" pitchFamily="34" charset="-120"/>
+              </a:rPr>
+              <a:t>: 2025-04-10 | Zona: 30km/h | </a:t>
+            </a:r>
+            <a:r>
+              <a:rPr lang="en-US" sz="1000" dirty="0" err="1">
+                <a:solidFill>
+                  <a:srgbClr val="B0BEC5"/>
+                </a:solidFill>
+                <a:latin typeface="Consolas" pitchFamily="34" charset="0"/>
+                <a:ea typeface="Consolas" pitchFamily="34" charset="-122"/>
+                <a:cs typeface="Consolas" pitchFamily="34" charset="-120"/>
+              </a:rPr>
+              <a:t>Direzione</a:t>
+            </a:r>
+            <a:r>
+              <a:rPr lang="en-US" sz="1000" dirty="0">
+                <a:solidFill>
+                  <a:srgbClr val="B0BEC5"/>
+                </a:solidFill>
+                <a:latin typeface="Consolas" pitchFamily="34" charset="0"/>
+                <a:ea typeface="Consolas" pitchFamily="34" charset="-122"/>
+                <a:cs typeface="Consolas" pitchFamily="34" charset="-120"/>
+              </a:rPr>
+              <a:t>: </a:t>
+            </a:r>
+            <a:r>
+              <a:rPr lang="en-US" sz="1000" dirty="0" err="1">
+                <a:solidFill>
+                  <a:srgbClr val="B0BEC5"/>
+                </a:solidFill>
+                <a:latin typeface="Consolas" pitchFamily="34" charset="0"/>
+                <a:ea typeface="Consolas" pitchFamily="34" charset="-122"/>
+                <a:cs typeface="Consolas" pitchFamily="34" charset="-120"/>
+              </a:rPr>
+              <a:t>Holbeinplatz</a:t>
+            </a:r>
+            <a:r>
+              <a:rPr lang="en-US" sz="1000" dirty="0">
+                <a:solidFill>
+                  <a:srgbClr val="B0BEC5"/>
+                </a:solidFill>
+                <a:latin typeface="Consolas" pitchFamily="34" charset="0"/>
+                <a:ea typeface="Consolas" pitchFamily="34" charset="-122"/>
+                <a:cs typeface="Consolas" pitchFamily="34" charset="-120"/>
+              </a:rPr>
+              <a:t> | Coordinate: xxx | Tasso di </a:t>
+            </a:r>
+            <a:r>
+              <a:rPr lang="en-US" sz="1000" dirty="0" err="1">
+                <a:solidFill>
+                  <a:srgbClr val="B0BEC5"/>
+                </a:solidFill>
+                <a:latin typeface="Consolas" pitchFamily="34" charset="0"/>
+                <a:ea typeface="Consolas" pitchFamily="34" charset="-122"/>
+                <a:cs typeface="Consolas" pitchFamily="34" charset="-120"/>
+              </a:rPr>
+              <a:t>infrazione</a:t>
+            </a:r>
+            <a:r>
+              <a:rPr lang="en-US" sz="1000" dirty="0">
+                <a:solidFill>
+                  <a:srgbClr val="B0BEC5"/>
+                </a:solidFill>
+                <a:latin typeface="Consolas" pitchFamily="34" charset="0"/>
+                <a:ea typeface="Consolas" pitchFamily="34" charset="-122"/>
+                <a:cs typeface="Consolas" pitchFamily="34" charset="-120"/>
+              </a:rPr>
+              <a:t>: 9.93 |  </a:t>
+            </a:r>
+            <a:r>
+              <a:rPr lang="en-US" sz="1000" dirty="0" err="1">
+                <a:solidFill>
+                  <a:srgbClr val="B0BEC5"/>
+                </a:solidFill>
+                <a:latin typeface="Consolas" pitchFamily="34" charset="0"/>
+                <a:ea typeface="Consolas" pitchFamily="34" charset="-122"/>
+                <a:cs typeface="Consolas" pitchFamily="34" charset="-120"/>
+              </a:rPr>
+              <a:t>Velocità</a:t>
+            </a:r>
+            <a:r>
+              <a:rPr lang="en-US" sz="1000" dirty="0">
+                <a:solidFill>
+                  <a:srgbClr val="B0BEC5"/>
+                </a:solidFill>
+                <a:latin typeface="Consolas" pitchFamily="34" charset="0"/>
+                <a:ea typeface="Consolas" pitchFamily="34" charset="-122"/>
+                <a:cs typeface="Consolas" pitchFamily="34" charset="-120"/>
+              </a:rPr>
+              <a:t>: 32.0 km/h | …</a:t>
             </a:r>
             <a:endParaRPr lang="en-US" sz="1000" dirty="0"/>
           </a:p>
@@ -5045,220 +5113,6 @@
 </file>
 
 <file path=ppt/slides/slide4.xml><?xml version="1.0" encoding="utf-8"?>
-<p:sld xmlns:a="http://schemas.openxmlformats.org/drawingml/2006/main" xmlns:r="http://schemas.openxmlformats.org/officeDocument/2006/relationships" xmlns:p="http://schemas.openxmlformats.org/presentationml/2006/main">
-  <p:cSld name="Slide 4">
-    <p:bg>
-      <p:bgPr>
-        <a:solidFill>
-          <a:srgbClr val="1A2744"/>
-        </a:solidFill>
-        <a:effectLst/>
-      </p:bgPr>
-    </p:bg>
-    <p:spTree>
-      <p:nvGrpSpPr>
-        <p:cNvPr id="1" name=""/>
-        <p:cNvGrpSpPr/>
-        <p:nvPr/>
-      </p:nvGrpSpPr>
-      <p:grpSpPr>
-        <a:xfrm>
-          <a:off x="0" y="0"/>
-          <a:ext cx="0" cy="0"/>
-          <a:chOff x="0" y="0"/>
-          <a:chExt cx="0" cy="0"/>
-        </a:xfrm>
-      </p:grpSpPr>
-      <p:sp>
-        <p:nvSpPr>
-          <p:cNvPr id="2" name="Shape 0"/>
-          <p:cNvSpPr/>
-          <p:nvPr/>
-        </p:nvSpPr>
-        <p:spPr>
-          <a:xfrm>
-            <a:off x="0" y="0"/>
-            <a:ext cx="164592" cy="5143500"/>
-          </a:xfrm>
-          <a:prstGeom prst="rect">
-            <a:avLst/>
-          </a:prstGeom>
-          <a:solidFill>
-            <a:srgbClr val="00B4D8"/>
-          </a:solidFill>
-          <a:ln w="12700">
-            <a:solidFill>
-              <a:srgbClr val="00B4D8"/>
-            </a:solidFill>
-            <a:prstDash val="solid"/>
-          </a:ln>
-        </p:spPr>
-        <p:txBody>
-          <a:bodyPr/>
-          <a:lstStyle/>
-          <a:p>
-            <a:endParaRPr lang="it-CH"/>
-          </a:p>
-        </p:txBody>
-      </p:sp>
-      <p:sp>
-        <p:nvSpPr>
-          <p:cNvPr id="3" name="Text 1"/>
-          <p:cNvSpPr/>
-          <p:nvPr/>
-        </p:nvSpPr>
-        <p:spPr>
-          <a:xfrm>
-            <a:off x="365760" y="164592"/>
-            <a:ext cx="8412480" cy="548640"/>
-          </a:xfrm>
-          <a:prstGeom prst="rect">
-            <a:avLst/>
-          </a:prstGeom>
-          <a:noFill/>
-          <a:ln/>
-        </p:spPr>
-        <p:txBody>
-          <a:bodyPr wrap="square" lIns="0" tIns="0" rIns="0" bIns="0" rtlCol="0" anchor="ctr"/>
-          <a:lstStyle/>
-          <a:p>
-            <a:pPr marL="0" indent="0">
-              <a:buNone/>
-            </a:pPr>
-            <a:r>
-              <a:rPr lang="en-US" sz="2200" b="1" dirty="0">
-                <a:solidFill>
-                  <a:srgbClr val="00B4D8"/>
-                </a:solidFill>
-                <a:latin typeface="Calibri" pitchFamily="34" charset="0"/>
-                <a:ea typeface="Calibri" pitchFamily="34" charset="-122"/>
-                <a:cs typeface="Calibri" pitchFamily="34" charset="-120"/>
-              </a:rPr>
-              <a:t>Distribuzione delle Velocità per Zona Limite</a:t>
-            </a:r>
-            <a:endParaRPr lang="en-US" sz="2200" dirty="0"/>
-          </a:p>
-        </p:txBody>
-      </p:sp>
-      <p:sp>
-        <p:nvSpPr>
-          <p:cNvPr id="4" name="Text 2"/>
-          <p:cNvSpPr/>
-          <p:nvPr/>
-        </p:nvSpPr>
-        <p:spPr>
-          <a:xfrm>
-            <a:off x="365760" y="804672"/>
-            <a:ext cx="8412480" cy="320040"/>
-          </a:xfrm>
-          <a:prstGeom prst="rect">
-            <a:avLst/>
-          </a:prstGeom>
-          <a:noFill/>
-          <a:ln/>
-        </p:spPr>
-        <p:txBody>
-          <a:bodyPr wrap="square" lIns="0" tIns="0" rIns="0" bIns="0" rtlCol="0" anchor="ctr"/>
-          <a:lstStyle/>
-          <a:p>
-            <a:pPr marL="0" indent="0">
-              <a:buNone/>
-            </a:pPr>
-            <a:r>
-              <a:rPr lang="en-US" sz="1300" i="1" dirty="0">
-                <a:solidFill>
-                  <a:srgbClr val="B0BEC5"/>
-                </a:solidFill>
-                <a:latin typeface="Calibri" pitchFamily="34" charset="0"/>
-                <a:ea typeface="Calibri" pitchFamily="34" charset="-122"/>
-                <a:cs typeface="Calibri" pitchFamily="34" charset="-120"/>
-              </a:rPr>
-              <a:t>Istogramma – velocita_kmh per zona_limite (30 / 50)</a:t>
-            </a:r>
-            <a:endParaRPr lang="en-US" sz="1300" dirty="0"/>
-          </a:p>
-        </p:txBody>
-      </p:sp>
-      <p:sp>
-        <p:nvSpPr>
-          <p:cNvPr id="5" name="Shape 3"/>
-          <p:cNvSpPr/>
-          <p:nvPr/>
-        </p:nvSpPr>
-        <p:spPr>
-          <a:xfrm>
-            <a:off x="365760" y="1234440"/>
-            <a:ext cx="8503920" cy="3611880"/>
-          </a:xfrm>
-          <a:prstGeom prst="rect">
-            <a:avLst/>
-          </a:prstGeom>
-          <a:solidFill>
-            <a:srgbClr val="1E3057"/>
-          </a:solidFill>
-          <a:ln w="12700">
-            <a:solidFill>
-              <a:srgbClr val="2A4580"/>
-            </a:solidFill>
-            <a:prstDash val="solid"/>
-          </a:ln>
-        </p:spPr>
-        <p:txBody>
-          <a:bodyPr/>
-          <a:lstStyle/>
-          <a:p>
-            <a:endParaRPr lang="it-CH"/>
-          </a:p>
-        </p:txBody>
-      </p:sp>
-      <p:sp>
-        <p:nvSpPr>
-          <p:cNvPr id="6" name="Text 4"/>
-          <p:cNvSpPr/>
-          <p:nvPr/>
-        </p:nvSpPr>
-        <p:spPr>
-          <a:xfrm>
-            <a:off x="365760" y="1234440"/>
-            <a:ext cx="8503920" cy="3611880"/>
-          </a:xfrm>
-          <a:prstGeom prst="rect">
-            <a:avLst/>
-          </a:prstGeom>
-          <a:noFill/>
-          <a:ln/>
-        </p:spPr>
-        <p:txBody>
-          <a:bodyPr wrap="square" lIns="0" tIns="0" rIns="0" bIns="0" rtlCol="0" anchor="ctr"/>
-          <a:lstStyle/>
-          <a:p>
-            <a:pPr marL="0" indent="0" algn="ctr">
-              <a:buNone/>
-            </a:pPr>
-            <a:r>
-              <a:rPr lang="en-US" sz="1400" dirty="0">
-                <a:solidFill>
-                  <a:srgbClr val="2A4580"/>
-                </a:solidFill>
-                <a:latin typeface="Calibri" pitchFamily="34" charset="0"/>
-                <a:ea typeface="Calibri" pitchFamily="34" charset="-122"/>
-                <a:cs typeface="Calibri" pitchFamily="34" charset="-120"/>
-              </a:rPr>
-              <a:t>[ grafico ]</a:t>
-            </a:r>
-            <a:endParaRPr lang="en-US" sz="1400" dirty="0"/>
-          </a:p>
-        </p:txBody>
-      </p:sp>
-    </p:spTree>
-  </p:cSld>
-  <p:clrMapOvr>
-    <a:masterClrMapping/>
-  </p:clrMapOvr>
-</p:sld>
-</file>
-
-<file path=ppt/slides/slide5.xml><?xml version="1.0" encoding="utf-8"?>
 <p:sld xmlns:a="http://schemas.openxmlformats.org/drawingml/2006/main" xmlns:r="http://schemas.openxmlformats.org/officeDocument/2006/relationships" xmlns:p="http://schemas.openxmlformats.org/presentationml/2006/main">
   <p:cSld name="Slide 5">
     <p:bg>
@@ -5348,7 +5202,29 @@
                 <a:ea typeface="Calibri" pitchFamily="34" charset="-122"/>
                 <a:cs typeface="Calibri" pitchFamily="34" charset="-120"/>
               </a:rPr>
-              <a:t>Top Postazioni per Tasso di Infrazioni</a:t>
+              <a:t>Top 15 </a:t>
+            </a:r>
+            <a:r>
+              <a:rPr lang="en-US" sz="2200" b="1" dirty="0" err="1">
+                <a:solidFill>
+                  <a:srgbClr val="00B4D8"/>
+                </a:solidFill>
+                <a:latin typeface="Calibri" pitchFamily="34" charset="0"/>
+                <a:ea typeface="Calibri" pitchFamily="34" charset="-122"/>
+                <a:cs typeface="Calibri" pitchFamily="34" charset="-120"/>
+              </a:rPr>
+              <a:t>Postazioni</a:t>
+            </a:r>
+            <a:r>
+              <a:rPr lang="en-US" sz="2200" b="1" dirty="0">
+                <a:solidFill>
+                  <a:srgbClr val="00B4D8"/>
+                </a:solidFill>
+                <a:latin typeface="Calibri" pitchFamily="34" charset="0"/>
+                <a:ea typeface="Calibri" pitchFamily="34" charset="-122"/>
+                <a:cs typeface="Calibri" pitchFamily="34" charset="-120"/>
+              </a:rPr>
+              <a:t> per Tasso di Infrazioni</a:t>
             </a:r>
             <a:endParaRPr lang="en-US" sz="2200" dirty="0"/>
           </a:p>
@@ -5379,15 +5255,74 @@
               <a:buNone/>
             </a:pPr>
             <a:r>
+              <a:rPr lang="en-US" sz="1300" i="1" dirty="0" err="1">
+                <a:solidFill>
+                  <a:srgbClr val="B0BEC5"/>
+                </a:solidFill>
+                <a:latin typeface="Calibri" pitchFamily="34" charset="0"/>
+                <a:cs typeface="Calibri" pitchFamily="34" charset="-120"/>
+              </a:rPr>
+              <a:t>Postazioni</a:t>
+            </a:r>
+            <a:r>
               <a:rPr lang="en-US" sz="1300" i="1" dirty="0">
                 <a:solidFill>
                   <a:srgbClr val="B0BEC5"/>
                 </a:solidFill>
                 <a:latin typeface="Calibri" pitchFamily="34" charset="0"/>
-                <a:ea typeface="Calibri" pitchFamily="34" charset="-122"/>
-                <a:cs typeface="Calibri" pitchFamily="34" charset="-120"/>
-              </a:rPr>
-              <a:t>Bar chart orizzontale – tasso_infrazioni_pct aggregato per localita</a:t>
+                <a:cs typeface="Calibri" pitchFamily="34" charset="-120"/>
+              </a:rPr>
+              <a:t> con la </a:t>
+            </a:r>
+            <a:r>
+              <a:rPr lang="en-US" sz="1300" i="1" dirty="0" err="1">
+                <a:solidFill>
+                  <a:srgbClr val="B0BEC5"/>
+                </a:solidFill>
+                <a:latin typeface="Calibri" pitchFamily="34" charset="0"/>
+                <a:cs typeface="Calibri" pitchFamily="34" charset="-120"/>
+              </a:rPr>
+              <a:t>maggior</a:t>
+            </a:r>
+            <a:r>
+              <a:rPr lang="en-US" sz="1300" i="1" dirty="0">
+                <a:solidFill>
+                  <a:srgbClr val="B0BEC5"/>
+                </a:solidFill>
+                <a:latin typeface="Calibri" pitchFamily="34" charset="0"/>
+                <a:cs typeface="Calibri" pitchFamily="34" charset="-120"/>
+              </a:rPr>
+              <a:t> </a:t>
+            </a:r>
+            <a:r>
+              <a:rPr lang="en-US" sz="1300" i="1" dirty="0" err="1">
+                <a:solidFill>
+                  <a:srgbClr val="B0BEC5"/>
+                </a:solidFill>
+                <a:latin typeface="Calibri" pitchFamily="34" charset="0"/>
+                <a:cs typeface="Calibri" pitchFamily="34" charset="-120"/>
+              </a:rPr>
+              <a:t>percentaule</a:t>
+            </a:r>
+            <a:r>
+              <a:rPr lang="en-US" sz="1300" i="1" dirty="0">
+                <a:solidFill>
+                  <a:srgbClr val="B0BEC5"/>
+                </a:solidFill>
+                <a:latin typeface="Calibri" pitchFamily="34" charset="0"/>
+                <a:cs typeface="Calibri" pitchFamily="34" charset="-120"/>
+              </a:rPr>
+              <a:t> di </a:t>
+            </a:r>
+            <a:r>
+              <a:rPr lang="en-US" sz="1300" i="1" dirty="0" err="1">
+                <a:solidFill>
+                  <a:srgbClr val="B0BEC5"/>
+                </a:solidFill>
+                <a:latin typeface="Calibri" pitchFamily="34" charset="0"/>
+                <a:cs typeface="Calibri" pitchFamily="34" charset="-120"/>
+              </a:rPr>
+              <a:t>infrazioni</a:t>
             </a:r>
             <a:endParaRPr lang="en-US" sz="1300" dirty="0"/>
           </a:p>
@@ -5464,6 +5399,36 @@
           </a:p>
         </p:txBody>
       </p:sp>
+      <p:pic>
+        <p:nvPicPr>
+          <p:cNvPr id="12" name="Immagine 11">
+            <a:extLst>
+              <a:ext uri="{FF2B5EF4-FFF2-40B4-BE49-F238E27FC236}">
+                <a16:creationId xmlns:a16="http://schemas.microsoft.com/office/drawing/2014/main" id="{61E0DCA6-117F-5A7A-4D42-2E2248DF12BD}"/>
+              </a:ext>
+            </a:extLst>
+          </p:cNvPr>
+          <p:cNvPicPr>
+            <a:picLocks noChangeAspect="1"/>
+          </p:cNvPicPr>
+          <p:nvPr/>
+        </p:nvPicPr>
+        <p:blipFill>
+          <a:blip r:embed="rId3"/>
+          <a:stretch>
+            <a:fillRect/>
+          </a:stretch>
+        </p:blipFill>
+        <p:spPr>
+          <a:xfrm>
+            <a:off x="365760" y="1234439"/>
+            <a:ext cx="8494604" cy="3611879"/>
+          </a:xfrm>
+          <a:prstGeom prst="rect">
+            <a:avLst/>
+          </a:prstGeom>
+        </p:spPr>
+      </p:pic>
     </p:spTree>
   </p:cSld>
   <p:clrMapOvr>
@@ -5472,7 +5437,7 @@
 </p:sld>
 </file>
 
-<file path=ppt/slides/slide6.xml><?xml version="1.0" encoding="utf-8"?>
+<file path=ppt/slides/slide5.xml><?xml version="1.0" encoding="utf-8"?>
 <p:sld xmlns:a="http://schemas.openxmlformats.org/drawingml/2006/main" xmlns:r="http://schemas.openxmlformats.org/officeDocument/2006/relationships" xmlns:p="http://schemas.openxmlformats.org/presentationml/2006/main">
   <p:cSld name="Slide 6">
     <p:bg>
@@ -5601,7 +5566,29 @@
                 <a:ea typeface="Calibri" pitchFamily="34" charset="-122"/>
                 <a:cs typeface="Calibri" pitchFamily="34" charset="-120"/>
               </a:rPr>
-              <a:t>Heatmap – velocita_kmh media per giorno_sett × ora_intera</a:t>
+              <a:t>Heatmap – velocita_kmh media per </a:t>
+            </a:r>
+            <a:r>
+              <a:rPr lang="en-US" sz="1300" i="1" dirty="0" err="1">
+                <a:solidFill>
+                  <a:srgbClr val="B0BEC5"/>
+                </a:solidFill>
+                <a:latin typeface="Calibri" pitchFamily="34" charset="0"/>
+                <a:ea typeface="Calibri" pitchFamily="34" charset="-122"/>
+                <a:cs typeface="Calibri" pitchFamily="34" charset="-120"/>
+              </a:rPr>
+              <a:t>giorno</a:t>
+            </a:r>
+            <a:r>
+              <a:rPr lang="en-US" sz="1300" i="1" dirty="0">
+                <a:solidFill>
+                  <a:srgbClr val="B0BEC5"/>
+                </a:solidFill>
+                <a:latin typeface="Calibri" pitchFamily="34" charset="0"/>
+                <a:ea typeface="Calibri" pitchFamily="34" charset="-122"/>
+                <a:cs typeface="Calibri" pitchFamily="34" charset="-120"/>
+              </a:rPr>
+              <a:t> × ora</a:t>
             </a:r>
             <a:endParaRPr lang="en-US" sz="1300" dirty="0"/>
           </a:p>
@@ -5678,6 +5665,36 @@
           </a:p>
         </p:txBody>
       </p:sp>
+      <p:pic>
+        <p:nvPicPr>
+          <p:cNvPr id="12" name="Immagine 11">
+            <a:extLst>
+              <a:ext uri="{FF2B5EF4-FFF2-40B4-BE49-F238E27FC236}">
+                <a16:creationId xmlns:a16="http://schemas.microsoft.com/office/drawing/2014/main" id="{8F8FBDB0-6A36-CB34-BBFE-D20411E9CAD9}"/>
+              </a:ext>
+            </a:extLst>
+          </p:cNvPr>
+          <p:cNvPicPr>
+            <a:picLocks noChangeAspect="1"/>
+          </p:cNvPicPr>
+          <p:nvPr/>
+        </p:nvPicPr>
+        <p:blipFill>
+          <a:blip r:embed="rId3"/>
+          <a:stretch>
+            <a:fillRect/>
+          </a:stretch>
+        </p:blipFill>
+        <p:spPr>
+          <a:xfrm>
+            <a:off x="365759" y="1234440"/>
+            <a:ext cx="8494607" cy="3611880"/>
+          </a:xfrm>
+          <a:prstGeom prst="rect">
+            <a:avLst/>
+          </a:prstGeom>
+        </p:spPr>
+      </p:pic>
     </p:spTree>
   </p:cSld>
   <p:clrMapOvr>
@@ -5686,221 +5703,7 @@
 </p:sld>
 </file>
 
-<file path=ppt/slides/slide7.xml><?xml version="1.0" encoding="utf-8"?>
-<p:sld xmlns:a="http://schemas.openxmlformats.org/drawingml/2006/main" xmlns:r="http://schemas.openxmlformats.org/officeDocument/2006/relationships" xmlns:p="http://schemas.openxmlformats.org/presentationml/2006/main">
-  <p:cSld name="Slide 7">
-    <p:bg>
-      <p:bgPr>
-        <a:solidFill>
-          <a:srgbClr val="1A2744"/>
-        </a:solidFill>
-        <a:effectLst/>
-      </p:bgPr>
-    </p:bg>
-    <p:spTree>
-      <p:nvGrpSpPr>
-        <p:cNvPr id="1" name=""/>
-        <p:cNvGrpSpPr/>
-        <p:nvPr/>
-      </p:nvGrpSpPr>
-      <p:grpSpPr>
-        <a:xfrm>
-          <a:off x="0" y="0"/>
-          <a:ext cx="0" cy="0"/>
-          <a:chOff x="0" y="0"/>
-          <a:chExt cx="0" cy="0"/>
-        </a:xfrm>
-      </p:grpSpPr>
-      <p:sp>
-        <p:nvSpPr>
-          <p:cNvPr id="2" name="Shape 0"/>
-          <p:cNvSpPr/>
-          <p:nvPr/>
-        </p:nvSpPr>
-        <p:spPr>
-          <a:xfrm>
-            <a:off x="0" y="0"/>
-            <a:ext cx="164592" cy="5143500"/>
-          </a:xfrm>
-          <a:prstGeom prst="rect">
-            <a:avLst/>
-          </a:prstGeom>
-          <a:solidFill>
-            <a:srgbClr val="00B4D8"/>
-          </a:solidFill>
-          <a:ln w="12700">
-            <a:solidFill>
-              <a:srgbClr val="00B4D8"/>
-            </a:solidFill>
-            <a:prstDash val="solid"/>
-          </a:ln>
-        </p:spPr>
-        <p:txBody>
-          <a:bodyPr/>
-          <a:lstStyle/>
-          <a:p>
-            <a:endParaRPr lang="it-CH"/>
-          </a:p>
-        </p:txBody>
-      </p:sp>
-      <p:sp>
-        <p:nvSpPr>
-          <p:cNvPr id="3" name="Text 1"/>
-          <p:cNvSpPr/>
-          <p:nvPr/>
-        </p:nvSpPr>
-        <p:spPr>
-          <a:xfrm>
-            <a:off x="365760" y="164592"/>
-            <a:ext cx="8412480" cy="548640"/>
-          </a:xfrm>
-          <a:prstGeom prst="rect">
-            <a:avLst/>
-          </a:prstGeom>
-          <a:noFill/>
-          <a:ln/>
-        </p:spPr>
-        <p:txBody>
-          <a:bodyPr wrap="square" lIns="0" tIns="0" rIns="0" bIns="0" rtlCol="0" anchor="ctr"/>
-          <a:lstStyle/>
-          <a:p>
-            <a:pPr marL="0" indent="0">
-              <a:buNone/>
-            </a:pPr>
-            <a:r>
-              <a:rPr lang="en-US" sz="2200" b="1" dirty="0">
-                <a:solidFill>
-                  <a:srgbClr val="00B4D8"/>
-                </a:solidFill>
-                <a:latin typeface="Calibri" pitchFamily="34" charset="0"/>
-                <a:ea typeface="Calibri" pitchFamily="34" charset="-122"/>
-                <a:cs typeface="Calibri" pitchFamily="34" charset="-120"/>
-              </a:rPr>
-              <a:t>Correlazione V50 – V85 per Postazione</a:t>
-            </a:r>
-            <a:endParaRPr lang="en-US" sz="2200" dirty="0"/>
-          </a:p>
-        </p:txBody>
-      </p:sp>
-      <p:sp>
-        <p:nvSpPr>
-          <p:cNvPr id="4" name="Text 2"/>
-          <p:cNvSpPr/>
-          <p:nvPr/>
-        </p:nvSpPr>
-        <p:spPr>
-          <a:xfrm>
-            <a:off x="365760" y="804672"/>
-            <a:ext cx="8412480" cy="320040"/>
-          </a:xfrm>
-          <a:prstGeom prst="rect">
-            <a:avLst/>
-          </a:prstGeom>
-          <a:noFill/>
-          <a:ln/>
-        </p:spPr>
-        <p:txBody>
-          <a:bodyPr wrap="square" lIns="0" tIns="0" rIns="0" bIns="0" rtlCol="0" anchor="ctr"/>
-          <a:lstStyle/>
-          <a:p>
-            <a:pPr marL="0" indent="0">
-              <a:buNone/>
-            </a:pPr>
-            <a:r>
-              <a:rPr lang="en-US" sz="1300" i="1" dirty="0">
-                <a:solidFill>
-                  <a:srgbClr val="B0BEC5"/>
-                </a:solidFill>
-                <a:latin typeface="Calibri" pitchFamily="34" charset="0"/>
-                <a:ea typeface="Calibri" pitchFamily="34" charset="-122"/>
-                <a:cs typeface="Calibri" pitchFamily="34" charset="-120"/>
-              </a:rPr>
-              <a:t>Scatter – v50_kmh vs v85_kmh, colorato per zona_limite</a:t>
-            </a:r>
-            <a:endParaRPr lang="en-US" sz="1300" dirty="0"/>
-          </a:p>
-        </p:txBody>
-      </p:sp>
-      <p:sp>
-        <p:nvSpPr>
-          <p:cNvPr id="5" name="Shape 3"/>
-          <p:cNvSpPr/>
-          <p:nvPr/>
-        </p:nvSpPr>
-        <p:spPr>
-          <a:xfrm>
-            <a:off x="365760" y="1234440"/>
-            <a:ext cx="8503920" cy="3611880"/>
-          </a:xfrm>
-          <a:prstGeom prst="rect">
-            <a:avLst/>
-          </a:prstGeom>
-          <a:solidFill>
-            <a:srgbClr val="1E3057"/>
-          </a:solidFill>
-          <a:ln w="12700">
-            <a:solidFill>
-              <a:srgbClr val="2A4580"/>
-            </a:solidFill>
-            <a:prstDash val="solid"/>
-          </a:ln>
-        </p:spPr>
-        <p:txBody>
-          <a:bodyPr/>
-          <a:lstStyle/>
-          <a:p>
-            <a:endParaRPr lang="it-CH"/>
-          </a:p>
-        </p:txBody>
-      </p:sp>
-      <p:sp>
-        <p:nvSpPr>
-          <p:cNvPr id="6" name="Text 4"/>
-          <p:cNvSpPr/>
-          <p:nvPr/>
-        </p:nvSpPr>
-        <p:spPr>
-          <a:xfrm>
-            <a:off x="365760" y="1234440"/>
-            <a:ext cx="8503920" cy="3611880"/>
-          </a:xfrm>
-          <a:prstGeom prst="rect">
-            <a:avLst/>
-          </a:prstGeom>
-          <a:noFill/>
-          <a:ln/>
-        </p:spPr>
-        <p:txBody>
-          <a:bodyPr wrap="square" lIns="0" tIns="0" rIns="0" bIns="0" rtlCol="0" anchor="ctr"/>
-          <a:lstStyle/>
-          <a:p>
-            <a:pPr marL="0" indent="0" algn="ctr">
-              <a:buNone/>
-            </a:pPr>
-            <a:r>
-              <a:rPr lang="en-US" sz="1400" dirty="0">
-                <a:solidFill>
-                  <a:srgbClr val="2A4580"/>
-                </a:solidFill>
-                <a:latin typeface="Calibri" pitchFamily="34" charset="0"/>
-                <a:ea typeface="Calibri" pitchFamily="34" charset="-122"/>
-                <a:cs typeface="Calibri" pitchFamily="34" charset="-120"/>
-              </a:rPr>
-              <a:t>[ grafico ]</a:t>
-            </a:r>
-            <a:endParaRPr lang="en-US" sz="1400" dirty="0"/>
-          </a:p>
-        </p:txBody>
-      </p:sp>
-    </p:spTree>
-  </p:cSld>
-  <p:clrMapOvr>
-    <a:masterClrMapping/>
-  </p:clrMapOvr>
-</p:sld>
-</file>
-
-<file path=ppt/slides/slide8.xml><?xml version="1.0" encoding="utf-8"?>
+<file path=ppt/slides/slide6.xml><?xml version="1.0" encoding="utf-8"?>
 <p:sld xmlns:a="http://schemas.openxmlformats.org/drawingml/2006/main" xmlns:r="http://schemas.openxmlformats.org/officeDocument/2006/relationships" xmlns:p="http://schemas.openxmlformats.org/presentationml/2006/main">
   <p:cSld name="Slide 8">
     <p:bg>
@@ -5998,53 +5801,14 @@
       </p:sp>
       <p:sp>
         <p:nvSpPr>
-          <p:cNvPr id="4" name="Text 2"/>
-          <p:cNvSpPr/>
-          <p:nvPr/>
-        </p:nvSpPr>
-        <p:spPr>
-          <a:xfrm>
-            <a:off x="365760" y="804672"/>
-            <a:ext cx="8412480" cy="320040"/>
-          </a:xfrm>
-          <a:prstGeom prst="rect">
-            <a:avLst/>
-          </a:prstGeom>
-          <a:noFill/>
-          <a:ln/>
-        </p:spPr>
-        <p:txBody>
-          <a:bodyPr wrap="square" lIns="0" tIns="0" rIns="0" bIns="0" rtlCol="0" anchor="ctr"/>
-          <a:lstStyle/>
-          <a:p>
-            <a:pPr marL="0" indent="0">
-              <a:buNone/>
-            </a:pPr>
-            <a:r>
-              <a:rPr lang="en-US" sz="1300" i="1" dirty="0">
-                <a:solidFill>
-                  <a:srgbClr val="B0BEC5"/>
-                </a:solidFill>
-                <a:latin typeface="Calibri" pitchFamily="34" charset="0"/>
-                <a:ea typeface="Calibri" pitchFamily="34" charset="-122"/>
-                <a:cs typeface="Calibri" pitchFamily="34" charset="-120"/>
-              </a:rPr>
-              <a:t>Mappa interattiva · Trend temporale · Clustering · Correlazione meteo</a:t>
-            </a:r>
-            <a:endParaRPr lang="en-US" sz="1300" dirty="0"/>
-          </a:p>
-        </p:txBody>
-      </p:sp>
-      <p:sp>
-        <p:nvSpPr>
           <p:cNvPr id="5" name="Shape 3"/>
           <p:cNvSpPr/>
           <p:nvPr/>
         </p:nvSpPr>
         <p:spPr>
           <a:xfrm>
-            <a:off x="365760" y="1234440"/>
-            <a:ext cx="8503920" cy="3611880"/>
+            <a:off x="365760" y="838830"/>
+            <a:ext cx="8503920" cy="4007490"/>
           </a:xfrm>
           <a:prstGeom prst="rect">
             <a:avLst/>
@@ -6091,18 +5855,285 @@
             <a:pPr marL="0" indent="0" algn="ctr">
               <a:buNone/>
             </a:pPr>
-            <a:r>
-              <a:rPr lang="en-US" sz="1400" dirty="0">
-                <a:solidFill>
-                  <a:srgbClr val="2A4580"/>
-                </a:solidFill>
-                <a:latin typeface="Calibri" pitchFamily="34" charset="0"/>
-                <a:ea typeface="Calibri" pitchFamily="34" charset="-122"/>
-                <a:cs typeface="Calibri" pitchFamily="34" charset="-120"/>
-              </a:rPr>
-              <a:t>[ grafico ]</a:t>
-            </a:r>
             <a:endParaRPr lang="en-US" sz="1400" dirty="0"/>
+          </a:p>
+        </p:txBody>
+      </p:sp>
+      <p:sp>
+        <p:nvSpPr>
+          <p:cNvPr id="4" name="Text 2"/>
+          <p:cNvSpPr/>
+          <p:nvPr/>
+        </p:nvSpPr>
+        <p:spPr>
+          <a:xfrm>
+            <a:off x="687688" y="958740"/>
+            <a:ext cx="8181991" cy="3673715"/>
+          </a:xfrm>
+          <a:prstGeom prst="rect">
+            <a:avLst/>
+          </a:prstGeom>
+          <a:noFill/>
+          <a:ln/>
+        </p:spPr>
+        <p:txBody>
+          <a:bodyPr wrap="square" lIns="0" tIns="0" rIns="0" bIns="0" rtlCol="0" anchor="ctr"/>
+          <a:lstStyle/>
+          <a:p>
+            <a:pPr marL="342900" indent="-342900">
+              <a:buFont typeface="+mj-lt"/>
+              <a:buAutoNum type="arabicPeriod"/>
+            </a:pPr>
+            <a:r>
+              <a:rPr lang="en-US" sz="2400" i="1" dirty="0">
+                <a:solidFill>
+                  <a:srgbClr val="B0BEC5"/>
+                </a:solidFill>
+                <a:latin typeface="Calibri" pitchFamily="34" charset="0"/>
+                <a:ea typeface="Calibri" pitchFamily="34" charset="-122"/>
+                <a:cs typeface="Calibri" pitchFamily="34" charset="-120"/>
+              </a:rPr>
+              <a:t>Mappa </a:t>
+            </a:r>
+            <a:r>
+              <a:rPr lang="en-US" sz="2400" i="1" dirty="0" err="1">
+                <a:solidFill>
+                  <a:srgbClr val="B0BEC5"/>
+                </a:solidFill>
+                <a:latin typeface="Calibri" pitchFamily="34" charset="0"/>
+                <a:ea typeface="Calibri" pitchFamily="34" charset="-122"/>
+                <a:cs typeface="Calibri" pitchFamily="34" charset="-120"/>
+              </a:rPr>
+              <a:t>interattiva</a:t>
+            </a:r>
+            <a:r>
+              <a:rPr lang="en-US" sz="2400" i="1" dirty="0">
+                <a:solidFill>
+                  <a:srgbClr val="B0BEC5"/>
+                </a:solidFill>
+                <a:latin typeface="Calibri" pitchFamily="34" charset="0"/>
+                <a:ea typeface="Calibri" pitchFamily="34" charset="-122"/>
+                <a:cs typeface="Calibri" pitchFamily="34" charset="-120"/>
+              </a:rPr>
+              <a:t> </a:t>
+            </a:r>
+          </a:p>
+          <a:p>
+            <a:pPr marL="342900" indent="-342900">
+              <a:buFont typeface="+mj-lt"/>
+              <a:buAutoNum type="arabicPeriod"/>
+            </a:pPr>
+            <a:r>
+              <a:rPr lang="en-US" sz="2400" i="1" dirty="0">
+                <a:solidFill>
+                  <a:srgbClr val="B0BEC5"/>
+                </a:solidFill>
+                <a:latin typeface="Calibri" pitchFamily="34" charset="0"/>
+                <a:ea typeface="Calibri" pitchFamily="34" charset="-122"/>
+                <a:cs typeface="Calibri" pitchFamily="34" charset="-120"/>
+              </a:rPr>
+              <a:t>Trend </a:t>
+            </a:r>
+            <a:r>
+              <a:rPr lang="en-US" sz="2400" i="1" dirty="0" err="1">
+                <a:solidFill>
+                  <a:srgbClr val="B0BEC5"/>
+                </a:solidFill>
+                <a:latin typeface="Calibri" pitchFamily="34" charset="0"/>
+                <a:ea typeface="Calibri" pitchFamily="34" charset="-122"/>
+                <a:cs typeface="Calibri" pitchFamily="34" charset="-120"/>
+              </a:rPr>
+              <a:t>temporale</a:t>
+            </a:r>
+            <a:r>
+              <a:rPr lang="en-US" sz="2400" i="1" dirty="0">
+                <a:solidFill>
+                  <a:srgbClr val="B0BEC5"/>
+                </a:solidFill>
+                <a:latin typeface="Calibri" pitchFamily="34" charset="0"/>
+                <a:ea typeface="Calibri" pitchFamily="34" charset="-122"/>
+                <a:cs typeface="Calibri" pitchFamily="34" charset="-120"/>
+              </a:rPr>
+              <a:t> </a:t>
+            </a:r>
+          </a:p>
+          <a:p>
+            <a:pPr marL="342900" indent="-342900">
+              <a:buFont typeface="+mj-lt"/>
+              <a:buAutoNum type="arabicPeriod"/>
+            </a:pPr>
+            <a:r>
+              <a:rPr lang="en-US" sz="2400" i="1" dirty="0" err="1">
+                <a:solidFill>
+                  <a:srgbClr val="B0BEC5"/>
+                </a:solidFill>
+                <a:latin typeface="Calibri" pitchFamily="34" charset="0"/>
+                <a:ea typeface="Calibri" pitchFamily="34" charset="-122"/>
+                <a:cs typeface="Calibri" pitchFamily="34" charset="-120"/>
+              </a:rPr>
+              <a:t>Correlazione</a:t>
+            </a:r>
+            <a:r>
+              <a:rPr lang="en-US" sz="2400" i="1" dirty="0">
+                <a:solidFill>
+                  <a:srgbClr val="B0BEC5"/>
+                </a:solidFill>
+                <a:latin typeface="Calibri" pitchFamily="34" charset="0"/>
+                <a:ea typeface="Calibri" pitchFamily="34" charset="-122"/>
+                <a:cs typeface="Calibri" pitchFamily="34" charset="-120"/>
+              </a:rPr>
+              <a:t> </a:t>
+            </a:r>
+            <a:r>
+              <a:rPr lang="en-US" sz="2400" i="1" dirty="0" err="1">
+                <a:solidFill>
+                  <a:srgbClr val="B0BEC5"/>
+                </a:solidFill>
+                <a:latin typeface="Calibri" pitchFamily="34" charset="0"/>
+                <a:ea typeface="Calibri" pitchFamily="34" charset="-122"/>
+                <a:cs typeface="Calibri" pitchFamily="34" charset="-120"/>
+              </a:rPr>
+              <a:t>meteo</a:t>
+            </a:r>
+            <a:r>
+              <a:rPr lang="en-US" sz="2400" i="1" dirty="0">
+                <a:solidFill>
+                  <a:srgbClr val="B0BEC5"/>
+                </a:solidFill>
+                <a:latin typeface="Calibri" pitchFamily="34" charset="0"/>
+                <a:ea typeface="Calibri" pitchFamily="34" charset="-122"/>
+                <a:cs typeface="Calibri" pitchFamily="34" charset="-120"/>
+              </a:rPr>
+              <a:t> </a:t>
+            </a:r>
+          </a:p>
+          <a:p>
+            <a:pPr marL="342900" indent="-342900">
+              <a:buFont typeface="+mj-lt"/>
+              <a:buAutoNum type="arabicPeriod"/>
+            </a:pPr>
+            <a:r>
+              <a:rPr lang="en-US" sz="2400" i="1" dirty="0" err="1">
+                <a:solidFill>
+                  <a:srgbClr val="B0BEC5"/>
+                </a:solidFill>
+                <a:latin typeface="Calibri" pitchFamily="34" charset="0"/>
+                <a:ea typeface="Calibri" pitchFamily="34" charset="-122"/>
+                <a:cs typeface="Calibri" pitchFamily="34" charset="-120"/>
+              </a:rPr>
+              <a:t>Differenza</a:t>
+            </a:r>
+            <a:r>
+              <a:rPr lang="en-US" sz="2400" i="1" dirty="0">
+                <a:solidFill>
+                  <a:srgbClr val="B0BEC5"/>
+                </a:solidFill>
+                <a:latin typeface="Calibri" pitchFamily="34" charset="0"/>
+                <a:ea typeface="Calibri" pitchFamily="34" charset="-122"/>
+                <a:cs typeface="Calibri" pitchFamily="34" charset="-120"/>
+              </a:rPr>
+              <a:t> </a:t>
+            </a:r>
+            <a:r>
+              <a:rPr lang="en-US" sz="2400" i="1" dirty="0" err="1">
+                <a:solidFill>
+                  <a:srgbClr val="B0BEC5"/>
+                </a:solidFill>
+                <a:latin typeface="Calibri" pitchFamily="34" charset="0"/>
+                <a:ea typeface="Calibri" pitchFamily="34" charset="-122"/>
+                <a:cs typeface="Calibri" pitchFamily="34" charset="-120"/>
+              </a:rPr>
+              <a:t>velocità</a:t>
+            </a:r>
+            <a:r>
+              <a:rPr lang="en-US" sz="2400" i="1" dirty="0">
+                <a:solidFill>
+                  <a:srgbClr val="B0BEC5"/>
+                </a:solidFill>
+                <a:latin typeface="Calibri" pitchFamily="34" charset="0"/>
+                <a:ea typeface="Calibri" pitchFamily="34" charset="-122"/>
+                <a:cs typeface="Calibri" pitchFamily="34" charset="-120"/>
+              </a:rPr>
+              <a:t> – </a:t>
+            </a:r>
+            <a:r>
+              <a:rPr lang="en-US" sz="2400" i="1" dirty="0" err="1">
+                <a:solidFill>
+                  <a:srgbClr val="B0BEC5"/>
+                </a:solidFill>
+                <a:latin typeface="Calibri" pitchFamily="34" charset="0"/>
+                <a:ea typeface="Calibri" pitchFamily="34" charset="-122"/>
+                <a:cs typeface="Calibri" pitchFamily="34" charset="-120"/>
+              </a:rPr>
+              <a:t>tipo</a:t>
+            </a:r>
+            <a:r>
+              <a:rPr lang="en-US" sz="2400" i="1" dirty="0">
+                <a:solidFill>
+                  <a:srgbClr val="B0BEC5"/>
+                </a:solidFill>
+                <a:latin typeface="Calibri" pitchFamily="34" charset="0"/>
+                <a:ea typeface="Calibri" pitchFamily="34" charset="-122"/>
+                <a:cs typeface="Calibri" pitchFamily="34" charset="-120"/>
+              </a:rPr>
+              <a:t> di </a:t>
+            </a:r>
+            <a:r>
+              <a:rPr lang="en-US" sz="2400" i="1" dirty="0" err="1">
+                <a:solidFill>
+                  <a:srgbClr val="B0BEC5"/>
+                </a:solidFill>
+                <a:latin typeface="Calibri" pitchFamily="34" charset="0"/>
+                <a:ea typeface="Calibri" pitchFamily="34" charset="-122"/>
+                <a:cs typeface="Calibri" pitchFamily="34" charset="-120"/>
+              </a:rPr>
+              <a:t>veicolo</a:t>
+            </a:r>
+            <a:r>
+              <a:rPr lang="en-US" sz="2400" i="1" dirty="0">
+                <a:solidFill>
+                  <a:srgbClr val="B0BEC5"/>
+                </a:solidFill>
+                <a:latin typeface="Calibri" pitchFamily="34" charset="0"/>
+                <a:ea typeface="Calibri" pitchFamily="34" charset="-122"/>
+                <a:cs typeface="Calibri" pitchFamily="34" charset="-120"/>
+              </a:rPr>
+              <a:t> (moto/camion)</a:t>
+            </a:r>
+          </a:p>
+          <a:p>
+            <a:pPr marL="342900" indent="-342900">
+              <a:buFont typeface="+mj-lt"/>
+              <a:buAutoNum type="arabicPeriod"/>
+            </a:pPr>
+            <a:r>
+              <a:rPr lang="en-US" sz="2400" i="1" dirty="0">
+                <a:solidFill>
+                  <a:srgbClr val="B0BEC5"/>
+                </a:solidFill>
+                <a:latin typeface="Calibri" pitchFamily="34" charset="0"/>
+                <a:ea typeface="Calibri" pitchFamily="34" charset="-122"/>
+                <a:cs typeface="Calibri" pitchFamily="34" charset="-120"/>
+              </a:rPr>
+              <a:t>…</a:t>
+            </a:r>
+          </a:p>
+          <a:p>
+            <a:pPr marL="342900" indent="-342900">
+              <a:buFont typeface="+mj-lt"/>
+              <a:buAutoNum type="arabicPeriod"/>
+            </a:pPr>
+            <a:r>
+              <a:rPr lang="en-US" sz="2400" i="1" dirty="0">
+                <a:solidFill>
+                  <a:srgbClr val="B0BEC5"/>
+                </a:solidFill>
+                <a:latin typeface="Calibri" pitchFamily="34" charset="0"/>
+                <a:ea typeface="Calibri" pitchFamily="34" charset="-122"/>
+                <a:cs typeface="Calibri" pitchFamily="34" charset="-120"/>
+              </a:rPr>
+              <a:t>Consigli?</a:t>
+            </a:r>
           </a:p>
         </p:txBody>
       </p:sp>
@@ -6114,7 +6145,7 @@
 </p:sld>
 </file>
 
-<file path=ppt/slides/slide9.xml><?xml version="1.0" encoding="utf-8"?>
+<file path=ppt/slides/slide7.xml><?xml version="1.0" encoding="utf-8"?>
 <p:sld xmlns:a="http://schemas.openxmlformats.org/drawingml/2006/main" xmlns:r="http://schemas.openxmlformats.org/officeDocument/2006/relationships" xmlns:p="http://schemas.openxmlformats.org/presentationml/2006/main">
   <p:cSld name="Slide 9">
     <p:bg>
@@ -6266,18 +6297,348 @@
             <a:pPr marL="0" indent="0" algn="ctr">
               <a:buNone/>
             </a:pPr>
-            <a:r>
-              <a:rPr lang="en-US" sz="1400" dirty="0">
-                <a:solidFill>
-                  <a:srgbClr val="2A4580"/>
-                </a:solidFill>
-                <a:latin typeface="Calibri" pitchFamily="34" charset="0"/>
-                <a:ea typeface="Calibri" pitchFamily="34" charset="-122"/>
-                <a:cs typeface="Calibri" pitchFamily="34" charset="-120"/>
-              </a:rPr>
-              <a:t>[ grafico ]</a:t>
-            </a:r>
             <a:endParaRPr lang="en-US" sz="1400" dirty="0"/>
+          </a:p>
+        </p:txBody>
+      </p:sp>
+      <p:sp>
+        <p:nvSpPr>
+          <p:cNvPr id="6" name="Text 2">
+            <a:extLst>
+              <a:ext uri="{FF2B5EF4-FFF2-40B4-BE49-F238E27FC236}">
+                <a16:creationId xmlns:a16="http://schemas.microsoft.com/office/drawing/2014/main" id="{6A5EC037-901C-9B09-8D52-3D7B268D9A64}"/>
+              </a:ext>
+            </a:extLst>
+          </p:cNvPr>
+          <p:cNvSpPr/>
+          <p:nvPr/>
+        </p:nvSpPr>
+        <p:spPr>
+          <a:xfrm>
+            <a:off x="526724" y="1234440"/>
+            <a:ext cx="8181991" cy="3673715"/>
+          </a:xfrm>
+          <a:prstGeom prst="rect">
+            <a:avLst/>
+          </a:prstGeom>
+          <a:noFill/>
+          <a:ln/>
+        </p:spPr>
+        <p:txBody>
+          <a:bodyPr wrap="square" lIns="0" tIns="0" rIns="0" bIns="0" rtlCol="0" anchor="ctr"/>
+          <a:lstStyle/>
+          <a:p>
+            <a:r>
+              <a:rPr lang="en-US" sz="2400" i="1" dirty="0">
+                <a:solidFill>
+                  <a:srgbClr val="B0BEC5"/>
+                </a:solidFill>
+                <a:latin typeface="Calibri" pitchFamily="34" charset="0"/>
+                <a:ea typeface="Calibri" pitchFamily="34" charset="-122"/>
+                <a:cs typeface="Calibri" pitchFamily="34" charset="-120"/>
+              </a:rPr>
+              <a:t>I Dati: </a:t>
+            </a:r>
+            <a:r>
+              <a:rPr lang="en-US" sz="2400" i="1" dirty="0" err="1">
+                <a:solidFill>
+                  <a:srgbClr val="B0BEC5"/>
+                </a:solidFill>
+                <a:latin typeface="Calibri" pitchFamily="34" charset="0"/>
+                <a:ea typeface="Calibri" pitchFamily="34" charset="-122"/>
+                <a:cs typeface="Calibri" pitchFamily="34" charset="-120"/>
+              </a:rPr>
+              <a:t>Informazioni</a:t>
+            </a:r>
+            <a:r>
+              <a:rPr lang="en-US" sz="2400" i="1" dirty="0">
+                <a:solidFill>
+                  <a:srgbClr val="B0BEC5"/>
+                </a:solidFill>
+                <a:latin typeface="Calibri" pitchFamily="34" charset="0"/>
+                <a:ea typeface="Calibri" pitchFamily="34" charset="-122"/>
+                <a:cs typeface="Calibri" pitchFamily="34" charset="-120"/>
+              </a:rPr>
+              <a:t> </a:t>
+            </a:r>
+            <a:r>
+              <a:rPr lang="en-US" sz="2400" i="1" dirty="0" err="1">
+                <a:solidFill>
+                  <a:srgbClr val="B0BEC5"/>
+                </a:solidFill>
+                <a:latin typeface="Calibri" pitchFamily="34" charset="0"/>
+                <a:ea typeface="Calibri" pitchFamily="34" charset="-122"/>
+                <a:cs typeface="Calibri" pitchFamily="34" charset="-120"/>
+              </a:rPr>
+              <a:t>reali</a:t>
+            </a:r>
+            <a:r>
+              <a:rPr lang="en-US" sz="2400" i="1" dirty="0">
+                <a:solidFill>
+                  <a:srgbClr val="B0BEC5"/>
+                </a:solidFill>
+                <a:latin typeface="Calibri" pitchFamily="34" charset="0"/>
+                <a:ea typeface="Calibri" pitchFamily="34" charset="-122"/>
+                <a:cs typeface="Calibri" pitchFamily="34" charset="-120"/>
+              </a:rPr>
+              <a:t> e </a:t>
+            </a:r>
+            <a:r>
+              <a:rPr lang="en-US" sz="2400" i="1" dirty="0" err="1">
+                <a:solidFill>
+                  <a:srgbClr val="B0BEC5"/>
+                </a:solidFill>
+                <a:latin typeface="Calibri" pitchFamily="34" charset="0"/>
+                <a:ea typeface="Calibri" pitchFamily="34" charset="-122"/>
+                <a:cs typeface="Calibri" pitchFamily="34" charset="-120"/>
+              </a:rPr>
+              <a:t>locali</a:t>
+            </a:r>
+            <a:r>
+              <a:rPr lang="en-US" sz="2400" i="1" dirty="0">
+                <a:solidFill>
+                  <a:srgbClr val="B0BEC5"/>
+                </a:solidFill>
+                <a:latin typeface="Calibri" pitchFamily="34" charset="0"/>
+                <a:ea typeface="Calibri" pitchFamily="34" charset="-122"/>
+                <a:cs typeface="Calibri" pitchFamily="34" charset="-120"/>
+              </a:rPr>
+              <a:t> </a:t>
+            </a:r>
+            <a:r>
+              <a:rPr lang="en-US" sz="2400" i="1" dirty="0" err="1">
+                <a:solidFill>
+                  <a:srgbClr val="B0BEC5"/>
+                </a:solidFill>
+                <a:latin typeface="Calibri" pitchFamily="34" charset="0"/>
+                <a:ea typeface="Calibri" pitchFamily="34" charset="-122"/>
+                <a:cs typeface="Calibri" pitchFamily="34" charset="-120"/>
+              </a:rPr>
+              <a:t>sul</a:t>
+            </a:r>
+            <a:r>
+              <a:rPr lang="en-US" sz="2400" i="1" dirty="0">
+                <a:solidFill>
+                  <a:srgbClr val="B0BEC5"/>
+                </a:solidFill>
+                <a:latin typeface="Calibri" pitchFamily="34" charset="0"/>
+                <a:ea typeface="Calibri" pitchFamily="34" charset="-122"/>
+                <a:cs typeface="Calibri" pitchFamily="34" charset="-120"/>
+              </a:rPr>
+              <a:t> </a:t>
+            </a:r>
+            <a:r>
+              <a:rPr lang="en-US" sz="2400" i="1" dirty="0" err="1">
+                <a:solidFill>
+                  <a:srgbClr val="B0BEC5"/>
+                </a:solidFill>
+                <a:latin typeface="Calibri" pitchFamily="34" charset="0"/>
+                <a:ea typeface="Calibri" pitchFamily="34" charset="-122"/>
+                <a:cs typeface="Calibri" pitchFamily="34" charset="-120"/>
+              </a:rPr>
+              <a:t>traffico</a:t>
+            </a:r>
+            <a:r>
+              <a:rPr lang="en-US" sz="2400" i="1" dirty="0">
+                <a:solidFill>
+                  <a:srgbClr val="B0BEC5"/>
+                </a:solidFill>
+                <a:latin typeface="Calibri" pitchFamily="34" charset="0"/>
+                <a:ea typeface="Calibri" pitchFamily="34" charset="-122"/>
+                <a:cs typeface="Calibri" pitchFamily="34" charset="-120"/>
+              </a:rPr>
+              <a:t> </a:t>
+            </a:r>
+            <a:r>
+              <a:rPr lang="en-US" sz="2400" i="1" dirty="0" err="1">
+                <a:solidFill>
+                  <a:srgbClr val="B0BEC5"/>
+                </a:solidFill>
+                <a:latin typeface="Calibri" pitchFamily="34" charset="0"/>
+                <a:ea typeface="Calibri" pitchFamily="34" charset="-122"/>
+                <a:cs typeface="Calibri" pitchFamily="34" charset="-120"/>
+              </a:rPr>
+              <a:t>svizzero</a:t>
+            </a:r>
+            <a:r>
+              <a:rPr lang="en-US" sz="2400" i="1" dirty="0">
+                <a:solidFill>
+                  <a:srgbClr val="B0BEC5"/>
+                </a:solidFill>
+                <a:latin typeface="Calibri" pitchFamily="34" charset="0"/>
+                <a:ea typeface="Calibri" pitchFamily="34" charset="-122"/>
+                <a:cs typeface="Calibri" pitchFamily="34" charset="-120"/>
+              </a:rPr>
+              <a:t>.</a:t>
+            </a:r>
+          </a:p>
+          <a:p>
+            <a:r>
+              <a:rPr lang="en-US" sz="2400" i="1" dirty="0" err="1">
+                <a:solidFill>
+                  <a:srgbClr val="B0BEC5"/>
+                </a:solidFill>
+                <a:latin typeface="Calibri" pitchFamily="34" charset="0"/>
+                <a:ea typeface="Calibri" pitchFamily="34" charset="-122"/>
+                <a:cs typeface="Calibri" pitchFamily="34" charset="-120"/>
+              </a:rPr>
+              <a:t>L'Obiettivo</a:t>
+            </a:r>
+            <a:r>
+              <a:rPr lang="en-US" sz="2400" i="1" dirty="0">
+                <a:solidFill>
+                  <a:srgbClr val="B0BEC5"/>
+                </a:solidFill>
+                <a:latin typeface="Calibri" pitchFamily="34" charset="0"/>
+                <a:ea typeface="Calibri" pitchFamily="34" charset="-122"/>
+                <a:cs typeface="Calibri" pitchFamily="34" charset="-120"/>
+              </a:rPr>
+              <a:t>: </a:t>
+            </a:r>
+            <a:r>
+              <a:rPr lang="en-US" sz="2400" i="1" dirty="0" err="1">
+                <a:solidFill>
+                  <a:srgbClr val="B0BEC5"/>
+                </a:solidFill>
+                <a:latin typeface="Calibri" pitchFamily="34" charset="0"/>
+                <a:ea typeface="Calibri" pitchFamily="34" charset="-122"/>
+                <a:cs typeface="Calibri" pitchFamily="34" charset="-120"/>
+              </a:rPr>
+              <a:t>Promuovere</a:t>
+            </a:r>
+            <a:r>
+              <a:rPr lang="en-US" sz="2400" i="1" dirty="0">
+                <a:solidFill>
+                  <a:srgbClr val="B0BEC5"/>
+                </a:solidFill>
+                <a:latin typeface="Calibri" pitchFamily="34" charset="0"/>
+                <a:ea typeface="Calibri" pitchFamily="34" charset="-122"/>
+                <a:cs typeface="Calibri" pitchFamily="34" charset="-120"/>
+              </a:rPr>
+              <a:t> la </a:t>
+            </a:r>
+            <a:r>
+              <a:rPr lang="en-US" sz="2400" i="1" dirty="0" err="1">
+                <a:solidFill>
+                  <a:srgbClr val="B0BEC5"/>
+                </a:solidFill>
+                <a:latin typeface="Calibri" pitchFamily="34" charset="0"/>
+                <a:ea typeface="Calibri" pitchFamily="34" charset="-122"/>
+                <a:cs typeface="Calibri" pitchFamily="34" charset="-120"/>
+              </a:rPr>
+              <a:t>sicurezza</a:t>
+            </a:r>
+            <a:r>
+              <a:rPr lang="en-US" sz="2400" i="1" dirty="0">
+                <a:solidFill>
+                  <a:srgbClr val="B0BEC5"/>
+                </a:solidFill>
+                <a:latin typeface="Calibri" pitchFamily="34" charset="0"/>
+                <a:ea typeface="Calibri" pitchFamily="34" charset="-122"/>
+                <a:cs typeface="Calibri" pitchFamily="34" charset="-120"/>
+              </a:rPr>
+              <a:t> </a:t>
+            </a:r>
+            <a:r>
+              <a:rPr lang="en-US" sz="2400" i="1" dirty="0" err="1">
+                <a:solidFill>
+                  <a:srgbClr val="B0BEC5"/>
+                </a:solidFill>
+                <a:latin typeface="Calibri" pitchFamily="34" charset="0"/>
+                <a:ea typeface="Calibri" pitchFamily="34" charset="-122"/>
+                <a:cs typeface="Calibri" pitchFamily="34" charset="-120"/>
+              </a:rPr>
+              <a:t>stradale</a:t>
+            </a:r>
+            <a:r>
+              <a:rPr lang="en-US" sz="2400" i="1" dirty="0">
+                <a:solidFill>
+                  <a:srgbClr val="B0BEC5"/>
+                </a:solidFill>
+                <a:latin typeface="Calibri" pitchFamily="34" charset="0"/>
+                <a:ea typeface="Calibri" pitchFamily="34" charset="-122"/>
+                <a:cs typeface="Calibri" pitchFamily="34" charset="-120"/>
+              </a:rPr>
+              <a:t> </a:t>
+            </a:r>
+            <a:r>
+              <a:rPr lang="en-US" sz="2400" i="1" dirty="0" err="1">
+                <a:solidFill>
+                  <a:srgbClr val="B0BEC5"/>
+                </a:solidFill>
+                <a:latin typeface="Calibri" pitchFamily="34" charset="0"/>
+                <a:ea typeface="Calibri" pitchFamily="34" charset="-122"/>
+                <a:cs typeface="Calibri" pitchFamily="34" charset="-120"/>
+              </a:rPr>
+              <a:t>urbana</a:t>
+            </a:r>
+            <a:r>
+              <a:rPr lang="en-US" sz="2400" i="1" dirty="0">
+                <a:solidFill>
+                  <a:srgbClr val="B0BEC5"/>
+                </a:solidFill>
+                <a:latin typeface="Calibri" pitchFamily="34" charset="0"/>
+                <a:ea typeface="Calibri" pitchFamily="34" charset="-122"/>
+                <a:cs typeface="Calibri" pitchFamily="34" charset="-120"/>
+              </a:rPr>
+              <a:t>.</a:t>
+            </a:r>
+          </a:p>
+          <a:p>
+            <a:endParaRPr lang="en-US" sz="2400" i="1" dirty="0">
+              <a:solidFill>
+                <a:srgbClr val="B0BEC5"/>
+              </a:solidFill>
+              <a:latin typeface="Calibri" pitchFamily="34" charset="0"/>
+              <a:ea typeface="Calibri" pitchFamily="34" charset="-122"/>
+              <a:cs typeface="Calibri" pitchFamily="34" charset="-120"/>
+            </a:endParaRPr>
+          </a:p>
+          <a:p>
+            <a:r>
+              <a:rPr lang="en-US" sz="2400" i="1" dirty="0" err="1">
+                <a:solidFill>
+                  <a:srgbClr val="B0BEC5"/>
+                </a:solidFill>
+                <a:latin typeface="Calibri" pitchFamily="34" charset="0"/>
+                <a:ea typeface="Calibri" pitchFamily="34" charset="-122"/>
+                <a:cs typeface="Calibri" pitchFamily="34" charset="-120"/>
+              </a:rPr>
+              <a:t>Prossimo</a:t>
+            </a:r>
+            <a:r>
+              <a:rPr lang="en-US" sz="2400" i="1" dirty="0">
+                <a:solidFill>
+                  <a:srgbClr val="B0BEC5"/>
+                </a:solidFill>
+                <a:latin typeface="Calibri" pitchFamily="34" charset="0"/>
+                <a:ea typeface="Calibri" pitchFamily="34" charset="-122"/>
+                <a:cs typeface="Calibri" pitchFamily="34" charset="-120"/>
+              </a:rPr>
+              <a:t> step: </a:t>
+            </a:r>
+            <a:r>
+              <a:rPr lang="en-US" sz="2400" i="1" dirty="0" err="1">
+                <a:solidFill>
+                  <a:srgbClr val="B0BEC5"/>
+                </a:solidFill>
+                <a:latin typeface="Calibri" pitchFamily="34" charset="0"/>
+                <a:ea typeface="Calibri" pitchFamily="34" charset="-122"/>
+                <a:cs typeface="Calibri" pitchFamily="34" charset="-120"/>
+              </a:rPr>
+              <a:t>presentazione</a:t>
+            </a:r>
+            <a:r>
+              <a:rPr lang="en-US" sz="2400" i="1" dirty="0">
+                <a:solidFill>
+                  <a:srgbClr val="B0BEC5"/>
+                </a:solidFill>
+                <a:latin typeface="Calibri" pitchFamily="34" charset="0"/>
+                <a:ea typeface="Calibri" pitchFamily="34" charset="-122"/>
+                <a:cs typeface="Calibri" pitchFamily="34" charset="-120"/>
+              </a:rPr>
+              <a:t> intermedia.</a:t>
+            </a:r>
           </a:p>
         </p:txBody>
       </p:sp>

--- a/speed_monitoring.pptx
+++ b/speed_monitoring.pptx
@@ -539,6 +539,93 @@
           <a:bodyPr/>
           <a:lstStyle/>
           <a:p>
+            <a:r>
+              <a:rPr lang="en-US" dirty="0"/>
+              <a:t>zoom </a:t>
+            </a:r>
+            <a:r>
+              <a:rPr lang="en-US" dirty="0" err="1"/>
+              <a:t>sul</a:t>
+            </a:r>
+            <a:r>
+              <a:rPr lang="en-US" dirty="0"/>
+              <a:t> primo e </a:t>
+            </a:r>
+            <a:r>
+              <a:rPr lang="en-US" dirty="0" err="1"/>
+              <a:t>mostraer</a:t>
+            </a:r>
+            <a:r>
+              <a:rPr lang="en-US" dirty="0"/>
+              <a:t> </a:t>
+            </a:r>
+            <a:r>
+              <a:rPr lang="en-US" dirty="0" err="1"/>
+              <a:t>una</a:t>
+            </a:r>
+            <a:r>
+              <a:rPr lang="en-US" dirty="0"/>
+              <a:t> </a:t>
+            </a:r>
+            <a:r>
+              <a:rPr lang="en-US" dirty="0" err="1"/>
+              <a:t>distribuziobe</a:t>
+            </a:r>
+            <a:r>
+              <a:rPr lang="en-US" dirty="0"/>
+              <a:t> delle </a:t>
+            </a:r>
+            <a:r>
+              <a:rPr lang="en-US" dirty="0" err="1"/>
+              <a:t>velocit`MISURATE</a:t>
+            </a:r>
+            <a:endParaRPr lang="en-US" dirty="0"/>
+          </a:p>
+          <a:p>
+            <a:r>
+              <a:rPr lang="en-US" dirty="0" err="1"/>
+              <a:t>mostra</a:t>
+            </a:r>
+            <a:r>
+              <a:rPr lang="en-US" dirty="0"/>
+              <a:t> campana </a:t>
+            </a:r>
+            <a:r>
+              <a:rPr lang="en-US" dirty="0" err="1"/>
+              <a:t>velocita</a:t>
+            </a:r>
+            <a:r>
+              <a:rPr lang="en-US" dirty="0"/>
+              <a:t> con </a:t>
+            </a:r>
+            <a:r>
+              <a:rPr lang="en-US" dirty="0" err="1"/>
+              <a:t>rigfa</a:t>
+            </a:r>
+            <a:r>
+              <a:rPr lang="en-US" dirty="0"/>
+              <a:t> </a:t>
+            </a:r>
+            <a:r>
+              <a:rPr lang="en-US" dirty="0" err="1"/>
+              <a:t>verticale</a:t>
+            </a:r>
+            <a:r>
+              <a:rPr lang="en-US" dirty="0"/>
+              <a:t> con dove </a:t>
+            </a:r>
+            <a:r>
+              <a:rPr lang="en-US" dirty="0" err="1"/>
+              <a:t>inizia</a:t>
+            </a:r>
+            <a:r>
+              <a:rPr lang="en-US" dirty="0"/>
+              <a:t> la </a:t>
+            </a:r>
+            <a:r>
+              <a:rPr lang="en-US" dirty="0" err="1"/>
+              <a:t>infrazione</a:t>
+            </a:r>
             <a:endParaRPr lang="en-US" dirty="0"/>
           </a:p>
         </p:txBody>
@@ -623,6 +710,131 @@
           <a:bodyPr/>
           <a:lstStyle/>
           <a:p>
+            <a:r>
+              <a:rPr lang="en-US" dirty="0" err="1"/>
+              <a:t>strano</a:t>
+            </a:r>
+            <a:r>
+              <a:rPr lang="en-US" dirty="0"/>
+              <a:t> </a:t>
+            </a:r>
+            <a:r>
+              <a:rPr lang="en-US" dirty="0" err="1"/>
+              <a:t>che</a:t>
+            </a:r>
+            <a:r>
+              <a:rPr lang="en-US" dirty="0"/>
+              <a:t> </a:t>
+            </a:r>
+            <a:r>
+              <a:rPr lang="en-US" dirty="0" err="1"/>
+              <a:t>c'è</a:t>
+            </a:r>
+            <a:r>
+              <a:rPr lang="en-US" dirty="0"/>
+              <a:t> </a:t>
+            </a:r>
+            <a:r>
+              <a:rPr lang="en-US" dirty="0" err="1"/>
+              <a:t>più</a:t>
+            </a:r>
+            <a:r>
+              <a:rPr lang="en-US" dirty="0"/>
+              <a:t> </a:t>
+            </a:r>
+            <a:r>
+              <a:rPr lang="en-US" dirty="0" err="1"/>
+              <a:t>traffico</a:t>
+            </a:r>
+            <a:r>
+              <a:rPr lang="en-US" dirty="0"/>
+              <a:t> alle 15 rispetto alle 17</a:t>
+            </a:r>
+            <a:br>
+              <a:rPr lang="en-US" dirty="0"/>
+            </a:br>
+            <a:br>
+              <a:rPr lang="en-US" dirty="0"/>
+            </a:br>
+            <a:r>
+              <a:rPr lang="en-US" dirty="0"/>
+              <a:t>Di notte non </a:t>
+            </a:r>
+            <a:r>
+              <a:rPr lang="en-US" dirty="0" err="1"/>
+              <a:t>c'è</a:t>
+            </a:r>
+            <a:r>
+              <a:rPr lang="en-US" dirty="0"/>
+              <a:t> il radar </a:t>
+            </a:r>
+            <a:r>
+              <a:rPr lang="en-US" dirty="0" err="1"/>
+              <a:t>nella</a:t>
+            </a:r>
+            <a:r>
+              <a:rPr lang="en-US" dirty="0"/>
+              <a:t> </a:t>
+            </a:r>
+            <a:r>
+              <a:rPr lang="en-US" dirty="0" err="1"/>
+              <a:t>stradina</a:t>
+            </a:r>
+            <a:r>
+              <a:rPr lang="en-US" dirty="0"/>
+              <a:t> di </a:t>
+            </a:r>
+            <a:r>
+              <a:rPr lang="en-US" dirty="0" err="1"/>
+              <a:t>paese</a:t>
+            </a:r>
+            <a:r>
+              <a:rPr lang="en-US" dirty="0"/>
+              <a:t> ma </a:t>
+            </a:r>
+            <a:r>
+              <a:rPr lang="en-US" dirty="0" err="1"/>
+              <a:t>nelle</a:t>
+            </a:r>
+            <a:r>
+              <a:rPr lang="en-US" dirty="0"/>
+              <a:t> </a:t>
+            </a:r>
+            <a:r>
+              <a:rPr lang="en-US" dirty="0" err="1"/>
+              <a:t>strade</a:t>
+            </a:r>
+            <a:r>
+              <a:rPr lang="en-US" dirty="0"/>
+              <a:t> </a:t>
+            </a:r>
+            <a:r>
+              <a:rPr lang="en-US" dirty="0" err="1"/>
+              <a:t>veloci</a:t>
+            </a:r>
+            <a:r>
+              <a:rPr lang="en-US" dirty="0"/>
+              <a:t>?</a:t>
+            </a:r>
+            <a:br>
+              <a:rPr lang="en-US" dirty="0"/>
+            </a:br>
+            <a:r>
+              <a:rPr lang="en-US" dirty="0"/>
+              <a:t>Vedi se </a:t>
+            </a:r>
+            <a:r>
+              <a:rPr lang="en-US" dirty="0" err="1"/>
+              <a:t>è</a:t>
+            </a:r>
+            <a:r>
+              <a:rPr lang="en-US" dirty="0"/>
+              <a:t> </a:t>
+            </a:r>
+            <a:r>
+              <a:rPr lang="en-US" dirty="0" err="1"/>
+              <a:t>vero</a:t>
+            </a:r>
             <a:endParaRPr lang="en-US" dirty="0"/>
           </a:p>
         </p:txBody>
@@ -707,6 +919,29 @@
           <a:bodyPr/>
           <a:lstStyle/>
           <a:p>
+            <a:r>
+              <a:rPr lang="en-US" dirty="0" err="1"/>
+              <a:t>Presentazione</a:t>
+            </a:r>
+            <a:r>
+              <a:rPr lang="en-US" dirty="0"/>
+              <a:t> intermedia </a:t>
+            </a:r>
+            <a:r>
+              <a:rPr lang="en-US" dirty="0" err="1"/>
+              <a:t>gi?a</a:t>
+            </a:r>
+            <a:r>
+              <a:rPr lang="en-US" dirty="0"/>
+              <a:t> </a:t>
+            </a:r>
+            <a:r>
+              <a:rPr lang="en-US" dirty="0" err="1"/>
+              <a:t>gfat</a:t>
+            </a:r>
+            <a:br>
+              <a:rPr lang="en-US" dirty="0"/>
+            </a:br>
             <a:endParaRPr lang="en-US" dirty="0"/>
           </a:p>
         </p:txBody>

--- a/speed_monitoring.pptx
+++ b/speed_monitoring.pptx
@@ -5,16 +5,19 @@
     <p:sldMasterId id="2147483648" r:id="rId1"/>
   </p:sldMasterIdLst>
   <p:notesMasterIdLst>
-    <p:notesMasterId r:id="rId9"/>
+    <p:notesMasterId r:id="rId12"/>
   </p:notesMasterIdLst>
   <p:sldIdLst>
     <p:sldId id="256" r:id="rId2"/>
     <p:sldId id="257" r:id="rId3"/>
-    <p:sldId id="258" r:id="rId4"/>
-    <p:sldId id="260" r:id="rId5"/>
+    <p:sldId id="260" r:id="rId4"/>
+    <p:sldId id="265" r:id="rId5"/>
     <p:sldId id="261" r:id="rId6"/>
-    <p:sldId id="263" r:id="rId7"/>
-    <p:sldId id="264" r:id="rId8"/>
+    <p:sldId id="268" r:id="rId7"/>
+    <p:sldId id="266" r:id="rId8"/>
+    <p:sldId id="267" r:id="rId9"/>
+    <p:sldId id="263" r:id="rId10"/>
+    <p:sldId id="264" r:id="rId11"/>
   </p:sldIdLst>
   <p:sldSz cx="9144000" cy="5143500" type="screen16x9"/>
   <p:notesSz cx="5143500" cy="9144000"/>
@@ -327,6 +330,90 @@
 </p:notes>
 </file>
 
+<file path=ppt/notesSlides/notesSlide10.xml><?xml version="1.0" encoding="utf-8"?>
+<p:notes xmlns:a="http://schemas.openxmlformats.org/drawingml/2006/main" xmlns:r="http://schemas.openxmlformats.org/officeDocument/2006/relationships" xmlns:p="http://schemas.openxmlformats.org/presentationml/2006/main">
+  <p:cSld>
+    <p:spTree>
+      <p:nvGrpSpPr>
+        <p:cNvPr id="1" name=""/>
+        <p:cNvGrpSpPr/>
+        <p:nvPr/>
+      </p:nvGrpSpPr>
+      <p:grpSpPr>
+        <a:xfrm>
+          <a:off x="0" y="0"/>
+          <a:ext cx="0" cy="0"/>
+          <a:chOff x="0" y="0"/>
+          <a:chExt cx="0" cy="0"/>
+        </a:xfrm>
+      </p:grpSpPr>
+      <p:sp>
+        <p:nvSpPr>
+          <p:cNvPr id="2" name="Slide Image Placeholder 1"/>
+          <p:cNvSpPr>
+            <a:spLocks noGrp="1" noRot="1" noChangeAspect="1"/>
+          </p:cNvSpPr>
+          <p:nvPr>
+            <p:ph type="sldImg"/>
+          </p:nvPr>
+        </p:nvSpPr>
+        <p:spPr/>
+      </p:sp>
+      <p:sp>
+        <p:nvSpPr>
+          <p:cNvPr id="3" name="Notes Placeholder 2"/>
+          <p:cNvSpPr>
+            <a:spLocks noGrp="1"/>
+          </p:cNvSpPr>
+          <p:nvPr>
+            <p:ph type="body" idx="1"/>
+          </p:nvPr>
+        </p:nvSpPr>
+        <p:spPr/>
+        <p:txBody>
+          <a:bodyPr/>
+          <a:lstStyle/>
+          <a:p>
+            <a:endParaRPr lang="en-US" dirty="0"/>
+          </a:p>
+        </p:txBody>
+      </p:sp>
+      <p:sp>
+        <p:nvSpPr>
+          <p:cNvPr id="4" name="Slide Number Placeholder 3"/>
+          <p:cNvSpPr>
+            <a:spLocks noGrp="1"/>
+          </p:cNvSpPr>
+          <p:nvPr>
+            <p:ph type="sldNum" sz="quarter" idx="10"/>
+          </p:nvPr>
+        </p:nvSpPr>
+        <p:spPr/>
+        <p:txBody>
+          <a:bodyPr/>
+          <a:lstStyle/>
+          <a:p>
+            <a:fld id="{F7021451-1387-4CA6-816F-3879F97B5CBC}" type="slidenum">
+              <a:rPr lang="en-US"/>
+              <a:t>10</a:t>
+            </a:fld>
+            <a:endParaRPr lang="en-US"/>
+          </a:p>
+        </p:txBody>
+      </p:sp>
+    </p:spTree>
+    <p:extLst>
+      <p:ext uri="{BB962C8B-B14F-4D97-AF65-F5344CB8AC3E}">
+        <p14:creationId xmlns:p14="http://schemas.microsoft.com/office/powerpoint/2010/main" val="1024086991"/>
+      </p:ext>
+    </p:extLst>
+  </p:cSld>
+  <p:clrMapOvr>
+    <a:masterClrMapping/>
+  </p:clrMapOvr>
+</p:notes>
+</file>
+
 <file path=ppt/notesSlides/notesSlide2.xml><?xml version="1.0" encoding="utf-8"?>
 <p:notes xmlns:a="http://schemas.openxmlformats.org/drawingml/2006/main" xmlns:r="http://schemas.openxmlformats.org/officeDocument/2006/relationships" xmlns:p="http://schemas.openxmlformats.org/presentationml/2006/main">
   <p:cSld>
@@ -500,7 +587,13 @@
   <p:cSld>
     <p:spTree>
       <p:nvGrpSpPr>
-        <p:cNvPr id="1" name=""/>
+        <p:cNvPr id="1" name="">
+          <a:extLst>
+            <a:ext uri="{FF2B5EF4-FFF2-40B4-BE49-F238E27FC236}">
+              <a16:creationId xmlns:a16="http://schemas.microsoft.com/office/drawing/2014/main" id="{DE8BD150-2D4D-C884-ADAA-19DD8CD29D79}"/>
+            </a:ext>
+          </a:extLst>
+        </p:cNvPr>
         <p:cNvGrpSpPr/>
         <p:nvPr/>
       </p:nvGrpSpPr>
@@ -514,7 +607,13 @@
       </p:grpSpPr>
       <p:sp>
         <p:nvSpPr>
-          <p:cNvPr id="2" name="Slide Image Placeholder 1"/>
+          <p:cNvPr id="2" name="Slide Image Placeholder 1">
+            <a:extLst>
+              <a:ext uri="{FF2B5EF4-FFF2-40B4-BE49-F238E27FC236}">
+                <a16:creationId xmlns:a16="http://schemas.microsoft.com/office/drawing/2014/main" id="{17786D27-F27E-EB8A-1EEF-8AB848B869E5}"/>
+              </a:ext>
+            </a:extLst>
+          </p:cNvPr>
           <p:cNvSpPr>
             <a:spLocks noGrp="1" noRot="1" noChangeAspect="1"/>
           </p:cNvSpPr>
@@ -526,7 +625,13 @@
       </p:sp>
       <p:sp>
         <p:nvSpPr>
-          <p:cNvPr id="3" name="Notes Placeholder 2"/>
+          <p:cNvPr id="3" name="Notes Placeholder 2">
+            <a:extLst>
+              <a:ext uri="{FF2B5EF4-FFF2-40B4-BE49-F238E27FC236}">
+                <a16:creationId xmlns:a16="http://schemas.microsoft.com/office/drawing/2014/main" id="{562DC0AC-5344-9D26-B1EF-1BB178AFAF8B}"/>
+              </a:ext>
+            </a:extLst>
+          </p:cNvPr>
           <p:cNvSpPr>
             <a:spLocks noGrp="1"/>
           </p:cNvSpPr>
@@ -539,100 +644,19 @@
           <a:bodyPr/>
           <a:lstStyle/>
           <a:p>
-            <a:r>
-              <a:rPr lang="en-US" dirty="0"/>
-              <a:t>zoom </a:t>
-            </a:r>
-            <a:r>
-              <a:rPr lang="en-US" dirty="0" err="1"/>
-              <a:t>sul</a:t>
-            </a:r>
-            <a:r>
-              <a:rPr lang="en-US" dirty="0"/>
-              <a:t> primo e </a:t>
-            </a:r>
-            <a:r>
-              <a:rPr lang="en-US" dirty="0" err="1"/>
-              <a:t>mostraer</a:t>
-            </a:r>
-            <a:r>
-              <a:rPr lang="en-US" dirty="0"/>
-              <a:t> </a:t>
-            </a:r>
-            <a:r>
-              <a:rPr lang="en-US" dirty="0" err="1"/>
-              <a:t>una</a:t>
-            </a:r>
-            <a:r>
-              <a:rPr lang="en-US" dirty="0"/>
-              <a:t> </a:t>
-            </a:r>
-            <a:r>
-              <a:rPr lang="en-US" dirty="0" err="1"/>
-              <a:t>distribuziobe</a:t>
-            </a:r>
-            <a:r>
-              <a:rPr lang="en-US" dirty="0"/>
-              <a:t> delle </a:t>
-            </a:r>
-            <a:r>
-              <a:rPr lang="en-US" dirty="0" err="1"/>
-              <a:t>velocit`MISURATE</a:t>
-            </a:r>
             <a:endParaRPr lang="en-US" dirty="0"/>
           </a:p>
-          <a:p>
-            <a:r>
-              <a:rPr lang="en-US" dirty="0" err="1"/>
-              <a:t>mostra</a:t>
-            </a:r>
-            <a:r>
-              <a:rPr lang="en-US" dirty="0"/>
-              <a:t> campana </a:t>
-            </a:r>
-            <a:r>
-              <a:rPr lang="en-US" dirty="0" err="1"/>
-              <a:t>velocita</a:t>
-            </a:r>
-            <a:r>
-              <a:rPr lang="en-US" dirty="0"/>
-              <a:t> con </a:t>
-            </a:r>
-            <a:r>
-              <a:rPr lang="en-US" dirty="0" err="1"/>
-              <a:t>rigfa</a:t>
-            </a:r>
-            <a:r>
-              <a:rPr lang="en-US" dirty="0"/>
-              <a:t> </a:t>
-            </a:r>
-            <a:r>
-              <a:rPr lang="en-US" dirty="0" err="1"/>
-              <a:t>verticale</a:t>
-            </a:r>
-            <a:r>
-              <a:rPr lang="en-US" dirty="0"/>
-              <a:t> con dove </a:t>
-            </a:r>
-            <a:r>
-              <a:rPr lang="en-US" dirty="0" err="1"/>
-              <a:t>inizia</a:t>
-            </a:r>
-            <a:r>
-              <a:rPr lang="en-US" dirty="0"/>
-              <a:t> la </a:t>
-            </a:r>
-            <a:r>
-              <a:rPr lang="en-US" dirty="0" err="1"/>
-              <a:t>infrazione</a:t>
-            </a:r>
-            <a:endParaRPr lang="en-US" dirty="0"/>
-          </a:p>
-        </p:txBody>
-      </p:sp>
-      <p:sp>
-        <p:nvSpPr>
-          <p:cNvPr id="4" name="Slide Number Placeholder 3"/>
+        </p:txBody>
+      </p:sp>
+      <p:sp>
+        <p:nvSpPr>
+          <p:cNvPr id="4" name="Slide Number Placeholder 3">
+            <a:extLst>
+              <a:ext uri="{FF2B5EF4-FFF2-40B4-BE49-F238E27FC236}">
+                <a16:creationId xmlns:a16="http://schemas.microsoft.com/office/drawing/2014/main" id="{80AC15D2-A614-6FBD-F1A5-BE1E5BA40754}"/>
+              </a:ext>
+            </a:extLst>
+          </p:cNvPr>
           <p:cNvSpPr>
             <a:spLocks noGrp="1"/>
           </p:cNvSpPr>
@@ -656,7 +680,7 @@
     </p:spTree>
     <p:extLst>
       <p:ext uri="{BB962C8B-B14F-4D97-AF65-F5344CB8AC3E}">
-        <p14:creationId xmlns:p14="http://schemas.microsoft.com/office/powerpoint/2010/main" val="1024086991"/>
+        <p14:creationId xmlns:p14="http://schemas.microsoft.com/office/powerpoint/2010/main" val="3869488642"/>
       </p:ext>
     </p:extLst>
   </p:cSld>
@@ -880,7 +904,13 @@
   <p:cSld>
     <p:spTree>
       <p:nvGrpSpPr>
-        <p:cNvPr id="1" name=""/>
+        <p:cNvPr id="1" name="">
+          <a:extLst>
+            <a:ext uri="{FF2B5EF4-FFF2-40B4-BE49-F238E27FC236}">
+              <a16:creationId xmlns:a16="http://schemas.microsoft.com/office/drawing/2014/main" id="{033224B3-B249-ED0F-410A-454744899129}"/>
+            </a:ext>
+          </a:extLst>
+        </p:cNvPr>
         <p:cNvGrpSpPr/>
         <p:nvPr/>
       </p:nvGrpSpPr>
@@ -894,7 +924,13 @@
       </p:grpSpPr>
       <p:sp>
         <p:nvSpPr>
-          <p:cNvPr id="2" name="Slide Image Placeholder 1"/>
+          <p:cNvPr id="2" name="Slide Image Placeholder 1">
+            <a:extLst>
+              <a:ext uri="{FF2B5EF4-FFF2-40B4-BE49-F238E27FC236}">
+                <a16:creationId xmlns:a16="http://schemas.microsoft.com/office/drawing/2014/main" id="{62A73309-C954-63AF-9CBA-0790C8A637D0}"/>
+              </a:ext>
+            </a:extLst>
+          </p:cNvPr>
           <p:cNvSpPr>
             <a:spLocks noGrp="1" noRot="1" noChangeAspect="1"/>
           </p:cNvSpPr>
@@ -906,7 +942,13 @@
       </p:sp>
       <p:sp>
         <p:nvSpPr>
-          <p:cNvPr id="3" name="Notes Placeholder 2"/>
+          <p:cNvPr id="3" name="Notes Placeholder 2">
+            <a:extLst>
+              <a:ext uri="{FF2B5EF4-FFF2-40B4-BE49-F238E27FC236}">
+                <a16:creationId xmlns:a16="http://schemas.microsoft.com/office/drawing/2014/main" id="{ADCF9AC9-2692-24BB-B0D3-D94C16C63AB7}"/>
+              </a:ext>
+            </a:extLst>
+          </p:cNvPr>
           <p:cNvSpPr>
             <a:spLocks noGrp="1"/>
           </p:cNvSpPr>
@@ -920,16 +962,20 @@
           <a:lstStyle/>
           <a:p>
             <a:r>
+              <a:rPr lang="en-US" dirty="0"/>
+              <a:t>Si nota </a:t>
+            </a:r>
+            <a:r>
               <a:rPr lang="en-US" dirty="0" err="1"/>
-              <a:t>Presentazione</a:t>
+              <a:t>che</a:t>
             </a:r>
             <a:r>
               <a:rPr lang="en-US" dirty="0"/>
-              <a:t> intermedia </a:t>
+              <a:t> le </a:t>
             </a:r>
             <a:r>
               <a:rPr lang="en-US" dirty="0" err="1"/>
-              <a:t>gi?a</a:t>
+              <a:t>infrazioni</a:t>
             </a:r>
             <a:r>
               <a:rPr lang="en-US" dirty="0"/>
@@ -937,18 +983,85 @@
             </a:r>
             <a:r>
               <a:rPr lang="en-US" dirty="0" err="1"/>
-              <a:t>gfat</a:t>
-            </a:r>
-            <a:br>
+              <a:t>avvengono</a:t>
+            </a:r>
+            <a:r>
               <a:rPr lang="en-US" dirty="0"/>
-            </a:br>
+              <a:t> </a:t>
+            </a:r>
+            <a:r>
+              <a:rPr lang="en-US" dirty="0" err="1"/>
+              <a:t>maggiormente</a:t>
+            </a:r>
+            <a:r>
+              <a:rPr lang="en-US" dirty="0"/>
+              <a:t> </a:t>
+            </a:r>
+            <a:r>
+              <a:rPr lang="en-US" dirty="0" err="1"/>
+              <a:t>negli</a:t>
+            </a:r>
+            <a:r>
+              <a:rPr lang="en-US" dirty="0"/>
+              <a:t> </a:t>
+            </a:r>
+            <a:r>
+              <a:rPr lang="en-US" dirty="0" err="1"/>
+              <a:t>orari</a:t>
+            </a:r>
+            <a:r>
+              <a:rPr lang="en-US" dirty="0"/>
+              <a:t> con </a:t>
+            </a:r>
+            <a:r>
+              <a:rPr lang="en-US" dirty="0" err="1"/>
+              <a:t>pochissimo</a:t>
+            </a:r>
+            <a:r>
+              <a:rPr lang="en-US" dirty="0"/>
+              <a:t> </a:t>
+            </a:r>
+            <a:r>
+              <a:rPr lang="en-US" dirty="0" err="1"/>
+              <a:t>traffico</a:t>
+            </a:r>
+            <a:r>
+              <a:rPr lang="en-US" dirty="0"/>
+              <a:t> -&gt; dove ci </a:t>
+            </a:r>
+            <a:r>
+              <a:rPr lang="en-US" dirty="0" err="1"/>
+              <a:t>sono</a:t>
+            </a:r>
+            <a:r>
+              <a:rPr lang="en-US" dirty="0"/>
+              <a:t> </a:t>
+            </a:r>
+            <a:r>
+              <a:rPr lang="en-US" dirty="0" err="1"/>
+              <a:t>meno</a:t>
+            </a:r>
+            <a:r>
+              <a:rPr lang="en-US" dirty="0"/>
+              <a:t> </a:t>
+            </a:r>
+            <a:r>
+              <a:rPr lang="en-US" dirty="0" err="1"/>
+              <a:t>misurazioni</a:t>
+            </a:r>
             <a:endParaRPr lang="en-US" dirty="0"/>
           </a:p>
         </p:txBody>
       </p:sp>
       <p:sp>
         <p:nvSpPr>
-          <p:cNvPr id="4" name="Slide Number Placeholder 3"/>
+          <p:cNvPr id="4" name="Slide Number Placeholder 3">
+            <a:extLst>
+              <a:ext uri="{FF2B5EF4-FFF2-40B4-BE49-F238E27FC236}">
+                <a16:creationId xmlns:a16="http://schemas.microsoft.com/office/drawing/2014/main" id="{FDD03DD7-E9F2-5219-3BCB-17928D205307}"/>
+              </a:ext>
+            </a:extLst>
+          </p:cNvPr>
           <p:cNvSpPr>
             <a:spLocks noGrp="1"/>
           </p:cNvSpPr>
@@ -972,7 +1085,7 @@
     </p:spTree>
     <p:extLst>
       <p:ext uri="{BB962C8B-B14F-4D97-AF65-F5344CB8AC3E}">
-        <p14:creationId xmlns:p14="http://schemas.microsoft.com/office/powerpoint/2010/main" val="1024086991"/>
+        <p14:creationId xmlns:p14="http://schemas.microsoft.com/office/powerpoint/2010/main" val="2313134765"/>
       </p:ext>
     </p:extLst>
   </p:cSld>
@@ -983,6 +1096,396 @@
 </file>
 
 <file path=ppt/notesSlides/notesSlide7.xml><?xml version="1.0" encoding="utf-8"?>
+<p:notes xmlns:a="http://schemas.openxmlformats.org/drawingml/2006/main" xmlns:r="http://schemas.openxmlformats.org/officeDocument/2006/relationships" xmlns:p="http://schemas.openxmlformats.org/presentationml/2006/main">
+  <p:cSld>
+    <p:spTree>
+      <p:nvGrpSpPr>
+        <p:cNvPr id="1" name="">
+          <a:extLst>
+            <a:ext uri="{FF2B5EF4-FFF2-40B4-BE49-F238E27FC236}">
+              <a16:creationId xmlns:a16="http://schemas.microsoft.com/office/drawing/2014/main" id="{5647EDB8-D8B2-21EF-B2E5-6E13FE4F8040}"/>
+            </a:ext>
+          </a:extLst>
+        </p:cNvPr>
+        <p:cNvGrpSpPr/>
+        <p:nvPr/>
+      </p:nvGrpSpPr>
+      <p:grpSpPr>
+        <a:xfrm>
+          <a:off x="0" y="0"/>
+          <a:ext cx="0" cy="0"/>
+          <a:chOff x="0" y="0"/>
+          <a:chExt cx="0" cy="0"/>
+        </a:xfrm>
+      </p:grpSpPr>
+      <p:sp>
+        <p:nvSpPr>
+          <p:cNvPr id="2" name="Slide Image Placeholder 1">
+            <a:extLst>
+              <a:ext uri="{FF2B5EF4-FFF2-40B4-BE49-F238E27FC236}">
+                <a16:creationId xmlns:a16="http://schemas.microsoft.com/office/drawing/2014/main" id="{653E48EE-0327-3A8C-6374-B348CFF24153}"/>
+              </a:ext>
+            </a:extLst>
+          </p:cNvPr>
+          <p:cNvSpPr>
+            <a:spLocks noGrp="1" noRot="1" noChangeAspect="1"/>
+          </p:cNvSpPr>
+          <p:nvPr>
+            <p:ph type="sldImg"/>
+          </p:nvPr>
+        </p:nvSpPr>
+        <p:spPr/>
+      </p:sp>
+      <p:sp>
+        <p:nvSpPr>
+          <p:cNvPr id="3" name="Notes Placeholder 2">
+            <a:extLst>
+              <a:ext uri="{FF2B5EF4-FFF2-40B4-BE49-F238E27FC236}">
+                <a16:creationId xmlns:a16="http://schemas.microsoft.com/office/drawing/2014/main" id="{C89F664E-0D3D-D4EB-FB67-6930C1305CDB}"/>
+              </a:ext>
+            </a:extLst>
+          </p:cNvPr>
+          <p:cNvSpPr>
+            <a:spLocks noGrp="1"/>
+          </p:cNvSpPr>
+          <p:nvPr>
+            <p:ph type="body" idx="1"/>
+          </p:nvPr>
+        </p:nvSpPr>
+        <p:spPr/>
+        <p:txBody>
+          <a:bodyPr/>
+          <a:lstStyle/>
+          <a:p>
+            <a:r>
+              <a:rPr lang="en-US" dirty="0"/>
+              <a:t>zoom </a:t>
+            </a:r>
+            <a:r>
+              <a:rPr lang="en-US" dirty="0" err="1"/>
+              <a:t>sul</a:t>
+            </a:r>
+            <a:r>
+              <a:rPr lang="en-US" dirty="0"/>
+              <a:t> primo e </a:t>
+            </a:r>
+            <a:r>
+              <a:rPr lang="en-US" dirty="0" err="1"/>
+              <a:t>mostraer</a:t>
+            </a:r>
+            <a:r>
+              <a:rPr lang="en-US" dirty="0"/>
+              <a:t> </a:t>
+            </a:r>
+            <a:r>
+              <a:rPr lang="en-US" dirty="0" err="1"/>
+              <a:t>una</a:t>
+            </a:r>
+            <a:r>
+              <a:rPr lang="en-US" dirty="0"/>
+              <a:t> </a:t>
+            </a:r>
+            <a:r>
+              <a:rPr lang="en-US" dirty="0" err="1"/>
+              <a:t>distribuziobe</a:t>
+            </a:r>
+            <a:r>
+              <a:rPr lang="en-US" dirty="0"/>
+              <a:t> delle </a:t>
+            </a:r>
+            <a:r>
+              <a:rPr lang="en-US" dirty="0" err="1"/>
+              <a:t>velocit`MISURATE</a:t>
+            </a:r>
+            <a:endParaRPr lang="en-US" dirty="0"/>
+          </a:p>
+          <a:p>
+            <a:r>
+              <a:rPr lang="en-US" dirty="0" err="1"/>
+              <a:t>mostra</a:t>
+            </a:r>
+            <a:r>
+              <a:rPr lang="en-US" dirty="0"/>
+              <a:t> campana </a:t>
+            </a:r>
+            <a:r>
+              <a:rPr lang="en-US" dirty="0" err="1"/>
+              <a:t>velocita</a:t>
+            </a:r>
+            <a:r>
+              <a:rPr lang="en-US" dirty="0"/>
+              <a:t> con </a:t>
+            </a:r>
+            <a:r>
+              <a:rPr lang="en-US" dirty="0" err="1"/>
+              <a:t>rigfa</a:t>
+            </a:r>
+            <a:r>
+              <a:rPr lang="en-US" dirty="0"/>
+              <a:t> </a:t>
+            </a:r>
+            <a:r>
+              <a:rPr lang="en-US" dirty="0" err="1"/>
+              <a:t>verticale</a:t>
+            </a:r>
+            <a:r>
+              <a:rPr lang="en-US" dirty="0"/>
+              <a:t> con dove </a:t>
+            </a:r>
+            <a:r>
+              <a:rPr lang="en-US" dirty="0" err="1"/>
+              <a:t>inizia</a:t>
+            </a:r>
+            <a:r>
+              <a:rPr lang="en-US" dirty="0"/>
+              <a:t> la </a:t>
+            </a:r>
+            <a:r>
+              <a:rPr lang="en-US" dirty="0" err="1"/>
+              <a:t>infrazione</a:t>
+            </a:r>
+            <a:endParaRPr lang="en-US" dirty="0"/>
+          </a:p>
+        </p:txBody>
+      </p:sp>
+      <p:sp>
+        <p:nvSpPr>
+          <p:cNvPr id="4" name="Slide Number Placeholder 3">
+            <a:extLst>
+              <a:ext uri="{FF2B5EF4-FFF2-40B4-BE49-F238E27FC236}">
+                <a16:creationId xmlns:a16="http://schemas.microsoft.com/office/drawing/2014/main" id="{567F037F-63CE-9D8A-2A3C-1845F7535288}"/>
+              </a:ext>
+            </a:extLst>
+          </p:cNvPr>
+          <p:cNvSpPr>
+            <a:spLocks noGrp="1"/>
+          </p:cNvSpPr>
+          <p:nvPr>
+            <p:ph type="sldNum" sz="quarter" idx="10"/>
+          </p:nvPr>
+        </p:nvSpPr>
+        <p:spPr/>
+        <p:txBody>
+          <a:bodyPr/>
+          <a:lstStyle/>
+          <a:p>
+            <a:fld id="{F7021451-1387-4CA6-816F-3879F97B5CBC}" type="slidenum">
+              <a:rPr lang="en-US"/>
+              <a:t>7</a:t>
+            </a:fld>
+            <a:endParaRPr lang="en-US"/>
+          </a:p>
+        </p:txBody>
+      </p:sp>
+    </p:spTree>
+    <p:extLst>
+      <p:ext uri="{BB962C8B-B14F-4D97-AF65-F5344CB8AC3E}">
+        <p14:creationId xmlns:p14="http://schemas.microsoft.com/office/powerpoint/2010/main" val="1743723683"/>
+      </p:ext>
+    </p:extLst>
+  </p:cSld>
+  <p:clrMapOvr>
+    <a:masterClrMapping/>
+  </p:clrMapOvr>
+</p:notes>
+</file>
+
+<file path=ppt/notesSlides/notesSlide8.xml><?xml version="1.0" encoding="utf-8"?>
+<p:notes xmlns:a="http://schemas.openxmlformats.org/drawingml/2006/main" xmlns:r="http://schemas.openxmlformats.org/officeDocument/2006/relationships" xmlns:p="http://schemas.openxmlformats.org/presentationml/2006/main">
+  <p:cSld>
+    <p:spTree>
+      <p:nvGrpSpPr>
+        <p:cNvPr id="1" name="">
+          <a:extLst>
+            <a:ext uri="{FF2B5EF4-FFF2-40B4-BE49-F238E27FC236}">
+              <a16:creationId xmlns:a16="http://schemas.microsoft.com/office/drawing/2014/main" id="{9DBD2650-687A-E116-F95D-9AB39CA7AB35}"/>
+            </a:ext>
+          </a:extLst>
+        </p:cNvPr>
+        <p:cNvGrpSpPr/>
+        <p:nvPr/>
+      </p:nvGrpSpPr>
+      <p:grpSpPr>
+        <a:xfrm>
+          <a:off x="0" y="0"/>
+          <a:ext cx="0" cy="0"/>
+          <a:chOff x="0" y="0"/>
+          <a:chExt cx="0" cy="0"/>
+        </a:xfrm>
+      </p:grpSpPr>
+      <p:sp>
+        <p:nvSpPr>
+          <p:cNvPr id="2" name="Slide Image Placeholder 1">
+            <a:extLst>
+              <a:ext uri="{FF2B5EF4-FFF2-40B4-BE49-F238E27FC236}">
+                <a16:creationId xmlns:a16="http://schemas.microsoft.com/office/drawing/2014/main" id="{1D61350F-1402-F534-F99A-D9ECB1AF2505}"/>
+              </a:ext>
+            </a:extLst>
+          </p:cNvPr>
+          <p:cNvSpPr>
+            <a:spLocks noGrp="1" noRot="1" noChangeAspect="1"/>
+          </p:cNvSpPr>
+          <p:nvPr>
+            <p:ph type="sldImg"/>
+          </p:nvPr>
+        </p:nvSpPr>
+        <p:spPr/>
+      </p:sp>
+      <p:sp>
+        <p:nvSpPr>
+          <p:cNvPr id="3" name="Notes Placeholder 2">
+            <a:extLst>
+              <a:ext uri="{FF2B5EF4-FFF2-40B4-BE49-F238E27FC236}">
+                <a16:creationId xmlns:a16="http://schemas.microsoft.com/office/drawing/2014/main" id="{AB3C8614-09D2-202E-92BF-E6425A386D4B}"/>
+              </a:ext>
+            </a:extLst>
+          </p:cNvPr>
+          <p:cNvSpPr>
+            <a:spLocks noGrp="1"/>
+          </p:cNvSpPr>
+          <p:nvPr>
+            <p:ph type="body" idx="1"/>
+          </p:nvPr>
+        </p:nvSpPr>
+        <p:spPr/>
+        <p:txBody>
+          <a:bodyPr/>
+          <a:lstStyle/>
+          <a:p>
+            <a:r>
+              <a:rPr lang="en-US" dirty="0"/>
+              <a:t>zoom </a:t>
+            </a:r>
+            <a:r>
+              <a:rPr lang="en-US" dirty="0" err="1"/>
+              <a:t>sul</a:t>
+            </a:r>
+            <a:r>
+              <a:rPr lang="en-US" dirty="0"/>
+              <a:t> primo e </a:t>
+            </a:r>
+            <a:r>
+              <a:rPr lang="en-US" dirty="0" err="1"/>
+              <a:t>mostraer</a:t>
+            </a:r>
+            <a:r>
+              <a:rPr lang="en-US" dirty="0"/>
+              <a:t> </a:t>
+            </a:r>
+            <a:r>
+              <a:rPr lang="en-US" dirty="0" err="1"/>
+              <a:t>una</a:t>
+            </a:r>
+            <a:r>
+              <a:rPr lang="en-US" dirty="0"/>
+              <a:t> </a:t>
+            </a:r>
+            <a:r>
+              <a:rPr lang="en-US" dirty="0" err="1"/>
+              <a:t>distribuziobe</a:t>
+            </a:r>
+            <a:r>
+              <a:rPr lang="en-US" dirty="0"/>
+              <a:t> delle </a:t>
+            </a:r>
+            <a:r>
+              <a:rPr lang="en-US" dirty="0" err="1"/>
+              <a:t>velocit`MISURATE</a:t>
+            </a:r>
+            <a:endParaRPr lang="en-US" dirty="0"/>
+          </a:p>
+          <a:p>
+            <a:r>
+              <a:rPr lang="en-US" dirty="0" err="1"/>
+              <a:t>mostra</a:t>
+            </a:r>
+            <a:r>
+              <a:rPr lang="en-US" dirty="0"/>
+              <a:t> campana </a:t>
+            </a:r>
+            <a:r>
+              <a:rPr lang="en-US" dirty="0" err="1"/>
+              <a:t>velocita</a:t>
+            </a:r>
+            <a:r>
+              <a:rPr lang="en-US" dirty="0"/>
+              <a:t> con </a:t>
+            </a:r>
+            <a:r>
+              <a:rPr lang="en-US" dirty="0" err="1"/>
+              <a:t>rigfa</a:t>
+            </a:r>
+            <a:r>
+              <a:rPr lang="en-US" dirty="0"/>
+              <a:t> </a:t>
+            </a:r>
+            <a:r>
+              <a:rPr lang="en-US" dirty="0" err="1"/>
+              <a:t>verticale</a:t>
+            </a:r>
+            <a:r>
+              <a:rPr lang="en-US" dirty="0"/>
+              <a:t> con dove </a:t>
+            </a:r>
+            <a:r>
+              <a:rPr lang="en-US" dirty="0" err="1"/>
+              <a:t>inizia</a:t>
+            </a:r>
+            <a:r>
+              <a:rPr lang="en-US" dirty="0"/>
+              <a:t> la </a:t>
+            </a:r>
+            <a:r>
+              <a:rPr lang="en-US" dirty="0" err="1"/>
+              <a:t>infrazione</a:t>
+            </a:r>
+            <a:endParaRPr lang="en-US" dirty="0"/>
+          </a:p>
+        </p:txBody>
+      </p:sp>
+      <p:sp>
+        <p:nvSpPr>
+          <p:cNvPr id="4" name="Slide Number Placeholder 3">
+            <a:extLst>
+              <a:ext uri="{FF2B5EF4-FFF2-40B4-BE49-F238E27FC236}">
+                <a16:creationId xmlns:a16="http://schemas.microsoft.com/office/drawing/2014/main" id="{20354422-AAE3-4EF5-30BA-4620748D5C32}"/>
+              </a:ext>
+            </a:extLst>
+          </p:cNvPr>
+          <p:cNvSpPr>
+            <a:spLocks noGrp="1"/>
+          </p:cNvSpPr>
+          <p:nvPr>
+            <p:ph type="sldNum" sz="quarter" idx="10"/>
+          </p:nvPr>
+        </p:nvSpPr>
+        <p:spPr/>
+        <p:txBody>
+          <a:bodyPr/>
+          <a:lstStyle/>
+          <a:p>
+            <a:fld id="{F7021451-1387-4CA6-816F-3879F97B5CBC}" type="slidenum">
+              <a:rPr lang="en-US"/>
+              <a:t>8</a:t>
+            </a:fld>
+            <a:endParaRPr lang="en-US"/>
+          </a:p>
+        </p:txBody>
+      </p:sp>
+    </p:spTree>
+    <p:extLst>
+      <p:ext uri="{BB962C8B-B14F-4D97-AF65-F5344CB8AC3E}">
+        <p14:creationId xmlns:p14="http://schemas.microsoft.com/office/powerpoint/2010/main" val="3084976356"/>
+      </p:ext>
+    </p:extLst>
+  </p:cSld>
+  <p:clrMapOvr>
+    <a:masterClrMapping/>
+  </p:clrMapOvr>
+</p:notes>
+</file>
+
+<file path=ppt/notesSlides/notesSlide9.xml><?xml version="1.0" encoding="utf-8"?>
 <p:notes xmlns:a="http://schemas.openxmlformats.org/drawingml/2006/main" xmlns:r="http://schemas.openxmlformats.org/officeDocument/2006/relationships" xmlns:p="http://schemas.openxmlformats.org/presentationml/2006/main">
   <p:cSld>
     <p:spTree>
@@ -1026,6 +1529,139 @@
           <a:bodyPr/>
           <a:lstStyle/>
           <a:p>
+            <a:r>
+              <a:rPr lang="en-US" dirty="0" err="1"/>
+              <a:t>Guardare</a:t>
+            </a:r>
+            <a:r>
+              <a:rPr lang="en-US" dirty="0"/>
+              <a:t> heatmap: </a:t>
+            </a:r>
+            <a:r>
+              <a:rPr lang="en-US" dirty="0" err="1"/>
+              <a:t>strano</a:t>
+            </a:r>
+            <a:r>
+              <a:rPr lang="en-US" dirty="0"/>
+              <a:t> </a:t>
+            </a:r>
+            <a:r>
+              <a:rPr lang="en-US" dirty="0" err="1"/>
+              <a:t>che</a:t>
+            </a:r>
+            <a:r>
+              <a:rPr lang="en-US" dirty="0"/>
+              <a:t> </a:t>
+            </a:r>
+            <a:r>
+              <a:rPr lang="en-US" dirty="0" err="1"/>
+              <a:t>c'è</a:t>
+            </a:r>
+            <a:r>
+              <a:rPr lang="en-US" dirty="0"/>
+              <a:t> </a:t>
+            </a:r>
+            <a:r>
+              <a:rPr lang="en-US" dirty="0" err="1"/>
+              <a:t>più</a:t>
+            </a:r>
+            <a:r>
+              <a:rPr lang="en-US" dirty="0"/>
+              <a:t> </a:t>
+            </a:r>
+            <a:r>
+              <a:rPr lang="en-US" dirty="0" err="1"/>
+              <a:t>traffico</a:t>
+            </a:r>
+            <a:r>
+              <a:rPr lang="en-US" dirty="0"/>
+              <a:t> alle 15 rispetto alle 17</a:t>
+            </a:r>
+            <a:br>
+              <a:rPr lang="en-US" dirty="0"/>
+            </a:br>
+            <a:br>
+              <a:rPr lang="en-US" dirty="0"/>
+            </a:br>
+            <a:r>
+              <a:rPr lang="en-US" dirty="0"/>
+              <a:t>Esempio Di notte non </a:t>
+            </a:r>
+            <a:r>
+              <a:rPr lang="en-US" dirty="0" err="1"/>
+              <a:t>c'è</a:t>
+            </a:r>
+            <a:r>
+              <a:rPr lang="en-US" dirty="0"/>
+              <a:t> il radar </a:t>
+            </a:r>
+            <a:r>
+              <a:rPr lang="en-US" dirty="0" err="1"/>
+              <a:t>nella</a:t>
+            </a:r>
+            <a:r>
+              <a:rPr lang="en-US" dirty="0"/>
+              <a:t> </a:t>
+            </a:r>
+            <a:r>
+              <a:rPr lang="en-US" dirty="0" err="1"/>
+              <a:t>stradina</a:t>
+            </a:r>
+            <a:r>
+              <a:rPr lang="en-US" dirty="0"/>
+              <a:t> di </a:t>
+            </a:r>
+            <a:r>
+              <a:rPr lang="en-US" dirty="0" err="1"/>
+              <a:t>paese</a:t>
+            </a:r>
+            <a:r>
+              <a:rPr lang="en-US" dirty="0"/>
+              <a:t> ma </a:t>
+            </a:r>
+            <a:r>
+              <a:rPr lang="en-US" dirty="0" err="1"/>
+              <a:t>nelle</a:t>
+            </a:r>
+            <a:r>
+              <a:rPr lang="en-US" dirty="0"/>
+              <a:t> </a:t>
+            </a:r>
+            <a:r>
+              <a:rPr lang="en-US" dirty="0" err="1"/>
+              <a:t>strade</a:t>
+            </a:r>
+            <a:r>
+              <a:rPr lang="en-US" dirty="0"/>
+              <a:t> </a:t>
+            </a:r>
+            <a:r>
+              <a:rPr lang="en-US" dirty="0" err="1"/>
+              <a:t>veloci</a:t>
+            </a:r>
+            <a:r>
+              <a:rPr lang="en-US" dirty="0"/>
+              <a:t>?</a:t>
+            </a:r>
+            <a:br>
+              <a:rPr lang="en-US" dirty="0"/>
+            </a:br>
+            <a:r>
+              <a:rPr lang="en-US" dirty="0"/>
+              <a:t>Vedi se </a:t>
+            </a:r>
+            <a:r>
+              <a:rPr lang="en-US" dirty="0" err="1"/>
+              <a:t>è</a:t>
+            </a:r>
+            <a:r>
+              <a:rPr lang="en-US" dirty="0"/>
+              <a:t> </a:t>
+            </a:r>
+            <a:r>
+              <a:rPr lang="en-US" dirty="0" err="1"/>
+              <a:t>vero</a:t>
+            </a:r>
             <a:endParaRPr lang="en-US" dirty="0"/>
           </a:p>
         </p:txBody>
@@ -1047,7 +1683,7 @@
           <a:p>
             <a:fld id="{F7021451-1387-4CA6-816F-3879F97B5CBC}" type="slidenum">
               <a:rPr lang="en-US"/>
-              <a:t>7</a:t>
+              <a:t>9</a:t>
             </a:fld>
             <a:endParaRPr lang="en-US"/>
           </a:p>
@@ -2066,6 +2702,511 @@
 </p:sld>
 </file>
 
+<file path=ppt/slides/slide10.xml><?xml version="1.0" encoding="utf-8"?>
+<p:sld xmlns:a="http://schemas.openxmlformats.org/drawingml/2006/main" xmlns:r="http://schemas.openxmlformats.org/officeDocument/2006/relationships" xmlns:p="http://schemas.openxmlformats.org/presentationml/2006/main">
+  <p:cSld name="Slide 9">
+    <p:bg>
+      <p:bgPr>
+        <a:solidFill>
+          <a:srgbClr val="1A2744"/>
+        </a:solidFill>
+        <a:effectLst/>
+      </p:bgPr>
+    </p:bg>
+    <p:spTree>
+      <p:nvGrpSpPr>
+        <p:cNvPr id="1" name=""/>
+        <p:cNvGrpSpPr/>
+        <p:nvPr/>
+      </p:nvGrpSpPr>
+      <p:grpSpPr>
+        <a:xfrm>
+          <a:off x="0" y="0"/>
+          <a:ext cx="0" cy="0"/>
+          <a:chOff x="0" y="0"/>
+          <a:chExt cx="0" cy="0"/>
+        </a:xfrm>
+      </p:grpSpPr>
+      <p:sp>
+        <p:nvSpPr>
+          <p:cNvPr id="2" name="Shape 0"/>
+          <p:cNvSpPr/>
+          <p:nvPr/>
+        </p:nvSpPr>
+        <p:spPr>
+          <a:xfrm>
+            <a:off x="0" y="0"/>
+            <a:ext cx="164592" cy="5143500"/>
+          </a:xfrm>
+          <a:prstGeom prst="rect">
+            <a:avLst/>
+          </a:prstGeom>
+          <a:solidFill>
+            <a:srgbClr val="00B4D8"/>
+          </a:solidFill>
+          <a:ln w="12700">
+            <a:solidFill>
+              <a:srgbClr val="00B4D8"/>
+            </a:solidFill>
+            <a:prstDash val="solid"/>
+          </a:ln>
+        </p:spPr>
+        <p:txBody>
+          <a:bodyPr/>
+          <a:lstStyle/>
+          <a:p>
+            <a:endParaRPr lang="it-CH"/>
+          </a:p>
+        </p:txBody>
+      </p:sp>
+      <p:sp>
+        <p:nvSpPr>
+          <p:cNvPr id="3" name="Text 1"/>
+          <p:cNvSpPr/>
+          <p:nvPr/>
+        </p:nvSpPr>
+        <p:spPr>
+          <a:xfrm>
+            <a:off x="365760" y="457200"/>
+            <a:ext cx="8412480" cy="548640"/>
+          </a:xfrm>
+          <a:prstGeom prst="rect">
+            <a:avLst/>
+          </a:prstGeom>
+          <a:noFill/>
+          <a:ln/>
+        </p:spPr>
+        <p:txBody>
+          <a:bodyPr wrap="square" lIns="0" tIns="0" rIns="0" bIns="0" rtlCol="0" anchor="ctr"/>
+          <a:lstStyle/>
+          <a:p>
+            <a:pPr marL="0" indent="0">
+              <a:buNone/>
+            </a:pPr>
+            <a:r>
+              <a:rPr lang="en-US" sz="2200" b="1" dirty="0">
+                <a:solidFill>
+                  <a:srgbClr val="00B4D8"/>
+                </a:solidFill>
+                <a:latin typeface="Calibri" pitchFamily="34" charset="0"/>
+                <a:ea typeface="Calibri" pitchFamily="34" charset="-122"/>
+                <a:cs typeface="Calibri" pitchFamily="34" charset="-120"/>
+              </a:rPr>
+              <a:t>Conclusioni &amp; Prossimi Passi</a:t>
+            </a:r>
+            <a:endParaRPr lang="en-US" sz="2200" dirty="0"/>
+          </a:p>
+        </p:txBody>
+      </p:sp>
+      <p:sp>
+        <p:nvSpPr>
+          <p:cNvPr id="4" name="Shape 2"/>
+          <p:cNvSpPr/>
+          <p:nvPr/>
+        </p:nvSpPr>
+        <p:spPr>
+          <a:xfrm>
+            <a:off x="365760" y="1234440"/>
+            <a:ext cx="8503920" cy="3611880"/>
+          </a:xfrm>
+          <a:prstGeom prst="rect">
+            <a:avLst/>
+          </a:prstGeom>
+          <a:solidFill>
+            <a:srgbClr val="1E3057"/>
+          </a:solidFill>
+          <a:ln w="12700">
+            <a:solidFill>
+              <a:srgbClr val="2A4580"/>
+            </a:solidFill>
+            <a:prstDash val="solid"/>
+          </a:ln>
+        </p:spPr>
+        <p:txBody>
+          <a:bodyPr/>
+          <a:lstStyle/>
+          <a:p>
+            <a:endParaRPr lang="it-CH"/>
+          </a:p>
+        </p:txBody>
+      </p:sp>
+      <p:sp>
+        <p:nvSpPr>
+          <p:cNvPr id="5" name="Text 3"/>
+          <p:cNvSpPr/>
+          <p:nvPr/>
+        </p:nvSpPr>
+        <p:spPr>
+          <a:xfrm>
+            <a:off x="365760" y="1234440"/>
+            <a:ext cx="8503920" cy="3611880"/>
+          </a:xfrm>
+          <a:prstGeom prst="rect">
+            <a:avLst/>
+          </a:prstGeom>
+          <a:noFill/>
+          <a:ln/>
+        </p:spPr>
+        <p:txBody>
+          <a:bodyPr wrap="square" lIns="0" tIns="0" rIns="0" bIns="0" rtlCol="0" anchor="ctr"/>
+          <a:lstStyle/>
+          <a:p>
+            <a:pPr marL="0" indent="0" algn="ctr">
+              <a:buNone/>
+            </a:pPr>
+            <a:endParaRPr lang="en-US" sz="1400" dirty="0"/>
+          </a:p>
+        </p:txBody>
+      </p:sp>
+      <p:sp>
+        <p:nvSpPr>
+          <p:cNvPr id="6" name="Text 2">
+            <a:extLst>
+              <a:ext uri="{FF2B5EF4-FFF2-40B4-BE49-F238E27FC236}">
+                <a16:creationId xmlns:a16="http://schemas.microsoft.com/office/drawing/2014/main" id="{6A5EC037-901C-9B09-8D52-3D7B268D9A64}"/>
+              </a:ext>
+            </a:extLst>
+          </p:cNvPr>
+          <p:cNvSpPr/>
+          <p:nvPr/>
+        </p:nvSpPr>
+        <p:spPr>
+          <a:xfrm>
+            <a:off x="526724" y="1234440"/>
+            <a:ext cx="8181991" cy="3673715"/>
+          </a:xfrm>
+          <a:prstGeom prst="rect">
+            <a:avLst/>
+          </a:prstGeom>
+          <a:noFill/>
+          <a:ln/>
+        </p:spPr>
+        <p:txBody>
+          <a:bodyPr wrap="square" lIns="0" tIns="0" rIns="0" bIns="0" rtlCol="0" anchor="ctr"/>
+          <a:lstStyle/>
+          <a:p>
+            <a:r>
+              <a:rPr lang="en-US" sz="2400" i="1" dirty="0">
+                <a:solidFill>
+                  <a:srgbClr val="B0BEC5"/>
+                </a:solidFill>
+                <a:latin typeface="Calibri" pitchFamily="34" charset="0"/>
+                <a:ea typeface="Calibri" pitchFamily="34" charset="-122"/>
+                <a:cs typeface="Calibri" pitchFamily="34" charset="-120"/>
+              </a:rPr>
+              <a:t>I Dati: </a:t>
+            </a:r>
+            <a:r>
+              <a:rPr lang="en-US" sz="2400" i="1" dirty="0" err="1">
+                <a:solidFill>
+                  <a:srgbClr val="B0BEC5"/>
+                </a:solidFill>
+                <a:latin typeface="Calibri" pitchFamily="34" charset="0"/>
+                <a:ea typeface="Calibri" pitchFamily="34" charset="-122"/>
+                <a:cs typeface="Calibri" pitchFamily="34" charset="-120"/>
+              </a:rPr>
+              <a:t>Informazioni</a:t>
+            </a:r>
+            <a:r>
+              <a:rPr lang="en-US" sz="2400" i="1" dirty="0">
+                <a:solidFill>
+                  <a:srgbClr val="B0BEC5"/>
+                </a:solidFill>
+                <a:latin typeface="Calibri" pitchFamily="34" charset="0"/>
+                <a:ea typeface="Calibri" pitchFamily="34" charset="-122"/>
+                <a:cs typeface="Calibri" pitchFamily="34" charset="-120"/>
+              </a:rPr>
+              <a:t> </a:t>
+            </a:r>
+            <a:r>
+              <a:rPr lang="en-US" sz="2400" i="1" dirty="0" err="1">
+                <a:solidFill>
+                  <a:srgbClr val="B0BEC5"/>
+                </a:solidFill>
+                <a:latin typeface="Calibri" pitchFamily="34" charset="0"/>
+                <a:ea typeface="Calibri" pitchFamily="34" charset="-122"/>
+                <a:cs typeface="Calibri" pitchFamily="34" charset="-120"/>
+              </a:rPr>
+              <a:t>reali</a:t>
+            </a:r>
+            <a:r>
+              <a:rPr lang="en-US" sz="2400" i="1" dirty="0">
+                <a:solidFill>
+                  <a:srgbClr val="B0BEC5"/>
+                </a:solidFill>
+                <a:latin typeface="Calibri" pitchFamily="34" charset="0"/>
+                <a:ea typeface="Calibri" pitchFamily="34" charset="-122"/>
+                <a:cs typeface="Calibri" pitchFamily="34" charset="-120"/>
+              </a:rPr>
+              <a:t> e </a:t>
+            </a:r>
+            <a:r>
+              <a:rPr lang="en-US" sz="2400" i="1" dirty="0" err="1">
+                <a:solidFill>
+                  <a:srgbClr val="B0BEC5"/>
+                </a:solidFill>
+                <a:latin typeface="Calibri" pitchFamily="34" charset="0"/>
+                <a:ea typeface="Calibri" pitchFamily="34" charset="-122"/>
+                <a:cs typeface="Calibri" pitchFamily="34" charset="-120"/>
+              </a:rPr>
+              <a:t>locali</a:t>
+            </a:r>
+            <a:r>
+              <a:rPr lang="en-US" sz="2400" i="1" dirty="0">
+                <a:solidFill>
+                  <a:srgbClr val="B0BEC5"/>
+                </a:solidFill>
+                <a:latin typeface="Calibri" pitchFamily="34" charset="0"/>
+                <a:ea typeface="Calibri" pitchFamily="34" charset="-122"/>
+                <a:cs typeface="Calibri" pitchFamily="34" charset="-120"/>
+              </a:rPr>
+              <a:t> </a:t>
+            </a:r>
+            <a:r>
+              <a:rPr lang="en-US" sz="2400" i="1" dirty="0" err="1">
+                <a:solidFill>
+                  <a:srgbClr val="B0BEC5"/>
+                </a:solidFill>
+                <a:latin typeface="Calibri" pitchFamily="34" charset="0"/>
+                <a:ea typeface="Calibri" pitchFamily="34" charset="-122"/>
+                <a:cs typeface="Calibri" pitchFamily="34" charset="-120"/>
+              </a:rPr>
+              <a:t>sul</a:t>
+            </a:r>
+            <a:r>
+              <a:rPr lang="en-US" sz="2400" i="1" dirty="0">
+                <a:solidFill>
+                  <a:srgbClr val="B0BEC5"/>
+                </a:solidFill>
+                <a:latin typeface="Calibri" pitchFamily="34" charset="0"/>
+                <a:ea typeface="Calibri" pitchFamily="34" charset="-122"/>
+                <a:cs typeface="Calibri" pitchFamily="34" charset="-120"/>
+              </a:rPr>
+              <a:t> </a:t>
+            </a:r>
+            <a:r>
+              <a:rPr lang="en-US" sz="2400" i="1" dirty="0" err="1">
+                <a:solidFill>
+                  <a:srgbClr val="B0BEC5"/>
+                </a:solidFill>
+                <a:latin typeface="Calibri" pitchFamily="34" charset="0"/>
+                <a:ea typeface="Calibri" pitchFamily="34" charset="-122"/>
+                <a:cs typeface="Calibri" pitchFamily="34" charset="-120"/>
+              </a:rPr>
+              <a:t>traffico</a:t>
+            </a:r>
+            <a:r>
+              <a:rPr lang="en-US" sz="2400" i="1" dirty="0">
+                <a:solidFill>
+                  <a:srgbClr val="B0BEC5"/>
+                </a:solidFill>
+                <a:latin typeface="Calibri" pitchFamily="34" charset="0"/>
+                <a:ea typeface="Calibri" pitchFamily="34" charset="-122"/>
+                <a:cs typeface="Calibri" pitchFamily="34" charset="-120"/>
+              </a:rPr>
+              <a:t> </a:t>
+            </a:r>
+            <a:r>
+              <a:rPr lang="en-US" sz="2400" i="1" dirty="0" err="1">
+                <a:solidFill>
+                  <a:srgbClr val="B0BEC5"/>
+                </a:solidFill>
+                <a:latin typeface="Calibri" pitchFamily="34" charset="0"/>
+                <a:ea typeface="Calibri" pitchFamily="34" charset="-122"/>
+                <a:cs typeface="Calibri" pitchFamily="34" charset="-120"/>
+              </a:rPr>
+              <a:t>svizzero</a:t>
+            </a:r>
+            <a:r>
+              <a:rPr lang="en-US" sz="2400" i="1" dirty="0">
+                <a:solidFill>
+                  <a:srgbClr val="B0BEC5"/>
+                </a:solidFill>
+                <a:latin typeface="Calibri" pitchFamily="34" charset="0"/>
+                <a:ea typeface="Calibri" pitchFamily="34" charset="-122"/>
+                <a:cs typeface="Calibri" pitchFamily="34" charset="-120"/>
+              </a:rPr>
+              <a:t>.</a:t>
+            </a:r>
+          </a:p>
+          <a:p>
+            <a:r>
+              <a:rPr lang="en-US" sz="2400" i="1" dirty="0" err="1">
+                <a:solidFill>
+                  <a:srgbClr val="B0BEC5"/>
+                </a:solidFill>
+                <a:latin typeface="Calibri" pitchFamily="34" charset="0"/>
+                <a:ea typeface="Calibri" pitchFamily="34" charset="-122"/>
+                <a:cs typeface="Calibri" pitchFamily="34" charset="-120"/>
+              </a:rPr>
+              <a:t>L'Obiettivo</a:t>
+            </a:r>
+            <a:r>
+              <a:rPr lang="en-US" sz="2400" i="1" dirty="0">
+                <a:solidFill>
+                  <a:srgbClr val="B0BEC5"/>
+                </a:solidFill>
+                <a:latin typeface="Calibri" pitchFamily="34" charset="0"/>
+                <a:ea typeface="Calibri" pitchFamily="34" charset="-122"/>
+                <a:cs typeface="Calibri" pitchFamily="34" charset="-120"/>
+              </a:rPr>
+              <a:t>: </a:t>
+            </a:r>
+            <a:r>
+              <a:rPr lang="en-US" sz="2400" i="1" dirty="0" err="1">
+                <a:solidFill>
+                  <a:srgbClr val="B0BEC5"/>
+                </a:solidFill>
+                <a:latin typeface="Calibri" pitchFamily="34" charset="0"/>
+                <a:ea typeface="Calibri" pitchFamily="34" charset="-122"/>
+                <a:cs typeface="Calibri" pitchFamily="34" charset="-120"/>
+              </a:rPr>
+              <a:t>Promuovere</a:t>
+            </a:r>
+            <a:r>
+              <a:rPr lang="en-US" sz="2400" i="1" dirty="0">
+                <a:solidFill>
+                  <a:srgbClr val="B0BEC5"/>
+                </a:solidFill>
+                <a:latin typeface="Calibri" pitchFamily="34" charset="0"/>
+                <a:ea typeface="Calibri" pitchFamily="34" charset="-122"/>
+                <a:cs typeface="Calibri" pitchFamily="34" charset="-120"/>
+              </a:rPr>
+              <a:t> la </a:t>
+            </a:r>
+            <a:r>
+              <a:rPr lang="en-US" sz="2400" i="1" dirty="0" err="1">
+                <a:solidFill>
+                  <a:srgbClr val="B0BEC5"/>
+                </a:solidFill>
+                <a:latin typeface="Calibri" pitchFamily="34" charset="0"/>
+                <a:ea typeface="Calibri" pitchFamily="34" charset="-122"/>
+                <a:cs typeface="Calibri" pitchFamily="34" charset="-120"/>
+              </a:rPr>
+              <a:t>sicurezza</a:t>
+            </a:r>
+            <a:r>
+              <a:rPr lang="en-US" sz="2400" i="1" dirty="0">
+                <a:solidFill>
+                  <a:srgbClr val="B0BEC5"/>
+                </a:solidFill>
+                <a:latin typeface="Calibri" pitchFamily="34" charset="0"/>
+                <a:ea typeface="Calibri" pitchFamily="34" charset="-122"/>
+                <a:cs typeface="Calibri" pitchFamily="34" charset="-120"/>
+              </a:rPr>
+              <a:t> </a:t>
+            </a:r>
+            <a:r>
+              <a:rPr lang="en-US" sz="2400" i="1" dirty="0" err="1">
+                <a:solidFill>
+                  <a:srgbClr val="B0BEC5"/>
+                </a:solidFill>
+                <a:latin typeface="Calibri" pitchFamily="34" charset="0"/>
+                <a:ea typeface="Calibri" pitchFamily="34" charset="-122"/>
+                <a:cs typeface="Calibri" pitchFamily="34" charset="-120"/>
+              </a:rPr>
+              <a:t>stradale</a:t>
+            </a:r>
+            <a:r>
+              <a:rPr lang="en-US" sz="2400" i="1" dirty="0">
+                <a:solidFill>
+                  <a:srgbClr val="B0BEC5"/>
+                </a:solidFill>
+                <a:latin typeface="Calibri" pitchFamily="34" charset="0"/>
+                <a:ea typeface="Calibri" pitchFamily="34" charset="-122"/>
+                <a:cs typeface="Calibri" pitchFamily="34" charset="-120"/>
+              </a:rPr>
+              <a:t> </a:t>
+            </a:r>
+            <a:r>
+              <a:rPr lang="en-US" sz="2400" i="1" dirty="0" err="1">
+                <a:solidFill>
+                  <a:srgbClr val="B0BEC5"/>
+                </a:solidFill>
+                <a:latin typeface="Calibri" pitchFamily="34" charset="0"/>
+                <a:ea typeface="Calibri" pitchFamily="34" charset="-122"/>
+                <a:cs typeface="Calibri" pitchFamily="34" charset="-120"/>
+              </a:rPr>
+              <a:t>urbana</a:t>
+            </a:r>
+            <a:r>
+              <a:rPr lang="en-US" sz="2400" i="1" dirty="0">
+                <a:solidFill>
+                  <a:srgbClr val="B0BEC5"/>
+                </a:solidFill>
+                <a:latin typeface="Calibri" pitchFamily="34" charset="0"/>
+                <a:ea typeface="Calibri" pitchFamily="34" charset="-122"/>
+                <a:cs typeface="Calibri" pitchFamily="34" charset="-120"/>
+              </a:rPr>
+              <a:t>.</a:t>
+            </a:r>
+          </a:p>
+          <a:p>
+            <a:endParaRPr lang="en-US" sz="2400" i="1" dirty="0">
+              <a:solidFill>
+                <a:srgbClr val="B0BEC5"/>
+              </a:solidFill>
+              <a:latin typeface="Calibri" pitchFamily="34" charset="0"/>
+              <a:ea typeface="Calibri" pitchFamily="34" charset="-122"/>
+              <a:cs typeface="Calibri" pitchFamily="34" charset="-120"/>
+            </a:endParaRPr>
+          </a:p>
+          <a:p>
+            <a:r>
+              <a:rPr lang="en-US" sz="2400" i="1" dirty="0" err="1">
+                <a:solidFill>
+                  <a:srgbClr val="B0BEC5"/>
+                </a:solidFill>
+                <a:latin typeface="Calibri" pitchFamily="34" charset="0"/>
+                <a:ea typeface="Calibri" pitchFamily="34" charset="-122"/>
+                <a:cs typeface="Calibri" pitchFamily="34" charset="-120"/>
+              </a:rPr>
+              <a:t>Prossimo</a:t>
+            </a:r>
+            <a:r>
+              <a:rPr lang="en-US" sz="2400" i="1" dirty="0">
+                <a:solidFill>
+                  <a:srgbClr val="B0BEC5"/>
+                </a:solidFill>
+                <a:latin typeface="Calibri" pitchFamily="34" charset="0"/>
+                <a:ea typeface="Calibri" pitchFamily="34" charset="-122"/>
+                <a:cs typeface="Calibri" pitchFamily="34" charset="-120"/>
+              </a:rPr>
+              <a:t> step: </a:t>
+            </a:r>
+            <a:r>
+              <a:rPr lang="en-US" sz="2400" i="1" dirty="0" err="1">
+                <a:solidFill>
+                  <a:srgbClr val="B0BEC5"/>
+                </a:solidFill>
+                <a:latin typeface="Calibri" pitchFamily="34" charset="0"/>
+                <a:ea typeface="Calibri" pitchFamily="34" charset="-122"/>
+                <a:cs typeface="Calibri" pitchFamily="34" charset="-120"/>
+              </a:rPr>
+              <a:t>presentazione</a:t>
+            </a:r>
+            <a:r>
+              <a:rPr lang="en-US" sz="2400" i="1" dirty="0">
+                <a:solidFill>
+                  <a:srgbClr val="B0BEC5"/>
+                </a:solidFill>
+                <a:latin typeface="Calibri" pitchFamily="34" charset="0"/>
+                <a:ea typeface="Calibri" pitchFamily="34" charset="-122"/>
+                <a:cs typeface="Calibri" pitchFamily="34" charset="-120"/>
+              </a:rPr>
+              <a:t> finale.</a:t>
+            </a:r>
+          </a:p>
+        </p:txBody>
+      </p:sp>
+    </p:spTree>
+  </p:cSld>
+  <p:clrMapOvr>
+    <a:masterClrMapping/>
+  </p:clrMapOvr>
+</p:sld>
+</file>
+
 <file path=ppt/slides/slide2.xml><?xml version="1.0" encoding="utf-8"?>
 <p:sld xmlns:a="http://schemas.openxmlformats.org/drawingml/2006/main" xmlns:r="http://schemas.openxmlformats.org/officeDocument/2006/relationships" xmlns:p="http://schemas.openxmlformats.org/presentationml/2006/main">
   <p:cSld name="Slide 2">
@@ -3258,2097 +4399,6 @@
 
 <file path=ppt/slides/slide3.xml><?xml version="1.0" encoding="utf-8"?>
 <p:sld xmlns:a="http://schemas.openxmlformats.org/drawingml/2006/main" xmlns:r="http://schemas.openxmlformats.org/officeDocument/2006/relationships" xmlns:p="http://schemas.openxmlformats.org/presentationml/2006/main">
-  <p:cSld name="Slide 3">
-    <p:bg>
-      <p:bgPr>
-        <a:solidFill>
-          <a:srgbClr val="1A2744"/>
-        </a:solidFill>
-        <a:effectLst/>
-      </p:bgPr>
-    </p:bg>
-    <p:spTree>
-      <p:nvGrpSpPr>
-        <p:cNvPr id="1" name=""/>
-        <p:cNvGrpSpPr/>
-        <p:nvPr/>
-      </p:nvGrpSpPr>
-      <p:grpSpPr>
-        <a:xfrm>
-          <a:off x="0" y="0"/>
-          <a:ext cx="0" cy="0"/>
-          <a:chOff x="0" y="0"/>
-          <a:chExt cx="0" cy="0"/>
-        </a:xfrm>
-      </p:grpSpPr>
-      <p:sp>
-        <p:nvSpPr>
-          <p:cNvPr id="2" name="Shape 0"/>
-          <p:cNvSpPr/>
-          <p:nvPr/>
-        </p:nvSpPr>
-        <p:spPr>
-          <a:xfrm>
-            <a:off x="0" y="0"/>
-            <a:ext cx="164592" cy="5143500"/>
-          </a:xfrm>
-          <a:prstGeom prst="rect">
-            <a:avLst/>
-          </a:prstGeom>
-          <a:solidFill>
-            <a:srgbClr val="00B4D8"/>
-          </a:solidFill>
-          <a:ln w="12700">
-            <a:solidFill>
-              <a:srgbClr val="00B4D8"/>
-            </a:solidFill>
-            <a:prstDash val="solid"/>
-          </a:ln>
-        </p:spPr>
-        <p:txBody>
-          <a:bodyPr/>
-          <a:lstStyle/>
-          <a:p>
-            <a:endParaRPr lang="it-CH"/>
-          </a:p>
-        </p:txBody>
-      </p:sp>
-      <p:sp>
-        <p:nvSpPr>
-          <p:cNvPr id="3" name="Text 1"/>
-          <p:cNvSpPr/>
-          <p:nvPr/>
-        </p:nvSpPr>
-        <p:spPr>
-          <a:xfrm>
-            <a:off x="365760" y="137160"/>
-            <a:ext cx="8412480" cy="502920"/>
-          </a:xfrm>
-          <a:prstGeom prst="rect">
-            <a:avLst/>
-          </a:prstGeom>
-          <a:noFill/>
-          <a:ln/>
-        </p:spPr>
-        <p:txBody>
-          <a:bodyPr wrap="square" lIns="0" tIns="0" rIns="0" bIns="0" rtlCol="0" anchor="ctr"/>
-          <a:lstStyle/>
-          <a:p>
-            <a:pPr marL="0" indent="0">
-              <a:buNone/>
-            </a:pPr>
-            <a:r>
-              <a:rPr lang="en-US" sz="2200" b="1" dirty="0">
-                <a:solidFill>
-                  <a:srgbClr val="00B4D8"/>
-                </a:solidFill>
-                <a:latin typeface="Calibri" pitchFamily="34" charset="0"/>
-                <a:ea typeface="Calibri" pitchFamily="34" charset="-122"/>
-                <a:cs typeface="Calibri" pitchFamily="34" charset="-120"/>
-              </a:rPr>
-              <a:t>Struttura dei Dati</a:t>
-            </a:r>
-            <a:endParaRPr lang="en-US" sz="2200" dirty="0"/>
-          </a:p>
-        </p:txBody>
-      </p:sp>
-      <p:sp>
-        <p:nvSpPr>
-          <p:cNvPr id="4" name="Shape 2"/>
-          <p:cNvSpPr/>
-          <p:nvPr/>
-        </p:nvSpPr>
-        <p:spPr>
-          <a:xfrm>
-            <a:off x="365760" y="777240"/>
-            <a:ext cx="2057400" cy="365760"/>
-          </a:xfrm>
-          <a:prstGeom prst="rect">
-            <a:avLst/>
-          </a:prstGeom>
-          <a:solidFill>
-            <a:srgbClr val="00B4D8"/>
-          </a:solidFill>
-          <a:ln w="12700">
-            <a:solidFill>
-              <a:srgbClr val="00B4D8"/>
-            </a:solidFill>
-            <a:prstDash val="solid"/>
-          </a:ln>
-        </p:spPr>
-        <p:txBody>
-          <a:bodyPr/>
-          <a:lstStyle/>
-          <a:p>
-            <a:endParaRPr lang="it-CH"/>
-          </a:p>
-        </p:txBody>
-      </p:sp>
-      <p:sp>
-        <p:nvSpPr>
-          <p:cNvPr id="5" name="Text 3"/>
-          <p:cNvSpPr/>
-          <p:nvPr/>
-        </p:nvSpPr>
-        <p:spPr>
-          <a:xfrm>
-            <a:off x="411480" y="795528"/>
-            <a:ext cx="1965960" cy="329184"/>
-          </a:xfrm>
-          <a:prstGeom prst="rect">
-            <a:avLst/>
-          </a:prstGeom>
-          <a:noFill/>
-          <a:ln/>
-        </p:spPr>
-        <p:txBody>
-          <a:bodyPr wrap="square" lIns="0" tIns="0" rIns="0" bIns="0" rtlCol="0" anchor="ctr"/>
-          <a:lstStyle/>
-          <a:p>
-            <a:pPr marL="0" indent="0" algn="ctr">
-              <a:buNone/>
-            </a:pPr>
-            <a:r>
-              <a:rPr lang="en-US" sz="1200" b="1" dirty="0">
-                <a:solidFill>
-                  <a:srgbClr val="1A2744"/>
-                </a:solidFill>
-                <a:latin typeface="Calibri" pitchFamily="34" charset="0"/>
-                <a:ea typeface="Calibri" pitchFamily="34" charset="-122"/>
-                <a:cs typeface="Calibri" pitchFamily="34" charset="-120"/>
-              </a:rPr>
-              <a:t>📅 Temporale</a:t>
-            </a:r>
-            <a:endParaRPr lang="en-US" sz="1200" dirty="0"/>
-          </a:p>
-        </p:txBody>
-      </p:sp>
-      <p:sp>
-        <p:nvSpPr>
-          <p:cNvPr id="6" name="Shape 4"/>
-          <p:cNvSpPr/>
-          <p:nvPr/>
-        </p:nvSpPr>
-        <p:spPr>
-          <a:xfrm>
-            <a:off x="365760" y="1280160"/>
-            <a:ext cx="2057400" cy="347472"/>
-          </a:xfrm>
-          <a:prstGeom prst="rect">
-            <a:avLst/>
-          </a:prstGeom>
-          <a:solidFill>
-            <a:srgbClr val="162040"/>
-          </a:solidFill>
-          <a:ln w="12700">
-            <a:solidFill>
-              <a:srgbClr val="2A4580"/>
-            </a:solidFill>
-            <a:prstDash val="solid"/>
-          </a:ln>
-        </p:spPr>
-        <p:txBody>
-          <a:bodyPr/>
-          <a:lstStyle/>
-          <a:p>
-            <a:endParaRPr lang="it-CH"/>
-          </a:p>
-        </p:txBody>
-      </p:sp>
-      <p:sp>
-        <p:nvSpPr>
-          <p:cNvPr id="7" name="Text 5"/>
-          <p:cNvSpPr/>
-          <p:nvPr/>
-        </p:nvSpPr>
-        <p:spPr>
-          <a:xfrm>
-            <a:off x="438912" y="1325880"/>
-            <a:ext cx="1911096" cy="256032"/>
-          </a:xfrm>
-          <a:prstGeom prst="rect">
-            <a:avLst/>
-          </a:prstGeom>
-          <a:noFill/>
-          <a:ln/>
-        </p:spPr>
-        <p:txBody>
-          <a:bodyPr wrap="square" lIns="0" tIns="0" rIns="0" bIns="0" rtlCol="0" anchor="ctr"/>
-          <a:lstStyle/>
-          <a:p>
-            <a:pPr marL="0" indent="0">
-              <a:buNone/>
-            </a:pPr>
-            <a:r>
-              <a:rPr lang="en-US" sz="1050" dirty="0">
-                <a:solidFill>
-                  <a:srgbClr val="FFFFFF"/>
-                </a:solidFill>
-                <a:latin typeface="Calibri" pitchFamily="34" charset="0"/>
-                <a:ea typeface="Calibri" pitchFamily="34" charset="-122"/>
-                <a:cs typeface="Calibri" pitchFamily="34" charset="-120"/>
-              </a:rPr>
-              <a:t>timestamp</a:t>
-            </a:r>
-            <a:endParaRPr lang="en-US" sz="1050" dirty="0"/>
-          </a:p>
-        </p:txBody>
-      </p:sp>
-      <p:sp>
-        <p:nvSpPr>
-          <p:cNvPr id="8" name="Shape 6"/>
-          <p:cNvSpPr/>
-          <p:nvPr/>
-        </p:nvSpPr>
-        <p:spPr>
-          <a:xfrm>
-            <a:off x="365760" y="1691640"/>
-            <a:ext cx="2057400" cy="347472"/>
-          </a:xfrm>
-          <a:prstGeom prst="rect">
-            <a:avLst/>
-          </a:prstGeom>
-          <a:solidFill>
-            <a:srgbClr val="162040"/>
-          </a:solidFill>
-          <a:ln w="12700">
-            <a:solidFill>
-              <a:srgbClr val="2A4580"/>
-            </a:solidFill>
-            <a:prstDash val="solid"/>
-          </a:ln>
-        </p:spPr>
-        <p:txBody>
-          <a:bodyPr/>
-          <a:lstStyle/>
-          <a:p>
-            <a:endParaRPr lang="it-CH"/>
-          </a:p>
-        </p:txBody>
-      </p:sp>
-      <p:sp>
-        <p:nvSpPr>
-          <p:cNvPr id="9" name="Text 7"/>
-          <p:cNvSpPr/>
-          <p:nvPr/>
-        </p:nvSpPr>
-        <p:spPr>
-          <a:xfrm>
-            <a:off x="438912" y="1737360"/>
-            <a:ext cx="1911096" cy="256032"/>
-          </a:xfrm>
-          <a:prstGeom prst="rect">
-            <a:avLst/>
-          </a:prstGeom>
-          <a:noFill/>
-          <a:ln/>
-        </p:spPr>
-        <p:txBody>
-          <a:bodyPr wrap="square" lIns="0" tIns="0" rIns="0" bIns="0" rtlCol="0" anchor="ctr"/>
-          <a:lstStyle/>
-          <a:p>
-            <a:pPr marL="0" indent="0">
-              <a:buNone/>
-            </a:pPr>
-            <a:r>
-              <a:rPr lang="en-US" sz="1050" dirty="0">
-                <a:solidFill>
-                  <a:srgbClr val="FFFFFF"/>
-                </a:solidFill>
-                <a:latin typeface="Calibri" pitchFamily="34" charset="0"/>
-                <a:ea typeface="Calibri" pitchFamily="34" charset="-122"/>
-                <a:cs typeface="Calibri" pitchFamily="34" charset="-120"/>
-              </a:rPr>
-              <a:t>ora</a:t>
-            </a:r>
-            <a:endParaRPr lang="en-US" sz="1050" dirty="0"/>
-          </a:p>
-        </p:txBody>
-      </p:sp>
-      <p:sp>
-        <p:nvSpPr>
-          <p:cNvPr id="10" name="Shape 8"/>
-          <p:cNvSpPr/>
-          <p:nvPr/>
-        </p:nvSpPr>
-        <p:spPr>
-          <a:xfrm>
-            <a:off x="365760" y="2103120"/>
-            <a:ext cx="2057400" cy="347472"/>
-          </a:xfrm>
-          <a:prstGeom prst="rect">
-            <a:avLst/>
-          </a:prstGeom>
-          <a:solidFill>
-            <a:srgbClr val="162040"/>
-          </a:solidFill>
-          <a:ln w="12700">
-            <a:solidFill>
-              <a:srgbClr val="2A4580"/>
-            </a:solidFill>
-            <a:prstDash val="solid"/>
-          </a:ln>
-        </p:spPr>
-        <p:txBody>
-          <a:bodyPr/>
-          <a:lstStyle/>
-          <a:p>
-            <a:endParaRPr lang="it-CH"/>
-          </a:p>
-        </p:txBody>
-      </p:sp>
-      <p:sp>
-        <p:nvSpPr>
-          <p:cNvPr id="11" name="Text 9"/>
-          <p:cNvSpPr/>
-          <p:nvPr/>
-        </p:nvSpPr>
-        <p:spPr>
-          <a:xfrm>
-            <a:off x="438912" y="2148840"/>
-            <a:ext cx="1911096" cy="256032"/>
-          </a:xfrm>
-          <a:prstGeom prst="rect">
-            <a:avLst/>
-          </a:prstGeom>
-          <a:noFill/>
-          <a:ln/>
-        </p:spPr>
-        <p:txBody>
-          <a:bodyPr wrap="square" lIns="0" tIns="0" rIns="0" bIns="0" rtlCol="0" anchor="ctr"/>
-          <a:lstStyle/>
-          <a:p>
-            <a:pPr marL="0" indent="0">
-              <a:buNone/>
-            </a:pPr>
-            <a:r>
-              <a:rPr lang="en-US" sz="1050" dirty="0">
-                <a:solidFill>
-                  <a:srgbClr val="FFFFFF"/>
-                </a:solidFill>
-                <a:latin typeface="Calibri" pitchFamily="34" charset="0"/>
-                <a:ea typeface="Calibri" pitchFamily="34" charset="-122"/>
-                <a:cs typeface="Calibri" pitchFamily="34" charset="-120"/>
-              </a:rPr>
-              <a:t>data</a:t>
-            </a:r>
-            <a:endParaRPr lang="en-US" sz="1050" dirty="0"/>
-          </a:p>
-        </p:txBody>
-      </p:sp>
-      <p:sp>
-        <p:nvSpPr>
-          <p:cNvPr id="12" name="Shape 10"/>
-          <p:cNvSpPr/>
-          <p:nvPr/>
-        </p:nvSpPr>
-        <p:spPr>
-          <a:xfrm>
-            <a:off x="365760" y="2514600"/>
-            <a:ext cx="2057400" cy="347472"/>
-          </a:xfrm>
-          <a:prstGeom prst="rect">
-            <a:avLst/>
-          </a:prstGeom>
-          <a:solidFill>
-            <a:srgbClr val="162040"/>
-          </a:solidFill>
-          <a:ln w="12700">
-            <a:solidFill>
-              <a:srgbClr val="2A4580"/>
-            </a:solidFill>
-            <a:prstDash val="solid"/>
-          </a:ln>
-        </p:spPr>
-        <p:txBody>
-          <a:bodyPr/>
-          <a:lstStyle/>
-          <a:p>
-            <a:endParaRPr lang="it-CH"/>
-          </a:p>
-        </p:txBody>
-      </p:sp>
-      <p:sp>
-        <p:nvSpPr>
-          <p:cNvPr id="13" name="Text 11"/>
-          <p:cNvSpPr/>
-          <p:nvPr/>
-        </p:nvSpPr>
-        <p:spPr>
-          <a:xfrm>
-            <a:off x="438912" y="2560320"/>
-            <a:ext cx="1911096" cy="256032"/>
-          </a:xfrm>
-          <a:prstGeom prst="rect">
-            <a:avLst/>
-          </a:prstGeom>
-          <a:noFill/>
-          <a:ln/>
-        </p:spPr>
-        <p:txBody>
-          <a:bodyPr wrap="square" lIns="0" tIns="0" rIns="0" bIns="0" rtlCol="0" anchor="ctr"/>
-          <a:lstStyle/>
-          <a:p>
-            <a:pPr marL="0" indent="0">
-              <a:buNone/>
-            </a:pPr>
-            <a:r>
-              <a:rPr lang="en-US" sz="1050" dirty="0">
-                <a:solidFill>
-                  <a:srgbClr val="FFFFFF"/>
-                </a:solidFill>
-                <a:latin typeface="Calibri" pitchFamily="34" charset="0"/>
-                <a:ea typeface="Calibri" pitchFamily="34" charset="-122"/>
-                <a:cs typeface="Calibri" pitchFamily="34" charset="-120"/>
-              </a:rPr>
-              <a:t>data_ora</a:t>
-            </a:r>
-            <a:endParaRPr lang="en-US" sz="1050" dirty="0"/>
-          </a:p>
-        </p:txBody>
-      </p:sp>
-      <p:sp>
-        <p:nvSpPr>
-          <p:cNvPr id="14" name="Shape 12"/>
-          <p:cNvSpPr/>
-          <p:nvPr/>
-        </p:nvSpPr>
-        <p:spPr>
-          <a:xfrm>
-            <a:off x="365760" y="2926080"/>
-            <a:ext cx="2057400" cy="347472"/>
-          </a:xfrm>
-          <a:prstGeom prst="rect">
-            <a:avLst/>
-          </a:prstGeom>
-          <a:solidFill>
-            <a:srgbClr val="162040"/>
-          </a:solidFill>
-          <a:ln w="12700">
-            <a:solidFill>
-              <a:srgbClr val="2A4580"/>
-            </a:solidFill>
-            <a:prstDash val="solid"/>
-          </a:ln>
-        </p:spPr>
-        <p:txBody>
-          <a:bodyPr/>
-          <a:lstStyle/>
-          <a:p>
-            <a:endParaRPr lang="it-CH"/>
-          </a:p>
-        </p:txBody>
-      </p:sp>
-      <p:sp>
-        <p:nvSpPr>
-          <p:cNvPr id="15" name="Text 13"/>
-          <p:cNvSpPr/>
-          <p:nvPr/>
-        </p:nvSpPr>
-        <p:spPr>
-          <a:xfrm>
-            <a:off x="438912" y="2971800"/>
-            <a:ext cx="1911096" cy="256032"/>
-          </a:xfrm>
-          <a:prstGeom prst="rect">
-            <a:avLst/>
-          </a:prstGeom>
-          <a:noFill/>
-          <a:ln/>
-        </p:spPr>
-        <p:txBody>
-          <a:bodyPr wrap="square" lIns="0" tIns="0" rIns="0" bIns="0" rtlCol="0" anchor="ctr"/>
-          <a:lstStyle/>
-          <a:p>
-            <a:pPr marL="0" indent="0">
-              <a:buNone/>
-            </a:pPr>
-            <a:r>
-              <a:rPr lang="en-US" sz="1050" dirty="0">
-                <a:solidFill>
-                  <a:srgbClr val="FFFFFF"/>
-                </a:solidFill>
-                <a:latin typeface="Calibri" pitchFamily="34" charset="0"/>
-                <a:ea typeface="Calibri" pitchFamily="34" charset="-122"/>
-                <a:cs typeface="Calibri" pitchFamily="34" charset="-120"/>
-              </a:rPr>
-              <a:t>inizio_misurazione</a:t>
-            </a:r>
-            <a:endParaRPr lang="en-US" sz="1050" dirty="0"/>
-          </a:p>
-        </p:txBody>
-      </p:sp>
-      <p:sp>
-        <p:nvSpPr>
-          <p:cNvPr id="16" name="Shape 14"/>
-          <p:cNvSpPr/>
-          <p:nvPr/>
-        </p:nvSpPr>
-        <p:spPr>
-          <a:xfrm>
-            <a:off x="365760" y="3337560"/>
-            <a:ext cx="2057400" cy="347472"/>
-          </a:xfrm>
-          <a:prstGeom prst="rect">
-            <a:avLst/>
-          </a:prstGeom>
-          <a:solidFill>
-            <a:srgbClr val="162040"/>
-          </a:solidFill>
-          <a:ln w="12700">
-            <a:solidFill>
-              <a:srgbClr val="2A4580"/>
-            </a:solidFill>
-            <a:prstDash val="solid"/>
-          </a:ln>
-        </p:spPr>
-        <p:txBody>
-          <a:bodyPr/>
-          <a:lstStyle/>
-          <a:p>
-            <a:endParaRPr lang="it-CH"/>
-          </a:p>
-        </p:txBody>
-      </p:sp>
-      <p:sp>
-        <p:nvSpPr>
-          <p:cNvPr id="17" name="Text 15"/>
-          <p:cNvSpPr/>
-          <p:nvPr/>
-        </p:nvSpPr>
-        <p:spPr>
-          <a:xfrm>
-            <a:off x="438912" y="3383280"/>
-            <a:ext cx="1911096" cy="256032"/>
-          </a:xfrm>
-          <a:prstGeom prst="rect">
-            <a:avLst/>
-          </a:prstGeom>
-          <a:noFill/>
-          <a:ln/>
-        </p:spPr>
-        <p:txBody>
-          <a:bodyPr wrap="square" lIns="0" tIns="0" rIns="0" bIns="0" rtlCol="0" anchor="ctr"/>
-          <a:lstStyle/>
-          <a:p>
-            <a:pPr marL="0" indent="0">
-              <a:buNone/>
-            </a:pPr>
-            <a:r>
-              <a:rPr lang="en-US" sz="1050" dirty="0">
-                <a:solidFill>
-                  <a:srgbClr val="FFFFFF"/>
-                </a:solidFill>
-                <a:latin typeface="Calibri" pitchFamily="34" charset="0"/>
-                <a:ea typeface="Calibri" pitchFamily="34" charset="-122"/>
-                <a:cs typeface="Calibri" pitchFamily="34" charset="-120"/>
-              </a:rPr>
-              <a:t>fine_misurazione</a:t>
-            </a:r>
-            <a:endParaRPr lang="en-US" sz="1050" dirty="0"/>
-          </a:p>
-        </p:txBody>
-      </p:sp>
-      <p:sp>
-        <p:nvSpPr>
-          <p:cNvPr id="18" name="Shape 16"/>
-          <p:cNvSpPr/>
-          <p:nvPr/>
-        </p:nvSpPr>
-        <p:spPr>
-          <a:xfrm>
-            <a:off x="2542032" y="777240"/>
-            <a:ext cx="2057400" cy="365760"/>
-          </a:xfrm>
-          <a:prstGeom prst="rect">
-            <a:avLst/>
-          </a:prstGeom>
-          <a:solidFill>
-            <a:srgbClr val="E07B39"/>
-          </a:solidFill>
-          <a:ln w="12700">
-            <a:solidFill>
-              <a:srgbClr val="E07B39"/>
-            </a:solidFill>
-            <a:prstDash val="solid"/>
-          </a:ln>
-        </p:spPr>
-        <p:txBody>
-          <a:bodyPr/>
-          <a:lstStyle/>
-          <a:p>
-            <a:endParaRPr lang="it-CH"/>
-          </a:p>
-        </p:txBody>
-      </p:sp>
-      <p:sp>
-        <p:nvSpPr>
-          <p:cNvPr id="19" name="Text 17"/>
-          <p:cNvSpPr/>
-          <p:nvPr/>
-        </p:nvSpPr>
-        <p:spPr>
-          <a:xfrm>
-            <a:off x="2587752" y="795528"/>
-            <a:ext cx="1965960" cy="329184"/>
-          </a:xfrm>
-          <a:prstGeom prst="rect">
-            <a:avLst/>
-          </a:prstGeom>
-          <a:noFill/>
-          <a:ln/>
-        </p:spPr>
-        <p:txBody>
-          <a:bodyPr wrap="square" lIns="0" tIns="0" rIns="0" bIns="0" rtlCol="0" anchor="ctr"/>
-          <a:lstStyle/>
-          <a:p>
-            <a:pPr marL="0" indent="0" algn="ctr">
-              <a:buNone/>
-            </a:pPr>
-            <a:r>
-              <a:rPr lang="en-US" sz="1200" b="1" dirty="0">
-                <a:solidFill>
-                  <a:srgbClr val="1A2744"/>
-                </a:solidFill>
-                <a:latin typeface="Calibri" pitchFamily="34" charset="0"/>
-                <a:ea typeface="Calibri" pitchFamily="34" charset="-122"/>
-                <a:cs typeface="Calibri" pitchFamily="34" charset="-120"/>
-              </a:rPr>
-              <a:t>🚗 Misura</a:t>
-            </a:r>
-            <a:endParaRPr lang="en-US" sz="1200" dirty="0"/>
-          </a:p>
-        </p:txBody>
-      </p:sp>
-      <p:sp>
-        <p:nvSpPr>
-          <p:cNvPr id="20" name="Shape 18"/>
-          <p:cNvSpPr/>
-          <p:nvPr/>
-        </p:nvSpPr>
-        <p:spPr>
-          <a:xfrm>
-            <a:off x="2542032" y="1280160"/>
-            <a:ext cx="2057400" cy="347472"/>
-          </a:xfrm>
-          <a:prstGeom prst="rect">
-            <a:avLst/>
-          </a:prstGeom>
-          <a:solidFill>
-            <a:srgbClr val="162040"/>
-          </a:solidFill>
-          <a:ln w="12700">
-            <a:solidFill>
-              <a:srgbClr val="2A4580"/>
-            </a:solidFill>
-            <a:prstDash val="solid"/>
-          </a:ln>
-        </p:spPr>
-        <p:txBody>
-          <a:bodyPr/>
-          <a:lstStyle/>
-          <a:p>
-            <a:endParaRPr lang="it-CH"/>
-          </a:p>
-        </p:txBody>
-      </p:sp>
-      <p:sp>
-        <p:nvSpPr>
-          <p:cNvPr id="21" name="Text 19"/>
-          <p:cNvSpPr/>
-          <p:nvPr/>
-        </p:nvSpPr>
-        <p:spPr>
-          <a:xfrm>
-            <a:off x="2615184" y="1325880"/>
-            <a:ext cx="1911096" cy="256032"/>
-          </a:xfrm>
-          <a:prstGeom prst="rect">
-            <a:avLst/>
-          </a:prstGeom>
-          <a:noFill/>
-          <a:ln/>
-        </p:spPr>
-        <p:txBody>
-          <a:bodyPr wrap="square" lIns="0" tIns="0" rIns="0" bIns="0" rtlCol="0" anchor="ctr"/>
-          <a:lstStyle/>
-          <a:p>
-            <a:pPr marL="0" indent="0">
-              <a:buNone/>
-            </a:pPr>
-            <a:r>
-              <a:rPr lang="en-US" sz="1050" dirty="0">
-                <a:solidFill>
-                  <a:srgbClr val="FFFFFF"/>
-                </a:solidFill>
-                <a:latin typeface="Calibri" pitchFamily="34" charset="0"/>
-                <a:ea typeface="Calibri" pitchFamily="34" charset="-122"/>
-                <a:cs typeface="Calibri" pitchFamily="34" charset="-120"/>
-              </a:rPr>
-              <a:t>velocita_kmh</a:t>
-            </a:r>
-            <a:endParaRPr lang="en-US" sz="1050" dirty="0"/>
-          </a:p>
-        </p:txBody>
-      </p:sp>
-      <p:sp>
-        <p:nvSpPr>
-          <p:cNvPr id="22" name="Shape 20"/>
-          <p:cNvSpPr/>
-          <p:nvPr/>
-        </p:nvSpPr>
-        <p:spPr>
-          <a:xfrm>
-            <a:off x="2542032" y="1691640"/>
-            <a:ext cx="2057400" cy="347472"/>
-          </a:xfrm>
-          <a:prstGeom prst="rect">
-            <a:avLst/>
-          </a:prstGeom>
-          <a:solidFill>
-            <a:srgbClr val="162040"/>
-          </a:solidFill>
-          <a:ln w="12700">
-            <a:solidFill>
-              <a:srgbClr val="2A4580"/>
-            </a:solidFill>
-            <a:prstDash val="solid"/>
-          </a:ln>
-        </p:spPr>
-        <p:txBody>
-          <a:bodyPr/>
-          <a:lstStyle/>
-          <a:p>
-            <a:endParaRPr lang="it-CH"/>
-          </a:p>
-        </p:txBody>
-      </p:sp>
-      <p:sp>
-        <p:nvSpPr>
-          <p:cNvPr id="23" name="Text 21"/>
-          <p:cNvSpPr/>
-          <p:nvPr/>
-        </p:nvSpPr>
-        <p:spPr>
-          <a:xfrm>
-            <a:off x="2615184" y="1737360"/>
-            <a:ext cx="1911096" cy="256032"/>
-          </a:xfrm>
-          <a:prstGeom prst="rect">
-            <a:avLst/>
-          </a:prstGeom>
-          <a:noFill/>
-          <a:ln/>
-        </p:spPr>
-        <p:txBody>
-          <a:bodyPr wrap="square" lIns="0" tIns="0" rIns="0" bIns="0" rtlCol="0" anchor="ctr"/>
-          <a:lstStyle/>
-          <a:p>
-            <a:pPr marL="0" indent="0">
-              <a:buNone/>
-            </a:pPr>
-            <a:r>
-              <a:rPr lang="en-US" sz="1050" dirty="0">
-                <a:solidFill>
-                  <a:srgbClr val="FFFFFF"/>
-                </a:solidFill>
-                <a:latin typeface="Calibri" pitchFamily="34" charset="0"/>
-                <a:ea typeface="Calibri" pitchFamily="34" charset="-122"/>
-                <a:cs typeface="Calibri" pitchFamily="34" charset="-120"/>
-              </a:rPr>
-              <a:t>lunghezza_veicolo_m</a:t>
-            </a:r>
-            <a:endParaRPr lang="en-US" sz="1050" dirty="0"/>
-          </a:p>
-        </p:txBody>
-      </p:sp>
-      <p:sp>
-        <p:nvSpPr>
-          <p:cNvPr id="24" name="Shape 22"/>
-          <p:cNvSpPr/>
-          <p:nvPr/>
-        </p:nvSpPr>
-        <p:spPr>
-          <a:xfrm>
-            <a:off x="2542032" y="2103120"/>
-            <a:ext cx="2057400" cy="347472"/>
-          </a:xfrm>
-          <a:prstGeom prst="rect">
-            <a:avLst/>
-          </a:prstGeom>
-          <a:solidFill>
-            <a:srgbClr val="162040"/>
-          </a:solidFill>
-          <a:ln w="12700">
-            <a:solidFill>
-              <a:srgbClr val="2A4580"/>
-            </a:solidFill>
-            <a:prstDash val="solid"/>
-          </a:ln>
-        </p:spPr>
-        <p:txBody>
-          <a:bodyPr/>
-          <a:lstStyle/>
-          <a:p>
-            <a:endParaRPr lang="it-CH"/>
-          </a:p>
-        </p:txBody>
-      </p:sp>
-      <p:sp>
-        <p:nvSpPr>
-          <p:cNvPr id="25" name="Text 23"/>
-          <p:cNvSpPr/>
-          <p:nvPr/>
-        </p:nvSpPr>
-        <p:spPr>
-          <a:xfrm>
-            <a:off x="2615184" y="2148840"/>
-            <a:ext cx="1911096" cy="256032"/>
-          </a:xfrm>
-          <a:prstGeom prst="rect">
-            <a:avLst/>
-          </a:prstGeom>
-          <a:noFill/>
-          <a:ln/>
-        </p:spPr>
-        <p:txBody>
-          <a:bodyPr wrap="square" lIns="0" tIns="0" rIns="0" bIns="0" rtlCol="0" anchor="ctr"/>
-          <a:lstStyle/>
-          <a:p>
-            <a:pPr marL="0" indent="0">
-              <a:buNone/>
-            </a:pPr>
-            <a:r>
-              <a:rPr lang="en-US" sz="1050" dirty="0">
-                <a:solidFill>
-                  <a:srgbClr val="FFFFFF"/>
-                </a:solidFill>
-                <a:latin typeface="Calibri" pitchFamily="34" charset="0"/>
-                <a:ea typeface="Calibri" pitchFamily="34" charset="-122"/>
-                <a:cs typeface="Calibri" pitchFamily="34" charset="-120"/>
-              </a:rPr>
-              <a:t>n_veicoli</a:t>
-            </a:r>
-            <a:endParaRPr lang="en-US" sz="1050" dirty="0"/>
-          </a:p>
-        </p:txBody>
-      </p:sp>
-      <p:sp>
-        <p:nvSpPr>
-          <p:cNvPr id="26" name="Shape 24"/>
-          <p:cNvSpPr/>
-          <p:nvPr/>
-        </p:nvSpPr>
-        <p:spPr>
-          <a:xfrm>
-            <a:off x="4718304" y="777240"/>
-            <a:ext cx="2057400" cy="365760"/>
-          </a:xfrm>
-          <a:prstGeom prst="rect">
-            <a:avLst/>
-          </a:prstGeom>
-          <a:solidFill>
-            <a:srgbClr val="2ECC71"/>
-          </a:solidFill>
-          <a:ln w="12700">
-            <a:solidFill>
-              <a:srgbClr val="2ECC71"/>
-            </a:solidFill>
-            <a:prstDash val="solid"/>
-          </a:ln>
-        </p:spPr>
-        <p:txBody>
-          <a:bodyPr/>
-          <a:lstStyle/>
-          <a:p>
-            <a:endParaRPr lang="it-CH"/>
-          </a:p>
-        </p:txBody>
-      </p:sp>
-      <p:sp>
-        <p:nvSpPr>
-          <p:cNvPr id="27" name="Text 25"/>
-          <p:cNvSpPr/>
-          <p:nvPr/>
-        </p:nvSpPr>
-        <p:spPr>
-          <a:xfrm>
-            <a:off x="4764024" y="795528"/>
-            <a:ext cx="1965960" cy="329184"/>
-          </a:xfrm>
-          <a:prstGeom prst="rect">
-            <a:avLst/>
-          </a:prstGeom>
-          <a:noFill/>
-          <a:ln/>
-        </p:spPr>
-        <p:txBody>
-          <a:bodyPr wrap="square" lIns="0" tIns="0" rIns="0" bIns="0" rtlCol="0" anchor="ctr"/>
-          <a:lstStyle/>
-          <a:p>
-            <a:pPr marL="0" indent="0" algn="ctr">
-              <a:buNone/>
-            </a:pPr>
-            <a:r>
-              <a:rPr lang="en-US" sz="1200" b="1" dirty="0">
-                <a:solidFill>
-                  <a:srgbClr val="1A2744"/>
-                </a:solidFill>
-                <a:latin typeface="Calibri" pitchFamily="34" charset="0"/>
-                <a:ea typeface="Calibri" pitchFamily="34" charset="-122"/>
-                <a:cs typeface="Calibri" pitchFamily="34" charset="-120"/>
-              </a:rPr>
-              <a:t>📍 Posizione</a:t>
-            </a:r>
-            <a:endParaRPr lang="en-US" sz="1200" dirty="0"/>
-          </a:p>
-        </p:txBody>
-      </p:sp>
-      <p:sp>
-        <p:nvSpPr>
-          <p:cNvPr id="28" name="Shape 26"/>
-          <p:cNvSpPr/>
-          <p:nvPr/>
-        </p:nvSpPr>
-        <p:spPr>
-          <a:xfrm>
-            <a:off x="4718304" y="1280160"/>
-            <a:ext cx="2057400" cy="347472"/>
-          </a:xfrm>
-          <a:prstGeom prst="rect">
-            <a:avLst/>
-          </a:prstGeom>
-          <a:solidFill>
-            <a:srgbClr val="162040"/>
-          </a:solidFill>
-          <a:ln w="12700">
-            <a:solidFill>
-              <a:srgbClr val="2A4580"/>
-            </a:solidFill>
-            <a:prstDash val="solid"/>
-          </a:ln>
-        </p:spPr>
-        <p:txBody>
-          <a:bodyPr/>
-          <a:lstStyle/>
-          <a:p>
-            <a:endParaRPr lang="it-CH"/>
-          </a:p>
-        </p:txBody>
-      </p:sp>
-      <p:sp>
-        <p:nvSpPr>
-          <p:cNvPr id="29" name="Text 27"/>
-          <p:cNvSpPr/>
-          <p:nvPr/>
-        </p:nvSpPr>
-        <p:spPr>
-          <a:xfrm>
-            <a:off x="4791456" y="1325880"/>
-            <a:ext cx="1911096" cy="256032"/>
-          </a:xfrm>
-          <a:prstGeom prst="rect">
-            <a:avLst/>
-          </a:prstGeom>
-          <a:noFill/>
-          <a:ln/>
-        </p:spPr>
-        <p:txBody>
-          <a:bodyPr wrap="square" lIns="0" tIns="0" rIns="0" bIns="0" rtlCol="0" anchor="ctr"/>
-          <a:lstStyle/>
-          <a:p>
-            <a:pPr marL="0" indent="0">
-              <a:buNone/>
-            </a:pPr>
-            <a:r>
-              <a:rPr lang="en-US" sz="1050" dirty="0">
-                <a:solidFill>
-                  <a:srgbClr val="FFFFFF"/>
-                </a:solidFill>
-                <a:latin typeface="Calibri" pitchFamily="34" charset="0"/>
-                <a:ea typeface="Calibri" pitchFamily="34" charset="-122"/>
-                <a:cs typeface="Calibri" pitchFamily="34" charset="-120"/>
-              </a:rPr>
-              <a:t>localita</a:t>
-            </a:r>
-            <a:endParaRPr lang="en-US" sz="1050" dirty="0"/>
-          </a:p>
-        </p:txBody>
-      </p:sp>
-      <p:sp>
-        <p:nvSpPr>
-          <p:cNvPr id="30" name="Shape 28"/>
-          <p:cNvSpPr/>
-          <p:nvPr/>
-        </p:nvSpPr>
-        <p:spPr>
-          <a:xfrm>
-            <a:off x="4718304" y="1691640"/>
-            <a:ext cx="2057400" cy="347472"/>
-          </a:xfrm>
-          <a:prstGeom prst="rect">
-            <a:avLst/>
-          </a:prstGeom>
-          <a:solidFill>
-            <a:srgbClr val="162040"/>
-          </a:solidFill>
-          <a:ln w="12700">
-            <a:solidFill>
-              <a:srgbClr val="2A4580"/>
-            </a:solidFill>
-            <a:prstDash val="solid"/>
-          </a:ln>
-        </p:spPr>
-        <p:txBody>
-          <a:bodyPr/>
-          <a:lstStyle/>
-          <a:p>
-            <a:endParaRPr lang="it-CH"/>
-          </a:p>
-        </p:txBody>
-      </p:sp>
-      <p:sp>
-        <p:nvSpPr>
-          <p:cNvPr id="31" name="Text 29"/>
-          <p:cNvSpPr/>
-          <p:nvPr/>
-        </p:nvSpPr>
-        <p:spPr>
-          <a:xfrm>
-            <a:off x="4791456" y="1737360"/>
-            <a:ext cx="1911096" cy="256032"/>
-          </a:xfrm>
-          <a:prstGeom prst="rect">
-            <a:avLst/>
-          </a:prstGeom>
-          <a:noFill/>
-          <a:ln/>
-        </p:spPr>
-        <p:txBody>
-          <a:bodyPr wrap="square" lIns="0" tIns="0" rIns="0" bIns="0" rtlCol="0" anchor="ctr"/>
-          <a:lstStyle/>
-          <a:p>
-            <a:pPr marL="0" indent="0">
-              <a:buNone/>
-            </a:pPr>
-            <a:r>
-              <a:rPr lang="en-US" sz="1050" dirty="0">
-                <a:solidFill>
-                  <a:srgbClr val="FFFFFF"/>
-                </a:solidFill>
-                <a:latin typeface="Calibri" pitchFamily="34" charset="0"/>
-                <a:ea typeface="Calibri" pitchFamily="34" charset="-122"/>
-                <a:cs typeface="Calibri" pitchFamily="34" charset="-120"/>
-              </a:rPr>
-              <a:t>via</a:t>
-            </a:r>
-            <a:endParaRPr lang="en-US" sz="1050" dirty="0"/>
-          </a:p>
-        </p:txBody>
-      </p:sp>
-      <p:sp>
-        <p:nvSpPr>
-          <p:cNvPr id="32" name="Shape 30"/>
-          <p:cNvSpPr/>
-          <p:nvPr/>
-        </p:nvSpPr>
-        <p:spPr>
-          <a:xfrm>
-            <a:off x="4718304" y="2103120"/>
-            <a:ext cx="2057400" cy="347472"/>
-          </a:xfrm>
-          <a:prstGeom prst="rect">
-            <a:avLst/>
-          </a:prstGeom>
-          <a:solidFill>
-            <a:srgbClr val="162040"/>
-          </a:solidFill>
-          <a:ln w="12700">
-            <a:solidFill>
-              <a:srgbClr val="2A4580"/>
-            </a:solidFill>
-            <a:prstDash val="solid"/>
-          </a:ln>
-        </p:spPr>
-        <p:txBody>
-          <a:bodyPr/>
-          <a:lstStyle/>
-          <a:p>
-            <a:endParaRPr lang="it-CH"/>
-          </a:p>
-        </p:txBody>
-      </p:sp>
-      <p:sp>
-        <p:nvSpPr>
-          <p:cNvPr id="33" name="Text 31"/>
-          <p:cNvSpPr/>
-          <p:nvPr/>
-        </p:nvSpPr>
-        <p:spPr>
-          <a:xfrm>
-            <a:off x="4791456" y="2148840"/>
-            <a:ext cx="1911096" cy="256032"/>
-          </a:xfrm>
-          <a:prstGeom prst="rect">
-            <a:avLst/>
-          </a:prstGeom>
-          <a:noFill/>
-          <a:ln/>
-        </p:spPr>
-        <p:txBody>
-          <a:bodyPr wrap="square" lIns="0" tIns="0" rIns="0" bIns="0" rtlCol="0" anchor="ctr"/>
-          <a:lstStyle/>
-          <a:p>
-            <a:pPr marL="0" indent="0">
-              <a:buNone/>
-            </a:pPr>
-            <a:r>
-              <a:rPr lang="en-US" sz="1050" dirty="0">
-                <a:solidFill>
-                  <a:srgbClr val="FFFFFF"/>
-                </a:solidFill>
-                <a:latin typeface="Calibri" pitchFamily="34" charset="0"/>
-                <a:ea typeface="Calibri" pitchFamily="34" charset="-122"/>
-                <a:cs typeface="Calibri" pitchFamily="34" charset="-120"/>
-              </a:rPr>
-              <a:t>numero_civico</a:t>
-            </a:r>
-            <a:endParaRPr lang="en-US" sz="1050" dirty="0"/>
-          </a:p>
-        </p:txBody>
-      </p:sp>
-      <p:sp>
-        <p:nvSpPr>
-          <p:cNvPr id="34" name="Shape 32"/>
-          <p:cNvSpPr/>
-          <p:nvPr/>
-        </p:nvSpPr>
-        <p:spPr>
-          <a:xfrm>
-            <a:off x="4718304" y="2514600"/>
-            <a:ext cx="2057400" cy="347472"/>
-          </a:xfrm>
-          <a:prstGeom prst="rect">
-            <a:avLst/>
-          </a:prstGeom>
-          <a:solidFill>
-            <a:srgbClr val="162040"/>
-          </a:solidFill>
-          <a:ln w="12700">
-            <a:solidFill>
-              <a:srgbClr val="2A4580"/>
-            </a:solidFill>
-            <a:prstDash val="solid"/>
-          </a:ln>
-        </p:spPr>
-        <p:txBody>
-          <a:bodyPr/>
-          <a:lstStyle/>
-          <a:p>
-            <a:endParaRPr lang="it-CH"/>
-          </a:p>
-        </p:txBody>
-      </p:sp>
-      <p:sp>
-        <p:nvSpPr>
-          <p:cNvPr id="35" name="Text 33"/>
-          <p:cNvSpPr/>
-          <p:nvPr/>
-        </p:nvSpPr>
-        <p:spPr>
-          <a:xfrm>
-            <a:off x="4791456" y="2560320"/>
-            <a:ext cx="1911096" cy="256032"/>
-          </a:xfrm>
-          <a:prstGeom prst="rect">
-            <a:avLst/>
-          </a:prstGeom>
-          <a:noFill/>
-          <a:ln/>
-        </p:spPr>
-        <p:txBody>
-          <a:bodyPr wrap="square" lIns="0" tIns="0" rIns="0" bIns="0" rtlCol="0" anchor="ctr"/>
-          <a:lstStyle/>
-          <a:p>
-            <a:pPr marL="0" indent="0">
-              <a:buNone/>
-            </a:pPr>
-            <a:r>
-              <a:rPr lang="en-US" sz="1050" dirty="0">
-                <a:solidFill>
-                  <a:srgbClr val="FFFFFF"/>
-                </a:solidFill>
-                <a:latin typeface="Calibri" pitchFamily="34" charset="0"/>
-                <a:ea typeface="Calibri" pitchFamily="34" charset="-122"/>
-                <a:cs typeface="Calibri" pitchFamily="34" charset="-120"/>
-              </a:rPr>
-              <a:t>direzione</a:t>
-            </a:r>
-            <a:endParaRPr lang="en-US" sz="1050" dirty="0"/>
-          </a:p>
-        </p:txBody>
-      </p:sp>
-      <p:sp>
-        <p:nvSpPr>
-          <p:cNvPr id="36" name="Shape 34"/>
-          <p:cNvSpPr/>
-          <p:nvPr/>
-        </p:nvSpPr>
-        <p:spPr>
-          <a:xfrm>
-            <a:off x="4718304" y="2926080"/>
-            <a:ext cx="2057400" cy="347472"/>
-          </a:xfrm>
-          <a:prstGeom prst="rect">
-            <a:avLst/>
-          </a:prstGeom>
-          <a:solidFill>
-            <a:srgbClr val="162040"/>
-          </a:solidFill>
-          <a:ln w="12700">
-            <a:solidFill>
-              <a:srgbClr val="2A4580"/>
-            </a:solidFill>
-            <a:prstDash val="solid"/>
-          </a:ln>
-        </p:spPr>
-        <p:txBody>
-          <a:bodyPr/>
-          <a:lstStyle/>
-          <a:p>
-            <a:endParaRPr lang="it-CH"/>
-          </a:p>
-        </p:txBody>
-      </p:sp>
-      <p:sp>
-        <p:nvSpPr>
-          <p:cNvPr id="37" name="Text 35"/>
-          <p:cNvSpPr/>
-          <p:nvPr/>
-        </p:nvSpPr>
-        <p:spPr>
-          <a:xfrm>
-            <a:off x="4791456" y="2971800"/>
-            <a:ext cx="1911096" cy="256032"/>
-          </a:xfrm>
-          <a:prstGeom prst="rect">
-            <a:avLst/>
-          </a:prstGeom>
-          <a:noFill/>
-          <a:ln/>
-        </p:spPr>
-        <p:txBody>
-          <a:bodyPr wrap="square" lIns="0" tIns="0" rIns="0" bIns="0" rtlCol="0" anchor="ctr"/>
-          <a:lstStyle/>
-          <a:p>
-            <a:pPr marL="0" indent="0">
-              <a:buNone/>
-            </a:pPr>
-            <a:r>
-              <a:rPr lang="en-US" sz="1050" dirty="0">
-                <a:solidFill>
-                  <a:srgbClr val="FFFFFF"/>
-                </a:solidFill>
-                <a:latin typeface="Calibri" pitchFamily="34" charset="0"/>
-                <a:ea typeface="Calibri" pitchFamily="34" charset="-122"/>
-                <a:cs typeface="Calibri" pitchFamily="34" charset="-120"/>
-              </a:rPr>
-              <a:t>coordinate</a:t>
-            </a:r>
-            <a:endParaRPr lang="en-US" sz="1050" dirty="0"/>
-          </a:p>
-        </p:txBody>
-      </p:sp>
-      <p:sp>
-        <p:nvSpPr>
-          <p:cNvPr id="38" name="Shape 36"/>
-          <p:cNvSpPr/>
-          <p:nvPr/>
-        </p:nvSpPr>
-        <p:spPr>
-          <a:xfrm>
-            <a:off x="4718304" y="3337560"/>
-            <a:ext cx="2057400" cy="347472"/>
-          </a:xfrm>
-          <a:prstGeom prst="rect">
-            <a:avLst/>
-          </a:prstGeom>
-          <a:solidFill>
-            <a:srgbClr val="162040"/>
-          </a:solidFill>
-          <a:ln w="12700">
-            <a:solidFill>
-              <a:srgbClr val="2A4580"/>
-            </a:solidFill>
-            <a:prstDash val="solid"/>
-          </a:ln>
-        </p:spPr>
-        <p:txBody>
-          <a:bodyPr/>
-          <a:lstStyle/>
-          <a:p>
-            <a:endParaRPr lang="it-CH"/>
-          </a:p>
-        </p:txBody>
-      </p:sp>
-      <p:sp>
-        <p:nvSpPr>
-          <p:cNvPr id="39" name="Text 37"/>
-          <p:cNvSpPr/>
-          <p:nvPr/>
-        </p:nvSpPr>
-        <p:spPr>
-          <a:xfrm>
-            <a:off x="4791456" y="3383280"/>
-            <a:ext cx="1911096" cy="256032"/>
-          </a:xfrm>
-          <a:prstGeom prst="rect">
-            <a:avLst/>
-          </a:prstGeom>
-          <a:noFill/>
-          <a:ln/>
-        </p:spPr>
-        <p:txBody>
-          <a:bodyPr wrap="square" lIns="0" tIns="0" rIns="0" bIns="0" rtlCol="0" anchor="ctr"/>
-          <a:lstStyle/>
-          <a:p>
-            <a:pPr marL="0" indent="0">
-              <a:buNone/>
-            </a:pPr>
-            <a:r>
-              <a:rPr lang="en-US" sz="1050" dirty="0">
-                <a:solidFill>
-                  <a:srgbClr val="FFFFFF"/>
-                </a:solidFill>
-                <a:latin typeface="Calibri" pitchFamily="34" charset="0"/>
-                <a:ea typeface="Calibri" pitchFamily="34" charset="-122"/>
-                <a:cs typeface="Calibri" pitchFamily="34" charset="-120"/>
-              </a:rPr>
-              <a:t>geo_point</a:t>
-            </a:r>
-            <a:endParaRPr lang="en-US" sz="1050" dirty="0"/>
-          </a:p>
-        </p:txBody>
-      </p:sp>
-      <p:sp>
-        <p:nvSpPr>
-          <p:cNvPr id="40" name="Shape 38"/>
-          <p:cNvSpPr/>
-          <p:nvPr/>
-        </p:nvSpPr>
-        <p:spPr>
-          <a:xfrm>
-            <a:off x="6894576" y="777240"/>
-            <a:ext cx="2057400" cy="365760"/>
-          </a:xfrm>
-          <a:prstGeom prst="rect">
-            <a:avLst/>
-          </a:prstGeom>
-          <a:solidFill>
-            <a:srgbClr val="9B59B6"/>
-          </a:solidFill>
-          <a:ln w="12700">
-            <a:solidFill>
-              <a:srgbClr val="9B59B6"/>
-            </a:solidFill>
-            <a:prstDash val="solid"/>
-          </a:ln>
-        </p:spPr>
-        <p:txBody>
-          <a:bodyPr/>
-          <a:lstStyle/>
-          <a:p>
-            <a:endParaRPr lang="it-CH"/>
-          </a:p>
-        </p:txBody>
-      </p:sp>
-      <p:sp>
-        <p:nvSpPr>
-          <p:cNvPr id="41" name="Text 39"/>
-          <p:cNvSpPr/>
-          <p:nvPr/>
-        </p:nvSpPr>
-        <p:spPr>
-          <a:xfrm>
-            <a:off x="6940296" y="795528"/>
-            <a:ext cx="1965960" cy="329184"/>
-          </a:xfrm>
-          <a:prstGeom prst="rect">
-            <a:avLst/>
-          </a:prstGeom>
-          <a:noFill/>
-          <a:ln/>
-        </p:spPr>
-        <p:txBody>
-          <a:bodyPr wrap="square" lIns="0" tIns="0" rIns="0" bIns="0" rtlCol="0" anchor="ctr"/>
-          <a:lstStyle/>
-          <a:p>
-            <a:pPr marL="0" indent="0" algn="ctr">
-              <a:buNone/>
-            </a:pPr>
-            <a:r>
-              <a:rPr lang="en-US" sz="1200" b="1" dirty="0">
-                <a:solidFill>
-                  <a:srgbClr val="1A2744"/>
-                </a:solidFill>
-                <a:latin typeface="Calibri" pitchFamily="34" charset="0"/>
-                <a:ea typeface="Calibri" pitchFamily="34" charset="-122"/>
-                <a:cs typeface="Calibri" pitchFamily="34" charset="-120"/>
-              </a:rPr>
-              <a:t>📊 Statistiche</a:t>
-            </a:r>
-            <a:endParaRPr lang="en-US" sz="1200" dirty="0"/>
-          </a:p>
-        </p:txBody>
-      </p:sp>
-      <p:sp>
-        <p:nvSpPr>
-          <p:cNvPr id="42" name="Shape 40"/>
-          <p:cNvSpPr/>
-          <p:nvPr/>
-        </p:nvSpPr>
-        <p:spPr>
-          <a:xfrm>
-            <a:off x="6894576" y="1280160"/>
-            <a:ext cx="2057400" cy="347472"/>
-          </a:xfrm>
-          <a:prstGeom prst="rect">
-            <a:avLst/>
-          </a:prstGeom>
-          <a:solidFill>
-            <a:srgbClr val="162040"/>
-          </a:solidFill>
-          <a:ln w="12700">
-            <a:solidFill>
-              <a:srgbClr val="2A4580"/>
-            </a:solidFill>
-            <a:prstDash val="solid"/>
-          </a:ln>
-        </p:spPr>
-        <p:txBody>
-          <a:bodyPr/>
-          <a:lstStyle/>
-          <a:p>
-            <a:endParaRPr lang="it-CH"/>
-          </a:p>
-        </p:txBody>
-      </p:sp>
-      <p:sp>
-        <p:nvSpPr>
-          <p:cNvPr id="43" name="Text 41"/>
-          <p:cNvSpPr/>
-          <p:nvPr/>
-        </p:nvSpPr>
-        <p:spPr>
-          <a:xfrm>
-            <a:off x="6967728" y="1325880"/>
-            <a:ext cx="1911096" cy="256032"/>
-          </a:xfrm>
-          <a:prstGeom prst="rect">
-            <a:avLst/>
-          </a:prstGeom>
-          <a:noFill/>
-          <a:ln/>
-        </p:spPr>
-        <p:txBody>
-          <a:bodyPr wrap="square" lIns="0" tIns="0" rIns="0" bIns="0" rtlCol="0" anchor="ctr"/>
-          <a:lstStyle/>
-          <a:p>
-            <a:pPr marL="0" indent="0">
-              <a:buNone/>
-            </a:pPr>
-            <a:r>
-              <a:rPr lang="en-US" sz="1050" dirty="0">
-                <a:solidFill>
-                  <a:srgbClr val="FFFFFF"/>
-                </a:solidFill>
-                <a:latin typeface="Calibri" pitchFamily="34" charset="0"/>
-                <a:ea typeface="Calibri" pitchFamily="34" charset="-122"/>
-                <a:cs typeface="Calibri" pitchFamily="34" charset="-120"/>
-              </a:rPr>
-              <a:t>zona_limite</a:t>
-            </a:r>
-            <a:endParaRPr lang="en-US" sz="1050" dirty="0"/>
-          </a:p>
-        </p:txBody>
-      </p:sp>
-      <p:sp>
-        <p:nvSpPr>
-          <p:cNvPr id="44" name="Shape 42"/>
-          <p:cNvSpPr/>
-          <p:nvPr/>
-        </p:nvSpPr>
-        <p:spPr>
-          <a:xfrm>
-            <a:off x="6894576" y="1691640"/>
-            <a:ext cx="2057400" cy="347472"/>
-          </a:xfrm>
-          <a:prstGeom prst="rect">
-            <a:avLst/>
-          </a:prstGeom>
-          <a:solidFill>
-            <a:srgbClr val="162040"/>
-          </a:solidFill>
-          <a:ln w="12700">
-            <a:solidFill>
-              <a:srgbClr val="2A4580"/>
-            </a:solidFill>
-            <a:prstDash val="solid"/>
-          </a:ln>
-        </p:spPr>
-        <p:txBody>
-          <a:bodyPr/>
-          <a:lstStyle/>
-          <a:p>
-            <a:endParaRPr lang="it-CH"/>
-          </a:p>
-        </p:txBody>
-      </p:sp>
-      <p:sp>
-        <p:nvSpPr>
-          <p:cNvPr id="45" name="Text 43"/>
-          <p:cNvSpPr/>
-          <p:nvPr/>
-        </p:nvSpPr>
-        <p:spPr>
-          <a:xfrm>
-            <a:off x="6967728" y="1737360"/>
-            <a:ext cx="1911096" cy="256032"/>
-          </a:xfrm>
-          <a:prstGeom prst="rect">
-            <a:avLst/>
-          </a:prstGeom>
-          <a:noFill/>
-          <a:ln/>
-        </p:spPr>
-        <p:txBody>
-          <a:bodyPr wrap="square" lIns="0" tIns="0" rIns="0" bIns="0" rtlCol="0" anchor="ctr"/>
-          <a:lstStyle/>
-          <a:p>
-            <a:pPr marL="0" indent="0">
-              <a:buNone/>
-            </a:pPr>
-            <a:r>
-              <a:rPr lang="en-US" sz="1050" dirty="0">
-                <a:solidFill>
-                  <a:srgbClr val="FFFFFF"/>
-                </a:solidFill>
-                <a:latin typeface="Calibri" pitchFamily="34" charset="0"/>
-                <a:ea typeface="Calibri" pitchFamily="34" charset="-122"/>
-                <a:cs typeface="Calibri" pitchFamily="34" charset="-120"/>
-              </a:rPr>
-              <a:t>tasso_infrazioni_pct</a:t>
-            </a:r>
-            <a:endParaRPr lang="en-US" sz="1050" dirty="0"/>
-          </a:p>
-        </p:txBody>
-      </p:sp>
-      <p:sp>
-        <p:nvSpPr>
-          <p:cNvPr id="46" name="Shape 44"/>
-          <p:cNvSpPr/>
-          <p:nvPr/>
-        </p:nvSpPr>
-        <p:spPr>
-          <a:xfrm>
-            <a:off x="6894576" y="2103120"/>
-            <a:ext cx="2057400" cy="347472"/>
-          </a:xfrm>
-          <a:prstGeom prst="rect">
-            <a:avLst/>
-          </a:prstGeom>
-          <a:solidFill>
-            <a:srgbClr val="162040"/>
-          </a:solidFill>
-          <a:ln w="12700">
-            <a:solidFill>
-              <a:srgbClr val="2A4580"/>
-            </a:solidFill>
-            <a:prstDash val="solid"/>
-          </a:ln>
-        </p:spPr>
-        <p:txBody>
-          <a:bodyPr/>
-          <a:lstStyle/>
-          <a:p>
-            <a:endParaRPr lang="it-CH"/>
-          </a:p>
-        </p:txBody>
-      </p:sp>
-      <p:sp>
-        <p:nvSpPr>
-          <p:cNvPr id="47" name="Text 45"/>
-          <p:cNvSpPr/>
-          <p:nvPr/>
-        </p:nvSpPr>
-        <p:spPr>
-          <a:xfrm>
-            <a:off x="6967728" y="2148840"/>
-            <a:ext cx="1911096" cy="256032"/>
-          </a:xfrm>
-          <a:prstGeom prst="rect">
-            <a:avLst/>
-          </a:prstGeom>
-          <a:noFill/>
-          <a:ln/>
-        </p:spPr>
-        <p:txBody>
-          <a:bodyPr wrap="square" lIns="0" tIns="0" rIns="0" bIns="0" rtlCol="0" anchor="ctr"/>
-          <a:lstStyle/>
-          <a:p>
-            <a:pPr marL="0" indent="0">
-              <a:buNone/>
-            </a:pPr>
-            <a:r>
-              <a:rPr lang="en-US" sz="1050" dirty="0">
-                <a:solidFill>
-                  <a:srgbClr val="FFFFFF"/>
-                </a:solidFill>
-                <a:latin typeface="Calibri" pitchFamily="34" charset="0"/>
-                <a:ea typeface="Calibri" pitchFamily="34" charset="-122"/>
-                <a:cs typeface="Calibri" pitchFamily="34" charset="-120"/>
-              </a:rPr>
-              <a:t>v50</a:t>
-            </a:r>
-            <a:endParaRPr lang="en-US" sz="1050" dirty="0"/>
-          </a:p>
-        </p:txBody>
-      </p:sp>
-      <p:sp>
-        <p:nvSpPr>
-          <p:cNvPr id="48" name="Shape 46"/>
-          <p:cNvSpPr/>
-          <p:nvPr/>
-        </p:nvSpPr>
-        <p:spPr>
-          <a:xfrm>
-            <a:off x="6894576" y="2514600"/>
-            <a:ext cx="2057400" cy="347472"/>
-          </a:xfrm>
-          <a:prstGeom prst="rect">
-            <a:avLst/>
-          </a:prstGeom>
-          <a:solidFill>
-            <a:srgbClr val="162040"/>
-          </a:solidFill>
-          <a:ln w="12700">
-            <a:solidFill>
-              <a:srgbClr val="2A4580"/>
-            </a:solidFill>
-            <a:prstDash val="solid"/>
-          </a:ln>
-        </p:spPr>
-        <p:txBody>
-          <a:bodyPr/>
-          <a:lstStyle/>
-          <a:p>
-            <a:endParaRPr lang="it-CH"/>
-          </a:p>
-        </p:txBody>
-      </p:sp>
-      <p:sp>
-        <p:nvSpPr>
-          <p:cNvPr id="49" name="Text 47"/>
-          <p:cNvSpPr/>
-          <p:nvPr/>
-        </p:nvSpPr>
-        <p:spPr>
-          <a:xfrm>
-            <a:off x="6967728" y="2560320"/>
-            <a:ext cx="1911096" cy="256032"/>
-          </a:xfrm>
-          <a:prstGeom prst="rect">
-            <a:avLst/>
-          </a:prstGeom>
-          <a:noFill/>
-          <a:ln/>
-        </p:spPr>
-        <p:txBody>
-          <a:bodyPr wrap="square" lIns="0" tIns="0" rIns="0" bIns="0" rtlCol="0" anchor="ctr"/>
-          <a:lstStyle/>
-          <a:p>
-            <a:pPr marL="0" indent="0">
-              <a:buNone/>
-            </a:pPr>
-            <a:r>
-              <a:rPr lang="en-US" sz="1050" dirty="0">
-                <a:solidFill>
-                  <a:srgbClr val="FFFFFF"/>
-                </a:solidFill>
-                <a:latin typeface="Calibri" pitchFamily="34" charset="0"/>
-                <a:ea typeface="Calibri" pitchFamily="34" charset="-122"/>
-                <a:cs typeface="Calibri" pitchFamily="34" charset="-120"/>
-              </a:rPr>
-              <a:t>v85</a:t>
-            </a:r>
-            <a:endParaRPr lang="en-US" sz="1050" dirty="0"/>
-          </a:p>
-        </p:txBody>
-      </p:sp>
-      <p:sp>
-        <p:nvSpPr>
-          <p:cNvPr id="50" name="Shape 48"/>
-          <p:cNvSpPr/>
-          <p:nvPr/>
-        </p:nvSpPr>
-        <p:spPr>
-          <a:xfrm>
-            <a:off x="6894576" y="2926080"/>
-            <a:ext cx="2057400" cy="347472"/>
-          </a:xfrm>
-          <a:prstGeom prst="rect">
-            <a:avLst/>
-          </a:prstGeom>
-          <a:solidFill>
-            <a:srgbClr val="162040"/>
-          </a:solidFill>
-          <a:ln w="12700">
-            <a:solidFill>
-              <a:srgbClr val="2A4580"/>
-            </a:solidFill>
-            <a:prstDash val="solid"/>
-          </a:ln>
-        </p:spPr>
-        <p:txBody>
-          <a:bodyPr/>
-          <a:lstStyle/>
-          <a:p>
-            <a:endParaRPr lang="it-CH"/>
-          </a:p>
-        </p:txBody>
-      </p:sp>
-      <p:sp>
-        <p:nvSpPr>
-          <p:cNvPr id="51" name="Text 49"/>
-          <p:cNvSpPr/>
-          <p:nvPr/>
-        </p:nvSpPr>
-        <p:spPr>
-          <a:xfrm>
-            <a:off x="6967728" y="2971800"/>
-            <a:ext cx="1911096" cy="256032"/>
-          </a:xfrm>
-          <a:prstGeom prst="rect">
-            <a:avLst/>
-          </a:prstGeom>
-          <a:noFill/>
-          <a:ln/>
-        </p:spPr>
-        <p:txBody>
-          <a:bodyPr wrap="square" lIns="0" tIns="0" rIns="0" bIns="0" rtlCol="0" anchor="ctr"/>
-          <a:lstStyle/>
-          <a:p>
-            <a:pPr marL="0" indent="0">
-              <a:buNone/>
-            </a:pPr>
-            <a:r>
-              <a:rPr lang="en-US" sz="1050" dirty="0">
-                <a:solidFill>
-                  <a:srgbClr val="FFFFFF"/>
-                </a:solidFill>
-                <a:latin typeface="Calibri" pitchFamily="34" charset="0"/>
-                <a:ea typeface="Calibri" pitchFamily="34" charset="-122"/>
-                <a:cs typeface="Calibri" pitchFamily="34" charset="-120"/>
-              </a:rPr>
-              <a:t>id_postazione</a:t>
-            </a:r>
-            <a:endParaRPr lang="en-US" sz="1050" dirty="0"/>
-          </a:p>
-        </p:txBody>
-      </p:sp>
-      <p:sp>
-        <p:nvSpPr>
-          <p:cNvPr id="52" name="Shape 50"/>
-          <p:cNvSpPr/>
-          <p:nvPr/>
-        </p:nvSpPr>
-        <p:spPr>
-          <a:xfrm>
-            <a:off x="365760" y="4160520"/>
-            <a:ext cx="8503920" cy="749808"/>
-          </a:xfrm>
-          <a:prstGeom prst="rect">
-            <a:avLst/>
-          </a:prstGeom>
-          <a:solidFill>
-            <a:srgbClr val="1E3057"/>
-          </a:solidFill>
-          <a:ln w="12700">
-            <a:solidFill>
-              <a:srgbClr val="00B4D8"/>
-            </a:solidFill>
-            <a:prstDash val="solid"/>
-          </a:ln>
-        </p:spPr>
-        <p:txBody>
-          <a:bodyPr/>
-          <a:lstStyle/>
-          <a:p>
-            <a:endParaRPr lang="it-CH"/>
-          </a:p>
-        </p:txBody>
-      </p:sp>
-      <p:sp>
-        <p:nvSpPr>
-          <p:cNvPr id="53" name="Text 51"/>
-          <p:cNvSpPr/>
-          <p:nvPr/>
-        </p:nvSpPr>
-        <p:spPr>
-          <a:xfrm>
-            <a:off x="502920" y="4206240"/>
-            <a:ext cx="1371600" cy="228600"/>
-          </a:xfrm>
-          <a:prstGeom prst="rect">
-            <a:avLst/>
-          </a:prstGeom>
-          <a:noFill/>
-          <a:ln/>
-        </p:spPr>
-        <p:txBody>
-          <a:bodyPr wrap="square" lIns="0" tIns="0" rIns="0" bIns="0" rtlCol="0" anchor="ctr"/>
-          <a:lstStyle/>
-          <a:p>
-            <a:pPr marL="0" indent="0">
-              <a:buNone/>
-            </a:pPr>
-            <a:r>
-              <a:rPr lang="en-US" sz="1000" b="1" dirty="0">
-                <a:solidFill>
-                  <a:srgbClr val="00B4D8"/>
-                </a:solidFill>
-                <a:latin typeface="Calibri" pitchFamily="34" charset="0"/>
-                <a:ea typeface="Calibri" pitchFamily="34" charset="-122"/>
-                <a:cs typeface="Calibri" pitchFamily="34" charset="-120"/>
-              </a:rPr>
-              <a:t>Esempio riga:</a:t>
-            </a:r>
-            <a:endParaRPr lang="en-US" sz="1000" dirty="0"/>
-          </a:p>
-        </p:txBody>
-      </p:sp>
-      <p:sp>
-        <p:nvSpPr>
-          <p:cNvPr id="54" name="Text 52"/>
-          <p:cNvSpPr/>
-          <p:nvPr/>
-        </p:nvSpPr>
-        <p:spPr>
-          <a:xfrm>
-            <a:off x="502920" y="4453128"/>
-            <a:ext cx="8229600" cy="384048"/>
-          </a:xfrm>
-          <a:prstGeom prst="rect">
-            <a:avLst/>
-          </a:prstGeom>
-          <a:noFill/>
-          <a:ln/>
-        </p:spPr>
-        <p:txBody>
-          <a:bodyPr wrap="square" lIns="0" tIns="0" rIns="0" bIns="0" rtlCol="0" anchor="ctr"/>
-          <a:lstStyle/>
-          <a:p>
-            <a:r>
-              <a:rPr lang="en-US" sz="1000" dirty="0">
-                <a:solidFill>
-                  <a:srgbClr val="B0BEC5"/>
-                </a:solidFill>
-                <a:latin typeface="Consolas" pitchFamily="34" charset="0"/>
-                <a:ea typeface="Consolas" pitchFamily="34" charset="-122"/>
-                <a:cs typeface="Consolas" pitchFamily="34" charset="-120"/>
-              </a:rPr>
-              <a:t>2025-04-06 20:07:05  |  ID: 1003  | </a:t>
-            </a:r>
-            <a:r>
-              <a:rPr lang="en-US" sz="1000" dirty="0" err="1">
-                <a:solidFill>
-                  <a:srgbClr val="B0BEC5"/>
-                </a:solidFill>
-                <a:latin typeface="Consolas" pitchFamily="34" charset="0"/>
-                <a:ea typeface="Consolas" pitchFamily="34" charset="-122"/>
-                <a:cs typeface="Consolas" pitchFamily="34" charset="-120"/>
-              </a:rPr>
-              <a:t>Direzione_ID</a:t>
-            </a:r>
-            <a:r>
-              <a:rPr lang="en-US" sz="1000" dirty="0">
-                <a:solidFill>
-                  <a:srgbClr val="B0BEC5"/>
-                </a:solidFill>
-                <a:latin typeface="Consolas" pitchFamily="34" charset="0"/>
-                <a:ea typeface="Consolas" pitchFamily="34" charset="-122"/>
-                <a:cs typeface="Consolas" pitchFamily="34" charset="-120"/>
-              </a:rPr>
-              <a:t>: 1 | </a:t>
-            </a:r>
-            <a:r>
-              <a:rPr lang="en-US" sz="1000" dirty="0" err="1">
-                <a:solidFill>
-                  <a:srgbClr val="B0BEC5"/>
-                </a:solidFill>
-                <a:latin typeface="Consolas" pitchFamily="34" charset="0"/>
-                <a:ea typeface="Consolas" pitchFamily="34" charset="-122"/>
-                <a:cs typeface="Consolas" pitchFamily="34" charset="-120"/>
-              </a:rPr>
-              <a:t>Inizio</a:t>
-            </a:r>
-            <a:r>
-              <a:rPr lang="en-US" sz="1000" dirty="0">
-                <a:solidFill>
-                  <a:srgbClr val="B0BEC5"/>
-                </a:solidFill>
-                <a:latin typeface="Consolas" pitchFamily="34" charset="0"/>
-                <a:ea typeface="Consolas" pitchFamily="34" charset="-122"/>
-                <a:cs typeface="Consolas" pitchFamily="34" charset="-120"/>
-              </a:rPr>
-              <a:t> </a:t>
-            </a:r>
-            <a:r>
-              <a:rPr lang="en-US" sz="1000" dirty="0" err="1">
-                <a:solidFill>
-                  <a:srgbClr val="B0BEC5"/>
-                </a:solidFill>
-                <a:latin typeface="Consolas" pitchFamily="34" charset="0"/>
-                <a:ea typeface="Consolas" pitchFamily="34" charset="-122"/>
-                <a:cs typeface="Consolas" pitchFamily="34" charset="-120"/>
-              </a:rPr>
-              <a:t>misurazione</a:t>
-            </a:r>
-            <a:r>
-              <a:rPr lang="en-US" sz="1000" dirty="0">
-                <a:solidFill>
-                  <a:srgbClr val="B0BEC5"/>
-                </a:solidFill>
-                <a:latin typeface="Consolas" pitchFamily="34" charset="0"/>
-                <a:ea typeface="Consolas" pitchFamily="34" charset="-122"/>
-                <a:cs typeface="Consolas" pitchFamily="34" charset="-120"/>
-              </a:rPr>
-              <a:t>: 2025-04-05 | Fine </a:t>
-            </a:r>
-            <a:r>
-              <a:rPr lang="en-US" sz="1000" dirty="0" err="1">
-                <a:solidFill>
-                  <a:srgbClr val="B0BEC5"/>
-                </a:solidFill>
-                <a:latin typeface="Consolas" pitchFamily="34" charset="0"/>
-                <a:ea typeface="Consolas" pitchFamily="34" charset="-122"/>
-                <a:cs typeface="Consolas" pitchFamily="34" charset="-120"/>
-              </a:rPr>
-              <a:t>misurazione</a:t>
-            </a:r>
-            <a:r>
-              <a:rPr lang="en-US" sz="1000" dirty="0">
-                <a:solidFill>
-                  <a:srgbClr val="B0BEC5"/>
-                </a:solidFill>
-                <a:latin typeface="Consolas" pitchFamily="34" charset="0"/>
-                <a:ea typeface="Consolas" pitchFamily="34" charset="-122"/>
-                <a:cs typeface="Consolas" pitchFamily="34" charset="-120"/>
-              </a:rPr>
-              <a:t>: 2025-04-10 | Zona: 30km/h | </a:t>
-            </a:r>
-            <a:r>
-              <a:rPr lang="en-US" sz="1000" dirty="0" err="1">
-                <a:solidFill>
-                  <a:srgbClr val="B0BEC5"/>
-                </a:solidFill>
-                <a:latin typeface="Consolas" pitchFamily="34" charset="0"/>
-                <a:ea typeface="Consolas" pitchFamily="34" charset="-122"/>
-                <a:cs typeface="Consolas" pitchFamily="34" charset="-120"/>
-              </a:rPr>
-              <a:t>Direzione</a:t>
-            </a:r>
-            <a:r>
-              <a:rPr lang="en-US" sz="1000" dirty="0">
-                <a:solidFill>
-                  <a:srgbClr val="B0BEC5"/>
-                </a:solidFill>
-                <a:latin typeface="Consolas" pitchFamily="34" charset="0"/>
-                <a:ea typeface="Consolas" pitchFamily="34" charset="-122"/>
-                <a:cs typeface="Consolas" pitchFamily="34" charset="-120"/>
-              </a:rPr>
-              <a:t>: </a:t>
-            </a:r>
-            <a:r>
-              <a:rPr lang="en-US" sz="1000" dirty="0" err="1">
-                <a:solidFill>
-                  <a:srgbClr val="B0BEC5"/>
-                </a:solidFill>
-                <a:latin typeface="Consolas" pitchFamily="34" charset="0"/>
-                <a:ea typeface="Consolas" pitchFamily="34" charset="-122"/>
-                <a:cs typeface="Consolas" pitchFamily="34" charset="-120"/>
-              </a:rPr>
-              <a:t>Holbeinplatz</a:t>
-            </a:r>
-            <a:r>
-              <a:rPr lang="en-US" sz="1000" dirty="0">
-                <a:solidFill>
-                  <a:srgbClr val="B0BEC5"/>
-                </a:solidFill>
-                <a:latin typeface="Consolas" pitchFamily="34" charset="0"/>
-                <a:ea typeface="Consolas" pitchFamily="34" charset="-122"/>
-                <a:cs typeface="Consolas" pitchFamily="34" charset="-120"/>
-              </a:rPr>
-              <a:t> | Coordinate: xxx | Tasso di </a:t>
-            </a:r>
-            <a:r>
-              <a:rPr lang="en-US" sz="1000" dirty="0" err="1">
-                <a:solidFill>
-                  <a:srgbClr val="B0BEC5"/>
-                </a:solidFill>
-                <a:latin typeface="Consolas" pitchFamily="34" charset="0"/>
-                <a:ea typeface="Consolas" pitchFamily="34" charset="-122"/>
-                <a:cs typeface="Consolas" pitchFamily="34" charset="-120"/>
-              </a:rPr>
-              <a:t>infrazione</a:t>
-            </a:r>
-            <a:r>
-              <a:rPr lang="en-US" sz="1000" dirty="0">
-                <a:solidFill>
-                  <a:srgbClr val="B0BEC5"/>
-                </a:solidFill>
-                <a:latin typeface="Consolas" pitchFamily="34" charset="0"/>
-                <a:ea typeface="Consolas" pitchFamily="34" charset="-122"/>
-                <a:cs typeface="Consolas" pitchFamily="34" charset="-120"/>
-              </a:rPr>
-              <a:t>: 9.93 |  </a:t>
-            </a:r>
-            <a:r>
-              <a:rPr lang="en-US" sz="1000" dirty="0" err="1">
-                <a:solidFill>
-                  <a:srgbClr val="B0BEC5"/>
-                </a:solidFill>
-                <a:latin typeface="Consolas" pitchFamily="34" charset="0"/>
-                <a:ea typeface="Consolas" pitchFamily="34" charset="-122"/>
-                <a:cs typeface="Consolas" pitchFamily="34" charset="-120"/>
-              </a:rPr>
-              <a:t>Velocità</a:t>
-            </a:r>
-            <a:r>
-              <a:rPr lang="en-US" sz="1000" dirty="0">
-                <a:solidFill>
-                  <a:srgbClr val="B0BEC5"/>
-                </a:solidFill>
-                <a:latin typeface="Consolas" pitchFamily="34" charset="0"/>
-                <a:ea typeface="Consolas" pitchFamily="34" charset="-122"/>
-                <a:cs typeface="Consolas" pitchFamily="34" charset="-120"/>
-              </a:rPr>
-              <a:t>: 32.0 km/h | …</a:t>
-            </a:r>
-            <a:endParaRPr lang="en-US" sz="1000" dirty="0"/>
-          </a:p>
-        </p:txBody>
-      </p:sp>
-    </p:spTree>
-  </p:cSld>
-  <p:clrMapOvr>
-    <a:masterClrMapping/>
-  </p:clrMapOvr>
-</p:sld>
-</file>
-
-<file path=ppt/slides/slide4.xml><?xml version="1.0" encoding="utf-8"?>
-<p:sld xmlns:a="http://schemas.openxmlformats.org/drawingml/2006/main" xmlns:r="http://schemas.openxmlformats.org/officeDocument/2006/relationships" xmlns:p="http://schemas.openxmlformats.org/presentationml/2006/main">
   <p:cSld name="Slide 5">
     <p:bg>
       <p:bgPr>
@@ -5665,6 +4715,432 @@
         </p:spPr>
       </p:pic>
     </p:spTree>
+  </p:cSld>
+  <p:clrMapOvr>
+    <a:masterClrMapping/>
+  </p:clrMapOvr>
+</p:sld>
+</file>
+
+<file path=ppt/slides/slide4.xml><?xml version="1.0" encoding="utf-8"?>
+<p:sld xmlns:a="http://schemas.openxmlformats.org/drawingml/2006/main" xmlns:r="http://schemas.openxmlformats.org/officeDocument/2006/relationships" xmlns:p="http://schemas.openxmlformats.org/presentationml/2006/main">
+  <p:cSld>
+    <p:bg>
+      <p:bgPr>
+        <a:solidFill>
+          <a:srgbClr val="1A2744"/>
+        </a:solidFill>
+        <a:effectLst/>
+      </p:bgPr>
+    </p:bg>
+    <p:spTree>
+      <p:nvGrpSpPr>
+        <p:cNvPr id="1" name="">
+          <a:extLst>
+            <a:ext uri="{FF2B5EF4-FFF2-40B4-BE49-F238E27FC236}">
+              <a16:creationId xmlns:a16="http://schemas.microsoft.com/office/drawing/2014/main" id="{B88FB33A-EE34-6999-024D-89AB075BC766}"/>
+            </a:ext>
+          </a:extLst>
+        </p:cNvPr>
+        <p:cNvGrpSpPr/>
+        <p:nvPr/>
+      </p:nvGrpSpPr>
+      <p:grpSpPr>
+        <a:xfrm>
+          <a:off x="0" y="0"/>
+          <a:ext cx="0" cy="0"/>
+          <a:chOff x="0" y="0"/>
+          <a:chExt cx="0" cy="0"/>
+        </a:xfrm>
+      </p:grpSpPr>
+      <p:sp>
+        <p:nvSpPr>
+          <p:cNvPr id="2" name="Shape 0">
+            <a:extLst>
+              <a:ext uri="{FF2B5EF4-FFF2-40B4-BE49-F238E27FC236}">
+                <a16:creationId xmlns:a16="http://schemas.microsoft.com/office/drawing/2014/main" id="{FE92C946-8ABA-BBCE-2F25-C2C0CDAFE0BB}"/>
+              </a:ext>
+            </a:extLst>
+          </p:cNvPr>
+          <p:cNvSpPr/>
+          <p:nvPr/>
+        </p:nvSpPr>
+        <p:spPr>
+          <a:xfrm>
+            <a:off x="0" y="0"/>
+            <a:ext cx="164592" cy="5143500"/>
+          </a:xfrm>
+          <a:prstGeom prst="rect">
+            <a:avLst/>
+          </a:prstGeom>
+          <a:solidFill>
+            <a:srgbClr val="00B4D8"/>
+          </a:solidFill>
+          <a:ln w="12700">
+            <a:solidFill>
+              <a:srgbClr val="00B4D8"/>
+            </a:solidFill>
+            <a:prstDash val="solid"/>
+          </a:ln>
+        </p:spPr>
+        <p:txBody>
+          <a:bodyPr/>
+          <a:lstStyle/>
+          <a:p>
+            <a:endParaRPr lang="it-CH"/>
+          </a:p>
+        </p:txBody>
+      </p:sp>
+      <p:sp>
+        <p:nvSpPr>
+          <p:cNvPr id="3" name="Text 1">
+            <a:extLst>
+              <a:ext uri="{FF2B5EF4-FFF2-40B4-BE49-F238E27FC236}">
+                <a16:creationId xmlns:a16="http://schemas.microsoft.com/office/drawing/2014/main" id="{D3BD819E-CEF1-45C3-185E-C84560531D61}"/>
+              </a:ext>
+            </a:extLst>
+          </p:cNvPr>
+          <p:cNvSpPr/>
+          <p:nvPr/>
+        </p:nvSpPr>
+        <p:spPr>
+          <a:xfrm>
+            <a:off x="365760" y="164592"/>
+            <a:ext cx="8412480" cy="548640"/>
+          </a:xfrm>
+          <a:prstGeom prst="rect">
+            <a:avLst/>
+          </a:prstGeom>
+          <a:noFill/>
+          <a:ln/>
+        </p:spPr>
+        <p:txBody>
+          <a:bodyPr wrap="square" lIns="0" tIns="0" rIns="0" bIns="0" rtlCol="0" anchor="ctr"/>
+          <a:lstStyle/>
+          <a:p>
+            <a:pPr marL="0" indent="0">
+              <a:buNone/>
+            </a:pPr>
+            <a:r>
+              <a:rPr lang="en-US" sz="2200" b="1" dirty="0">
+                <a:solidFill>
+                  <a:srgbClr val="00B4D8"/>
+                </a:solidFill>
+                <a:latin typeface="Calibri" pitchFamily="34" charset="0"/>
+                <a:ea typeface="Calibri" pitchFamily="34" charset="-122"/>
+                <a:cs typeface="Calibri" pitchFamily="34" charset="-120"/>
+              </a:rPr>
+              <a:t>Distribuzione </a:t>
+            </a:r>
+            <a:r>
+              <a:rPr lang="en-US" sz="2200" b="1" dirty="0" err="1">
+                <a:solidFill>
+                  <a:srgbClr val="00B4D8"/>
+                </a:solidFill>
+                <a:latin typeface="Calibri" pitchFamily="34" charset="0"/>
+                <a:ea typeface="Calibri" pitchFamily="34" charset="-122"/>
+                <a:cs typeface="Calibri" pitchFamily="34" charset="-120"/>
+              </a:rPr>
+              <a:t>velocità</a:t>
+            </a:r>
+            <a:r>
+              <a:rPr lang="en-US" sz="2200" b="1" dirty="0">
+                <a:solidFill>
+                  <a:srgbClr val="00B4D8"/>
+                </a:solidFill>
+                <a:latin typeface="Calibri" pitchFamily="34" charset="0"/>
+                <a:ea typeface="Calibri" pitchFamily="34" charset="-122"/>
+                <a:cs typeface="Calibri" pitchFamily="34" charset="-120"/>
+              </a:rPr>
+              <a:t> – </a:t>
+            </a:r>
+            <a:r>
+              <a:rPr lang="en-US" sz="2200" b="1" dirty="0" err="1">
+                <a:solidFill>
+                  <a:srgbClr val="00B4D8"/>
+                </a:solidFill>
+                <a:latin typeface="Calibri" pitchFamily="34" charset="0"/>
+                <a:ea typeface="Calibri" pitchFamily="34" charset="-122"/>
+                <a:cs typeface="Calibri" pitchFamily="34" charset="-120"/>
+              </a:rPr>
+              <a:t>postazione</a:t>
+            </a:r>
+            <a:r>
+              <a:rPr lang="en-US" sz="2200" b="1" dirty="0">
+                <a:solidFill>
+                  <a:srgbClr val="00B4D8"/>
+                </a:solidFill>
+                <a:latin typeface="Calibri" pitchFamily="34" charset="0"/>
+                <a:ea typeface="Calibri" pitchFamily="34" charset="-122"/>
+                <a:cs typeface="Calibri" pitchFamily="34" charset="-120"/>
+              </a:rPr>
+              <a:t> </a:t>
+            </a:r>
+            <a:r>
+              <a:rPr lang="en-US" sz="2200" b="1" dirty="0" err="1">
+                <a:solidFill>
+                  <a:srgbClr val="00B4D8"/>
+                </a:solidFill>
+                <a:latin typeface="Calibri" pitchFamily="34" charset="0"/>
+                <a:ea typeface="Calibri" pitchFamily="34" charset="-122"/>
+                <a:cs typeface="Calibri" pitchFamily="34" charset="-120"/>
+              </a:rPr>
+              <a:t>peggiore</a:t>
+            </a:r>
+            <a:endParaRPr lang="en-US" sz="2200" dirty="0"/>
+          </a:p>
+        </p:txBody>
+      </p:sp>
+      <p:sp>
+        <p:nvSpPr>
+          <p:cNvPr id="4" name="Text 2">
+            <a:extLst>
+              <a:ext uri="{FF2B5EF4-FFF2-40B4-BE49-F238E27FC236}">
+                <a16:creationId xmlns:a16="http://schemas.microsoft.com/office/drawing/2014/main" id="{261D53FC-7098-BF3D-7C2A-F824479AFB9B}"/>
+              </a:ext>
+            </a:extLst>
+          </p:cNvPr>
+          <p:cNvSpPr/>
+          <p:nvPr/>
+        </p:nvSpPr>
+        <p:spPr>
+          <a:xfrm>
+            <a:off x="365760" y="804672"/>
+            <a:ext cx="8412480" cy="320040"/>
+          </a:xfrm>
+          <a:prstGeom prst="rect">
+            <a:avLst/>
+          </a:prstGeom>
+          <a:noFill/>
+          <a:ln/>
+        </p:spPr>
+        <p:txBody>
+          <a:bodyPr wrap="square" lIns="0" tIns="0" rIns="0" bIns="0" rtlCol="0" anchor="ctr"/>
+          <a:lstStyle/>
+          <a:p>
+            <a:r>
+              <a:rPr lang="en-US" sz="1300" i="1" dirty="0">
+                <a:solidFill>
+                  <a:srgbClr val="B0BEC5"/>
+                </a:solidFill>
+                <a:latin typeface="Calibri" pitchFamily="34" charset="0"/>
+                <a:cs typeface="Calibri" pitchFamily="34" charset="-120"/>
+              </a:rPr>
+              <a:t>Distribuzione </a:t>
+            </a:r>
+            <a:r>
+              <a:rPr lang="en-US" sz="1300" i="1" dirty="0" err="1">
+                <a:solidFill>
+                  <a:srgbClr val="B0BEC5"/>
+                </a:solidFill>
+                <a:latin typeface="Calibri" pitchFamily="34" charset="0"/>
+                <a:cs typeface="Calibri" pitchFamily="34" charset="-120"/>
+              </a:rPr>
+              <a:t>velocità</a:t>
+            </a:r>
+            <a:r>
+              <a:rPr lang="en-US" sz="1300" i="1" dirty="0">
+                <a:solidFill>
+                  <a:srgbClr val="B0BEC5"/>
+                </a:solidFill>
+                <a:latin typeface="Calibri" pitchFamily="34" charset="0"/>
+                <a:cs typeface="Calibri" pitchFamily="34" charset="-120"/>
+              </a:rPr>
+              <a:t> della </a:t>
+            </a:r>
+            <a:r>
+              <a:rPr lang="en-US" sz="1300" i="1" dirty="0" err="1">
+                <a:solidFill>
+                  <a:srgbClr val="B0BEC5"/>
+                </a:solidFill>
+                <a:latin typeface="Calibri" pitchFamily="34" charset="0"/>
+                <a:cs typeface="Calibri" pitchFamily="34" charset="-120"/>
+              </a:rPr>
+              <a:t>postazione</a:t>
+            </a:r>
+            <a:r>
+              <a:rPr lang="en-US" sz="1300" i="1" dirty="0">
+                <a:solidFill>
+                  <a:srgbClr val="B0BEC5"/>
+                </a:solidFill>
+                <a:latin typeface="Calibri" pitchFamily="34" charset="0"/>
+                <a:cs typeface="Calibri" pitchFamily="34" charset="-120"/>
+              </a:rPr>
+              <a:t>  con la </a:t>
+            </a:r>
+            <a:r>
+              <a:rPr lang="en-US" sz="1300" i="1" dirty="0" err="1">
+                <a:solidFill>
+                  <a:srgbClr val="B0BEC5"/>
+                </a:solidFill>
+                <a:latin typeface="Calibri" pitchFamily="34" charset="0"/>
+                <a:cs typeface="Calibri" pitchFamily="34" charset="-120"/>
+              </a:rPr>
+              <a:t>maggior</a:t>
+            </a:r>
+            <a:r>
+              <a:rPr lang="en-US" sz="1300" i="1" dirty="0">
+                <a:solidFill>
+                  <a:srgbClr val="B0BEC5"/>
+                </a:solidFill>
+                <a:latin typeface="Calibri" pitchFamily="34" charset="0"/>
+                <a:cs typeface="Calibri" pitchFamily="34" charset="-120"/>
+              </a:rPr>
+              <a:t> </a:t>
+            </a:r>
+            <a:r>
+              <a:rPr lang="en-US" sz="1300" i="1" dirty="0" err="1">
+                <a:solidFill>
+                  <a:srgbClr val="B0BEC5"/>
+                </a:solidFill>
+                <a:latin typeface="Calibri" pitchFamily="34" charset="0"/>
+                <a:cs typeface="Calibri" pitchFamily="34" charset="-120"/>
+              </a:rPr>
+              <a:t>percentaule</a:t>
+            </a:r>
+            <a:r>
+              <a:rPr lang="en-US" sz="1300" i="1" dirty="0">
+                <a:solidFill>
+                  <a:srgbClr val="B0BEC5"/>
+                </a:solidFill>
+                <a:latin typeface="Calibri" pitchFamily="34" charset="0"/>
+                <a:cs typeface="Calibri" pitchFamily="34" charset="-120"/>
+              </a:rPr>
+              <a:t> di </a:t>
+            </a:r>
+            <a:r>
+              <a:rPr lang="en-US" sz="1300" i="1" dirty="0" err="1">
+                <a:solidFill>
+                  <a:srgbClr val="B0BEC5"/>
+                </a:solidFill>
+                <a:latin typeface="Calibri" pitchFamily="34" charset="0"/>
+                <a:cs typeface="Calibri" pitchFamily="34" charset="-120"/>
+              </a:rPr>
+              <a:t>infrazioni</a:t>
+            </a:r>
+            <a:endParaRPr lang="en-US" sz="1300" dirty="0"/>
+          </a:p>
+        </p:txBody>
+      </p:sp>
+      <p:sp>
+        <p:nvSpPr>
+          <p:cNvPr id="5" name="Shape 3">
+            <a:extLst>
+              <a:ext uri="{FF2B5EF4-FFF2-40B4-BE49-F238E27FC236}">
+                <a16:creationId xmlns:a16="http://schemas.microsoft.com/office/drawing/2014/main" id="{6E3BBB00-9779-1D75-EE40-4CC1BAA35CBA}"/>
+              </a:ext>
+            </a:extLst>
+          </p:cNvPr>
+          <p:cNvSpPr/>
+          <p:nvPr/>
+        </p:nvSpPr>
+        <p:spPr>
+          <a:xfrm>
+            <a:off x="365760" y="1234440"/>
+            <a:ext cx="8503920" cy="3611880"/>
+          </a:xfrm>
+          <a:prstGeom prst="rect">
+            <a:avLst/>
+          </a:prstGeom>
+          <a:solidFill>
+            <a:srgbClr val="1E3057"/>
+          </a:solidFill>
+          <a:ln w="12700">
+            <a:solidFill>
+              <a:srgbClr val="2A4580"/>
+            </a:solidFill>
+            <a:prstDash val="solid"/>
+          </a:ln>
+        </p:spPr>
+        <p:txBody>
+          <a:bodyPr/>
+          <a:lstStyle/>
+          <a:p>
+            <a:endParaRPr lang="it-CH"/>
+          </a:p>
+        </p:txBody>
+      </p:sp>
+      <p:sp>
+        <p:nvSpPr>
+          <p:cNvPr id="6" name="Text 4">
+            <a:extLst>
+              <a:ext uri="{FF2B5EF4-FFF2-40B4-BE49-F238E27FC236}">
+                <a16:creationId xmlns:a16="http://schemas.microsoft.com/office/drawing/2014/main" id="{C28B9060-3AB3-54D2-0404-20DEF6B69941}"/>
+              </a:ext>
+            </a:extLst>
+          </p:cNvPr>
+          <p:cNvSpPr/>
+          <p:nvPr/>
+        </p:nvSpPr>
+        <p:spPr>
+          <a:xfrm>
+            <a:off x="365760" y="1234440"/>
+            <a:ext cx="8503920" cy="3611880"/>
+          </a:xfrm>
+          <a:prstGeom prst="rect">
+            <a:avLst/>
+          </a:prstGeom>
+          <a:noFill/>
+          <a:ln/>
+        </p:spPr>
+        <p:txBody>
+          <a:bodyPr wrap="square" lIns="0" tIns="0" rIns="0" bIns="0" rtlCol="0" anchor="ctr"/>
+          <a:lstStyle/>
+          <a:p>
+            <a:pPr marL="0" indent="0" algn="ctr">
+              <a:buNone/>
+            </a:pPr>
+            <a:r>
+              <a:rPr lang="en-US" sz="1400" dirty="0">
+                <a:solidFill>
+                  <a:srgbClr val="2A4580"/>
+                </a:solidFill>
+                <a:latin typeface="Calibri" pitchFamily="34" charset="0"/>
+                <a:ea typeface="Calibri" pitchFamily="34" charset="-122"/>
+                <a:cs typeface="Calibri" pitchFamily="34" charset="-120"/>
+              </a:rPr>
+              <a:t>[ grafico ]</a:t>
+            </a:r>
+            <a:endParaRPr lang="en-US" sz="1400" dirty="0"/>
+          </a:p>
+        </p:txBody>
+      </p:sp>
+      <p:pic>
+        <p:nvPicPr>
+          <p:cNvPr id="8" name="Immagine 7">
+            <a:extLst>
+              <a:ext uri="{FF2B5EF4-FFF2-40B4-BE49-F238E27FC236}">
+                <a16:creationId xmlns:a16="http://schemas.microsoft.com/office/drawing/2014/main" id="{148C6FC9-9D66-2839-29B4-C91903E9FFA5}"/>
+              </a:ext>
+            </a:extLst>
+          </p:cNvPr>
+          <p:cNvPicPr>
+            <a:picLocks noChangeAspect="1"/>
+          </p:cNvPicPr>
+          <p:nvPr/>
+        </p:nvPicPr>
+        <p:blipFill>
+          <a:blip r:embed="rId3"/>
+          <a:stretch>
+            <a:fillRect/>
+          </a:stretch>
+        </p:blipFill>
+        <p:spPr>
+          <a:xfrm>
+            <a:off x="365761" y="1190369"/>
+            <a:ext cx="8503919" cy="3700022"/>
+          </a:xfrm>
+          <a:prstGeom prst="rect">
+            <a:avLst/>
+          </a:prstGeom>
+        </p:spPr>
+      </p:pic>
+    </p:spTree>
+    <p:extLst>
+      <p:ext uri="{BB962C8B-B14F-4D97-AF65-F5344CB8AC3E}">
+        <p14:creationId xmlns:p14="http://schemas.microsoft.com/office/powerpoint/2010/main" val="1269096004"/>
+      </p:ext>
+    </p:extLst>
   </p:cSld>
   <p:clrMapOvr>
     <a:masterClrMapping/>
@@ -5762,7 +5238,40 @@
                 <a:ea typeface="Calibri" pitchFamily="34" charset="-122"/>
                 <a:cs typeface="Calibri" pitchFamily="34" charset="-120"/>
               </a:rPr>
-              <a:t>Mappa di Calore – Giorno della Settimana e Ora</a:t>
+              <a:t>Mappa di Calore – </a:t>
+            </a:r>
+            <a:r>
+              <a:rPr lang="en-US" sz="2200" b="1" dirty="0" err="1">
+                <a:solidFill>
+                  <a:srgbClr val="00B4D8"/>
+                </a:solidFill>
+                <a:latin typeface="Calibri" pitchFamily="34" charset="0"/>
+                <a:ea typeface="Calibri" pitchFamily="34" charset="-122"/>
+                <a:cs typeface="Calibri" pitchFamily="34" charset="-120"/>
+              </a:rPr>
+              <a:t>Velocità</a:t>
+            </a:r>
+            <a:r>
+              <a:rPr lang="en-US" sz="2200" b="1" dirty="0">
+                <a:solidFill>
+                  <a:srgbClr val="00B4D8"/>
+                </a:solidFill>
+                <a:latin typeface="Calibri" pitchFamily="34" charset="0"/>
+                <a:ea typeface="Calibri" pitchFamily="34" charset="-122"/>
+                <a:cs typeface="Calibri" pitchFamily="34" charset="-120"/>
+              </a:rPr>
+              <a:t> media per </a:t>
+            </a:r>
+            <a:r>
+              <a:rPr lang="en-US" sz="2200" b="1" dirty="0" err="1">
+                <a:solidFill>
+                  <a:srgbClr val="00B4D8"/>
+                </a:solidFill>
+                <a:latin typeface="Calibri" pitchFamily="34" charset="0"/>
+                <a:ea typeface="Calibri" pitchFamily="34" charset="-122"/>
+                <a:cs typeface="Calibri" pitchFamily="34" charset="-120"/>
+              </a:rPr>
+              <a:t>orario</a:t>
             </a:r>
             <a:endParaRPr lang="en-US" sz="2200" dirty="0"/>
           </a:p>
@@ -5939,6 +5448,898 @@
 </file>
 
 <file path=ppt/slides/slide6.xml><?xml version="1.0" encoding="utf-8"?>
+<p:sld xmlns:a="http://schemas.openxmlformats.org/drawingml/2006/main" xmlns:r="http://schemas.openxmlformats.org/officeDocument/2006/relationships" xmlns:p="http://schemas.openxmlformats.org/presentationml/2006/main">
+  <p:cSld>
+    <p:bg>
+      <p:bgPr>
+        <a:solidFill>
+          <a:srgbClr val="1A2744"/>
+        </a:solidFill>
+        <a:effectLst/>
+      </p:bgPr>
+    </p:bg>
+    <p:spTree>
+      <p:nvGrpSpPr>
+        <p:cNvPr id="1" name="">
+          <a:extLst>
+            <a:ext uri="{FF2B5EF4-FFF2-40B4-BE49-F238E27FC236}">
+              <a16:creationId xmlns:a16="http://schemas.microsoft.com/office/drawing/2014/main" id="{CABFC21C-AF0D-F181-5836-1EF3ADB229D6}"/>
+            </a:ext>
+          </a:extLst>
+        </p:cNvPr>
+        <p:cNvGrpSpPr/>
+        <p:nvPr/>
+      </p:nvGrpSpPr>
+      <p:grpSpPr>
+        <a:xfrm>
+          <a:off x="0" y="0"/>
+          <a:ext cx="0" cy="0"/>
+          <a:chOff x="0" y="0"/>
+          <a:chExt cx="0" cy="0"/>
+        </a:xfrm>
+      </p:grpSpPr>
+      <p:sp>
+        <p:nvSpPr>
+          <p:cNvPr id="2" name="Shape 0">
+            <a:extLst>
+              <a:ext uri="{FF2B5EF4-FFF2-40B4-BE49-F238E27FC236}">
+                <a16:creationId xmlns:a16="http://schemas.microsoft.com/office/drawing/2014/main" id="{5CA906A4-FE5D-7EE2-6891-35EED0B6A028}"/>
+              </a:ext>
+            </a:extLst>
+          </p:cNvPr>
+          <p:cNvSpPr/>
+          <p:nvPr/>
+        </p:nvSpPr>
+        <p:spPr>
+          <a:xfrm>
+            <a:off x="0" y="0"/>
+            <a:ext cx="164592" cy="5143500"/>
+          </a:xfrm>
+          <a:prstGeom prst="rect">
+            <a:avLst/>
+          </a:prstGeom>
+          <a:solidFill>
+            <a:srgbClr val="00B4D8"/>
+          </a:solidFill>
+          <a:ln w="12700">
+            <a:solidFill>
+              <a:srgbClr val="00B4D8"/>
+            </a:solidFill>
+            <a:prstDash val="solid"/>
+          </a:ln>
+        </p:spPr>
+        <p:txBody>
+          <a:bodyPr/>
+          <a:lstStyle/>
+          <a:p>
+            <a:endParaRPr lang="it-CH"/>
+          </a:p>
+        </p:txBody>
+      </p:sp>
+      <p:sp>
+        <p:nvSpPr>
+          <p:cNvPr id="3" name="Text 1">
+            <a:extLst>
+              <a:ext uri="{FF2B5EF4-FFF2-40B4-BE49-F238E27FC236}">
+                <a16:creationId xmlns:a16="http://schemas.microsoft.com/office/drawing/2014/main" id="{15D5513F-9F73-2F50-7B34-57BCFC8B28A3}"/>
+              </a:ext>
+            </a:extLst>
+          </p:cNvPr>
+          <p:cNvSpPr/>
+          <p:nvPr/>
+        </p:nvSpPr>
+        <p:spPr>
+          <a:xfrm>
+            <a:off x="365760" y="164592"/>
+            <a:ext cx="8412480" cy="548640"/>
+          </a:xfrm>
+          <a:prstGeom prst="rect">
+            <a:avLst/>
+          </a:prstGeom>
+          <a:noFill/>
+          <a:ln/>
+        </p:spPr>
+        <p:txBody>
+          <a:bodyPr wrap="square" lIns="0" tIns="0" rIns="0" bIns="0" rtlCol="0" anchor="ctr"/>
+          <a:lstStyle/>
+          <a:p>
+            <a:pPr marL="0" indent="0">
+              <a:buNone/>
+            </a:pPr>
+            <a:r>
+              <a:rPr lang="en-US" sz="2200" b="1" dirty="0">
+                <a:solidFill>
+                  <a:srgbClr val="00B4D8"/>
+                </a:solidFill>
+                <a:latin typeface="Calibri" pitchFamily="34" charset="0"/>
+                <a:ea typeface="Calibri" pitchFamily="34" charset="-122"/>
+                <a:cs typeface="Calibri" pitchFamily="34" charset="-120"/>
+              </a:rPr>
+              <a:t>Mappa di Calore – Tasso </a:t>
+            </a:r>
+            <a:r>
+              <a:rPr lang="en-US" sz="2200" b="1" dirty="0" err="1">
+                <a:solidFill>
+                  <a:srgbClr val="00B4D8"/>
+                </a:solidFill>
+                <a:latin typeface="Calibri" pitchFamily="34" charset="0"/>
+                <a:ea typeface="Calibri" pitchFamily="34" charset="-122"/>
+                <a:cs typeface="Calibri" pitchFamily="34" charset="-120"/>
+              </a:rPr>
+              <a:t>infrazioni</a:t>
+            </a:r>
+            <a:r>
+              <a:rPr lang="en-US" sz="2200" b="1" dirty="0">
+                <a:solidFill>
+                  <a:srgbClr val="00B4D8"/>
+                </a:solidFill>
+                <a:latin typeface="Calibri" pitchFamily="34" charset="0"/>
+                <a:ea typeface="Calibri" pitchFamily="34" charset="-122"/>
+                <a:cs typeface="Calibri" pitchFamily="34" charset="-120"/>
+              </a:rPr>
+              <a:t> medio per </a:t>
+            </a:r>
+            <a:r>
+              <a:rPr lang="en-US" sz="2200" b="1" dirty="0" err="1">
+                <a:solidFill>
+                  <a:srgbClr val="00B4D8"/>
+                </a:solidFill>
+                <a:latin typeface="Calibri" pitchFamily="34" charset="0"/>
+                <a:ea typeface="Calibri" pitchFamily="34" charset="-122"/>
+                <a:cs typeface="Calibri" pitchFamily="34" charset="-120"/>
+              </a:rPr>
+              <a:t>orario</a:t>
+            </a:r>
+            <a:endParaRPr lang="en-US" sz="2200" dirty="0"/>
+          </a:p>
+        </p:txBody>
+      </p:sp>
+      <p:sp>
+        <p:nvSpPr>
+          <p:cNvPr id="4" name="Text 2">
+            <a:extLst>
+              <a:ext uri="{FF2B5EF4-FFF2-40B4-BE49-F238E27FC236}">
+                <a16:creationId xmlns:a16="http://schemas.microsoft.com/office/drawing/2014/main" id="{99FFE15C-9BE4-5606-C073-E1FC119A8A17}"/>
+              </a:ext>
+            </a:extLst>
+          </p:cNvPr>
+          <p:cNvSpPr/>
+          <p:nvPr/>
+        </p:nvSpPr>
+        <p:spPr>
+          <a:xfrm>
+            <a:off x="365760" y="804672"/>
+            <a:ext cx="8412480" cy="320040"/>
+          </a:xfrm>
+          <a:prstGeom prst="rect">
+            <a:avLst/>
+          </a:prstGeom>
+          <a:noFill/>
+          <a:ln/>
+        </p:spPr>
+        <p:txBody>
+          <a:bodyPr wrap="square" lIns="0" tIns="0" rIns="0" bIns="0" rtlCol="0" anchor="ctr"/>
+          <a:lstStyle/>
+          <a:p>
+            <a:pPr marL="0" indent="0">
+              <a:buNone/>
+            </a:pPr>
+            <a:r>
+              <a:rPr lang="en-US" sz="1300" i="1" dirty="0">
+                <a:solidFill>
+                  <a:srgbClr val="B0BEC5"/>
+                </a:solidFill>
+                <a:latin typeface="Calibri" pitchFamily="34" charset="0"/>
+                <a:ea typeface="Calibri" pitchFamily="34" charset="-122"/>
+                <a:cs typeface="Calibri" pitchFamily="34" charset="-120"/>
+              </a:rPr>
+              <a:t>Heatmap – </a:t>
+            </a:r>
+            <a:r>
+              <a:rPr lang="en-US" sz="1300" i="1" dirty="0" err="1">
+                <a:solidFill>
+                  <a:srgbClr val="B0BEC5"/>
+                </a:solidFill>
+                <a:latin typeface="Calibri" pitchFamily="34" charset="0"/>
+                <a:ea typeface="Calibri" pitchFamily="34" charset="-122"/>
+                <a:cs typeface="Calibri" pitchFamily="34" charset="-120"/>
+              </a:rPr>
+              <a:t>tasso</a:t>
+            </a:r>
+            <a:r>
+              <a:rPr lang="en-US" sz="1300" i="1" dirty="0">
+                <a:solidFill>
+                  <a:srgbClr val="B0BEC5"/>
+                </a:solidFill>
+                <a:latin typeface="Calibri" pitchFamily="34" charset="0"/>
+                <a:ea typeface="Calibri" pitchFamily="34" charset="-122"/>
+                <a:cs typeface="Calibri" pitchFamily="34" charset="-120"/>
+              </a:rPr>
+              <a:t> </a:t>
+            </a:r>
+            <a:r>
+              <a:rPr lang="en-US" sz="1300" i="1" dirty="0" err="1">
+                <a:solidFill>
+                  <a:srgbClr val="B0BEC5"/>
+                </a:solidFill>
+                <a:latin typeface="Calibri" pitchFamily="34" charset="0"/>
+                <a:ea typeface="Calibri" pitchFamily="34" charset="-122"/>
+                <a:cs typeface="Calibri" pitchFamily="34" charset="-120"/>
+              </a:rPr>
+              <a:t>infrazioni</a:t>
+            </a:r>
+            <a:r>
+              <a:rPr lang="en-US" sz="1300" i="1" dirty="0">
+                <a:solidFill>
+                  <a:srgbClr val="B0BEC5"/>
+                </a:solidFill>
+                <a:latin typeface="Calibri" pitchFamily="34" charset="0"/>
+                <a:ea typeface="Calibri" pitchFamily="34" charset="-122"/>
+                <a:cs typeface="Calibri" pitchFamily="34" charset="-120"/>
+              </a:rPr>
+              <a:t> per </a:t>
+            </a:r>
+            <a:r>
+              <a:rPr lang="en-US" sz="1300" i="1" dirty="0" err="1">
+                <a:solidFill>
+                  <a:srgbClr val="B0BEC5"/>
+                </a:solidFill>
+                <a:latin typeface="Calibri" pitchFamily="34" charset="0"/>
+                <a:ea typeface="Calibri" pitchFamily="34" charset="-122"/>
+                <a:cs typeface="Calibri" pitchFamily="34" charset="-120"/>
+              </a:rPr>
+              <a:t>giorno</a:t>
+            </a:r>
+            <a:r>
+              <a:rPr lang="en-US" sz="1300" i="1" dirty="0">
+                <a:solidFill>
+                  <a:srgbClr val="B0BEC5"/>
+                </a:solidFill>
+                <a:latin typeface="Calibri" pitchFamily="34" charset="0"/>
+                <a:ea typeface="Calibri" pitchFamily="34" charset="-122"/>
+                <a:cs typeface="Calibri" pitchFamily="34" charset="-120"/>
+              </a:rPr>
+              <a:t> × ora</a:t>
+            </a:r>
+            <a:endParaRPr lang="en-US" sz="1300" dirty="0"/>
+          </a:p>
+        </p:txBody>
+      </p:sp>
+      <p:sp>
+        <p:nvSpPr>
+          <p:cNvPr id="5" name="Shape 3">
+            <a:extLst>
+              <a:ext uri="{FF2B5EF4-FFF2-40B4-BE49-F238E27FC236}">
+                <a16:creationId xmlns:a16="http://schemas.microsoft.com/office/drawing/2014/main" id="{211F0A79-257D-DF77-51D8-8C3E08EC98E8}"/>
+              </a:ext>
+            </a:extLst>
+          </p:cNvPr>
+          <p:cNvSpPr/>
+          <p:nvPr/>
+        </p:nvSpPr>
+        <p:spPr>
+          <a:xfrm>
+            <a:off x="365760" y="1234440"/>
+            <a:ext cx="8503920" cy="3611880"/>
+          </a:xfrm>
+          <a:prstGeom prst="rect">
+            <a:avLst/>
+          </a:prstGeom>
+          <a:solidFill>
+            <a:srgbClr val="1E3057"/>
+          </a:solidFill>
+          <a:ln w="12700">
+            <a:solidFill>
+              <a:srgbClr val="2A4580"/>
+            </a:solidFill>
+            <a:prstDash val="solid"/>
+          </a:ln>
+        </p:spPr>
+        <p:txBody>
+          <a:bodyPr/>
+          <a:lstStyle/>
+          <a:p>
+            <a:endParaRPr lang="it-CH"/>
+          </a:p>
+        </p:txBody>
+      </p:sp>
+      <p:sp>
+        <p:nvSpPr>
+          <p:cNvPr id="6" name="Text 4">
+            <a:extLst>
+              <a:ext uri="{FF2B5EF4-FFF2-40B4-BE49-F238E27FC236}">
+                <a16:creationId xmlns:a16="http://schemas.microsoft.com/office/drawing/2014/main" id="{C742B34F-B5D8-43D1-F6E8-C729E5252DEE}"/>
+              </a:ext>
+            </a:extLst>
+          </p:cNvPr>
+          <p:cNvSpPr/>
+          <p:nvPr/>
+        </p:nvSpPr>
+        <p:spPr>
+          <a:xfrm>
+            <a:off x="365760" y="1234440"/>
+            <a:ext cx="8503920" cy="3611880"/>
+          </a:xfrm>
+          <a:prstGeom prst="rect">
+            <a:avLst/>
+          </a:prstGeom>
+          <a:noFill/>
+          <a:ln/>
+        </p:spPr>
+        <p:txBody>
+          <a:bodyPr wrap="square" lIns="0" tIns="0" rIns="0" bIns="0" rtlCol="0" anchor="ctr"/>
+          <a:lstStyle/>
+          <a:p>
+            <a:pPr marL="0" indent="0" algn="ctr">
+              <a:buNone/>
+            </a:pPr>
+            <a:r>
+              <a:rPr lang="en-US" sz="1400" dirty="0">
+                <a:solidFill>
+                  <a:srgbClr val="2A4580"/>
+                </a:solidFill>
+                <a:latin typeface="Calibri" pitchFamily="34" charset="0"/>
+                <a:ea typeface="Calibri" pitchFamily="34" charset="-122"/>
+                <a:cs typeface="Calibri" pitchFamily="34" charset="-120"/>
+              </a:rPr>
+              <a:t>[ grafico ]</a:t>
+            </a:r>
+            <a:endParaRPr lang="en-US" sz="1400" dirty="0"/>
+          </a:p>
+        </p:txBody>
+      </p:sp>
+      <p:pic>
+        <p:nvPicPr>
+          <p:cNvPr id="8" name="Immagine 7">
+            <a:extLst>
+              <a:ext uri="{FF2B5EF4-FFF2-40B4-BE49-F238E27FC236}">
+                <a16:creationId xmlns:a16="http://schemas.microsoft.com/office/drawing/2014/main" id="{52666C92-5D98-E046-EBED-A16FFCCE3489}"/>
+              </a:ext>
+            </a:extLst>
+          </p:cNvPr>
+          <p:cNvPicPr>
+            <a:picLocks noChangeAspect="1"/>
+          </p:cNvPicPr>
+          <p:nvPr/>
+        </p:nvPicPr>
+        <p:blipFill>
+          <a:blip r:embed="rId3"/>
+          <a:stretch>
+            <a:fillRect/>
+          </a:stretch>
+        </p:blipFill>
+        <p:spPr>
+          <a:xfrm>
+            <a:off x="365759" y="1216152"/>
+            <a:ext cx="8503919" cy="3700022"/>
+          </a:xfrm>
+          <a:prstGeom prst="rect">
+            <a:avLst/>
+          </a:prstGeom>
+        </p:spPr>
+      </p:pic>
+    </p:spTree>
+    <p:extLst>
+      <p:ext uri="{BB962C8B-B14F-4D97-AF65-F5344CB8AC3E}">
+        <p14:creationId xmlns:p14="http://schemas.microsoft.com/office/powerpoint/2010/main" val="1696729976"/>
+      </p:ext>
+    </p:extLst>
+  </p:cSld>
+  <p:clrMapOvr>
+    <a:masterClrMapping/>
+  </p:clrMapOvr>
+</p:sld>
+</file>
+
+<file path=ppt/slides/slide7.xml><?xml version="1.0" encoding="utf-8"?>
+<p:sld xmlns:a="http://schemas.openxmlformats.org/drawingml/2006/main" xmlns:r="http://schemas.openxmlformats.org/officeDocument/2006/relationships" xmlns:p="http://schemas.openxmlformats.org/presentationml/2006/main">
+  <p:cSld>
+    <p:bg>
+      <p:bgPr>
+        <a:solidFill>
+          <a:srgbClr val="1A2744"/>
+        </a:solidFill>
+        <a:effectLst/>
+      </p:bgPr>
+    </p:bg>
+    <p:spTree>
+      <p:nvGrpSpPr>
+        <p:cNvPr id="1" name="">
+          <a:extLst>
+            <a:ext uri="{FF2B5EF4-FFF2-40B4-BE49-F238E27FC236}">
+              <a16:creationId xmlns:a16="http://schemas.microsoft.com/office/drawing/2014/main" id="{B4AD0811-9B76-6461-72D6-0A64719AA788}"/>
+            </a:ext>
+          </a:extLst>
+        </p:cNvPr>
+        <p:cNvGrpSpPr/>
+        <p:nvPr/>
+      </p:nvGrpSpPr>
+      <p:grpSpPr>
+        <a:xfrm>
+          <a:off x="0" y="0"/>
+          <a:ext cx="0" cy="0"/>
+          <a:chOff x="0" y="0"/>
+          <a:chExt cx="0" cy="0"/>
+        </a:xfrm>
+      </p:grpSpPr>
+      <p:sp>
+        <p:nvSpPr>
+          <p:cNvPr id="2" name="Shape 0">
+            <a:extLst>
+              <a:ext uri="{FF2B5EF4-FFF2-40B4-BE49-F238E27FC236}">
+                <a16:creationId xmlns:a16="http://schemas.microsoft.com/office/drawing/2014/main" id="{472E3DE4-9B52-3F53-3BF3-80409D8854C7}"/>
+              </a:ext>
+            </a:extLst>
+          </p:cNvPr>
+          <p:cNvSpPr/>
+          <p:nvPr/>
+        </p:nvSpPr>
+        <p:spPr>
+          <a:xfrm>
+            <a:off x="0" y="0"/>
+            <a:ext cx="164592" cy="5143500"/>
+          </a:xfrm>
+          <a:prstGeom prst="rect">
+            <a:avLst/>
+          </a:prstGeom>
+          <a:solidFill>
+            <a:srgbClr val="00B4D8"/>
+          </a:solidFill>
+          <a:ln w="12700">
+            <a:solidFill>
+              <a:srgbClr val="00B4D8"/>
+            </a:solidFill>
+            <a:prstDash val="solid"/>
+          </a:ln>
+        </p:spPr>
+        <p:txBody>
+          <a:bodyPr/>
+          <a:lstStyle/>
+          <a:p>
+            <a:endParaRPr lang="it-CH"/>
+          </a:p>
+        </p:txBody>
+      </p:sp>
+      <p:sp>
+        <p:nvSpPr>
+          <p:cNvPr id="3" name="Text 1">
+            <a:extLst>
+              <a:ext uri="{FF2B5EF4-FFF2-40B4-BE49-F238E27FC236}">
+                <a16:creationId xmlns:a16="http://schemas.microsoft.com/office/drawing/2014/main" id="{98B574B7-360B-C793-7D24-8BE21679B7C5}"/>
+              </a:ext>
+            </a:extLst>
+          </p:cNvPr>
+          <p:cNvSpPr/>
+          <p:nvPr/>
+        </p:nvSpPr>
+        <p:spPr>
+          <a:xfrm>
+            <a:off x="365760" y="164592"/>
+            <a:ext cx="8412480" cy="548640"/>
+          </a:xfrm>
+          <a:prstGeom prst="rect">
+            <a:avLst/>
+          </a:prstGeom>
+          <a:noFill/>
+          <a:ln/>
+        </p:spPr>
+        <p:txBody>
+          <a:bodyPr wrap="square" lIns="0" tIns="0" rIns="0" bIns="0" rtlCol="0" anchor="ctr"/>
+          <a:lstStyle/>
+          <a:p>
+            <a:pPr marL="0" indent="0">
+              <a:buNone/>
+            </a:pPr>
+            <a:r>
+              <a:rPr lang="en-US" sz="2200" b="1" dirty="0">
+                <a:solidFill>
+                  <a:srgbClr val="00B4D8"/>
+                </a:solidFill>
+                <a:latin typeface="Calibri" pitchFamily="34" charset="0"/>
+                <a:ea typeface="Calibri" pitchFamily="34" charset="-122"/>
+                <a:cs typeface="Calibri" pitchFamily="34" charset="-120"/>
+              </a:rPr>
+              <a:t>Nome</a:t>
+            </a:r>
+            <a:endParaRPr lang="en-US" sz="2200" dirty="0"/>
+          </a:p>
+        </p:txBody>
+      </p:sp>
+      <p:sp>
+        <p:nvSpPr>
+          <p:cNvPr id="4" name="Text 2">
+            <a:extLst>
+              <a:ext uri="{FF2B5EF4-FFF2-40B4-BE49-F238E27FC236}">
+                <a16:creationId xmlns:a16="http://schemas.microsoft.com/office/drawing/2014/main" id="{BCB5492D-C2BC-FDC5-D315-D8902F6A9B4B}"/>
+              </a:ext>
+            </a:extLst>
+          </p:cNvPr>
+          <p:cNvSpPr/>
+          <p:nvPr/>
+        </p:nvSpPr>
+        <p:spPr>
+          <a:xfrm>
+            <a:off x="365760" y="804672"/>
+            <a:ext cx="8412480" cy="320040"/>
+          </a:xfrm>
+          <a:prstGeom prst="rect">
+            <a:avLst/>
+          </a:prstGeom>
+          <a:noFill/>
+          <a:ln/>
+        </p:spPr>
+        <p:txBody>
+          <a:bodyPr wrap="square" lIns="0" tIns="0" rIns="0" bIns="0" rtlCol="0" anchor="ctr"/>
+          <a:lstStyle/>
+          <a:p>
+            <a:pPr marL="0" indent="0">
+              <a:buNone/>
+            </a:pPr>
+            <a:r>
+              <a:rPr lang="en-US" sz="1300" i="1" dirty="0">
+                <a:solidFill>
+                  <a:srgbClr val="B0BEC5"/>
+                </a:solidFill>
+                <a:latin typeface="Calibri" pitchFamily="34" charset="0"/>
+                <a:cs typeface="Calibri" pitchFamily="34" charset="-120"/>
+              </a:rPr>
+              <a:t>Testo</a:t>
+            </a:r>
+            <a:endParaRPr lang="en-US" sz="1300" dirty="0"/>
+          </a:p>
+        </p:txBody>
+      </p:sp>
+      <p:sp>
+        <p:nvSpPr>
+          <p:cNvPr id="5" name="Shape 3">
+            <a:extLst>
+              <a:ext uri="{FF2B5EF4-FFF2-40B4-BE49-F238E27FC236}">
+                <a16:creationId xmlns:a16="http://schemas.microsoft.com/office/drawing/2014/main" id="{31D3A275-7534-566A-FDC8-363D5D194CE2}"/>
+              </a:ext>
+            </a:extLst>
+          </p:cNvPr>
+          <p:cNvSpPr/>
+          <p:nvPr/>
+        </p:nvSpPr>
+        <p:spPr>
+          <a:xfrm>
+            <a:off x="365760" y="1234440"/>
+            <a:ext cx="8503920" cy="3611880"/>
+          </a:xfrm>
+          <a:prstGeom prst="rect">
+            <a:avLst/>
+          </a:prstGeom>
+          <a:solidFill>
+            <a:srgbClr val="1E3057"/>
+          </a:solidFill>
+          <a:ln w="12700">
+            <a:solidFill>
+              <a:srgbClr val="2A4580"/>
+            </a:solidFill>
+            <a:prstDash val="solid"/>
+          </a:ln>
+        </p:spPr>
+        <p:txBody>
+          <a:bodyPr/>
+          <a:lstStyle/>
+          <a:p>
+            <a:endParaRPr lang="it-CH"/>
+          </a:p>
+        </p:txBody>
+      </p:sp>
+      <p:sp>
+        <p:nvSpPr>
+          <p:cNvPr id="6" name="Text 4">
+            <a:extLst>
+              <a:ext uri="{FF2B5EF4-FFF2-40B4-BE49-F238E27FC236}">
+                <a16:creationId xmlns:a16="http://schemas.microsoft.com/office/drawing/2014/main" id="{CD35290F-1AE9-F892-FC83-52447EB40072}"/>
+              </a:ext>
+            </a:extLst>
+          </p:cNvPr>
+          <p:cNvSpPr/>
+          <p:nvPr/>
+        </p:nvSpPr>
+        <p:spPr>
+          <a:xfrm>
+            <a:off x="365760" y="1234440"/>
+            <a:ext cx="8503920" cy="3611880"/>
+          </a:xfrm>
+          <a:prstGeom prst="rect">
+            <a:avLst/>
+          </a:prstGeom>
+          <a:noFill/>
+          <a:ln/>
+        </p:spPr>
+        <p:txBody>
+          <a:bodyPr wrap="square" lIns="0" tIns="0" rIns="0" bIns="0" rtlCol="0" anchor="ctr"/>
+          <a:lstStyle/>
+          <a:p>
+            <a:pPr marL="0" indent="0" algn="ctr">
+              <a:buNone/>
+            </a:pPr>
+            <a:r>
+              <a:rPr lang="en-US" sz="1400" dirty="0">
+                <a:solidFill>
+                  <a:srgbClr val="2A4580"/>
+                </a:solidFill>
+                <a:latin typeface="Calibri" pitchFamily="34" charset="0"/>
+                <a:ea typeface="Calibri" pitchFamily="34" charset="-122"/>
+                <a:cs typeface="Calibri" pitchFamily="34" charset="-120"/>
+              </a:rPr>
+              <a:t>[ grafico ]</a:t>
+            </a:r>
+            <a:endParaRPr lang="en-US" sz="1400" dirty="0"/>
+          </a:p>
+        </p:txBody>
+      </p:sp>
+    </p:spTree>
+    <p:extLst>
+      <p:ext uri="{BB962C8B-B14F-4D97-AF65-F5344CB8AC3E}">
+        <p14:creationId xmlns:p14="http://schemas.microsoft.com/office/powerpoint/2010/main" val="1364513434"/>
+      </p:ext>
+    </p:extLst>
+  </p:cSld>
+  <p:clrMapOvr>
+    <a:masterClrMapping/>
+  </p:clrMapOvr>
+</p:sld>
+</file>
+
+<file path=ppt/slides/slide8.xml><?xml version="1.0" encoding="utf-8"?>
+<p:sld xmlns:a="http://schemas.openxmlformats.org/drawingml/2006/main" xmlns:r="http://schemas.openxmlformats.org/officeDocument/2006/relationships" xmlns:p="http://schemas.openxmlformats.org/presentationml/2006/main">
+  <p:cSld>
+    <p:bg>
+      <p:bgPr>
+        <a:solidFill>
+          <a:srgbClr val="1A2744"/>
+        </a:solidFill>
+        <a:effectLst/>
+      </p:bgPr>
+    </p:bg>
+    <p:spTree>
+      <p:nvGrpSpPr>
+        <p:cNvPr id="1" name="">
+          <a:extLst>
+            <a:ext uri="{FF2B5EF4-FFF2-40B4-BE49-F238E27FC236}">
+              <a16:creationId xmlns:a16="http://schemas.microsoft.com/office/drawing/2014/main" id="{21A25298-A55A-1FED-C86C-F9056C36F89D}"/>
+            </a:ext>
+          </a:extLst>
+        </p:cNvPr>
+        <p:cNvGrpSpPr/>
+        <p:nvPr/>
+      </p:nvGrpSpPr>
+      <p:grpSpPr>
+        <a:xfrm>
+          <a:off x="0" y="0"/>
+          <a:ext cx="0" cy="0"/>
+          <a:chOff x="0" y="0"/>
+          <a:chExt cx="0" cy="0"/>
+        </a:xfrm>
+      </p:grpSpPr>
+      <p:sp>
+        <p:nvSpPr>
+          <p:cNvPr id="2" name="Shape 0">
+            <a:extLst>
+              <a:ext uri="{FF2B5EF4-FFF2-40B4-BE49-F238E27FC236}">
+                <a16:creationId xmlns:a16="http://schemas.microsoft.com/office/drawing/2014/main" id="{D93EA1D5-1D1A-94A8-2CF6-EB2ADEFCD302}"/>
+              </a:ext>
+            </a:extLst>
+          </p:cNvPr>
+          <p:cNvSpPr/>
+          <p:nvPr/>
+        </p:nvSpPr>
+        <p:spPr>
+          <a:xfrm>
+            <a:off x="0" y="0"/>
+            <a:ext cx="164592" cy="5143500"/>
+          </a:xfrm>
+          <a:prstGeom prst="rect">
+            <a:avLst/>
+          </a:prstGeom>
+          <a:solidFill>
+            <a:srgbClr val="00B4D8"/>
+          </a:solidFill>
+          <a:ln w="12700">
+            <a:solidFill>
+              <a:srgbClr val="00B4D8"/>
+            </a:solidFill>
+            <a:prstDash val="solid"/>
+          </a:ln>
+        </p:spPr>
+        <p:txBody>
+          <a:bodyPr/>
+          <a:lstStyle/>
+          <a:p>
+            <a:endParaRPr lang="it-CH"/>
+          </a:p>
+        </p:txBody>
+      </p:sp>
+      <p:sp>
+        <p:nvSpPr>
+          <p:cNvPr id="3" name="Text 1">
+            <a:extLst>
+              <a:ext uri="{FF2B5EF4-FFF2-40B4-BE49-F238E27FC236}">
+                <a16:creationId xmlns:a16="http://schemas.microsoft.com/office/drawing/2014/main" id="{B7C0276C-26E0-D041-AC9F-5E445CA19F67}"/>
+              </a:ext>
+            </a:extLst>
+          </p:cNvPr>
+          <p:cNvSpPr/>
+          <p:nvPr/>
+        </p:nvSpPr>
+        <p:spPr>
+          <a:xfrm>
+            <a:off x="365760" y="164592"/>
+            <a:ext cx="8412480" cy="548640"/>
+          </a:xfrm>
+          <a:prstGeom prst="rect">
+            <a:avLst/>
+          </a:prstGeom>
+          <a:noFill/>
+          <a:ln/>
+        </p:spPr>
+        <p:txBody>
+          <a:bodyPr wrap="square" lIns="0" tIns="0" rIns="0" bIns="0" rtlCol="0" anchor="ctr"/>
+          <a:lstStyle/>
+          <a:p>
+            <a:pPr marL="0" indent="0">
+              <a:buNone/>
+            </a:pPr>
+            <a:r>
+              <a:rPr lang="en-US" sz="2200" b="1" dirty="0">
+                <a:solidFill>
+                  <a:srgbClr val="00B4D8"/>
+                </a:solidFill>
+                <a:latin typeface="Calibri" pitchFamily="34" charset="0"/>
+                <a:ea typeface="Calibri" pitchFamily="34" charset="-122"/>
+                <a:cs typeface="Calibri" pitchFamily="34" charset="-120"/>
+              </a:rPr>
+              <a:t>Nome</a:t>
+            </a:r>
+            <a:endParaRPr lang="en-US" sz="2200" dirty="0"/>
+          </a:p>
+        </p:txBody>
+      </p:sp>
+      <p:sp>
+        <p:nvSpPr>
+          <p:cNvPr id="4" name="Text 2">
+            <a:extLst>
+              <a:ext uri="{FF2B5EF4-FFF2-40B4-BE49-F238E27FC236}">
+                <a16:creationId xmlns:a16="http://schemas.microsoft.com/office/drawing/2014/main" id="{1DFAD001-EFCE-2644-2C87-7944626ABECD}"/>
+              </a:ext>
+            </a:extLst>
+          </p:cNvPr>
+          <p:cNvSpPr/>
+          <p:nvPr/>
+        </p:nvSpPr>
+        <p:spPr>
+          <a:xfrm>
+            <a:off x="365760" y="804672"/>
+            <a:ext cx="8412480" cy="320040"/>
+          </a:xfrm>
+          <a:prstGeom prst="rect">
+            <a:avLst/>
+          </a:prstGeom>
+          <a:noFill/>
+          <a:ln/>
+        </p:spPr>
+        <p:txBody>
+          <a:bodyPr wrap="square" lIns="0" tIns="0" rIns="0" bIns="0" rtlCol="0" anchor="ctr"/>
+          <a:lstStyle/>
+          <a:p>
+            <a:pPr marL="0" indent="0">
+              <a:buNone/>
+            </a:pPr>
+            <a:r>
+              <a:rPr lang="en-US" sz="1300" i="1" dirty="0">
+                <a:solidFill>
+                  <a:srgbClr val="B0BEC5"/>
+                </a:solidFill>
+                <a:latin typeface="Calibri" pitchFamily="34" charset="0"/>
+                <a:cs typeface="Calibri" pitchFamily="34" charset="-120"/>
+              </a:rPr>
+              <a:t>testo</a:t>
+            </a:r>
+            <a:endParaRPr lang="en-US" sz="1300" dirty="0"/>
+          </a:p>
+        </p:txBody>
+      </p:sp>
+      <p:sp>
+        <p:nvSpPr>
+          <p:cNvPr id="5" name="Shape 3">
+            <a:extLst>
+              <a:ext uri="{FF2B5EF4-FFF2-40B4-BE49-F238E27FC236}">
+                <a16:creationId xmlns:a16="http://schemas.microsoft.com/office/drawing/2014/main" id="{989CCD95-2381-C8D3-273C-50604454E15D}"/>
+              </a:ext>
+            </a:extLst>
+          </p:cNvPr>
+          <p:cNvSpPr/>
+          <p:nvPr/>
+        </p:nvSpPr>
+        <p:spPr>
+          <a:xfrm>
+            <a:off x="365760" y="1234440"/>
+            <a:ext cx="8503920" cy="3611880"/>
+          </a:xfrm>
+          <a:prstGeom prst="rect">
+            <a:avLst/>
+          </a:prstGeom>
+          <a:solidFill>
+            <a:srgbClr val="1E3057"/>
+          </a:solidFill>
+          <a:ln w="12700">
+            <a:solidFill>
+              <a:srgbClr val="2A4580"/>
+            </a:solidFill>
+            <a:prstDash val="solid"/>
+          </a:ln>
+        </p:spPr>
+        <p:txBody>
+          <a:bodyPr/>
+          <a:lstStyle/>
+          <a:p>
+            <a:endParaRPr lang="it-CH"/>
+          </a:p>
+        </p:txBody>
+      </p:sp>
+      <p:sp>
+        <p:nvSpPr>
+          <p:cNvPr id="6" name="Text 4">
+            <a:extLst>
+              <a:ext uri="{FF2B5EF4-FFF2-40B4-BE49-F238E27FC236}">
+                <a16:creationId xmlns:a16="http://schemas.microsoft.com/office/drawing/2014/main" id="{879485CC-06E1-5572-ADB3-C07D24B4E4C5}"/>
+              </a:ext>
+            </a:extLst>
+          </p:cNvPr>
+          <p:cNvSpPr/>
+          <p:nvPr/>
+        </p:nvSpPr>
+        <p:spPr>
+          <a:xfrm>
+            <a:off x="365760" y="1234440"/>
+            <a:ext cx="8503920" cy="3611880"/>
+          </a:xfrm>
+          <a:prstGeom prst="rect">
+            <a:avLst/>
+          </a:prstGeom>
+          <a:noFill/>
+          <a:ln/>
+        </p:spPr>
+        <p:txBody>
+          <a:bodyPr wrap="square" lIns="0" tIns="0" rIns="0" bIns="0" rtlCol="0" anchor="ctr"/>
+          <a:lstStyle/>
+          <a:p>
+            <a:pPr marL="0" indent="0" algn="ctr">
+              <a:buNone/>
+            </a:pPr>
+            <a:r>
+              <a:rPr lang="en-US" sz="1400" dirty="0">
+                <a:solidFill>
+                  <a:srgbClr val="2A4580"/>
+                </a:solidFill>
+                <a:latin typeface="Calibri" pitchFamily="34" charset="0"/>
+                <a:ea typeface="Calibri" pitchFamily="34" charset="-122"/>
+                <a:cs typeface="Calibri" pitchFamily="34" charset="-120"/>
+              </a:rPr>
+              <a:t>[ grafico ]</a:t>
+            </a:r>
+            <a:endParaRPr lang="en-US" sz="1400" dirty="0"/>
+          </a:p>
+        </p:txBody>
+      </p:sp>
+    </p:spTree>
+    <p:extLst>
+      <p:ext uri="{BB962C8B-B14F-4D97-AF65-F5344CB8AC3E}">
+        <p14:creationId xmlns:p14="http://schemas.microsoft.com/office/powerpoint/2010/main" val="2272597280"/>
+      </p:ext>
+    </p:extLst>
+  </p:cSld>
+  <p:clrMapOvr>
+    <a:masterClrMapping/>
+  </p:clrMapOvr>
+</p:sld>
+</file>
+
+<file path=ppt/slides/slide9.xml><?xml version="1.0" encoding="utf-8"?>
 <p:sld xmlns:a="http://schemas.openxmlformats.org/drawingml/2006/main" xmlns:r="http://schemas.openxmlformats.org/officeDocument/2006/relationships" xmlns:p="http://schemas.openxmlformats.org/presentationml/2006/main">
   <p:cSld name="Slide 8">
     <p:bg>
@@ -6120,6 +6521,17 @@
               <a:buAutoNum type="arabicPeriod"/>
             </a:pPr>
             <a:r>
+              <a:rPr lang="en-US" sz="2400" i="1" dirty="0" err="1">
+                <a:solidFill>
+                  <a:srgbClr val="B0BEC5"/>
+                </a:solidFill>
+                <a:latin typeface="Calibri" pitchFamily="34" charset="0"/>
+                <a:ea typeface="Calibri" pitchFamily="34" charset="-122"/>
+                <a:cs typeface="Calibri" pitchFamily="34" charset="-120"/>
+              </a:rPr>
+              <a:t>Correlazione</a:t>
+            </a:r>
+            <a:r>
               <a:rPr lang="en-US" sz="2400" i="1" dirty="0">
                 <a:solidFill>
                   <a:srgbClr val="B0BEC5"/>
@@ -6128,7 +6540,7 @@
                 <a:ea typeface="Calibri" pitchFamily="34" charset="-122"/>
                 <a:cs typeface="Calibri" pitchFamily="34" charset="-120"/>
               </a:rPr>
-              <a:t>Mappa </a:t>
+              <a:t> </a:t>
             </a:r>
             <a:r>
               <a:rPr lang="en-US" sz="2400" i="1" dirty="0" err="1">
@@ -6139,7 +6551,7 @@
                 <a:ea typeface="Calibri" pitchFamily="34" charset="-122"/>
                 <a:cs typeface="Calibri" pitchFamily="34" charset="-120"/>
               </a:rPr>
-              <a:t>interattiva</a:t>
+              <a:t>meteo</a:t>
             </a:r>
             <a:r>
               <a:rPr lang="en-US" sz="2400" i="1" dirty="0">
@@ -6159,6 +6571,17 @@
               <a:buAutoNum type="arabicPeriod"/>
             </a:pPr>
             <a:r>
+              <a:rPr lang="en-US" sz="2400" i="1" dirty="0" err="1">
+                <a:solidFill>
+                  <a:srgbClr val="B0BEC5"/>
+                </a:solidFill>
+                <a:latin typeface="Calibri" pitchFamily="34" charset="0"/>
+                <a:ea typeface="Calibri" pitchFamily="34" charset="-122"/>
+                <a:cs typeface="Calibri" pitchFamily="34" charset="-120"/>
+              </a:rPr>
+              <a:t>Differenza</a:t>
+            </a:r>
+            <a:r>
               <a:rPr lang="en-US" sz="2400" i="1" dirty="0">
                 <a:solidFill>
                   <a:srgbClr val="B0BEC5"/>
@@ -6167,7 +6590,7 @@
                 <a:ea typeface="Calibri" pitchFamily="34" charset="-122"/>
                 <a:cs typeface="Calibri" pitchFamily="34" charset="-120"/>
               </a:rPr>
-              <a:t>Trend </a:t>
+              <a:t> </a:t>
             </a:r>
             <a:r>
               <a:rPr lang="en-US" sz="2400" i="1" dirty="0" err="1">
@@ -6178,7 +6601,7 @@
                 <a:ea typeface="Calibri" pitchFamily="34" charset="-122"/>
                 <a:cs typeface="Calibri" pitchFamily="34" charset="-120"/>
               </a:rPr>
-              <a:t>temporale</a:t>
+              <a:t>velocità</a:t>
             </a:r>
             <a:r>
               <a:rPr lang="en-US" sz="2400" i="1" dirty="0">
@@ -6189,7 +6612,51 @@
                 <a:ea typeface="Calibri" pitchFamily="34" charset="-122"/>
                 <a:cs typeface="Calibri" pitchFamily="34" charset="-120"/>
               </a:rPr>
-              <a:t> </a:t>
+              <a:t> – </a:t>
+            </a:r>
+            <a:r>
+              <a:rPr lang="en-US" sz="2400" i="1" dirty="0" err="1">
+                <a:solidFill>
+                  <a:srgbClr val="B0BEC5"/>
+                </a:solidFill>
+                <a:latin typeface="Calibri" pitchFamily="34" charset="0"/>
+                <a:ea typeface="Calibri" pitchFamily="34" charset="-122"/>
+                <a:cs typeface="Calibri" pitchFamily="34" charset="-120"/>
+              </a:rPr>
+              <a:t>tipo</a:t>
+            </a:r>
+            <a:r>
+              <a:rPr lang="en-US" sz="2400" i="1" dirty="0">
+                <a:solidFill>
+                  <a:srgbClr val="B0BEC5"/>
+                </a:solidFill>
+                <a:latin typeface="Calibri" pitchFamily="34" charset="0"/>
+                <a:ea typeface="Calibri" pitchFamily="34" charset="-122"/>
+                <a:cs typeface="Calibri" pitchFamily="34" charset="-120"/>
+              </a:rPr>
+              <a:t> di </a:t>
+            </a:r>
+            <a:r>
+              <a:rPr lang="en-US" sz="2400" i="1" dirty="0" err="1">
+                <a:solidFill>
+                  <a:srgbClr val="B0BEC5"/>
+                </a:solidFill>
+                <a:latin typeface="Calibri" pitchFamily="34" charset="0"/>
+                <a:ea typeface="Calibri" pitchFamily="34" charset="-122"/>
+                <a:cs typeface="Calibri" pitchFamily="34" charset="-120"/>
+              </a:rPr>
+              <a:t>veicolo</a:t>
+            </a:r>
+            <a:r>
+              <a:rPr lang="en-US" sz="2400" i="1" dirty="0">
+                <a:solidFill>
+                  <a:srgbClr val="B0BEC5"/>
+                </a:solidFill>
+                <a:latin typeface="Calibri" pitchFamily="34" charset="0"/>
+                <a:ea typeface="Calibri" pitchFamily="34" charset="-122"/>
+                <a:cs typeface="Calibri" pitchFamily="34" charset="-120"/>
+              </a:rPr>
+              <a:t> (moto/camion)</a:t>
             </a:r>
           </a:p>
           <a:p>
@@ -6206,7 +6673,7 @@
                 <a:ea typeface="Calibri" pitchFamily="34" charset="-122"/>
                 <a:cs typeface="Calibri" pitchFamily="34" charset="-120"/>
               </a:rPr>
-              <a:t>Correlazione</a:t>
+              <a:t>Differenza</a:t>
             </a:r>
             <a:r>
               <a:rPr lang="en-US" sz="2400" i="1" dirty="0">
@@ -6228,7 +6695,7 @@
                 <a:ea typeface="Calibri" pitchFamily="34" charset="-122"/>
                 <a:cs typeface="Calibri" pitchFamily="34" charset="-120"/>
               </a:rPr>
-              <a:t>meteo</a:t>
+              <a:t>postazioni</a:t>
             </a:r>
             <a:r>
               <a:rPr lang="en-US" sz="2400" i="1" dirty="0">
@@ -6239,7 +6706,7 @@
                 <a:ea typeface="Calibri" pitchFamily="34" charset="-122"/>
                 <a:cs typeface="Calibri" pitchFamily="34" charset="-120"/>
               </a:rPr>
-              <a:t> </a:t>
+              <a:t> radar Giorno-notte</a:t>
             </a:r>
           </a:p>
           <a:p>
@@ -6248,17 +6715,6 @@
               <a:buAutoNum type="arabicPeriod"/>
             </a:pPr>
             <a:r>
-              <a:rPr lang="en-US" sz="2400" i="1" dirty="0" err="1">
-                <a:solidFill>
-                  <a:srgbClr val="B0BEC5"/>
-                </a:solidFill>
-                <a:latin typeface="Calibri" pitchFamily="34" charset="0"/>
-                <a:ea typeface="Calibri" pitchFamily="34" charset="-122"/>
-                <a:cs typeface="Calibri" pitchFamily="34" charset="-120"/>
-              </a:rPr>
-              <a:t>Differenza</a:t>
-            </a:r>
-            <a:r>
               <a:rPr lang="en-US" sz="2400" i="1" dirty="0">
                 <a:solidFill>
                   <a:srgbClr val="B0BEC5"/>
@@ -6267,73 +6723,7 @@
                 <a:ea typeface="Calibri" pitchFamily="34" charset="-122"/>
                 <a:cs typeface="Calibri" pitchFamily="34" charset="-120"/>
               </a:rPr>
-              <a:t> </a:t>
-            </a:r>
-            <a:r>
-              <a:rPr lang="en-US" sz="2400" i="1" dirty="0" err="1">
-                <a:solidFill>
-                  <a:srgbClr val="B0BEC5"/>
-                </a:solidFill>
-                <a:latin typeface="Calibri" pitchFamily="34" charset="0"/>
-                <a:ea typeface="Calibri" pitchFamily="34" charset="-122"/>
-                <a:cs typeface="Calibri" pitchFamily="34" charset="-120"/>
-              </a:rPr>
-              <a:t>velocità</a:t>
-            </a:r>
-            <a:r>
-              <a:rPr lang="en-US" sz="2400" i="1" dirty="0">
-                <a:solidFill>
-                  <a:srgbClr val="B0BEC5"/>
-                </a:solidFill>
-                <a:latin typeface="Calibri" pitchFamily="34" charset="0"/>
-                <a:ea typeface="Calibri" pitchFamily="34" charset="-122"/>
-                <a:cs typeface="Calibri" pitchFamily="34" charset="-120"/>
-              </a:rPr>
-              <a:t> – </a:t>
-            </a:r>
-            <a:r>
-              <a:rPr lang="en-US" sz="2400" i="1" dirty="0" err="1">
-                <a:solidFill>
-                  <a:srgbClr val="B0BEC5"/>
-                </a:solidFill>
-                <a:latin typeface="Calibri" pitchFamily="34" charset="0"/>
-                <a:ea typeface="Calibri" pitchFamily="34" charset="-122"/>
-                <a:cs typeface="Calibri" pitchFamily="34" charset="-120"/>
-              </a:rPr>
-              <a:t>tipo</a:t>
-            </a:r>
-            <a:r>
-              <a:rPr lang="en-US" sz="2400" i="1" dirty="0">
-                <a:solidFill>
-                  <a:srgbClr val="B0BEC5"/>
-                </a:solidFill>
-                <a:latin typeface="Calibri" pitchFamily="34" charset="0"/>
-                <a:ea typeface="Calibri" pitchFamily="34" charset="-122"/>
-                <a:cs typeface="Calibri" pitchFamily="34" charset="-120"/>
-              </a:rPr>
-              <a:t> di </a:t>
-            </a:r>
-            <a:r>
-              <a:rPr lang="en-US" sz="2400" i="1" dirty="0" err="1">
-                <a:solidFill>
-                  <a:srgbClr val="B0BEC5"/>
-                </a:solidFill>
-                <a:latin typeface="Calibri" pitchFamily="34" charset="0"/>
-                <a:ea typeface="Calibri" pitchFamily="34" charset="-122"/>
-                <a:cs typeface="Calibri" pitchFamily="34" charset="-120"/>
-              </a:rPr>
-              <a:t>veicolo</a:t>
-            </a:r>
-            <a:r>
-              <a:rPr lang="en-US" sz="2400" i="1" dirty="0">
-                <a:solidFill>
-                  <a:srgbClr val="B0BEC5"/>
-                </a:solidFill>
-                <a:latin typeface="Calibri" pitchFamily="34" charset="0"/>
-                <a:ea typeface="Calibri" pitchFamily="34" charset="-122"/>
-                <a:cs typeface="Calibri" pitchFamily="34" charset="-120"/>
-              </a:rPr>
-              <a:t> (moto/camion)</a:t>
+              <a:t>…</a:t>
             </a:r>
           </a:p>
           <a:p>
@@ -6350,529 +6740,7 @@
                 <a:ea typeface="Calibri" pitchFamily="34" charset="-122"/>
                 <a:cs typeface="Calibri" pitchFamily="34" charset="-120"/>
               </a:rPr>
-              <a:t>…</a:t>
-            </a:r>
-          </a:p>
-          <a:p>
-            <a:pPr marL="342900" indent="-342900">
-              <a:buFont typeface="+mj-lt"/>
-              <a:buAutoNum type="arabicPeriod"/>
-            </a:pPr>
-            <a:r>
-              <a:rPr lang="en-US" sz="2400" i="1" dirty="0">
-                <a:solidFill>
-                  <a:srgbClr val="B0BEC5"/>
-                </a:solidFill>
-                <a:latin typeface="Calibri" pitchFamily="34" charset="0"/>
-                <a:ea typeface="Calibri" pitchFamily="34" charset="-122"/>
-                <a:cs typeface="Calibri" pitchFamily="34" charset="-120"/>
-              </a:rPr>
               <a:t>Consigli?</a:t>
-            </a:r>
-          </a:p>
-        </p:txBody>
-      </p:sp>
-    </p:spTree>
-  </p:cSld>
-  <p:clrMapOvr>
-    <a:masterClrMapping/>
-  </p:clrMapOvr>
-</p:sld>
-</file>
-
-<file path=ppt/slides/slide7.xml><?xml version="1.0" encoding="utf-8"?>
-<p:sld xmlns:a="http://schemas.openxmlformats.org/drawingml/2006/main" xmlns:r="http://schemas.openxmlformats.org/officeDocument/2006/relationships" xmlns:p="http://schemas.openxmlformats.org/presentationml/2006/main">
-  <p:cSld name="Slide 9">
-    <p:bg>
-      <p:bgPr>
-        <a:solidFill>
-          <a:srgbClr val="1A2744"/>
-        </a:solidFill>
-        <a:effectLst/>
-      </p:bgPr>
-    </p:bg>
-    <p:spTree>
-      <p:nvGrpSpPr>
-        <p:cNvPr id="1" name=""/>
-        <p:cNvGrpSpPr/>
-        <p:nvPr/>
-      </p:nvGrpSpPr>
-      <p:grpSpPr>
-        <a:xfrm>
-          <a:off x="0" y="0"/>
-          <a:ext cx="0" cy="0"/>
-          <a:chOff x="0" y="0"/>
-          <a:chExt cx="0" cy="0"/>
-        </a:xfrm>
-      </p:grpSpPr>
-      <p:sp>
-        <p:nvSpPr>
-          <p:cNvPr id="2" name="Shape 0"/>
-          <p:cNvSpPr/>
-          <p:nvPr/>
-        </p:nvSpPr>
-        <p:spPr>
-          <a:xfrm>
-            <a:off x="0" y="0"/>
-            <a:ext cx="164592" cy="5143500"/>
-          </a:xfrm>
-          <a:prstGeom prst="rect">
-            <a:avLst/>
-          </a:prstGeom>
-          <a:solidFill>
-            <a:srgbClr val="00B4D8"/>
-          </a:solidFill>
-          <a:ln w="12700">
-            <a:solidFill>
-              <a:srgbClr val="00B4D8"/>
-            </a:solidFill>
-            <a:prstDash val="solid"/>
-          </a:ln>
-        </p:spPr>
-        <p:txBody>
-          <a:bodyPr/>
-          <a:lstStyle/>
-          <a:p>
-            <a:endParaRPr lang="it-CH"/>
-          </a:p>
-        </p:txBody>
-      </p:sp>
-      <p:sp>
-        <p:nvSpPr>
-          <p:cNvPr id="3" name="Text 1"/>
-          <p:cNvSpPr/>
-          <p:nvPr/>
-        </p:nvSpPr>
-        <p:spPr>
-          <a:xfrm>
-            <a:off x="365760" y="457200"/>
-            <a:ext cx="8412480" cy="548640"/>
-          </a:xfrm>
-          <a:prstGeom prst="rect">
-            <a:avLst/>
-          </a:prstGeom>
-          <a:noFill/>
-          <a:ln/>
-        </p:spPr>
-        <p:txBody>
-          <a:bodyPr wrap="square" lIns="0" tIns="0" rIns="0" bIns="0" rtlCol="0" anchor="ctr"/>
-          <a:lstStyle/>
-          <a:p>
-            <a:pPr marL="0" indent="0">
-              <a:buNone/>
-            </a:pPr>
-            <a:r>
-              <a:rPr lang="en-US" sz="2200" b="1" dirty="0">
-                <a:solidFill>
-                  <a:srgbClr val="00B4D8"/>
-                </a:solidFill>
-                <a:latin typeface="Calibri" pitchFamily="34" charset="0"/>
-                <a:ea typeface="Calibri" pitchFamily="34" charset="-122"/>
-                <a:cs typeface="Calibri" pitchFamily="34" charset="-120"/>
-              </a:rPr>
-              <a:t>Conclusioni &amp; Prossimi Passi</a:t>
-            </a:r>
-            <a:endParaRPr lang="en-US" sz="2200" dirty="0"/>
-          </a:p>
-        </p:txBody>
-      </p:sp>
-      <p:sp>
-        <p:nvSpPr>
-          <p:cNvPr id="4" name="Shape 2"/>
-          <p:cNvSpPr/>
-          <p:nvPr/>
-        </p:nvSpPr>
-        <p:spPr>
-          <a:xfrm>
-            <a:off x="365760" y="1234440"/>
-            <a:ext cx="8503920" cy="3611880"/>
-          </a:xfrm>
-          <a:prstGeom prst="rect">
-            <a:avLst/>
-          </a:prstGeom>
-          <a:solidFill>
-            <a:srgbClr val="1E3057"/>
-          </a:solidFill>
-          <a:ln w="12700">
-            <a:solidFill>
-              <a:srgbClr val="2A4580"/>
-            </a:solidFill>
-            <a:prstDash val="solid"/>
-          </a:ln>
-        </p:spPr>
-        <p:txBody>
-          <a:bodyPr/>
-          <a:lstStyle/>
-          <a:p>
-            <a:endParaRPr lang="it-CH"/>
-          </a:p>
-        </p:txBody>
-      </p:sp>
-      <p:sp>
-        <p:nvSpPr>
-          <p:cNvPr id="5" name="Text 3"/>
-          <p:cNvSpPr/>
-          <p:nvPr/>
-        </p:nvSpPr>
-        <p:spPr>
-          <a:xfrm>
-            <a:off x="365760" y="1234440"/>
-            <a:ext cx="8503920" cy="3611880"/>
-          </a:xfrm>
-          <a:prstGeom prst="rect">
-            <a:avLst/>
-          </a:prstGeom>
-          <a:noFill/>
-          <a:ln/>
-        </p:spPr>
-        <p:txBody>
-          <a:bodyPr wrap="square" lIns="0" tIns="0" rIns="0" bIns="0" rtlCol="0" anchor="ctr"/>
-          <a:lstStyle/>
-          <a:p>
-            <a:pPr marL="0" indent="0" algn="ctr">
-              <a:buNone/>
-            </a:pPr>
-            <a:endParaRPr lang="en-US" sz="1400" dirty="0"/>
-          </a:p>
-        </p:txBody>
-      </p:sp>
-      <p:sp>
-        <p:nvSpPr>
-          <p:cNvPr id="6" name="Text 2">
-            <a:extLst>
-              <a:ext uri="{FF2B5EF4-FFF2-40B4-BE49-F238E27FC236}">
-                <a16:creationId xmlns:a16="http://schemas.microsoft.com/office/drawing/2014/main" id="{6A5EC037-901C-9B09-8D52-3D7B268D9A64}"/>
-              </a:ext>
-            </a:extLst>
-          </p:cNvPr>
-          <p:cNvSpPr/>
-          <p:nvPr/>
-        </p:nvSpPr>
-        <p:spPr>
-          <a:xfrm>
-            <a:off x="526724" y="1234440"/>
-            <a:ext cx="8181991" cy="3673715"/>
-          </a:xfrm>
-          <a:prstGeom prst="rect">
-            <a:avLst/>
-          </a:prstGeom>
-          <a:noFill/>
-          <a:ln/>
-        </p:spPr>
-        <p:txBody>
-          <a:bodyPr wrap="square" lIns="0" tIns="0" rIns="0" bIns="0" rtlCol="0" anchor="ctr"/>
-          <a:lstStyle/>
-          <a:p>
-            <a:r>
-              <a:rPr lang="en-US" sz="2400" i="1" dirty="0">
-                <a:solidFill>
-                  <a:srgbClr val="B0BEC5"/>
-                </a:solidFill>
-                <a:latin typeface="Calibri" pitchFamily="34" charset="0"/>
-                <a:ea typeface="Calibri" pitchFamily="34" charset="-122"/>
-                <a:cs typeface="Calibri" pitchFamily="34" charset="-120"/>
-              </a:rPr>
-              <a:t>I Dati: </a:t>
-            </a:r>
-            <a:r>
-              <a:rPr lang="en-US" sz="2400" i="1" dirty="0" err="1">
-                <a:solidFill>
-                  <a:srgbClr val="B0BEC5"/>
-                </a:solidFill>
-                <a:latin typeface="Calibri" pitchFamily="34" charset="0"/>
-                <a:ea typeface="Calibri" pitchFamily="34" charset="-122"/>
-                <a:cs typeface="Calibri" pitchFamily="34" charset="-120"/>
-              </a:rPr>
-              <a:t>Informazioni</a:t>
-            </a:r>
-            <a:r>
-              <a:rPr lang="en-US" sz="2400" i="1" dirty="0">
-                <a:solidFill>
-                  <a:srgbClr val="B0BEC5"/>
-                </a:solidFill>
-                <a:latin typeface="Calibri" pitchFamily="34" charset="0"/>
-                <a:ea typeface="Calibri" pitchFamily="34" charset="-122"/>
-                <a:cs typeface="Calibri" pitchFamily="34" charset="-120"/>
-              </a:rPr>
-              <a:t> </a:t>
-            </a:r>
-            <a:r>
-              <a:rPr lang="en-US" sz="2400" i="1" dirty="0" err="1">
-                <a:solidFill>
-                  <a:srgbClr val="B0BEC5"/>
-                </a:solidFill>
-                <a:latin typeface="Calibri" pitchFamily="34" charset="0"/>
-                <a:ea typeface="Calibri" pitchFamily="34" charset="-122"/>
-                <a:cs typeface="Calibri" pitchFamily="34" charset="-120"/>
-              </a:rPr>
-              <a:t>reali</a:t>
-            </a:r>
-            <a:r>
-              <a:rPr lang="en-US" sz="2400" i="1" dirty="0">
-                <a:solidFill>
-                  <a:srgbClr val="B0BEC5"/>
-                </a:solidFill>
-                <a:latin typeface="Calibri" pitchFamily="34" charset="0"/>
-                <a:ea typeface="Calibri" pitchFamily="34" charset="-122"/>
-                <a:cs typeface="Calibri" pitchFamily="34" charset="-120"/>
-              </a:rPr>
-              <a:t> e </a:t>
-            </a:r>
-            <a:r>
-              <a:rPr lang="en-US" sz="2400" i="1" dirty="0" err="1">
-                <a:solidFill>
-                  <a:srgbClr val="B0BEC5"/>
-                </a:solidFill>
-                <a:latin typeface="Calibri" pitchFamily="34" charset="0"/>
-                <a:ea typeface="Calibri" pitchFamily="34" charset="-122"/>
-                <a:cs typeface="Calibri" pitchFamily="34" charset="-120"/>
-              </a:rPr>
-              <a:t>locali</a:t>
-            </a:r>
-            <a:r>
-              <a:rPr lang="en-US" sz="2400" i="1" dirty="0">
-                <a:solidFill>
-                  <a:srgbClr val="B0BEC5"/>
-                </a:solidFill>
-                <a:latin typeface="Calibri" pitchFamily="34" charset="0"/>
-                <a:ea typeface="Calibri" pitchFamily="34" charset="-122"/>
-                <a:cs typeface="Calibri" pitchFamily="34" charset="-120"/>
-              </a:rPr>
-              <a:t> </a:t>
-            </a:r>
-            <a:r>
-              <a:rPr lang="en-US" sz="2400" i="1" dirty="0" err="1">
-                <a:solidFill>
-                  <a:srgbClr val="B0BEC5"/>
-                </a:solidFill>
-                <a:latin typeface="Calibri" pitchFamily="34" charset="0"/>
-                <a:ea typeface="Calibri" pitchFamily="34" charset="-122"/>
-                <a:cs typeface="Calibri" pitchFamily="34" charset="-120"/>
-              </a:rPr>
-              <a:t>sul</a:t>
-            </a:r>
-            <a:r>
-              <a:rPr lang="en-US" sz="2400" i="1" dirty="0">
-                <a:solidFill>
-                  <a:srgbClr val="B0BEC5"/>
-                </a:solidFill>
-                <a:latin typeface="Calibri" pitchFamily="34" charset="0"/>
-                <a:ea typeface="Calibri" pitchFamily="34" charset="-122"/>
-                <a:cs typeface="Calibri" pitchFamily="34" charset="-120"/>
-              </a:rPr>
-              <a:t> </a:t>
-            </a:r>
-            <a:r>
-              <a:rPr lang="en-US" sz="2400" i="1" dirty="0" err="1">
-                <a:solidFill>
-                  <a:srgbClr val="B0BEC5"/>
-                </a:solidFill>
-                <a:latin typeface="Calibri" pitchFamily="34" charset="0"/>
-                <a:ea typeface="Calibri" pitchFamily="34" charset="-122"/>
-                <a:cs typeface="Calibri" pitchFamily="34" charset="-120"/>
-              </a:rPr>
-              <a:t>traffico</a:t>
-            </a:r>
-            <a:r>
-              <a:rPr lang="en-US" sz="2400" i="1" dirty="0">
-                <a:solidFill>
-                  <a:srgbClr val="B0BEC5"/>
-                </a:solidFill>
-                <a:latin typeface="Calibri" pitchFamily="34" charset="0"/>
-                <a:ea typeface="Calibri" pitchFamily="34" charset="-122"/>
-                <a:cs typeface="Calibri" pitchFamily="34" charset="-120"/>
-              </a:rPr>
-              <a:t> </a:t>
-            </a:r>
-            <a:r>
-              <a:rPr lang="en-US" sz="2400" i="1" dirty="0" err="1">
-                <a:solidFill>
-                  <a:srgbClr val="B0BEC5"/>
-                </a:solidFill>
-                <a:latin typeface="Calibri" pitchFamily="34" charset="0"/>
-                <a:ea typeface="Calibri" pitchFamily="34" charset="-122"/>
-                <a:cs typeface="Calibri" pitchFamily="34" charset="-120"/>
-              </a:rPr>
-              <a:t>svizzero</a:t>
-            </a:r>
-            <a:r>
-              <a:rPr lang="en-US" sz="2400" i="1" dirty="0">
-                <a:solidFill>
-                  <a:srgbClr val="B0BEC5"/>
-                </a:solidFill>
-                <a:latin typeface="Calibri" pitchFamily="34" charset="0"/>
-                <a:ea typeface="Calibri" pitchFamily="34" charset="-122"/>
-                <a:cs typeface="Calibri" pitchFamily="34" charset="-120"/>
-              </a:rPr>
-              <a:t>.</a:t>
-            </a:r>
-          </a:p>
-          <a:p>
-            <a:r>
-              <a:rPr lang="en-US" sz="2400" i="1" dirty="0" err="1">
-                <a:solidFill>
-                  <a:srgbClr val="B0BEC5"/>
-                </a:solidFill>
-                <a:latin typeface="Calibri" pitchFamily="34" charset="0"/>
-                <a:ea typeface="Calibri" pitchFamily="34" charset="-122"/>
-                <a:cs typeface="Calibri" pitchFamily="34" charset="-120"/>
-              </a:rPr>
-              <a:t>L'Obiettivo</a:t>
-            </a:r>
-            <a:r>
-              <a:rPr lang="en-US" sz="2400" i="1" dirty="0">
-                <a:solidFill>
-                  <a:srgbClr val="B0BEC5"/>
-                </a:solidFill>
-                <a:latin typeface="Calibri" pitchFamily="34" charset="0"/>
-                <a:ea typeface="Calibri" pitchFamily="34" charset="-122"/>
-                <a:cs typeface="Calibri" pitchFamily="34" charset="-120"/>
-              </a:rPr>
-              <a:t>: </a:t>
-            </a:r>
-            <a:r>
-              <a:rPr lang="en-US" sz="2400" i="1" dirty="0" err="1">
-                <a:solidFill>
-                  <a:srgbClr val="B0BEC5"/>
-                </a:solidFill>
-                <a:latin typeface="Calibri" pitchFamily="34" charset="0"/>
-                <a:ea typeface="Calibri" pitchFamily="34" charset="-122"/>
-                <a:cs typeface="Calibri" pitchFamily="34" charset="-120"/>
-              </a:rPr>
-              <a:t>Promuovere</a:t>
-            </a:r>
-            <a:r>
-              <a:rPr lang="en-US" sz="2400" i="1" dirty="0">
-                <a:solidFill>
-                  <a:srgbClr val="B0BEC5"/>
-                </a:solidFill>
-                <a:latin typeface="Calibri" pitchFamily="34" charset="0"/>
-                <a:ea typeface="Calibri" pitchFamily="34" charset="-122"/>
-                <a:cs typeface="Calibri" pitchFamily="34" charset="-120"/>
-              </a:rPr>
-              <a:t> la </a:t>
-            </a:r>
-            <a:r>
-              <a:rPr lang="en-US" sz="2400" i="1" dirty="0" err="1">
-                <a:solidFill>
-                  <a:srgbClr val="B0BEC5"/>
-                </a:solidFill>
-                <a:latin typeface="Calibri" pitchFamily="34" charset="0"/>
-                <a:ea typeface="Calibri" pitchFamily="34" charset="-122"/>
-                <a:cs typeface="Calibri" pitchFamily="34" charset="-120"/>
-              </a:rPr>
-              <a:t>sicurezza</a:t>
-            </a:r>
-            <a:r>
-              <a:rPr lang="en-US" sz="2400" i="1" dirty="0">
-                <a:solidFill>
-                  <a:srgbClr val="B0BEC5"/>
-                </a:solidFill>
-                <a:latin typeface="Calibri" pitchFamily="34" charset="0"/>
-                <a:ea typeface="Calibri" pitchFamily="34" charset="-122"/>
-                <a:cs typeface="Calibri" pitchFamily="34" charset="-120"/>
-              </a:rPr>
-              <a:t> </a:t>
-            </a:r>
-            <a:r>
-              <a:rPr lang="en-US" sz="2400" i="1" dirty="0" err="1">
-                <a:solidFill>
-                  <a:srgbClr val="B0BEC5"/>
-                </a:solidFill>
-                <a:latin typeface="Calibri" pitchFamily="34" charset="0"/>
-                <a:ea typeface="Calibri" pitchFamily="34" charset="-122"/>
-                <a:cs typeface="Calibri" pitchFamily="34" charset="-120"/>
-              </a:rPr>
-              <a:t>stradale</a:t>
-            </a:r>
-            <a:r>
-              <a:rPr lang="en-US" sz="2400" i="1" dirty="0">
-                <a:solidFill>
-                  <a:srgbClr val="B0BEC5"/>
-                </a:solidFill>
-                <a:latin typeface="Calibri" pitchFamily="34" charset="0"/>
-                <a:ea typeface="Calibri" pitchFamily="34" charset="-122"/>
-                <a:cs typeface="Calibri" pitchFamily="34" charset="-120"/>
-              </a:rPr>
-              <a:t> </a:t>
-            </a:r>
-            <a:r>
-              <a:rPr lang="en-US" sz="2400" i="1" dirty="0" err="1">
-                <a:solidFill>
-                  <a:srgbClr val="B0BEC5"/>
-                </a:solidFill>
-                <a:latin typeface="Calibri" pitchFamily="34" charset="0"/>
-                <a:ea typeface="Calibri" pitchFamily="34" charset="-122"/>
-                <a:cs typeface="Calibri" pitchFamily="34" charset="-120"/>
-              </a:rPr>
-              <a:t>urbana</a:t>
-            </a:r>
-            <a:r>
-              <a:rPr lang="en-US" sz="2400" i="1" dirty="0">
-                <a:solidFill>
-                  <a:srgbClr val="B0BEC5"/>
-                </a:solidFill>
-                <a:latin typeface="Calibri" pitchFamily="34" charset="0"/>
-                <a:ea typeface="Calibri" pitchFamily="34" charset="-122"/>
-                <a:cs typeface="Calibri" pitchFamily="34" charset="-120"/>
-              </a:rPr>
-              <a:t>.</a:t>
-            </a:r>
-          </a:p>
-          <a:p>
-            <a:endParaRPr lang="en-US" sz="2400" i="1" dirty="0">
-              <a:solidFill>
-                <a:srgbClr val="B0BEC5"/>
-              </a:solidFill>
-              <a:latin typeface="Calibri" pitchFamily="34" charset="0"/>
-              <a:ea typeface="Calibri" pitchFamily="34" charset="-122"/>
-              <a:cs typeface="Calibri" pitchFamily="34" charset="-120"/>
-            </a:endParaRPr>
-          </a:p>
-          <a:p>
-            <a:r>
-              <a:rPr lang="en-US" sz="2400" i="1" dirty="0" err="1">
-                <a:solidFill>
-                  <a:srgbClr val="B0BEC5"/>
-                </a:solidFill>
-                <a:latin typeface="Calibri" pitchFamily="34" charset="0"/>
-                <a:ea typeface="Calibri" pitchFamily="34" charset="-122"/>
-                <a:cs typeface="Calibri" pitchFamily="34" charset="-120"/>
-              </a:rPr>
-              <a:t>Prossimo</a:t>
-            </a:r>
-            <a:r>
-              <a:rPr lang="en-US" sz="2400" i="1" dirty="0">
-                <a:solidFill>
-                  <a:srgbClr val="B0BEC5"/>
-                </a:solidFill>
-                <a:latin typeface="Calibri" pitchFamily="34" charset="0"/>
-                <a:ea typeface="Calibri" pitchFamily="34" charset="-122"/>
-                <a:cs typeface="Calibri" pitchFamily="34" charset="-120"/>
-              </a:rPr>
-              <a:t> step: </a:t>
-            </a:r>
-            <a:r>
-              <a:rPr lang="en-US" sz="2400" i="1" dirty="0" err="1">
-                <a:solidFill>
-                  <a:srgbClr val="B0BEC5"/>
-                </a:solidFill>
-                <a:latin typeface="Calibri" pitchFamily="34" charset="0"/>
-                <a:ea typeface="Calibri" pitchFamily="34" charset="-122"/>
-                <a:cs typeface="Calibri" pitchFamily="34" charset="-120"/>
-              </a:rPr>
-              <a:t>presentazione</a:t>
-            </a:r>
-            <a:r>
-              <a:rPr lang="en-US" sz="2400" i="1" dirty="0">
-                <a:solidFill>
-                  <a:srgbClr val="B0BEC5"/>
-                </a:solidFill>
-                <a:latin typeface="Calibri" pitchFamily="34" charset="0"/>
-                <a:ea typeface="Calibri" pitchFamily="34" charset="-122"/>
-                <a:cs typeface="Calibri" pitchFamily="34" charset="-120"/>
-              </a:rPr>
-              <a:t> intermedia.</a:t>
             </a:r>
           </a:p>
         </p:txBody>

--- a/speed_monitoring.pptx
+++ b/speed_monitoring.pptx
@@ -644,6 +644,96 @@
           <a:bodyPr/>
           <a:lstStyle/>
           <a:p>
+            <a:r>
+              <a:rPr lang="en-US" dirty="0"/>
+              <a:t>zoom </a:t>
+            </a:r>
+            <a:r>
+              <a:rPr lang="en-US" dirty="0" err="1"/>
+              <a:t>sul</a:t>
+            </a:r>
+            <a:r>
+              <a:rPr lang="en-US" dirty="0"/>
+              <a:t> primo e </a:t>
+            </a:r>
+            <a:r>
+              <a:rPr lang="en-US" dirty="0" err="1"/>
+              <a:t>mostraer</a:t>
+            </a:r>
+            <a:r>
+              <a:rPr lang="en-US" dirty="0"/>
+              <a:t> </a:t>
+            </a:r>
+            <a:r>
+              <a:rPr lang="en-US" dirty="0" err="1"/>
+              <a:t>una</a:t>
+            </a:r>
+            <a:r>
+              <a:rPr lang="en-US" dirty="0"/>
+              <a:t> </a:t>
+            </a:r>
+            <a:r>
+              <a:rPr lang="en-US" dirty="0" err="1"/>
+              <a:t>distribuziobe</a:t>
+            </a:r>
+            <a:r>
+              <a:rPr lang="en-US" dirty="0"/>
+              <a:t> delle </a:t>
+            </a:r>
+            <a:r>
+              <a:rPr lang="en-US" dirty="0" err="1"/>
+              <a:t>velocit`MISURATE</a:t>
+            </a:r>
+            <a:endParaRPr lang="en-US" dirty="0"/>
+          </a:p>
+          <a:p>
+            <a:r>
+              <a:rPr lang="en-US" dirty="0" err="1"/>
+              <a:t>mostra</a:t>
+            </a:r>
+            <a:r>
+              <a:rPr lang="en-US" dirty="0"/>
+              <a:t> campana </a:t>
+            </a:r>
+            <a:r>
+              <a:rPr lang="en-US" dirty="0" err="1"/>
+              <a:t>velocita</a:t>
+            </a:r>
+            <a:r>
+              <a:rPr lang="en-US" dirty="0"/>
+              <a:t> con </a:t>
+            </a:r>
+            <a:r>
+              <a:rPr lang="en-US" dirty="0" err="1"/>
+              <a:t>rigfa</a:t>
+            </a:r>
+            <a:r>
+              <a:rPr lang="en-US" dirty="0"/>
+              <a:t> </a:t>
+            </a:r>
+            <a:r>
+              <a:rPr lang="en-US" dirty="0" err="1"/>
+              <a:t>verticale</a:t>
+            </a:r>
+            <a:r>
+              <a:rPr lang="en-US" dirty="0"/>
+              <a:t> con dove </a:t>
+            </a:r>
+            <a:r>
+              <a:rPr lang="en-US" dirty="0" err="1"/>
+              <a:t>inizia</a:t>
+            </a:r>
+            <a:r>
+              <a:rPr lang="en-US" dirty="0"/>
+              <a:t> la </a:t>
+            </a:r>
+            <a:r>
+              <a:rPr lang="en-US" dirty="0" err="1"/>
+              <a:t>infrazione</a:t>
+            </a:r>
+            <a:endParaRPr lang="en-US" dirty="0"/>
+          </a:p>
+          <a:p>
             <a:endParaRPr lang="en-US" dirty="0"/>
           </a:p>
         </p:txBody>
@@ -1158,20 +1248,16 @@
           <a:lstStyle/>
           <a:p>
             <a:r>
-              <a:rPr lang="en-US" dirty="0"/>
-              <a:t>zoom </a:t>
-            </a:r>
-            <a:r>
-              <a:rPr lang="en-US" dirty="0" err="1"/>
-              <a:t>sul</a:t>
-            </a:r>
-            <a:r>
-              <a:rPr lang="en-US" dirty="0"/>
-              <a:t> primo e </a:t>
-            </a:r>
-            <a:r>
-              <a:rPr lang="en-US" dirty="0" err="1"/>
-              <a:t>mostraer</a:t>
+              <a:rPr lang="en-US" dirty="0" err="1"/>
+              <a:t>Mostra</a:t>
+            </a:r>
+            <a:r>
+              <a:rPr lang="en-US" dirty="0"/>
+              <a:t> la </a:t>
+            </a:r>
+            <a:r>
+              <a:rPr lang="en-US" dirty="0" err="1"/>
+              <a:t>correlazione</a:t>
             </a:r>
             <a:r>
               <a:rPr lang="en-US" dirty="0"/>
@@ -1179,7 +1265,55 @@
             </a:r>
             <a:r>
               <a:rPr lang="en-US" dirty="0" err="1"/>
-              <a:t>una</a:t>
+              <a:t>tra</a:t>
+            </a:r>
+            <a:r>
+              <a:rPr lang="en-US" dirty="0"/>
+              <a:t> volume di </a:t>
+            </a:r>
+            <a:r>
+              <a:rPr lang="en-US" dirty="0" err="1"/>
+              <a:t>traffico</a:t>
+            </a:r>
+            <a:r>
+              <a:rPr lang="en-US" dirty="0"/>
+              <a:t> (grandezza </a:t>
+            </a:r>
+            <a:r>
+              <a:rPr lang="en-US" dirty="0" err="1"/>
+              <a:t>pallino</a:t>
+            </a:r>
+            <a:r>
+              <a:rPr lang="en-US" dirty="0"/>
+              <a:t>), e </a:t>
+            </a:r>
+            <a:r>
+              <a:rPr lang="en-US" dirty="0" err="1"/>
+              <a:t>numero</a:t>
+            </a:r>
+            <a:r>
+              <a:rPr lang="en-US" dirty="0"/>
+              <a:t> di </a:t>
+            </a:r>
+            <a:r>
+              <a:rPr lang="en-US" dirty="0" err="1"/>
+              <a:t>infrazioni</a:t>
+            </a:r>
+            <a:r>
+              <a:rPr lang="en-US" dirty="0"/>
+              <a:t> (</a:t>
+            </a:r>
+            <a:r>
+              <a:rPr lang="en-US" dirty="0" err="1"/>
+              <a:t>colore</a:t>
+            </a:r>
+            <a:r>
+              <a:rPr lang="en-US" dirty="0"/>
+              <a:t>); Ci </a:t>
+            </a:r>
+            <a:r>
+              <a:rPr lang="en-US" dirty="0" err="1"/>
+              <a:t>siamo</a:t>
             </a:r>
             <a:r>
               <a:rPr lang="en-US" dirty="0"/>
@@ -1187,38 +1321,23 @@
             </a:r>
             <a:r>
               <a:rPr lang="en-US" dirty="0" err="1"/>
-              <a:t>distribuziobe</a:t>
-            </a:r>
-            <a:r>
-              <a:rPr lang="en-US" dirty="0"/>
-              <a:t> delle </a:t>
-            </a:r>
-            <a:r>
-              <a:rPr lang="en-US" dirty="0" err="1"/>
-              <a:t>velocit`MISURATE</a:t>
-            </a:r>
-            <a:endParaRPr lang="en-US" dirty="0"/>
-          </a:p>
-          <a:p>
-            <a:r>
-              <a:rPr lang="en-US" dirty="0" err="1"/>
-              <a:t>mostra</a:t>
-            </a:r>
-            <a:r>
-              <a:rPr lang="en-US" dirty="0"/>
-              <a:t> campana </a:t>
-            </a:r>
-            <a:r>
-              <a:rPr lang="en-US" dirty="0" err="1"/>
-              <a:t>velocita</a:t>
-            </a:r>
-            <a:r>
-              <a:rPr lang="en-US" dirty="0"/>
-              <a:t> con </a:t>
-            </a:r>
-            <a:r>
-              <a:rPr lang="en-US" dirty="0" err="1"/>
-              <a:t>rigfa</a:t>
+              <a:t>chiesti</a:t>
+            </a:r>
+            <a:r>
+              <a:rPr lang="en-US" dirty="0"/>
+              <a:t> se le </a:t>
+            </a:r>
+            <a:r>
+              <a:rPr lang="en-US" dirty="0" err="1"/>
+              <a:t>strade</a:t>
+            </a:r>
+            <a:r>
+              <a:rPr lang="en-US" dirty="0"/>
+              <a:t> piu </a:t>
+            </a:r>
+            <a:r>
+              <a:rPr lang="en-US" dirty="0" err="1"/>
+              <a:t>trafficate</a:t>
             </a:r>
             <a:r>
               <a:rPr lang="en-US" dirty="0"/>
@@ -1226,25 +1345,44 @@
             </a:r>
             <a:r>
               <a:rPr lang="en-US" dirty="0" err="1"/>
-              <a:t>verticale</a:t>
-            </a:r>
-            <a:r>
-              <a:rPr lang="en-US" dirty="0"/>
-              <a:t> con dove </a:t>
-            </a:r>
-            <a:r>
-              <a:rPr lang="en-US" dirty="0" err="1"/>
-              <a:t>inizia</a:t>
-            </a:r>
-            <a:r>
-              <a:rPr lang="en-US" dirty="0"/>
-              <a:t> la </a:t>
-            </a:r>
-            <a:r>
-              <a:rPr lang="en-US" dirty="0" err="1"/>
-              <a:t>infrazione</a:t>
-            </a:r>
-            <a:endParaRPr lang="en-US" dirty="0"/>
+              <a:t>fossero</a:t>
+            </a:r>
+            <a:r>
+              <a:rPr lang="en-US" dirty="0"/>
+              <a:t> </a:t>
+            </a:r>
+            <a:r>
+              <a:rPr lang="en-US" dirty="0" err="1"/>
+              <a:t>anche</a:t>
+            </a:r>
+            <a:r>
+              <a:rPr lang="en-US" dirty="0"/>
+              <a:t> quelle dove </a:t>
+            </a:r>
+            <a:r>
+              <a:rPr lang="en-US" dirty="0" err="1"/>
+              <a:t>vengono</a:t>
+            </a:r>
+            <a:r>
+              <a:rPr lang="en-US" dirty="0"/>
+              <a:t> </a:t>
+            </a:r>
+            <a:r>
+              <a:rPr lang="en-US" dirty="0" err="1"/>
+              <a:t>effettuate</a:t>
+            </a:r>
+            <a:r>
+              <a:rPr lang="en-US" dirty="0"/>
+              <a:t> piu </a:t>
+            </a:r>
+            <a:r>
+              <a:rPr lang="en-US" dirty="0" err="1"/>
+              <a:t>infrazioni</a:t>
+            </a:r>
+            <a:r>
+              <a:rPr lang="en-US" dirty="0"/>
+              <a:t>.</a:t>
+            </a:r>
           </a:p>
         </p:txBody>
       </p:sp>
@@ -1353,20 +1491,16 @@
           <a:lstStyle/>
           <a:p>
             <a:r>
-              <a:rPr lang="en-US" dirty="0"/>
-              <a:t>zoom </a:t>
-            </a:r>
-            <a:r>
-              <a:rPr lang="en-US" dirty="0" err="1"/>
-              <a:t>sul</a:t>
-            </a:r>
-            <a:r>
-              <a:rPr lang="en-US" dirty="0"/>
-              <a:t> primo e </a:t>
-            </a:r>
-            <a:r>
-              <a:rPr lang="en-US" dirty="0" err="1"/>
-              <a:t>mostraer</a:t>
+              <a:rPr lang="en-US" dirty="0" err="1"/>
+              <a:t>Mostra</a:t>
+            </a:r>
+            <a:r>
+              <a:rPr lang="en-US" dirty="0"/>
+              <a:t> le </a:t>
+            </a:r>
+            <a:r>
+              <a:rPr lang="en-US" dirty="0" err="1"/>
+              <a:t>infrazioni</a:t>
             </a:r>
             <a:r>
               <a:rPr lang="en-US" dirty="0"/>
@@ -1374,7 +1508,7 @@
             </a:r>
             <a:r>
               <a:rPr lang="en-US" dirty="0" err="1"/>
-              <a:t>una</a:t>
+              <a:t>peggiori</a:t>
             </a:r>
             <a:r>
               <a:rPr lang="en-US" dirty="0"/>
@@ -1382,63 +1516,128 @@
             </a:r>
             <a:r>
               <a:rPr lang="en-US" dirty="0" err="1"/>
-              <a:t>distribuziobe</a:t>
-            </a:r>
-            <a:r>
-              <a:rPr lang="en-US" dirty="0"/>
-              <a:t> delle </a:t>
-            </a:r>
-            <a:r>
-              <a:rPr lang="en-US" dirty="0" err="1"/>
-              <a:t>velocit`MISURATE</a:t>
+              <a:t>registrate</a:t>
+            </a:r>
+            <a:r>
+              <a:rPr lang="en-US" dirty="0"/>
+              <a:t> da ogni radar </a:t>
+            </a:r>
+            <a:r>
+              <a:rPr lang="en-US" dirty="0" err="1"/>
+              <a:t>nelle</a:t>
+            </a:r>
+            <a:r>
+              <a:rPr lang="en-US" dirty="0"/>
+              <a:t> ore </a:t>
+            </a:r>
+            <a:r>
+              <a:rPr lang="en-US" dirty="0" err="1"/>
+              <a:t>notturne</a:t>
+            </a:r>
+            <a:r>
+              <a:rPr lang="en-US" dirty="0"/>
+              <a:t> </a:t>
+            </a:r>
+            <a:r>
+              <a:rPr lang="en-US" dirty="0" err="1"/>
+              <a:t>tra</a:t>
+            </a:r>
+            <a:r>
+              <a:rPr lang="en-US" dirty="0"/>
+              <a:t> le 22 e le 5, </a:t>
+            </a:r>
+            <a:r>
+              <a:rPr lang="en-US" dirty="0" err="1"/>
+              <a:t>possiamo</a:t>
+            </a:r>
+            <a:r>
+              <a:rPr lang="en-US" dirty="0"/>
+              <a:t> </a:t>
+            </a:r>
+            <a:r>
+              <a:rPr lang="en-US" dirty="0" err="1"/>
+              <a:t>notare</a:t>
+            </a:r>
+            <a:r>
+              <a:rPr lang="en-US" dirty="0"/>
+              <a:t> </a:t>
+            </a:r>
+            <a:r>
+              <a:rPr lang="en-US" dirty="0" err="1"/>
+              <a:t>che</a:t>
+            </a:r>
+            <a:r>
+              <a:rPr lang="en-US" dirty="0"/>
+              <a:t> ci </a:t>
+            </a:r>
+            <a:r>
+              <a:rPr lang="en-US" dirty="0" err="1"/>
+              <a:t>sono</a:t>
+            </a:r>
+            <a:r>
+              <a:rPr lang="en-US" dirty="0"/>
+              <a:t> </a:t>
+            </a:r>
+            <a:r>
+              <a:rPr lang="en-US" dirty="0" err="1"/>
+              <a:t>superamenti</a:t>
+            </a:r>
+            <a:r>
+              <a:rPr lang="en-US" dirty="0"/>
+              <a:t> </a:t>
+            </a:r>
+            <a:r>
+              <a:rPr lang="en-US" dirty="0" err="1"/>
+              <a:t>fino</a:t>
+            </a:r>
+            <a:r>
+              <a:rPr lang="en-US" dirty="0"/>
+              <a:t> a 90kmh </a:t>
+            </a:r>
+            <a:r>
+              <a:rPr lang="en-US" dirty="0" err="1"/>
+              <a:t>superiori</a:t>
+            </a:r>
+            <a:r>
+              <a:rPr lang="en-US" dirty="0"/>
+              <a:t> al </a:t>
+            </a:r>
+            <a:r>
+              <a:rPr lang="en-US" dirty="0" err="1"/>
+              <a:t>limite</a:t>
             </a:r>
             <a:endParaRPr lang="en-US" dirty="0"/>
           </a:p>
           <a:p>
             <a:r>
-              <a:rPr lang="en-US" dirty="0" err="1"/>
-              <a:t>mostra</a:t>
-            </a:r>
-            <a:r>
-              <a:rPr lang="en-US" dirty="0"/>
-              <a:t> campana </a:t>
-            </a:r>
-            <a:r>
-              <a:rPr lang="en-US" dirty="0" err="1"/>
-              <a:t>velocita</a:t>
-            </a:r>
-            <a:r>
-              <a:rPr lang="en-US" dirty="0"/>
-              <a:t> con </a:t>
-            </a:r>
-            <a:r>
-              <a:rPr lang="en-US" dirty="0" err="1"/>
-              <a:t>rigfa</a:t>
-            </a:r>
-            <a:r>
-              <a:rPr lang="en-US" dirty="0"/>
-              <a:t> </a:t>
-            </a:r>
-            <a:r>
-              <a:rPr lang="en-US" dirty="0" err="1"/>
-              <a:t>verticale</a:t>
-            </a:r>
-            <a:r>
-              <a:rPr lang="en-US" dirty="0"/>
-              <a:t> con dove </a:t>
-            </a:r>
-            <a:r>
-              <a:rPr lang="en-US" dirty="0" err="1"/>
-              <a:t>inizia</a:t>
-            </a:r>
-            <a:r>
-              <a:rPr lang="en-US" dirty="0"/>
-              <a:t> la </a:t>
-            </a:r>
-            <a:r>
-              <a:rPr lang="en-US" dirty="0" err="1"/>
-              <a:t>infrazione</a:t>
-            </a:r>
+              <a:rPr lang="en-US" dirty="0"/>
+              <a:t>Size: zona </a:t>
+            </a:r>
+            <a:r>
+              <a:rPr lang="en-US" dirty="0" err="1"/>
+              <a:t>limite</a:t>
+            </a:r>
+            <a:r>
+              <a:rPr lang="en-US" dirty="0"/>
+              <a:t> (50, 60, 80)</a:t>
+            </a:r>
+          </a:p>
+          <a:p>
+            <a:r>
+              <a:rPr lang="en-US" dirty="0" err="1"/>
+              <a:t>Colore</a:t>
+            </a:r>
+            <a:r>
+              <a:rPr lang="en-US" dirty="0"/>
+              <a:t>: </a:t>
+            </a:r>
+            <a:r>
+              <a:rPr lang="en-US" dirty="0" err="1"/>
+              <a:t>superamento</a:t>
+            </a:r>
+            <a:endParaRPr lang="en-US" dirty="0"/>
+          </a:p>
+          <a:p>
             <a:endParaRPr lang="en-US" dirty="0"/>
           </a:p>
         </p:txBody>
@@ -4398,7 +4597,7 @@
 </file>
 
 <file path=ppt/slides/slide3.xml><?xml version="1.0" encoding="utf-8"?>
-<p:sld xmlns:a="http://schemas.openxmlformats.org/drawingml/2006/main" xmlns:r="http://schemas.openxmlformats.org/officeDocument/2006/relationships" xmlns:p="http://schemas.openxmlformats.org/presentationml/2006/main">
+<p:sld xmlns:a="http://schemas.openxmlformats.org/drawingml/2006/main" xmlns:r="http://schemas.openxmlformats.org/officeDocument/2006/relationships" xmlns:p="http://schemas.openxmlformats.org/presentationml/2006/main" show="0">
   <p:cSld name="Slide 5">
     <p:bg>
       <p:bgPr>
@@ -5149,7 +5348,7 @@
 </file>
 
 <file path=ppt/slides/slide5.xml><?xml version="1.0" encoding="utf-8"?>
-<p:sld xmlns:a="http://schemas.openxmlformats.org/drawingml/2006/main" xmlns:r="http://schemas.openxmlformats.org/officeDocument/2006/relationships" xmlns:p="http://schemas.openxmlformats.org/presentationml/2006/main">
+<p:sld xmlns:a="http://schemas.openxmlformats.org/drawingml/2006/main" xmlns:r="http://schemas.openxmlformats.org/officeDocument/2006/relationships" xmlns:p="http://schemas.openxmlformats.org/presentationml/2006/main" show="0">
   <p:cSld name="Slide 6">
     <p:bg>
       <p:bgPr>
@@ -5931,15 +6130,94 @@
               <a:buNone/>
             </a:pPr>
             <a:r>
+              <a:rPr lang="en-US" sz="2200" b="1" dirty="0" err="1">
+                <a:solidFill>
+                  <a:srgbClr val="00B4D8"/>
+                </a:solidFill>
+                <a:latin typeface="Calibri" pitchFamily="34" charset="0"/>
+                <a:cs typeface="Calibri" pitchFamily="34" charset="-120"/>
+              </a:rPr>
+              <a:t>Correlazione</a:t>
+            </a:r>
+            <a:r>
               <a:rPr lang="en-US" sz="2200" b="1" dirty="0">
                 <a:solidFill>
                   <a:srgbClr val="00B4D8"/>
                 </a:solidFill>
                 <a:latin typeface="Calibri" pitchFamily="34" charset="0"/>
-                <a:ea typeface="Calibri" pitchFamily="34" charset="-122"/>
-                <a:cs typeface="Calibri" pitchFamily="34" charset="-120"/>
-              </a:rPr>
-              <a:t>Nome</a:t>
+                <a:cs typeface="Calibri" pitchFamily="34" charset="-120"/>
+              </a:rPr>
+              <a:t> </a:t>
+            </a:r>
+            <a:r>
+              <a:rPr lang="en-US" sz="2200" b="1" dirty="0" err="1">
+                <a:solidFill>
+                  <a:srgbClr val="00B4D8"/>
+                </a:solidFill>
+                <a:latin typeface="Calibri" pitchFamily="34" charset="0"/>
+                <a:cs typeface="Calibri" pitchFamily="34" charset="-120"/>
+              </a:rPr>
+              <a:t>tra</a:t>
+            </a:r>
+            <a:r>
+              <a:rPr lang="en-US" sz="2200" b="1" dirty="0">
+                <a:solidFill>
+                  <a:srgbClr val="00B4D8"/>
+                </a:solidFill>
+                <a:latin typeface="Calibri" pitchFamily="34" charset="0"/>
+                <a:cs typeface="Calibri" pitchFamily="34" charset="-120"/>
+              </a:rPr>
+              <a:t> volume di </a:t>
+            </a:r>
+            <a:r>
+              <a:rPr lang="en-US" sz="2200" b="1" dirty="0" err="1">
+                <a:solidFill>
+                  <a:srgbClr val="00B4D8"/>
+                </a:solidFill>
+                <a:latin typeface="Calibri" pitchFamily="34" charset="0"/>
+                <a:cs typeface="Calibri" pitchFamily="34" charset="-120"/>
+              </a:rPr>
+              <a:t>traffico</a:t>
+            </a:r>
+            <a:r>
+              <a:rPr lang="en-US" sz="2200" b="1" dirty="0">
+                <a:solidFill>
+                  <a:srgbClr val="00B4D8"/>
+                </a:solidFill>
+                <a:latin typeface="Calibri" pitchFamily="34" charset="0"/>
+                <a:cs typeface="Calibri" pitchFamily="34" charset="-120"/>
+              </a:rPr>
+              <a:t> e </a:t>
+            </a:r>
+            <a:r>
+              <a:rPr lang="en-US" sz="2200" b="1" dirty="0" err="1">
+                <a:solidFill>
+                  <a:srgbClr val="00B4D8"/>
+                </a:solidFill>
+                <a:latin typeface="Calibri" pitchFamily="34" charset="0"/>
+                <a:cs typeface="Calibri" pitchFamily="34" charset="-120"/>
+              </a:rPr>
+              <a:t>numero</a:t>
+            </a:r>
+            <a:r>
+              <a:rPr lang="en-US" sz="2200" b="1" dirty="0">
+                <a:solidFill>
+                  <a:srgbClr val="00B4D8"/>
+                </a:solidFill>
+                <a:latin typeface="Calibri" pitchFamily="34" charset="0"/>
+                <a:cs typeface="Calibri" pitchFamily="34" charset="-120"/>
+              </a:rPr>
+              <a:t> di </a:t>
+            </a:r>
+            <a:r>
+              <a:rPr lang="en-US" sz="2200" b="1" dirty="0" err="1">
+                <a:solidFill>
+                  <a:srgbClr val="00B4D8"/>
+                </a:solidFill>
+                <a:latin typeface="Calibri" pitchFamily="34" charset="0"/>
+                <a:cs typeface="Calibri" pitchFamily="34" charset="-120"/>
+              </a:rPr>
+              <a:t>infrazioni</a:t>
             </a:r>
             <a:endParaRPr lang="en-US" sz="2200" dirty="0"/>
           </a:p>
@@ -5976,6 +6254,16 @@
               <a:buNone/>
             </a:pPr>
             <a:r>
+              <a:rPr lang="en-US" sz="1300" i="1" dirty="0" err="1">
+                <a:solidFill>
+                  <a:srgbClr val="B0BEC5"/>
+                </a:solidFill>
+                <a:latin typeface="Calibri" pitchFamily="34" charset="0"/>
+                <a:cs typeface="Calibri" pitchFamily="34" charset="-120"/>
+              </a:rPr>
+              <a:t>Correlazione</a:t>
+            </a:r>
+            <a:r>
               <a:rPr lang="en-US" sz="1300" i="1" dirty="0">
                 <a:solidFill>
                   <a:srgbClr val="B0BEC5"/>
@@ -5983,7 +6271,87 @@
                 <a:latin typeface="Calibri" pitchFamily="34" charset="0"/>
                 <a:cs typeface="Calibri" pitchFamily="34" charset="-120"/>
               </a:rPr>
-              <a:t>Testo</a:t>
+              <a:t> </a:t>
+            </a:r>
+            <a:r>
+              <a:rPr lang="en-US" sz="1300" i="1" dirty="0" err="1">
+                <a:solidFill>
+                  <a:srgbClr val="B0BEC5"/>
+                </a:solidFill>
+                <a:latin typeface="Calibri" pitchFamily="34" charset="0"/>
+                <a:cs typeface="Calibri" pitchFamily="34" charset="-120"/>
+              </a:rPr>
+              <a:t>tra</a:t>
+            </a:r>
+            <a:r>
+              <a:rPr lang="en-US" sz="1300" i="1" dirty="0">
+                <a:solidFill>
+                  <a:srgbClr val="B0BEC5"/>
+                </a:solidFill>
+                <a:latin typeface="Calibri" pitchFamily="34" charset="0"/>
+                <a:cs typeface="Calibri" pitchFamily="34" charset="-120"/>
+              </a:rPr>
+              <a:t> volume di </a:t>
+            </a:r>
+            <a:r>
+              <a:rPr lang="en-US" sz="1300" i="1" dirty="0" err="1">
+                <a:solidFill>
+                  <a:srgbClr val="B0BEC5"/>
+                </a:solidFill>
+                <a:latin typeface="Calibri" pitchFamily="34" charset="0"/>
+                <a:cs typeface="Calibri" pitchFamily="34" charset="-120"/>
+              </a:rPr>
+              <a:t>traffico</a:t>
+            </a:r>
+            <a:r>
+              <a:rPr lang="en-US" sz="1300" i="1" dirty="0">
+                <a:solidFill>
+                  <a:srgbClr val="B0BEC5"/>
+                </a:solidFill>
+                <a:latin typeface="Calibri" pitchFamily="34" charset="0"/>
+                <a:cs typeface="Calibri" pitchFamily="34" charset="-120"/>
+              </a:rPr>
+              <a:t> e </a:t>
+            </a:r>
+            <a:r>
+              <a:rPr lang="en-US" sz="1300" i="1" dirty="0" err="1">
+                <a:solidFill>
+                  <a:srgbClr val="B0BEC5"/>
+                </a:solidFill>
+                <a:latin typeface="Calibri" pitchFamily="34" charset="0"/>
+                <a:cs typeface="Calibri" pitchFamily="34" charset="-120"/>
+              </a:rPr>
+              <a:t>numero</a:t>
+            </a:r>
+            <a:r>
+              <a:rPr lang="en-US" sz="1300" i="1" dirty="0">
+                <a:solidFill>
+                  <a:srgbClr val="B0BEC5"/>
+                </a:solidFill>
+                <a:latin typeface="Calibri" pitchFamily="34" charset="0"/>
+                <a:cs typeface="Calibri" pitchFamily="34" charset="-120"/>
+              </a:rPr>
+              <a:t> di </a:t>
+            </a:r>
+            <a:r>
+              <a:rPr lang="en-US" sz="1300" i="1" dirty="0" err="1">
+                <a:solidFill>
+                  <a:srgbClr val="B0BEC5"/>
+                </a:solidFill>
+                <a:latin typeface="Calibri" pitchFamily="34" charset="0"/>
+                <a:cs typeface="Calibri" pitchFamily="34" charset="-120"/>
+              </a:rPr>
+              <a:t>infrazioni</a:t>
+            </a:r>
+            <a:r>
+              <a:rPr lang="en-US" sz="1300" i="1" dirty="0">
+                <a:solidFill>
+                  <a:srgbClr val="B0BEC5"/>
+                </a:solidFill>
+                <a:latin typeface="Calibri" pitchFamily="34" charset="0"/>
+                <a:cs typeface="Calibri" pitchFamily="34" charset="-120"/>
+              </a:rPr>
+              <a:t> per radar. </a:t>
             </a:r>
             <a:endParaRPr lang="en-US" sz="1300" dirty="0"/>
           </a:p>
@@ -6023,7 +6391,7 @@
           <a:bodyPr/>
           <a:lstStyle/>
           <a:p>
-            <a:endParaRPr lang="it-CH"/>
+            <a:endParaRPr lang="it-CH" dirty="0"/>
           </a:p>
         </p:txBody>
       </p:sp>
@@ -6072,6 +6440,36 @@
           </a:p>
         </p:txBody>
       </p:sp>
+      <p:pic>
+        <p:nvPicPr>
+          <p:cNvPr id="12" name="Picture 11">
+            <a:extLst>
+              <a:ext uri="{FF2B5EF4-FFF2-40B4-BE49-F238E27FC236}">
+                <a16:creationId xmlns:a16="http://schemas.microsoft.com/office/drawing/2014/main" id="{75A0428F-07FB-377E-BE60-D38973DC1DF0}"/>
+              </a:ext>
+            </a:extLst>
+          </p:cNvPr>
+          <p:cNvPicPr>
+            <a:picLocks noChangeAspect="1"/>
+          </p:cNvPicPr>
+          <p:nvPr/>
+        </p:nvPicPr>
+        <p:blipFill>
+          <a:blip r:embed="rId3"/>
+          <a:stretch>
+            <a:fillRect/>
+          </a:stretch>
+        </p:blipFill>
+        <p:spPr>
+          <a:xfrm>
+            <a:off x="377918" y="1447800"/>
+            <a:ext cx="8479604" cy="3185160"/>
+          </a:xfrm>
+          <a:prstGeom prst="rect">
+            <a:avLst/>
+          </a:prstGeom>
+        </p:spPr>
+      </p:pic>
     </p:spTree>
     <p:extLst>
       <p:ext uri="{BB962C8B-B14F-4D97-AF65-F5344CB8AC3E}">
@@ -6185,15 +6583,114 @@
               <a:buNone/>
             </a:pPr>
             <a:r>
+              <a:rPr lang="en-US" sz="2200" b="1" dirty="0" err="1">
+                <a:solidFill>
+                  <a:srgbClr val="00B4D8"/>
+                </a:solidFill>
+                <a:latin typeface="Calibri" pitchFamily="34" charset="0"/>
+                <a:cs typeface="Calibri" pitchFamily="34" charset="-120"/>
+              </a:rPr>
+              <a:t>Pirati</a:t>
+            </a:r>
+            <a:r>
               <a:rPr lang="en-US" sz="2200" b="1" dirty="0">
                 <a:solidFill>
                   <a:srgbClr val="00B4D8"/>
                 </a:solidFill>
                 <a:latin typeface="Calibri" pitchFamily="34" charset="0"/>
-                <a:ea typeface="Calibri" pitchFamily="34" charset="-122"/>
-                <a:cs typeface="Calibri" pitchFamily="34" charset="-120"/>
-              </a:rPr>
-              <a:t>Nome</a:t>
+                <a:cs typeface="Calibri" pitchFamily="34" charset="-120"/>
+              </a:rPr>
+              <a:t> della notte, </a:t>
+            </a:r>
+            <a:r>
+              <a:rPr lang="en-US" sz="2200" b="1" dirty="0" err="1">
+                <a:solidFill>
+                  <a:srgbClr val="00B4D8"/>
+                </a:solidFill>
+                <a:latin typeface="Calibri" pitchFamily="34" charset="0"/>
+                <a:cs typeface="Calibri" pitchFamily="34" charset="-120"/>
+              </a:rPr>
+              <a:t>infrazioni</a:t>
+            </a:r>
+            <a:r>
+              <a:rPr lang="en-US" sz="2200" b="1" dirty="0">
+                <a:solidFill>
+                  <a:srgbClr val="00B4D8"/>
+                </a:solidFill>
+                <a:latin typeface="Calibri" pitchFamily="34" charset="0"/>
+                <a:cs typeface="Calibri" pitchFamily="34" charset="-120"/>
+              </a:rPr>
+              <a:t> </a:t>
+            </a:r>
+            <a:r>
+              <a:rPr lang="en-US" sz="2200" b="1" dirty="0" err="1">
+                <a:solidFill>
+                  <a:srgbClr val="00B4D8"/>
+                </a:solidFill>
+                <a:latin typeface="Calibri" pitchFamily="34" charset="0"/>
+                <a:cs typeface="Calibri" pitchFamily="34" charset="-120"/>
+              </a:rPr>
+              <a:t>su</a:t>
+            </a:r>
+            <a:r>
+              <a:rPr lang="en-US" sz="2200" b="1" dirty="0">
+                <a:solidFill>
+                  <a:srgbClr val="00B4D8"/>
+                </a:solidFill>
+                <a:latin typeface="Calibri" pitchFamily="34" charset="0"/>
+                <a:cs typeface="Calibri" pitchFamily="34" charset="-120"/>
+              </a:rPr>
+              <a:t> </a:t>
+            </a:r>
+            <a:r>
+              <a:rPr lang="en-US" sz="2200" b="1" dirty="0" err="1">
+                <a:solidFill>
+                  <a:srgbClr val="00B4D8"/>
+                </a:solidFill>
+                <a:latin typeface="Calibri" pitchFamily="34" charset="0"/>
+                <a:cs typeface="Calibri" pitchFamily="34" charset="-120"/>
+              </a:rPr>
+              <a:t>strade</a:t>
+            </a:r>
+            <a:r>
+              <a:rPr lang="en-US" sz="2200" b="1" dirty="0">
+                <a:solidFill>
+                  <a:srgbClr val="00B4D8"/>
+                </a:solidFill>
+                <a:latin typeface="Calibri" pitchFamily="34" charset="0"/>
+                <a:cs typeface="Calibri" pitchFamily="34" charset="-120"/>
+              </a:rPr>
+              <a:t> ad </a:t>
+            </a:r>
+            <a:r>
+              <a:rPr lang="en-US" sz="2200" b="1" dirty="0" err="1">
+                <a:solidFill>
+                  <a:srgbClr val="00B4D8"/>
+                </a:solidFill>
+                <a:latin typeface="Calibri" pitchFamily="34" charset="0"/>
+                <a:cs typeface="Calibri" pitchFamily="34" charset="-120"/>
+              </a:rPr>
+              <a:t>alta</a:t>
+            </a:r>
+            <a:r>
+              <a:rPr lang="en-US" sz="2200" b="1" dirty="0">
+                <a:solidFill>
+                  <a:srgbClr val="00B4D8"/>
+                </a:solidFill>
+                <a:latin typeface="Calibri" pitchFamily="34" charset="0"/>
+                <a:cs typeface="Calibri" pitchFamily="34" charset="-120"/>
+              </a:rPr>
+              <a:t> </a:t>
+            </a:r>
+            <a:r>
+              <a:rPr lang="en-US" sz="2200" b="1" dirty="0" err="1">
+                <a:solidFill>
+                  <a:srgbClr val="00B4D8"/>
+                </a:solidFill>
+                <a:latin typeface="Calibri" pitchFamily="34" charset="0"/>
+                <a:cs typeface="Calibri" pitchFamily="34" charset="-120"/>
+              </a:rPr>
+              <a:t>velocità</a:t>
             </a:r>
             <a:endParaRPr lang="en-US" sz="2200" dirty="0"/>
           </a:p>
@@ -6230,6 +6727,16 @@
               <a:buNone/>
             </a:pPr>
             <a:r>
+              <a:rPr lang="en-US" sz="1300" i="1" dirty="0" err="1">
+                <a:solidFill>
+                  <a:srgbClr val="B0BEC5"/>
+                </a:solidFill>
+                <a:latin typeface="Calibri" pitchFamily="34" charset="0"/>
+                <a:cs typeface="Calibri" pitchFamily="34" charset="-120"/>
+              </a:rPr>
+              <a:t>Infrazioni</a:t>
+            </a:r>
+            <a:r>
               <a:rPr lang="en-US" sz="1300" i="1" dirty="0">
                 <a:solidFill>
                   <a:srgbClr val="B0BEC5"/>
@@ -6237,7 +6744,147 @@
                 <a:latin typeface="Calibri" pitchFamily="34" charset="0"/>
                 <a:cs typeface="Calibri" pitchFamily="34" charset="-120"/>
               </a:rPr>
-              <a:t>testo</a:t>
+              <a:t> </a:t>
+            </a:r>
+            <a:r>
+              <a:rPr lang="en-US" sz="1300" i="1" dirty="0" err="1">
+                <a:solidFill>
+                  <a:srgbClr val="B0BEC5"/>
+                </a:solidFill>
+                <a:latin typeface="Calibri" pitchFamily="34" charset="0"/>
+                <a:cs typeface="Calibri" pitchFamily="34" charset="-120"/>
+              </a:rPr>
+              <a:t>su</a:t>
+            </a:r>
+            <a:r>
+              <a:rPr lang="en-US" sz="1300" i="1" dirty="0">
+                <a:solidFill>
+                  <a:srgbClr val="B0BEC5"/>
+                </a:solidFill>
+                <a:latin typeface="Calibri" pitchFamily="34" charset="0"/>
+                <a:cs typeface="Calibri" pitchFamily="34" charset="-120"/>
+              </a:rPr>
+              <a:t> </a:t>
+            </a:r>
+            <a:r>
+              <a:rPr lang="en-US" sz="1300" i="1" dirty="0" err="1">
+                <a:solidFill>
+                  <a:srgbClr val="B0BEC5"/>
+                </a:solidFill>
+                <a:latin typeface="Calibri" pitchFamily="34" charset="0"/>
+                <a:cs typeface="Calibri" pitchFamily="34" charset="-120"/>
+              </a:rPr>
+              <a:t>strade</a:t>
+            </a:r>
+            <a:r>
+              <a:rPr lang="en-US" sz="1300" i="1" dirty="0">
+                <a:solidFill>
+                  <a:srgbClr val="B0BEC5"/>
+                </a:solidFill>
+                <a:latin typeface="Calibri" pitchFamily="34" charset="0"/>
+                <a:cs typeface="Calibri" pitchFamily="34" charset="-120"/>
+              </a:rPr>
+              <a:t> ad </a:t>
+            </a:r>
+            <a:r>
+              <a:rPr lang="en-US" sz="1300" i="1" dirty="0" err="1">
+                <a:solidFill>
+                  <a:srgbClr val="B0BEC5"/>
+                </a:solidFill>
+                <a:latin typeface="Calibri" pitchFamily="34" charset="0"/>
+                <a:cs typeface="Calibri" pitchFamily="34" charset="-120"/>
+              </a:rPr>
+              <a:t>alta</a:t>
+            </a:r>
+            <a:r>
+              <a:rPr lang="en-US" sz="1300" i="1" dirty="0">
+                <a:solidFill>
+                  <a:srgbClr val="B0BEC5"/>
+                </a:solidFill>
+                <a:latin typeface="Calibri" pitchFamily="34" charset="0"/>
+                <a:cs typeface="Calibri" pitchFamily="34" charset="-120"/>
+              </a:rPr>
+              <a:t> </a:t>
+            </a:r>
+            <a:r>
+              <a:rPr lang="en-US" sz="1300" i="1" dirty="0" err="1">
+                <a:solidFill>
+                  <a:srgbClr val="B0BEC5"/>
+                </a:solidFill>
+                <a:latin typeface="Calibri" pitchFamily="34" charset="0"/>
+                <a:cs typeface="Calibri" pitchFamily="34" charset="-120"/>
+              </a:rPr>
+              <a:t>velocità</a:t>
+            </a:r>
+            <a:r>
+              <a:rPr lang="en-US" sz="1300" i="1" dirty="0">
+                <a:solidFill>
+                  <a:srgbClr val="B0BEC5"/>
+                </a:solidFill>
+                <a:latin typeface="Calibri" pitchFamily="34" charset="0"/>
+                <a:cs typeface="Calibri" pitchFamily="34" charset="-120"/>
+              </a:rPr>
+              <a:t> (50, 60, 80)</a:t>
+            </a:r>
+            <a:r>
+              <a:rPr lang="en-US" sz="1300" i="1" dirty="0" err="1">
+                <a:solidFill>
+                  <a:srgbClr val="B0BEC5"/>
+                </a:solidFill>
+                <a:latin typeface="Calibri" pitchFamily="34" charset="0"/>
+                <a:cs typeface="Calibri" pitchFamily="34" charset="-120"/>
+              </a:rPr>
+              <a:t>kmh</a:t>
+            </a:r>
+            <a:r>
+              <a:rPr lang="en-US" sz="1300" i="1" dirty="0">
+                <a:solidFill>
+                  <a:srgbClr val="B0BEC5"/>
+                </a:solidFill>
+                <a:latin typeface="Calibri" pitchFamily="34" charset="0"/>
+                <a:cs typeface="Calibri" pitchFamily="34" charset="-120"/>
+              </a:rPr>
+              <a:t>, </a:t>
+            </a:r>
+            <a:r>
+              <a:rPr lang="en-US" sz="1300" i="1" dirty="0" err="1">
+                <a:solidFill>
+                  <a:srgbClr val="B0BEC5"/>
+                </a:solidFill>
+                <a:latin typeface="Calibri" pitchFamily="34" charset="0"/>
+                <a:cs typeface="Calibri" pitchFamily="34" charset="-120"/>
+              </a:rPr>
+              <a:t>nelle</a:t>
+            </a:r>
+            <a:r>
+              <a:rPr lang="en-US" sz="1300" i="1" dirty="0">
+                <a:solidFill>
+                  <a:srgbClr val="B0BEC5"/>
+                </a:solidFill>
+                <a:latin typeface="Calibri" pitchFamily="34" charset="0"/>
+                <a:cs typeface="Calibri" pitchFamily="34" charset="-120"/>
+              </a:rPr>
+              <a:t> ore </a:t>
+            </a:r>
+            <a:r>
+              <a:rPr lang="en-US" sz="1300" i="1" dirty="0" err="1">
+                <a:solidFill>
+                  <a:srgbClr val="B0BEC5"/>
+                </a:solidFill>
+                <a:latin typeface="Calibri" pitchFamily="34" charset="0"/>
+                <a:cs typeface="Calibri" pitchFamily="34" charset="-120"/>
+              </a:rPr>
+              <a:t>notturne</a:t>
+            </a:r>
+            <a:r>
+              <a:rPr lang="en-US" sz="1300" i="1" dirty="0">
+                <a:solidFill>
+                  <a:srgbClr val="B0BEC5"/>
+                </a:solidFill>
+                <a:latin typeface="Calibri" pitchFamily="34" charset="0"/>
+                <a:cs typeface="Calibri" pitchFamily="34" charset="-120"/>
+              </a:rPr>
+              <a:t> (22:00-5:00)</a:t>
             </a:r>
             <a:endParaRPr lang="en-US" sz="1300" dirty="0"/>
           </a:p>
@@ -6326,6 +6973,36 @@
           </a:p>
         </p:txBody>
       </p:sp>
+      <p:pic>
+        <p:nvPicPr>
+          <p:cNvPr id="8" name="Picture 7">
+            <a:extLst>
+              <a:ext uri="{FF2B5EF4-FFF2-40B4-BE49-F238E27FC236}">
+                <a16:creationId xmlns:a16="http://schemas.microsoft.com/office/drawing/2014/main" id="{F1EF832D-21E9-06C7-505D-F6A93D1E4677}"/>
+              </a:ext>
+            </a:extLst>
+          </p:cNvPr>
+          <p:cNvPicPr>
+            <a:picLocks noChangeAspect="1"/>
+          </p:cNvPicPr>
+          <p:nvPr/>
+        </p:nvPicPr>
+        <p:blipFill>
+          <a:blip r:embed="rId3"/>
+          <a:stretch>
+            <a:fillRect/>
+          </a:stretch>
+        </p:blipFill>
+        <p:spPr>
+          <a:xfrm>
+            <a:off x="365760" y="1443037"/>
+            <a:ext cx="8504962" cy="3194685"/>
+          </a:xfrm>
+          <a:prstGeom prst="rect">
+            <a:avLst/>
+          </a:prstGeom>
+        </p:spPr>
+      </p:pic>
     </p:spTree>
     <p:extLst>
       <p:ext uri="{BB962C8B-B14F-4D97-AF65-F5344CB8AC3E}">

--- a/speed_monitoring.pptx
+++ b/speed_monitoring.pptx
@@ -736,6 +736,935 @@
           <a:p>
             <a:endParaRPr lang="en-US" dirty="0"/>
           </a:p>
+          <a:p>
+            <a:r>
+              <a:rPr lang="en-GB" sz="1200" kern="1200" dirty="0">
+                <a:solidFill>
+                  <a:schemeClr val="tx1"/>
+                </a:solidFill>
+                <a:effectLst/>
+                <a:latin typeface="+mn-lt"/>
+                <a:ea typeface="+mn-ea"/>
+                <a:cs typeface="+mn-cs"/>
+              </a:rPr>
+              <a:t>Il </a:t>
+            </a:r>
+            <a:r>
+              <a:rPr lang="en-GB" sz="1200" kern="1200" dirty="0" err="1">
+                <a:solidFill>
+                  <a:schemeClr val="tx1"/>
+                </a:solidFill>
+                <a:effectLst/>
+                <a:latin typeface="+mn-lt"/>
+                <a:ea typeface="+mn-ea"/>
+                <a:cs typeface="+mn-cs"/>
+              </a:rPr>
+              <a:t>grafico</a:t>
+            </a:r>
+            <a:r>
+              <a:rPr lang="en-GB" sz="1200" kern="1200" dirty="0">
+                <a:solidFill>
+                  <a:schemeClr val="tx1"/>
+                </a:solidFill>
+                <a:effectLst/>
+                <a:latin typeface="+mn-lt"/>
+                <a:ea typeface="+mn-ea"/>
+                <a:cs typeface="+mn-cs"/>
+              </a:rPr>
+              <a:t> </a:t>
+            </a:r>
+            <a:r>
+              <a:rPr lang="en-GB" sz="1200" kern="1200" dirty="0" err="1">
+                <a:solidFill>
+                  <a:schemeClr val="tx1"/>
+                </a:solidFill>
+                <a:effectLst/>
+                <a:latin typeface="+mn-lt"/>
+                <a:ea typeface="+mn-ea"/>
+                <a:cs typeface="+mn-cs"/>
+              </a:rPr>
+              <a:t>dimostra</a:t>
+            </a:r>
+            <a:r>
+              <a:rPr lang="en-GB" sz="1200" kern="1200" dirty="0">
+                <a:solidFill>
+                  <a:schemeClr val="tx1"/>
+                </a:solidFill>
+                <a:effectLst/>
+                <a:latin typeface="+mn-lt"/>
+                <a:ea typeface="+mn-ea"/>
+                <a:cs typeface="+mn-cs"/>
+              </a:rPr>
+              <a:t> </a:t>
+            </a:r>
+            <a:r>
+              <a:rPr lang="en-GB" sz="1200" kern="1200" dirty="0" err="1">
+                <a:solidFill>
+                  <a:schemeClr val="tx1"/>
+                </a:solidFill>
+                <a:effectLst/>
+                <a:latin typeface="+mn-lt"/>
+                <a:ea typeface="+mn-ea"/>
+                <a:cs typeface="+mn-cs"/>
+              </a:rPr>
+              <a:t>un'inosservanza</a:t>
+            </a:r>
+            <a:r>
+              <a:rPr lang="en-GB" sz="1200" kern="1200" dirty="0">
+                <a:solidFill>
+                  <a:schemeClr val="tx1"/>
+                </a:solidFill>
+                <a:effectLst/>
+                <a:latin typeface="+mn-lt"/>
+                <a:ea typeface="+mn-ea"/>
+                <a:cs typeface="+mn-cs"/>
+              </a:rPr>
+              <a:t> </a:t>
+            </a:r>
+            <a:r>
+              <a:rPr lang="en-GB" sz="1200" kern="1200" dirty="0" err="1">
+                <a:solidFill>
+                  <a:schemeClr val="tx1"/>
+                </a:solidFill>
+                <a:effectLst/>
+                <a:latin typeface="+mn-lt"/>
+                <a:ea typeface="+mn-ea"/>
+                <a:cs typeface="+mn-cs"/>
+              </a:rPr>
+              <a:t>sistematica</a:t>
+            </a:r>
+            <a:r>
+              <a:rPr lang="en-GB" sz="1200" kern="1200" dirty="0">
+                <a:solidFill>
+                  <a:schemeClr val="tx1"/>
+                </a:solidFill>
+                <a:effectLst/>
+                <a:latin typeface="+mn-lt"/>
+                <a:ea typeface="+mn-ea"/>
+                <a:cs typeface="+mn-cs"/>
+              </a:rPr>
+              <a:t> e di </a:t>
+            </a:r>
+            <a:r>
+              <a:rPr lang="en-GB" sz="1200" kern="1200" dirty="0" err="1">
+                <a:solidFill>
+                  <a:schemeClr val="tx1"/>
+                </a:solidFill>
+                <a:effectLst/>
+                <a:latin typeface="+mn-lt"/>
+                <a:ea typeface="+mn-ea"/>
+                <a:cs typeface="+mn-cs"/>
+              </a:rPr>
+              <a:t>massa</a:t>
+            </a:r>
+            <a:r>
+              <a:rPr lang="en-GB" sz="1200" kern="1200" dirty="0">
+                <a:solidFill>
+                  <a:schemeClr val="tx1"/>
+                </a:solidFill>
+                <a:effectLst/>
+                <a:latin typeface="+mn-lt"/>
+                <a:ea typeface="+mn-ea"/>
+                <a:cs typeface="+mn-cs"/>
+              </a:rPr>
+              <a:t> del </a:t>
+            </a:r>
+            <a:r>
+              <a:rPr lang="en-GB" sz="1200" kern="1200" dirty="0" err="1">
+                <a:solidFill>
+                  <a:schemeClr val="tx1"/>
+                </a:solidFill>
+                <a:effectLst/>
+                <a:latin typeface="+mn-lt"/>
+                <a:ea typeface="+mn-ea"/>
+                <a:cs typeface="+mn-cs"/>
+              </a:rPr>
+              <a:t>limite</a:t>
+            </a:r>
+            <a:r>
+              <a:rPr lang="en-GB" sz="1200" kern="1200" dirty="0">
+                <a:solidFill>
+                  <a:schemeClr val="tx1"/>
+                </a:solidFill>
+                <a:effectLst/>
+                <a:latin typeface="+mn-lt"/>
+                <a:ea typeface="+mn-ea"/>
+                <a:cs typeface="+mn-cs"/>
+              </a:rPr>
+              <a:t> di </a:t>
+            </a:r>
+            <a:r>
+              <a:rPr lang="en-GB" sz="1200" kern="1200" dirty="0" err="1">
+                <a:solidFill>
+                  <a:schemeClr val="tx1"/>
+                </a:solidFill>
+                <a:effectLst/>
+                <a:latin typeface="+mn-lt"/>
+                <a:ea typeface="+mn-ea"/>
+                <a:cs typeface="+mn-cs"/>
+              </a:rPr>
+              <a:t>velocità</a:t>
+            </a:r>
+            <a:r>
+              <a:rPr lang="en-GB" sz="1200" kern="1200" dirty="0">
+                <a:solidFill>
+                  <a:schemeClr val="tx1"/>
+                </a:solidFill>
+                <a:effectLst/>
+                <a:latin typeface="+mn-lt"/>
+                <a:ea typeface="+mn-ea"/>
+                <a:cs typeface="+mn-cs"/>
+              </a:rPr>
+              <a:t> </a:t>
+            </a:r>
+            <a:r>
+              <a:rPr lang="en-GB" sz="1200" kern="1200" dirty="0" err="1">
+                <a:solidFill>
+                  <a:schemeClr val="tx1"/>
+                </a:solidFill>
+                <a:effectLst/>
+                <a:latin typeface="+mn-lt"/>
+                <a:ea typeface="+mn-ea"/>
+                <a:cs typeface="+mn-cs"/>
+              </a:rPr>
+              <a:t>presso</a:t>
+            </a:r>
+            <a:r>
+              <a:rPr lang="en-GB" sz="1200" kern="1200" dirty="0">
+                <a:solidFill>
+                  <a:schemeClr val="tx1"/>
+                </a:solidFill>
+                <a:effectLst/>
+                <a:latin typeface="+mn-lt"/>
+                <a:ea typeface="+mn-ea"/>
+                <a:cs typeface="+mn-cs"/>
+              </a:rPr>
+              <a:t> la </a:t>
+            </a:r>
+            <a:r>
+              <a:rPr lang="en-GB" sz="1200" kern="1200" dirty="0" err="1">
+                <a:solidFill>
+                  <a:schemeClr val="tx1"/>
+                </a:solidFill>
+                <a:effectLst/>
+                <a:latin typeface="+mn-lt"/>
+                <a:ea typeface="+mn-ea"/>
+                <a:cs typeface="+mn-cs"/>
+              </a:rPr>
+              <a:t>postazione</a:t>
+            </a:r>
+            <a:r>
+              <a:rPr lang="en-GB" sz="1200" kern="1200" dirty="0">
+                <a:solidFill>
+                  <a:schemeClr val="tx1"/>
+                </a:solidFill>
+                <a:effectLst/>
+                <a:latin typeface="+mn-lt"/>
+                <a:ea typeface="+mn-ea"/>
+                <a:cs typeface="+mn-cs"/>
+              </a:rPr>
+              <a:t> "A2 </a:t>
+            </a:r>
+            <a:r>
+              <a:rPr lang="en-GB" sz="1200" kern="1200" dirty="0" err="1">
+                <a:solidFill>
+                  <a:schemeClr val="tx1"/>
+                </a:solidFill>
+                <a:effectLst/>
+                <a:latin typeface="+mn-lt"/>
+                <a:ea typeface="+mn-ea"/>
+                <a:cs typeface="+mn-cs"/>
+              </a:rPr>
+              <a:t>Einfahrt</a:t>
+            </a:r>
+            <a:r>
+              <a:rPr lang="en-GB" sz="1200" kern="1200" dirty="0">
+                <a:solidFill>
+                  <a:schemeClr val="tx1"/>
+                </a:solidFill>
+                <a:effectLst/>
+                <a:latin typeface="+mn-lt"/>
+                <a:ea typeface="+mn-ea"/>
+                <a:cs typeface="+mn-cs"/>
+              </a:rPr>
+              <a:t> Wolf".</a:t>
+            </a:r>
+            <a:br>
+              <a:rPr lang="en-GB" sz="1200" kern="1200" dirty="0">
+                <a:solidFill>
+                  <a:schemeClr val="tx1"/>
+                </a:solidFill>
+                <a:effectLst/>
+                <a:latin typeface="+mn-lt"/>
+                <a:ea typeface="+mn-ea"/>
+                <a:cs typeface="+mn-cs"/>
+              </a:rPr>
+            </a:br>
+            <a:r>
+              <a:rPr lang="en-GB" sz="1200" kern="1200" dirty="0">
+                <a:solidFill>
+                  <a:schemeClr val="tx1"/>
+                </a:solidFill>
+                <a:effectLst/>
+                <a:latin typeface="+mn-lt"/>
+                <a:ea typeface="+mn-ea"/>
+                <a:cs typeface="+mn-cs"/>
+              </a:rPr>
+              <a:t>La "campana" della </a:t>
+            </a:r>
+            <a:r>
+              <a:rPr lang="en-GB" sz="1200" kern="1200" dirty="0" err="1">
+                <a:solidFill>
+                  <a:schemeClr val="tx1"/>
+                </a:solidFill>
+                <a:effectLst/>
+                <a:latin typeface="+mn-lt"/>
+                <a:ea typeface="+mn-ea"/>
+                <a:cs typeface="+mn-cs"/>
+              </a:rPr>
+              <a:t>distribuzione</a:t>
+            </a:r>
+            <a:r>
+              <a:rPr lang="en-GB" sz="1200" kern="1200" dirty="0">
+                <a:solidFill>
+                  <a:schemeClr val="tx1"/>
+                </a:solidFill>
+                <a:effectLst/>
+                <a:latin typeface="+mn-lt"/>
+                <a:ea typeface="+mn-ea"/>
+                <a:cs typeface="+mn-cs"/>
+              </a:rPr>
+              <a:t> </a:t>
+            </a:r>
+            <a:r>
+              <a:rPr lang="en-GB" sz="1200" kern="1200" dirty="0" err="1">
+                <a:solidFill>
+                  <a:schemeClr val="tx1"/>
+                </a:solidFill>
+                <a:effectLst/>
+                <a:latin typeface="+mn-lt"/>
+                <a:ea typeface="+mn-ea"/>
+                <a:cs typeface="+mn-cs"/>
+              </a:rPr>
+              <a:t>è</a:t>
+            </a:r>
+            <a:r>
+              <a:rPr lang="en-GB" sz="1200" kern="1200" dirty="0">
+                <a:solidFill>
+                  <a:schemeClr val="tx1"/>
+                </a:solidFill>
+                <a:effectLst/>
+                <a:latin typeface="+mn-lt"/>
+                <a:ea typeface="+mn-ea"/>
+                <a:cs typeface="+mn-cs"/>
+              </a:rPr>
+              <a:t> </a:t>
+            </a:r>
+            <a:r>
+              <a:rPr lang="en-GB" sz="1200" kern="1200" dirty="0" err="1">
+                <a:solidFill>
+                  <a:schemeClr val="tx1"/>
+                </a:solidFill>
+                <a:effectLst/>
+                <a:latin typeface="+mn-lt"/>
+                <a:ea typeface="+mn-ea"/>
+                <a:cs typeface="+mn-cs"/>
+              </a:rPr>
+              <a:t>nettamente</a:t>
+            </a:r>
+            <a:r>
+              <a:rPr lang="en-GB" sz="1200" kern="1200" dirty="0">
+                <a:solidFill>
+                  <a:schemeClr val="tx1"/>
+                </a:solidFill>
+                <a:effectLst/>
+                <a:latin typeface="+mn-lt"/>
+                <a:ea typeface="+mn-ea"/>
+                <a:cs typeface="+mn-cs"/>
+              </a:rPr>
+              <a:t> </a:t>
+            </a:r>
+            <a:r>
+              <a:rPr lang="en-GB" sz="1200" kern="1200" dirty="0" err="1">
+                <a:solidFill>
+                  <a:schemeClr val="tx1"/>
+                </a:solidFill>
+                <a:effectLst/>
+                <a:latin typeface="+mn-lt"/>
+                <a:ea typeface="+mn-ea"/>
+                <a:cs typeface="+mn-cs"/>
+              </a:rPr>
+              <a:t>spostata</a:t>
+            </a:r>
+            <a:r>
+              <a:rPr lang="en-GB" sz="1200" kern="1200" dirty="0">
+                <a:solidFill>
+                  <a:schemeClr val="tx1"/>
+                </a:solidFill>
+                <a:effectLst/>
+                <a:latin typeface="+mn-lt"/>
+                <a:ea typeface="+mn-ea"/>
+                <a:cs typeface="+mn-cs"/>
+              </a:rPr>
+              <a:t> a </a:t>
+            </a:r>
+            <a:r>
+              <a:rPr lang="en-GB" sz="1200" kern="1200" dirty="0" err="1">
+                <a:solidFill>
+                  <a:schemeClr val="tx1"/>
+                </a:solidFill>
+                <a:effectLst/>
+                <a:latin typeface="+mn-lt"/>
+                <a:ea typeface="+mn-ea"/>
+                <a:cs typeface="+mn-cs"/>
+              </a:rPr>
+              <a:t>destra</a:t>
+            </a:r>
+            <a:r>
+              <a:rPr lang="en-GB" sz="1200" kern="1200" dirty="0">
+                <a:solidFill>
+                  <a:schemeClr val="tx1"/>
+                </a:solidFill>
+                <a:effectLst/>
+                <a:latin typeface="+mn-lt"/>
+                <a:ea typeface="+mn-ea"/>
+                <a:cs typeface="+mn-cs"/>
+              </a:rPr>
+              <a:t> rispetto alla </a:t>
+            </a:r>
+            <a:r>
+              <a:rPr lang="en-GB" sz="1200" kern="1200" dirty="0" err="1">
+                <a:solidFill>
+                  <a:schemeClr val="tx1"/>
+                </a:solidFill>
+                <a:effectLst/>
+                <a:latin typeface="+mn-lt"/>
+                <a:ea typeface="+mn-ea"/>
+                <a:cs typeface="+mn-cs"/>
+              </a:rPr>
+              <a:t>linea</a:t>
+            </a:r>
+            <a:r>
+              <a:rPr lang="en-GB" sz="1200" kern="1200" dirty="0">
+                <a:solidFill>
+                  <a:schemeClr val="tx1"/>
+                </a:solidFill>
+                <a:effectLst/>
+                <a:latin typeface="+mn-lt"/>
+                <a:ea typeface="+mn-ea"/>
+                <a:cs typeface="+mn-cs"/>
+              </a:rPr>
+              <a:t> </a:t>
+            </a:r>
+            <a:r>
+              <a:rPr lang="en-GB" sz="1200" kern="1200" dirty="0" err="1">
+                <a:solidFill>
+                  <a:schemeClr val="tx1"/>
+                </a:solidFill>
+                <a:effectLst/>
+                <a:latin typeface="+mn-lt"/>
+                <a:ea typeface="+mn-ea"/>
+                <a:cs typeface="+mn-cs"/>
+              </a:rPr>
+              <a:t>rossa</a:t>
+            </a:r>
+            <a:r>
+              <a:rPr lang="en-GB" sz="1200" kern="1200" dirty="0">
+                <a:solidFill>
+                  <a:schemeClr val="tx1"/>
+                </a:solidFill>
+                <a:effectLst/>
+                <a:latin typeface="+mn-lt"/>
+                <a:ea typeface="+mn-ea"/>
+                <a:cs typeface="+mn-cs"/>
+              </a:rPr>
+              <a:t> del </a:t>
+            </a:r>
+            <a:r>
+              <a:rPr lang="en-GB" sz="1200" kern="1200" dirty="0" err="1">
+                <a:solidFill>
+                  <a:schemeClr val="tx1"/>
+                </a:solidFill>
+                <a:effectLst/>
+                <a:latin typeface="+mn-lt"/>
+                <a:ea typeface="+mn-ea"/>
+                <a:cs typeface="+mn-cs"/>
+              </a:rPr>
+              <a:t>limite</a:t>
+            </a:r>
+            <a:r>
+              <a:rPr lang="en-GB" sz="1200" kern="1200" dirty="0">
+                <a:solidFill>
+                  <a:schemeClr val="tx1"/>
+                </a:solidFill>
+                <a:effectLst/>
+                <a:latin typeface="+mn-lt"/>
+                <a:ea typeface="+mn-ea"/>
+                <a:cs typeface="+mn-cs"/>
+              </a:rPr>
+              <a:t> (40 km/h): la </a:t>
+            </a:r>
+            <a:r>
+              <a:rPr lang="en-GB" sz="1200" kern="1200" dirty="0" err="1">
+                <a:solidFill>
+                  <a:schemeClr val="tx1"/>
+                </a:solidFill>
+                <a:effectLst/>
+                <a:latin typeface="+mn-lt"/>
+                <a:ea typeface="+mn-ea"/>
+                <a:cs typeface="+mn-cs"/>
+              </a:rPr>
+              <a:t>stragrande</a:t>
+            </a:r>
+            <a:r>
+              <a:rPr lang="en-GB" sz="1200" kern="1200" dirty="0">
+                <a:solidFill>
+                  <a:schemeClr val="tx1"/>
+                </a:solidFill>
+                <a:effectLst/>
+                <a:latin typeface="+mn-lt"/>
+                <a:ea typeface="+mn-ea"/>
+                <a:cs typeface="+mn-cs"/>
+              </a:rPr>
+              <a:t> </a:t>
+            </a:r>
+            <a:r>
+              <a:rPr lang="en-GB" sz="1200" kern="1200" dirty="0" err="1">
+                <a:solidFill>
+                  <a:schemeClr val="tx1"/>
+                </a:solidFill>
+                <a:effectLst/>
+                <a:latin typeface="+mn-lt"/>
+                <a:ea typeface="+mn-ea"/>
+                <a:cs typeface="+mn-cs"/>
+              </a:rPr>
+              <a:t>maggioranza</a:t>
+            </a:r>
+            <a:r>
+              <a:rPr lang="en-GB" sz="1200" kern="1200" dirty="0">
+                <a:solidFill>
+                  <a:schemeClr val="tx1"/>
+                </a:solidFill>
+                <a:effectLst/>
+                <a:latin typeface="+mn-lt"/>
+                <a:ea typeface="+mn-ea"/>
+                <a:cs typeface="+mn-cs"/>
+              </a:rPr>
+              <a:t> </a:t>
+            </a:r>
+            <a:r>
+              <a:rPr lang="en-GB" sz="1200" kern="1200" dirty="0" err="1">
+                <a:solidFill>
+                  <a:schemeClr val="tx1"/>
+                </a:solidFill>
+                <a:effectLst/>
+                <a:latin typeface="+mn-lt"/>
+                <a:ea typeface="+mn-ea"/>
+                <a:cs typeface="+mn-cs"/>
+              </a:rPr>
+              <a:t>dei</a:t>
+            </a:r>
+            <a:r>
+              <a:rPr lang="en-GB" sz="1200" kern="1200" dirty="0">
+                <a:solidFill>
+                  <a:schemeClr val="tx1"/>
+                </a:solidFill>
+                <a:effectLst/>
+                <a:latin typeface="+mn-lt"/>
+                <a:ea typeface="+mn-ea"/>
+                <a:cs typeface="+mn-cs"/>
+              </a:rPr>
+              <a:t> </a:t>
+            </a:r>
+            <a:r>
+              <a:rPr lang="en-GB" sz="1200" kern="1200" dirty="0" err="1">
+                <a:solidFill>
+                  <a:schemeClr val="tx1"/>
+                </a:solidFill>
+                <a:effectLst/>
+                <a:latin typeface="+mn-lt"/>
+                <a:ea typeface="+mn-ea"/>
+                <a:cs typeface="+mn-cs"/>
+              </a:rPr>
+              <a:t>veicoli</a:t>
+            </a:r>
+            <a:r>
+              <a:rPr lang="en-GB" sz="1200" kern="1200" dirty="0">
+                <a:solidFill>
+                  <a:schemeClr val="tx1"/>
+                </a:solidFill>
+                <a:effectLst/>
+                <a:latin typeface="+mn-lt"/>
+                <a:ea typeface="+mn-ea"/>
+                <a:cs typeface="+mn-cs"/>
+              </a:rPr>
+              <a:t> </a:t>
+            </a:r>
+            <a:r>
+              <a:rPr lang="en-GB" sz="1200" kern="1200" dirty="0" err="1">
+                <a:solidFill>
+                  <a:schemeClr val="tx1"/>
+                </a:solidFill>
+                <a:effectLst/>
+                <a:latin typeface="+mn-lt"/>
+                <a:ea typeface="+mn-ea"/>
+                <a:cs typeface="+mn-cs"/>
+              </a:rPr>
+              <a:t>viaggia</a:t>
+            </a:r>
+            <a:r>
+              <a:rPr lang="en-GB" sz="1200" kern="1200" dirty="0">
+                <a:solidFill>
+                  <a:schemeClr val="tx1"/>
+                </a:solidFill>
+                <a:effectLst/>
+                <a:latin typeface="+mn-lt"/>
+                <a:ea typeface="+mn-ea"/>
+                <a:cs typeface="+mn-cs"/>
+              </a:rPr>
+              <a:t> </a:t>
+            </a:r>
+            <a:r>
+              <a:rPr lang="en-GB" sz="1200" kern="1200" dirty="0" err="1">
+                <a:solidFill>
+                  <a:schemeClr val="tx1"/>
+                </a:solidFill>
+                <a:effectLst/>
+                <a:latin typeface="+mn-lt"/>
+                <a:ea typeface="+mn-ea"/>
+                <a:cs typeface="+mn-cs"/>
+              </a:rPr>
+              <a:t>tra</a:t>
+            </a:r>
+            <a:r>
+              <a:rPr lang="en-GB" sz="1200" kern="1200" dirty="0">
+                <a:solidFill>
+                  <a:schemeClr val="tx1"/>
+                </a:solidFill>
+                <a:effectLst/>
+                <a:latin typeface="+mn-lt"/>
+                <a:ea typeface="+mn-ea"/>
+                <a:cs typeface="+mn-cs"/>
+              </a:rPr>
+              <a:t> </a:t>
+            </a:r>
+            <a:r>
+              <a:rPr lang="en-GB" sz="1200" kern="1200" dirty="0" err="1">
+                <a:solidFill>
+                  <a:schemeClr val="tx1"/>
+                </a:solidFill>
+                <a:effectLst/>
+                <a:latin typeface="+mn-lt"/>
+                <a:ea typeface="+mn-ea"/>
+                <a:cs typeface="+mn-cs"/>
+              </a:rPr>
+              <a:t>i</a:t>
+            </a:r>
+            <a:r>
+              <a:rPr lang="en-GB" sz="1200" kern="1200" dirty="0">
+                <a:solidFill>
+                  <a:schemeClr val="tx1"/>
+                </a:solidFill>
+                <a:effectLst/>
+                <a:latin typeface="+mn-lt"/>
+                <a:ea typeface="+mn-ea"/>
+                <a:cs typeface="+mn-cs"/>
+              </a:rPr>
+              <a:t> 45 e </a:t>
+            </a:r>
+            <a:r>
+              <a:rPr lang="en-GB" sz="1200" kern="1200" dirty="0" err="1">
+                <a:solidFill>
+                  <a:schemeClr val="tx1"/>
+                </a:solidFill>
+                <a:effectLst/>
+                <a:latin typeface="+mn-lt"/>
+                <a:ea typeface="+mn-ea"/>
+                <a:cs typeface="+mn-cs"/>
+              </a:rPr>
+              <a:t>i</a:t>
+            </a:r>
+            <a:r>
+              <a:rPr lang="en-GB" sz="1200" kern="1200" dirty="0">
+                <a:solidFill>
+                  <a:schemeClr val="tx1"/>
+                </a:solidFill>
+                <a:effectLst/>
+                <a:latin typeface="+mn-lt"/>
+                <a:ea typeface="+mn-ea"/>
+                <a:cs typeface="+mn-cs"/>
+              </a:rPr>
+              <a:t> 55 km/h. </a:t>
+            </a:r>
+            <a:r>
+              <a:rPr lang="en-GB" sz="1200" kern="1200" dirty="0" err="1">
+                <a:solidFill>
+                  <a:schemeClr val="tx1"/>
+                </a:solidFill>
+                <a:effectLst/>
+                <a:latin typeface="+mn-lt"/>
+                <a:ea typeface="+mn-ea"/>
+                <a:cs typeface="+mn-cs"/>
+              </a:rPr>
+              <a:t>Questo</a:t>
+            </a:r>
+            <a:r>
+              <a:rPr lang="en-GB" sz="1200" kern="1200" dirty="0">
+                <a:solidFill>
+                  <a:schemeClr val="tx1"/>
+                </a:solidFill>
+                <a:effectLst/>
+                <a:latin typeface="+mn-lt"/>
+                <a:ea typeface="+mn-ea"/>
+                <a:cs typeface="+mn-cs"/>
+              </a:rPr>
+              <a:t> indica </a:t>
+            </a:r>
+            <a:r>
+              <a:rPr lang="en-GB" sz="1200" kern="1200" dirty="0" err="1">
+                <a:solidFill>
+                  <a:schemeClr val="tx1"/>
+                </a:solidFill>
+                <a:effectLst/>
+                <a:latin typeface="+mn-lt"/>
+                <a:ea typeface="+mn-ea"/>
+                <a:cs typeface="+mn-cs"/>
+              </a:rPr>
+              <a:t>che</a:t>
+            </a:r>
+            <a:r>
+              <a:rPr lang="en-GB" sz="1200" kern="1200" dirty="0">
+                <a:solidFill>
+                  <a:schemeClr val="tx1"/>
+                </a:solidFill>
+                <a:effectLst/>
+                <a:latin typeface="+mn-lt"/>
+                <a:ea typeface="+mn-ea"/>
+                <a:cs typeface="+mn-cs"/>
+              </a:rPr>
+              <a:t> in </a:t>
+            </a:r>
+            <a:r>
+              <a:rPr lang="en-GB" sz="1200" kern="1200" dirty="0" err="1">
+                <a:solidFill>
+                  <a:schemeClr val="tx1"/>
+                </a:solidFill>
+                <a:effectLst/>
+                <a:latin typeface="+mn-lt"/>
+                <a:ea typeface="+mn-ea"/>
+                <a:cs typeface="+mn-cs"/>
+              </a:rPr>
+              <a:t>quel</a:t>
+            </a:r>
+            <a:r>
+              <a:rPr lang="en-GB" sz="1200" kern="1200" dirty="0">
+                <a:solidFill>
+                  <a:schemeClr val="tx1"/>
+                </a:solidFill>
+                <a:effectLst/>
+                <a:latin typeface="+mn-lt"/>
+                <a:ea typeface="+mn-ea"/>
+                <a:cs typeface="+mn-cs"/>
+              </a:rPr>
+              <a:t> </a:t>
+            </a:r>
+            <a:r>
+              <a:rPr lang="en-GB" sz="1200" kern="1200" dirty="0" err="1">
+                <a:solidFill>
+                  <a:schemeClr val="tx1"/>
+                </a:solidFill>
+                <a:effectLst/>
+                <a:latin typeface="+mn-lt"/>
+                <a:ea typeface="+mn-ea"/>
+                <a:cs typeface="+mn-cs"/>
+              </a:rPr>
+              <a:t>tratto</a:t>
+            </a:r>
+            <a:r>
+              <a:rPr lang="en-GB" sz="1200" kern="1200" dirty="0">
+                <a:solidFill>
+                  <a:schemeClr val="tx1"/>
+                </a:solidFill>
+                <a:effectLst/>
+                <a:latin typeface="+mn-lt"/>
+                <a:ea typeface="+mn-ea"/>
+                <a:cs typeface="+mn-cs"/>
+              </a:rPr>
+              <a:t> </a:t>
+            </a:r>
+            <a:r>
+              <a:rPr lang="en-GB" sz="1200" kern="1200" dirty="0" err="1">
+                <a:solidFill>
+                  <a:schemeClr val="tx1"/>
+                </a:solidFill>
+                <a:effectLst/>
+                <a:latin typeface="+mn-lt"/>
+                <a:ea typeface="+mn-ea"/>
+                <a:cs typeface="+mn-cs"/>
+              </a:rPr>
+              <a:t>l'eccesso</a:t>
+            </a:r>
+            <a:r>
+              <a:rPr lang="en-GB" sz="1200" kern="1200" dirty="0">
+                <a:solidFill>
+                  <a:schemeClr val="tx1"/>
+                </a:solidFill>
+                <a:effectLst/>
+                <a:latin typeface="+mn-lt"/>
+                <a:ea typeface="+mn-ea"/>
+                <a:cs typeface="+mn-cs"/>
+              </a:rPr>
+              <a:t> di </a:t>
+            </a:r>
+            <a:r>
+              <a:rPr lang="en-GB" sz="1200" kern="1200" dirty="0" err="1">
+                <a:solidFill>
+                  <a:schemeClr val="tx1"/>
+                </a:solidFill>
+                <a:effectLst/>
+                <a:latin typeface="+mn-lt"/>
+                <a:ea typeface="+mn-ea"/>
+                <a:cs typeface="+mn-cs"/>
+              </a:rPr>
+              <a:t>velocità</a:t>
+            </a:r>
+            <a:r>
+              <a:rPr lang="en-GB" sz="1200" kern="1200" dirty="0">
+                <a:solidFill>
+                  <a:schemeClr val="tx1"/>
+                </a:solidFill>
+                <a:effectLst/>
+                <a:latin typeface="+mn-lt"/>
+                <a:ea typeface="+mn-ea"/>
+                <a:cs typeface="+mn-cs"/>
+              </a:rPr>
+              <a:t> non </a:t>
+            </a:r>
+            <a:r>
+              <a:rPr lang="en-GB" sz="1200" kern="1200" dirty="0" err="1">
+                <a:solidFill>
+                  <a:schemeClr val="tx1"/>
+                </a:solidFill>
+                <a:effectLst/>
+                <a:latin typeface="+mn-lt"/>
+                <a:ea typeface="+mn-ea"/>
+                <a:cs typeface="+mn-cs"/>
+              </a:rPr>
+              <a:t>è</a:t>
+            </a:r>
+            <a:r>
+              <a:rPr lang="en-GB" sz="1200" kern="1200" dirty="0">
+                <a:solidFill>
+                  <a:schemeClr val="tx1"/>
+                </a:solidFill>
+                <a:effectLst/>
+                <a:latin typeface="+mn-lt"/>
+                <a:ea typeface="+mn-ea"/>
+                <a:cs typeface="+mn-cs"/>
+              </a:rPr>
+              <a:t> </a:t>
+            </a:r>
+            <a:r>
+              <a:rPr lang="en-GB" sz="1200" kern="1200" dirty="0" err="1">
+                <a:solidFill>
+                  <a:schemeClr val="tx1"/>
+                </a:solidFill>
+                <a:effectLst/>
+                <a:latin typeface="+mn-lt"/>
+                <a:ea typeface="+mn-ea"/>
+                <a:cs typeface="+mn-cs"/>
+              </a:rPr>
+              <a:t>un'eccezione</a:t>
+            </a:r>
+            <a:r>
+              <a:rPr lang="en-GB" sz="1200" kern="1200" dirty="0">
+                <a:solidFill>
+                  <a:schemeClr val="tx1"/>
+                </a:solidFill>
+                <a:effectLst/>
+                <a:latin typeface="+mn-lt"/>
+                <a:ea typeface="+mn-ea"/>
+                <a:cs typeface="+mn-cs"/>
+              </a:rPr>
+              <a:t> </a:t>
+            </a:r>
+            <a:r>
+              <a:rPr lang="en-GB" sz="1200" kern="1200" dirty="0" err="1">
+                <a:solidFill>
+                  <a:schemeClr val="tx1"/>
+                </a:solidFill>
+                <a:effectLst/>
+                <a:latin typeface="+mn-lt"/>
+                <a:ea typeface="+mn-ea"/>
+                <a:cs typeface="+mn-cs"/>
+              </a:rPr>
+              <a:t>isolata</a:t>
+            </a:r>
+            <a:r>
+              <a:rPr lang="en-GB" sz="1200" kern="1200" dirty="0">
+                <a:solidFill>
+                  <a:schemeClr val="tx1"/>
+                </a:solidFill>
+                <a:effectLst/>
+                <a:latin typeface="+mn-lt"/>
+                <a:ea typeface="+mn-ea"/>
+                <a:cs typeface="+mn-cs"/>
+              </a:rPr>
+              <a:t>, ma il </a:t>
+            </a:r>
+            <a:r>
+              <a:rPr lang="en-GB" sz="1200" kern="1200" dirty="0" err="1">
+                <a:solidFill>
+                  <a:schemeClr val="tx1"/>
+                </a:solidFill>
+                <a:effectLst/>
+                <a:latin typeface="+mn-lt"/>
+                <a:ea typeface="+mn-ea"/>
+                <a:cs typeface="+mn-cs"/>
+              </a:rPr>
+              <a:t>comportamento</a:t>
+            </a:r>
+            <a:r>
+              <a:rPr lang="en-GB" sz="1200" kern="1200" dirty="0">
+                <a:solidFill>
+                  <a:schemeClr val="tx1"/>
+                </a:solidFill>
+                <a:effectLst/>
+                <a:latin typeface="+mn-lt"/>
+                <a:ea typeface="+mn-ea"/>
+                <a:cs typeface="+mn-cs"/>
+              </a:rPr>
+              <a:t> standard di </a:t>
+            </a:r>
+            <a:r>
+              <a:rPr lang="en-GB" sz="1200" kern="1200" dirty="0" err="1">
+                <a:solidFill>
+                  <a:schemeClr val="tx1"/>
+                </a:solidFill>
+                <a:effectLst/>
+                <a:latin typeface="+mn-lt"/>
+                <a:ea typeface="+mn-ea"/>
+                <a:cs typeface="+mn-cs"/>
+              </a:rPr>
+              <a:t>guida</a:t>
+            </a:r>
+            <a:r>
+              <a:rPr lang="en-GB" sz="1200" kern="1200" dirty="0">
+                <a:solidFill>
+                  <a:schemeClr val="tx1"/>
+                </a:solidFill>
+                <a:effectLst/>
+                <a:latin typeface="+mn-lt"/>
+                <a:ea typeface="+mn-ea"/>
+                <a:cs typeface="+mn-cs"/>
+              </a:rPr>
+              <a:t>. </a:t>
+            </a:r>
+            <a:endParaRPr lang="en-US" dirty="0"/>
+          </a:p>
+          <a:p>
+            <a:endParaRPr lang="en-US" dirty="0"/>
+          </a:p>
         </p:txBody>
       </p:sp>
       <p:sp>
@@ -1141,6 +2070,279 @@
             </a:r>
             <a:endParaRPr lang="en-US" dirty="0"/>
           </a:p>
+          <a:p>
+            <a:endParaRPr lang="en-US" dirty="0"/>
+          </a:p>
+          <a:p>
+            <a:r>
+              <a:rPr lang="en-US" dirty="0"/>
+              <a:t>Il </a:t>
+            </a:r>
+            <a:r>
+              <a:rPr lang="en-US" dirty="0" err="1"/>
+              <a:t>grafico</a:t>
+            </a:r>
+            <a:r>
+              <a:rPr lang="en-US" dirty="0"/>
+              <a:t> </a:t>
+            </a:r>
+            <a:r>
+              <a:rPr lang="en-US" dirty="0" err="1"/>
+              <a:t>mostra</a:t>
+            </a:r>
+            <a:r>
+              <a:rPr lang="en-US" dirty="0"/>
+              <a:t> il </a:t>
+            </a:r>
+            <a:r>
+              <a:rPr lang="en-US" dirty="0" err="1"/>
+              <a:t>tasso</a:t>
+            </a:r>
+            <a:r>
+              <a:rPr lang="en-US" dirty="0"/>
+              <a:t> di </a:t>
+            </a:r>
+            <a:r>
+              <a:rPr lang="en-US" dirty="0" err="1"/>
+              <a:t>infrazione</a:t>
+            </a:r>
+            <a:r>
+              <a:rPr lang="en-US" dirty="0"/>
+              <a:t> medio in </a:t>
+            </a:r>
+            <a:r>
+              <a:rPr lang="en-US" dirty="0" err="1"/>
+              <a:t>percentuale</a:t>
+            </a:r>
+            <a:r>
+              <a:rPr lang="en-US" dirty="0"/>
+              <a:t> per Giorno e ora, </a:t>
+            </a:r>
+            <a:r>
+              <a:rPr lang="en-US" dirty="0" err="1"/>
+              <a:t>noi</a:t>
+            </a:r>
+            <a:r>
+              <a:rPr lang="en-US" dirty="0"/>
+              <a:t> </a:t>
+            </a:r>
+            <a:r>
+              <a:rPr lang="en-US" dirty="0" err="1"/>
+              <a:t>abbiamo</a:t>
+            </a:r>
+            <a:r>
+              <a:rPr lang="en-US" dirty="0"/>
+              <a:t> la Colonna </a:t>
+            </a:r>
+            <a:r>
+              <a:rPr lang="en-US" dirty="0" err="1"/>
+              <a:t>tasso</a:t>
+            </a:r>
+            <a:r>
+              <a:rPr lang="en-US" dirty="0"/>
+              <a:t> </a:t>
+            </a:r>
+            <a:r>
+              <a:rPr lang="en-US" dirty="0" err="1"/>
+              <a:t>percentuale</a:t>
+            </a:r>
+            <a:r>
+              <a:rPr lang="en-US" dirty="0"/>
+              <a:t> di </a:t>
+            </a:r>
+            <a:r>
+              <a:rPr lang="en-US" dirty="0" err="1"/>
+              <a:t>infrazione</a:t>
+            </a:r>
+            <a:r>
+              <a:rPr lang="en-US" dirty="0"/>
+              <a:t> </a:t>
+            </a:r>
+            <a:r>
+              <a:rPr lang="en-US" dirty="0" err="1"/>
+              <a:t>abbiamo</a:t>
+            </a:r>
+            <a:r>
+              <a:rPr lang="en-US" dirty="0"/>
+              <a:t> </a:t>
+            </a:r>
+            <a:r>
+              <a:rPr lang="en-US" dirty="0" err="1"/>
+              <a:t>raggruppato</a:t>
+            </a:r>
+            <a:r>
+              <a:rPr lang="en-US" dirty="0"/>
+              <a:t> per Giorno e ora e ha </a:t>
+            </a:r>
+            <a:r>
+              <a:rPr lang="en-US" dirty="0" err="1"/>
+              <a:t>fatto</a:t>
+            </a:r>
+            <a:r>
+              <a:rPr lang="en-US" dirty="0"/>
+              <a:t> la media (</a:t>
+            </a:r>
+            <a:r>
+              <a:rPr lang="en-US" dirty="0" err="1"/>
+              <a:t>quindi</a:t>
+            </a:r>
+            <a:r>
+              <a:rPr lang="en-US" dirty="0"/>
+              <a:t> </a:t>
+            </a:r>
+            <a:r>
+              <a:rPr lang="en-US" dirty="0" err="1"/>
+              <a:t>lunedi</a:t>
+            </a:r>
+            <a:r>
+              <a:rPr lang="en-US" dirty="0"/>
+              <a:t> a 00 </a:t>
+            </a:r>
+            <a:r>
+              <a:rPr lang="en-US" dirty="0" err="1"/>
+              <a:t>rappresenta</a:t>
+            </a:r>
+            <a:r>
+              <a:rPr lang="en-US" dirty="0"/>
+              <a:t> la media del </a:t>
+            </a:r>
+            <a:r>
+              <a:rPr lang="en-US" dirty="0" err="1"/>
+              <a:t>tasso</a:t>
+            </a:r>
+            <a:r>
+              <a:rPr lang="en-US" dirty="0"/>
+              <a:t> di </a:t>
+            </a:r>
+            <a:r>
+              <a:rPr lang="en-US" dirty="0" err="1"/>
+              <a:t>infrazione</a:t>
+            </a:r>
+            <a:r>
+              <a:rPr lang="en-US" dirty="0"/>
+              <a:t> </a:t>
+            </a:r>
+            <a:r>
+              <a:rPr lang="en-US" dirty="0" err="1"/>
+              <a:t>percentuale</a:t>
+            </a:r>
+            <a:r>
+              <a:rPr lang="en-US" dirty="0"/>
+              <a:t> di tutti I </a:t>
+            </a:r>
+            <a:r>
+              <a:rPr lang="en-US" dirty="0" err="1"/>
+              <a:t>lunedi</a:t>
+            </a:r>
+            <a:r>
+              <a:rPr lang="en-US" dirty="0"/>
+              <a:t> alle 00)</a:t>
+            </a:r>
+          </a:p>
+          <a:p>
+            <a:endParaRPr lang="en-US" dirty="0"/>
+          </a:p>
+          <a:p>
+            <a:r>
+              <a:rPr lang="en-US" dirty="0" err="1"/>
+              <a:t>Cambiamenti</a:t>
+            </a:r>
+            <a:r>
+              <a:rPr lang="en-US" dirty="0"/>
+              <a:t>:</a:t>
+            </a:r>
+          </a:p>
+          <a:p>
+            <a:r>
+              <a:rPr lang="en-US" dirty="0"/>
+              <a:t>il </a:t>
+            </a:r>
+            <a:r>
+              <a:rPr lang="en-US" dirty="0" err="1"/>
+              <a:t>calcolo</a:t>
+            </a:r>
+            <a:r>
+              <a:rPr lang="en-US" dirty="0"/>
+              <a:t> del </a:t>
+            </a:r>
+            <a:r>
+              <a:rPr lang="en-US" dirty="0" err="1"/>
+              <a:t>tasso</a:t>
+            </a:r>
+            <a:r>
+              <a:rPr lang="en-US" dirty="0"/>
+              <a:t> in </a:t>
+            </a:r>
+            <a:r>
+              <a:rPr lang="en-US" dirty="0" err="1"/>
+              <a:t>percentuale</a:t>
+            </a:r>
+            <a:r>
+              <a:rPr lang="en-US" dirty="0"/>
+              <a:t> </a:t>
+            </a:r>
+            <a:r>
+              <a:rPr lang="en-US" dirty="0" err="1"/>
+              <a:t>puo</a:t>
+            </a:r>
+            <a:r>
+              <a:rPr lang="en-US" dirty="0"/>
+              <a:t> </a:t>
+            </a:r>
+            <a:r>
+              <a:rPr lang="en-US" dirty="0" err="1"/>
+              <a:t>essere</a:t>
+            </a:r>
+            <a:r>
+              <a:rPr lang="en-US" dirty="0"/>
+              <a:t> </a:t>
+            </a:r>
+            <a:r>
+              <a:rPr lang="en-US" dirty="0" err="1"/>
+              <a:t>fatto</a:t>
+            </a:r>
+            <a:r>
+              <a:rPr lang="en-US" dirty="0"/>
+              <a:t> in modo </a:t>
+            </a:r>
+            <a:r>
+              <a:rPr lang="en-US" dirty="0" err="1"/>
+              <a:t>manuale</a:t>
+            </a:r>
+            <a:r>
+              <a:rPr lang="en-US" dirty="0"/>
+              <a:t> o </a:t>
+            </a:r>
+            <a:r>
+              <a:rPr lang="en-US" dirty="0" err="1"/>
+              <a:t>calcolando</a:t>
+            </a:r>
+            <a:r>
+              <a:rPr lang="en-US" dirty="0"/>
+              <a:t> il </a:t>
+            </a:r>
+            <a:r>
+              <a:rPr lang="en-US" dirty="0" err="1"/>
+              <a:t>tasso</a:t>
+            </a:r>
+            <a:r>
+              <a:rPr lang="en-US" dirty="0"/>
+              <a:t> degli </a:t>
+            </a:r>
+            <a:r>
+              <a:rPr lang="en-US" dirty="0" err="1"/>
+              <a:t>ultimi</a:t>
+            </a:r>
+            <a:r>
+              <a:rPr lang="en-US" dirty="0"/>
+              <a:t> 7 </a:t>
+            </a:r>
+            <a:r>
+              <a:rPr lang="en-US" dirty="0" err="1"/>
+              <a:t>giorni</a:t>
+            </a:r>
+            <a:endParaRPr lang="en-US" dirty="0"/>
+          </a:p>
         </p:txBody>
       </p:sp>
       <p:sp>
@@ -1384,6 +2586,233 @@
               <a:t>.</a:t>
             </a:r>
           </a:p>
+          <a:p>
+            <a:endParaRPr lang="en-US" dirty="0"/>
+          </a:p>
+          <a:p>
+            <a:r>
+              <a:rPr lang="en-US" dirty="0" err="1"/>
+              <a:t>Creato</a:t>
+            </a:r>
+            <a:r>
+              <a:rPr lang="en-US" dirty="0"/>
+              <a:t> la Colonna </a:t>
+            </a:r>
+            <a:r>
+              <a:rPr lang="en-US" dirty="0" err="1"/>
+              <a:t>superamento</a:t>
+            </a:r>
+            <a:r>
+              <a:rPr lang="en-US" dirty="0"/>
+              <a:t> (</a:t>
+            </a:r>
+            <a:r>
+              <a:rPr lang="en-US" dirty="0" err="1"/>
+              <a:t>booleana</a:t>
+            </a:r>
+            <a:r>
+              <a:rPr lang="en-US" dirty="0"/>
+              <a:t>) se la </a:t>
+            </a:r>
+            <a:r>
+              <a:rPr lang="en-US" dirty="0" err="1"/>
+              <a:t>velocita</a:t>
+            </a:r>
+            <a:r>
+              <a:rPr lang="en-US" dirty="0"/>
+              <a:t> </a:t>
+            </a:r>
+            <a:r>
+              <a:rPr lang="en-US" dirty="0" err="1"/>
+              <a:t>è</a:t>
+            </a:r>
+            <a:r>
+              <a:rPr lang="en-US" dirty="0"/>
+              <a:t> Maggiore della zona </a:t>
+            </a:r>
+            <a:r>
+              <a:rPr lang="en-US" dirty="0" err="1"/>
+              <a:t>limite</a:t>
+            </a:r>
+            <a:r>
+              <a:rPr lang="en-US" dirty="0"/>
+              <a:t>, e poi </a:t>
+            </a:r>
+            <a:r>
+              <a:rPr lang="en-US" dirty="0" err="1"/>
+              <a:t>semplicemente</a:t>
+            </a:r>
+            <a:r>
+              <a:rPr lang="en-US" dirty="0"/>
+              <a:t> </a:t>
+            </a:r>
+            <a:r>
+              <a:rPr lang="en-US" dirty="0" err="1"/>
+              <a:t>raggruppiamo</a:t>
+            </a:r>
+            <a:r>
+              <a:rPr lang="en-US" dirty="0"/>
+              <a:t> per </a:t>
+            </a:r>
+            <a:r>
+              <a:rPr lang="en-US" dirty="0" err="1"/>
+              <a:t>lat</a:t>
+            </a:r>
+            <a:r>
+              <a:rPr lang="en-US" dirty="0"/>
+              <a:t> e </a:t>
+            </a:r>
+            <a:r>
+              <a:rPr lang="en-US" dirty="0" err="1"/>
+              <a:t>lon</a:t>
+            </a:r>
+            <a:r>
+              <a:rPr lang="en-US" dirty="0"/>
+              <a:t> (</a:t>
+            </a:r>
+            <a:r>
+              <a:rPr lang="en-US" dirty="0" err="1"/>
+              <a:t>quindi</a:t>
+            </a:r>
+            <a:r>
+              <a:rPr lang="en-US" dirty="0"/>
+              <a:t> per ogni radar) e </a:t>
+            </a:r>
+            <a:r>
+              <a:rPr lang="en-US" dirty="0" err="1"/>
+              <a:t>calcoliamo</a:t>
+            </a:r>
+            <a:r>
+              <a:rPr lang="en-US" dirty="0"/>
+              <a:t> per ogni radar il </a:t>
+            </a:r>
+            <a:r>
+              <a:rPr lang="en-US" dirty="0" err="1"/>
+              <a:t>numero</a:t>
+            </a:r>
+            <a:r>
+              <a:rPr lang="en-US" dirty="0"/>
+              <a:t> di </a:t>
+            </a:r>
+            <a:r>
+              <a:rPr lang="en-US" dirty="0" err="1"/>
+              <a:t>registrazioni</a:t>
+            </a:r>
+            <a:r>
+              <a:rPr lang="en-US" dirty="0"/>
+              <a:t> e il </a:t>
+            </a:r>
+            <a:r>
+              <a:rPr lang="en-US" dirty="0" err="1"/>
+              <a:t>numero</a:t>
+            </a:r>
+            <a:r>
+              <a:rPr lang="en-US" dirty="0"/>
+              <a:t> di </a:t>
+            </a:r>
+            <a:r>
+              <a:rPr lang="en-US" dirty="0" err="1"/>
+              <a:t>superamenti</a:t>
+            </a:r>
+            <a:endParaRPr lang="en-US" dirty="0"/>
+          </a:p>
+          <a:p>
+            <a:endParaRPr lang="en-US" dirty="0"/>
+          </a:p>
+          <a:p>
+            <a:r>
+              <a:rPr lang="en-US" dirty="0" err="1"/>
+              <a:t>Cambiamenti</a:t>
+            </a:r>
+            <a:r>
+              <a:rPr lang="en-US" dirty="0"/>
+              <a:t>:</a:t>
+            </a:r>
+          </a:p>
+          <a:p>
+            <a:r>
+              <a:rPr lang="en-US" dirty="0" err="1"/>
+              <a:t>implica</a:t>
+            </a:r>
+            <a:r>
+              <a:rPr lang="en-US" dirty="0"/>
+              <a:t> il </a:t>
+            </a:r>
+            <a:r>
+              <a:rPr lang="en-US" dirty="0" err="1"/>
+              <a:t>fatto</a:t>
+            </a:r>
+            <a:r>
+              <a:rPr lang="en-US" dirty="0"/>
+              <a:t> </a:t>
+            </a:r>
+            <a:r>
+              <a:rPr lang="en-US" dirty="0" err="1"/>
+              <a:t>che</a:t>
+            </a:r>
+            <a:r>
+              <a:rPr lang="en-US" dirty="0"/>
+              <a:t> </a:t>
+            </a:r>
+            <a:r>
+              <a:rPr lang="en-US" dirty="0" err="1"/>
+              <a:t>siano</a:t>
+            </a:r>
+            <a:r>
+              <a:rPr lang="en-US" dirty="0"/>
+              <a:t> </a:t>
+            </a:r>
+            <a:r>
+              <a:rPr lang="en-US" dirty="0" err="1"/>
+              <a:t>accesi</a:t>
+            </a:r>
+            <a:r>
+              <a:rPr lang="en-US" dirty="0"/>
+              <a:t> sempre (</a:t>
+            </a:r>
+            <a:r>
+              <a:rPr lang="en-US" dirty="0" err="1"/>
+              <a:t>verificare</a:t>
+            </a:r>
+            <a:r>
+              <a:rPr lang="en-US" dirty="0"/>
+              <a:t>)</a:t>
+            </a:r>
+          </a:p>
+          <a:p>
+            <a:r>
+              <a:rPr lang="en-US" dirty="0" err="1"/>
+              <a:t>cambiare</a:t>
+            </a:r>
+            <a:r>
+              <a:rPr lang="en-US" dirty="0"/>
+              <a:t> il </a:t>
+            </a:r>
+            <a:r>
+              <a:rPr lang="en-US" dirty="0" err="1"/>
+              <a:t>numero</a:t>
+            </a:r>
+            <a:r>
+              <a:rPr lang="en-US" dirty="0"/>
+              <a:t> di </a:t>
+            </a:r>
+            <a:r>
+              <a:rPr lang="en-US" dirty="0" err="1"/>
+              <a:t>infrazioni</a:t>
+            </a:r>
+            <a:r>
+              <a:rPr lang="en-US" dirty="0"/>
+              <a:t> con il TASSO DI INFRAZIONE in </a:t>
+            </a:r>
+            <a:r>
+              <a:rPr lang="en-US" dirty="0" err="1"/>
+              <a:t>percentuale</a:t>
+            </a:r>
+            <a:r>
+              <a:rPr lang="en-US" dirty="0"/>
+              <a:t>.</a:t>
+            </a:r>
+          </a:p>
         </p:txBody>
       </p:sp>
       <p:sp>
@@ -1636,6 +3065,240 @@
               <a:t>superamento</a:t>
             </a:r>
             <a:endParaRPr lang="en-US" dirty="0"/>
+          </a:p>
+          <a:p>
+            <a:endParaRPr lang="en-US" dirty="0"/>
+          </a:p>
+          <a:p>
+            <a:r>
+              <a:rPr lang="en-US" dirty="0" err="1"/>
+              <a:t>Cambiamenti</a:t>
+            </a:r>
+            <a:r>
+              <a:rPr lang="en-US" dirty="0"/>
+              <a:t>:</a:t>
+            </a:r>
+          </a:p>
+          <a:p>
+            <a:r>
+              <a:rPr lang="en-US" dirty="0"/>
+              <a:t>Nuovo </a:t>
+            </a:r>
+            <a:r>
+              <a:rPr lang="en-US" dirty="0" err="1"/>
+              <a:t>grafico</a:t>
+            </a:r>
+            <a:r>
+              <a:rPr lang="en-US" dirty="0"/>
+              <a:t> da fare heatmap:</a:t>
+            </a:r>
+          </a:p>
+          <a:p>
+            <a:r>
+              <a:rPr lang="en-US" dirty="0"/>
+              <a:t>asse x: tempo (anni dal 2024) e poi per ogni anno </a:t>
+            </a:r>
+            <a:r>
+              <a:rPr lang="en-US" dirty="0" err="1"/>
+              <a:t>mettiamo</a:t>
+            </a:r>
+            <a:r>
+              <a:rPr lang="en-US" dirty="0"/>
+              <a:t> </a:t>
+            </a:r>
+            <a:r>
+              <a:rPr lang="en-US" dirty="0" err="1"/>
+              <a:t>i</a:t>
+            </a:r>
+            <a:r>
+              <a:rPr lang="en-US" dirty="0"/>
+              <a:t> </a:t>
+            </a:r>
+            <a:r>
+              <a:rPr lang="en-US" dirty="0" err="1"/>
+              <a:t>mesi</a:t>
+            </a:r>
+            <a:endParaRPr lang="en-US" dirty="0"/>
+          </a:p>
+          <a:p>
+            <a:r>
+              <a:rPr lang="en-US" dirty="0"/>
+              <a:t>asse y: ogni radar</a:t>
+            </a:r>
+          </a:p>
+          <a:p>
+            <a:endParaRPr lang="en-US" dirty="0"/>
+          </a:p>
+          <a:p>
+            <a:r>
+              <a:rPr lang="en-US" dirty="0"/>
+              <a:t>la heatmap </a:t>
+            </a:r>
+            <a:r>
+              <a:rPr lang="en-US" dirty="0" err="1"/>
+              <a:t>deve</a:t>
+            </a:r>
+            <a:r>
+              <a:rPr lang="en-US" dirty="0"/>
+              <a:t> </a:t>
+            </a:r>
+            <a:r>
+              <a:rPr lang="en-US" dirty="0" err="1"/>
+              <a:t>rappresentare</a:t>
+            </a:r>
+            <a:r>
+              <a:rPr lang="en-US" dirty="0"/>
+              <a:t> il </a:t>
+            </a:r>
+            <a:r>
+              <a:rPr lang="en-US" dirty="0" err="1"/>
+              <a:t>numero</a:t>
+            </a:r>
+            <a:r>
+              <a:rPr lang="en-US" dirty="0"/>
+              <a:t> di </a:t>
+            </a:r>
+            <a:r>
+              <a:rPr lang="en-US" dirty="0" err="1"/>
+              <a:t>automobili</a:t>
+            </a:r>
+            <a:r>
+              <a:rPr lang="en-US" dirty="0"/>
+              <a:t> (o se ne </a:t>
+            </a:r>
+            <a:r>
+              <a:rPr lang="en-US" dirty="0" err="1"/>
+              <a:t>è</a:t>
+            </a:r>
+            <a:r>
+              <a:rPr lang="en-US" dirty="0"/>
+              <a:t> passata </a:t>
+            </a:r>
+            <a:r>
+              <a:rPr lang="en-US" dirty="0" err="1"/>
+              <a:t>almeno</a:t>
+            </a:r>
+            <a:r>
+              <a:rPr lang="en-US" dirty="0"/>
+              <a:t> </a:t>
+            </a:r>
+            <a:r>
+              <a:rPr lang="en-US" dirty="0" err="1"/>
+              <a:t>una</a:t>
+            </a:r>
+            <a:r>
+              <a:rPr lang="en-US" dirty="0"/>
+              <a:t> e </a:t>
+            </a:r>
+            <a:r>
+              <a:rPr lang="en-US" dirty="0" err="1"/>
+              <a:t>quindi</a:t>
+            </a:r>
+            <a:r>
+              <a:rPr lang="en-US" dirty="0"/>
+              <a:t> </a:t>
+            </a:r>
+            <a:r>
+              <a:rPr lang="en-US" dirty="0" err="1"/>
+              <a:t>avro</a:t>
+            </a:r>
+            <a:r>
+              <a:rPr lang="en-US" dirty="0"/>
+              <a:t> </a:t>
+            </a:r>
+            <a:r>
+              <a:rPr lang="en-US" dirty="0" err="1"/>
+              <a:t>i</a:t>
+            </a:r>
+            <a:r>
+              <a:rPr lang="en-US" dirty="0"/>
+              <a:t> </a:t>
+            </a:r>
+            <a:r>
+              <a:rPr lang="en-US" dirty="0" err="1"/>
+              <a:t>quadrati</a:t>
+            </a:r>
+            <a:r>
+              <a:rPr lang="en-US" dirty="0"/>
+              <a:t> o </a:t>
+            </a:r>
+            <a:r>
+              <a:rPr lang="en-US" dirty="0" err="1"/>
+              <a:t>bianchi</a:t>
+            </a:r>
+            <a:r>
+              <a:rPr lang="en-US" dirty="0"/>
+              <a:t> o </a:t>
+            </a:r>
+            <a:r>
+              <a:rPr lang="en-US" dirty="0" err="1"/>
+              <a:t>neri</a:t>
+            </a:r>
+            <a:r>
+              <a:rPr lang="en-US" dirty="0"/>
+              <a:t> per </a:t>
+            </a:r>
+            <a:r>
+              <a:rPr lang="en-US" dirty="0" err="1"/>
+              <a:t>verificare</a:t>
+            </a:r>
+            <a:r>
+              <a:rPr lang="en-US" dirty="0"/>
+              <a:t> </a:t>
+            </a:r>
+            <a:r>
+              <a:rPr lang="en-US" dirty="0" err="1"/>
+              <a:t>che</a:t>
+            </a:r>
+            <a:r>
+              <a:rPr lang="en-US" dirty="0"/>
+              <a:t> </a:t>
+            </a:r>
+            <a:r>
+              <a:rPr lang="en-US" dirty="0" err="1"/>
+              <a:t>sono</a:t>
+            </a:r>
+            <a:r>
+              <a:rPr lang="en-US" dirty="0"/>
+              <a:t> sempre </a:t>
+            </a:r>
+            <a:r>
+              <a:rPr lang="en-US" dirty="0" err="1"/>
+              <a:t>accesi</a:t>
+            </a:r>
+            <a:r>
+              <a:rPr lang="en-US" dirty="0"/>
+              <a:t> I radar)</a:t>
+            </a:r>
+          </a:p>
+          <a:p>
+            <a:endParaRPr lang="en-US" dirty="0"/>
+          </a:p>
+          <a:p>
+            <a:r>
+              <a:rPr lang="en-US" dirty="0" err="1"/>
+              <a:t>raggruppamento</a:t>
+            </a:r>
+            <a:r>
+              <a:rPr lang="en-US" dirty="0"/>
+              <a:t> </a:t>
+            </a:r>
+            <a:r>
+              <a:rPr lang="en-US" dirty="0" err="1"/>
+              <a:t>si</a:t>
+            </a:r>
+            <a:r>
+              <a:rPr lang="en-US" dirty="0"/>
+              <a:t> </a:t>
+            </a:r>
+            <a:r>
+              <a:rPr lang="en-US" dirty="0" err="1"/>
+              <a:t>chiama</a:t>
+            </a:r>
+            <a:r>
+              <a:rPr lang="en-US" dirty="0"/>
+              <a:t> resampling</a:t>
+            </a:r>
           </a:p>
           <a:p>
             <a:endParaRPr lang="en-US" dirty="0"/>
@@ -2400,7 +4063,7 @@
                 <a:ea typeface="Calibri" pitchFamily="34" charset="-122"/>
                 <a:cs typeface="Calibri" pitchFamily="34" charset="-120"/>
               </a:rPr>
-              <a:t>Data Science</a:t>
+              <a:t>Data Science – Group A</a:t>
             </a:r>
             <a:endParaRPr lang="en-US" sz="1600" dirty="0"/>
           </a:p>

--- a/speed_monitoring.pptx
+++ b/speed_monitoring.pptx
@@ -645,99 +645,6 @@
           <a:lstStyle/>
           <a:p>
             <a:r>
-              <a:rPr lang="en-US" dirty="0"/>
-              <a:t>zoom </a:t>
-            </a:r>
-            <a:r>
-              <a:rPr lang="en-US" dirty="0" err="1"/>
-              <a:t>sul</a:t>
-            </a:r>
-            <a:r>
-              <a:rPr lang="en-US" dirty="0"/>
-              <a:t> primo e </a:t>
-            </a:r>
-            <a:r>
-              <a:rPr lang="en-US" dirty="0" err="1"/>
-              <a:t>mostraer</a:t>
-            </a:r>
-            <a:r>
-              <a:rPr lang="en-US" dirty="0"/>
-              <a:t> </a:t>
-            </a:r>
-            <a:r>
-              <a:rPr lang="en-US" dirty="0" err="1"/>
-              <a:t>una</a:t>
-            </a:r>
-            <a:r>
-              <a:rPr lang="en-US" dirty="0"/>
-              <a:t> </a:t>
-            </a:r>
-            <a:r>
-              <a:rPr lang="en-US" dirty="0" err="1"/>
-              <a:t>distribuziobe</a:t>
-            </a:r>
-            <a:r>
-              <a:rPr lang="en-US" dirty="0"/>
-              <a:t> delle </a:t>
-            </a:r>
-            <a:r>
-              <a:rPr lang="en-US" dirty="0" err="1"/>
-              <a:t>velocit`MISURATE</a:t>
-            </a:r>
-            <a:endParaRPr lang="en-US" dirty="0"/>
-          </a:p>
-          <a:p>
-            <a:r>
-              <a:rPr lang="en-US" dirty="0" err="1"/>
-              <a:t>mostra</a:t>
-            </a:r>
-            <a:r>
-              <a:rPr lang="en-US" dirty="0"/>
-              <a:t> campana </a:t>
-            </a:r>
-            <a:r>
-              <a:rPr lang="en-US" dirty="0" err="1"/>
-              <a:t>velocita</a:t>
-            </a:r>
-            <a:r>
-              <a:rPr lang="en-US" dirty="0"/>
-              <a:t> con </a:t>
-            </a:r>
-            <a:r>
-              <a:rPr lang="en-US" dirty="0" err="1"/>
-              <a:t>rigfa</a:t>
-            </a:r>
-            <a:r>
-              <a:rPr lang="en-US" dirty="0"/>
-              <a:t> </a:t>
-            </a:r>
-            <a:r>
-              <a:rPr lang="en-US" dirty="0" err="1"/>
-              <a:t>verticale</a:t>
-            </a:r>
-            <a:r>
-              <a:rPr lang="en-US" dirty="0"/>
-              <a:t> con dove </a:t>
-            </a:r>
-            <a:r>
-              <a:rPr lang="en-US" dirty="0" err="1"/>
-              <a:t>inizia</a:t>
-            </a:r>
-            <a:r>
-              <a:rPr lang="en-US" dirty="0"/>
-              <a:t> la </a:t>
-            </a:r>
-            <a:r>
-              <a:rPr lang="en-US" dirty="0" err="1"/>
-              <a:t>infrazione</a:t>
-            </a:r>
-            <a:endParaRPr lang="en-US" dirty="0"/>
-          </a:p>
-          <a:p>
-            <a:endParaRPr lang="en-US" dirty="0"/>
-          </a:p>
-          <a:p>
-            <a:r>
               <a:rPr lang="en-GB" sz="1200" kern="1200" dirty="0">
                 <a:solidFill>
                   <a:schemeClr val="tx1"/>
@@ -1755,7 +1662,7 @@
           <a:p>
             <a:r>
               <a:rPr lang="en-US" dirty="0" err="1"/>
-              <a:t>strano</a:t>
+              <a:t>Sembra</a:t>
             </a:r>
             <a:r>
               <a:rPr lang="en-US" dirty="0"/>
@@ -1763,7 +1670,7 @@
             </a:r>
             <a:r>
               <a:rPr lang="en-US" dirty="0" err="1"/>
-              <a:t>che</a:t>
+              <a:t>strano</a:t>
             </a:r>
             <a:r>
               <a:rPr lang="en-US" dirty="0"/>
@@ -1771,7 +1678,7 @@
             </a:r>
             <a:r>
               <a:rPr lang="en-US" dirty="0" err="1"/>
-              <a:t>c'è</a:t>
+              <a:t>che</a:t>
             </a:r>
             <a:r>
               <a:rPr lang="en-US" dirty="0"/>
@@ -1779,7 +1686,7 @@
             </a:r>
             <a:r>
               <a:rPr lang="en-US" dirty="0" err="1"/>
-              <a:t>più</a:t>
+              <a:t>c'è</a:t>
             </a:r>
             <a:r>
               <a:rPr lang="en-US" dirty="0"/>
@@ -1787,33 +1694,25 @@
             </a:r>
             <a:r>
               <a:rPr lang="en-US" dirty="0" err="1"/>
+              <a:t>più</a:t>
+            </a:r>
+            <a:r>
+              <a:rPr lang="en-US" dirty="0"/>
+              <a:t> </a:t>
+            </a:r>
+            <a:r>
+              <a:rPr lang="en-US" dirty="0" err="1"/>
               <a:t>traffico</a:t>
             </a:r>
             <a:r>
               <a:rPr lang="en-US" dirty="0"/>
               <a:t> alle 15 rispetto alle 17</a:t>
             </a:r>
-            <a:br>
-              <a:rPr lang="en-US" dirty="0"/>
-            </a:br>
-            <a:br>
-              <a:rPr lang="en-US" dirty="0"/>
-            </a:br>
-            <a:r>
-              <a:rPr lang="en-US" dirty="0"/>
-              <a:t>Di notte non </a:t>
-            </a:r>
+          </a:p>
+          <a:p>
             <a:r>
               <a:rPr lang="en-US" dirty="0" err="1"/>
-              <a:t>c'è</a:t>
-            </a:r>
-            <a:r>
-              <a:rPr lang="en-US" dirty="0"/>
-              <a:t> il radar </a:t>
-            </a:r>
-            <a:r>
-              <a:rPr lang="en-US" dirty="0" err="1"/>
-              <a:t>nella</a:t>
+              <a:t>Semplicemente</a:t>
             </a:r>
             <a:r>
               <a:rPr lang="en-US" dirty="0"/>
@@ -1821,23 +1720,15 @@
             </a:r>
             <a:r>
               <a:rPr lang="en-US" dirty="0" err="1"/>
-              <a:t>stradina</a:t>
+              <a:t>perché</a:t>
             </a:r>
             <a:r>
               <a:rPr lang="en-US" dirty="0"/>
-              <a:t> di </a:t>
+              <a:t> ci </a:t>
             </a:r>
             <a:r>
               <a:rPr lang="en-US" dirty="0" err="1"/>
-              <a:t>paese</a:t>
-            </a:r>
-            <a:r>
-              <a:rPr lang="en-US" dirty="0"/>
-              <a:t> ma </a:t>
-            </a:r>
-            <a:r>
-              <a:rPr lang="en-US" dirty="0" err="1"/>
-              <a:t>nelle</a:t>
+              <a:t>sono</a:t>
             </a:r>
             <a:r>
               <a:rPr lang="en-US" dirty="0"/>
@@ -1845,7 +1736,7 @@
             </a:r>
             <a:r>
               <a:rPr lang="en-US" dirty="0" err="1"/>
-              <a:t>strade</a:t>
+              <a:t>più</a:t>
             </a:r>
             <a:r>
               <a:rPr lang="en-US" dirty="0"/>
@@ -1853,22 +1744,15 @@
             </a:r>
             <a:r>
               <a:rPr lang="en-US" dirty="0" err="1"/>
-              <a:t>veloci</a:t>
+              <a:t>controlli</a:t>
             </a:r>
             <a:r>
               <a:rPr lang="en-US" dirty="0"/>
-              <a:t>?</a:t>
-            </a:r>
-            <a:br>
-              <a:rPr lang="en-US" dirty="0"/>
-            </a:br>
-            <a:r>
-              <a:rPr lang="en-US" dirty="0"/>
-              <a:t>Vedi se </a:t>
+              <a:t> in </a:t>
             </a:r>
             <a:r>
               <a:rPr lang="en-US" dirty="0" err="1"/>
-              <a:t>è</a:t>
+              <a:t>strade</a:t>
             </a:r>
             <a:r>
               <a:rPr lang="en-US" dirty="0"/>
@@ -1876,9 +1760,28 @@
             </a:r>
             <a:r>
               <a:rPr lang="en-US" dirty="0" err="1"/>
-              <a:t>vero</a:t>
-            </a:r>
-            <a:endParaRPr lang="en-US" dirty="0"/>
+              <a:t>cantonali</a:t>
+            </a:r>
+            <a:r>
+              <a:rPr lang="en-US" dirty="0"/>
+              <a:t> </a:t>
+            </a:r>
+            <a:r>
+              <a:rPr lang="en-US" dirty="0" err="1"/>
+              <a:t>ecc</a:t>
+            </a:r>
+            <a:r>
+              <a:rPr lang="en-US" dirty="0"/>
+              <a:t>. e non solo in </a:t>
+            </a:r>
+            <a:r>
+              <a:rPr lang="en-US" dirty="0" err="1"/>
+              <a:t>stradine</a:t>
+            </a:r>
+            <a:r>
+              <a:rPr lang="en-US" dirty="0"/>
+              <a:t> lente (30kmh)</a:t>
+            </a:r>
           </a:p>
         </p:txBody>
       </p:sp>
@@ -1980,367 +1883,6 @@
           <a:bodyPr/>
           <a:lstStyle/>
           <a:p>
-            <a:r>
-              <a:rPr lang="en-US" dirty="0"/>
-              <a:t>Si nota </a:t>
-            </a:r>
-            <a:r>
-              <a:rPr lang="en-US" dirty="0" err="1"/>
-              <a:t>che</a:t>
-            </a:r>
-            <a:r>
-              <a:rPr lang="en-US" dirty="0"/>
-              <a:t> le </a:t>
-            </a:r>
-            <a:r>
-              <a:rPr lang="en-US" dirty="0" err="1"/>
-              <a:t>infrazioni</a:t>
-            </a:r>
-            <a:r>
-              <a:rPr lang="en-US" dirty="0"/>
-              <a:t> </a:t>
-            </a:r>
-            <a:r>
-              <a:rPr lang="en-US" dirty="0" err="1"/>
-              <a:t>avvengono</a:t>
-            </a:r>
-            <a:r>
-              <a:rPr lang="en-US" dirty="0"/>
-              <a:t> </a:t>
-            </a:r>
-            <a:r>
-              <a:rPr lang="en-US" dirty="0" err="1"/>
-              <a:t>maggiormente</a:t>
-            </a:r>
-            <a:r>
-              <a:rPr lang="en-US" dirty="0"/>
-              <a:t> </a:t>
-            </a:r>
-            <a:r>
-              <a:rPr lang="en-US" dirty="0" err="1"/>
-              <a:t>negli</a:t>
-            </a:r>
-            <a:r>
-              <a:rPr lang="en-US" dirty="0"/>
-              <a:t> </a:t>
-            </a:r>
-            <a:r>
-              <a:rPr lang="en-US" dirty="0" err="1"/>
-              <a:t>orari</a:t>
-            </a:r>
-            <a:r>
-              <a:rPr lang="en-US" dirty="0"/>
-              <a:t> con </a:t>
-            </a:r>
-            <a:r>
-              <a:rPr lang="en-US" dirty="0" err="1"/>
-              <a:t>pochissimo</a:t>
-            </a:r>
-            <a:r>
-              <a:rPr lang="en-US" dirty="0"/>
-              <a:t> </a:t>
-            </a:r>
-            <a:r>
-              <a:rPr lang="en-US" dirty="0" err="1"/>
-              <a:t>traffico</a:t>
-            </a:r>
-            <a:r>
-              <a:rPr lang="en-US" dirty="0"/>
-              <a:t> -&gt; dove ci </a:t>
-            </a:r>
-            <a:r>
-              <a:rPr lang="en-US" dirty="0" err="1"/>
-              <a:t>sono</a:t>
-            </a:r>
-            <a:r>
-              <a:rPr lang="en-US" dirty="0"/>
-              <a:t> </a:t>
-            </a:r>
-            <a:r>
-              <a:rPr lang="en-US" dirty="0" err="1"/>
-              <a:t>meno</a:t>
-            </a:r>
-            <a:r>
-              <a:rPr lang="en-US" dirty="0"/>
-              <a:t> </a:t>
-            </a:r>
-            <a:r>
-              <a:rPr lang="en-US" dirty="0" err="1"/>
-              <a:t>misurazioni</a:t>
-            </a:r>
-            <a:endParaRPr lang="en-US" dirty="0"/>
-          </a:p>
-          <a:p>
-            <a:endParaRPr lang="en-US" dirty="0"/>
-          </a:p>
-          <a:p>
-            <a:r>
-              <a:rPr lang="en-US" dirty="0"/>
-              <a:t>Il </a:t>
-            </a:r>
-            <a:r>
-              <a:rPr lang="en-US" dirty="0" err="1"/>
-              <a:t>grafico</a:t>
-            </a:r>
-            <a:r>
-              <a:rPr lang="en-US" dirty="0"/>
-              <a:t> </a:t>
-            </a:r>
-            <a:r>
-              <a:rPr lang="en-US" dirty="0" err="1"/>
-              <a:t>mostra</a:t>
-            </a:r>
-            <a:r>
-              <a:rPr lang="en-US" dirty="0"/>
-              <a:t> il </a:t>
-            </a:r>
-            <a:r>
-              <a:rPr lang="en-US" dirty="0" err="1"/>
-              <a:t>tasso</a:t>
-            </a:r>
-            <a:r>
-              <a:rPr lang="en-US" dirty="0"/>
-              <a:t> di </a:t>
-            </a:r>
-            <a:r>
-              <a:rPr lang="en-US" dirty="0" err="1"/>
-              <a:t>infrazione</a:t>
-            </a:r>
-            <a:r>
-              <a:rPr lang="en-US" dirty="0"/>
-              <a:t> medio in </a:t>
-            </a:r>
-            <a:r>
-              <a:rPr lang="en-US" dirty="0" err="1"/>
-              <a:t>percentuale</a:t>
-            </a:r>
-            <a:r>
-              <a:rPr lang="en-US" dirty="0"/>
-              <a:t> per Giorno e ora, </a:t>
-            </a:r>
-            <a:r>
-              <a:rPr lang="en-US" dirty="0" err="1"/>
-              <a:t>noi</a:t>
-            </a:r>
-            <a:r>
-              <a:rPr lang="en-US" dirty="0"/>
-              <a:t> </a:t>
-            </a:r>
-            <a:r>
-              <a:rPr lang="en-US" dirty="0" err="1"/>
-              <a:t>abbiamo</a:t>
-            </a:r>
-            <a:r>
-              <a:rPr lang="en-US" dirty="0"/>
-              <a:t> la Colonna </a:t>
-            </a:r>
-            <a:r>
-              <a:rPr lang="en-US" dirty="0" err="1"/>
-              <a:t>tasso</a:t>
-            </a:r>
-            <a:r>
-              <a:rPr lang="en-US" dirty="0"/>
-              <a:t> </a:t>
-            </a:r>
-            <a:r>
-              <a:rPr lang="en-US" dirty="0" err="1"/>
-              <a:t>percentuale</a:t>
-            </a:r>
-            <a:r>
-              <a:rPr lang="en-US" dirty="0"/>
-              <a:t> di </a:t>
-            </a:r>
-            <a:r>
-              <a:rPr lang="en-US" dirty="0" err="1"/>
-              <a:t>infrazione</a:t>
-            </a:r>
-            <a:r>
-              <a:rPr lang="en-US" dirty="0"/>
-              <a:t> </a:t>
-            </a:r>
-            <a:r>
-              <a:rPr lang="en-US" dirty="0" err="1"/>
-              <a:t>abbiamo</a:t>
-            </a:r>
-            <a:r>
-              <a:rPr lang="en-US" dirty="0"/>
-              <a:t> </a:t>
-            </a:r>
-            <a:r>
-              <a:rPr lang="en-US" dirty="0" err="1"/>
-              <a:t>raggruppato</a:t>
-            </a:r>
-            <a:r>
-              <a:rPr lang="en-US" dirty="0"/>
-              <a:t> per Giorno e ora e ha </a:t>
-            </a:r>
-            <a:r>
-              <a:rPr lang="en-US" dirty="0" err="1"/>
-              <a:t>fatto</a:t>
-            </a:r>
-            <a:r>
-              <a:rPr lang="en-US" dirty="0"/>
-              <a:t> la media (</a:t>
-            </a:r>
-            <a:r>
-              <a:rPr lang="en-US" dirty="0" err="1"/>
-              <a:t>quindi</a:t>
-            </a:r>
-            <a:r>
-              <a:rPr lang="en-US" dirty="0"/>
-              <a:t> </a:t>
-            </a:r>
-            <a:r>
-              <a:rPr lang="en-US" dirty="0" err="1"/>
-              <a:t>lunedi</a:t>
-            </a:r>
-            <a:r>
-              <a:rPr lang="en-US" dirty="0"/>
-              <a:t> a 00 </a:t>
-            </a:r>
-            <a:r>
-              <a:rPr lang="en-US" dirty="0" err="1"/>
-              <a:t>rappresenta</a:t>
-            </a:r>
-            <a:r>
-              <a:rPr lang="en-US" dirty="0"/>
-              <a:t> la media del </a:t>
-            </a:r>
-            <a:r>
-              <a:rPr lang="en-US" dirty="0" err="1"/>
-              <a:t>tasso</a:t>
-            </a:r>
-            <a:r>
-              <a:rPr lang="en-US" dirty="0"/>
-              <a:t> di </a:t>
-            </a:r>
-            <a:r>
-              <a:rPr lang="en-US" dirty="0" err="1"/>
-              <a:t>infrazione</a:t>
-            </a:r>
-            <a:r>
-              <a:rPr lang="en-US" dirty="0"/>
-              <a:t> </a:t>
-            </a:r>
-            <a:r>
-              <a:rPr lang="en-US" dirty="0" err="1"/>
-              <a:t>percentuale</a:t>
-            </a:r>
-            <a:r>
-              <a:rPr lang="en-US" dirty="0"/>
-              <a:t> di tutti I </a:t>
-            </a:r>
-            <a:r>
-              <a:rPr lang="en-US" dirty="0" err="1"/>
-              <a:t>lunedi</a:t>
-            </a:r>
-            <a:r>
-              <a:rPr lang="en-US" dirty="0"/>
-              <a:t> alle 00)</a:t>
-            </a:r>
-          </a:p>
-          <a:p>
-            <a:endParaRPr lang="en-US" dirty="0"/>
-          </a:p>
-          <a:p>
-            <a:r>
-              <a:rPr lang="en-US" dirty="0" err="1"/>
-              <a:t>Cambiamenti</a:t>
-            </a:r>
-            <a:r>
-              <a:rPr lang="en-US" dirty="0"/>
-              <a:t>:</a:t>
-            </a:r>
-          </a:p>
-          <a:p>
-            <a:r>
-              <a:rPr lang="en-US" dirty="0"/>
-              <a:t>il </a:t>
-            </a:r>
-            <a:r>
-              <a:rPr lang="en-US" dirty="0" err="1"/>
-              <a:t>calcolo</a:t>
-            </a:r>
-            <a:r>
-              <a:rPr lang="en-US" dirty="0"/>
-              <a:t> del </a:t>
-            </a:r>
-            <a:r>
-              <a:rPr lang="en-US" dirty="0" err="1"/>
-              <a:t>tasso</a:t>
-            </a:r>
-            <a:r>
-              <a:rPr lang="en-US" dirty="0"/>
-              <a:t> in </a:t>
-            </a:r>
-            <a:r>
-              <a:rPr lang="en-US" dirty="0" err="1"/>
-              <a:t>percentuale</a:t>
-            </a:r>
-            <a:r>
-              <a:rPr lang="en-US" dirty="0"/>
-              <a:t> </a:t>
-            </a:r>
-            <a:r>
-              <a:rPr lang="en-US" dirty="0" err="1"/>
-              <a:t>puo</a:t>
-            </a:r>
-            <a:r>
-              <a:rPr lang="en-US" dirty="0"/>
-              <a:t> </a:t>
-            </a:r>
-            <a:r>
-              <a:rPr lang="en-US" dirty="0" err="1"/>
-              <a:t>essere</a:t>
-            </a:r>
-            <a:r>
-              <a:rPr lang="en-US" dirty="0"/>
-              <a:t> </a:t>
-            </a:r>
-            <a:r>
-              <a:rPr lang="en-US" dirty="0" err="1"/>
-              <a:t>fatto</a:t>
-            </a:r>
-            <a:r>
-              <a:rPr lang="en-US" dirty="0"/>
-              <a:t> in modo </a:t>
-            </a:r>
-            <a:r>
-              <a:rPr lang="en-US" dirty="0" err="1"/>
-              <a:t>manuale</a:t>
-            </a:r>
-            <a:r>
-              <a:rPr lang="en-US" dirty="0"/>
-              <a:t> o </a:t>
-            </a:r>
-            <a:r>
-              <a:rPr lang="en-US" dirty="0" err="1"/>
-              <a:t>calcolando</a:t>
-            </a:r>
-            <a:r>
-              <a:rPr lang="en-US" dirty="0"/>
-              <a:t> il </a:t>
-            </a:r>
-            <a:r>
-              <a:rPr lang="en-US" dirty="0" err="1"/>
-              <a:t>tasso</a:t>
-            </a:r>
-            <a:r>
-              <a:rPr lang="en-US" dirty="0"/>
-              <a:t> degli </a:t>
-            </a:r>
-            <a:r>
-              <a:rPr lang="en-US" dirty="0" err="1"/>
-              <a:t>ultimi</a:t>
-            </a:r>
-            <a:r>
-              <a:rPr lang="en-US" dirty="0"/>
-              <a:t> 7 </a:t>
-            </a:r>
-            <a:r>
-              <a:rPr lang="en-US" dirty="0" err="1"/>
-              <a:t>giorni</a:t>
-            </a:r>
             <a:endParaRPr lang="en-US" dirty="0"/>
           </a:p>
         </p:txBody>
@@ -2450,367 +1992,58 @@
           <a:lstStyle/>
           <a:p>
             <a:r>
-              <a:rPr lang="en-US" dirty="0" err="1"/>
-              <a:t>Mostra</a:t>
-            </a:r>
-            <a:r>
-              <a:rPr lang="en-US" dirty="0"/>
-              <a:t> la </a:t>
-            </a:r>
-            <a:r>
-              <a:rPr lang="en-US" dirty="0" err="1"/>
-              <a:t>correlazione</a:t>
-            </a:r>
-            <a:r>
-              <a:rPr lang="en-US" dirty="0"/>
-              <a:t> </a:t>
-            </a:r>
-            <a:r>
-              <a:rPr lang="en-US" dirty="0" err="1"/>
-              <a:t>tra</a:t>
-            </a:r>
-            <a:r>
-              <a:rPr lang="en-US" dirty="0"/>
-              <a:t> volume di </a:t>
-            </a:r>
-            <a:r>
-              <a:rPr lang="en-US" dirty="0" err="1"/>
-              <a:t>traffico</a:t>
-            </a:r>
-            <a:r>
-              <a:rPr lang="en-US" dirty="0"/>
-              <a:t> (grandezza </a:t>
-            </a:r>
-            <a:r>
-              <a:rPr lang="en-US" dirty="0" err="1"/>
-              <a:t>pallino</a:t>
-            </a:r>
-            <a:r>
-              <a:rPr lang="en-US" dirty="0"/>
-              <a:t>), e </a:t>
-            </a:r>
-            <a:r>
-              <a:rPr lang="en-US" dirty="0" err="1"/>
-              <a:t>numero</a:t>
-            </a:r>
-            <a:r>
-              <a:rPr lang="en-US" dirty="0"/>
-              <a:t> di </a:t>
-            </a:r>
-            <a:r>
-              <a:rPr lang="en-US" dirty="0" err="1"/>
-              <a:t>infrazioni</a:t>
-            </a:r>
-            <a:r>
-              <a:rPr lang="en-US" dirty="0"/>
-              <a:t> (</a:t>
-            </a:r>
-            <a:r>
-              <a:rPr lang="en-US" dirty="0" err="1"/>
-              <a:t>colore</a:t>
-            </a:r>
-            <a:r>
-              <a:rPr lang="en-US" dirty="0"/>
-              <a:t>); Ci </a:t>
-            </a:r>
-            <a:r>
-              <a:rPr lang="en-US" dirty="0" err="1"/>
-              <a:t>siamo</a:t>
-            </a:r>
-            <a:r>
-              <a:rPr lang="en-US" dirty="0"/>
-              <a:t> </a:t>
-            </a:r>
-            <a:r>
-              <a:rPr lang="en-US" dirty="0" err="1"/>
-              <a:t>chiesti</a:t>
-            </a:r>
-            <a:r>
-              <a:rPr lang="en-US" dirty="0"/>
-              <a:t> se le </a:t>
-            </a:r>
-            <a:r>
-              <a:rPr lang="en-US" dirty="0" err="1"/>
-              <a:t>strade</a:t>
-            </a:r>
-            <a:r>
-              <a:rPr lang="en-US" dirty="0"/>
-              <a:t> piu </a:t>
-            </a:r>
-            <a:r>
-              <a:rPr lang="en-US" dirty="0" err="1"/>
-              <a:t>trafficate</a:t>
-            </a:r>
-            <a:r>
-              <a:rPr lang="en-US" dirty="0"/>
-              <a:t> </a:t>
-            </a:r>
-            <a:r>
-              <a:rPr lang="en-US" dirty="0" err="1"/>
-              <a:t>fossero</a:t>
-            </a:r>
-            <a:r>
-              <a:rPr lang="en-US" dirty="0"/>
-              <a:t> </a:t>
-            </a:r>
-            <a:r>
-              <a:rPr lang="en-US" dirty="0" err="1"/>
-              <a:t>anche</a:t>
-            </a:r>
-            <a:r>
-              <a:rPr lang="en-US" dirty="0"/>
-              <a:t> quelle dove </a:t>
-            </a:r>
-            <a:r>
-              <a:rPr lang="en-US" dirty="0" err="1"/>
-              <a:t>vengono</a:t>
-            </a:r>
-            <a:r>
-              <a:rPr lang="en-US" dirty="0"/>
-              <a:t> </a:t>
-            </a:r>
-            <a:r>
-              <a:rPr lang="en-US" dirty="0" err="1"/>
-              <a:t>effettuate</a:t>
-            </a:r>
-            <a:r>
-              <a:rPr lang="en-US" dirty="0"/>
-              <a:t> piu </a:t>
-            </a:r>
-            <a:r>
-              <a:rPr lang="en-US" dirty="0" err="1"/>
-              <a:t>infrazioni</a:t>
-            </a:r>
-            <a:r>
-              <a:rPr lang="en-US" dirty="0"/>
-              <a:t>.</a:t>
-            </a:r>
-          </a:p>
-          <a:p>
-            <a:endParaRPr lang="en-US" dirty="0"/>
-          </a:p>
-          <a:p>
-            <a:r>
-              <a:rPr lang="en-US" dirty="0" err="1"/>
-              <a:t>Creato</a:t>
-            </a:r>
-            <a:r>
-              <a:rPr lang="en-US" dirty="0"/>
-              <a:t> la Colonna </a:t>
-            </a:r>
-            <a:r>
-              <a:rPr lang="en-US" dirty="0" err="1"/>
-              <a:t>superamento</a:t>
-            </a:r>
-            <a:r>
-              <a:rPr lang="en-US" dirty="0"/>
-              <a:t> (</a:t>
-            </a:r>
-            <a:r>
-              <a:rPr lang="en-US" dirty="0" err="1"/>
-              <a:t>booleana</a:t>
-            </a:r>
-            <a:r>
-              <a:rPr lang="en-US" dirty="0"/>
-              <a:t>) se la </a:t>
-            </a:r>
-            <a:r>
-              <a:rPr lang="en-US" dirty="0" err="1"/>
-              <a:t>velocita</a:t>
-            </a:r>
-            <a:r>
-              <a:rPr lang="en-US" dirty="0"/>
-              <a:t> </a:t>
-            </a:r>
-            <a:r>
-              <a:rPr lang="en-US" dirty="0" err="1"/>
-              <a:t>è</a:t>
-            </a:r>
-            <a:r>
-              <a:rPr lang="en-US" dirty="0"/>
-              <a:t> Maggiore della zona </a:t>
-            </a:r>
-            <a:r>
-              <a:rPr lang="en-US" dirty="0" err="1"/>
-              <a:t>limite</a:t>
-            </a:r>
-            <a:r>
-              <a:rPr lang="en-US" dirty="0"/>
-              <a:t>, e poi </a:t>
-            </a:r>
-            <a:r>
-              <a:rPr lang="en-US" dirty="0" err="1"/>
-              <a:t>semplicemente</a:t>
-            </a:r>
-            <a:r>
-              <a:rPr lang="en-US" dirty="0"/>
-              <a:t> </a:t>
-            </a:r>
-            <a:r>
-              <a:rPr lang="en-US" dirty="0" err="1"/>
-              <a:t>raggruppiamo</a:t>
-            </a:r>
-            <a:r>
-              <a:rPr lang="en-US" dirty="0"/>
-              <a:t> per </a:t>
-            </a:r>
-            <a:r>
-              <a:rPr lang="en-US" dirty="0" err="1"/>
-              <a:t>lat</a:t>
-            </a:r>
-            <a:r>
-              <a:rPr lang="en-US" dirty="0"/>
-              <a:t> e </a:t>
-            </a:r>
-            <a:r>
-              <a:rPr lang="en-US" dirty="0" err="1"/>
-              <a:t>lon</a:t>
-            </a:r>
-            <a:r>
-              <a:rPr lang="en-US" dirty="0"/>
-              <a:t> (</a:t>
-            </a:r>
-            <a:r>
-              <a:rPr lang="en-US" dirty="0" err="1"/>
-              <a:t>quindi</a:t>
-            </a:r>
-            <a:r>
-              <a:rPr lang="en-US" dirty="0"/>
-              <a:t> per ogni radar) e </a:t>
-            </a:r>
-            <a:r>
-              <a:rPr lang="en-US" dirty="0" err="1"/>
-              <a:t>calcoliamo</a:t>
-            </a:r>
-            <a:r>
-              <a:rPr lang="en-US" dirty="0"/>
-              <a:t> per ogni radar il </a:t>
-            </a:r>
-            <a:r>
-              <a:rPr lang="en-US" dirty="0" err="1"/>
-              <a:t>numero</a:t>
-            </a:r>
-            <a:r>
-              <a:rPr lang="en-US" dirty="0"/>
-              <a:t> di </a:t>
-            </a:r>
-            <a:r>
-              <a:rPr lang="en-US" dirty="0" err="1"/>
-              <a:t>registrazioni</a:t>
-            </a:r>
-            <a:r>
-              <a:rPr lang="en-US" dirty="0"/>
-              <a:t> e il </a:t>
-            </a:r>
-            <a:r>
-              <a:rPr lang="en-US" dirty="0" err="1"/>
-              <a:t>numero</a:t>
-            </a:r>
-            <a:r>
-              <a:rPr lang="en-US" dirty="0"/>
-              <a:t> di </a:t>
-            </a:r>
-            <a:r>
-              <a:rPr lang="en-US" dirty="0" err="1"/>
-              <a:t>superamenti</a:t>
-            </a:r>
-            <a:endParaRPr lang="en-US" dirty="0"/>
-          </a:p>
-          <a:p>
-            <a:endParaRPr lang="en-US" dirty="0"/>
-          </a:p>
-          <a:p>
-            <a:r>
-              <a:rPr lang="en-US" dirty="0" err="1"/>
-              <a:t>Cambiamenti</a:t>
-            </a:r>
-            <a:r>
-              <a:rPr lang="en-US" dirty="0"/>
-              <a:t>:</a:t>
-            </a:r>
-          </a:p>
-          <a:p>
-            <a:r>
-              <a:rPr lang="en-US" dirty="0" err="1"/>
-              <a:t>implica</a:t>
-            </a:r>
-            <a:r>
-              <a:rPr lang="en-US" dirty="0"/>
-              <a:t> il </a:t>
-            </a:r>
-            <a:r>
-              <a:rPr lang="en-US" dirty="0" err="1"/>
-              <a:t>fatto</a:t>
-            </a:r>
-            <a:r>
-              <a:rPr lang="en-US" dirty="0"/>
-              <a:t> </a:t>
-            </a:r>
-            <a:r>
-              <a:rPr lang="en-US" dirty="0" err="1"/>
-              <a:t>che</a:t>
-            </a:r>
-            <a:r>
-              <a:rPr lang="en-US" dirty="0"/>
-              <a:t> </a:t>
-            </a:r>
-            <a:r>
-              <a:rPr lang="en-US" dirty="0" err="1"/>
-              <a:t>siano</a:t>
-            </a:r>
-            <a:r>
-              <a:rPr lang="en-US" dirty="0"/>
-              <a:t> </a:t>
-            </a:r>
-            <a:r>
-              <a:rPr lang="en-US" dirty="0" err="1"/>
-              <a:t>accesi</a:t>
-            </a:r>
-            <a:r>
-              <a:rPr lang="en-US" dirty="0"/>
-              <a:t> sempre (</a:t>
-            </a:r>
-            <a:r>
-              <a:rPr lang="en-US" dirty="0" err="1"/>
-              <a:t>verificare</a:t>
-            </a:r>
-            <a:r>
-              <a:rPr lang="en-US" dirty="0"/>
-              <a:t>)</a:t>
-            </a:r>
-          </a:p>
-          <a:p>
-            <a:r>
-              <a:rPr lang="en-US" dirty="0" err="1"/>
-              <a:t>cambiare</a:t>
-            </a:r>
-            <a:r>
-              <a:rPr lang="en-US" dirty="0"/>
-              <a:t> il </a:t>
-            </a:r>
-            <a:r>
-              <a:rPr lang="en-US" dirty="0" err="1"/>
-              <a:t>numero</a:t>
-            </a:r>
-            <a:r>
-              <a:rPr lang="en-US" dirty="0"/>
-              <a:t> di </a:t>
-            </a:r>
-            <a:r>
-              <a:rPr lang="en-US" dirty="0" err="1"/>
-              <a:t>infrazioni</a:t>
-            </a:r>
-            <a:r>
-              <a:rPr lang="en-US" dirty="0"/>
-              <a:t> con il TASSO DI INFRAZIONE in </a:t>
-            </a:r>
-            <a:r>
-              <a:rPr lang="en-US" dirty="0" err="1"/>
-              <a:t>percentuale</a:t>
-            </a:r>
-            <a:r>
-              <a:rPr lang="en-US" dirty="0"/>
-              <a:t>.</a:t>
+              <a:rPr lang="it-CH" b="1" dirty="0"/>
+              <a:t>Domanda di ricerca:</a:t>
+            </a:r>
+            <a:r>
+              <a:rPr lang="it-CH" dirty="0"/>
+              <a:t> Un maggior volume di traffico comporta un tasso più alto di infrazioni?</a:t>
+            </a:r>
+          </a:p>
+          <a:p>
+            <a:r>
+              <a:rPr lang="it-CH" b="1" dirty="0"/>
+              <a:t>Visualizzazione:</a:t>
+            </a:r>
+            <a:endParaRPr lang="it-CH" dirty="0"/>
+          </a:p>
+          <a:p>
+            <a:pPr lvl="1"/>
+            <a:r>
+              <a:rPr lang="it-CH" b="1" dirty="0"/>
+              <a:t>Dimensione:</a:t>
+            </a:r>
+            <a:r>
+              <a:rPr lang="it-CH" dirty="0"/>
+              <a:t> Volume di traffico medio.</a:t>
+            </a:r>
+          </a:p>
+          <a:p>
+            <a:pPr lvl="1"/>
+            <a:r>
+              <a:rPr lang="it-CH" b="1" dirty="0"/>
+              <a:t>Colore:</a:t>
+            </a:r>
+            <a:r>
+              <a:rPr lang="it-CH" dirty="0"/>
+              <a:t> Tasso di infrazione (%).</a:t>
+            </a:r>
+          </a:p>
+          <a:p>
+            <a:r>
+              <a:rPr lang="it-CH" b="1" dirty="0"/>
+              <a:t>Data Processing:</a:t>
+            </a:r>
+            <a:r>
+              <a:rPr lang="it-CH" dirty="0"/>
+              <a:t> * Creazione di una colonna booleana per identificare i superamenti del limite.</a:t>
+            </a:r>
+          </a:p>
+          <a:p>
+            <a:pPr lvl="1"/>
+            <a:r>
+              <a:rPr lang="it-CH" dirty="0"/>
+              <a:t>Aggregazione dei dati per postazione (latitudine/longitudine) per calcolare transiti totali e infrazioni effettive.</a:t>
             </a:r>
           </a:p>
         </p:txBody>
@@ -4646,7 +3879,7 @@
               <a:buNone/>
             </a:pPr>
             <a:r>
-              <a:rPr lang="en-US" sz="2200" b="1" dirty="0">
+              <a:rPr lang="en-US" sz="2200" b="1" dirty="0" err="1">
                 <a:solidFill>
                   <a:srgbClr val="00B4D8"/>
                 </a:solidFill>
@@ -4654,7 +3887,7 @@
                 <a:ea typeface="Calibri" pitchFamily="34" charset="-122"/>
                 <a:cs typeface="Calibri" pitchFamily="34" charset="-120"/>
               </a:rPr>
-              <a:t>Conclusioni &amp; Prossimi Passi</a:t>
+              <a:t>Conclusioni</a:t>
             </a:r>
             <a:endParaRPr lang="en-US" sz="2200" dirty="0"/>
           </a:p>
@@ -5012,52 +4245,6 @@
               <a:ea typeface="Calibri" pitchFamily="34" charset="-122"/>
               <a:cs typeface="Calibri" pitchFamily="34" charset="-120"/>
             </a:endParaRPr>
-          </a:p>
-          <a:p>
-            <a:r>
-              <a:rPr lang="en-US" sz="2400" i="1" dirty="0" err="1">
-                <a:solidFill>
-                  <a:srgbClr val="B0BEC5"/>
-                </a:solidFill>
-                <a:latin typeface="Calibri" pitchFamily="34" charset="0"/>
-                <a:ea typeface="Calibri" pitchFamily="34" charset="-122"/>
-                <a:cs typeface="Calibri" pitchFamily="34" charset="-120"/>
-              </a:rPr>
-              <a:t>Prossimo</a:t>
-            </a:r>
-            <a:r>
-              <a:rPr lang="en-US" sz="2400" i="1" dirty="0">
-                <a:solidFill>
-                  <a:srgbClr val="B0BEC5"/>
-                </a:solidFill>
-                <a:latin typeface="Calibri" pitchFamily="34" charset="0"/>
-                <a:ea typeface="Calibri" pitchFamily="34" charset="-122"/>
-                <a:cs typeface="Calibri" pitchFamily="34" charset="-120"/>
-              </a:rPr>
-              <a:t> step: </a:t>
-            </a:r>
-            <a:r>
-              <a:rPr lang="en-US" sz="2400" i="1" dirty="0" err="1">
-                <a:solidFill>
-                  <a:srgbClr val="B0BEC5"/>
-                </a:solidFill>
-                <a:latin typeface="Calibri" pitchFamily="34" charset="0"/>
-                <a:ea typeface="Calibri" pitchFamily="34" charset="-122"/>
-                <a:cs typeface="Calibri" pitchFamily="34" charset="-120"/>
-              </a:rPr>
-              <a:t>presentazione</a:t>
-            </a:r>
-            <a:r>
-              <a:rPr lang="en-US" sz="2400" i="1" dirty="0">
-                <a:solidFill>
-                  <a:srgbClr val="B0BEC5"/>
-                </a:solidFill>
-                <a:latin typeface="Calibri" pitchFamily="34" charset="0"/>
-                <a:ea typeface="Calibri" pitchFamily="34" charset="-122"/>
-                <a:cs typeface="Calibri" pitchFamily="34" charset="-120"/>
-              </a:rPr>
-              <a:t> finale.</a:t>
-            </a:r>
           </a:p>
         </p:txBody>
       </p:sp>
@@ -6260,7 +5447,7 @@
 </file>
 
 <file path=ppt/slides/slide3.xml><?xml version="1.0" encoding="utf-8"?>
-<p:sld xmlns:a="http://schemas.openxmlformats.org/drawingml/2006/main" xmlns:r="http://schemas.openxmlformats.org/officeDocument/2006/relationships" xmlns:p="http://schemas.openxmlformats.org/presentationml/2006/main" show="0">
+<p:sld xmlns:a="http://schemas.openxmlformats.org/drawingml/2006/main" xmlns:r="http://schemas.openxmlformats.org/officeDocument/2006/relationships" xmlns:p="http://schemas.openxmlformats.org/presentationml/2006/main">
   <p:cSld name="Slide 5">
     <p:bg>
       <p:bgPr>
@@ -7011,7 +6198,7 @@
 </file>
 
 <file path=ppt/slides/slide5.xml><?xml version="1.0" encoding="utf-8"?>
-<p:sld xmlns:a="http://schemas.openxmlformats.org/drawingml/2006/main" xmlns:r="http://schemas.openxmlformats.org/officeDocument/2006/relationships" xmlns:p="http://schemas.openxmlformats.org/presentationml/2006/main" show="0">
+<p:sld xmlns:a="http://schemas.openxmlformats.org/drawingml/2006/main" xmlns:r="http://schemas.openxmlformats.org/officeDocument/2006/relationships" xmlns:p="http://schemas.openxmlformats.org/presentationml/2006/main">
   <p:cSld name="Slide 6">
     <p:bg>
       <p:bgPr>
@@ -7652,10 +6839,10 @@
       </p:sp>
       <p:pic>
         <p:nvPicPr>
-          <p:cNvPr id="8" name="Immagine 7">
+          <p:cNvPr id="15" name="Immagine 14">
             <a:extLst>
               <a:ext uri="{FF2B5EF4-FFF2-40B4-BE49-F238E27FC236}">
-                <a16:creationId xmlns:a16="http://schemas.microsoft.com/office/drawing/2014/main" id="{52666C92-5D98-E046-EBED-A16FFCCE3489}"/>
+                <a16:creationId xmlns:a16="http://schemas.microsoft.com/office/drawing/2014/main" id="{5762F2DA-EE19-5F78-49A8-DA3EFAB02088}"/>
               </a:ext>
             </a:extLst>
           </p:cNvPr>
@@ -7672,8 +6859,8 @@
         </p:blipFill>
         <p:spPr>
           <a:xfrm>
-            <a:off x="365759" y="1216152"/>
-            <a:ext cx="8503919" cy="3700022"/>
+            <a:off x="365760" y="1234440"/>
+            <a:ext cx="8538994" cy="3611880"/>
           </a:xfrm>
           <a:prstGeom prst="rect">
             <a:avLst/>
@@ -8105,10 +7292,10 @@
       </p:sp>
       <p:pic>
         <p:nvPicPr>
-          <p:cNvPr id="12" name="Picture 11">
+          <p:cNvPr id="8" name="Immagine 7">
             <a:extLst>
               <a:ext uri="{FF2B5EF4-FFF2-40B4-BE49-F238E27FC236}">
-                <a16:creationId xmlns:a16="http://schemas.microsoft.com/office/drawing/2014/main" id="{75A0428F-07FB-377E-BE60-D38973DC1DF0}"/>
+                <a16:creationId xmlns:a16="http://schemas.microsoft.com/office/drawing/2014/main" id="{53C93D34-601C-CDD8-C82D-950B1F8474E7}"/>
               </a:ext>
             </a:extLst>
           </p:cNvPr>
@@ -8125,8 +7312,8 @@
         </p:blipFill>
         <p:spPr>
           <a:xfrm>
-            <a:off x="377918" y="1447800"/>
-            <a:ext cx="8479604" cy="3185160"/>
+            <a:off x="365760" y="1234440"/>
+            <a:ext cx="8538994" cy="3611880"/>
           </a:xfrm>
           <a:prstGeom prst="rect">
             <a:avLst/>
@@ -8680,7 +7867,7 @@
 </file>
 
 <file path=ppt/slides/slide9.xml><?xml version="1.0" encoding="utf-8"?>
-<p:sld xmlns:a="http://schemas.openxmlformats.org/drawingml/2006/main" xmlns:r="http://schemas.openxmlformats.org/officeDocument/2006/relationships" xmlns:p="http://schemas.openxmlformats.org/presentationml/2006/main">
+<p:sld xmlns:a="http://schemas.openxmlformats.org/drawingml/2006/main" xmlns:r="http://schemas.openxmlformats.org/officeDocument/2006/relationships" xmlns:p="http://schemas.openxmlformats.org/presentationml/2006/main" show="0">
   <p:cSld name="Slide 8">
     <p:bg>
       <p:bgPr>

--- a/speed_monitoring.pptx
+++ b/speed_monitoring.pptx
@@ -5,7 +5,7 @@
     <p:sldMasterId id="2147483648" r:id="rId1"/>
   </p:sldMasterIdLst>
   <p:notesMasterIdLst>
-    <p:notesMasterId r:id="rId12"/>
+    <p:notesMasterId r:id="rId13"/>
   </p:notesMasterIdLst>
   <p:sldIdLst>
     <p:sldId id="256" r:id="rId2"/>
@@ -14,10 +14,11 @@
     <p:sldId id="265" r:id="rId5"/>
     <p:sldId id="261" r:id="rId6"/>
     <p:sldId id="268" r:id="rId7"/>
-    <p:sldId id="266" r:id="rId8"/>
-    <p:sldId id="267" r:id="rId9"/>
-    <p:sldId id="263" r:id="rId10"/>
-    <p:sldId id="264" r:id="rId11"/>
+    <p:sldId id="269" r:id="rId8"/>
+    <p:sldId id="266" r:id="rId9"/>
+    <p:sldId id="267" r:id="rId10"/>
+    <p:sldId id="263" r:id="rId11"/>
+    <p:sldId id="264" r:id="rId12"/>
   </p:sldIdLst>
   <p:sldSz cx="9144000" cy="5143500" type="screen16x9"/>
   <p:notesSz cx="5143500" cy="9144000"/>
@@ -374,6 +375,139 @@
           <a:bodyPr/>
           <a:lstStyle/>
           <a:p>
+            <a:r>
+              <a:rPr lang="en-US" dirty="0" err="1"/>
+              <a:t>Guardare</a:t>
+            </a:r>
+            <a:r>
+              <a:rPr lang="en-US" dirty="0"/>
+              <a:t> heatmap: </a:t>
+            </a:r>
+            <a:r>
+              <a:rPr lang="en-US" dirty="0" err="1"/>
+              <a:t>strano</a:t>
+            </a:r>
+            <a:r>
+              <a:rPr lang="en-US" dirty="0"/>
+              <a:t> </a:t>
+            </a:r>
+            <a:r>
+              <a:rPr lang="en-US" dirty="0" err="1"/>
+              <a:t>che</a:t>
+            </a:r>
+            <a:r>
+              <a:rPr lang="en-US" dirty="0"/>
+              <a:t> </a:t>
+            </a:r>
+            <a:r>
+              <a:rPr lang="en-US" dirty="0" err="1"/>
+              <a:t>c'è</a:t>
+            </a:r>
+            <a:r>
+              <a:rPr lang="en-US" dirty="0"/>
+              <a:t> </a:t>
+            </a:r>
+            <a:r>
+              <a:rPr lang="en-US" dirty="0" err="1"/>
+              <a:t>più</a:t>
+            </a:r>
+            <a:r>
+              <a:rPr lang="en-US" dirty="0"/>
+              <a:t> </a:t>
+            </a:r>
+            <a:r>
+              <a:rPr lang="en-US" dirty="0" err="1"/>
+              <a:t>traffico</a:t>
+            </a:r>
+            <a:r>
+              <a:rPr lang="en-US" dirty="0"/>
+              <a:t> alle 15 rispetto alle 17</a:t>
+            </a:r>
+            <a:br>
+              <a:rPr lang="en-US" dirty="0"/>
+            </a:br>
+            <a:br>
+              <a:rPr lang="en-US" dirty="0"/>
+            </a:br>
+            <a:r>
+              <a:rPr lang="en-US" dirty="0"/>
+              <a:t>Esempio Di notte non </a:t>
+            </a:r>
+            <a:r>
+              <a:rPr lang="en-US" dirty="0" err="1"/>
+              <a:t>c'è</a:t>
+            </a:r>
+            <a:r>
+              <a:rPr lang="en-US" dirty="0"/>
+              <a:t> il radar </a:t>
+            </a:r>
+            <a:r>
+              <a:rPr lang="en-US" dirty="0" err="1"/>
+              <a:t>nella</a:t>
+            </a:r>
+            <a:r>
+              <a:rPr lang="en-US" dirty="0"/>
+              <a:t> </a:t>
+            </a:r>
+            <a:r>
+              <a:rPr lang="en-US" dirty="0" err="1"/>
+              <a:t>stradina</a:t>
+            </a:r>
+            <a:r>
+              <a:rPr lang="en-US" dirty="0"/>
+              <a:t> di </a:t>
+            </a:r>
+            <a:r>
+              <a:rPr lang="en-US" dirty="0" err="1"/>
+              <a:t>paese</a:t>
+            </a:r>
+            <a:r>
+              <a:rPr lang="en-US" dirty="0"/>
+              <a:t> ma </a:t>
+            </a:r>
+            <a:r>
+              <a:rPr lang="en-US" dirty="0" err="1"/>
+              <a:t>nelle</a:t>
+            </a:r>
+            <a:r>
+              <a:rPr lang="en-US" dirty="0"/>
+              <a:t> </a:t>
+            </a:r>
+            <a:r>
+              <a:rPr lang="en-US" dirty="0" err="1"/>
+              <a:t>strade</a:t>
+            </a:r>
+            <a:r>
+              <a:rPr lang="en-US" dirty="0"/>
+              <a:t> </a:t>
+            </a:r>
+            <a:r>
+              <a:rPr lang="en-US" dirty="0" err="1"/>
+              <a:t>veloci</a:t>
+            </a:r>
+            <a:r>
+              <a:rPr lang="en-US" dirty="0"/>
+              <a:t>?</a:t>
+            </a:r>
+            <a:br>
+              <a:rPr lang="en-US" dirty="0"/>
+            </a:br>
+            <a:r>
+              <a:rPr lang="en-US" dirty="0"/>
+              <a:t>Vedi se </a:t>
+            </a:r>
+            <a:r>
+              <a:rPr lang="en-US" dirty="0" err="1"/>
+              <a:t>è</a:t>
+            </a:r>
+            <a:r>
+              <a:rPr lang="en-US" dirty="0"/>
+              <a:t> </a:t>
+            </a:r>
+            <a:r>
+              <a:rPr lang="en-US" dirty="0" err="1"/>
+              <a:t>vero</a:t>
+            </a:r>
             <a:endParaRPr lang="en-US" dirty="0"/>
           </a:p>
         </p:txBody>
@@ -396,6 +530,90 @@
             <a:fld id="{F7021451-1387-4CA6-816F-3879F97B5CBC}" type="slidenum">
               <a:rPr lang="en-US"/>
               <a:t>10</a:t>
+            </a:fld>
+            <a:endParaRPr lang="en-US"/>
+          </a:p>
+        </p:txBody>
+      </p:sp>
+    </p:spTree>
+    <p:extLst>
+      <p:ext uri="{BB962C8B-B14F-4D97-AF65-F5344CB8AC3E}">
+        <p14:creationId xmlns:p14="http://schemas.microsoft.com/office/powerpoint/2010/main" val="1024086991"/>
+      </p:ext>
+    </p:extLst>
+  </p:cSld>
+  <p:clrMapOvr>
+    <a:masterClrMapping/>
+  </p:clrMapOvr>
+</p:notes>
+</file>
+
+<file path=ppt/notesSlides/notesSlide11.xml><?xml version="1.0" encoding="utf-8"?>
+<p:notes xmlns:a="http://schemas.openxmlformats.org/drawingml/2006/main" xmlns:r="http://schemas.openxmlformats.org/officeDocument/2006/relationships" xmlns:p="http://schemas.openxmlformats.org/presentationml/2006/main">
+  <p:cSld>
+    <p:spTree>
+      <p:nvGrpSpPr>
+        <p:cNvPr id="1" name=""/>
+        <p:cNvGrpSpPr/>
+        <p:nvPr/>
+      </p:nvGrpSpPr>
+      <p:grpSpPr>
+        <a:xfrm>
+          <a:off x="0" y="0"/>
+          <a:ext cx="0" cy="0"/>
+          <a:chOff x="0" y="0"/>
+          <a:chExt cx="0" cy="0"/>
+        </a:xfrm>
+      </p:grpSpPr>
+      <p:sp>
+        <p:nvSpPr>
+          <p:cNvPr id="2" name="Slide Image Placeholder 1"/>
+          <p:cNvSpPr>
+            <a:spLocks noGrp="1" noRot="1" noChangeAspect="1"/>
+          </p:cNvSpPr>
+          <p:nvPr>
+            <p:ph type="sldImg"/>
+          </p:nvPr>
+        </p:nvSpPr>
+        <p:spPr/>
+      </p:sp>
+      <p:sp>
+        <p:nvSpPr>
+          <p:cNvPr id="3" name="Notes Placeholder 2"/>
+          <p:cNvSpPr>
+            <a:spLocks noGrp="1"/>
+          </p:cNvSpPr>
+          <p:nvPr>
+            <p:ph type="body" idx="1"/>
+          </p:nvPr>
+        </p:nvSpPr>
+        <p:spPr/>
+        <p:txBody>
+          <a:bodyPr/>
+          <a:lstStyle/>
+          <a:p>
+            <a:endParaRPr lang="en-US" dirty="0"/>
+          </a:p>
+        </p:txBody>
+      </p:sp>
+      <p:sp>
+        <p:nvSpPr>
+          <p:cNvPr id="4" name="Slide Number Placeholder 3"/>
+          <p:cNvSpPr>
+            <a:spLocks noGrp="1"/>
+          </p:cNvSpPr>
+          <p:nvPr>
+            <p:ph type="sldNum" sz="quarter" idx="10"/>
+          </p:nvPr>
+        </p:nvSpPr>
+        <p:spPr/>
+        <p:txBody>
+          <a:bodyPr/>
+          <a:lstStyle/>
+          <a:p>
+            <a:fld id="{F7021451-1387-4CA6-816F-3879F97B5CBC}" type="slidenum">
+              <a:rPr lang="en-US"/>
+              <a:t>11</a:t>
             </a:fld>
             <a:endParaRPr lang="en-US"/>
           </a:p>
@@ -1724,6 +1942,62 @@
             </a:r>
             <a:r>
               <a:rPr lang="en-US" dirty="0"/>
+              <a:t> non </a:t>
+            </a:r>
+            <a:r>
+              <a:rPr lang="en-US" dirty="0" err="1"/>
+              <a:t>rappresenta</a:t>
+            </a:r>
+            <a:r>
+              <a:rPr lang="en-US" dirty="0"/>
+              <a:t> il </a:t>
+            </a:r>
+            <a:r>
+              <a:rPr lang="en-US" dirty="0" err="1"/>
+              <a:t>numero</a:t>
+            </a:r>
+            <a:r>
+              <a:rPr lang="en-US" dirty="0"/>
+              <a:t> </a:t>
+            </a:r>
+            <a:r>
+              <a:rPr lang="en-US" dirty="0" err="1"/>
+              <a:t>effettivo</a:t>
+            </a:r>
+            <a:r>
+              <a:rPr lang="en-US" dirty="0"/>
+              <a:t> di auto ma solo le </a:t>
+            </a:r>
+            <a:r>
+              <a:rPr lang="en-US" dirty="0" err="1"/>
+              <a:t>misurazioni</a:t>
+            </a:r>
+            <a:r>
+              <a:rPr lang="en-US" dirty="0"/>
+              <a:t> </a:t>
+            </a:r>
+            <a:r>
+              <a:rPr lang="en-US" dirty="0" err="1"/>
+              <a:t>quindi</a:t>
+            </a:r>
+            <a:r>
+              <a:rPr lang="en-US" dirty="0"/>
+              <a:t> </a:t>
+            </a:r>
+            <a:r>
+              <a:rPr lang="en-US" dirty="0" err="1"/>
+              <a:t>significa</a:t>
+            </a:r>
+            <a:r>
+              <a:rPr lang="en-US" dirty="0"/>
+              <a:t> ”</a:t>
+            </a:r>
+            <a:r>
+              <a:rPr lang="en-US" dirty="0" err="1"/>
+              <a:t>quando</a:t>
+            </a:r>
+            <a:r>
+              <a:rPr lang="en-US" dirty="0"/>
               <a:t> ci </a:t>
             </a:r>
             <a:r>
@@ -1748,39 +2022,7 @@
             </a:r>
             <a:r>
               <a:rPr lang="en-US" dirty="0"/>
-              <a:t> in </a:t>
-            </a:r>
-            <a:r>
-              <a:rPr lang="en-US" dirty="0" err="1"/>
-              <a:t>strade</a:t>
-            </a:r>
-            <a:r>
-              <a:rPr lang="en-US" dirty="0"/>
-              <a:t> </a:t>
-            </a:r>
-            <a:r>
-              <a:rPr lang="en-US" dirty="0" err="1"/>
-              <a:t>cantonali</a:t>
-            </a:r>
-            <a:r>
-              <a:rPr lang="en-US" dirty="0"/>
-              <a:t> </a:t>
-            </a:r>
-            <a:r>
-              <a:rPr lang="en-US" dirty="0" err="1"/>
-              <a:t>ecc</a:t>
-            </a:r>
-            <a:r>
-              <a:rPr lang="en-US" dirty="0"/>
-              <a:t>. e non solo in </a:t>
-            </a:r>
-            <a:r>
-              <a:rPr lang="en-US" dirty="0" err="1"/>
-              <a:t>stradine</a:t>
-            </a:r>
-            <a:r>
-              <a:rPr lang="en-US" dirty="0"/>
-              <a:t> lente (30kmh)</a:t>
+              <a:t>”</a:t>
             </a:r>
           </a:p>
         </p:txBody>
@@ -1937,6 +2179,235 @@
         <p:cNvPr id="1" name="">
           <a:extLst>
             <a:ext uri="{FF2B5EF4-FFF2-40B4-BE49-F238E27FC236}">
+              <a16:creationId xmlns:a16="http://schemas.microsoft.com/office/drawing/2014/main" id="{77B3D618-3A3E-E7CA-57C8-5D88E0916BF5}"/>
+            </a:ext>
+          </a:extLst>
+        </p:cNvPr>
+        <p:cNvGrpSpPr/>
+        <p:nvPr/>
+      </p:nvGrpSpPr>
+      <p:grpSpPr>
+        <a:xfrm>
+          <a:off x="0" y="0"/>
+          <a:ext cx="0" cy="0"/>
+          <a:chOff x="0" y="0"/>
+          <a:chExt cx="0" cy="0"/>
+        </a:xfrm>
+      </p:grpSpPr>
+      <p:sp>
+        <p:nvSpPr>
+          <p:cNvPr id="2" name="Slide Image Placeholder 1">
+            <a:extLst>
+              <a:ext uri="{FF2B5EF4-FFF2-40B4-BE49-F238E27FC236}">
+                <a16:creationId xmlns:a16="http://schemas.microsoft.com/office/drawing/2014/main" id="{BAFC2154-C247-753E-75D9-E76062F321D4}"/>
+              </a:ext>
+            </a:extLst>
+          </p:cNvPr>
+          <p:cNvSpPr>
+            <a:spLocks noGrp="1" noRot="1" noChangeAspect="1"/>
+          </p:cNvSpPr>
+          <p:nvPr>
+            <p:ph type="sldImg"/>
+          </p:nvPr>
+        </p:nvSpPr>
+        <p:spPr/>
+      </p:sp>
+      <p:sp>
+        <p:nvSpPr>
+          <p:cNvPr id="3" name="Notes Placeholder 2">
+            <a:extLst>
+              <a:ext uri="{FF2B5EF4-FFF2-40B4-BE49-F238E27FC236}">
+                <a16:creationId xmlns:a16="http://schemas.microsoft.com/office/drawing/2014/main" id="{1D798DA0-4188-BB68-C0B3-25528370A28A}"/>
+              </a:ext>
+            </a:extLst>
+          </p:cNvPr>
+          <p:cNvSpPr>
+            <a:spLocks noGrp="1"/>
+          </p:cNvSpPr>
+          <p:nvPr>
+            <p:ph type="body" idx="1"/>
+          </p:nvPr>
+        </p:nvSpPr>
+        <p:spPr/>
+        <p:txBody>
+          <a:bodyPr/>
+          <a:lstStyle/>
+          <a:p>
+            <a:r>
+              <a:rPr lang="en-US" dirty="0" err="1"/>
+              <a:t>Sembra</a:t>
+            </a:r>
+            <a:r>
+              <a:rPr lang="en-US" dirty="0"/>
+              <a:t> </a:t>
+            </a:r>
+            <a:r>
+              <a:rPr lang="en-US" dirty="0" err="1"/>
+              <a:t>strano</a:t>
+            </a:r>
+            <a:r>
+              <a:rPr lang="en-US" dirty="0"/>
+              <a:t> </a:t>
+            </a:r>
+            <a:r>
+              <a:rPr lang="en-US" dirty="0" err="1"/>
+              <a:t>che</a:t>
+            </a:r>
+            <a:r>
+              <a:rPr lang="en-US" dirty="0"/>
+              <a:t> </a:t>
+            </a:r>
+            <a:r>
+              <a:rPr lang="en-US" dirty="0" err="1"/>
+              <a:t>c'è</a:t>
+            </a:r>
+            <a:r>
+              <a:rPr lang="en-US" dirty="0"/>
+              <a:t> </a:t>
+            </a:r>
+            <a:r>
+              <a:rPr lang="en-US" dirty="0" err="1"/>
+              <a:t>più</a:t>
+            </a:r>
+            <a:r>
+              <a:rPr lang="en-US" dirty="0"/>
+              <a:t> </a:t>
+            </a:r>
+            <a:r>
+              <a:rPr lang="en-US" dirty="0" err="1"/>
+              <a:t>traffico</a:t>
+            </a:r>
+            <a:r>
+              <a:rPr lang="en-US" dirty="0"/>
+              <a:t> alle 15 rispetto alle 17</a:t>
+            </a:r>
+          </a:p>
+          <a:p>
+            <a:r>
+              <a:rPr lang="en-US" dirty="0" err="1"/>
+              <a:t>Semplicemente</a:t>
+            </a:r>
+            <a:r>
+              <a:rPr lang="en-US" dirty="0"/>
+              <a:t> </a:t>
+            </a:r>
+            <a:r>
+              <a:rPr lang="en-US" dirty="0" err="1"/>
+              <a:t>perché</a:t>
+            </a:r>
+            <a:r>
+              <a:rPr lang="en-US" dirty="0"/>
+              <a:t> ci </a:t>
+            </a:r>
+            <a:r>
+              <a:rPr lang="en-US" dirty="0" err="1"/>
+              <a:t>sono</a:t>
+            </a:r>
+            <a:r>
+              <a:rPr lang="en-US" dirty="0"/>
+              <a:t> </a:t>
+            </a:r>
+            <a:r>
+              <a:rPr lang="en-US" dirty="0" err="1"/>
+              <a:t>più</a:t>
+            </a:r>
+            <a:r>
+              <a:rPr lang="en-US" dirty="0"/>
+              <a:t> </a:t>
+            </a:r>
+            <a:r>
+              <a:rPr lang="en-US" dirty="0" err="1"/>
+              <a:t>controlli</a:t>
+            </a:r>
+            <a:r>
+              <a:rPr lang="en-US" dirty="0"/>
+              <a:t> in </a:t>
+            </a:r>
+            <a:r>
+              <a:rPr lang="en-US" dirty="0" err="1"/>
+              <a:t>strade</a:t>
+            </a:r>
+            <a:r>
+              <a:rPr lang="en-US" dirty="0"/>
+              <a:t> </a:t>
+            </a:r>
+            <a:r>
+              <a:rPr lang="en-US" dirty="0" err="1"/>
+              <a:t>cantonali</a:t>
+            </a:r>
+            <a:r>
+              <a:rPr lang="en-US" dirty="0"/>
+              <a:t> </a:t>
+            </a:r>
+            <a:r>
+              <a:rPr lang="en-US" dirty="0" err="1"/>
+              <a:t>ecc</a:t>
+            </a:r>
+            <a:r>
+              <a:rPr lang="en-US" dirty="0"/>
+              <a:t>. e non solo in </a:t>
+            </a:r>
+            <a:r>
+              <a:rPr lang="en-US" dirty="0" err="1"/>
+              <a:t>stradine</a:t>
+            </a:r>
+            <a:r>
+              <a:rPr lang="en-US" dirty="0"/>
+              <a:t> lente (30kmh)</a:t>
+            </a:r>
+          </a:p>
+        </p:txBody>
+      </p:sp>
+      <p:sp>
+        <p:nvSpPr>
+          <p:cNvPr id="4" name="Slide Number Placeholder 3">
+            <a:extLst>
+              <a:ext uri="{FF2B5EF4-FFF2-40B4-BE49-F238E27FC236}">
+                <a16:creationId xmlns:a16="http://schemas.microsoft.com/office/drawing/2014/main" id="{CE65B9D9-7B2C-D304-322D-8F6C92505ED1}"/>
+              </a:ext>
+            </a:extLst>
+          </p:cNvPr>
+          <p:cNvSpPr>
+            <a:spLocks noGrp="1"/>
+          </p:cNvSpPr>
+          <p:nvPr>
+            <p:ph type="sldNum" sz="quarter" idx="10"/>
+          </p:nvPr>
+        </p:nvSpPr>
+        <p:spPr/>
+        <p:txBody>
+          <a:bodyPr/>
+          <a:lstStyle/>
+          <a:p>
+            <a:fld id="{F7021451-1387-4CA6-816F-3879F97B5CBC}" type="slidenum">
+              <a:rPr lang="en-US"/>
+              <a:t>7</a:t>
+            </a:fld>
+            <a:endParaRPr lang="en-US"/>
+          </a:p>
+        </p:txBody>
+      </p:sp>
+    </p:spTree>
+    <p:extLst>
+      <p:ext uri="{BB962C8B-B14F-4D97-AF65-F5344CB8AC3E}">
+        <p14:creationId xmlns:p14="http://schemas.microsoft.com/office/powerpoint/2010/main" val="2911309874"/>
+      </p:ext>
+    </p:extLst>
+  </p:cSld>
+  <p:clrMapOvr>
+    <a:masterClrMapping/>
+  </p:clrMapOvr>
+</p:notes>
+</file>
+
+<file path=ppt/notesSlides/notesSlide8.xml><?xml version="1.0" encoding="utf-8"?>
+<p:notes xmlns:a="http://schemas.openxmlformats.org/drawingml/2006/main" xmlns:r="http://schemas.openxmlformats.org/officeDocument/2006/relationships" xmlns:p="http://schemas.openxmlformats.org/presentationml/2006/main">
+  <p:cSld>
+    <p:spTree>
+      <p:nvGrpSpPr>
+        <p:cNvPr id="1" name="">
+          <a:extLst>
+            <a:ext uri="{FF2B5EF4-FFF2-40B4-BE49-F238E27FC236}">
               <a16:creationId xmlns:a16="http://schemas.microsoft.com/office/drawing/2014/main" id="{5647EDB8-D8B2-21EF-B2E5-6E13FE4F8040}"/>
             </a:ext>
           </a:extLst>
@@ -2071,7 +2542,7 @@
           <a:p>
             <a:fld id="{F7021451-1387-4CA6-816F-3879F97B5CBC}" type="slidenum">
               <a:rPr lang="en-US"/>
-              <a:t>7</a:t>
+              <a:t>8</a:t>
             </a:fld>
             <a:endParaRPr lang="en-US"/>
           </a:p>
@@ -2090,7 +2561,7 @@
 </p:notes>
 </file>
 
-<file path=ppt/notesSlides/notesSlide8.xml><?xml version="1.0" encoding="utf-8"?>
+<file path=ppt/notesSlides/notesSlide9.xml><?xml version="1.0" encoding="utf-8"?>
 <p:notes xmlns:a="http://schemas.openxmlformats.org/drawingml/2006/main" xmlns:r="http://schemas.openxmlformats.org/officeDocument/2006/relationships" xmlns:p="http://schemas.openxmlformats.org/presentationml/2006/main">
   <p:cSld>
     <p:spTree>
@@ -2561,7 +3032,7 @@
           <a:p>
             <a:fld id="{F7021451-1387-4CA6-816F-3879F97B5CBC}" type="slidenum">
               <a:rPr lang="en-US"/>
-              <a:t>8</a:t>
+              <a:t>9</a:t>
             </a:fld>
             <a:endParaRPr lang="en-US"/>
           </a:p>
@@ -2571,223 +3042,6 @@
     <p:extLst>
       <p:ext uri="{BB962C8B-B14F-4D97-AF65-F5344CB8AC3E}">
         <p14:creationId xmlns:p14="http://schemas.microsoft.com/office/powerpoint/2010/main" val="3084976356"/>
-      </p:ext>
-    </p:extLst>
-  </p:cSld>
-  <p:clrMapOvr>
-    <a:masterClrMapping/>
-  </p:clrMapOvr>
-</p:notes>
-</file>
-
-<file path=ppt/notesSlides/notesSlide9.xml><?xml version="1.0" encoding="utf-8"?>
-<p:notes xmlns:a="http://schemas.openxmlformats.org/drawingml/2006/main" xmlns:r="http://schemas.openxmlformats.org/officeDocument/2006/relationships" xmlns:p="http://schemas.openxmlformats.org/presentationml/2006/main">
-  <p:cSld>
-    <p:spTree>
-      <p:nvGrpSpPr>
-        <p:cNvPr id="1" name=""/>
-        <p:cNvGrpSpPr/>
-        <p:nvPr/>
-      </p:nvGrpSpPr>
-      <p:grpSpPr>
-        <a:xfrm>
-          <a:off x="0" y="0"/>
-          <a:ext cx="0" cy="0"/>
-          <a:chOff x="0" y="0"/>
-          <a:chExt cx="0" cy="0"/>
-        </a:xfrm>
-      </p:grpSpPr>
-      <p:sp>
-        <p:nvSpPr>
-          <p:cNvPr id="2" name="Slide Image Placeholder 1"/>
-          <p:cNvSpPr>
-            <a:spLocks noGrp="1" noRot="1" noChangeAspect="1"/>
-          </p:cNvSpPr>
-          <p:nvPr>
-            <p:ph type="sldImg"/>
-          </p:nvPr>
-        </p:nvSpPr>
-        <p:spPr/>
-      </p:sp>
-      <p:sp>
-        <p:nvSpPr>
-          <p:cNvPr id="3" name="Notes Placeholder 2"/>
-          <p:cNvSpPr>
-            <a:spLocks noGrp="1"/>
-          </p:cNvSpPr>
-          <p:nvPr>
-            <p:ph type="body" idx="1"/>
-          </p:nvPr>
-        </p:nvSpPr>
-        <p:spPr/>
-        <p:txBody>
-          <a:bodyPr/>
-          <a:lstStyle/>
-          <a:p>
-            <a:r>
-              <a:rPr lang="en-US" dirty="0" err="1"/>
-              <a:t>Guardare</a:t>
-            </a:r>
-            <a:r>
-              <a:rPr lang="en-US" dirty="0"/>
-              <a:t> heatmap: </a:t>
-            </a:r>
-            <a:r>
-              <a:rPr lang="en-US" dirty="0" err="1"/>
-              <a:t>strano</a:t>
-            </a:r>
-            <a:r>
-              <a:rPr lang="en-US" dirty="0"/>
-              <a:t> </a:t>
-            </a:r>
-            <a:r>
-              <a:rPr lang="en-US" dirty="0" err="1"/>
-              <a:t>che</a:t>
-            </a:r>
-            <a:r>
-              <a:rPr lang="en-US" dirty="0"/>
-              <a:t> </a:t>
-            </a:r>
-            <a:r>
-              <a:rPr lang="en-US" dirty="0" err="1"/>
-              <a:t>c'è</a:t>
-            </a:r>
-            <a:r>
-              <a:rPr lang="en-US" dirty="0"/>
-              <a:t> </a:t>
-            </a:r>
-            <a:r>
-              <a:rPr lang="en-US" dirty="0" err="1"/>
-              <a:t>più</a:t>
-            </a:r>
-            <a:r>
-              <a:rPr lang="en-US" dirty="0"/>
-              <a:t> </a:t>
-            </a:r>
-            <a:r>
-              <a:rPr lang="en-US" dirty="0" err="1"/>
-              <a:t>traffico</a:t>
-            </a:r>
-            <a:r>
-              <a:rPr lang="en-US" dirty="0"/>
-              <a:t> alle 15 rispetto alle 17</a:t>
-            </a:r>
-            <a:br>
-              <a:rPr lang="en-US" dirty="0"/>
-            </a:br>
-            <a:br>
-              <a:rPr lang="en-US" dirty="0"/>
-            </a:br>
-            <a:r>
-              <a:rPr lang="en-US" dirty="0"/>
-              <a:t>Esempio Di notte non </a:t>
-            </a:r>
-            <a:r>
-              <a:rPr lang="en-US" dirty="0" err="1"/>
-              <a:t>c'è</a:t>
-            </a:r>
-            <a:r>
-              <a:rPr lang="en-US" dirty="0"/>
-              <a:t> il radar </a:t>
-            </a:r>
-            <a:r>
-              <a:rPr lang="en-US" dirty="0" err="1"/>
-              <a:t>nella</a:t>
-            </a:r>
-            <a:r>
-              <a:rPr lang="en-US" dirty="0"/>
-              <a:t> </a:t>
-            </a:r>
-            <a:r>
-              <a:rPr lang="en-US" dirty="0" err="1"/>
-              <a:t>stradina</a:t>
-            </a:r>
-            <a:r>
-              <a:rPr lang="en-US" dirty="0"/>
-              <a:t> di </a:t>
-            </a:r>
-            <a:r>
-              <a:rPr lang="en-US" dirty="0" err="1"/>
-              <a:t>paese</a:t>
-            </a:r>
-            <a:r>
-              <a:rPr lang="en-US" dirty="0"/>
-              <a:t> ma </a:t>
-            </a:r>
-            <a:r>
-              <a:rPr lang="en-US" dirty="0" err="1"/>
-              <a:t>nelle</a:t>
-            </a:r>
-            <a:r>
-              <a:rPr lang="en-US" dirty="0"/>
-              <a:t> </a:t>
-            </a:r>
-            <a:r>
-              <a:rPr lang="en-US" dirty="0" err="1"/>
-              <a:t>strade</a:t>
-            </a:r>
-            <a:r>
-              <a:rPr lang="en-US" dirty="0"/>
-              <a:t> </a:t>
-            </a:r>
-            <a:r>
-              <a:rPr lang="en-US" dirty="0" err="1"/>
-              <a:t>veloci</a:t>
-            </a:r>
-            <a:r>
-              <a:rPr lang="en-US" dirty="0"/>
-              <a:t>?</a:t>
-            </a:r>
-            <a:br>
-              <a:rPr lang="en-US" dirty="0"/>
-            </a:br>
-            <a:r>
-              <a:rPr lang="en-US" dirty="0"/>
-              <a:t>Vedi se </a:t>
-            </a:r>
-            <a:r>
-              <a:rPr lang="en-US" dirty="0" err="1"/>
-              <a:t>è</a:t>
-            </a:r>
-            <a:r>
-              <a:rPr lang="en-US" dirty="0"/>
-              <a:t> </a:t>
-            </a:r>
-            <a:r>
-              <a:rPr lang="en-US" dirty="0" err="1"/>
-              <a:t>vero</a:t>
-            </a:r>
-            <a:endParaRPr lang="en-US" dirty="0"/>
-          </a:p>
-        </p:txBody>
-      </p:sp>
-      <p:sp>
-        <p:nvSpPr>
-          <p:cNvPr id="4" name="Slide Number Placeholder 3"/>
-          <p:cNvSpPr>
-            <a:spLocks noGrp="1"/>
-          </p:cNvSpPr>
-          <p:nvPr>
-            <p:ph type="sldNum" sz="quarter" idx="10"/>
-          </p:nvPr>
-        </p:nvSpPr>
-        <p:spPr/>
-        <p:txBody>
-          <a:bodyPr/>
-          <a:lstStyle/>
-          <a:p>
-            <a:fld id="{F7021451-1387-4CA6-816F-3879F97B5CBC}" type="slidenum">
-              <a:rPr lang="en-US"/>
-              <a:t>9</a:t>
-            </a:fld>
-            <a:endParaRPr lang="en-US"/>
-          </a:p>
-        </p:txBody>
-      </p:sp>
-    </p:spTree>
-    <p:extLst>
-      <p:ext uri="{BB962C8B-B14F-4D97-AF65-F5344CB8AC3E}">
-        <p14:creationId xmlns:p14="http://schemas.microsoft.com/office/powerpoint/2010/main" val="1024086991"/>
       </p:ext>
     </p:extLst>
   </p:cSld>
@@ -3798,6 +4052,420 @@
 </file>
 
 <file path=ppt/slides/slide10.xml><?xml version="1.0" encoding="utf-8"?>
+<p:sld xmlns:a="http://schemas.openxmlformats.org/drawingml/2006/main" xmlns:r="http://schemas.openxmlformats.org/officeDocument/2006/relationships" xmlns:p="http://schemas.openxmlformats.org/presentationml/2006/main" show="0">
+  <p:cSld name="Slide 8">
+    <p:bg>
+      <p:bgPr>
+        <a:solidFill>
+          <a:srgbClr val="1A2744"/>
+        </a:solidFill>
+        <a:effectLst/>
+      </p:bgPr>
+    </p:bg>
+    <p:spTree>
+      <p:nvGrpSpPr>
+        <p:cNvPr id="1" name=""/>
+        <p:cNvGrpSpPr/>
+        <p:nvPr/>
+      </p:nvGrpSpPr>
+      <p:grpSpPr>
+        <a:xfrm>
+          <a:off x="0" y="0"/>
+          <a:ext cx="0" cy="0"/>
+          <a:chOff x="0" y="0"/>
+          <a:chExt cx="0" cy="0"/>
+        </a:xfrm>
+      </p:grpSpPr>
+      <p:sp>
+        <p:nvSpPr>
+          <p:cNvPr id="2" name="Shape 0"/>
+          <p:cNvSpPr/>
+          <p:nvPr/>
+        </p:nvSpPr>
+        <p:spPr>
+          <a:xfrm>
+            <a:off x="0" y="0"/>
+            <a:ext cx="164592" cy="5143500"/>
+          </a:xfrm>
+          <a:prstGeom prst="rect">
+            <a:avLst/>
+          </a:prstGeom>
+          <a:solidFill>
+            <a:srgbClr val="00B4D8"/>
+          </a:solidFill>
+          <a:ln w="12700">
+            <a:solidFill>
+              <a:srgbClr val="00B4D8"/>
+            </a:solidFill>
+            <a:prstDash val="solid"/>
+          </a:ln>
+        </p:spPr>
+        <p:txBody>
+          <a:bodyPr/>
+          <a:lstStyle/>
+          <a:p>
+            <a:endParaRPr lang="it-CH"/>
+          </a:p>
+        </p:txBody>
+      </p:sp>
+      <p:sp>
+        <p:nvSpPr>
+          <p:cNvPr id="3" name="Text 1"/>
+          <p:cNvSpPr/>
+          <p:nvPr/>
+        </p:nvSpPr>
+        <p:spPr>
+          <a:xfrm>
+            <a:off x="365760" y="164592"/>
+            <a:ext cx="8412480" cy="548640"/>
+          </a:xfrm>
+          <a:prstGeom prst="rect">
+            <a:avLst/>
+          </a:prstGeom>
+          <a:noFill/>
+          <a:ln/>
+        </p:spPr>
+        <p:txBody>
+          <a:bodyPr wrap="square" lIns="0" tIns="0" rIns="0" bIns="0" rtlCol="0" anchor="ctr"/>
+          <a:lstStyle/>
+          <a:p>
+            <a:pPr marL="0" indent="0">
+              <a:buNone/>
+            </a:pPr>
+            <a:r>
+              <a:rPr lang="en-US" sz="2200" b="1" dirty="0">
+                <a:solidFill>
+                  <a:srgbClr val="00B4D8"/>
+                </a:solidFill>
+                <a:latin typeface="Calibri" pitchFamily="34" charset="0"/>
+                <a:ea typeface="Calibri" pitchFamily="34" charset="-122"/>
+                <a:cs typeface="Calibri" pitchFamily="34" charset="-120"/>
+              </a:rPr>
+              <a:t>Analisi Future Pianificate</a:t>
+            </a:r>
+            <a:endParaRPr lang="en-US" sz="2200" dirty="0"/>
+          </a:p>
+        </p:txBody>
+      </p:sp>
+      <p:sp>
+        <p:nvSpPr>
+          <p:cNvPr id="5" name="Shape 3"/>
+          <p:cNvSpPr/>
+          <p:nvPr/>
+        </p:nvSpPr>
+        <p:spPr>
+          <a:xfrm>
+            <a:off x="365760" y="838830"/>
+            <a:ext cx="8503920" cy="4007490"/>
+          </a:xfrm>
+          <a:prstGeom prst="rect">
+            <a:avLst/>
+          </a:prstGeom>
+          <a:solidFill>
+            <a:srgbClr val="1E3057"/>
+          </a:solidFill>
+          <a:ln w="12700">
+            <a:solidFill>
+              <a:srgbClr val="2A4580"/>
+            </a:solidFill>
+            <a:prstDash val="solid"/>
+          </a:ln>
+        </p:spPr>
+        <p:txBody>
+          <a:bodyPr/>
+          <a:lstStyle/>
+          <a:p>
+            <a:endParaRPr lang="it-CH"/>
+          </a:p>
+        </p:txBody>
+      </p:sp>
+      <p:sp>
+        <p:nvSpPr>
+          <p:cNvPr id="6" name="Text 4"/>
+          <p:cNvSpPr/>
+          <p:nvPr/>
+        </p:nvSpPr>
+        <p:spPr>
+          <a:xfrm>
+            <a:off x="365760" y="1234440"/>
+            <a:ext cx="8503920" cy="3611880"/>
+          </a:xfrm>
+          <a:prstGeom prst="rect">
+            <a:avLst/>
+          </a:prstGeom>
+          <a:noFill/>
+          <a:ln/>
+        </p:spPr>
+        <p:txBody>
+          <a:bodyPr wrap="square" lIns="0" tIns="0" rIns="0" bIns="0" rtlCol="0" anchor="ctr"/>
+          <a:lstStyle/>
+          <a:p>
+            <a:pPr marL="0" indent="0" algn="ctr">
+              <a:buNone/>
+            </a:pPr>
+            <a:endParaRPr lang="en-US" sz="1400" dirty="0"/>
+          </a:p>
+        </p:txBody>
+      </p:sp>
+      <p:sp>
+        <p:nvSpPr>
+          <p:cNvPr id="4" name="Text 2"/>
+          <p:cNvSpPr/>
+          <p:nvPr/>
+        </p:nvSpPr>
+        <p:spPr>
+          <a:xfrm>
+            <a:off x="687688" y="958740"/>
+            <a:ext cx="8181991" cy="3673715"/>
+          </a:xfrm>
+          <a:prstGeom prst="rect">
+            <a:avLst/>
+          </a:prstGeom>
+          <a:noFill/>
+          <a:ln/>
+        </p:spPr>
+        <p:txBody>
+          <a:bodyPr wrap="square" lIns="0" tIns="0" rIns="0" bIns="0" rtlCol="0" anchor="ctr"/>
+          <a:lstStyle/>
+          <a:p>
+            <a:pPr marL="342900" indent="-342900">
+              <a:buFont typeface="+mj-lt"/>
+              <a:buAutoNum type="arabicPeriod"/>
+            </a:pPr>
+            <a:r>
+              <a:rPr lang="en-US" sz="2400" i="1" dirty="0" err="1">
+                <a:solidFill>
+                  <a:srgbClr val="B0BEC5"/>
+                </a:solidFill>
+                <a:latin typeface="Calibri" pitchFamily="34" charset="0"/>
+                <a:ea typeface="Calibri" pitchFamily="34" charset="-122"/>
+                <a:cs typeface="Calibri" pitchFamily="34" charset="-120"/>
+              </a:rPr>
+              <a:t>Correlazione</a:t>
+            </a:r>
+            <a:r>
+              <a:rPr lang="en-US" sz="2400" i="1" dirty="0">
+                <a:solidFill>
+                  <a:srgbClr val="B0BEC5"/>
+                </a:solidFill>
+                <a:latin typeface="Calibri" pitchFamily="34" charset="0"/>
+                <a:ea typeface="Calibri" pitchFamily="34" charset="-122"/>
+                <a:cs typeface="Calibri" pitchFamily="34" charset="-120"/>
+              </a:rPr>
+              <a:t> </a:t>
+            </a:r>
+            <a:r>
+              <a:rPr lang="en-US" sz="2400" i="1" dirty="0" err="1">
+                <a:solidFill>
+                  <a:srgbClr val="B0BEC5"/>
+                </a:solidFill>
+                <a:latin typeface="Calibri" pitchFamily="34" charset="0"/>
+                <a:ea typeface="Calibri" pitchFamily="34" charset="-122"/>
+                <a:cs typeface="Calibri" pitchFamily="34" charset="-120"/>
+              </a:rPr>
+              <a:t>meteo</a:t>
+            </a:r>
+            <a:r>
+              <a:rPr lang="en-US" sz="2400" i="1" dirty="0">
+                <a:solidFill>
+                  <a:srgbClr val="B0BEC5"/>
+                </a:solidFill>
+                <a:latin typeface="Calibri" pitchFamily="34" charset="0"/>
+                <a:ea typeface="Calibri" pitchFamily="34" charset="-122"/>
+                <a:cs typeface="Calibri" pitchFamily="34" charset="-120"/>
+              </a:rPr>
+              <a:t> </a:t>
+            </a:r>
+          </a:p>
+          <a:p>
+            <a:pPr marL="342900" indent="-342900">
+              <a:buFont typeface="+mj-lt"/>
+              <a:buAutoNum type="arabicPeriod"/>
+            </a:pPr>
+            <a:r>
+              <a:rPr lang="en-US" sz="2400" i="1" dirty="0" err="1">
+                <a:solidFill>
+                  <a:srgbClr val="B0BEC5"/>
+                </a:solidFill>
+                <a:latin typeface="Calibri" pitchFamily="34" charset="0"/>
+                <a:ea typeface="Calibri" pitchFamily="34" charset="-122"/>
+                <a:cs typeface="Calibri" pitchFamily="34" charset="-120"/>
+              </a:rPr>
+              <a:t>Differenza</a:t>
+            </a:r>
+            <a:r>
+              <a:rPr lang="en-US" sz="2400" i="1" dirty="0">
+                <a:solidFill>
+                  <a:srgbClr val="B0BEC5"/>
+                </a:solidFill>
+                <a:latin typeface="Calibri" pitchFamily="34" charset="0"/>
+                <a:ea typeface="Calibri" pitchFamily="34" charset="-122"/>
+                <a:cs typeface="Calibri" pitchFamily="34" charset="-120"/>
+              </a:rPr>
+              <a:t> </a:t>
+            </a:r>
+            <a:r>
+              <a:rPr lang="en-US" sz="2400" i="1" dirty="0" err="1">
+                <a:solidFill>
+                  <a:srgbClr val="B0BEC5"/>
+                </a:solidFill>
+                <a:latin typeface="Calibri" pitchFamily="34" charset="0"/>
+                <a:ea typeface="Calibri" pitchFamily="34" charset="-122"/>
+                <a:cs typeface="Calibri" pitchFamily="34" charset="-120"/>
+              </a:rPr>
+              <a:t>velocità</a:t>
+            </a:r>
+            <a:r>
+              <a:rPr lang="en-US" sz="2400" i="1" dirty="0">
+                <a:solidFill>
+                  <a:srgbClr val="B0BEC5"/>
+                </a:solidFill>
+                <a:latin typeface="Calibri" pitchFamily="34" charset="0"/>
+                <a:ea typeface="Calibri" pitchFamily="34" charset="-122"/>
+                <a:cs typeface="Calibri" pitchFamily="34" charset="-120"/>
+              </a:rPr>
+              <a:t> – </a:t>
+            </a:r>
+            <a:r>
+              <a:rPr lang="en-US" sz="2400" i="1" dirty="0" err="1">
+                <a:solidFill>
+                  <a:srgbClr val="B0BEC5"/>
+                </a:solidFill>
+                <a:latin typeface="Calibri" pitchFamily="34" charset="0"/>
+                <a:ea typeface="Calibri" pitchFamily="34" charset="-122"/>
+                <a:cs typeface="Calibri" pitchFamily="34" charset="-120"/>
+              </a:rPr>
+              <a:t>tipo</a:t>
+            </a:r>
+            <a:r>
+              <a:rPr lang="en-US" sz="2400" i="1" dirty="0">
+                <a:solidFill>
+                  <a:srgbClr val="B0BEC5"/>
+                </a:solidFill>
+                <a:latin typeface="Calibri" pitchFamily="34" charset="0"/>
+                <a:ea typeface="Calibri" pitchFamily="34" charset="-122"/>
+                <a:cs typeface="Calibri" pitchFamily="34" charset="-120"/>
+              </a:rPr>
+              <a:t> di </a:t>
+            </a:r>
+            <a:r>
+              <a:rPr lang="en-US" sz="2400" i="1" dirty="0" err="1">
+                <a:solidFill>
+                  <a:srgbClr val="B0BEC5"/>
+                </a:solidFill>
+                <a:latin typeface="Calibri" pitchFamily="34" charset="0"/>
+                <a:ea typeface="Calibri" pitchFamily="34" charset="-122"/>
+                <a:cs typeface="Calibri" pitchFamily="34" charset="-120"/>
+              </a:rPr>
+              <a:t>veicolo</a:t>
+            </a:r>
+            <a:r>
+              <a:rPr lang="en-US" sz="2400" i="1" dirty="0">
+                <a:solidFill>
+                  <a:srgbClr val="B0BEC5"/>
+                </a:solidFill>
+                <a:latin typeface="Calibri" pitchFamily="34" charset="0"/>
+                <a:ea typeface="Calibri" pitchFamily="34" charset="-122"/>
+                <a:cs typeface="Calibri" pitchFamily="34" charset="-120"/>
+              </a:rPr>
+              <a:t> (moto/camion)</a:t>
+            </a:r>
+          </a:p>
+          <a:p>
+            <a:pPr marL="342900" indent="-342900">
+              <a:buFont typeface="+mj-lt"/>
+              <a:buAutoNum type="arabicPeriod"/>
+            </a:pPr>
+            <a:r>
+              <a:rPr lang="en-US" sz="2400" i="1" dirty="0" err="1">
+                <a:solidFill>
+                  <a:srgbClr val="B0BEC5"/>
+                </a:solidFill>
+                <a:latin typeface="Calibri" pitchFamily="34" charset="0"/>
+                <a:ea typeface="Calibri" pitchFamily="34" charset="-122"/>
+                <a:cs typeface="Calibri" pitchFamily="34" charset="-120"/>
+              </a:rPr>
+              <a:t>Differenza</a:t>
+            </a:r>
+            <a:r>
+              <a:rPr lang="en-US" sz="2400" i="1" dirty="0">
+                <a:solidFill>
+                  <a:srgbClr val="B0BEC5"/>
+                </a:solidFill>
+                <a:latin typeface="Calibri" pitchFamily="34" charset="0"/>
+                <a:ea typeface="Calibri" pitchFamily="34" charset="-122"/>
+                <a:cs typeface="Calibri" pitchFamily="34" charset="-120"/>
+              </a:rPr>
+              <a:t> </a:t>
+            </a:r>
+            <a:r>
+              <a:rPr lang="en-US" sz="2400" i="1" dirty="0" err="1">
+                <a:solidFill>
+                  <a:srgbClr val="B0BEC5"/>
+                </a:solidFill>
+                <a:latin typeface="Calibri" pitchFamily="34" charset="0"/>
+                <a:ea typeface="Calibri" pitchFamily="34" charset="-122"/>
+                <a:cs typeface="Calibri" pitchFamily="34" charset="-120"/>
+              </a:rPr>
+              <a:t>postazioni</a:t>
+            </a:r>
+            <a:r>
+              <a:rPr lang="en-US" sz="2400" i="1" dirty="0">
+                <a:solidFill>
+                  <a:srgbClr val="B0BEC5"/>
+                </a:solidFill>
+                <a:latin typeface="Calibri" pitchFamily="34" charset="0"/>
+                <a:ea typeface="Calibri" pitchFamily="34" charset="-122"/>
+                <a:cs typeface="Calibri" pitchFamily="34" charset="-120"/>
+              </a:rPr>
+              <a:t> radar Giorno-notte</a:t>
+            </a:r>
+          </a:p>
+          <a:p>
+            <a:pPr marL="342900" indent="-342900">
+              <a:buFont typeface="+mj-lt"/>
+              <a:buAutoNum type="arabicPeriod"/>
+            </a:pPr>
+            <a:r>
+              <a:rPr lang="en-US" sz="2400" i="1" dirty="0">
+                <a:solidFill>
+                  <a:srgbClr val="B0BEC5"/>
+                </a:solidFill>
+                <a:latin typeface="Calibri" pitchFamily="34" charset="0"/>
+                <a:ea typeface="Calibri" pitchFamily="34" charset="-122"/>
+                <a:cs typeface="Calibri" pitchFamily="34" charset="-120"/>
+              </a:rPr>
+              <a:t>…</a:t>
+            </a:r>
+          </a:p>
+          <a:p>
+            <a:pPr marL="342900" indent="-342900">
+              <a:buFont typeface="+mj-lt"/>
+              <a:buAutoNum type="arabicPeriod"/>
+            </a:pPr>
+            <a:r>
+              <a:rPr lang="en-US" sz="2400" i="1" dirty="0">
+                <a:solidFill>
+                  <a:srgbClr val="B0BEC5"/>
+                </a:solidFill>
+                <a:latin typeface="Calibri" pitchFamily="34" charset="0"/>
+                <a:ea typeface="Calibri" pitchFamily="34" charset="-122"/>
+                <a:cs typeface="Calibri" pitchFamily="34" charset="-120"/>
+              </a:rPr>
+              <a:t>Consigli?</a:t>
+            </a:r>
+          </a:p>
+        </p:txBody>
+      </p:sp>
+    </p:spTree>
+  </p:cSld>
+  <p:clrMapOvr>
+    <a:masterClrMapping/>
+  </p:clrMapOvr>
+</p:sld>
+</file>
+
+<file path=ppt/slides/slide11.xml><?xml version="1.0" encoding="utf-8"?>
 <p:sld xmlns:a="http://schemas.openxmlformats.org/drawingml/2006/main" xmlns:r="http://schemas.openxmlformats.org/officeDocument/2006/relationships" xmlns:p="http://schemas.openxmlformats.org/presentationml/2006/main">
   <p:cSld name="Slide 9">
     <p:bg>
@@ -6279,6 +6947,17 @@
               <a:buNone/>
             </a:pPr>
             <a:r>
+              <a:rPr lang="en-US" sz="2200" b="1" dirty="0" err="1">
+                <a:solidFill>
+                  <a:srgbClr val="00B4D8"/>
+                </a:solidFill>
+                <a:latin typeface="Calibri" pitchFamily="34" charset="0"/>
+                <a:ea typeface="Calibri" pitchFamily="34" charset="-122"/>
+                <a:cs typeface="Calibri" pitchFamily="34" charset="-120"/>
+              </a:rPr>
+              <a:t>Misurazione</a:t>
+            </a:r>
+            <a:r>
               <a:rPr lang="en-US" sz="2200" b="1" dirty="0">
                 <a:solidFill>
                   <a:srgbClr val="00B4D8"/>
@@ -6287,7 +6966,7 @@
                 <a:ea typeface="Calibri" pitchFamily="34" charset="-122"/>
                 <a:cs typeface="Calibri" pitchFamily="34" charset="-120"/>
               </a:rPr>
-              <a:t>Mappa di Calore – </a:t>
+              <a:t> </a:t>
             </a:r>
             <a:r>
               <a:rPr lang="en-US" sz="2200" b="1" dirty="0" err="1">
@@ -6298,7 +6977,7 @@
                 <a:ea typeface="Calibri" pitchFamily="34" charset="-122"/>
                 <a:cs typeface="Calibri" pitchFamily="34" charset="-120"/>
               </a:rPr>
-              <a:t>Velocità</a:t>
+              <a:t>veicoli</a:t>
             </a:r>
             <a:r>
               <a:rPr lang="en-US" sz="2200" b="1" dirty="0">
@@ -6309,7 +6988,7 @@
                 <a:ea typeface="Calibri" pitchFamily="34" charset="-122"/>
                 <a:cs typeface="Calibri" pitchFamily="34" charset="-120"/>
               </a:rPr>
-              <a:t> media per </a:t>
+              <a:t> / </a:t>
             </a:r>
             <a:r>
               <a:rPr lang="en-US" sz="2200" b="1" dirty="0" err="1">
@@ -6320,7 +6999,7 @@
                 <a:ea typeface="Calibri" pitchFamily="34" charset="-122"/>
                 <a:cs typeface="Calibri" pitchFamily="34" charset="-120"/>
               </a:rPr>
-              <a:t>orario</a:t>
+              <a:t>giorno</a:t>
             </a:r>
             <a:endParaRPr lang="en-US" sz="2200" dirty="0"/>
           </a:p>
@@ -6359,7 +7038,29 @@
                 <a:ea typeface="Calibri" pitchFamily="34" charset="-122"/>
                 <a:cs typeface="Calibri" pitchFamily="34" charset="-120"/>
               </a:rPr>
-              <a:t>Heatmap – velocita_kmh media per </a:t>
+              <a:t>Heatmap – media </a:t>
+            </a:r>
+            <a:r>
+              <a:rPr lang="en-US" sz="1300" i="1" dirty="0" err="1">
+                <a:solidFill>
+                  <a:srgbClr val="B0BEC5"/>
+                </a:solidFill>
+                <a:latin typeface="Calibri" pitchFamily="34" charset="0"/>
+                <a:ea typeface="Calibri" pitchFamily="34" charset="-122"/>
+                <a:cs typeface="Calibri" pitchFamily="34" charset="-120"/>
+              </a:rPr>
+              <a:t>misurazioni</a:t>
+            </a:r>
+            <a:r>
+              <a:rPr lang="en-US" sz="1300" i="1" dirty="0">
+                <a:solidFill>
+                  <a:srgbClr val="B0BEC5"/>
+                </a:solidFill>
+                <a:latin typeface="Calibri" pitchFamily="34" charset="0"/>
+                <a:ea typeface="Calibri" pitchFamily="34" charset="-122"/>
+                <a:cs typeface="Calibri" pitchFamily="34" charset="-120"/>
+              </a:rPr>
+              <a:t> per </a:t>
             </a:r>
             <a:r>
               <a:rPr lang="en-US" sz="1300" i="1" dirty="0" err="1">
@@ -6460,10 +7161,10 @@
       </p:sp>
       <p:pic>
         <p:nvPicPr>
-          <p:cNvPr id="12" name="Immagine 11">
+          <p:cNvPr id="13" name="Immagine 12">
             <a:extLst>
               <a:ext uri="{FF2B5EF4-FFF2-40B4-BE49-F238E27FC236}">
-                <a16:creationId xmlns:a16="http://schemas.microsoft.com/office/drawing/2014/main" id="{8F8FBDB0-6A36-CB34-BBFE-D20411E9CAD9}"/>
+                <a16:creationId xmlns:a16="http://schemas.microsoft.com/office/drawing/2014/main" id="{24C6FEB0-4051-3D7A-1A2A-AA3F6AA273CB}"/>
               </a:ext>
             </a:extLst>
           </p:cNvPr>
@@ -6480,8 +7181,8 @@
         </p:blipFill>
         <p:spPr>
           <a:xfrm>
-            <a:off x="365759" y="1234440"/>
-            <a:ext cx="8494607" cy="3611880"/>
+            <a:off x="365760" y="1234440"/>
+            <a:ext cx="8507986" cy="3611880"/>
           </a:xfrm>
           <a:prstGeom prst="rect">
             <a:avLst/>
@@ -6896,6 +7597,379 @@
         <p:cNvPr id="1" name="">
           <a:extLst>
             <a:ext uri="{FF2B5EF4-FFF2-40B4-BE49-F238E27FC236}">
+              <a16:creationId xmlns:a16="http://schemas.microsoft.com/office/drawing/2014/main" id="{050129B8-E4DE-6B76-0BC9-A2432BB417CA}"/>
+            </a:ext>
+          </a:extLst>
+        </p:cNvPr>
+        <p:cNvGrpSpPr/>
+        <p:nvPr/>
+      </p:nvGrpSpPr>
+      <p:grpSpPr>
+        <a:xfrm>
+          <a:off x="0" y="0"/>
+          <a:ext cx="0" cy="0"/>
+          <a:chOff x="0" y="0"/>
+          <a:chExt cx="0" cy="0"/>
+        </a:xfrm>
+      </p:grpSpPr>
+      <p:sp>
+        <p:nvSpPr>
+          <p:cNvPr id="2" name="Shape 0">
+            <a:extLst>
+              <a:ext uri="{FF2B5EF4-FFF2-40B4-BE49-F238E27FC236}">
+                <a16:creationId xmlns:a16="http://schemas.microsoft.com/office/drawing/2014/main" id="{EEE77AE3-2F8A-0CC3-E76B-C9D29CE0A3BC}"/>
+              </a:ext>
+            </a:extLst>
+          </p:cNvPr>
+          <p:cNvSpPr/>
+          <p:nvPr/>
+        </p:nvSpPr>
+        <p:spPr>
+          <a:xfrm>
+            <a:off x="0" y="0"/>
+            <a:ext cx="164592" cy="5143500"/>
+          </a:xfrm>
+          <a:prstGeom prst="rect">
+            <a:avLst/>
+          </a:prstGeom>
+          <a:solidFill>
+            <a:srgbClr val="00B4D8"/>
+          </a:solidFill>
+          <a:ln w="12700">
+            <a:solidFill>
+              <a:srgbClr val="00B4D8"/>
+            </a:solidFill>
+            <a:prstDash val="solid"/>
+          </a:ln>
+        </p:spPr>
+        <p:txBody>
+          <a:bodyPr/>
+          <a:lstStyle/>
+          <a:p>
+            <a:endParaRPr lang="it-CH"/>
+          </a:p>
+        </p:txBody>
+      </p:sp>
+      <p:sp>
+        <p:nvSpPr>
+          <p:cNvPr id="3" name="Text 1">
+            <a:extLst>
+              <a:ext uri="{FF2B5EF4-FFF2-40B4-BE49-F238E27FC236}">
+                <a16:creationId xmlns:a16="http://schemas.microsoft.com/office/drawing/2014/main" id="{5B52C3B0-B814-C8CA-B170-63256395B692}"/>
+              </a:ext>
+            </a:extLst>
+          </p:cNvPr>
+          <p:cNvSpPr/>
+          <p:nvPr/>
+        </p:nvSpPr>
+        <p:spPr>
+          <a:xfrm>
+            <a:off x="365760" y="164592"/>
+            <a:ext cx="8412480" cy="548640"/>
+          </a:xfrm>
+          <a:prstGeom prst="rect">
+            <a:avLst/>
+          </a:prstGeom>
+          <a:noFill/>
+          <a:ln/>
+        </p:spPr>
+        <p:txBody>
+          <a:bodyPr wrap="square" lIns="0" tIns="0" rIns="0" bIns="0" rtlCol="0" anchor="ctr"/>
+          <a:lstStyle/>
+          <a:p>
+            <a:pPr marL="0" indent="0">
+              <a:buNone/>
+            </a:pPr>
+            <a:r>
+              <a:rPr lang="en-US" sz="2200" b="1" dirty="0" err="1">
+                <a:solidFill>
+                  <a:srgbClr val="00B4D8"/>
+                </a:solidFill>
+                <a:latin typeface="Calibri" pitchFamily="34" charset="0"/>
+                <a:ea typeface="Calibri" pitchFamily="34" charset="-122"/>
+                <a:cs typeface="Calibri" pitchFamily="34" charset="-120"/>
+              </a:rPr>
+              <a:t>Infrazioni</a:t>
+            </a:r>
+            <a:r>
+              <a:rPr lang="en-US" sz="2200" b="1" dirty="0">
+                <a:solidFill>
+                  <a:srgbClr val="00B4D8"/>
+                </a:solidFill>
+                <a:latin typeface="Calibri" pitchFamily="34" charset="0"/>
+                <a:ea typeface="Calibri" pitchFamily="34" charset="-122"/>
+                <a:cs typeface="Calibri" pitchFamily="34" charset="-120"/>
+              </a:rPr>
+              <a:t>/Anno con </a:t>
+            </a:r>
+            <a:r>
+              <a:rPr lang="en-US" sz="2200" b="1" dirty="0" err="1">
+                <a:solidFill>
+                  <a:srgbClr val="00B4D8"/>
+                </a:solidFill>
+                <a:latin typeface="Calibri" pitchFamily="34" charset="0"/>
+                <a:ea typeface="Calibri" pitchFamily="34" charset="-122"/>
+                <a:cs typeface="Calibri" pitchFamily="34" charset="-120"/>
+              </a:rPr>
+              <a:t>categoria</a:t>
+            </a:r>
+            <a:r>
+              <a:rPr lang="en-US" sz="2200" b="1" dirty="0">
+                <a:solidFill>
+                  <a:srgbClr val="00B4D8"/>
+                </a:solidFill>
+                <a:latin typeface="Calibri" pitchFamily="34" charset="0"/>
+                <a:ea typeface="Calibri" pitchFamily="34" charset="-122"/>
+                <a:cs typeface="Calibri" pitchFamily="34" charset="-120"/>
+              </a:rPr>
+              <a:t> </a:t>
+            </a:r>
+            <a:r>
+              <a:rPr lang="en-US" sz="2200" b="1" dirty="0" err="1">
+                <a:solidFill>
+                  <a:srgbClr val="00B4D8"/>
+                </a:solidFill>
+                <a:latin typeface="Calibri" pitchFamily="34" charset="0"/>
+                <a:ea typeface="Calibri" pitchFamily="34" charset="-122"/>
+                <a:cs typeface="Calibri" pitchFamily="34" charset="-120"/>
+              </a:rPr>
+              <a:t>veicolo</a:t>
+            </a:r>
+            <a:endParaRPr lang="en-US" sz="2200" dirty="0"/>
+          </a:p>
+        </p:txBody>
+      </p:sp>
+      <p:sp>
+        <p:nvSpPr>
+          <p:cNvPr id="4" name="Text 2">
+            <a:extLst>
+              <a:ext uri="{FF2B5EF4-FFF2-40B4-BE49-F238E27FC236}">
+                <a16:creationId xmlns:a16="http://schemas.microsoft.com/office/drawing/2014/main" id="{4C4DBECF-076C-8656-D72F-77C3B08900DA}"/>
+              </a:ext>
+            </a:extLst>
+          </p:cNvPr>
+          <p:cNvSpPr/>
+          <p:nvPr/>
+        </p:nvSpPr>
+        <p:spPr>
+          <a:xfrm>
+            <a:off x="365760" y="804672"/>
+            <a:ext cx="8412480" cy="320040"/>
+          </a:xfrm>
+          <a:prstGeom prst="rect">
+            <a:avLst/>
+          </a:prstGeom>
+          <a:noFill/>
+          <a:ln/>
+        </p:spPr>
+        <p:txBody>
+          <a:bodyPr wrap="square" lIns="0" tIns="0" rIns="0" bIns="0" rtlCol="0" anchor="ctr"/>
+          <a:lstStyle/>
+          <a:p>
+            <a:pPr marL="0" indent="0">
+              <a:buNone/>
+            </a:pPr>
+            <a:r>
+              <a:rPr lang="en-US" sz="1300" i="1" dirty="0" err="1">
+                <a:solidFill>
+                  <a:srgbClr val="B0BEC5"/>
+                </a:solidFill>
+                <a:latin typeface="Calibri" pitchFamily="34" charset="0"/>
+                <a:ea typeface="Calibri" pitchFamily="34" charset="-122"/>
+                <a:cs typeface="Calibri" pitchFamily="34" charset="-120"/>
+              </a:rPr>
+              <a:t>SubPlot</a:t>
+            </a:r>
+            <a:r>
+              <a:rPr lang="en-US" sz="1300" i="1" dirty="0">
+                <a:solidFill>
+                  <a:srgbClr val="B0BEC5"/>
+                </a:solidFill>
+                <a:latin typeface="Calibri" pitchFamily="34" charset="0"/>
+                <a:ea typeface="Calibri" pitchFamily="34" charset="-122"/>
+                <a:cs typeface="Calibri" pitchFamily="34" charset="-120"/>
+              </a:rPr>
+              <a:t> – media annua </a:t>
+            </a:r>
+            <a:r>
+              <a:rPr lang="en-US" sz="1300" i="1" dirty="0" err="1">
+                <a:solidFill>
+                  <a:srgbClr val="B0BEC5"/>
+                </a:solidFill>
+                <a:latin typeface="Calibri" pitchFamily="34" charset="0"/>
+                <a:ea typeface="Calibri" pitchFamily="34" charset="-122"/>
+                <a:cs typeface="Calibri" pitchFamily="34" charset="-120"/>
+              </a:rPr>
+              <a:t>infrazioni</a:t>
+            </a:r>
+            <a:r>
+              <a:rPr lang="en-US" sz="1300" i="1" dirty="0">
+                <a:solidFill>
+                  <a:srgbClr val="B0BEC5"/>
+                </a:solidFill>
+                <a:latin typeface="Calibri" pitchFamily="34" charset="0"/>
+                <a:ea typeface="Calibri" pitchFamily="34" charset="-122"/>
+                <a:cs typeface="Calibri" pitchFamily="34" charset="-120"/>
+              </a:rPr>
+              <a:t> </a:t>
+            </a:r>
+            <a:r>
+              <a:rPr lang="en-US" sz="1300" i="1" dirty="0" err="1">
+                <a:solidFill>
+                  <a:srgbClr val="B0BEC5"/>
+                </a:solidFill>
+                <a:latin typeface="Calibri" pitchFamily="34" charset="0"/>
+                <a:ea typeface="Calibri" pitchFamily="34" charset="-122"/>
+                <a:cs typeface="Calibri" pitchFamily="34" charset="-120"/>
+              </a:rPr>
+              <a:t>veicoli</a:t>
+            </a:r>
+            <a:endParaRPr lang="en-US" sz="1300" dirty="0"/>
+          </a:p>
+        </p:txBody>
+      </p:sp>
+      <p:sp>
+        <p:nvSpPr>
+          <p:cNvPr id="5" name="Shape 3">
+            <a:extLst>
+              <a:ext uri="{FF2B5EF4-FFF2-40B4-BE49-F238E27FC236}">
+                <a16:creationId xmlns:a16="http://schemas.microsoft.com/office/drawing/2014/main" id="{CB0BA3C2-F945-E20F-0EED-21B8FA22FDB2}"/>
+              </a:ext>
+            </a:extLst>
+          </p:cNvPr>
+          <p:cNvSpPr/>
+          <p:nvPr/>
+        </p:nvSpPr>
+        <p:spPr>
+          <a:xfrm>
+            <a:off x="365760" y="1234440"/>
+            <a:ext cx="8503920" cy="3611880"/>
+          </a:xfrm>
+          <a:prstGeom prst="rect">
+            <a:avLst/>
+          </a:prstGeom>
+          <a:solidFill>
+            <a:srgbClr val="1E3057"/>
+          </a:solidFill>
+          <a:ln w="12700">
+            <a:solidFill>
+              <a:srgbClr val="2A4580"/>
+            </a:solidFill>
+            <a:prstDash val="solid"/>
+          </a:ln>
+        </p:spPr>
+        <p:txBody>
+          <a:bodyPr/>
+          <a:lstStyle/>
+          <a:p>
+            <a:endParaRPr lang="it-CH"/>
+          </a:p>
+        </p:txBody>
+      </p:sp>
+      <p:sp>
+        <p:nvSpPr>
+          <p:cNvPr id="6" name="Text 4">
+            <a:extLst>
+              <a:ext uri="{FF2B5EF4-FFF2-40B4-BE49-F238E27FC236}">
+                <a16:creationId xmlns:a16="http://schemas.microsoft.com/office/drawing/2014/main" id="{0B822438-0145-720B-1E64-8C38E17D03DC}"/>
+              </a:ext>
+            </a:extLst>
+          </p:cNvPr>
+          <p:cNvSpPr/>
+          <p:nvPr/>
+        </p:nvSpPr>
+        <p:spPr>
+          <a:xfrm>
+            <a:off x="365760" y="1234440"/>
+            <a:ext cx="8503920" cy="3611880"/>
+          </a:xfrm>
+          <a:prstGeom prst="rect">
+            <a:avLst/>
+          </a:prstGeom>
+          <a:noFill/>
+          <a:ln/>
+        </p:spPr>
+        <p:txBody>
+          <a:bodyPr wrap="square" lIns="0" tIns="0" rIns="0" bIns="0" rtlCol="0" anchor="ctr"/>
+          <a:lstStyle/>
+          <a:p>
+            <a:pPr marL="0" indent="0" algn="ctr">
+              <a:buNone/>
+            </a:pPr>
+            <a:r>
+              <a:rPr lang="en-US" sz="1400" dirty="0">
+                <a:solidFill>
+                  <a:srgbClr val="2A4580"/>
+                </a:solidFill>
+                <a:latin typeface="Calibri" pitchFamily="34" charset="0"/>
+                <a:ea typeface="Calibri" pitchFamily="34" charset="-122"/>
+                <a:cs typeface="Calibri" pitchFamily="34" charset="-120"/>
+              </a:rPr>
+              <a:t>[ grafico ]</a:t>
+            </a:r>
+            <a:endParaRPr lang="en-US" sz="1400" dirty="0"/>
+          </a:p>
+        </p:txBody>
+      </p:sp>
+      <p:pic>
+        <p:nvPicPr>
+          <p:cNvPr id="19" name="Immagine 18">
+            <a:extLst>
+              <a:ext uri="{FF2B5EF4-FFF2-40B4-BE49-F238E27FC236}">
+                <a16:creationId xmlns:a16="http://schemas.microsoft.com/office/drawing/2014/main" id="{6F9F199B-2953-EA32-C63D-DDFB19C0D98C}"/>
+              </a:ext>
+            </a:extLst>
+          </p:cNvPr>
+          <p:cNvPicPr>
+            <a:picLocks noChangeAspect="1"/>
+          </p:cNvPicPr>
+          <p:nvPr/>
+        </p:nvPicPr>
+        <p:blipFill>
+          <a:blip r:embed="rId3"/>
+          <a:stretch>
+            <a:fillRect/>
+          </a:stretch>
+        </p:blipFill>
+        <p:spPr>
+          <a:xfrm>
+            <a:off x="365760" y="1234440"/>
+            <a:ext cx="8503920" cy="3635095"/>
+          </a:xfrm>
+          <a:prstGeom prst="rect">
+            <a:avLst/>
+          </a:prstGeom>
+        </p:spPr>
+      </p:pic>
+    </p:spTree>
+    <p:extLst>
+      <p:ext uri="{BB962C8B-B14F-4D97-AF65-F5344CB8AC3E}">
+        <p14:creationId xmlns:p14="http://schemas.microsoft.com/office/powerpoint/2010/main" val="3364992709"/>
+      </p:ext>
+    </p:extLst>
+  </p:cSld>
+  <p:clrMapOvr>
+    <a:masterClrMapping/>
+  </p:clrMapOvr>
+</p:sld>
+</file>
+
+<file path=ppt/slides/slide8.xml><?xml version="1.0" encoding="utf-8"?>
+<p:sld xmlns:a="http://schemas.openxmlformats.org/drawingml/2006/main" xmlns:r="http://schemas.openxmlformats.org/officeDocument/2006/relationships" xmlns:p="http://schemas.openxmlformats.org/presentationml/2006/main">
+  <p:cSld>
+    <p:bg>
+      <p:bgPr>
+        <a:solidFill>
+          <a:srgbClr val="1A2744"/>
+        </a:solidFill>
+        <a:effectLst/>
+      </p:bgPr>
+    </p:bg>
+    <p:spTree>
+      <p:nvGrpSpPr>
+        <p:cNvPr id="1" name="">
+          <a:extLst>
+            <a:ext uri="{FF2B5EF4-FFF2-40B4-BE49-F238E27FC236}">
               <a16:creationId xmlns:a16="http://schemas.microsoft.com/office/drawing/2014/main" id="{B4AD0811-9B76-6461-72D6-0A64719AA788}"/>
             </a:ext>
           </a:extLst>
@@ -7333,7 +8407,7 @@
 </p:sld>
 </file>
 
-<file path=ppt/slides/slide8.xml><?xml version="1.0" encoding="utf-8"?>
+<file path=ppt/slides/slide9.xml><?xml version="1.0" encoding="utf-8"?>
 <p:sld xmlns:a="http://schemas.openxmlformats.org/drawingml/2006/main" xmlns:r="http://schemas.openxmlformats.org/officeDocument/2006/relationships" xmlns:p="http://schemas.openxmlformats.org/presentationml/2006/main">
   <p:cSld>
     <p:bg>
@@ -7859,420 +8933,6 @@
         <p14:creationId xmlns:p14="http://schemas.microsoft.com/office/powerpoint/2010/main" val="2272597280"/>
       </p:ext>
     </p:extLst>
-  </p:cSld>
-  <p:clrMapOvr>
-    <a:masterClrMapping/>
-  </p:clrMapOvr>
-</p:sld>
-</file>
-
-<file path=ppt/slides/slide9.xml><?xml version="1.0" encoding="utf-8"?>
-<p:sld xmlns:a="http://schemas.openxmlformats.org/drawingml/2006/main" xmlns:r="http://schemas.openxmlformats.org/officeDocument/2006/relationships" xmlns:p="http://schemas.openxmlformats.org/presentationml/2006/main" show="0">
-  <p:cSld name="Slide 8">
-    <p:bg>
-      <p:bgPr>
-        <a:solidFill>
-          <a:srgbClr val="1A2744"/>
-        </a:solidFill>
-        <a:effectLst/>
-      </p:bgPr>
-    </p:bg>
-    <p:spTree>
-      <p:nvGrpSpPr>
-        <p:cNvPr id="1" name=""/>
-        <p:cNvGrpSpPr/>
-        <p:nvPr/>
-      </p:nvGrpSpPr>
-      <p:grpSpPr>
-        <a:xfrm>
-          <a:off x="0" y="0"/>
-          <a:ext cx="0" cy="0"/>
-          <a:chOff x="0" y="0"/>
-          <a:chExt cx="0" cy="0"/>
-        </a:xfrm>
-      </p:grpSpPr>
-      <p:sp>
-        <p:nvSpPr>
-          <p:cNvPr id="2" name="Shape 0"/>
-          <p:cNvSpPr/>
-          <p:nvPr/>
-        </p:nvSpPr>
-        <p:spPr>
-          <a:xfrm>
-            <a:off x="0" y="0"/>
-            <a:ext cx="164592" cy="5143500"/>
-          </a:xfrm>
-          <a:prstGeom prst="rect">
-            <a:avLst/>
-          </a:prstGeom>
-          <a:solidFill>
-            <a:srgbClr val="00B4D8"/>
-          </a:solidFill>
-          <a:ln w="12700">
-            <a:solidFill>
-              <a:srgbClr val="00B4D8"/>
-            </a:solidFill>
-            <a:prstDash val="solid"/>
-          </a:ln>
-        </p:spPr>
-        <p:txBody>
-          <a:bodyPr/>
-          <a:lstStyle/>
-          <a:p>
-            <a:endParaRPr lang="it-CH"/>
-          </a:p>
-        </p:txBody>
-      </p:sp>
-      <p:sp>
-        <p:nvSpPr>
-          <p:cNvPr id="3" name="Text 1"/>
-          <p:cNvSpPr/>
-          <p:nvPr/>
-        </p:nvSpPr>
-        <p:spPr>
-          <a:xfrm>
-            <a:off x="365760" y="164592"/>
-            <a:ext cx="8412480" cy="548640"/>
-          </a:xfrm>
-          <a:prstGeom prst="rect">
-            <a:avLst/>
-          </a:prstGeom>
-          <a:noFill/>
-          <a:ln/>
-        </p:spPr>
-        <p:txBody>
-          <a:bodyPr wrap="square" lIns="0" tIns="0" rIns="0" bIns="0" rtlCol="0" anchor="ctr"/>
-          <a:lstStyle/>
-          <a:p>
-            <a:pPr marL="0" indent="0">
-              <a:buNone/>
-            </a:pPr>
-            <a:r>
-              <a:rPr lang="en-US" sz="2200" b="1" dirty="0">
-                <a:solidFill>
-                  <a:srgbClr val="00B4D8"/>
-                </a:solidFill>
-                <a:latin typeface="Calibri" pitchFamily="34" charset="0"/>
-                <a:ea typeface="Calibri" pitchFamily="34" charset="-122"/>
-                <a:cs typeface="Calibri" pitchFamily="34" charset="-120"/>
-              </a:rPr>
-              <a:t>Analisi Future Pianificate</a:t>
-            </a:r>
-            <a:endParaRPr lang="en-US" sz="2200" dirty="0"/>
-          </a:p>
-        </p:txBody>
-      </p:sp>
-      <p:sp>
-        <p:nvSpPr>
-          <p:cNvPr id="5" name="Shape 3"/>
-          <p:cNvSpPr/>
-          <p:nvPr/>
-        </p:nvSpPr>
-        <p:spPr>
-          <a:xfrm>
-            <a:off x="365760" y="838830"/>
-            <a:ext cx="8503920" cy="4007490"/>
-          </a:xfrm>
-          <a:prstGeom prst="rect">
-            <a:avLst/>
-          </a:prstGeom>
-          <a:solidFill>
-            <a:srgbClr val="1E3057"/>
-          </a:solidFill>
-          <a:ln w="12700">
-            <a:solidFill>
-              <a:srgbClr val="2A4580"/>
-            </a:solidFill>
-            <a:prstDash val="solid"/>
-          </a:ln>
-        </p:spPr>
-        <p:txBody>
-          <a:bodyPr/>
-          <a:lstStyle/>
-          <a:p>
-            <a:endParaRPr lang="it-CH"/>
-          </a:p>
-        </p:txBody>
-      </p:sp>
-      <p:sp>
-        <p:nvSpPr>
-          <p:cNvPr id="6" name="Text 4"/>
-          <p:cNvSpPr/>
-          <p:nvPr/>
-        </p:nvSpPr>
-        <p:spPr>
-          <a:xfrm>
-            <a:off x="365760" y="1234440"/>
-            <a:ext cx="8503920" cy="3611880"/>
-          </a:xfrm>
-          <a:prstGeom prst="rect">
-            <a:avLst/>
-          </a:prstGeom>
-          <a:noFill/>
-          <a:ln/>
-        </p:spPr>
-        <p:txBody>
-          <a:bodyPr wrap="square" lIns="0" tIns="0" rIns="0" bIns="0" rtlCol="0" anchor="ctr"/>
-          <a:lstStyle/>
-          <a:p>
-            <a:pPr marL="0" indent="0" algn="ctr">
-              <a:buNone/>
-            </a:pPr>
-            <a:endParaRPr lang="en-US" sz="1400" dirty="0"/>
-          </a:p>
-        </p:txBody>
-      </p:sp>
-      <p:sp>
-        <p:nvSpPr>
-          <p:cNvPr id="4" name="Text 2"/>
-          <p:cNvSpPr/>
-          <p:nvPr/>
-        </p:nvSpPr>
-        <p:spPr>
-          <a:xfrm>
-            <a:off x="687688" y="958740"/>
-            <a:ext cx="8181991" cy="3673715"/>
-          </a:xfrm>
-          <a:prstGeom prst="rect">
-            <a:avLst/>
-          </a:prstGeom>
-          <a:noFill/>
-          <a:ln/>
-        </p:spPr>
-        <p:txBody>
-          <a:bodyPr wrap="square" lIns="0" tIns="0" rIns="0" bIns="0" rtlCol="0" anchor="ctr"/>
-          <a:lstStyle/>
-          <a:p>
-            <a:pPr marL="342900" indent="-342900">
-              <a:buFont typeface="+mj-lt"/>
-              <a:buAutoNum type="arabicPeriod"/>
-            </a:pPr>
-            <a:r>
-              <a:rPr lang="en-US" sz="2400" i="1" dirty="0" err="1">
-                <a:solidFill>
-                  <a:srgbClr val="B0BEC5"/>
-                </a:solidFill>
-                <a:latin typeface="Calibri" pitchFamily="34" charset="0"/>
-                <a:ea typeface="Calibri" pitchFamily="34" charset="-122"/>
-                <a:cs typeface="Calibri" pitchFamily="34" charset="-120"/>
-              </a:rPr>
-              <a:t>Correlazione</a:t>
-            </a:r>
-            <a:r>
-              <a:rPr lang="en-US" sz="2400" i="1" dirty="0">
-                <a:solidFill>
-                  <a:srgbClr val="B0BEC5"/>
-                </a:solidFill>
-                <a:latin typeface="Calibri" pitchFamily="34" charset="0"/>
-                <a:ea typeface="Calibri" pitchFamily="34" charset="-122"/>
-                <a:cs typeface="Calibri" pitchFamily="34" charset="-120"/>
-              </a:rPr>
-              <a:t> </a:t>
-            </a:r>
-            <a:r>
-              <a:rPr lang="en-US" sz="2400" i="1" dirty="0" err="1">
-                <a:solidFill>
-                  <a:srgbClr val="B0BEC5"/>
-                </a:solidFill>
-                <a:latin typeface="Calibri" pitchFamily="34" charset="0"/>
-                <a:ea typeface="Calibri" pitchFamily="34" charset="-122"/>
-                <a:cs typeface="Calibri" pitchFamily="34" charset="-120"/>
-              </a:rPr>
-              <a:t>meteo</a:t>
-            </a:r>
-            <a:r>
-              <a:rPr lang="en-US" sz="2400" i="1" dirty="0">
-                <a:solidFill>
-                  <a:srgbClr val="B0BEC5"/>
-                </a:solidFill>
-                <a:latin typeface="Calibri" pitchFamily="34" charset="0"/>
-                <a:ea typeface="Calibri" pitchFamily="34" charset="-122"/>
-                <a:cs typeface="Calibri" pitchFamily="34" charset="-120"/>
-              </a:rPr>
-              <a:t> </a:t>
-            </a:r>
-          </a:p>
-          <a:p>
-            <a:pPr marL="342900" indent="-342900">
-              <a:buFont typeface="+mj-lt"/>
-              <a:buAutoNum type="arabicPeriod"/>
-            </a:pPr>
-            <a:r>
-              <a:rPr lang="en-US" sz="2400" i="1" dirty="0" err="1">
-                <a:solidFill>
-                  <a:srgbClr val="B0BEC5"/>
-                </a:solidFill>
-                <a:latin typeface="Calibri" pitchFamily="34" charset="0"/>
-                <a:ea typeface="Calibri" pitchFamily="34" charset="-122"/>
-                <a:cs typeface="Calibri" pitchFamily="34" charset="-120"/>
-              </a:rPr>
-              <a:t>Differenza</a:t>
-            </a:r>
-            <a:r>
-              <a:rPr lang="en-US" sz="2400" i="1" dirty="0">
-                <a:solidFill>
-                  <a:srgbClr val="B0BEC5"/>
-                </a:solidFill>
-                <a:latin typeface="Calibri" pitchFamily="34" charset="0"/>
-                <a:ea typeface="Calibri" pitchFamily="34" charset="-122"/>
-                <a:cs typeface="Calibri" pitchFamily="34" charset="-120"/>
-              </a:rPr>
-              <a:t> </a:t>
-            </a:r>
-            <a:r>
-              <a:rPr lang="en-US" sz="2400" i="1" dirty="0" err="1">
-                <a:solidFill>
-                  <a:srgbClr val="B0BEC5"/>
-                </a:solidFill>
-                <a:latin typeface="Calibri" pitchFamily="34" charset="0"/>
-                <a:ea typeface="Calibri" pitchFamily="34" charset="-122"/>
-                <a:cs typeface="Calibri" pitchFamily="34" charset="-120"/>
-              </a:rPr>
-              <a:t>velocità</a:t>
-            </a:r>
-            <a:r>
-              <a:rPr lang="en-US" sz="2400" i="1" dirty="0">
-                <a:solidFill>
-                  <a:srgbClr val="B0BEC5"/>
-                </a:solidFill>
-                <a:latin typeface="Calibri" pitchFamily="34" charset="0"/>
-                <a:ea typeface="Calibri" pitchFamily="34" charset="-122"/>
-                <a:cs typeface="Calibri" pitchFamily="34" charset="-120"/>
-              </a:rPr>
-              <a:t> – </a:t>
-            </a:r>
-            <a:r>
-              <a:rPr lang="en-US" sz="2400" i="1" dirty="0" err="1">
-                <a:solidFill>
-                  <a:srgbClr val="B0BEC5"/>
-                </a:solidFill>
-                <a:latin typeface="Calibri" pitchFamily="34" charset="0"/>
-                <a:ea typeface="Calibri" pitchFamily="34" charset="-122"/>
-                <a:cs typeface="Calibri" pitchFamily="34" charset="-120"/>
-              </a:rPr>
-              <a:t>tipo</a:t>
-            </a:r>
-            <a:r>
-              <a:rPr lang="en-US" sz="2400" i="1" dirty="0">
-                <a:solidFill>
-                  <a:srgbClr val="B0BEC5"/>
-                </a:solidFill>
-                <a:latin typeface="Calibri" pitchFamily="34" charset="0"/>
-                <a:ea typeface="Calibri" pitchFamily="34" charset="-122"/>
-                <a:cs typeface="Calibri" pitchFamily="34" charset="-120"/>
-              </a:rPr>
-              <a:t> di </a:t>
-            </a:r>
-            <a:r>
-              <a:rPr lang="en-US" sz="2400" i="1" dirty="0" err="1">
-                <a:solidFill>
-                  <a:srgbClr val="B0BEC5"/>
-                </a:solidFill>
-                <a:latin typeface="Calibri" pitchFamily="34" charset="0"/>
-                <a:ea typeface="Calibri" pitchFamily="34" charset="-122"/>
-                <a:cs typeface="Calibri" pitchFamily="34" charset="-120"/>
-              </a:rPr>
-              <a:t>veicolo</a:t>
-            </a:r>
-            <a:r>
-              <a:rPr lang="en-US" sz="2400" i="1" dirty="0">
-                <a:solidFill>
-                  <a:srgbClr val="B0BEC5"/>
-                </a:solidFill>
-                <a:latin typeface="Calibri" pitchFamily="34" charset="0"/>
-                <a:ea typeface="Calibri" pitchFamily="34" charset="-122"/>
-                <a:cs typeface="Calibri" pitchFamily="34" charset="-120"/>
-              </a:rPr>
-              <a:t> (moto/camion)</a:t>
-            </a:r>
-          </a:p>
-          <a:p>
-            <a:pPr marL="342900" indent="-342900">
-              <a:buFont typeface="+mj-lt"/>
-              <a:buAutoNum type="arabicPeriod"/>
-            </a:pPr>
-            <a:r>
-              <a:rPr lang="en-US" sz="2400" i="1" dirty="0" err="1">
-                <a:solidFill>
-                  <a:srgbClr val="B0BEC5"/>
-                </a:solidFill>
-                <a:latin typeface="Calibri" pitchFamily="34" charset="0"/>
-                <a:ea typeface="Calibri" pitchFamily="34" charset="-122"/>
-                <a:cs typeface="Calibri" pitchFamily="34" charset="-120"/>
-              </a:rPr>
-              <a:t>Differenza</a:t>
-            </a:r>
-            <a:r>
-              <a:rPr lang="en-US" sz="2400" i="1" dirty="0">
-                <a:solidFill>
-                  <a:srgbClr val="B0BEC5"/>
-                </a:solidFill>
-                <a:latin typeface="Calibri" pitchFamily="34" charset="0"/>
-                <a:ea typeface="Calibri" pitchFamily="34" charset="-122"/>
-                <a:cs typeface="Calibri" pitchFamily="34" charset="-120"/>
-              </a:rPr>
-              <a:t> </a:t>
-            </a:r>
-            <a:r>
-              <a:rPr lang="en-US" sz="2400" i="1" dirty="0" err="1">
-                <a:solidFill>
-                  <a:srgbClr val="B0BEC5"/>
-                </a:solidFill>
-                <a:latin typeface="Calibri" pitchFamily="34" charset="0"/>
-                <a:ea typeface="Calibri" pitchFamily="34" charset="-122"/>
-                <a:cs typeface="Calibri" pitchFamily="34" charset="-120"/>
-              </a:rPr>
-              <a:t>postazioni</a:t>
-            </a:r>
-            <a:r>
-              <a:rPr lang="en-US" sz="2400" i="1" dirty="0">
-                <a:solidFill>
-                  <a:srgbClr val="B0BEC5"/>
-                </a:solidFill>
-                <a:latin typeface="Calibri" pitchFamily="34" charset="0"/>
-                <a:ea typeface="Calibri" pitchFamily="34" charset="-122"/>
-                <a:cs typeface="Calibri" pitchFamily="34" charset="-120"/>
-              </a:rPr>
-              <a:t> radar Giorno-notte</a:t>
-            </a:r>
-          </a:p>
-          <a:p>
-            <a:pPr marL="342900" indent="-342900">
-              <a:buFont typeface="+mj-lt"/>
-              <a:buAutoNum type="arabicPeriod"/>
-            </a:pPr>
-            <a:r>
-              <a:rPr lang="en-US" sz="2400" i="1" dirty="0">
-                <a:solidFill>
-                  <a:srgbClr val="B0BEC5"/>
-                </a:solidFill>
-                <a:latin typeface="Calibri" pitchFamily="34" charset="0"/>
-                <a:ea typeface="Calibri" pitchFamily="34" charset="-122"/>
-                <a:cs typeface="Calibri" pitchFamily="34" charset="-120"/>
-              </a:rPr>
-              <a:t>…</a:t>
-            </a:r>
-          </a:p>
-          <a:p>
-            <a:pPr marL="342900" indent="-342900">
-              <a:buFont typeface="+mj-lt"/>
-              <a:buAutoNum type="arabicPeriod"/>
-            </a:pPr>
-            <a:r>
-              <a:rPr lang="en-US" sz="2400" i="1" dirty="0">
-                <a:solidFill>
-                  <a:srgbClr val="B0BEC5"/>
-                </a:solidFill>
-                <a:latin typeface="Calibri" pitchFamily="34" charset="0"/>
-                <a:ea typeface="Calibri" pitchFamily="34" charset="-122"/>
-                <a:cs typeface="Calibri" pitchFamily="34" charset="-120"/>
-              </a:rPr>
-              <a:t>Consigli?</a:t>
-            </a:r>
-          </a:p>
-        </p:txBody>
-      </p:sp>
-    </p:spTree>
   </p:cSld>
   <p:clrMapOvr>
     <a:masterClrMapping/>

--- a/speed_monitoring.pptx
+++ b/speed_monitoring.pptx
@@ -11,13 +11,13 @@
     <p:sldId id="256" r:id="rId2"/>
     <p:sldId id="257" r:id="rId3"/>
     <p:sldId id="260" r:id="rId4"/>
-    <p:sldId id="265" r:id="rId5"/>
-    <p:sldId id="261" r:id="rId6"/>
-    <p:sldId id="268" r:id="rId7"/>
-    <p:sldId id="269" r:id="rId8"/>
-    <p:sldId id="266" r:id="rId9"/>
-    <p:sldId id="267" r:id="rId10"/>
-    <p:sldId id="263" r:id="rId11"/>
+    <p:sldId id="270" r:id="rId5"/>
+    <p:sldId id="265" r:id="rId6"/>
+    <p:sldId id="261" r:id="rId7"/>
+    <p:sldId id="268" r:id="rId8"/>
+    <p:sldId id="269" r:id="rId9"/>
+    <p:sldId id="266" r:id="rId10"/>
+    <p:sldId id="271" r:id="rId11"/>
     <p:sldId id="264" r:id="rId12"/>
   </p:sldIdLst>
   <p:sldSz cx="9144000" cy="5143500" type="screen16x9"/>
@@ -336,7 +336,13 @@
   <p:cSld>
     <p:spTree>
       <p:nvGrpSpPr>
-        <p:cNvPr id="1" name=""/>
+        <p:cNvPr id="1" name="">
+          <a:extLst>
+            <a:ext uri="{FF2B5EF4-FFF2-40B4-BE49-F238E27FC236}">
+              <a16:creationId xmlns:a16="http://schemas.microsoft.com/office/drawing/2014/main" id="{478200D2-0787-734C-024E-AFA065125298}"/>
+            </a:ext>
+          </a:extLst>
+        </p:cNvPr>
         <p:cNvGrpSpPr/>
         <p:nvPr/>
       </p:nvGrpSpPr>
@@ -350,7 +356,13 @@
       </p:grpSpPr>
       <p:sp>
         <p:nvSpPr>
-          <p:cNvPr id="2" name="Slide Image Placeholder 1"/>
+          <p:cNvPr id="2" name="Slide Image Placeholder 1">
+            <a:extLst>
+              <a:ext uri="{FF2B5EF4-FFF2-40B4-BE49-F238E27FC236}">
+                <a16:creationId xmlns:a16="http://schemas.microsoft.com/office/drawing/2014/main" id="{2A724B89-4F79-1D6A-E452-74C15B4B77ED}"/>
+              </a:ext>
+            </a:extLst>
+          </p:cNvPr>
           <p:cNvSpPr>
             <a:spLocks noGrp="1" noRot="1" noChangeAspect="1"/>
           </p:cNvSpPr>
@@ -362,7 +374,13 @@
       </p:sp>
       <p:sp>
         <p:nvSpPr>
-          <p:cNvPr id="3" name="Notes Placeholder 2"/>
+          <p:cNvPr id="3" name="Notes Placeholder 2">
+            <a:extLst>
+              <a:ext uri="{FF2B5EF4-FFF2-40B4-BE49-F238E27FC236}">
+                <a16:creationId xmlns:a16="http://schemas.microsoft.com/office/drawing/2014/main" id="{2F18362B-9F8B-5FE6-DAA4-236035225819}"/>
+              </a:ext>
+            </a:extLst>
+          </p:cNvPr>
           <p:cNvSpPr>
             <a:spLocks noGrp="1"/>
           </p:cNvSpPr>
@@ -376,145 +394,71 @@
           <a:lstStyle/>
           <a:p>
             <a:r>
-              <a:rPr lang="en-US" dirty="0" err="1"/>
-              <a:t>Guardare</a:t>
-            </a:r>
-            <a:r>
-              <a:rPr lang="en-US" dirty="0"/>
-              <a:t> heatmap: </a:t>
-            </a:r>
-            <a:r>
-              <a:rPr lang="en-US" dirty="0" err="1"/>
-              <a:t>strano</a:t>
-            </a:r>
-            <a:r>
-              <a:rPr lang="en-US" dirty="0"/>
-              <a:t> </a:t>
-            </a:r>
-            <a:r>
-              <a:rPr lang="en-US" dirty="0" err="1"/>
-              <a:t>che</a:t>
-            </a:r>
-            <a:r>
-              <a:rPr lang="en-US" dirty="0"/>
-              <a:t> </a:t>
-            </a:r>
-            <a:r>
-              <a:rPr lang="en-US" dirty="0" err="1"/>
-              <a:t>c'è</a:t>
-            </a:r>
-            <a:r>
-              <a:rPr lang="en-US" dirty="0"/>
-              <a:t> </a:t>
-            </a:r>
-            <a:r>
-              <a:rPr lang="en-US" dirty="0" err="1"/>
-              <a:t>più</a:t>
-            </a:r>
-            <a:r>
-              <a:rPr lang="en-US" dirty="0"/>
-              <a:t> </a:t>
-            </a:r>
-            <a:r>
-              <a:rPr lang="en-US" dirty="0" err="1"/>
-              <a:t>traffico</a:t>
-            </a:r>
-            <a:r>
-              <a:rPr lang="en-US" dirty="0"/>
-              <a:t> alle 15 rispetto alle 17</a:t>
-            </a:r>
-            <a:br>
-              <a:rPr lang="en-US" dirty="0"/>
-            </a:br>
-            <a:br>
-              <a:rPr lang="en-US" dirty="0"/>
-            </a:br>
-            <a:r>
-              <a:rPr lang="en-US" dirty="0"/>
-              <a:t>Esempio Di notte non </a:t>
-            </a:r>
-            <a:r>
-              <a:rPr lang="en-US" dirty="0" err="1"/>
-              <a:t>c'è</a:t>
-            </a:r>
-            <a:r>
-              <a:rPr lang="en-US" dirty="0"/>
-              <a:t> il radar </a:t>
-            </a:r>
-            <a:r>
-              <a:rPr lang="en-US" dirty="0" err="1"/>
-              <a:t>nella</a:t>
-            </a:r>
-            <a:r>
-              <a:rPr lang="en-US" dirty="0"/>
-              <a:t> </a:t>
-            </a:r>
-            <a:r>
-              <a:rPr lang="en-US" dirty="0" err="1"/>
-              <a:t>stradina</a:t>
-            </a:r>
-            <a:r>
-              <a:rPr lang="en-US" dirty="0"/>
-              <a:t> di </a:t>
-            </a:r>
-            <a:r>
-              <a:rPr lang="en-US" dirty="0" err="1"/>
-              <a:t>paese</a:t>
-            </a:r>
-            <a:r>
-              <a:rPr lang="en-US" dirty="0"/>
-              <a:t> ma </a:t>
-            </a:r>
-            <a:r>
-              <a:rPr lang="en-US" dirty="0" err="1"/>
-              <a:t>nelle</a:t>
-            </a:r>
-            <a:r>
-              <a:rPr lang="en-US" dirty="0"/>
-              <a:t> </a:t>
-            </a:r>
-            <a:r>
-              <a:rPr lang="en-US" dirty="0" err="1"/>
-              <a:t>strade</a:t>
-            </a:r>
-            <a:r>
-              <a:rPr lang="en-US" dirty="0"/>
-              <a:t> </a:t>
-            </a:r>
-            <a:r>
-              <a:rPr lang="en-US" dirty="0" err="1"/>
-              <a:t>veloci</a:t>
-            </a:r>
-            <a:r>
-              <a:rPr lang="en-US" dirty="0"/>
-              <a:t>?</a:t>
-            </a:r>
-            <a:br>
-              <a:rPr lang="en-US" dirty="0"/>
-            </a:br>
-            <a:r>
-              <a:rPr lang="en-US" dirty="0"/>
-              <a:t>Vedi se </a:t>
-            </a:r>
-            <a:r>
-              <a:rPr lang="en-US" dirty="0" err="1"/>
-              <a:t>è</a:t>
-            </a:r>
-            <a:r>
-              <a:rPr lang="en-US" dirty="0"/>
-              <a:t> </a:t>
-            </a:r>
-            <a:r>
-              <a:rPr lang="en-US" dirty="0" err="1"/>
-              <a:t>vero</a:t>
-            </a:r>
-            <a:endParaRPr lang="en-US" dirty="0"/>
-          </a:p>
-        </p:txBody>
-      </p:sp>
-      <p:sp>
-        <p:nvSpPr>
-          <p:cNvPr id="4" name="Slide Number Placeholder 3"/>
+              <a:rPr lang="it-CH" b="1" dirty="0"/>
+              <a:t>Domanda di ricerca:</a:t>
+            </a:r>
+            <a:r>
+              <a:rPr lang="it-CH" dirty="0"/>
+              <a:t> Un maggior volume di traffico comporta un tasso più alto di infrazioni?</a:t>
+            </a:r>
+          </a:p>
+          <a:p>
+            <a:r>
+              <a:rPr lang="it-CH" b="1" dirty="0"/>
+              <a:t>Visualizzazione:</a:t>
+            </a:r>
+            <a:endParaRPr lang="it-CH" dirty="0"/>
+          </a:p>
+          <a:p>
+            <a:pPr lvl="1"/>
+            <a:r>
+              <a:rPr lang="it-CH" b="1" dirty="0"/>
+              <a:t>Dimensione:</a:t>
+            </a:r>
+            <a:r>
+              <a:rPr lang="it-CH" dirty="0"/>
+              <a:t> Volume di traffico medio.</a:t>
+            </a:r>
+          </a:p>
+          <a:p>
+            <a:pPr lvl="1"/>
+            <a:r>
+              <a:rPr lang="it-CH" b="1" dirty="0"/>
+              <a:t>Colore:</a:t>
+            </a:r>
+            <a:r>
+              <a:rPr lang="it-CH" dirty="0"/>
+              <a:t> Tasso di infrazione (%).</a:t>
+            </a:r>
+          </a:p>
+          <a:p>
+            <a:r>
+              <a:rPr lang="it-CH" b="1" dirty="0"/>
+              <a:t>Data Processing:</a:t>
+            </a:r>
+            <a:r>
+              <a:rPr lang="it-CH" dirty="0"/>
+              <a:t> * Creazione di una colonna booleana per identificare i superamenti del limite.</a:t>
+            </a:r>
+          </a:p>
+          <a:p>
+            <a:pPr lvl="1"/>
+            <a:r>
+              <a:rPr lang="it-CH" dirty="0"/>
+              <a:t>Aggregazione dei dati per postazione (latitudine/longitudine) per calcolare transiti totali e infrazioni effettive.</a:t>
+            </a:r>
+          </a:p>
+        </p:txBody>
+      </p:sp>
+      <p:sp>
+        <p:nvSpPr>
+          <p:cNvPr id="4" name="Slide Number Placeholder 3">
+            <a:extLst>
+              <a:ext uri="{FF2B5EF4-FFF2-40B4-BE49-F238E27FC236}">
+                <a16:creationId xmlns:a16="http://schemas.microsoft.com/office/drawing/2014/main" id="{8057CBF0-1B39-E404-CA2A-7DA39EB0E3A2}"/>
+              </a:ext>
+            </a:extLst>
+          </p:cNvPr>
           <p:cNvSpPr>
             <a:spLocks noGrp="1"/>
           </p:cNvSpPr>
@@ -538,7 +482,7 @@
     </p:spTree>
     <p:extLst>
       <p:ext uri="{BB962C8B-B14F-4D97-AF65-F5344CB8AC3E}">
-        <p14:creationId xmlns:p14="http://schemas.microsoft.com/office/powerpoint/2010/main" val="1024086991"/>
+        <p14:creationId xmlns:p14="http://schemas.microsoft.com/office/powerpoint/2010/main" val="3417665098"/>
       </p:ext>
     </p:extLst>
   </p:cSld>
@@ -808,6 +752,114 @@
         <p:cNvPr id="1" name="">
           <a:extLst>
             <a:ext uri="{FF2B5EF4-FFF2-40B4-BE49-F238E27FC236}">
+              <a16:creationId xmlns:a16="http://schemas.microsoft.com/office/drawing/2014/main" id="{0166AE5E-B65F-9EA1-72E3-B0008A70AD05}"/>
+            </a:ext>
+          </a:extLst>
+        </p:cNvPr>
+        <p:cNvGrpSpPr/>
+        <p:nvPr/>
+      </p:nvGrpSpPr>
+      <p:grpSpPr>
+        <a:xfrm>
+          <a:off x="0" y="0"/>
+          <a:ext cx="0" cy="0"/>
+          <a:chOff x="0" y="0"/>
+          <a:chExt cx="0" cy="0"/>
+        </a:xfrm>
+      </p:grpSpPr>
+      <p:sp>
+        <p:nvSpPr>
+          <p:cNvPr id="2" name="Slide Image Placeholder 1">
+            <a:extLst>
+              <a:ext uri="{FF2B5EF4-FFF2-40B4-BE49-F238E27FC236}">
+                <a16:creationId xmlns:a16="http://schemas.microsoft.com/office/drawing/2014/main" id="{2A68C20B-481F-BA53-43E5-6C21A17716A5}"/>
+              </a:ext>
+            </a:extLst>
+          </p:cNvPr>
+          <p:cNvSpPr>
+            <a:spLocks noGrp="1" noRot="1" noChangeAspect="1"/>
+          </p:cNvSpPr>
+          <p:nvPr>
+            <p:ph type="sldImg"/>
+          </p:nvPr>
+        </p:nvSpPr>
+        <p:spPr/>
+      </p:sp>
+      <p:sp>
+        <p:nvSpPr>
+          <p:cNvPr id="3" name="Notes Placeholder 2">
+            <a:extLst>
+              <a:ext uri="{FF2B5EF4-FFF2-40B4-BE49-F238E27FC236}">
+                <a16:creationId xmlns:a16="http://schemas.microsoft.com/office/drawing/2014/main" id="{55D319FD-7128-5AF9-C70E-AF3AE8659851}"/>
+              </a:ext>
+            </a:extLst>
+          </p:cNvPr>
+          <p:cNvSpPr>
+            <a:spLocks noGrp="1"/>
+          </p:cNvSpPr>
+          <p:nvPr>
+            <p:ph type="body" idx="1"/>
+          </p:nvPr>
+        </p:nvSpPr>
+        <p:spPr/>
+        <p:txBody>
+          <a:bodyPr/>
+          <a:lstStyle/>
+          <a:p>
+            <a:endParaRPr lang="en-US" dirty="0"/>
+          </a:p>
+        </p:txBody>
+      </p:sp>
+      <p:sp>
+        <p:nvSpPr>
+          <p:cNvPr id="4" name="Slide Number Placeholder 3">
+            <a:extLst>
+              <a:ext uri="{FF2B5EF4-FFF2-40B4-BE49-F238E27FC236}">
+                <a16:creationId xmlns:a16="http://schemas.microsoft.com/office/drawing/2014/main" id="{78F0716D-43EC-EE0B-3CB4-0DCEADFAFDCF}"/>
+              </a:ext>
+            </a:extLst>
+          </p:cNvPr>
+          <p:cNvSpPr>
+            <a:spLocks noGrp="1"/>
+          </p:cNvSpPr>
+          <p:nvPr>
+            <p:ph type="sldNum" sz="quarter" idx="10"/>
+          </p:nvPr>
+        </p:nvSpPr>
+        <p:spPr/>
+        <p:txBody>
+          <a:bodyPr/>
+          <a:lstStyle/>
+          <a:p>
+            <a:fld id="{F7021451-1387-4CA6-816F-3879F97B5CBC}" type="slidenum">
+              <a:rPr lang="en-US"/>
+              <a:t>4</a:t>
+            </a:fld>
+            <a:endParaRPr lang="en-US"/>
+          </a:p>
+        </p:txBody>
+      </p:sp>
+    </p:spTree>
+    <p:extLst>
+      <p:ext uri="{BB962C8B-B14F-4D97-AF65-F5344CB8AC3E}">
+        <p14:creationId xmlns:p14="http://schemas.microsoft.com/office/powerpoint/2010/main" val="3953241496"/>
+      </p:ext>
+    </p:extLst>
+  </p:cSld>
+  <p:clrMapOvr>
+    <a:masterClrMapping/>
+  </p:clrMapOvr>
+</p:notes>
+</file>
+
+<file path=ppt/notesSlides/notesSlide5.xml><?xml version="1.0" encoding="utf-8"?>
+<p:notes xmlns:a="http://schemas.openxmlformats.org/drawingml/2006/main" xmlns:r="http://schemas.openxmlformats.org/officeDocument/2006/relationships" xmlns:p="http://schemas.openxmlformats.org/presentationml/2006/main">
+  <p:cSld>
+    <p:spTree>
+      <p:nvGrpSpPr>
+        <p:cNvPr id="1" name="">
+          <a:extLst>
+            <a:ext uri="{FF2B5EF4-FFF2-40B4-BE49-F238E27FC236}">
               <a16:creationId xmlns:a16="http://schemas.microsoft.com/office/drawing/2014/main" id="{DE8BD150-2D4D-C884-ADAA-19DD8CD29D79}"/>
             </a:ext>
           </a:extLst>
@@ -1815,7 +1867,7 @@
           <a:p>
             <a:fld id="{F7021451-1387-4CA6-816F-3879F97B5CBC}" type="slidenum">
               <a:rPr lang="en-US"/>
-              <a:t>4</a:t>
+              <a:t>5</a:t>
             </a:fld>
             <a:endParaRPr lang="en-US"/>
           </a:p>
@@ -1834,7 +1886,7 @@
 </p:notes>
 </file>
 
-<file path=ppt/notesSlides/notesSlide5.xml><?xml version="1.0" encoding="utf-8"?>
+<file path=ppt/notesSlides/notesSlide6.xml><?xml version="1.0" encoding="utf-8"?>
 <p:notes xmlns:a="http://schemas.openxmlformats.org/drawingml/2006/main" xmlns:r="http://schemas.openxmlformats.org/officeDocument/2006/relationships" xmlns:p="http://schemas.openxmlformats.org/presentationml/2006/main">
   <p:cSld>
     <p:spTree>
@@ -2044,7 +2096,7 @@
           <a:p>
             <a:fld id="{F7021451-1387-4CA6-816F-3879F97B5CBC}" type="slidenum">
               <a:rPr lang="en-US"/>
-              <a:t>5</a:t>
+              <a:t>6</a:t>
             </a:fld>
             <a:endParaRPr lang="en-US"/>
           </a:p>
@@ -2063,7 +2115,7 @@
 </p:notes>
 </file>
 
-<file path=ppt/notesSlides/notesSlide6.xml><?xml version="1.0" encoding="utf-8"?>
+<file path=ppt/notesSlides/notesSlide7.xml><?xml version="1.0" encoding="utf-8"?>
 <p:notes xmlns:a="http://schemas.openxmlformats.org/drawingml/2006/main" xmlns:r="http://schemas.openxmlformats.org/officeDocument/2006/relationships" xmlns:p="http://schemas.openxmlformats.org/presentationml/2006/main">
   <p:cSld>
     <p:spTree>
@@ -2152,7 +2204,7 @@
           <a:p>
             <a:fld id="{F7021451-1387-4CA6-816F-3879F97B5CBC}" type="slidenum">
               <a:rPr lang="en-US"/>
-              <a:t>6</a:t>
+              <a:t>7</a:t>
             </a:fld>
             <a:endParaRPr lang="en-US"/>
           </a:p>
@@ -2171,7 +2223,7 @@
 </p:notes>
 </file>
 
-<file path=ppt/notesSlides/notesSlide7.xml><?xml version="1.0" encoding="utf-8"?>
+<file path=ppt/notesSlides/notesSlide8.xml><?xml version="1.0" encoding="utf-8"?>
 <p:notes xmlns:a="http://schemas.openxmlformats.org/drawingml/2006/main" xmlns:r="http://schemas.openxmlformats.org/officeDocument/2006/relationships" xmlns:p="http://schemas.openxmlformats.org/presentationml/2006/main">
   <p:cSld>
     <p:spTree>
@@ -2381,7 +2433,7 @@
           <a:p>
             <a:fld id="{F7021451-1387-4CA6-816F-3879F97B5CBC}" type="slidenum">
               <a:rPr lang="en-US"/>
-              <a:t>7</a:t>
+              <a:t>8</a:t>
             </a:fld>
             <a:endParaRPr lang="en-US"/>
           </a:p>
@@ -2400,7 +2452,7 @@
 </p:notes>
 </file>
 
-<file path=ppt/notesSlides/notesSlide8.xml><?xml version="1.0" encoding="utf-8"?>
+<file path=ppt/notesSlides/notesSlide9.xml><?xml version="1.0" encoding="utf-8"?>
 <p:notes xmlns:a="http://schemas.openxmlformats.org/drawingml/2006/main" xmlns:r="http://schemas.openxmlformats.org/officeDocument/2006/relationships" xmlns:p="http://schemas.openxmlformats.org/presentationml/2006/main">
   <p:cSld>
     <p:spTree>
@@ -2542,7 +2594,7 @@
           <a:p>
             <a:fld id="{F7021451-1387-4CA6-816F-3879F97B5CBC}" type="slidenum">
               <a:rPr lang="en-US"/>
-              <a:t>8</a:t>
+              <a:t>9</a:t>
             </a:fld>
             <a:endParaRPr lang="en-US"/>
           </a:p>
@@ -2552,496 +2604,6 @@
     <p:extLst>
       <p:ext uri="{BB962C8B-B14F-4D97-AF65-F5344CB8AC3E}">
         <p14:creationId xmlns:p14="http://schemas.microsoft.com/office/powerpoint/2010/main" val="1743723683"/>
-      </p:ext>
-    </p:extLst>
-  </p:cSld>
-  <p:clrMapOvr>
-    <a:masterClrMapping/>
-  </p:clrMapOvr>
-</p:notes>
-</file>
-
-<file path=ppt/notesSlides/notesSlide9.xml><?xml version="1.0" encoding="utf-8"?>
-<p:notes xmlns:a="http://schemas.openxmlformats.org/drawingml/2006/main" xmlns:r="http://schemas.openxmlformats.org/officeDocument/2006/relationships" xmlns:p="http://schemas.openxmlformats.org/presentationml/2006/main">
-  <p:cSld>
-    <p:spTree>
-      <p:nvGrpSpPr>
-        <p:cNvPr id="1" name="">
-          <a:extLst>
-            <a:ext uri="{FF2B5EF4-FFF2-40B4-BE49-F238E27FC236}">
-              <a16:creationId xmlns:a16="http://schemas.microsoft.com/office/drawing/2014/main" id="{9DBD2650-687A-E116-F95D-9AB39CA7AB35}"/>
-            </a:ext>
-          </a:extLst>
-        </p:cNvPr>
-        <p:cNvGrpSpPr/>
-        <p:nvPr/>
-      </p:nvGrpSpPr>
-      <p:grpSpPr>
-        <a:xfrm>
-          <a:off x="0" y="0"/>
-          <a:ext cx="0" cy="0"/>
-          <a:chOff x="0" y="0"/>
-          <a:chExt cx="0" cy="0"/>
-        </a:xfrm>
-      </p:grpSpPr>
-      <p:sp>
-        <p:nvSpPr>
-          <p:cNvPr id="2" name="Slide Image Placeholder 1">
-            <a:extLst>
-              <a:ext uri="{FF2B5EF4-FFF2-40B4-BE49-F238E27FC236}">
-                <a16:creationId xmlns:a16="http://schemas.microsoft.com/office/drawing/2014/main" id="{1D61350F-1402-F534-F99A-D9ECB1AF2505}"/>
-              </a:ext>
-            </a:extLst>
-          </p:cNvPr>
-          <p:cNvSpPr>
-            <a:spLocks noGrp="1" noRot="1" noChangeAspect="1"/>
-          </p:cNvSpPr>
-          <p:nvPr>
-            <p:ph type="sldImg"/>
-          </p:nvPr>
-        </p:nvSpPr>
-        <p:spPr/>
-      </p:sp>
-      <p:sp>
-        <p:nvSpPr>
-          <p:cNvPr id="3" name="Notes Placeholder 2">
-            <a:extLst>
-              <a:ext uri="{FF2B5EF4-FFF2-40B4-BE49-F238E27FC236}">
-                <a16:creationId xmlns:a16="http://schemas.microsoft.com/office/drawing/2014/main" id="{AB3C8614-09D2-202E-92BF-E6425A386D4B}"/>
-              </a:ext>
-            </a:extLst>
-          </p:cNvPr>
-          <p:cNvSpPr>
-            <a:spLocks noGrp="1"/>
-          </p:cNvSpPr>
-          <p:nvPr>
-            <p:ph type="body" idx="1"/>
-          </p:nvPr>
-        </p:nvSpPr>
-        <p:spPr/>
-        <p:txBody>
-          <a:bodyPr/>
-          <a:lstStyle/>
-          <a:p>
-            <a:r>
-              <a:rPr lang="en-US" dirty="0" err="1"/>
-              <a:t>Mostra</a:t>
-            </a:r>
-            <a:r>
-              <a:rPr lang="en-US" dirty="0"/>
-              <a:t> le </a:t>
-            </a:r>
-            <a:r>
-              <a:rPr lang="en-US" dirty="0" err="1"/>
-              <a:t>infrazioni</a:t>
-            </a:r>
-            <a:r>
-              <a:rPr lang="en-US" dirty="0"/>
-              <a:t> </a:t>
-            </a:r>
-            <a:r>
-              <a:rPr lang="en-US" dirty="0" err="1"/>
-              <a:t>peggiori</a:t>
-            </a:r>
-            <a:r>
-              <a:rPr lang="en-US" dirty="0"/>
-              <a:t> </a:t>
-            </a:r>
-            <a:r>
-              <a:rPr lang="en-US" dirty="0" err="1"/>
-              <a:t>registrate</a:t>
-            </a:r>
-            <a:r>
-              <a:rPr lang="en-US" dirty="0"/>
-              <a:t> da ogni radar </a:t>
-            </a:r>
-            <a:r>
-              <a:rPr lang="en-US" dirty="0" err="1"/>
-              <a:t>nelle</a:t>
-            </a:r>
-            <a:r>
-              <a:rPr lang="en-US" dirty="0"/>
-              <a:t> ore </a:t>
-            </a:r>
-            <a:r>
-              <a:rPr lang="en-US" dirty="0" err="1"/>
-              <a:t>notturne</a:t>
-            </a:r>
-            <a:r>
-              <a:rPr lang="en-US" dirty="0"/>
-              <a:t> </a:t>
-            </a:r>
-            <a:r>
-              <a:rPr lang="en-US" dirty="0" err="1"/>
-              <a:t>tra</a:t>
-            </a:r>
-            <a:r>
-              <a:rPr lang="en-US" dirty="0"/>
-              <a:t> le 22 e le 5, </a:t>
-            </a:r>
-            <a:r>
-              <a:rPr lang="en-US" dirty="0" err="1"/>
-              <a:t>possiamo</a:t>
-            </a:r>
-            <a:r>
-              <a:rPr lang="en-US" dirty="0"/>
-              <a:t> </a:t>
-            </a:r>
-            <a:r>
-              <a:rPr lang="en-US" dirty="0" err="1"/>
-              <a:t>notare</a:t>
-            </a:r>
-            <a:r>
-              <a:rPr lang="en-US" dirty="0"/>
-              <a:t> </a:t>
-            </a:r>
-            <a:r>
-              <a:rPr lang="en-US" dirty="0" err="1"/>
-              <a:t>che</a:t>
-            </a:r>
-            <a:r>
-              <a:rPr lang="en-US" dirty="0"/>
-              <a:t> ci </a:t>
-            </a:r>
-            <a:r>
-              <a:rPr lang="en-US" dirty="0" err="1"/>
-              <a:t>sono</a:t>
-            </a:r>
-            <a:r>
-              <a:rPr lang="en-US" dirty="0"/>
-              <a:t> </a:t>
-            </a:r>
-            <a:r>
-              <a:rPr lang="en-US" dirty="0" err="1"/>
-              <a:t>superamenti</a:t>
-            </a:r>
-            <a:r>
-              <a:rPr lang="en-US" dirty="0"/>
-              <a:t> </a:t>
-            </a:r>
-            <a:r>
-              <a:rPr lang="en-US" dirty="0" err="1"/>
-              <a:t>fino</a:t>
-            </a:r>
-            <a:r>
-              <a:rPr lang="en-US" dirty="0"/>
-              <a:t> a 90kmh </a:t>
-            </a:r>
-            <a:r>
-              <a:rPr lang="en-US" dirty="0" err="1"/>
-              <a:t>superiori</a:t>
-            </a:r>
-            <a:r>
-              <a:rPr lang="en-US" dirty="0"/>
-              <a:t> al </a:t>
-            </a:r>
-            <a:r>
-              <a:rPr lang="en-US" dirty="0" err="1"/>
-              <a:t>limite</a:t>
-            </a:r>
-            <a:endParaRPr lang="en-US" dirty="0"/>
-          </a:p>
-          <a:p>
-            <a:r>
-              <a:rPr lang="en-US" dirty="0"/>
-              <a:t>Size: zona </a:t>
-            </a:r>
-            <a:r>
-              <a:rPr lang="en-US" dirty="0" err="1"/>
-              <a:t>limite</a:t>
-            </a:r>
-            <a:r>
-              <a:rPr lang="en-US" dirty="0"/>
-              <a:t> (50, 60, 80)</a:t>
-            </a:r>
-          </a:p>
-          <a:p>
-            <a:r>
-              <a:rPr lang="en-US" dirty="0" err="1"/>
-              <a:t>Colore</a:t>
-            </a:r>
-            <a:r>
-              <a:rPr lang="en-US" dirty="0"/>
-              <a:t>: </a:t>
-            </a:r>
-            <a:r>
-              <a:rPr lang="en-US" dirty="0" err="1"/>
-              <a:t>superamento</a:t>
-            </a:r>
-            <a:endParaRPr lang="en-US" dirty="0"/>
-          </a:p>
-          <a:p>
-            <a:endParaRPr lang="en-US" dirty="0"/>
-          </a:p>
-          <a:p>
-            <a:r>
-              <a:rPr lang="en-US" dirty="0" err="1"/>
-              <a:t>Cambiamenti</a:t>
-            </a:r>
-            <a:r>
-              <a:rPr lang="en-US" dirty="0"/>
-              <a:t>:</a:t>
-            </a:r>
-          </a:p>
-          <a:p>
-            <a:r>
-              <a:rPr lang="en-US" dirty="0"/>
-              <a:t>Nuovo </a:t>
-            </a:r>
-            <a:r>
-              <a:rPr lang="en-US" dirty="0" err="1"/>
-              <a:t>grafico</a:t>
-            </a:r>
-            <a:r>
-              <a:rPr lang="en-US" dirty="0"/>
-              <a:t> da fare heatmap:</a:t>
-            </a:r>
-          </a:p>
-          <a:p>
-            <a:r>
-              <a:rPr lang="en-US" dirty="0"/>
-              <a:t>asse x: tempo (anni dal 2024) e poi per ogni anno </a:t>
-            </a:r>
-            <a:r>
-              <a:rPr lang="en-US" dirty="0" err="1"/>
-              <a:t>mettiamo</a:t>
-            </a:r>
-            <a:r>
-              <a:rPr lang="en-US" dirty="0"/>
-              <a:t> </a:t>
-            </a:r>
-            <a:r>
-              <a:rPr lang="en-US" dirty="0" err="1"/>
-              <a:t>i</a:t>
-            </a:r>
-            <a:r>
-              <a:rPr lang="en-US" dirty="0"/>
-              <a:t> </a:t>
-            </a:r>
-            <a:r>
-              <a:rPr lang="en-US" dirty="0" err="1"/>
-              <a:t>mesi</a:t>
-            </a:r>
-            <a:endParaRPr lang="en-US" dirty="0"/>
-          </a:p>
-          <a:p>
-            <a:r>
-              <a:rPr lang="en-US" dirty="0"/>
-              <a:t>asse y: ogni radar</a:t>
-            </a:r>
-          </a:p>
-          <a:p>
-            <a:endParaRPr lang="en-US" dirty="0"/>
-          </a:p>
-          <a:p>
-            <a:r>
-              <a:rPr lang="en-US" dirty="0"/>
-              <a:t>la heatmap </a:t>
-            </a:r>
-            <a:r>
-              <a:rPr lang="en-US" dirty="0" err="1"/>
-              <a:t>deve</a:t>
-            </a:r>
-            <a:r>
-              <a:rPr lang="en-US" dirty="0"/>
-              <a:t> </a:t>
-            </a:r>
-            <a:r>
-              <a:rPr lang="en-US" dirty="0" err="1"/>
-              <a:t>rappresentare</a:t>
-            </a:r>
-            <a:r>
-              <a:rPr lang="en-US" dirty="0"/>
-              <a:t> il </a:t>
-            </a:r>
-            <a:r>
-              <a:rPr lang="en-US" dirty="0" err="1"/>
-              <a:t>numero</a:t>
-            </a:r>
-            <a:r>
-              <a:rPr lang="en-US" dirty="0"/>
-              <a:t> di </a:t>
-            </a:r>
-            <a:r>
-              <a:rPr lang="en-US" dirty="0" err="1"/>
-              <a:t>automobili</a:t>
-            </a:r>
-            <a:r>
-              <a:rPr lang="en-US" dirty="0"/>
-              <a:t> (o se ne </a:t>
-            </a:r>
-            <a:r>
-              <a:rPr lang="en-US" dirty="0" err="1"/>
-              <a:t>è</a:t>
-            </a:r>
-            <a:r>
-              <a:rPr lang="en-US" dirty="0"/>
-              <a:t> passata </a:t>
-            </a:r>
-            <a:r>
-              <a:rPr lang="en-US" dirty="0" err="1"/>
-              <a:t>almeno</a:t>
-            </a:r>
-            <a:r>
-              <a:rPr lang="en-US" dirty="0"/>
-              <a:t> </a:t>
-            </a:r>
-            <a:r>
-              <a:rPr lang="en-US" dirty="0" err="1"/>
-              <a:t>una</a:t>
-            </a:r>
-            <a:r>
-              <a:rPr lang="en-US" dirty="0"/>
-              <a:t> e </a:t>
-            </a:r>
-            <a:r>
-              <a:rPr lang="en-US" dirty="0" err="1"/>
-              <a:t>quindi</a:t>
-            </a:r>
-            <a:r>
-              <a:rPr lang="en-US" dirty="0"/>
-              <a:t> </a:t>
-            </a:r>
-            <a:r>
-              <a:rPr lang="en-US" dirty="0" err="1"/>
-              <a:t>avro</a:t>
-            </a:r>
-            <a:r>
-              <a:rPr lang="en-US" dirty="0"/>
-              <a:t> </a:t>
-            </a:r>
-            <a:r>
-              <a:rPr lang="en-US" dirty="0" err="1"/>
-              <a:t>i</a:t>
-            </a:r>
-            <a:r>
-              <a:rPr lang="en-US" dirty="0"/>
-              <a:t> </a:t>
-            </a:r>
-            <a:r>
-              <a:rPr lang="en-US" dirty="0" err="1"/>
-              <a:t>quadrati</a:t>
-            </a:r>
-            <a:r>
-              <a:rPr lang="en-US" dirty="0"/>
-              <a:t> o </a:t>
-            </a:r>
-            <a:r>
-              <a:rPr lang="en-US" dirty="0" err="1"/>
-              <a:t>bianchi</a:t>
-            </a:r>
-            <a:r>
-              <a:rPr lang="en-US" dirty="0"/>
-              <a:t> o </a:t>
-            </a:r>
-            <a:r>
-              <a:rPr lang="en-US" dirty="0" err="1"/>
-              <a:t>neri</a:t>
-            </a:r>
-            <a:r>
-              <a:rPr lang="en-US" dirty="0"/>
-              <a:t> per </a:t>
-            </a:r>
-            <a:r>
-              <a:rPr lang="en-US" dirty="0" err="1"/>
-              <a:t>verificare</a:t>
-            </a:r>
-            <a:r>
-              <a:rPr lang="en-US" dirty="0"/>
-              <a:t> </a:t>
-            </a:r>
-            <a:r>
-              <a:rPr lang="en-US" dirty="0" err="1"/>
-              <a:t>che</a:t>
-            </a:r>
-            <a:r>
-              <a:rPr lang="en-US" dirty="0"/>
-              <a:t> </a:t>
-            </a:r>
-            <a:r>
-              <a:rPr lang="en-US" dirty="0" err="1"/>
-              <a:t>sono</a:t>
-            </a:r>
-            <a:r>
-              <a:rPr lang="en-US" dirty="0"/>
-              <a:t> sempre </a:t>
-            </a:r>
-            <a:r>
-              <a:rPr lang="en-US" dirty="0" err="1"/>
-              <a:t>accesi</a:t>
-            </a:r>
-            <a:r>
-              <a:rPr lang="en-US" dirty="0"/>
-              <a:t> I radar)</a:t>
-            </a:r>
-          </a:p>
-          <a:p>
-            <a:endParaRPr lang="en-US" dirty="0"/>
-          </a:p>
-          <a:p>
-            <a:r>
-              <a:rPr lang="en-US" dirty="0" err="1"/>
-              <a:t>raggruppamento</a:t>
-            </a:r>
-            <a:r>
-              <a:rPr lang="en-US" dirty="0"/>
-              <a:t> </a:t>
-            </a:r>
-            <a:r>
-              <a:rPr lang="en-US" dirty="0" err="1"/>
-              <a:t>si</a:t>
-            </a:r>
-            <a:r>
-              <a:rPr lang="en-US" dirty="0"/>
-              <a:t> </a:t>
-            </a:r>
-            <a:r>
-              <a:rPr lang="en-US" dirty="0" err="1"/>
-              <a:t>chiama</a:t>
-            </a:r>
-            <a:r>
-              <a:rPr lang="en-US" dirty="0"/>
-              <a:t> resampling</a:t>
-            </a:r>
-          </a:p>
-          <a:p>
-            <a:endParaRPr lang="en-US" dirty="0"/>
-          </a:p>
-        </p:txBody>
-      </p:sp>
-      <p:sp>
-        <p:nvSpPr>
-          <p:cNvPr id="4" name="Slide Number Placeholder 3">
-            <a:extLst>
-              <a:ext uri="{FF2B5EF4-FFF2-40B4-BE49-F238E27FC236}">
-                <a16:creationId xmlns:a16="http://schemas.microsoft.com/office/drawing/2014/main" id="{20354422-AAE3-4EF5-30BA-4620748D5C32}"/>
-              </a:ext>
-            </a:extLst>
-          </p:cNvPr>
-          <p:cNvSpPr>
-            <a:spLocks noGrp="1"/>
-          </p:cNvSpPr>
-          <p:nvPr>
-            <p:ph type="sldNum" sz="quarter" idx="10"/>
-          </p:nvPr>
-        </p:nvSpPr>
-        <p:spPr/>
-        <p:txBody>
-          <a:bodyPr/>
-          <a:lstStyle/>
-          <a:p>
-            <a:fld id="{F7021451-1387-4CA6-816F-3879F97B5CBC}" type="slidenum">
-              <a:rPr lang="en-US"/>
-              <a:t>9</a:t>
-            </a:fld>
-            <a:endParaRPr lang="en-US"/>
-          </a:p>
-        </p:txBody>
-      </p:sp>
-    </p:spTree>
-    <p:extLst>
-      <p:ext uri="{BB962C8B-B14F-4D97-AF65-F5344CB8AC3E}">
-        <p14:creationId xmlns:p14="http://schemas.microsoft.com/office/powerpoint/2010/main" val="3084976356"/>
       </p:ext>
     </p:extLst>
   </p:cSld>
@@ -4052,8 +3614,8 @@
 </file>
 
 <file path=ppt/slides/slide10.xml><?xml version="1.0" encoding="utf-8"?>
-<p:sld xmlns:a="http://schemas.openxmlformats.org/drawingml/2006/main" xmlns:r="http://schemas.openxmlformats.org/officeDocument/2006/relationships" xmlns:p="http://schemas.openxmlformats.org/presentationml/2006/main" show="0">
-  <p:cSld name="Slide 8">
+<p:sld xmlns:a="http://schemas.openxmlformats.org/drawingml/2006/main" xmlns:r="http://schemas.openxmlformats.org/officeDocument/2006/relationships" xmlns:p="http://schemas.openxmlformats.org/presentationml/2006/main">
+  <p:cSld>
     <p:bg>
       <p:bgPr>
         <a:solidFill>
@@ -4064,7 +3626,13 @@
     </p:bg>
     <p:spTree>
       <p:nvGrpSpPr>
-        <p:cNvPr id="1" name=""/>
+        <p:cNvPr id="1" name="">
+          <a:extLst>
+            <a:ext uri="{FF2B5EF4-FFF2-40B4-BE49-F238E27FC236}">
+              <a16:creationId xmlns:a16="http://schemas.microsoft.com/office/drawing/2014/main" id="{3806EA51-CEF3-8ED3-F6A0-B9D54F59B42C}"/>
+            </a:ext>
+          </a:extLst>
+        </p:cNvPr>
         <p:cNvGrpSpPr/>
         <p:nvPr/>
       </p:nvGrpSpPr>
@@ -4078,7 +3646,13 @@
       </p:grpSpPr>
       <p:sp>
         <p:nvSpPr>
-          <p:cNvPr id="2" name="Shape 0"/>
+          <p:cNvPr id="2" name="Shape 0">
+            <a:extLst>
+              <a:ext uri="{FF2B5EF4-FFF2-40B4-BE49-F238E27FC236}">
+                <a16:creationId xmlns:a16="http://schemas.microsoft.com/office/drawing/2014/main" id="{A194611C-2273-82A5-A47B-44E1B051687B}"/>
+              </a:ext>
+            </a:extLst>
+          </p:cNvPr>
           <p:cNvSpPr/>
           <p:nvPr/>
         </p:nvSpPr>
@@ -4110,7 +3684,13 @@
       </p:sp>
       <p:sp>
         <p:nvSpPr>
-          <p:cNvPr id="3" name="Text 1"/>
+          <p:cNvPr id="3" name="Text 1">
+            <a:extLst>
+              <a:ext uri="{FF2B5EF4-FFF2-40B4-BE49-F238E27FC236}">
+                <a16:creationId xmlns:a16="http://schemas.microsoft.com/office/drawing/2014/main" id="{24A461C5-B436-3317-2106-883FB6EB6E5C}"/>
+              </a:ext>
+            </a:extLst>
+          </p:cNvPr>
           <p:cNvSpPr/>
           <p:nvPr/>
         </p:nvSpPr>
@@ -4133,15 +3713,64 @@
               <a:buNone/>
             </a:pPr>
             <a:r>
+              <a:rPr lang="en-US" sz="2200" b="1" dirty="0" err="1">
+                <a:solidFill>
+                  <a:srgbClr val="00B4D8"/>
+                </a:solidFill>
+                <a:latin typeface="Calibri" pitchFamily="34" charset="0"/>
+                <a:cs typeface="Calibri" pitchFamily="34" charset="-120"/>
+              </a:rPr>
+              <a:t>Mappa</a:t>
+            </a:r>
+            <a:r>
               <a:rPr lang="en-US" sz="2200" b="1" dirty="0">
                 <a:solidFill>
                   <a:srgbClr val="00B4D8"/>
                 </a:solidFill>
                 <a:latin typeface="Calibri" pitchFamily="34" charset="0"/>
-                <a:ea typeface="Calibri" pitchFamily="34" charset="-122"/>
-                <a:cs typeface="Calibri" pitchFamily="34" charset="-120"/>
-              </a:rPr>
-              <a:t>Analisi Future Pianificate</a:t>
+                <a:cs typeface="Calibri" pitchFamily="34" charset="-120"/>
+              </a:rPr>
+              <a:t> di </a:t>
+            </a:r>
+            <a:r>
+              <a:rPr lang="en-US" sz="2200" b="1" dirty="0" err="1">
+                <a:solidFill>
+                  <a:srgbClr val="00B4D8"/>
+                </a:solidFill>
+                <a:latin typeface="Calibri" pitchFamily="34" charset="0"/>
+                <a:cs typeface="Calibri" pitchFamily="34" charset="-120"/>
+              </a:rPr>
+              <a:t>attività</a:t>
+            </a:r>
+            <a:r>
+              <a:rPr lang="en-US" sz="2200" b="1" dirty="0">
+                <a:solidFill>
+                  <a:srgbClr val="00B4D8"/>
+                </a:solidFill>
+                <a:latin typeface="Calibri" pitchFamily="34" charset="0"/>
+                <a:cs typeface="Calibri" pitchFamily="34" charset="-120"/>
+              </a:rPr>
+              <a:t> </a:t>
+            </a:r>
+            <a:r>
+              <a:rPr lang="en-US" sz="2200" b="1" dirty="0" err="1">
+                <a:solidFill>
+                  <a:srgbClr val="00B4D8"/>
+                </a:solidFill>
+                <a:latin typeface="Calibri" pitchFamily="34" charset="0"/>
+                <a:cs typeface="Calibri" pitchFamily="34" charset="-120"/>
+              </a:rPr>
+              <a:t>dei</a:t>
+            </a:r>
+            <a:r>
+              <a:rPr lang="en-US" sz="2200" b="1" dirty="0">
+                <a:solidFill>
+                  <a:srgbClr val="00B4D8"/>
+                </a:solidFill>
+                <a:latin typeface="Calibri" pitchFamily="34" charset="0"/>
+                <a:cs typeface="Calibri" pitchFamily="34" charset="-120"/>
+              </a:rPr>
+              <a:t> radar</a:t>
             </a:r>
             <a:endParaRPr lang="en-US" sz="2200" dirty="0"/>
           </a:p>
@@ -4149,14 +3778,184 @@
       </p:sp>
       <p:sp>
         <p:nvSpPr>
-          <p:cNvPr id="5" name="Shape 3"/>
+          <p:cNvPr id="4" name="Text 2">
+            <a:extLst>
+              <a:ext uri="{FF2B5EF4-FFF2-40B4-BE49-F238E27FC236}">
+                <a16:creationId xmlns:a16="http://schemas.microsoft.com/office/drawing/2014/main" id="{7DACDB80-1B5C-D3B8-9860-4ABC90EAB621}"/>
+              </a:ext>
+            </a:extLst>
+          </p:cNvPr>
           <p:cNvSpPr/>
           <p:nvPr/>
         </p:nvSpPr>
         <p:spPr>
           <a:xfrm>
-            <a:off x="365760" y="838830"/>
-            <a:ext cx="8503920" cy="4007490"/>
+            <a:off x="365760" y="804672"/>
+            <a:ext cx="8412480" cy="320040"/>
+          </a:xfrm>
+          <a:prstGeom prst="rect">
+            <a:avLst/>
+          </a:prstGeom>
+          <a:noFill/>
+          <a:ln/>
+        </p:spPr>
+        <p:txBody>
+          <a:bodyPr wrap="square" lIns="0" tIns="0" rIns="0" bIns="0" rtlCol="0" anchor="ctr"/>
+          <a:lstStyle/>
+          <a:p>
+            <a:pPr marL="0" indent="0">
+              <a:buNone/>
+            </a:pPr>
+            <a:r>
+              <a:rPr lang="en-US" sz="1300" i="1" dirty="0">
+                <a:solidFill>
+                  <a:srgbClr val="B0BEC5"/>
+                </a:solidFill>
+                <a:latin typeface="Calibri" pitchFamily="34" charset="0"/>
+                <a:cs typeface="Calibri" pitchFamily="34" charset="-120"/>
+              </a:rPr>
+              <a:t>Heatmap </a:t>
+            </a:r>
+            <a:r>
+              <a:rPr lang="en-US" sz="1300" i="1" dirty="0" err="1">
+                <a:solidFill>
+                  <a:srgbClr val="B0BEC5"/>
+                </a:solidFill>
+                <a:latin typeface="Calibri" pitchFamily="34" charset="0"/>
+                <a:cs typeface="Calibri" pitchFamily="34" charset="-120"/>
+              </a:rPr>
+              <a:t>dell’attività</a:t>
+            </a:r>
+            <a:r>
+              <a:rPr lang="en-US" sz="1300" i="1" dirty="0">
+                <a:solidFill>
+                  <a:srgbClr val="B0BEC5"/>
+                </a:solidFill>
+                <a:latin typeface="Calibri" pitchFamily="34" charset="0"/>
+                <a:cs typeface="Calibri" pitchFamily="34" charset="-120"/>
+              </a:rPr>
+              <a:t> di ogni </a:t>
+            </a:r>
+            <a:r>
+              <a:rPr lang="en-US" sz="1300" i="1" dirty="0" err="1">
+                <a:solidFill>
+                  <a:srgbClr val="B0BEC5"/>
+                </a:solidFill>
+                <a:latin typeface="Calibri" pitchFamily="34" charset="0"/>
+                <a:cs typeface="Calibri" pitchFamily="34" charset="-120"/>
+              </a:rPr>
+              <a:t>singolo</a:t>
+            </a:r>
+            <a:r>
+              <a:rPr lang="en-US" sz="1300" i="1" dirty="0">
+                <a:solidFill>
+                  <a:srgbClr val="B0BEC5"/>
+                </a:solidFill>
+                <a:latin typeface="Calibri" pitchFamily="34" charset="0"/>
+                <a:cs typeface="Calibri" pitchFamily="34" charset="-120"/>
+              </a:rPr>
+              <a:t> radar (</a:t>
+            </a:r>
+            <a:r>
+              <a:rPr lang="en-US" sz="1300" i="1" dirty="0" err="1">
+                <a:solidFill>
+                  <a:srgbClr val="B0BEC5"/>
+                </a:solidFill>
+                <a:latin typeface="Calibri" pitchFamily="34" charset="0"/>
+                <a:cs typeface="Calibri" pitchFamily="34" charset="-120"/>
+              </a:rPr>
+              <a:t>cuadrato</a:t>
+            </a:r>
+            <a:r>
+              <a:rPr lang="en-US" sz="1300" i="1" dirty="0">
+                <a:solidFill>
+                  <a:srgbClr val="B0BEC5"/>
+                </a:solidFill>
+                <a:latin typeface="Calibri" pitchFamily="34" charset="0"/>
+                <a:cs typeface="Calibri" pitchFamily="34" charset="-120"/>
+              </a:rPr>
+              <a:t> </a:t>
+            </a:r>
+            <a:r>
+              <a:rPr lang="en-US" sz="1300" i="1" dirty="0" err="1">
+                <a:solidFill>
+                  <a:srgbClr val="B0BEC5"/>
+                </a:solidFill>
+                <a:latin typeface="Calibri" pitchFamily="34" charset="0"/>
+                <a:cs typeface="Calibri" pitchFamily="34" charset="-120"/>
+              </a:rPr>
+              <a:t>colorato</a:t>
+            </a:r>
+            <a:r>
+              <a:rPr lang="en-US" sz="1300" i="1" dirty="0">
+                <a:solidFill>
+                  <a:srgbClr val="B0BEC5"/>
+                </a:solidFill>
+                <a:latin typeface="Calibri" pitchFamily="34" charset="0"/>
+                <a:cs typeface="Calibri" pitchFamily="34" charset="-120"/>
+              </a:rPr>
+              <a:t> </a:t>
+            </a:r>
+            <a:r>
+              <a:rPr lang="en-US" sz="1300" i="1" dirty="0" err="1">
+                <a:solidFill>
+                  <a:srgbClr val="B0BEC5"/>
+                </a:solidFill>
+                <a:latin typeface="Calibri" pitchFamily="34" charset="0"/>
+                <a:cs typeface="Calibri" pitchFamily="34" charset="-120"/>
+              </a:rPr>
+              <a:t>almeno</a:t>
+            </a:r>
+            <a:r>
+              <a:rPr lang="en-US" sz="1300" i="1" dirty="0">
+                <a:solidFill>
+                  <a:srgbClr val="B0BEC5"/>
+                </a:solidFill>
+                <a:latin typeface="Calibri" pitchFamily="34" charset="0"/>
+                <a:cs typeface="Calibri" pitchFamily="34" charset="-120"/>
+              </a:rPr>
+              <a:t> 1 </a:t>
+            </a:r>
+            <a:r>
+              <a:rPr lang="en-US" sz="1300" i="1" dirty="0" err="1">
+                <a:solidFill>
+                  <a:srgbClr val="B0BEC5"/>
+                </a:solidFill>
+                <a:latin typeface="Calibri" pitchFamily="34" charset="0"/>
+                <a:cs typeface="Calibri" pitchFamily="34" charset="-120"/>
+              </a:rPr>
+              <a:t>registrazione</a:t>
+            </a:r>
+            <a:r>
+              <a:rPr lang="en-US" sz="1300" i="1" dirty="0">
+                <a:solidFill>
+                  <a:srgbClr val="B0BEC5"/>
+                </a:solidFill>
+                <a:latin typeface="Calibri" pitchFamily="34" charset="0"/>
+                <a:cs typeface="Calibri" pitchFamily="34" charset="-120"/>
+              </a:rPr>
+              <a:t>).</a:t>
+            </a:r>
+            <a:endParaRPr lang="en-US" sz="1300" dirty="0"/>
+          </a:p>
+        </p:txBody>
+      </p:sp>
+      <p:sp>
+        <p:nvSpPr>
+          <p:cNvPr id="5" name="Shape 3">
+            <a:extLst>
+              <a:ext uri="{FF2B5EF4-FFF2-40B4-BE49-F238E27FC236}">
+                <a16:creationId xmlns:a16="http://schemas.microsoft.com/office/drawing/2014/main" id="{C80E89E6-CA73-64A6-5BBE-7FA5E19197B0}"/>
+              </a:ext>
+            </a:extLst>
+          </p:cNvPr>
+          <p:cNvSpPr/>
+          <p:nvPr/>
+        </p:nvSpPr>
+        <p:spPr>
+          <a:xfrm>
+            <a:off x="365760" y="1234440"/>
+            <a:ext cx="8503920" cy="3611880"/>
           </a:xfrm>
           <a:prstGeom prst="rect">
             <a:avLst/>
@@ -4175,13 +3974,19 @@
           <a:bodyPr/>
           <a:lstStyle/>
           <a:p>
-            <a:endParaRPr lang="it-CH"/>
-          </a:p>
-        </p:txBody>
-      </p:sp>
-      <p:sp>
-        <p:nvSpPr>
-          <p:cNvPr id="6" name="Text 4"/>
+            <a:endParaRPr lang="it-CH" dirty="0"/>
+          </a:p>
+        </p:txBody>
+      </p:sp>
+      <p:sp>
+        <p:nvSpPr>
+          <p:cNvPr id="6" name="Text 4">
+            <a:extLst>
+              <a:ext uri="{FF2B5EF4-FFF2-40B4-BE49-F238E27FC236}">
+                <a16:creationId xmlns:a16="http://schemas.microsoft.com/office/drawing/2014/main" id="{4D9EBFD4-24EA-CD25-F104-01DC8159C7C7}"/>
+              </a:ext>
+            </a:extLst>
+          </p:cNvPr>
           <p:cNvSpPr/>
           <p:nvPr/>
         </p:nvSpPr>
@@ -4203,261 +4008,57 @@
             <a:pPr marL="0" indent="0" algn="ctr">
               <a:buNone/>
             </a:pPr>
+            <a:r>
+              <a:rPr lang="en-US" sz="1400" dirty="0">
+                <a:solidFill>
+                  <a:srgbClr val="2A4580"/>
+                </a:solidFill>
+                <a:latin typeface="Calibri" pitchFamily="34" charset="0"/>
+                <a:ea typeface="Calibri" pitchFamily="34" charset="-122"/>
+                <a:cs typeface="Calibri" pitchFamily="34" charset="-120"/>
+              </a:rPr>
+              <a:t>[ grafico ]</a:t>
+            </a:r>
             <a:endParaRPr lang="en-US" sz="1400" dirty="0"/>
           </a:p>
         </p:txBody>
       </p:sp>
-      <p:sp>
-        <p:nvSpPr>
-          <p:cNvPr id="4" name="Text 2"/>
-          <p:cNvSpPr/>
-          <p:nvPr/>
-        </p:nvSpPr>
-        <p:spPr>
-          <a:xfrm>
-            <a:off x="687688" y="958740"/>
-            <a:ext cx="8181991" cy="3673715"/>
-          </a:xfrm>
-          <a:prstGeom prst="rect">
-            <a:avLst/>
-          </a:prstGeom>
-          <a:noFill/>
-          <a:ln/>
-        </p:spPr>
-        <p:txBody>
-          <a:bodyPr wrap="square" lIns="0" tIns="0" rIns="0" bIns="0" rtlCol="0" anchor="ctr"/>
-          <a:lstStyle/>
-          <a:p>
-            <a:pPr marL="342900" indent="-342900">
-              <a:buFont typeface="+mj-lt"/>
-              <a:buAutoNum type="arabicPeriod"/>
-            </a:pPr>
-            <a:r>
-              <a:rPr lang="en-US" sz="2400" i="1" dirty="0" err="1">
-                <a:solidFill>
-                  <a:srgbClr val="B0BEC5"/>
-                </a:solidFill>
-                <a:latin typeface="Calibri" pitchFamily="34" charset="0"/>
-                <a:ea typeface="Calibri" pitchFamily="34" charset="-122"/>
-                <a:cs typeface="Calibri" pitchFamily="34" charset="-120"/>
-              </a:rPr>
-              <a:t>Correlazione</a:t>
-            </a:r>
-            <a:r>
-              <a:rPr lang="en-US" sz="2400" i="1" dirty="0">
-                <a:solidFill>
-                  <a:srgbClr val="B0BEC5"/>
-                </a:solidFill>
-                <a:latin typeface="Calibri" pitchFamily="34" charset="0"/>
-                <a:ea typeface="Calibri" pitchFamily="34" charset="-122"/>
-                <a:cs typeface="Calibri" pitchFamily="34" charset="-120"/>
-              </a:rPr>
-              <a:t> </a:t>
-            </a:r>
-            <a:r>
-              <a:rPr lang="en-US" sz="2400" i="1" dirty="0" err="1">
-                <a:solidFill>
-                  <a:srgbClr val="B0BEC5"/>
-                </a:solidFill>
-                <a:latin typeface="Calibri" pitchFamily="34" charset="0"/>
-                <a:ea typeface="Calibri" pitchFamily="34" charset="-122"/>
-                <a:cs typeface="Calibri" pitchFamily="34" charset="-120"/>
-              </a:rPr>
-              <a:t>meteo</a:t>
-            </a:r>
-            <a:r>
-              <a:rPr lang="en-US" sz="2400" i="1" dirty="0">
-                <a:solidFill>
-                  <a:srgbClr val="B0BEC5"/>
-                </a:solidFill>
-                <a:latin typeface="Calibri" pitchFamily="34" charset="0"/>
-                <a:ea typeface="Calibri" pitchFamily="34" charset="-122"/>
-                <a:cs typeface="Calibri" pitchFamily="34" charset="-120"/>
-              </a:rPr>
-              <a:t> </a:t>
-            </a:r>
-          </a:p>
-          <a:p>
-            <a:pPr marL="342900" indent="-342900">
-              <a:buFont typeface="+mj-lt"/>
-              <a:buAutoNum type="arabicPeriod"/>
-            </a:pPr>
-            <a:r>
-              <a:rPr lang="en-US" sz="2400" i="1" dirty="0" err="1">
-                <a:solidFill>
-                  <a:srgbClr val="B0BEC5"/>
-                </a:solidFill>
-                <a:latin typeface="Calibri" pitchFamily="34" charset="0"/>
-                <a:ea typeface="Calibri" pitchFamily="34" charset="-122"/>
-                <a:cs typeface="Calibri" pitchFamily="34" charset="-120"/>
-              </a:rPr>
-              <a:t>Differenza</a:t>
-            </a:r>
-            <a:r>
-              <a:rPr lang="en-US" sz="2400" i="1" dirty="0">
-                <a:solidFill>
-                  <a:srgbClr val="B0BEC5"/>
-                </a:solidFill>
-                <a:latin typeface="Calibri" pitchFamily="34" charset="0"/>
-                <a:ea typeface="Calibri" pitchFamily="34" charset="-122"/>
-                <a:cs typeface="Calibri" pitchFamily="34" charset="-120"/>
-              </a:rPr>
-              <a:t> </a:t>
-            </a:r>
-            <a:r>
-              <a:rPr lang="en-US" sz="2400" i="1" dirty="0" err="1">
-                <a:solidFill>
-                  <a:srgbClr val="B0BEC5"/>
-                </a:solidFill>
-                <a:latin typeface="Calibri" pitchFamily="34" charset="0"/>
-                <a:ea typeface="Calibri" pitchFamily="34" charset="-122"/>
-                <a:cs typeface="Calibri" pitchFamily="34" charset="-120"/>
-              </a:rPr>
-              <a:t>velocità</a:t>
-            </a:r>
-            <a:r>
-              <a:rPr lang="en-US" sz="2400" i="1" dirty="0">
-                <a:solidFill>
-                  <a:srgbClr val="B0BEC5"/>
-                </a:solidFill>
-                <a:latin typeface="Calibri" pitchFamily="34" charset="0"/>
-                <a:ea typeface="Calibri" pitchFamily="34" charset="-122"/>
-                <a:cs typeface="Calibri" pitchFamily="34" charset="-120"/>
-              </a:rPr>
-              <a:t> – </a:t>
-            </a:r>
-            <a:r>
-              <a:rPr lang="en-US" sz="2400" i="1" dirty="0" err="1">
-                <a:solidFill>
-                  <a:srgbClr val="B0BEC5"/>
-                </a:solidFill>
-                <a:latin typeface="Calibri" pitchFamily="34" charset="0"/>
-                <a:ea typeface="Calibri" pitchFamily="34" charset="-122"/>
-                <a:cs typeface="Calibri" pitchFamily="34" charset="-120"/>
-              </a:rPr>
-              <a:t>tipo</a:t>
-            </a:r>
-            <a:r>
-              <a:rPr lang="en-US" sz="2400" i="1" dirty="0">
-                <a:solidFill>
-                  <a:srgbClr val="B0BEC5"/>
-                </a:solidFill>
-                <a:latin typeface="Calibri" pitchFamily="34" charset="0"/>
-                <a:ea typeface="Calibri" pitchFamily="34" charset="-122"/>
-                <a:cs typeface="Calibri" pitchFamily="34" charset="-120"/>
-              </a:rPr>
-              <a:t> di </a:t>
-            </a:r>
-            <a:r>
-              <a:rPr lang="en-US" sz="2400" i="1" dirty="0" err="1">
-                <a:solidFill>
-                  <a:srgbClr val="B0BEC5"/>
-                </a:solidFill>
-                <a:latin typeface="Calibri" pitchFamily="34" charset="0"/>
-                <a:ea typeface="Calibri" pitchFamily="34" charset="-122"/>
-                <a:cs typeface="Calibri" pitchFamily="34" charset="-120"/>
-              </a:rPr>
-              <a:t>veicolo</a:t>
-            </a:r>
-            <a:r>
-              <a:rPr lang="en-US" sz="2400" i="1" dirty="0">
-                <a:solidFill>
-                  <a:srgbClr val="B0BEC5"/>
-                </a:solidFill>
-                <a:latin typeface="Calibri" pitchFamily="34" charset="0"/>
-                <a:ea typeface="Calibri" pitchFamily="34" charset="-122"/>
-                <a:cs typeface="Calibri" pitchFamily="34" charset="-120"/>
-              </a:rPr>
-              <a:t> (moto/camion)</a:t>
-            </a:r>
-          </a:p>
-          <a:p>
-            <a:pPr marL="342900" indent="-342900">
-              <a:buFont typeface="+mj-lt"/>
-              <a:buAutoNum type="arabicPeriod"/>
-            </a:pPr>
-            <a:r>
-              <a:rPr lang="en-US" sz="2400" i="1" dirty="0" err="1">
-                <a:solidFill>
-                  <a:srgbClr val="B0BEC5"/>
-                </a:solidFill>
-                <a:latin typeface="Calibri" pitchFamily="34" charset="0"/>
-                <a:ea typeface="Calibri" pitchFamily="34" charset="-122"/>
-                <a:cs typeface="Calibri" pitchFamily="34" charset="-120"/>
-              </a:rPr>
-              <a:t>Differenza</a:t>
-            </a:r>
-            <a:r>
-              <a:rPr lang="en-US" sz="2400" i="1" dirty="0">
-                <a:solidFill>
-                  <a:srgbClr val="B0BEC5"/>
-                </a:solidFill>
-                <a:latin typeface="Calibri" pitchFamily="34" charset="0"/>
-                <a:ea typeface="Calibri" pitchFamily="34" charset="-122"/>
-                <a:cs typeface="Calibri" pitchFamily="34" charset="-120"/>
-              </a:rPr>
-              <a:t> </a:t>
-            </a:r>
-            <a:r>
-              <a:rPr lang="en-US" sz="2400" i="1" dirty="0" err="1">
-                <a:solidFill>
-                  <a:srgbClr val="B0BEC5"/>
-                </a:solidFill>
-                <a:latin typeface="Calibri" pitchFamily="34" charset="0"/>
-                <a:ea typeface="Calibri" pitchFamily="34" charset="-122"/>
-                <a:cs typeface="Calibri" pitchFamily="34" charset="-120"/>
-              </a:rPr>
-              <a:t>postazioni</a:t>
-            </a:r>
-            <a:r>
-              <a:rPr lang="en-US" sz="2400" i="1" dirty="0">
-                <a:solidFill>
-                  <a:srgbClr val="B0BEC5"/>
-                </a:solidFill>
-                <a:latin typeface="Calibri" pitchFamily="34" charset="0"/>
-                <a:ea typeface="Calibri" pitchFamily="34" charset="-122"/>
-                <a:cs typeface="Calibri" pitchFamily="34" charset="-120"/>
-              </a:rPr>
-              <a:t> radar Giorno-notte</a:t>
-            </a:r>
-          </a:p>
-          <a:p>
-            <a:pPr marL="342900" indent="-342900">
-              <a:buFont typeface="+mj-lt"/>
-              <a:buAutoNum type="arabicPeriod"/>
-            </a:pPr>
-            <a:r>
-              <a:rPr lang="en-US" sz="2400" i="1" dirty="0">
-                <a:solidFill>
-                  <a:srgbClr val="B0BEC5"/>
-                </a:solidFill>
-                <a:latin typeface="Calibri" pitchFamily="34" charset="0"/>
-                <a:ea typeface="Calibri" pitchFamily="34" charset="-122"/>
-                <a:cs typeface="Calibri" pitchFamily="34" charset="-120"/>
-              </a:rPr>
-              <a:t>…</a:t>
-            </a:r>
-          </a:p>
-          <a:p>
-            <a:pPr marL="342900" indent="-342900">
-              <a:buFont typeface="+mj-lt"/>
-              <a:buAutoNum type="arabicPeriod"/>
-            </a:pPr>
-            <a:r>
-              <a:rPr lang="en-US" sz="2400" i="1" dirty="0">
-                <a:solidFill>
-                  <a:srgbClr val="B0BEC5"/>
-                </a:solidFill>
-                <a:latin typeface="Calibri" pitchFamily="34" charset="0"/>
-                <a:ea typeface="Calibri" pitchFamily="34" charset="-122"/>
-                <a:cs typeface="Calibri" pitchFamily="34" charset="-120"/>
-              </a:rPr>
-              <a:t>Consigli?</a:t>
-            </a:r>
-          </a:p>
-        </p:txBody>
-      </p:sp>
+      <p:pic>
+        <p:nvPicPr>
+          <p:cNvPr id="8" name="Picture 7">
+            <a:extLst>
+              <a:ext uri="{FF2B5EF4-FFF2-40B4-BE49-F238E27FC236}">
+                <a16:creationId xmlns:a16="http://schemas.microsoft.com/office/drawing/2014/main" id="{F8350021-0216-C876-4C72-41DF1704FB75}"/>
+              </a:ext>
+            </a:extLst>
+          </p:cNvPr>
+          <p:cNvPicPr>
+            <a:picLocks noChangeAspect="1"/>
+          </p:cNvPicPr>
+          <p:nvPr/>
+        </p:nvPicPr>
+        <p:blipFill>
+          <a:blip r:embed="rId3"/>
+          <a:stretch>
+            <a:fillRect/>
+          </a:stretch>
+        </p:blipFill>
+        <p:spPr>
+          <a:xfrm>
+            <a:off x="365759" y="1239158"/>
+            <a:ext cx="8507399" cy="3607161"/>
+          </a:xfrm>
+          <a:prstGeom prst="rect">
+            <a:avLst/>
+          </a:prstGeom>
+        </p:spPr>
+      </p:pic>
     </p:spTree>
+    <p:extLst>
+      <p:ext uri="{BB962C8B-B14F-4D97-AF65-F5344CB8AC3E}">
+        <p14:creationId xmlns:p14="http://schemas.microsoft.com/office/powerpoint/2010/main" val="58126096"/>
+      </p:ext>
+    </p:extLst>
   </p:cSld>
   <p:clrMapOvr>
     <a:masterClrMapping/>
@@ -6226,7 +5827,51 @@
                 <a:ea typeface="Calibri" pitchFamily="34" charset="-122"/>
                 <a:cs typeface="Calibri" pitchFamily="34" charset="-120"/>
               </a:rPr>
-              <a:t> per Tasso di Infrazioni</a:t>
+              <a:t> per Tasso di </a:t>
+            </a:r>
+            <a:r>
+              <a:rPr lang="en-US" sz="2200" b="1" dirty="0" err="1">
+                <a:solidFill>
+                  <a:srgbClr val="00B4D8"/>
+                </a:solidFill>
+                <a:latin typeface="Calibri" pitchFamily="34" charset="0"/>
+                <a:ea typeface="Calibri" pitchFamily="34" charset="-122"/>
+                <a:cs typeface="Calibri" pitchFamily="34" charset="-120"/>
+              </a:rPr>
+              <a:t>Infrazioni</a:t>
+            </a:r>
+            <a:r>
+              <a:rPr lang="en-US" sz="2200" b="1" dirty="0">
+                <a:solidFill>
+                  <a:srgbClr val="00B4D8"/>
+                </a:solidFill>
+                <a:latin typeface="Calibri" pitchFamily="34" charset="0"/>
+                <a:ea typeface="Calibri" pitchFamily="34" charset="-122"/>
+                <a:cs typeface="Calibri" pitchFamily="34" charset="-120"/>
+              </a:rPr>
+              <a:t> (</a:t>
+            </a:r>
+            <a:r>
+              <a:rPr lang="en-US" sz="2200" b="1" dirty="0" err="1">
+                <a:solidFill>
+                  <a:srgbClr val="00B4D8"/>
+                </a:solidFill>
+                <a:latin typeface="Calibri" pitchFamily="34" charset="0"/>
+                <a:ea typeface="Calibri" pitchFamily="34" charset="-122"/>
+                <a:cs typeface="Calibri" pitchFamily="34" charset="-120"/>
+              </a:rPr>
+              <a:t>precedente</a:t>
+            </a:r>
+            <a:r>
+              <a:rPr lang="en-US" sz="2200" b="1" dirty="0">
+                <a:solidFill>
+                  <a:srgbClr val="00B4D8"/>
+                </a:solidFill>
+                <a:latin typeface="Calibri" pitchFamily="34" charset="0"/>
+                <a:ea typeface="Calibri" pitchFamily="34" charset="-122"/>
+                <a:cs typeface="Calibri" pitchFamily="34" charset="-120"/>
+              </a:rPr>
+              <a:t>)</a:t>
             </a:r>
             <a:endParaRPr lang="en-US" sz="2200" dirty="0"/>
           </a:p>
@@ -6440,6 +6085,486 @@
 </file>
 
 <file path=ppt/slides/slide4.xml><?xml version="1.0" encoding="utf-8"?>
+<p:sld xmlns:a="http://schemas.openxmlformats.org/drawingml/2006/main" xmlns:r="http://schemas.openxmlformats.org/officeDocument/2006/relationships" xmlns:p="http://schemas.openxmlformats.org/presentationml/2006/main">
+  <p:cSld>
+    <p:bg>
+      <p:bgPr>
+        <a:solidFill>
+          <a:srgbClr val="1A2744"/>
+        </a:solidFill>
+        <a:effectLst/>
+      </p:bgPr>
+    </p:bg>
+    <p:spTree>
+      <p:nvGrpSpPr>
+        <p:cNvPr id="1" name="">
+          <a:extLst>
+            <a:ext uri="{FF2B5EF4-FFF2-40B4-BE49-F238E27FC236}">
+              <a16:creationId xmlns:a16="http://schemas.microsoft.com/office/drawing/2014/main" id="{FF12430E-19A5-041B-EC17-09C277D70609}"/>
+            </a:ext>
+          </a:extLst>
+        </p:cNvPr>
+        <p:cNvGrpSpPr/>
+        <p:nvPr/>
+      </p:nvGrpSpPr>
+      <p:grpSpPr>
+        <a:xfrm>
+          <a:off x="0" y="0"/>
+          <a:ext cx="0" cy="0"/>
+          <a:chOff x="0" y="0"/>
+          <a:chExt cx="0" cy="0"/>
+        </a:xfrm>
+      </p:grpSpPr>
+      <p:sp>
+        <p:nvSpPr>
+          <p:cNvPr id="2" name="Shape 0">
+            <a:extLst>
+              <a:ext uri="{FF2B5EF4-FFF2-40B4-BE49-F238E27FC236}">
+                <a16:creationId xmlns:a16="http://schemas.microsoft.com/office/drawing/2014/main" id="{41483590-706B-6EE0-BB8B-C9434F8992CC}"/>
+              </a:ext>
+            </a:extLst>
+          </p:cNvPr>
+          <p:cNvSpPr/>
+          <p:nvPr/>
+        </p:nvSpPr>
+        <p:spPr>
+          <a:xfrm>
+            <a:off x="0" y="0"/>
+            <a:ext cx="164592" cy="5143500"/>
+          </a:xfrm>
+          <a:prstGeom prst="rect">
+            <a:avLst/>
+          </a:prstGeom>
+          <a:solidFill>
+            <a:srgbClr val="00B4D8"/>
+          </a:solidFill>
+          <a:ln w="12700">
+            <a:solidFill>
+              <a:srgbClr val="00B4D8"/>
+            </a:solidFill>
+            <a:prstDash val="solid"/>
+          </a:ln>
+        </p:spPr>
+        <p:txBody>
+          <a:bodyPr/>
+          <a:lstStyle/>
+          <a:p>
+            <a:endParaRPr lang="it-CH"/>
+          </a:p>
+        </p:txBody>
+      </p:sp>
+      <p:sp>
+        <p:nvSpPr>
+          <p:cNvPr id="3" name="Text 1">
+            <a:extLst>
+              <a:ext uri="{FF2B5EF4-FFF2-40B4-BE49-F238E27FC236}">
+                <a16:creationId xmlns:a16="http://schemas.microsoft.com/office/drawing/2014/main" id="{34516782-5203-A9FF-FBC3-5BD83BE7E656}"/>
+              </a:ext>
+            </a:extLst>
+          </p:cNvPr>
+          <p:cNvSpPr/>
+          <p:nvPr/>
+        </p:nvSpPr>
+        <p:spPr>
+          <a:xfrm>
+            <a:off x="365760" y="164592"/>
+            <a:ext cx="8412480" cy="548640"/>
+          </a:xfrm>
+          <a:prstGeom prst="rect">
+            <a:avLst/>
+          </a:prstGeom>
+          <a:noFill/>
+          <a:ln/>
+        </p:spPr>
+        <p:txBody>
+          <a:bodyPr wrap="square" lIns="0" tIns="0" rIns="0" bIns="0" rtlCol="0" anchor="ctr"/>
+          <a:lstStyle/>
+          <a:p>
+            <a:pPr marL="0" indent="0">
+              <a:buNone/>
+            </a:pPr>
+            <a:r>
+              <a:rPr lang="en-US" sz="2200" b="1" dirty="0">
+                <a:solidFill>
+                  <a:srgbClr val="00B4D8"/>
+                </a:solidFill>
+                <a:latin typeface="Calibri" pitchFamily="34" charset="0"/>
+                <a:ea typeface="Calibri" pitchFamily="34" charset="-122"/>
+                <a:cs typeface="Calibri" pitchFamily="34" charset="-120"/>
+              </a:rPr>
+              <a:t>Top 15 </a:t>
+            </a:r>
+            <a:r>
+              <a:rPr lang="en-US" sz="2200" b="1" dirty="0" err="1">
+                <a:solidFill>
+                  <a:srgbClr val="00B4D8"/>
+                </a:solidFill>
+                <a:latin typeface="Calibri" pitchFamily="34" charset="0"/>
+                <a:ea typeface="Calibri" pitchFamily="34" charset="-122"/>
+                <a:cs typeface="Calibri" pitchFamily="34" charset="-120"/>
+              </a:rPr>
+              <a:t>Postazioni</a:t>
+            </a:r>
+            <a:r>
+              <a:rPr lang="en-US" sz="2200" b="1" dirty="0">
+                <a:solidFill>
+                  <a:srgbClr val="00B4D8"/>
+                </a:solidFill>
+                <a:latin typeface="Calibri" pitchFamily="34" charset="0"/>
+                <a:ea typeface="Calibri" pitchFamily="34" charset="-122"/>
+                <a:cs typeface="Calibri" pitchFamily="34" charset="-120"/>
+              </a:rPr>
+              <a:t> per Tasso di </a:t>
+            </a:r>
+            <a:r>
+              <a:rPr lang="en-US" sz="2200" b="1" dirty="0" err="1">
+                <a:solidFill>
+                  <a:srgbClr val="00B4D8"/>
+                </a:solidFill>
+                <a:latin typeface="Calibri" pitchFamily="34" charset="0"/>
+                <a:ea typeface="Calibri" pitchFamily="34" charset="-122"/>
+                <a:cs typeface="Calibri" pitchFamily="34" charset="-120"/>
+              </a:rPr>
+              <a:t>Infrazioni</a:t>
+            </a:r>
+            <a:r>
+              <a:rPr lang="en-US" sz="2200" b="1" dirty="0">
+                <a:solidFill>
+                  <a:srgbClr val="00B4D8"/>
+                </a:solidFill>
+                <a:latin typeface="Calibri" pitchFamily="34" charset="0"/>
+                <a:ea typeface="Calibri" pitchFamily="34" charset="-122"/>
+                <a:cs typeface="Calibri" pitchFamily="34" charset="-120"/>
+              </a:rPr>
+              <a:t> (</a:t>
+            </a:r>
+            <a:r>
+              <a:rPr lang="en-US" sz="2200" b="1" dirty="0" err="1">
+                <a:solidFill>
+                  <a:srgbClr val="00B4D8"/>
+                </a:solidFill>
+                <a:latin typeface="Calibri" pitchFamily="34" charset="0"/>
+                <a:ea typeface="Calibri" pitchFamily="34" charset="-122"/>
+                <a:cs typeface="Calibri" pitchFamily="34" charset="-120"/>
+              </a:rPr>
+              <a:t>aggiornato</a:t>
+            </a:r>
+            <a:r>
+              <a:rPr lang="en-US" sz="2200" b="1" dirty="0">
+                <a:solidFill>
+                  <a:srgbClr val="00B4D8"/>
+                </a:solidFill>
+                <a:latin typeface="Calibri" pitchFamily="34" charset="0"/>
+                <a:ea typeface="Calibri" pitchFamily="34" charset="-122"/>
+                <a:cs typeface="Calibri" pitchFamily="34" charset="-120"/>
+              </a:rPr>
+              <a:t>)</a:t>
+            </a:r>
+            <a:endParaRPr lang="en-US" sz="2200" dirty="0"/>
+          </a:p>
+        </p:txBody>
+      </p:sp>
+      <p:sp>
+        <p:nvSpPr>
+          <p:cNvPr id="4" name="Text 2">
+            <a:extLst>
+              <a:ext uri="{FF2B5EF4-FFF2-40B4-BE49-F238E27FC236}">
+                <a16:creationId xmlns:a16="http://schemas.microsoft.com/office/drawing/2014/main" id="{5FE0DACD-0CBD-BF35-5EB5-FBA4F26A33AE}"/>
+              </a:ext>
+            </a:extLst>
+          </p:cNvPr>
+          <p:cNvSpPr/>
+          <p:nvPr/>
+        </p:nvSpPr>
+        <p:spPr>
+          <a:xfrm>
+            <a:off x="365760" y="804672"/>
+            <a:ext cx="8412480" cy="320040"/>
+          </a:xfrm>
+          <a:prstGeom prst="rect">
+            <a:avLst/>
+          </a:prstGeom>
+          <a:noFill/>
+          <a:ln/>
+        </p:spPr>
+        <p:txBody>
+          <a:bodyPr wrap="square" lIns="0" tIns="0" rIns="0" bIns="0" rtlCol="0" anchor="ctr"/>
+          <a:lstStyle/>
+          <a:p>
+            <a:pPr marL="0" indent="0">
+              <a:buNone/>
+            </a:pPr>
+            <a:r>
+              <a:rPr lang="en-US" sz="1300" i="1" dirty="0" err="1">
+                <a:solidFill>
+                  <a:srgbClr val="B0BEC5"/>
+                </a:solidFill>
+                <a:latin typeface="Calibri" pitchFamily="34" charset="0"/>
+                <a:cs typeface="Calibri" pitchFamily="34" charset="-120"/>
+              </a:rPr>
+              <a:t>Postazioni</a:t>
+            </a:r>
+            <a:r>
+              <a:rPr lang="en-US" sz="1300" i="1" dirty="0">
+                <a:solidFill>
+                  <a:srgbClr val="B0BEC5"/>
+                </a:solidFill>
+                <a:latin typeface="Calibri" pitchFamily="34" charset="0"/>
+                <a:cs typeface="Calibri" pitchFamily="34" charset="-120"/>
+              </a:rPr>
+              <a:t> con la </a:t>
+            </a:r>
+            <a:r>
+              <a:rPr lang="en-US" sz="1300" i="1" dirty="0" err="1">
+                <a:solidFill>
+                  <a:srgbClr val="B0BEC5"/>
+                </a:solidFill>
+                <a:latin typeface="Calibri" pitchFamily="34" charset="0"/>
+                <a:cs typeface="Calibri" pitchFamily="34" charset="-120"/>
+              </a:rPr>
+              <a:t>maggior</a:t>
+            </a:r>
+            <a:r>
+              <a:rPr lang="en-US" sz="1300" i="1" dirty="0">
+                <a:solidFill>
+                  <a:srgbClr val="B0BEC5"/>
+                </a:solidFill>
+                <a:latin typeface="Calibri" pitchFamily="34" charset="0"/>
+                <a:cs typeface="Calibri" pitchFamily="34" charset="-120"/>
+              </a:rPr>
+              <a:t> </a:t>
+            </a:r>
+            <a:r>
+              <a:rPr lang="en-US" sz="1300" i="1" dirty="0" err="1">
+                <a:solidFill>
+                  <a:srgbClr val="B0BEC5"/>
+                </a:solidFill>
+                <a:latin typeface="Calibri" pitchFamily="34" charset="0"/>
+                <a:cs typeface="Calibri" pitchFamily="34" charset="-120"/>
+              </a:rPr>
+              <a:t>percentaule</a:t>
+            </a:r>
+            <a:r>
+              <a:rPr lang="en-US" sz="1300" i="1" dirty="0">
+                <a:solidFill>
+                  <a:srgbClr val="B0BEC5"/>
+                </a:solidFill>
+                <a:latin typeface="Calibri" pitchFamily="34" charset="0"/>
+                <a:cs typeface="Calibri" pitchFamily="34" charset="-120"/>
+              </a:rPr>
+              <a:t> di </a:t>
+            </a:r>
+            <a:r>
+              <a:rPr lang="en-US" sz="1300" i="1" dirty="0" err="1">
+                <a:solidFill>
+                  <a:srgbClr val="B0BEC5"/>
+                </a:solidFill>
+                <a:latin typeface="Calibri" pitchFamily="34" charset="0"/>
+                <a:cs typeface="Calibri" pitchFamily="34" charset="-120"/>
+              </a:rPr>
+              <a:t>infrazioni</a:t>
+            </a:r>
+            <a:r>
+              <a:rPr lang="en-US" sz="1300" i="1" dirty="0">
+                <a:solidFill>
+                  <a:srgbClr val="B0BEC5"/>
+                </a:solidFill>
+                <a:latin typeface="Calibri" pitchFamily="34" charset="0"/>
+                <a:cs typeface="Calibri" pitchFamily="34" charset="-120"/>
+              </a:rPr>
+              <a:t> (</a:t>
+            </a:r>
+            <a:r>
+              <a:rPr lang="en-US" sz="1300" i="1" dirty="0" err="1">
+                <a:solidFill>
+                  <a:srgbClr val="B0BEC5"/>
+                </a:solidFill>
+                <a:latin typeface="Calibri" pitchFamily="34" charset="0"/>
+                <a:cs typeface="Calibri" pitchFamily="34" charset="-120"/>
+              </a:rPr>
+              <a:t>percentuale</a:t>
+            </a:r>
+            <a:r>
+              <a:rPr lang="en-US" sz="1300" i="1" dirty="0">
+                <a:solidFill>
+                  <a:srgbClr val="B0BEC5"/>
+                </a:solidFill>
+                <a:latin typeface="Calibri" pitchFamily="34" charset="0"/>
+                <a:cs typeface="Calibri" pitchFamily="34" charset="-120"/>
+              </a:rPr>
+              <a:t> </a:t>
+            </a:r>
+            <a:r>
+              <a:rPr lang="en-US" sz="1300" i="1" dirty="0" err="1">
+                <a:solidFill>
+                  <a:srgbClr val="B0BEC5"/>
+                </a:solidFill>
+                <a:latin typeface="Calibri" pitchFamily="34" charset="0"/>
+                <a:cs typeface="Calibri" pitchFamily="34" charset="-120"/>
+              </a:rPr>
+              <a:t>calcolata</a:t>
+            </a:r>
+            <a:r>
+              <a:rPr lang="en-US" sz="1300" i="1" dirty="0">
+                <a:solidFill>
+                  <a:srgbClr val="B0BEC5"/>
+                </a:solidFill>
+                <a:latin typeface="Calibri" pitchFamily="34" charset="0"/>
+                <a:cs typeface="Calibri" pitchFamily="34" charset="-120"/>
+              </a:rPr>
+              <a:t> </a:t>
+            </a:r>
+            <a:r>
+              <a:rPr lang="en-US" sz="1300" i="1" dirty="0" err="1">
+                <a:solidFill>
+                  <a:srgbClr val="B0BEC5"/>
+                </a:solidFill>
+                <a:latin typeface="Calibri" pitchFamily="34" charset="0"/>
+                <a:cs typeface="Calibri" pitchFamily="34" charset="-120"/>
+              </a:rPr>
+              <a:t>manualmente</a:t>
+            </a:r>
+            <a:r>
+              <a:rPr lang="en-US" sz="1300" i="1" dirty="0">
+                <a:solidFill>
+                  <a:srgbClr val="B0BEC5"/>
+                </a:solidFill>
+                <a:latin typeface="Calibri" pitchFamily="34" charset="0"/>
+                <a:cs typeface="Calibri" pitchFamily="34" charset="-120"/>
+              </a:rPr>
+              <a:t>).</a:t>
+            </a:r>
+            <a:endParaRPr lang="en-US" sz="1300" dirty="0"/>
+          </a:p>
+        </p:txBody>
+      </p:sp>
+      <p:sp>
+        <p:nvSpPr>
+          <p:cNvPr id="5" name="Shape 3">
+            <a:extLst>
+              <a:ext uri="{FF2B5EF4-FFF2-40B4-BE49-F238E27FC236}">
+                <a16:creationId xmlns:a16="http://schemas.microsoft.com/office/drawing/2014/main" id="{FD171DA1-8464-6271-D6E1-B9A146D97557}"/>
+              </a:ext>
+            </a:extLst>
+          </p:cNvPr>
+          <p:cNvSpPr/>
+          <p:nvPr/>
+        </p:nvSpPr>
+        <p:spPr>
+          <a:xfrm>
+            <a:off x="365760" y="1234440"/>
+            <a:ext cx="8503920" cy="3611880"/>
+          </a:xfrm>
+          <a:prstGeom prst="rect">
+            <a:avLst/>
+          </a:prstGeom>
+          <a:solidFill>
+            <a:srgbClr val="1E3057"/>
+          </a:solidFill>
+          <a:ln w="12700">
+            <a:solidFill>
+              <a:srgbClr val="2A4580"/>
+            </a:solidFill>
+            <a:prstDash val="solid"/>
+          </a:ln>
+        </p:spPr>
+        <p:txBody>
+          <a:bodyPr/>
+          <a:lstStyle/>
+          <a:p>
+            <a:endParaRPr lang="it-CH"/>
+          </a:p>
+        </p:txBody>
+      </p:sp>
+      <p:sp>
+        <p:nvSpPr>
+          <p:cNvPr id="6" name="Text 4">
+            <a:extLst>
+              <a:ext uri="{FF2B5EF4-FFF2-40B4-BE49-F238E27FC236}">
+                <a16:creationId xmlns:a16="http://schemas.microsoft.com/office/drawing/2014/main" id="{23888637-9B78-8EEB-70A3-742A0359F80B}"/>
+              </a:ext>
+            </a:extLst>
+          </p:cNvPr>
+          <p:cNvSpPr/>
+          <p:nvPr/>
+        </p:nvSpPr>
+        <p:spPr>
+          <a:xfrm>
+            <a:off x="365760" y="1234440"/>
+            <a:ext cx="8503920" cy="3611880"/>
+          </a:xfrm>
+          <a:prstGeom prst="rect">
+            <a:avLst/>
+          </a:prstGeom>
+          <a:noFill/>
+          <a:ln/>
+        </p:spPr>
+        <p:txBody>
+          <a:bodyPr wrap="square" lIns="0" tIns="0" rIns="0" bIns="0" rtlCol="0" anchor="ctr"/>
+          <a:lstStyle/>
+          <a:p>
+            <a:pPr marL="0" indent="0" algn="ctr">
+              <a:buNone/>
+            </a:pPr>
+            <a:r>
+              <a:rPr lang="en-US" sz="1400" dirty="0">
+                <a:solidFill>
+                  <a:srgbClr val="2A4580"/>
+                </a:solidFill>
+                <a:latin typeface="Calibri" pitchFamily="34" charset="0"/>
+                <a:ea typeface="Calibri" pitchFamily="34" charset="-122"/>
+                <a:cs typeface="Calibri" pitchFamily="34" charset="-120"/>
+              </a:rPr>
+              <a:t>[ grafico ]</a:t>
+            </a:r>
+            <a:endParaRPr lang="en-US" sz="1400" dirty="0"/>
+          </a:p>
+        </p:txBody>
+      </p:sp>
+      <p:pic>
+        <p:nvPicPr>
+          <p:cNvPr id="10" name="Picture 9">
+            <a:extLst>
+              <a:ext uri="{FF2B5EF4-FFF2-40B4-BE49-F238E27FC236}">
+                <a16:creationId xmlns:a16="http://schemas.microsoft.com/office/drawing/2014/main" id="{A52EB6B3-75C2-F253-BC7F-76BCD4A397E3}"/>
+              </a:ext>
+            </a:extLst>
+          </p:cNvPr>
+          <p:cNvPicPr>
+            <a:picLocks noChangeAspect="1"/>
+          </p:cNvPicPr>
+          <p:nvPr/>
+        </p:nvPicPr>
+        <p:blipFill>
+          <a:blip r:embed="rId3"/>
+          <a:stretch>
+            <a:fillRect/>
+          </a:stretch>
+        </p:blipFill>
+        <p:spPr>
+          <a:xfrm>
+            <a:off x="365760" y="1234441"/>
+            <a:ext cx="8503920" cy="3611879"/>
+          </a:xfrm>
+          <a:prstGeom prst="rect">
+            <a:avLst/>
+          </a:prstGeom>
+        </p:spPr>
+      </p:pic>
+    </p:spTree>
+    <p:extLst>
+      <p:ext uri="{BB962C8B-B14F-4D97-AF65-F5344CB8AC3E}">
+        <p14:creationId xmlns:p14="http://schemas.microsoft.com/office/powerpoint/2010/main" val="1247436540"/>
+      </p:ext>
+    </p:extLst>
+  </p:cSld>
+  <p:clrMapOvr>
+    <a:masterClrMapping/>
+  </p:clrMapOvr>
+</p:sld>
+</file>
+
+<file path=ppt/slides/slide5.xml><?xml version="1.0" encoding="utf-8"?>
 <p:sld xmlns:a="http://schemas.openxmlformats.org/drawingml/2006/main" xmlns:r="http://schemas.openxmlformats.org/officeDocument/2006/relationships" xmlns:p="http://schemas.openxmlformats.org/presentationml/2006/main">
   <p:cSld>
     <p:bg>
@@ -6865,7 +6990,7 @@
 </p:sld>
 </file>
 
-<file path=ppt/slides/slide5.xml><?xml version="1.0" encoding="utf-8"?>
+<file path=ppt/slides/slide6.xml><?xml version="1.0" encoding="utf-8"?>
 <p:sld xmlns:a="http://schemas.openxmlformats.org/drawingml/2006/main" xmlns:r="http://schemas.openxmlformats.org/officeDocument/2006/relationships" xmlns:p="http://schemas.openxmlformats.org/presentationml/2006/main">
   <p:cSld name="Slide 6">
     <p:bg>
@@ -7197,7 +7322,7 @@
 </p:sld>
 </file>
 
-<file path=ppt/slides/slide6.xml><?xml version="1.0" encoding="utf-8"?>
+<file path=ppt/slides/slide7.xml><?xml version="1.0" encoding="utf-8"?>
 <p:sld xmlns:a="http://schemas.openxmlformats.org/drawingml/2006/main" xmlns:r="http://schemas.openxmlformats.org/officeDocument/2006/relationships" xmlns:p="http://schemas.openxmlformats.org/presentationml/2006/main">
   <p:cSld>
     <p:bg>
@@ -7540,10 +7665,10 @@
       </p:sp>
       <p:pic>
         <p:nvPicPr>
-          <p:cNvPr id="15" name="Immagine 14">
+          <p:cNvPr id="17" name="Picture 16">
             <a:extLst>
               <a:ext uri="{FF2B5EF4-FFF2-40B4-BE49-F238E27FC236}">
-                <a16:creationId xmlns:a16="http://schemas.microsoft.com/office/drawing/2014/main" id="{5762F2DA-EE19-5F78-49A8-DA3EFAB02088}"/>
+                <a16:creationId xmlns:a16="http://schemas.microsoft.com/office/drawing/2014/main" id="{A14FB3EC-C4D5-9844-32EA-A63184D123CF}"/>
               </a:ext>
             </a:extLst>
           </p:cNvPr>
@@ -7560,8 +7685,8 @@
         </p:blipFill>
         <p:spPr>
           <a:xfrm>
-            <a:off x="365760" y="1234440"/>
-            <a:ext cx="8538994" cy="3611880"/>
+            <a:off x="365760" y="1234439"/>
+            <a:ext cx="8502163" cy="3611879"/>
           </a:xfrm>
           <a:prstGeom prst="rect">
             <a:avLst/>
@@ -7581,7 +7706,7 @@
 </p:sld>
 </file>
 
-<file path=ppt/slides/slide7.xml><?xml version="1.0" encoding="utf-8"?>
+<file path=ppt/slides/slide8.xml><?xml version="1.0" encoding="utf-8"?>
 <p:sld xmlns:a="http://schemas.openxmlformats.org/drawingml/2006/main" xmlns:r="http://schemas.openxmlformats.org/officeDocument/2006/relationships" xmlns:p="http://schemas.openxmlformats.org/presentationml/2006/main">
   <p:cSld>
     <p:bg>
@@ -7954,7 +8079,7 @@
 </p:sld>
 </file>
 
-<file path=ppt/slides/slide8.xml><?xml version="1.0" encoding="utf-8"?>
+<file path=ppt/slides/slide9.xml><?xml version="1.0" encoding="utf-8"?>
 <p:sld xmlns:a="http://schemas.openxmlformats.org/drawingml/2006/main" xmlns:r="http://schemas.openxmlformats.org/officeDocument/2006/relationships" xmlns:p="http://schemas.openxmlformats.org/presentationml/2006/main">
   <p:cSld>
     <p:bg>
@@ -8366,10 +8491,10 @@
       </p:sp>
       <p:pic>
         <p:nvPicPr>
-          <p:cNvPr id="8" name="Immagine 7">
+          <p:cNvPr id="9" name="Picture 8">
             <a:extLst>
               <a:ext uri="{FF2B5EF4-FFF2-40B4-BE49-F238E27FC236}">
-                <a16:creationId xmlns:a16="http://schemas.microsoft.com/office/drawing/2014/main" id="{53C93D34-601C-CDD8-C82D-950B1F8474E7}"/>
+                <a16:creationId xmlns:a16="http://schemas.microsoft.com/office/drawing/2014/main" id="{874D61E9-49C7-C2FD-C1CA-624186EDD325}"/>
               </a:ext>
             </a:extLst>
           </p:cNvPr>
@@ -8386,8 +8511,8 @@
         </p:blipFill>
         <p:spPr>
           <a:xfrm>
-            <a:off x="365760" y="1234440"/>
-            <a:ext cx="8538994" cy="3611880"/>
+            <a:off x="365759" y="1216152"/>
+            <a:ext cx="8502163" cy="3630168"/>
           </a:xfrm>
           <a:prstGeom prst="rect">
             <a:avLst/>
@@ -8398,539 +8523,6 @@
     <p:extLst>
       <p:ext uri="{BB962C8B-B14F-4D97-AF65-F5344CB8AC3E}">
         <p14:creationId xmlns:p14="http://schemas.microsoft.com/office/powerpoint/2010/main" val="1364513434"/>
-      </p:ext>
-    </p:extLst>
-  </p:cSld>
-  <p:clrMapOvr>
-    <a:masterClrMapping/>
-  </p:clrMapOvr>
-</p:sld>
-</file>
-
-<file path=ppt/slides/slide9.xml><?xml version="1.0" encoding="utf-8"?>
-<p:sld xmlns:a="http://schemas.openxmlformats.org/drawingml/2006/main" xmlns:r="http://schemas.openxmlformats.org/officeDocument/2006/relationships" xmlns:p="http://schemas.openxmlformats.org/presentationml/2006/main">
-  <p:cSld>
-    <p:bg>
-      <p:bgPr>
-        <a:solidFill>
-          <a:srgbClr val="1A2744"/>
-        </a:solidFill>
-        <a:effectLst/>
-      </p:bgPr>
-    </p:bg>
-    <p:spTree>
-      <p:nvGrpSpPr>
-        <p:cNvPr id="1" name="">
-          <a:extLst>
-            <a:ext uri="{FF2B5EF4-FFF2-40B4-BE49-F238E27FC236}">
-              <a16:creationId xmlns:a16="http://schemas.microsoft.com/office/drawing/2014/main" id="{21A25298-A55A-1FED-C86C-F9056C36F89D}"/>
-            </a:ext>
-          </a:extLst>
-        </p:cNvPr>
-        <p:cNvGrpSpPr/>
-        <p:nvPr/>
-      </p:nvGrpSpPr>
-      <p:grpSpPr>
-        <a:xfrm>
-          <a:off x="0" y="0"/>
-          <a:ext cx="0" cy="0"/>
-          <a:chOff x="0" y="0"/>
-          <a:chExt cx="0" cy="0"/>
-        </a:xfrm>
-      </p:grpSpPr>
-      <p:sp>
-        <p:nvSpPr>
-          <p:cNvPr id="2" name="Shape 0">
-            <a:extLst>
-              <a:ext uri="{FF2B5EF4-FFF2-40B4-BE49-F238E27FC236}">
-                <a16:creationId xmlns:a16="http://schemas.microsoft.com/office/drawing/2014/main" id="{D93EA1D5-1D1A-94A8-2CF6-EB2ADEFCD302}"/>
-              </a:ext>
-            </a:extLst>
-          </p:cNvPr>
-          <p:cNvSpPr/>
-          <p:nvPr/>
-        </p:nvSpPr>
-        <p:spPr>
-          <a:xfrm>
-            <a:off x="0" y="0"/>
-            <a:ext cx="164592" cy="5143500"/>
-          </a:xfrm>
-          <a:prstGeom prst="rect">
-            <a:avLst/>
-          </a:prstGeom>
-          <a:solidFill>
-            <a:srgbClr val="00B4D8"/>
-          </a:solidFill>
-          <a:ln w="12700">
-            <a:solidFill>
-              <a:srgbClr val="00B4D8"/>
-            </a:solidFill>
-            <a:prstDash val="solid"/>
-          </a:ln>
-        </p:spPr>
-        <p:txBody>
-          <a:bodyPr/>
-          <a:lstStyle/>
-          <a:p>
-            <a:endParaRPr lang="it-CH"/>
-          </a:p>
-        </p:txBody>
-      </p:sp>
-      <p:sp>
-        <p:nvSpPr>
-          <p:cNvPr id="3" name="Text 1">
-            <a:extLst>
-              <a:ext uri="{FF2B5EF4-FFF2-40B4-BE49-F238E27FC236}">
-                <a16:creationId xmlns:a16="http://schemas.microsoft.com/office/drawing/2014/main" id="{B7C0276C-26E0-D041-AC9F-5E445CA19F67}"/>
-              </a:ext>
-            </a:extLst>
-          </p:cNvPr>
-          <p:cNvSpPr/>
-          <p:nvPr/>
-        </p:nvSpPr>
-        <p:spPr>
-          <a:xfrm>
-            <a:off x="365760" y="164592"/>
-            <a:ext cx="8412480" cy="548640"/>
-          </a:xfrm>
-          <a:prstGeom prst="rect">
-            <a:avLst/>
-          </a:prstGeom>
-          <a:noFill/>
-          <a:ln/>
-        </p:spPr>
-        <p:txBody>
-          <a:bodyPr wrap="square" lIns="0" tIns="0" rIns="0" bIns="0" rtlCol="0" anchor="ctr"/>
-          <a:lstStyle/>
-          <a:p>
-            <a:pPr marL="0" indent="0">
-              <a:buNone/>
-            </a:pPr>
-            <a:r>
-              <a:rPr lang="en-US" sz="2200" b="1" dirty="0" err="1">
-                <a:solidFill>
-                  <a:srgbClr val="00B4D8"/>
-                </a:solidFill>
-                <a:latin typeface="Calibri" pitchFamily="34" charset="0"/>
-                <a:cs typeface="Calibri" pitchFamily="34" charset="-120"/>
-              </a:rPr>
-              <a:t>Pirati</a:t>
-            </a:r>
-            <a:r>
-              <a:rPr lang="en-US" sz="2200" b="1" dirty="0">
-                <a:solidFill>
-                  <a:srgbClr val="00B4D8"/>
-                </a:solidFill>
-                <a:latin typeface="Calibri" pitchFamily="34" charset="0"/>
-                <a:cs typeface="Calibri" pitchFamily="34" charset="-120"/>
-              </a:rPr>
-              <a:t> della notte, </a:t>
-            </a:r>
-            <a:r>
-              <a:rPr lang="en-US" sz="2200" b="1" dirty="0" err="1">
-                <a:solidFill>
-                  <a:srgbClr val="00B4D8"/>
-                </a:solidFill>
-                <a:latin typeface="Calibri" pitchFamily="34" charset="0"/>
-                <a:cs typeface="Calibri" pitchFamily="34" charset="-120"/>
-              </a:rPr>
-              <a:t>infrazioni</a:t>
-            </a:r>
-            <a:r>
-              <a:rPr lang="en-US" sz="2200" b="1" dirty="0">
-                <a:solidFill>
-                  <a:srgbClr val="00B4D8"/>
-                </a:solidFill>
-                <a:latin typeface="Calibri" pitchFamily="34" charset="0"/>
-                <a:cs typeface="Calibri" pitchFamily="34" charset="-120"/>
-              </a:rPr>
-              <a:t> </a:t>
-            </a:r>
-            <a:r>
-              <a:rPr lang="en-US" sz="2200" b="1" dirty="0" err="1">
-                <a:solidFill>
-                  <a:srgbClr val="00B4D8"/>
-                </a:solidFill>
-                <a:latin typeface="Calibri" pitchFamily="34" charset="0"/>
-                <a:cs typeface="Calibri" pitchFamily="34" charset="-120"/>
-              </a:rPr>
-              <a:t>su</a:t>
-            </a:r>
-            <a:r>
-              <a:rPr lang="en-US" sz="2200" b="1" dirty="0">
-                <a:solidFill>
-                  <a:srgbClr val="00B4D8"/>
-                </a:solidFill>
-                <a:latin typeface="Calibri" pitchFamily="34" charset="0"/>
-                <a:cs typeface="Calibri" pitchFamily="34" charset="-120"/>
-              </a:rPr>
-              <a:t> </a:t>
-            </a:r>
-            <a:r>
-              <a:rPr lang="en-US" sz="2200" b="1" dirty="0" err="1">
-                <a:solidFill>
-                  <a:srgbClr val="00B4D8"/>
-                </a:solidFill>
-                <a:latin typeface="Calibri" pitchFamily="34" charset="0"/>
-                <a:cs typeface="Calibri" pitchFamily="34" charset="-120"/>
-              </a:rPr>
-              <a:t>strade</a:t>
-            </a:r>
-            <a:r>
-              <a:rPr lang="en-US" sz="2200" b="1" dirty="0">
-                <a:solidFill>
-                  <a:srgbClr val="00B4D8"/>
-                </a:solidFill>
-                <a:latin typeface="Calibri" pitchFamily="34" charset="0"/>
-                <a:cs typeface="Calibri" pitchFamily="34" charset="-120"/>
-              </a:rPr>
-              <a:t> ad </a:t>
-            </a:r>
-            <a:r>
-              <a:rPr lang="en-US" sz="2200" b="1" dirty="0" err="1">
-                <a:solidFill>
-                  <a:srgbClr val="00B4D8"/>
-                </a:solidFill>
-                <a:latin typeface="Calibri" pitchFamily="34" charset="0"/>
-                <a:cs typeface="Calibri" pitchFamily="34" charset="-120"/>
-              </a:rPr>
-              <a:t>alta</a:t>
-            </a:r>
-            <a:r>
-              <a:rPr lang="en-US" sz="2200" b="1" dirty="0">
-                <a:solidFill>
-                  <a:srgbClr val="00B4D8"/>
-                </a:solidFill>
-                <a:latin typeface="Calibri" pitchFamily="34" charset="0"/>
-                <a:cs typeface="Calibri" pitchFamily="34" charset="-120"/>
-              </a:rPr>
-              <a:t> </a:t>
-            </a:r>
-            <a:r>
-              <a:rPr lang="en-US" sz="2200" b="1" dirty="0" err="1">
-                <a:solidFill>
-                  <a:srgbClr val="00B4D8"/>
-                </a:solidFill>
-                <a:latin typeface="Calibri" pitchFamily="34" charset="0"/>
-                <a:cs typeface="Calibri" pitchFamily="34" charset="-120"/>
-              </a:rPr>
-              <a:t>velocità</a:t>
-            </a:r>
-            <a:endParaRPr lang="en-US" sz="2200" dirty="0"/>
-          </a:p>
-        </p:txBody>
-      </p:sp>
-      <p:sp>
-        <p:nvSpPr>
-          <p:cNvPr id="4" name="Text 2">
-            <a:extLst>
-              <a:ext uri="{FF2B5EF4-FFF2-40B4-BE49-F238E27FC236}">
-                <a16:creationId xmlns:a16="http://schemas.microsoft.com/office/drawing/2014/main" id="{1DFAD001-EFCE-2644-2C87-7944626ABECD}"/>
-              </a:ext>
-            </a:extLst>
-          </p:cNvPr>
-          <p:cNvSpPr/>
-          <p:nvPr/>
-        </p:nvSpPr>
-        <p:spPr>
-          <a:xfrm>
-            <a:off x="365760" y="804672"/>
-            <a:ext cx="8412480" cy="320040"/>
-          </a:xfrm>
-          <a:prstGeom prst="rect">
-            <a:avLst/>
-          </a:prstGeom>
-          <a:noFill/>
-          <a:ln/>
-        </p:spPr>
-        <p:txBody>
-          <a:bodyPr wrap="square" lIns="0" tIns="0" rIns="0" bIns="0" rtlCol="0" anchor="ctr"/>
-          <a:lstStyle/>
-          <a:p>
-            <a:pPr marL="0" indent="0">
-              <a:buNone/>
-            </a:pPr>
-            <a:r>
-              <a:rPr lang="en-US" sz="1300" i="1" dirty="0" err="1">
-                <a:solidFill>
-                  <a:srgbClr val="B0BEC5"/>
-                </a:solidFill>
-                <a:latin typeface="Calibri" pitchFamily="34" charset="0"/>
-                <a:cs typeface="Calibri" pitchFamily="34" charset="-120"/>
-              </a:rPr>
-              <a:t>Infrazioni</a:t>
-            </a:r>
-            <a:r>
-              <a:rPr lang="en-US" sz="1300" i="1" dirty="0">
-                <a:solidFill>
-                  <a:srgbClr val="B0BEC5"/>
-                </a:solidFill>
-                <a:latin typeface="Calibri" pitchFamily="34" charset="0"/>
-                <a:cs typeface="Calibri" pitchFamily="34" charset="-120"/>
-              </a:rPr>
-              <a:t> </a:t>
-            </a:r>
-            <a:r>
-              <a:rPr lang="en-US" sz="1300" i="1" dirty="0" err="1">
-                <a:solidFill>
-                  <a:srgbClr val="B0BEC5"/>
-                </a:solidFill>
-                <a:latin typeface="Calibri" pitchFamily="34" charset="0"/>
-                <a:cs typeface="Calibri" pitchFamily="34" charset="-120"/>
-              </a:rPr>
-              <a:t>su</a:t>
-            </a:r>
-            <a:r>
-              <a:rPr lang="en-US" sz="1300" i="1" dirty="0">
-                <a:solidFill>
-                  <a:srgbClr val="B0BEC5"/>
-                </a:solidFill>
-                <a:latin typeface="Calibri" pitchFamily="34" charset="0"/>
-                <a:cs typeface="Calibri" pitchFamily="34" charset="-120"/>
-              </a:rPr>
-              <a:t> </a:t>
-            </a:r>
-            <a:r>
-              <a:rPr lang="en-US" sz="1300" i="1" dirty="0" err="1">
-                <a:solidFill>
-                  <a:srgbClr val="B0BEC5"/>
-                </a:solidFill>
-                <a:latin typeface="Calibri" pitchFamily="34" charset="0"/>
-                <a:cs typeface="Calibri" pitchFamily="34" charset="-120"/>
-              </a:rPr>
-              <a:t>strade</a:t>
-            </a:r>
-            <a:r>
-              <a:rPr lang="en-US" sz="1300" i="1" dirty="0">
-                <a:solidFill>
-                  <a:srgbClr val="B0BEC5"/>
-                </a:solidFill>
-                <a:latin typeface="Calibri" pitchFamily="34" charset="0"/>
-                <a:cs typeface="Calibri" pitchFamily="34" charset="-120"/>
-              </a:rPr>
-              <a:t> ad </a:t>
-            </a:r>
-            <a:r>
-              <a:rPr lang="en-US" sz="1300" i="1" dirty="0" err="1">
-                <a:solidFill>
-                  <a:srgbClr val="B0BEC5"/>
-                </a:solidFill>
-                <a:latin typeface="Calibri" pitchFamily="34" charset="0"/>
-                <a:cs typeface="Calibri" pitchFamily="34" charset="-120"/>
-              </a:rPr>
-              <a:t>alta</a:t>
-            </a:r>
-            <a:r>
-              <a:rPr lang="en-US" sz="1300" i="1" dirty="0">
-                <a:solidFill>
-                  <a:srgbClr val="B0BEC5"/>
-                </a:solidFill>
-                <a:latin typeface="Calibri" pitchFamily="34" charset="0"/>
-                <a:cs typeface="Calibri" pitchFamily="34" charset="-120"/>
-              </a:rPr>
-              <a:t> </a:t>
-            </a:r>
-            <a:r>
-              <a:rPr lang="en-US" sz="1300" i="1" dirty="0" err="1">
-                <a:solidFill>
-                  <a:srgbClr val="B0BEC5"/>
-                </a:solidFill>
-                <a:latin typeface="Calibri" pitchFamily="34" charset="0"/>
-                <a:cs typeface="Calibri" pitchFamily="34" charset="-120"/>
-              </a:rPr>
-              <a:t>velocità</a:t>
-            </a:r>
-            <a:r>
-              <a:rPr lang="en-US" sz="1300" i="1" dirty="0">
-                <a:solidFill>
-                  <a:srgbClr val="B0BEC5"/>
-                </a:solidFill>
-                <a:latin typeface="Calibri" pitchFamily="34" charset="0"/>
-                <a:cs typeface="Calibri" pitchFamily="34" charset="-120"/>
-              </a:rPr>
-              <a:t> (50, 60, 80)</a:t>
-            </a:r>
-            <a:r>
-              <a:rPr lang="en-US" sz="1300" i="1" dirty="0" err="1">
-                <a:solidFill>
-                  <a:srgbClr val="B0BEC5"/>
-                </a:solidFill>
-                <a:latin typeface="Calibri" pitchFamily="34" charset="0"/>
-                <a:cs typeface="Calibri" pitchFamily="34" charset="-120"/>
-              </a:rPr>
-              <a:t>kmh</a:t>
-            </a:r>
-            <a:r>
-              <a:rPr lang="en-US" sz="1300" i="1" dirty="0">
-                <a:solidFill>
-                  <a:srgbClr val="B0BEC5"/>
-                </a:solidFill>
-                <a:latin typeface="Calibri" pitchFamily="34" charset="0"/>
-                <a:cs typeface="Calibri" pitchFamily="34" charset="-120"/>
-              </a:rPr>
-              <a:t>, </a:t>
-            </a:r>
-            <a:r>
-              <a:rPr lang="en-US" sz="1300" i="1" dirty="0" err="1">
-                <a:solidFill>
-                  <a:srgbClr val="B0BEC5"/>
-                </a:solidFill>
-                <a:latin typeface="Calibri" pitchFamily="34" charset="0"/>
-                <a:cs typeface="Calibri" pitchFamily="34" charset="-120"/>
-              </a:rPr>
-              <a:t>nelle</a:t>
-            </a:r>
-            <a:r>
-              <a:rPr lang="en-US" sz="1300" i="1" dirty="0">
-                <a:solidFill>
-                  <a:srgbClr val="B0BEC5"/>
-                </a:solidFill>
-                <a:latin typeface="Calibri" pitchFamily="34" charset="0"/>
-                <a:cs typeface="Calibri" pitchFamily="34" charset="-120"/>
-              </a:rPr>
-              <a:t> ore </a:t>
-            </a:r>
-            <a:r>
-              <a:rPr lang="en-US" sz="1300" i="1" dirty="0" err="1">
-                <a:solidFill>
-                  <a:srgbClr val="B0BEC5"/>
-                </a:solidFill>
-                <a:latin typeface="Calibri" pitchFamily="34" charset="0"/>
-                <a:cs typeface="Calibri" pitchFamily="34" charset="-120"/>
-              </a:rPr>
-              <a:t>notturne</a:t>
-            </a:r>
-            <a:r>
-              <a:rPr lang="en-US" sz="1300" i="1" dirty="0">
-                <a:solidFill>
-                  <a:srgbClr val="B0BEC5"/>
-                </a:solidFill>
-                <a:latin typeface="Calibri" pitchFamily="34" charset="0"/>
-                <a:cs typeface="Calibri" pitchFamily="34" charset="-120"/>
-              </a:rPr>
-              <a:t> (22:00-5:00)</a:t>
-            </a:r>
-            <a:endParaRPr lang="en-US" sz="1300" dirty="0"/>
-          </a:p>
-        </p:txBody>
-      </p:sp>
-      <p:sp>
-        <p:nvSpPr>
-          <p:cNvPr id="5" name="Shape 3">
-            <a:extLst>
-              <a:ext uri="{FF2B5EF4-FFF2-40B4-BE49-F238E27FC236}">
-                <a16:creationId xmlns:a16="http://schemas.microsoft.com/office/drawing/2014/main" id="{989CCD95-2381-C8D3-273C-50604454E15D}"/>
-              </a:ext>
-            </a:extLst>
-          </p:cNvPr>
-          <p:cNvSpPr/>
-          <p:nvPr/>
-        </p:nvSpPr>
-        <p:spPr>
-          <a:xfrm>
-            <a:off x="365760" y="1234440"/>
-            <a:ext cx="8503920" cy="3611880"/>
-          </a:xfrm>
-          <a:prstGeom prst="rect">
-            <a:avLst/>
-          </a:prstGeom>
-          <a:solidFill>
-            <a:srgbClr val="1E3057"/>
-          </a:solidFill>
-          <a:ln w="12700">
-            <a:solidFill>
-              <a:srgbClr val="2A4580"/>
-            </a:solidFill>
-            <a:prstDash val="solid"/>
-          </a:ln>
-        </p:spPr>
-        <p:txBody>
-          <a:bodyPr/>
-          <a:lstStyle/>
-          <a:p>
-            <a:endParaRPr lang="it-CH"/>
-          </a:p>
-        </p:txBody>
-      </p:sp>
-      <p:sp>
-        <p:nvSpPr>
-          <p:cNvPr id="6" name="Text 4">
-            <a:extLst>
-              <a:ext uri="{FF2B5EF4-FFF2-40B4-BE49-F238E27FC236}">
-                <a16:creationId xmlns:a16="http://schemas.microsoft.com/office/drawing/2014/main" id="{879485CC-06E1-5572-ADB3-C07D24B4E4C5}"/>
-              </a:ext>
-            </a:extLst>
-          </p:cNvPr>
-          <p:cNvSpPr/>
-          <p:nvPr/>
-        </p:nvSpPr>
-        <p:spPr>
-          <a:xfrm>
-            <a:off x="365760" y="1234440"/>
-            <a:ext cx="8503920" cy="3611880"/>
-          </a:xfrm>
-          <a:prstGeom prst="rect">
-            <a:avLst/>
-          </a:prstGeom>
-          <a:noFill/>
-          <a:ln/>
-        </p:spPr>
-        <p:txBody>
-          <a:bodyPr wrap="square" lIns="0" tIns="0" rIns="0" bIns="0" rtlCol="0" anchor="ctr"/>
-          <a:lstStyle/>
-          <a:p>
-            <a:pPr marL="0" indent="0" algn="ctr">
-              <a:buNone/>
-            </a:pPr>
-            <a:r>
-              <a:rPr lang="en-US" sz="1400" dirty="0">
-                <a:solidFill>
-                  <a:srgbClr val="2A4580"/>
-                </a:solidFill>
-                <a:latin typeface="Calibri" pitchFamily="34" charset="0"/>
-                <a:ea typeface="Calibri" pitchFamily="34" charset="-122"/>
-                <a:cs typeface="Calibri" pitchFamily="34" charset="-120"/>
-              </a:rPr>
-              <a:t>[ grafico ]</a:t>
-            </a:r>
-            <a:endParaRPr lang="en-US" sz="1400" dirty="0"/>
-          </a:p>
-        </p:txBody>
-      </p:sp>
-      <p:pic>
-        <p:nvPicPr>
-          <p:cNvPr id="8" name="Picture 7">
-            <a:extLst>
-              <a:ext uri="{FF2B5EF4-FFF2-40B4-BE49-F238E27FC236}">
-                <a16:creationId xmlns:a16="http://schemas.microsoft.com/office/drawing/2014/main" id="{F1EF832D-21E9-06C7-505D-F6A93D1E4677}"/>
-              </a:ext>
-            </a:extLst>
-          </p:cNvPr>
-          <p:cNvPicPr>
-            <a:picLocks noChangeAspect="1"/>
-          </p:cNvPicPr>
-          <p:nvPr/>
-        </p:nvPicPr>
-        <p:blipFill>
-          <a:blip r:embed="rId3"/>
-          <a:stretch>
-            <a:fillRect/>
-          </a:stretch>
-        </p:blipFill>
-        <p:spPr>
-          <a:xfrm>
-            <a:off x="365760" y="1443037"/>
-            <a:ext cx="8504962" cy="3194685"/>
-          </a:xfrm>
-          <a:prstGeom prst="rect">
-            <a:avLst/>
-          </a:prstGeom>
-        </p:spPr>
-      </p:pic>
-    </p:spTree>
-    <p:extLst>
-      <p:ext uri="{BB962C8B-B14F-4D97-AF65-F5344CB8AC3E}">
-        <p14:creationId xmlns:p14="http://schemas.microsoft.com/office/powerpoint/2010/main" val="2272597280"/>
       </p:ext>
     </p:extLst>
   </p:cSld>

--- a/speed_monitoring.pptx
+++ b/speed_monitoring.pptx
@@ -291,6 +291,12 @@
           <a:bodyPr/>
           <a:lstStyle/>
           <a:p>
+            <a:r>
+              <a:rPr lang="en-US" dirty="0"/>
+              <a:t>Andrea</a:t>
+            </a:r>
+          </a:p>
+          <a:p>
             <a:endParaRPr lang="en-US" dirty="0"/>
           </a:p>
         </p:txBody>
@@ -394,59 +400,46 @@
           <a:lstStyle/>
           <a:p>
             <a:r>
-              <a:rPr lang="it-CH" b="1" dirty="0"/>
-              <a:t>Domanda di ricerca:</a:t>
-            </a:r>
-            <a:r>
               <a:rPr lang="it-CH" dirty="0"/>
-              <a:t> Un maggior volume di traffico comporta un tasso più alto di infrazioni?</a:t>
-            </a:r>
-          </a:p>
-          <a:p>
-            <a:r>
-              <a:rPr lang="it-CH" b="1" dirty="0"/>
-              <a:t>Visualizzazione:</a:t>
-            </a:r>
+              <a:t>Maruh</a:t>
+            </a:r>
+          </a:p>
+          <a:p>
             <a:endParaRPr lang="it-CH" dirty="0"/>
           </a:p>
           <a:p>
-            <a:pPr lvl="1"/>
-            <a:r>
-              <a:rPr lang="it-CH" b="1" dirty="0"/>
-              <a:t>Dimensione:</a:t>
-            </a:r>
-            <a:r>
-              <a:rPr lang="it-CH" dirty="0"/>
-              <a:t> Volume di traffico medio.</a:t>
-            </a:r>
-          </a:p>
-          <a:p>
-            <a:pPr lvl="1"/>
-            <a:r>
-              <a:rPr lang="it-CH" b="1" dirty="0"/>
-              <a:t>Colore:</a:t>
-            </a:r>
-            <a:r>
-              <a:rPr lang="it-CH" dirty="0"/>
-              <a:t> Tasso di infrazione (%).</a:t>
-            </a:r>
-          </a:p>
-          <a:p>
-            <a:r>
-              <a:rPr lang="it-CH" b="1" dirty="0"/>
-              <a:t>Data Processing:</a:t>
-            </a:r>
-            <a:r>
-              <a:rPr lang="it-CH" dirty="0"/>
-              <a:t> * Creazione di una colonna booleana per identificare i superamenti del limite.</a:t>
-            </a:r>
-          </a:p>
-          <a:p>
-            <a:pPr lvl="1"/>
-            <a:r>
-              <a:rPr lang="it-CH" dirty="0"/>
-              <a:t>Aggregazione dei dati per postazione (latitudine/longitudine) per calcolare transiti totali e infrazioni effettive.</a:t>
-            </a:r>
+            <a:pPr marL="0" marR="0" lvl="0" indent="0" algn="l" defTabSz="914400" rtl="0" eaLnBrk="1" fontAlgn="auto" latinLnBrk="0" hangingPunct="1">
+              <a:lnSpc>
+                <a:spcPct val="100000"/>
+              </a:lnSpc>
+              <a:spcBef>
+                <a:spcPts val="0"/>
+              </a:spcBef>
+              <a:spcAft>
+                <a:spcPts val="0"/>
+              </a:spcAft>
+              <a:buClrTx/>
+              <a:buSzTx/>
+              <a:buFontTx/>
+              <a:buNone/>
+              <a:tabLst/>
+              <a:defRPr/>
+            </a:pPr>
+            <a:r>
+              <a:rPr lang="it-CH" sz="1200" b="0" kern="1200" dirty="0">
+                <a:solidFill>
+                  <a:schemeClr val="tx1"/>
+                </a:solidFill>
+                <a:effectLst/>
+                <a:latin typeface="+mn-lt"/>
+                <a:ea typeface="+mn-ea"/>
+                <a:cs typeface="+mn-cs"/>
+              </a:rPr>
+              <a:t>Il grafico mostra un evidente pattern a diagonale, indicando un'attivazione sequenziale dei radar nel tempo. Questo suggerisce che le postazioni non operano simultaneamente, ma vengono spostate o attivate a rotazione mese dopo mese.</a:t>
+            </a:r>
+          </a:p>
+          <a:p>
+            <a:endParaRPr lang="it-CH" dirty="0"/>
           </a:p>
         </p:txBody>
       </p:sp>
@@ -620,6 +613,10 @@
           <a:bodyPr/>
           <a:lstStyle/>
           <a:p>
+            <a:r>
+              <a:rPr lang="en-US" dirty="0" err="1"/>
+              <a:t>andrea</a:t>
+            </a:r>
             <a:endParaRPr lang="en-US" dirty="0"/>
           </a:p>
         </p:txBody>
@@ -704,6 +701,10 @@
           <a:bodyPr/>
           <a:lstStyle/>
           <a:p>
+            <a:r>
+              <a:rPr lang="en-US" dirty="0" err="1"/>
+              <a:t>andrea</a:t>
+            </a:r>
             <a:endParaRPr lang="en-US" dirty="0"/>
           </a:p>
         </p:txBody>
@@ -806,7 +807,110 @@
           <a:bodyPr/>
           <a:lstStyle/>
           <a:p>
+            <a:r>
+              <a:rPr lang="en-US" dirty="0" err="1"/>
+              <a:t>Maruh</a:t>
+            </a:r>
             <a:endParaRPr lang="en-US" dirty="0"/>
+          </a:p>
+          <a:p>
+            <a:endParaRPr lang="en-US" dirty="0"/>
+          </a:p>
+          <a:p>
+            <a:pPr marL="0" marR="0" lvl="0" indent="0" algn="l" defTabSz="914400" rtl="0" eaLnBrk="1" fontAlgn="auto" latinLnBrk="0" hangingPunct="1">
+              <a:lnSpc>
+                <a:spcPct val="100000"/>
+              </a:lnSpc>
+              <a:spcBef>
+                <a:spcPts val="0"/>
+              </a:spcBef>
+              <a:spcAft>
+                <a:spcPts val="0"/>
+              </a:spcAft>
+              <a:buClrTx/>
+              <a:buSzTx/>
+              <a:buFontTx/>
+              <a:buNone/>
+              <a:tabLst/>
+              <a:defRPr/>
+            </a:pPr>
+            <a:r>
+              <a:rPr lang="it-CH" sz="1200" b="0" kern="1200" dirty="0">
+                <a:solidFill>
+                  <a:schemeClr val="tx1"/>
+                </a:solidFill>
+                <a:effectLst/>
+                <a:latin typeface="+mn-lt"/>
+                <a:ea typeface="+mn-ea"/>
+                <a:cs typeface="+mn-cs"/>
+              </a:rPr>
+              <a:t>calcolato manualmente senza usare la colonna gia presente nel dataset, magari diverso per la tolleranza.</a:t>
+            </a:r>
+          </a:p>
+          <a:p>
+            <a:endParaRPr lang="en-US" dirty="0"/>
+          </a:p>
+          <a:p>
+            <a:r>
+              <a:rPr lang="en-US" dirty="0"/>
+              <a:t>Visto </a:t>
+            </a:r>
+            <a:r>
+              <a:rPr lang="en-US" dirty="0" err="1"/>
+              <a:t>che</a:t>
+            </a:r>
+            <a:r>
+              <a:rPr lang="en-US" dirty="0"/>
+              <a:t> </a:t>
+            </a:r>
+            <a:r>
+              <a:rPr lang="en-US" dirty="0" err="1"/>
+              <a:t>sembrava</a:t>
+            </a:r>
+            <a:r>
+              <a:rPr lang="en-US" dirty="0"/>
+              <a:t> </a:t>
+            </a:r>
+            <a:r>
+              <a:rPr lang="en-US" dirty="0" err="1"/>
+              <a:t>strano</a:t>
+            </a:r>
+            <a:r>
+              <a:rPr lang="en-US" dirty="0"/>
+              <a:t> 80% ho </a:t>
+            </a:r>
+            <a:r>
+              <a:rPr lang="en-US" dirty="0" err="1"/>
+              <a:t>filtrato</a:t>
+            </a:r>
+            <a:r>
+              <a:rPr lang="en-US" dirty="0"/>
+              <a:t> solo le </a:t>
+            </a:r>
+            <a:r>
+              <a:rPr lang="en-US" dirty="0" err="1"/>
+              <a:t>strade</a:t>
+            </a:r>
+            <a:r>
+              <a:rPr lang="en-US" dirty="0"/>
+              <a:t> con </a:t>
+            </a:r>
+            <a:r>
+              <a:rPr lang="en-US" dirty="0" err="1"/>
+              <a:t>almeno</a:t>
+            </a:r>
+            <a:r>
+              <a:rPr lang="en-US" dirty="0"/>
+              <a:t> 1000 </a:t>
+            </a:r>
+            <a:r>
+              <a:rPr lang="en-US" dirty="0" err="1"/>
+              <a:t>registrazioni</a:t>
+            </a:r>
+            <a:r>
+              <a:rPr lang="en-US" dirty="0"/>
+              <a:t>.</a:t>
+            </a:r>
           </a:p>
         </p:txBody>
       </p:sp>
@@ -915,6 +1019,40 @@
           <a:lstStyle/>
           <a:p>
             <a:r>
+              <a:rPr lang="en-GB" sz="1200" kern="1200" dirty="0" err="1">
+                <a:solidFill>
+                  <a:schemeClr val="tx1"/>
+                </a:solidFill>
+                <a:effectLst/>
+                <a:latin typeface="+mn-lt"/>
+                <a:ea typeface="+mn-ea"/>
+                <a:cs typeface="+mn-cs"/>
+              </a:rPr>
+              <a:t>andrea</a:t>
+            </a:r>
+            <a:endParaRPr lang="en-GB" sz="1200" kern="1200" dirty="0">
+              <a:solidFill>
+                <a:schemeClr val="tx1"/>
+              </a:solidFill>
+              <a:effectLst/>
+              <a:latin typeface="+mn-lt"/>
+              <a:ea typeface="+mn-ea"/>
+              <a:cs typeface="+mn-cs"/>
+            </a:endParaRPr>
+          </a:p>
+          <a:p>
+            <a:endParaRPr lang="en-GB" sz="1200" kern="1200" dirty="0">
+              <a:solidFill>
+                <a:schemeClr val="tx1"/>
+              </a:solidFill>
+              <a:effectLst/>
+              <a:latin typeface="+mn-lt"/>
+              <a:ea typeface="+mn-ea"/>
+              <a:cs typeface="+mn-cs"/>
+            </a:endParaRPr>
+          </a:p>
+          <a:p>
+            <a:r>
               <a:rPr lang="en-GB" sz="1200" kern="1200" dirty="0">
                 <a:solidFill>
                   <a:schemeClr val="tx1"/>
@@ -1841,6 +1979,20 @@
           </a:p>
           <a:p>
             <a:endParaRPr lang="en-US" dirty="0"/>
+          </a:p>
+          <a:p>
+            <a:r>
+              <a:rPr lang="en-US" dirty="0"/>
+              <a:t>Linea </a:t>
+            </a:r>
+            <a:r>
+              <a:rPr lang="en-US" dirty="0" err="1"/>
+              <a:t>rossa</a:t>
+            </a:r>
+            <a:r>
+              <a:rPr lang="en-US" dirty="0"/>
+              <a:t> -&gt; V-Line</a:t>
+            </a:r>
           </a:p>
         </p:txBody>
       </p:sp>
@@ -1930,6 +2082,53 @@
           <a:bodyPr/>
           <a:lstStyle/>
           <a:p>
+            <a:r>
+              <a:rPr lang="en-US" dirty="0" err="1"/>
+              <a:t>Maruh</a:t>
+            </a:r>
+            <a:endParaRPr lang="en-US" dirty="0"/>
+          </a:p>
+          <a:p>
+            <a:endParaRPr lang="en-US" dirty="0"/>
+          </a:p>
+          <a:p>
+            <a:pPr marL="0" marR="0" lvl="0" indent="0" algn="l" defTabSz="914400" rtl="0" eaLnBrk="1" fontAlgn="auto" latinLnBrk="0" hangingPunct="1">
+              <a:lnSpc>
+                <a:spcPct val="100000"/>
+              </a:lnSpc>
+              <a:spcBef>
+                <a:spcPts val="0"/>
+              </a:spcBef>
+              <a:spcAft>
+                <a:spcPts val="0"/>
+              </a:spcAft>
+              <a:buClrTx/>
+              <a:buSzTx/>
+              <a:buFontTx/>
+              <a:buNone/>
+              <a:tabLst/>
+              <a:defRPr/>
+            </a:pPr>
+            <a:r>
+              <a:rPr lang="it-CH" sz="1200" b="0" kern="1200" dirty="0">
+                <a:solidFill>
+                  <a:schemeClr val="tx1"/>
+                </a:solidFill>
+                <a:effectLst/>
+                <a:latin typeface="+mn-lt"/>
+                <a:ea typeface="+mn-ea"/>
+                <a:cs typeface="+mn-cs"/>
+              </a:rPr>
+              <a:t>Il grafico mostra come il numero di registrazioni medie giornaliere siano più frequenti durante le ore del giorno rispetto a quelle notturne.</a:t>
+            </a:r>
+          </a:p>
+          <a:p>
+            <a:br>
+              <a:rPr lang="en-US" dirty="0"/>
+            </a:br>
+            <a:br>
+              <a:rPr lang="en-US" dirty="0"/>
+            </a:br>
             <a:r>
               <a:rPr lang="en-US" dirty="0" err="1"/>
               <a:t>Sembra</a:t>
@@ -2177,6 +2376,44 @@
           <a:bodyPr/>
           <a:lstStyle/>
           <a:p>
+            <a:r>
+              <a:rPr lang="en-US" dirty="0" err="1"/>
+              <a:t>Maruh</a:t>
+            </a:r>
+            <a:endParaRPr lang="en-US" dirty="0"/>
+          </a:p>
+          <a:p>
+            <a:endParaRPr lang="en-US" dirty="0"/>
+          </a:p>
+          <a:p>
+            <a:r>
+              <a:rPr lang="it-CH" sz="1200" b="0" kern="1200" dirty="0">
+                <a:solidFill>
+                  <a:schemeClr val="tx1"/>
+                </a:solidFill>
+                <a:effectLst/>
+                <a:latin typeface="+mn-lt"/>
+                <a:ea typeface="+mn-ea"/>
+                <a:cs typeface="+mn-cs"/>
+              </a:rPr>
+              <a:t>Il grafico mostra chiaramente che in percentuale il numero di infrazioni avviene maggiormente nelle ore notturne rispetto alle ore del giorno.</a:t>
+            </a:r>
+          </a:p>
+          <a:p>
+            <a:r>
+              <a:rPr lang="it-CH" sz="1200" b="0" kern="1200" dirty="0">
+                <a:solidFill>
+                  <a:schemeClr val="tx1"/>
+                </a:solidFill>
+                <a:effectLst/>
+                <a:latin typeface="+mn-lt"/>
+                <a:ea typeface="+mn-ea"/>
+                <a:cs typeface="+mn-cs"/>
+              </a:rPr>
+              <a:t>(Si tende a superare il limite durante le ore notturne).</a:t>
+            </a:r>
+          </a:p>
+          <a:p>
             <a:endParaRPr lang="en-US" dirty="0"/>
           </a:p>
         </p:txBody>
@@ -2286,8 +2523,25 @@
           <a:lstStyle/>
           <a:p>
             <a:r>
+              <a:rPr lang="en-US" dirty="0"/>
+              <a:t>Andrea</a:t>
+            </a:r>
+          </a:p>
+          <a:p>
+            <a:endParaRPr lang="en-US" dirty="0"/>
+          </a:p>
+          <a:p>
+            <a:r>
               <a:rPr lang="en-US" dirty="0" err="1"/>
-              <a:t>Sembra</a:t>
+              <a:t>Utilizzando</a:t>
+            </a:r>
+            <a:r>
+              <a:rPr lang="en-US" dirty="0"/>
+              <a:t> la Colonna “</a:t>
+            </a:r>
+            <a:r>
+              <a:rPr lang="en-US" dirty="0" err="1"/>
+              <a:t>Lunghezza</a:t>
             </a:r>
             <a:r>
               <a:rPr lang="en-US" dirty="0"/>
@@ -2295,7 +2549,15 @@
             </a:r>
             <a:r>
               <a:rPr lang="en-US" dirty="0" err="1"/>
-              <a:t>strano</a:t>
+              <a:t>veicolo</a:t>
+            </a:r>
+            <a:r>
+              <a:rPr lang="en-US" dirty="0"/>
+              <a:t>”, </a:t>
+            </a:r>
+            <a:r>
+              <a:rPr lang="en-US" dirty="0" err="1"/>
+              <a:t>abbiamo</a:t>
             </a:r>
             <a:r>
               <a:rPr lang="en-US" dirty="0"/>
@@ -2303,7 +2565,15 @@
             </a:r>
             <a:r>
               <a:rPr lang="en-US" dirty="0" err="1"/>
-              <a:t>che</a:t>
+              <a:t>stimato</a:t>
+            </a:r>
+            <a:r>
+              <a:rPr lang="en-US" dirty="0"/>
+              <a:t> la </a:t>
+            </a:r>
+            <a:r>
+              <a:rPr lang="en-US" dirty="0" err="1"/>
+              <a:t>categoria</a:t>
             </a:r>
             <a:r>
               <a:rPr lang="en-US" dirty="0"/>
@@ -2311,7 +2581,15 @@
             </a:r>
             <a:r>
               <a:rPr lang="en-US" dirty="0" err="1"/>
-              <a:t>c'è</a:t>
+              <a:t>usando</a:t>
+            </a:r>
+            <a:r>
+              <a:rPr lang="en-US" dirty="0"/>
+              <a:t> delle </a:t>
+            </a:r>
+            <a:r>
+              <a:rPr lang="en-US" dirty="0" err="1"/>
+              <a:t>misure</a:t>
             </a:r>
             <a:r>
               <a:rPr lang="en-US" dirty="0"/>
@@ -2319,7 +2597,32 @@
             </a:r>
             <a:r>
               <a:rPr lang="en-US" dirty="0" err="1"/>
-              <a:t>più</a:t>
+              <a:t>medie</a:t>
+            </a:r>
+            <a:r>
+              <a:rPr lang="en-US" dirty="0"/>
+              <a:t>. Es. 0m – 2.5m = moto.</a:t>
+            </a:r>
+          </a:p>
+          <a:p>
+            <a:endParaRPr lang="en-US" dirty="0"/>
+          </a:p>
+          <a:p>
+            <a:r>
+              <a:rPr lang="en-US" dirty="0"/>
+              <a:t>A sinistra </a:t>
+            </a:r>
+            <a:r>
+              <a:rPr lang="en-US" dirty="0" err="1"/>
+              <a:t>abbiamo</a:t>
+            </a:r>
+            <a:r>
+              <a:rPr lang="en-US" dirty="0"/>
+              <a:t> le </a:t>
+            </a:r>
+            <a:r>
+              <a:rPr lang="en-US" dirty="0" err="1"/>
+              <a:t>infrazioni</a:t>
             </a:r>
             <a:r>
               <a:rPr lang="en-US" dirty="0"/>
@@ -2327,17 +2630,15 @@
             </a:r>
             <a:r>
               <a:rPr lang="en-US" dirty="0" err="1"/>
-              <a:t>traffico</a:t>
+              <a:t>medie</a:t>
             </a:r>
             <a:r>
               <a:rPr lang="en-US" dirty="0"/>
-              <a:t> alle 15 rispetto alle 17</a:t>
-            </a:r>
-          </a:p>
-          <a:p>
+              <a:t> / anno per </a:t>
+            </a:r>
             <a:r>
               <a:rPr lang="en-US" dirty="0" err="1"/>
-              <a:t>Semplicemente</a:t>
+              <a:t>categoria</a:t>
             </a:r>
             <a:r>
               <a:rPr lang="en-US" dirty="0"/>
@@ -2345,67 +2646,52 @@
             </a:r>
             <a:r>
               <a:rPr lang="en-US" dirty="0" err="1"/>
-              <a:t>perché</a:t>
+              <a:t>veicolo</a:t>
             </a:r>
             <a:r>
               <a:rPr lang="en-US" dirty="0"/>
-              <a:t> ci </a:t>
+              <a:t> e zona </a:t>
             </a:r>
             <a:r>
               <a:rPr lang="en-US" dirty="0" err="1"/>
-              <a:t>sono</a:t>
+              <a:t>limite</a:t>
             </a:r>
             <a:r>
               <a:rPr lang="en-US" dirty="0"/>
-              <a:t> </a:t>
+              <a:t>,</a:t>
+            </a:r>
+          </a:p>
+          <a:p>
+            <a:endParaRPr lang="en-US" dirty="0"/>
+          </a:p>
+          <a:p>
+            <a:r>
+              <a:rPr lang="en-US" dirty="0"/>
+              <a:t>A Destra </a:t>
             </a:r>
             <a:r>
               <a:rPr lang="en-US" dirty="0" err="1"/>
-              <a:t>più</a:t>
+              <a:t>vediamo</a:t>
             </a:r>
             <a:r>
               <a:rPr lang="en-US" dirty="0"/>
-              <a:t> </a:t>
+              <a:t> la </a:t>
             </a:r>
             <a:r>
               <a:rPr lang="en-US" dirty="0" err="1"/>
-              <a:t>controlli</a:t>
+              <a:t>percentuale</a:t>
             </a:r>
             <a:r>
               <a:rPr lang="en-US" dirty="0"/>
-              <a:t> in </a:t>
+              <a:t> delle </a:t>
             </a:r>
             <a:r>
               <a:rPr lang="en-US" dirty="0" err="1"/>
-              <a:t>strade</a:t>
+              <a:t>infrazioni</a:t>
             </a:r>
             <a:r>
               <a:rPr lang="en-US" dirty="0"/>
-              <a:t> </a:t>
-            </a:r>
-            <a:r>
-              <a:rPr lang="en-US" dirty="0" err="1"/>
-              <a:t>cantonali</a:t>
-            </a:r>
-            <a:r>
-              <a:rPr lang="en-US" dirty="0"/>
-              <a:t> </a:t>
-            </a:r>
-            <a:r>
-              <a:rPr lang="en-US" dirty="0" err="1"/>
-              <a:t>ecc</a:t>
-            </a:r>
-            <a:r>
-              <a:rPr lang="en-US" dirty="0"/>
-              <a:t>. e non solo in </a:t>
-            </a:r>
-            <a:r>
-              <a:rPr lang="en-US" dirty="0" err="1"/>
-              <a:t>stradine</a:t>
-            </a:r>
-            <a:r>
-              <a:rPr lang="en-US" dirty="0"/>
-              <a:t> lente (30kmh)</a:t>
+              <a:t> per ogni zona.</a:t>
             </a:r>
           </a:p>
         </p:txBody>
@@ -2513,6 +2799,15 @@
         <p:txBody>
           <a:bodyPr/>
           <a:lstStyle/>
+          <a:p>
+            <a:r>
+              <a:rPr lang="it-CH" b="1" dirty="0"/>
+              <a:t>Maruh</a:t>
+            </a:r>
+          </a:p>
+          <a:p>
+            <a:endParaRPr lang="it-CH" b="1" dirty="0"/>
+          </a:p>
           <a:p>
             <a:r>
               <a:rPr lang="it-CH" b="1" dirty="0"/>
@@ -2978,7 +3273,7 @@
           <a:bodyPr/>
           <a:lstStyle/>
           <a:p>
-            <a:endParaRPr lang="it-CH"/>
+            <a:endParaRPr lang="it-IT" noProof="1"/>
           </a:p>
         </p:txBody>
       </p:sp>
@@ -3004,7 +3299,7 @@
           <a:lstStyle/>
           <a:p>
             <a:r>
-              <a:rPr lang="en-US" sz="3600" b="1" dirty="0" err="1">
+              <a:rPr lang="it-IT" sz="3600" b="1" noProof="1">
                 <a:solidFill>
                   <a:srgbClr val="FFFFFF"/>
                 </a:solidFill>
@@ -3012,44 +3307,100 @@
                 <a:ea typeface="Calibri" pitchFamily="34" charset="-122"/>
                 <a:cs typeface="Calibri" pitchFamily="34" charset="-120"/>
               </a:rPr>
-              <a:t>Monitoraggio</a:t>
-            </a:r>
-            <a:r>
-              <a:rPr lang="en-US" sz="3600" b="1" dirty="0">
-                <a:solidFill>
-                  <a:srgbClr val="FFFFFF"/>
+              <a:t>Monitoraggio della velocità</a:t>
+            </a:r>
+            <a:endParaRPr lang="it-IT" sz="3600" noProof="1"/>
+          </a:p>
+        </p:txBody>
+      </p:sp>
+      <p:sp>
+        <p:nvSpPr>
+          <p:cNvPr id="4" name="Text 2"/>
+          <p:cNvSpPr/>
+          <p:nvPr/>
+        </p:nvSpPr>
+        <p:spPr>
+          <a:xfrm>
+            <a:off x="365760" y="1097280"/>
+            <a:ext cx="8412480" cy="457200"/>
+          </a:xfrm>
+          <a:prstGeom prst="rect">
+            <a:avLst/>
+          </a:prstGeom>
+          <a:noFill/>
+          <a:ln/>
+        </p:spPr>
+        <p:txBody>
+          <a:bodyPr wrap="square" lIns="0" tIns="0" rIns="0" bIns="0" rtlCol="0" anchor="ctr"/>
+          <a:lstStyle/>
+          <a:p>
+            <a:pPr marL="0" indent="0">
+              <a:buNone/>
+            </a:pPr>
+            <a:r>
+              <a:rPr lang="it-IT" sz="2400" noProof="1">
+                <a:solidFill>
+                  <a:srgbClr val="00B4D8"/>
                 </a:solidFill>
                 <a:latin typeface="Calibri" pitchFamily="34" charset="0"/>
                 <a:ea typeface="Calibri" pitchFamily="34" charset="-122"/>
                 <a:cs typeface="Calibri" pitchFamily="34" charset="-120"/>
               </a:rPr>
-              <a:t> della </a:t>
-            </a:r>
-            <a:r>
-              <a:rPr lang="en-US" sz="3600" b="1" dirty="0" err="1">
-                <a:solidFill>
-                  <a:srgbClr val="FFFFFF"/>
+              <a:t>Canton Basilea-Città</a:t>
+            </a:r>
+            <a:endParaRPr lang="it-IT" sz="2400" noProof="1"/>
+          </a:p>
+        </p:txBody>
+      </p:sp>
+      <p:sp>
+        <p:nvSpPr>
+          <p:cNvPr id="5" name="Text 3"/>
+          <p:cNvSpPr/>
+          <p:nvPr/>
+        </p:nvSpPr>
+        <p:spPr>
+          <a:xfrm>
+            <a:off x="365760" y="1691640"/>
+            <a:ext cx="4572000" cy="365760"/>
+          </a:xfrm>
+          <a:prstGeom prst="rect">
+            <a:avLst/>
+          </a:prstGeom>
+          <a:noFill/>
+          <a:ln/>
+        </p:spPr>
+        <p:txBody>
+          <a:bodyPr wrap="square" lIns="0" tIns="0" rIns="0" bIns="0" rtlCol="0" anchor="ctr"/>
+          <a:lstStyle/>
+          <a:p>
+            <a:pPr marL="0" indent="0">
+              <a:buNone/>
+            </a:pPr>
+            <a:r>
+              <a:rPr lang="it-IT" sz="1600" b="1" noProof="1">
+                <a:solidFill>
+                  <a:srgbClr val="E07B39"/>
                 </a:solidFill>
                 <a:latin typeface="Calibri" pitchFamily="34" charset="0"/>
                 <a:ea typeface="Calibri" pitchFamily="34" charset="-122"/>
                 <a:cs typeface="Calibri" pitchFamily="34" charset="-120"/>
               </a:rPr>
-              <a:t>velocità</a:t>
-            </a:r>
-            <a:endParaRPr lang="en-US" sz="3600" dirty="0"/>
-          </a:p>
-        </p:txBody>
-      </p:sp>
-      <p:sp>
-        <p:nvSpPr>
-          <p:cNvPr id="4" name="Text 2"/>
-          <p:cNvSpPr/>
-          <p:nvPr/>
-        </p:nvSpPr>
-        <p:spPr>
-          <a:xfrm>
-            <a:off x="365760" y="1097280"/>
-            <a:ext cx="8412480" cy="457200"/>
+              <a:t>Data Science – Group A</a:t>
+            </a:r>
+            <a:endParaRPr lang="it-IT" sz="1600" noProof="1"/>
+          </a:p>
+        </p:txBody>
+      </p:sp>
+      <p:sp>
+        <p:nvSpPr>
+          <p:cNvPr id="6" name="Text 4"/>
+          <p:cNvSpPr/>
+          <p:nvPr/>
+        </p:nvSpPr>
+        <p:spPr>
+          <a:xfrm>
+            <a:off x="365760" y="2057400"/>
+            <a:ext cx="4572000" cy="320040"/>
           </a:xfrm>
           <a:prstGeom prst="rect">
             <a:avLst/>
@@ -3065,30 +3416,30 @@
               <a:buNone/>
             </a:pPr>
             <a:r>
-              <a:rPr lang="en-US" sz="2400" dirty="0">
-                <a:solidFill>
-                  <a:srgbClr val="00B4D8"/>
+              <a:rPr lang="it-IT" sz="1400" noProof="1">
+                <a:solidFill>
+                  <a:srgbClr val="B0BEC5"/>
                 </a:solidFill>
                 <a:latin typeface="Calibri" pitchFamily="34" charset="0"/>
                 <a:ea typeface="Calibri" pitchFamily="34" charset="-122"/>
                 <a:cs typeface="Calibri" pitchFamily="34" charset="-120"/>
               </a:rPr>
-              <a:t>Canton Basilea-Città</a:t>
-            </a:r>
-            <a:endParaRPr lang="en-US" sz="2400" dirty="0"/>
-          </a:p>
-        </p:txBody>
-      </p:sp>
-      <p:sp>
-        <p:nvSpPr>
-          <p:cNvPr id="5" name="Text 3"/>
-          <p:cNvSpPr/>
-          <p:nvPr/>
-        </p:nvSpPr>
-        <p:spPr>
-          <a:xfrm>
-            <a:off x="365760" y="1691640"/>
-            <a:ext cx="4572000" cy="365760"/>
+              <a:t>Andrea Pezzolla &amp; Matteo Maruca</a:t>
+            </a:r>
+            <a:endParaRPr lang="it-IT" sz="1400" noProof="1"/>
+          </a:p>
+        </p:txBody>
+      </p:sp>
+      <p:sp>
+        <p:nvSpPr>
+          <p:cNvPr id="7" name="Text 5"/>
+          <p:cNvSpPr/>
+          <p:nvPr/>
+        </p:nvSpPr>
+        <p:spPr>
+          <a:xfrm>
+            <a:off x="365760" y="2468880"/>
+            <a:ext cx="6400800" cy="320040"/>
           </a:xfrm>
           <a:prstGeom prst="rect">
             <a:avLst/>
@@ -3104,128 +3455,17 @@
               <a:buNone/>
             </a:pPr>
             <a:r>
-              <a:rPr lang="en-US" sz="1600" b="1" dirty="0">
-                <a:solidFill>
-                  <a:srgbClr val="E07B39"/>
+              <a:rPr lang="it-IT" sz="1200" i="1" noProof="1">
+                <a:solidFill>
+                  <a:srgbClr val="B0BEC5"/>
                 </a:solidFill>
                 <a:latin typeface="Calibri" pitchFamily="34" charset="0"/>
                 <a:ea typeface="Calibri" pitchFamily="34" charset="-122"/>
                 <a:cs typeface="Calibri" pitchFamily="34" charset="-120"/>
               </a:rPr>
-              <a:t>Data Science – Group A</a:t>
-            </a:r>
-            <a:endParaRPr lang="en-US" sz="1600" dirty="0"/>
-          </a:p>
-        </p:txBody>
-      </p:sp>
-      <p:sp>
-        <p:nvSpPr>
-          <p:cNvPr id="6" name="Text 4"/>
-          <p:cNvSpPr/>
-          <p:nvPr/>
-        </p:nvSpPr>
-        <p:spPr>
-          <a:xfrm>
-            <a:off x="365760" y="2057400"/>
-            <a:ext cx="4572000" cy="320040"/>
-          </a:xfrm>
-          <a:prstGeom prst="rect">
-            <a:avLst/>
-          </a:prstGeom>
-          <a:noFill/>
-          <a:ln/>
-        </p:spPr>
-        <p:txBody>
-          <a:bodyPr wrap="square" lIns="0" tIns="0" rIns="0" bIns="0" rtlCol="0" anchor="ctr"/>
-          <a:lstStyle/>
-          <a:p>
-            <a:pPr marL="0" indent="0">
-              <a:buNone/>
-            </a:pPr>
-            <a:r>
-              <a:rPr lang="en-US" sz="1400" dirty="0">
-                <a:solidFill>
-                  <a:srgbClr val="B0BEC5"/>
-                </a:solidFill>
-                <a:latin typeface="Calibri" pitchFamily="34" charset="0"/>
-                <a:ea typeface="Calibri" pitchFamily="34" charset="-122"/>
-                <a:cs typeface="Calibri" pitchFamily="34" charset="-120"/>
-              </a:rPr>
-              <a:t>Andrea Pezzolla &amp; Matteo Maruca</a:t>
-            </a:r>
-            <a:endParaRPr lang="en-US" sz="1400" dirty="0"/>
-          </a:p>
-        </p:txBody>
-      </p:sp>
-      <p:sp>
-        <p:nvSpPr>
-          <p:cNvPr id="7" name="Text 5"/>
-          <p:cNvSpPr/>
-          <p:nvPr/>
-        </p:nvSpPr>
-        <p:spPr>
-          <a:xfrm>
-            <a:off x="365760" y="2468880"/>
-            <a:ext cx="6400800" cy="320040"/>
-          </a:xfrm>
-          <a:prstGeom prst="rect">
-            <a:avLst/>
-          </a:prstGeom>
-          <a:noFill/>
-          <a:ln/>
-        </p:spPr>
-        <p:txBody>
-          <a:bodyPr wrap="square" lIns="0" tIns="0" rIns="0" bIns="0" rtlCol="0" anchor="ctr"/>
-          <a:lstStyle/>
-          <a:p>
-            <a:pPr marL="0" indent="0">
-              <a:buNone/>
-            </a:pPr>
-            <a:r>
-              <a:rPr lang="en-US" sz="1200" i="1" dirty="0">
-                <a:solidFill>
-                  <a:srgbClr val="B0BEC5"/>
-                </a:solidFill>
-                <a:latin typeface="Calibri" pitchFamily="34" charset="0"/>
-                <a:ea typeface="Calibri" pitchFamily="34" charset="-122"/>
-                <a:cs typeface="Calibri" pitchFamily="34" charset="-120"/>
-              </a:rPr>
-              <a:t>Dataset: </a:t>
-            </a:r>
-            <a:r>
-              <a:rPr lang="en-US" sz="1200" i="1" dirty="0" err="1">
-                <a:solidFill>
-                  <a:srgbClr val="B0BEC5"/>
-                </a:solidFill>
-                <a:latin typeface="Calibri" pitchFamily="34" charset="0"/>
-                <a:ea typeface="Calibri" pitchFamily="34" charset="-122"/>
-                <a:cs typeface="Calibri" pitchFamily="34" charset="-120"/>
-              </a:rPr>
-              <a:t>Geschwindigkeitsmonitoring</a:t>
-            </a:r>
-            <a:r>
-              <a:rPr lang="en-US" sz="1200" i="1" dirty="0">
-                <a:solidFill>
-                  <a:srgbClr val="B0BEC5"/>
-                </a:solidFill>
-                <a:latin typeface="Calibri" pitchFamily="34" charset="0"/>
-                <a:ea typeface="Calibri" pitchFamily="34" charset="-122"/>
-                <a:cs typeface="Calibri" pitchFamily="34" charset="-120"/>
-              </a:rPr>
-              <a:t> – </a:t>
-            </a:r>
-            <a:r>
-              <a:rPr lang="en-US" sz="1200" i="1" dirty="0" err="1">
-                <a:solidFill>
-                  <a:srgbClr val="B0BEC5"/>
-                </a:solidFill>
-                <a:latin typeface="Calibri" pitchFamily="34" charset="0"/>
-                <a:ea typeface="Calibri" pitchFamily="34" charset="-122"/>
-                <a:cs typeface="Calibri" pitchFamily="34" charset="-120"/>
-              </a:rPr>
-              <a:t>opendata.swiss</a:t>
-            </a:r>
-            <a:endParaRPr lang="en-US" sz="1200" dirty="0"/>
+              <a:t>Dataset: Geschwindigkeitsmonitoring – opendata.swiss</a:t>
+            </a:r>
+            <a:endParaRPr lang="it-IT" sz="1200" noProof="1"/>
           </a:p>
         </p:txBody>
       </p:sp>
@@ -3257,7 +3497,7 @@
           <a:bodyPr/>
           <a:lstStyle/>
           <a:p>
-            <a:endParaRPr lang="it-CH"/>
+            <a:endParaRPr lang="it-IT" noProof="1"/>
           </a:p>
         </p:txBody>
       </p:sp>
@@ -3286,7 +3526,7 @@
               <a:buNone/>
             </a:pPr>
             <a:r>
-              <a:rPr lang="en-US" sz="2800" b="1" dirty="0">
+              <a:rPr lang="it-IT" sz="2800" b="1" noProof="1">
                 <a:solidFill>
                   <a:srgbClr val="00B4D8"/>
                 </a:solidFill>
@@ -3296,7 +3536,7 @@
               </a:rPr>
               <a:t>~1.9 GB</a:t>
             </a:r>
-            <a:endParaRPr lang="en-US" sz="2800" dirty="0"/>
+            <a:endParaRPr lang="it-IT" sz="2800" noProof="1"/>
           </a:p>
         </p:txBody>
       </p:sp>
@@ -3325,7 +3565,7 @@
               <a:buNone/>
             </a:pPr>
             <a:r>
-              <a:rPr lang="en-US" sz="1200" dirty="0">
+              <a:rPr lang="it-IT" sz="1200" noProof="1">
                 <a:solidFill>
                   <a:srgbClr val="FFFFFF"/>
                 </a:solidFill>
@@ -3335,7 +3575,7 @@
               </a:rPr>
               <a:t>Dimensione CSV</a:t>
             </a:r>
-            <a:endParaRPr lang="en-US" sz="1200" dirty="0"/>
+            <a:endParaRPr lang="it-IT" sz="1200" noProof="1"/>
           </a:p>
         </p:txBody>
       </p:sp>
@@ -3367,7 +3607,7 @@
           <a:bodyPr/>
           <a:lstStyle/>
           <a:p>
-            <a:endParaRPr lang="it-CH"/>
+            <a:endParaRPr lang="it-IT" noProof="1"/>
           </a:p>
         </p:txBody>
       </p:sp>
@@ -3396,7 +3636,7 @@
               <a:buNone/>
             </a:pPr>
             <a:r>
-              <a:rPr lang="en-US" sz="2800" b="1" dirty="0">
+              <a:rPr lang="it-IT" sz="2800" b="1" noProof="1">
                 <a:solidFill>
                   <a:srgbClr val="00B4D8"/>
                 </a:solidFill>
@@ -3406,7 +3646,7 @@
               </a:rPr>
               <a:t>22</a:t>
             </a:r>
-            <a:endParaRPr lang="en-US" sz="2800" dirty="0"/>
+            <a:endParaRPr lang="it-IT" sz="2800" noProof="1"/>
           </a:p>
         </p:txBody>
       </p:sp>
@@ -3435,7 +3675,7 @@
               <a:buNone/>
             </a:pPr>
             <a:r>
-              <a:rPr lang="en-US" sz="1200" dirty="0">
+              <a:rPr lang="it-IT" sz="1200" noProof="1">
                 <a:solidFill>
                   <a:srgbClr val="FFFFFF"/>
                 </a:solidFill>
@@ -3445,7 +3685,7 @@
               </a:rPr>
               <a:t>Colonne</a:t>
             </a:r>
-            <a:endParaRPr lang="en-US" sz="1200" dirty="0"/>
+            <a:endParaRPr lang="it-IT" sz="1200" noProof="1"/>
           </a:p>
         </p:txBody>
       </p:sp>
@@ -3477,7 +3717,7 @@
           <a:bodyPr/>
           <a:lstStyle/>
           <a:p>
-            <a:endParaRPr lang="it-CH"/>
+            <a:endParaRPr lang="it-IT" noProof="1"/>
           </a:p>
         </p:txBody>
       </p:sp>
@@ -3506,26 +3746,16 @@
               <a:buNone/>
             </a:pPr>
             <a:r>
-              <a:rPr lang="en-US" sz="2800" b="1" dirty="0">
+              <a:rPr lang="it-IT" sz="2800" b="1" noProof="1">
                 <a:solidFill>
                   <a:srgbClr val="00B4D8"/>
                 </a:solidFill>
                 <a:latin typeface="Calibri" pitchFamily="34" charset="0"/>
                 <a:cs typeface="Calibri" pitchFamily="34" charset="-120"/>
               </a:rPr>
-              <a:t>~5.5 </a:t>
-            </a:r>
-            <a:r>
-              <a:rPr lang="en-US" sz="2800" b="1" dirty="0" err="1">
-                <a:solidFill>
-                  <a:srgbClr val="00B4D8"/>
-                </a:solidFill>
-                <a:latin typeface="Calibri" pitchFamily="34" charset="0"/>
-                <a:cs typeface="Calibri" pitchFamily="34" charset="-120"/>
-              </a:rPr>
-              <a:t>mln</a:t>
-            </a:r>
-            <a:endParaRPr lang="en-US" sz="2800" dirty="0"/>
+              <a:t>~5.5 mln</a:t>
+            </a:r>
+            <a:endParaRPr lang="it-IT" sz="2800" noProof="1"/>
           </a:p>
         </p:txBody>
       </p:sp>
@@ -3554,7 +3784,7 @@
               <a:buNone/>
             </a:pPr>
             <a:r>
-              <a:rPr lang="en-US" sz="1200" dirty="0">
+              <a:rPr lang="it-IT" sz="1200" noProof="1">
                 <a:solidFill>
                   <a:srgbClr val="FFFFFF"/>
                 </a:solidFill>
@@ -3564,7 +3794,7 @@
               </a:rPr>
               <a:t>Misurazioni</a:t>
             </a:r>
-            <a:endParaRPr lang="en-US" sz="1200" dirty="0"/>
+            <a:endParaRPr lang="it-IT" sz="1200" noProof="1"/>
           </a:p>
         </p:txBody>
       </p:sp>
@@ -3599,7 +3829,7 @@
               <a:buNone/>
             </a:pPr>
             <a:r>
-              <a:rPr lang="en-US" sz="2400" dirty="0"/>
+              <a:rPr lang="it-IT" sz="2400" noProof="1"/>
               <a:t>🇨🇭📸</a:t>
             </a:r>
           </a:p>
@@ -3678,7 +3908,7 @@
           <a:bodyPr/>
           <a:lstStyle/>
           <a:p>
-            <a:endParaRPr lang="it-CH"/>
+            <a:endParaRPr lang="it-IT" noProof="1"/>
           </a:p>
         </p:txBody>
       </p:sp>
@@ -3713,66 +3943,16 @@
               <a:buNone/>
             </a:pPr>
             <a:r>
-              <a:rPr lang="en-US" sz="2200" b="1" dirty="0" err="1">
+              <a:rPr lang="it-IT" sz="2200" b="1" noProof="1">
                 <a:solidFill>
                   <a:srgbClr val="00B4D8"/>
                 </a:solidFill>
                 <a:latin typeface="Calibri" pitchFamily="34" charset="0"/>
                 <a:cs typeface="Calibri" pitchFamily="34" charset="-120"/>
               </a:rPr>
-              <a:t>Mappa</a:t>
-            </a:r>
-            <a:r>
-              <a:rPr lang="en-US" sz="2200" b="1" dirty="0">
-                <a:solidFill>
-                  <a:srgbClr val="00B4D8"/>
-                </a:solidFill>
-                <a:latin typeface="Calibri" pitchFamily="34" charset="0"/>
-                <a:cs typeface="Calibri" pitchFamily="34" charset="-120"/>
-              </a:rPr>
-              <a:t> di </a:t>
-            </a:r>
-            <a:r>
-              <a:rPr lang="en-US" sz="2200" b="1" dirty="0" err="1">
-                <a:solidFill>
-                  <a:srgbClr val="00B4D8"/>
-                </a:solidFill>
-                <a:latin typeface="Calibri" pitchFamily="34" charset="0"/>
-                <a:cs typeface="Calibri" pitchFamily="34" charset="-120"/>
-              </a:rPr>
-              <a:t>attività</a:t>
-            </a:r>
-            <a:r>
-              <a:rPr lang="en-US" sz="2200" b="1" dirty="0">
-                <a:solidFill>
-                  <a:srgbClr val="00B4D8"/>
-                </a:solidFill>
-                <a:latin typeface="Calibri" pitchFamily="34" charset="0"/>
-                <a:cs typeface="Calibri" pitchFamily="34" charset="-120"/>
-              </a:rPr>
-              <a:t> </a:t>
-            </a:r>
-            <a:r>
-              <a:rPr lang="en-US" sz="2200" b="1" dirty="0" err="1">
-                <a:solidFill>
-                  <a:srgbClr val="00B4D8"/>
-                </a:solidFill>
-                <a:latin typeface="Calibri" pitchFamily="34" charset="0"/>
-                <a:cs typeface="Calibri" pitchFamily="34" charset="-120"/>
-              </a:rPr>
-              <a:t>dei</a:t>
-            </a:r>
-            <a:r>
-              <a:rPr lang="en-US" sz="2200" b="1" dirty="0">
-                <a:solidFill>
-                  <a:srgbClr val="00B4D8"/>
-                </a:solidFill>
-                <a:latin typeface="Calibri" pitchFamily="34" charset="0"/>
-                <a:cs typeface="Calibri" pitchFamily="34" charset="-120"/>
-              </a:rPr>
-              <a:t> radar</a:t>
-            </a:r>
-            <a:endParaRPr lang="en-US" sz="2200" dirty="0"/>
+              <a:t>Mappa di attività dei radar</a:t>
+            </a:r>
+            <a:endParaRPr lang="it-IT" sz="2200" noProof="1"/>
           </a:p>
         </p:txBody>
       </p:sp>
@@ -3807,136 +3987,16 @@
               <a:buNone/>
             </a:pPr>
             <a:r>
-              <a:rPr lang="en-US" sz="1300" i="1" dirty="0">
+              <a:rPr lang="it-IT" sz="1300" i="1" noProof="1">
                 <a:solidFill>
                   <a:srgbClr val="B0BEC5"/>
                 </a:solidFill>
                 <a:latin typeface="Calibri" pitchFamily="34" charset="0"/>
                 <a:cs typeface="Calibri" pitchFamily="34" charset="-120"/>
               </a:rPr>
-              <a:t>Heatmap </a:t>
-            </a:r>
-            <a:r>
-              <a:rPr lang="en-US" sz="1300" i="1" dirty="0" err="1">
-                <a:solidFill>
-                  <a:srgbClr val="B0BEC5"/>
-                </a:solidFill>
-                <a:latin typeface="Calibri" pitchFamily="34" charset="0"/>
-                <a:cs typeface="Calibri" pitchFamily="34" charset="-120"/>
-              </a:rPr>
-              <a:t>dell’attività</a:t>
-            </a:r>
-            <a:r>
-              <a:rPr lang="en-US" sz="1300" i="1" dirty="0">
-                <a:solidFill>
-                  <a:srgbClr val="B0BEC5"/>
-                </a:solidFill>
-                <a:latin typeface="Calibri" pitchFamily="34" charset="0"/>
-                <a:cs typeface="Calibri" pitchFamily="34" charset="-120"/>
-              </a:rPr>
-              <a:t> di ogni </a:t>
-            </a:r>
-            <a:r>
-              <a:rPr lang="en-US" sz="1300" i="1" dirty="0" err="1">
-                <a:solidFill>
-                  <a:srgbClr val="B0BEC5"/>
-                </a:solidFill>
-                <a:latin typeface="Calibri" pitchFamily="34" charset="0"/>
-                <a:cs typeface="Calibri" pitchFamily="34" charset="-120"/>
-              </a:rPr>
-              <a:t>singolo</a:t>
-            </a:r>
-            <a:r>
-              <a:rPr lang="en-US" sz="1300" i="1" dirty="0">
-                <a:solidFill>
-                  <a:srgbClr val="B0BEC5"/>
-                </a:solidFill>
-                <a:latin typeface="Calibri" pitchFamily="34" charset="0"/>
-                <a:cs typeface="Calibri" pitchFamily="34" charset="-120"/>
-              </a:rPr>
-              <a:t> radar (</a:t>
-            </a:r>
-            <a:r>
-              <a:rPr lang="en-US" sz="1300" i="1" dirty="0" err="1">
-                <a:solidFill>
-                  <a:srgbClr val="B0BEC5"/>
-                </a:solidFill>
-                <a:latin typeface="Calibri" pitchFamily="34" charset="0"/>
-                <a:cs typeface="Calibri" pitchFamily="34" charset="-120"/>
-              </a:rPr>
-              <a:t>cuadrato</a:t>
-            </a:r>
-            <a:r>
-              <a:rPr lang="en-US" sz="1300" i="1" dirty="0">
-                <a:solidFill>
-                  <a:srgbClr val="B0BEC5"/>
-                </a:solidFill>
-                <a:latin typeface="Calibri" pitchFamily="34" charset="0"/>
-                <a:cs typeface="Calibri" pitchFamily="34" charset="-120"/>
-              </a:rPr>
-              <a:t> </a:t>
-            </a:r>
-            <a:r>
-              <a:rPr lang="en-US" sz="1300" i="1" dirty="0" err="1">
-                <a:solidFill>
-                  <a:srgbClr val="B0BEC5"/>
-                </a:solidFill>
-                <a:latin typeface="Calibri" pitchFamily="34" charset="0"/>
-                <a:cs typeface="Calibri" pitchFamily="34" charset="-120"/>
-              </a:rPr>
-              <a:t>colorato</a:t>
-            </a:r>
-            <a:r>
-              <a:rPr lang="en-US" sz="1300" i="1" dirty="0">
-                <a:solidFill>
-                  <a:srgbClr val="B0BEC5"/>
-                </a:solidFill>
-                <a:latin typeface="Calibri" pitchFamily="34" charset="0"/>
-                <a:cs typeface="Calibri" pitchFamily="34" charset="-120"/>
-              </a:rPr>
-              <a:t> </a:t>
-            </a:r>
-            <a:r>
-              <a:rPr lang="en-US" sz="1300" i="1" dirty="0" err="1">
-                <a:solidFill>
-                  <a:srgbClr val="B0BEC5"/>
-                </a:solidFill>
-                <a:latin typeface="Calibri" pitchFamily="34" charset="0"/>
-                <a:cs typeface="Calibri" pitchFamily="34" charset="-120"/>
-              </a:rPr>
-              <a:t>almeno</a:t>
-            </a:r>
-            <a:r>
-              <a:rPr lang="en-US" sz="1300" i="1" dirty="0">
-                <a:solidFill>
-                  <a:srgbClr val="B0BEC5"/>
-                </a:solidFill>
-                <a:latin typeface="Calibri" pitchFamily="34" charset="0"/>
-                <a:cs typeface="Calibri" pitchFamily="34" charset="-120"/>
-              </a:rPr>
-              <a:t> 1 </a:t>
-            </a:r>
-            <a:r>
-              <a:rPr lang="en-US" sz="1300" i="1" dirty="0" err="1">
-                <a:solidFill>
-                  <a:srgbClr val="B0BEC5"/>
-                </a:solidFill>
-                <a:latin typeface="Calibri" pitchFamily="34" charset="0"/>
-                <a:cs typeface="Calibri" pitchFamily="34" charset="-120"/>
-              </a:rPr>
-              <a:t>registrazione</a:t>
-            </a:r>
-            <a:r>
-              <a:rPr lang="en-US" sz="1300" i="1" dirty="0">
-                <a:solidFill>
-                  <a:srgbClr val="B0BEC5"/>
-                </a:solidFill>
-                <a:latin typeface="Calibri" pitchFamily="34" charset="0"/>
-                <a:cs typeface="Calibri" pitchFamily="34" charset="-120"/>
-              </a:rPr>
-              <a:t>).</a:t>
-            </a:r>
-            <a:endParaRPr lang="en-US" sz="1300" dirty="0"/>
+              <a:t>Heatmap dell’attività di ogni singolo radar (quadrato colorato almeno 1 registrazione).</a:t>
+            </a:r>
+            <a:endParaRPr lang="it-IT" sz="1300" noProof="1"/>
           </a:p>
         </p:txBody>
       </p:sp>
@@ -3974,7 +4034,7 @@
           <a:bodyPr/>
           <a:lstStyle/>
           <a:p>
-            <a:endParaRPr lang="it-CH" dirty="0"/>
+            <a:endParaRPr lang="it-IT" noProof="1"/>
           </a:p>
         </p:txBody>
       </p:sp>
@@ -4009,7 +4069,7 @@
               <a:buNone/>
             </a:pPr>
             <a:r>
-              <a:rPr lang="en-US" sz="1400" dirty="0">
+              <a:rPr lang="it-IT" sz="1400" noProof="1">
                 <a:solidFill>
                   <a:srgbClr val="2A4580"/>
                 </a:solidFill>
@@ -4019,7 +4079,7 @@
               </a:rPr>
               <a:t>[ grafico ]</a:t>
             </a:r>
-            <a:endParaRPr lang="en-US" sz="1400" dirty="0"/>
+            <a:endParaRPr lang="it-IT" sz="1400" noProof="1"/>
           </a:p>
         </p:txBody>
       </p:sp>
@@ -4119,7 +4179,7 @@
           <a:bodyPr/>
           <a:lstStyle/>
           <a:p>
-            <a:endParaRPr lang="it-CH"/>
+            <a:endParaRPr lang="it-IT" noProof="1"/>
           </a:p>
         </p:txBody>
       </p:sp>
@@ -4148,7 +4208,7 @@
               <a:buNone/>
             </a:pPr>
             <a:r>
-              <a:rPr lang="en-US" sz="2200" b="1" dirty="0" err="1">
+              <a:rPr lang="it-IT" sz="2200" b="1" noProof="1">
                 <a:solidFill>
                   <a:srgbClr val="00B4D8"/>
                 </a:solidFill>
@@ -4158,7 +4218,7 @@
               </a:rPr>
               <a:t>Conclusioni</a:t>
             </a:r>
-            <a:endParaRPr lang="en-US" sz="2200" dirty="0"/>
+            <a:endParaRPr lang="it-IT" sz="2200" noProof="1"/>
           </a:p>
         </p:txBody>
       </p:sp>
@@ -4190,7 +4250,7 @@
           <a:bodyPr/>
           <a:lstStyle/>
           <a:p>
-            <a:endParaRPr lang="it-CH"/>
+            <a:endParaRPr lang="it-IT" noProof="1"/>
           </a:p>
         </p:txBody>
       </p:sp>
@@ -4218,7 +4278,7 @@
             <a:pPr marL="0" indent="0" algn="ctr">
               <a:buNone/>
             </a:pPr>
-            <a:endParaRPr lang="en-US" sz="1400" dirty="0"/>
+            <a:endParaRPr lang="it-IT" sz="1400" noProof="1"/>
           </a:p>
         </p:txBody>
       </p:sp>
@@ -4250,7 +4310,7 @@
           <a:lstStyle/>
           <a:p>
             <a:r>
-              <a:rPr lang="en-US" sz="2400" i="1" dirty="0">
+              <a:rPr lang="it-IT" sz="2400" i="1" noProof="1">
                 <a:solidFill>
                   <a:srgbClr val="B0BEC5"/>
                 </a:solidFill>
@@ -4258,10 +4318,12 @@
                 <a:ea typeface="Calibri" pitchFamily="34" charset="-122"/>
                 <a:cs typeface="Calibri" pitchFamily="34" charset="-120"/>
               </a:rPr>
-              <a:t>I Dati: </a:t>
-            </a:r>
-            <a:r>
-              <a:rPr lang="en-US" sz="2400" i="1" dirty="0" err="1">
+              <a:t>I Dati: Informazioni reali e locali sul traffico svizzero.</a:t>
+            </a:r>
+          </a:p>
+          <a:p>
+            <a:r>
+              <a:rPr lang="it-IT" sz="2400" i="1" noProof="1">
                 <a:solidFill>
                   <a:srgbClr val="B0BEC5"/>
                 </a:solidFill>
@@ -4269,244 +4331,11 @@
                 <a:ea typeface="Calibri" pitchFamily="34" charset="-122"/>
                 <a:cs typeface="Calibri" pitchFamily="34" charset="-120"/>
               </a:rPr>
-              <a:t>Informazioni</a:t>
-            </a:r>
-            <a:r>
-              <a:rPr lang="en-US" sz="2400" i="1" dirty="0">
-                <a:solidFill>
-                  <a:srgbClr val="B0BEC5"/>
-                </a:solidFill>
-                <a:latin typeface="Calibri" pitchFamily="34" charset="0"/>
-                <a:ea typeface="Calibri" pitchFamily="34" charset="-122"/>
-                <a:cs typeface="Calibri" pitchFamily="34" charset="-120"/>
-              </a:rPr>
-              <a:t> </a:t>
-            </a:r>
-            <a:r>
-              <a:rPr lang="en-US" sz="2400" i="1" dirty="0" err="1">
-                <a:solidFill>
-                  <a:srgbClr val="B0BEC5"/>
-                </a:solidFill>
-                <a:latin typeface="Calibri" pitchFamily="34" charset="0"/>
-                <a:ea typeface="Calibri" pitchFamily="34" charset="-122"/>
-                <a:cs typeface="Calibri" pitchFamily="34" charset="-120"/>
-              </a:rPr>
-              <a:t>reali</a:t>
-            </a:r>
-            <a:r>
-              <a:rPr lang="en-US" sz="2400" i="1" dirty="0">
-                <a:solidFill>
-                  <a:srgbClr val="B0BEC5"/>
-                </a:solidFill>
-                <a:latin typeface="Calibri" pitchFamily="34" charset="0"/>
-                <a:ea typeface="Calibri" pitchFamily="34" charset="-122"/>
-                <a:cs typeface="Calibri" pitchFamily="34" charset="-120"/>
-              </a:rPr>
-              <a:t> e </a:t>
-            </a:r>
-            <a:r>
-              <a:rPr lang="en-US" sz="2400" i="1" dirty="0" err="1">
-                <a:solidFill>
-                  <a:srgbClr val="B0BEC5"/>
-                </a:solidFill>
-                <a:latin typeface="Calibri" pitchFamily="34" charset="0"/>
-                <a:ea typeface="Calibri" pitchFamily="34" charset="-122"/>
-                <a:cs typeface="Calibri" pitchFamily="34" charset="-120"/>
-              </a:rPr>
-              <a:t>locali</a:t>
-            </a:r>
-            <a:r>
-              <a:rPr lang="en-US" sz="2400" i="1" dirty="0">
-                <a:solidFill>
-                  <a:srgbClr val="B0BEC5"/>
-                </a:solidFill>
-                <a:latin typeface="Calibri" pitchFamily="34" charset="0"/>
-                <a:ea typeface="Calibri" pitchFamily="34" charset="-122"/>
-                <a:cs typeface="Calibri" pitchFamily="34" charset="-120"/>
-              </a:rPr>
-              <a:t> </a:t>
-            </a:r>
-            <a:r>
-              <a:rPr lang="en-US" sz="2400" i="1" dirty="0" err="1">
-                <a:solidFill>
-                  <a:srgbClr val="B0BEC5"/>
-                </a:solidFill>
-                <a:latin typeface="Calibri" pitchFamily="34" charset="0"/>
-                <a:ea typeface="Calibri" pitchFamily="34" charset="-122"/>
-                <a:cs typeface="Calibri" pitchFamily="34" charset="-120"/>
-              </a:rPr>
-              <a:t>sul</a:t>
-            </a:r>
-            <a:r>
-              <a:rPr lang="en-US" sz="2400" i="1" dirty="0">
-                <a:solidFill>
-                  <a:srgbClr val="B0BEC5"/>
-                </a:solidFill>
-                <a:latin typeface="Calibri" pitchFamily="34" charset="0"/>
-                <a:ea typeface="Calibri" pitchFamily="34" charset="-122"/>
-                <a:cs typeface="Calibri" pitchFamily="34" charset="-120"/>
-              </a:rPr>
-              <a:t> </a:t>
-            </a:r>
-            <a:r>
-              <a:rPr lang="en-US" sz="2400" i="1" dirty="0" err="1">
-                <a:solidFill>
-                  <a:srgbClr val="B0BEC5"/>
-                </a:solidFill>
-                <a:latin typeface="Calibri" pitchFamily="34" charset="0"/>
-                <a:ea typeface="Calibri" pitchFamily="34" charset="-122"/>
-                <a:cs typeface="Calibri" pitchFamily="34" charset="-120"/>
-              </a:rPr>
-              <a:t>traffico</a:t>
-            </a:r>
-            <a:r>
-              <a:rPr lang="en-US" sz="2400" i="1" dirty="0">
-                <a:solidFill>
-                  <a:srgbClr val="B0BEC5"/>
-                </a:solidFill>
-                <a:latin typeface="Calibri" pitchFamily="34" charset="0"/>
-                <a:ea typeface="Calibri" pitchFamily="34" charset="-122"/>
-                <a:cs typeface="Calibri" pitchFamily="34" charset="-120"/>
-              </a:rPr>
-              <a:t> </a:t>
-            </a:r>
-            <a:r>
-              <a:rPr lang="en-US" sz="2400" i="1" dirty="0" err="1">
-                <a:solidFill>
-                  <a:srgbClr val="B0BEC5"/>
-                </a:solidFill>
-                <a:latin typeface="Calibri" pitchFamily="34" charset="0"/>
-                <a:ea typeface="Calibri" pitchFamily="34" charset="-122"/>
-                <a:cs typeface="Calibri" pitchFamily="34" charset="-120"/>
-              </a:rPr>
-              <a:t>svizzero</a:t>
-            </a:r>
-            <a:r>
-              <a:rPr lang="en-US" sz="2400" i="1" dirty="0">
-                <a:solidFill>
-                  <a:srgbClr val="B0BEC5"/>
-                </a:solidFill>
-                <a:latin typeface="Calibri" pitchFamily="34" charset="0"/>
-                <a:ea typeface="Calibri" pitchFamily="34" charset="-122"/>
-                <a:cs typeface="Calibri" pitchFamily="34" charset="-120"/>
-              </a:rPr>
-              <a:t>.</a:t>
-            </a:r>
-          </a:p>
-          <a:p>
-            <a:r>
-              <a:rPr lang="en-US" sz="2400" i="1" dirty="0" err="1">
-                <a:solidFill>
-                  <a:srgbClr val="B0BEC5"/>
-                </a:solidFill>
-                <a:latin typeface="Calibri" pitchFamily="34" charset="0"/>
-                <a:ea typeface="Calibri" pitchFamily="34" charset="-122"/>
-                <a:cs typeface="Calibri" pitchFamily="34" charset="-120"/>
-              </a:rPr>
-              <a:t>L'Obiettivo</a:t>
-            </a:r>
-            <a:r>
-              <a:rPr lang="en-US" sz="2400" i="1" dirty="0">
-                <a:solidFill>
-                  <a:srgbClr val="B0BEC5"/>
-                </a:solidFill>
-                <a:latin typeface="Calibri" pitchFamily="34" charset="0"/>
-                <a:ea typeface="Calibri" pitchFamily="34" charset="-122"/>
-                <a:cs typeface="Calibri" pitchFamily="34" charset="-120"/>
-              </a:rPr>
-              <a:t>: </a:t>
-            </a:r>
-            <a:r>
-              <a:rPr lang="en-US" sz="2400" i="1" dirty="0" err="1">
-                <a:solidFill>
-                  <a:srgbClr val="B0BEC5"/>
-                </a:solidFill>
-                <a:latin typeface="Calibri" pitchFamily="34" charset="0"/>
-                <a:ea typeface="Calibri" pitchFamily="34" charset="-122"/>
-                <a:cs typeface="Calibri" pitchFamily="34" charset="-120"/>
-              </a:rPr>
-              <a:t>Promuovere</a:t>
-            </a:r>
-            <a:r>
-              <a:rPr lang="en-US" sz="2400" i="1" dirty="0">
-                <a:solidFill>
-                  <a:srgbClr val="B0BEC5"/>
-                </a:solidFill>
-                <a:latin typeface="Calibri" pitchFamily="34" charset="0"/>
-                <a:ea typeface="Calibri" pitchFamily="34" charset="-122"/>
-                <a:cs typeface="Calibri" pitchFamily="34" charset="-120"/>
-              </a:rPr>
-              <a:t> la </a:t>
-            </a:r>
-            <a:r>
-              <a:rPr lang="en-US" sz="2400" i="1" dirty="0" err="1">
-                <a:solidFill>
-                  <a:srgbClr val="B0BEC5"/>
-                </a:solidFill>
-                <a:latin typeface="Calibri" pitchFamily="34" charset="0"/>
-                <a:ea typeface="Calibri" pitchFamily="34" charset="-122"/>
-                <a:cs typeface="Calibri" pitchFamily="34" charset="-120"/>
-              </a:rPr>
-              <a:t>sicurezza</a:t>
-            </a:r>
-            <a:r>
-              <a:rPr lang="en-US" sz="2400" i="1" dirty="0">
-                <a:solidFill>
-                  <a:srgbClr val="B0BEC5"/>
-                </a:solidFill>
-                <a:latin typeface="Calibri" pitchFamily="34" charset="0"/>
-                <a:ea typeface="Calibri" pitchFamily="34" charset="-122"/>
-                <a:cs typeface="Calibri" pitchFamily="34" charset="-120"/>
-              </a:rPr>
-              <a:t> </a:t>
-            </a:r>
-            <a:r>
-              <a:rPr lang="en-US" sz="2400" i="1" dirty="0" err="1">
-                <a:solidFill>
-                  <a:srgbClr val="B0BEC5"/>
-                </a:solidFill>
-                <a:latin typeface="Calibri" pitchFamily="34" charset="0"/>
-                <a:ea typeface="Calibri" pitchFamily="34" charset="-122"/>
-                <a:cs typeface="Calibri" pitchFamily="34" charset="-120"/>
-              </a:rPr>
-              <a:t>stradale</a:t>
-            </a:r>
-            <a:r>
-              <a:rPr lang="en-US" sz="2400" i="1" dirty="0">
-                <a:solidFill>
-                  <a:srgbClr val="B0BEC5"/>
-                </a:solidFill>
-                <a:latin typeface="Calibri" pitchFamily="34" charset="0"/>
-                <a:ea typeface="Calibri" pitchFamily="34" charset="-122"/>
-                <a:cs typeface="Calibri" pitchFamily="34" charset="-120"/>
-              </a:rPr>
-              <a:t> </a:t>
-            </a:r>
-            <a:r>
-              <a:rPr lang="en-US" sz="2400" i="1" dirty="0" err="1">
-                <a:solidFill>
-                  <a:srgbClr val="B0BEC5"/>
-                </a:solidFill>
-                <a:latin typeface="Calibri" pitchFamily="34" charset="0"/>
-                <a:ea typeface="Calibri" pitchFamily="34" charset="-122"/>
-                <a:cs typeface="Calibri" pitchFamily="34" charset="-120"/>
-              </a:rPr>
-              <a:t>urbana</a:t>
-            </a:r>
-            <a:r>
-              <a:rPr lang="en-US" sz="2400" i="1" dirty="0">
-                <a:solidFill>
-                  <a:srgbClr val="B0BEC5"/>
-                </a:solidFill>
-                <a:latin typeface="Calibri" pitchFamily="34" charset="0"/>
-                <a:ea typeface="Calibri" pitchFamily="34" charset="-122"/>
-                <a:cs typeface="Calibri" pitchFamily="34" charset="-120"/>
-              </a:rPr>
-              <a:t>.</a:t>
-            </a:r>
-          </a:p>
-          <a:p>
-            <a:endParaRPr lang="en-US" sz="2400" i="1" dirty="0">
+              <a:t>L'Obiettivo: Promuovere la sicurezza stradale urbana.</a:t>
+            </a:r>
+          </a:p>
+          <a:p>
+            <a:endParaRPr lang="it-IT" sz="2400" i="1" noProof="1">
               <a:solidFill>
                 <a:srgbClr val="B0BEC5"/>
               </a:solidFill>
@@ -4578,7 +4407,7 @@
           <a:bodyPr/>
           <a:lstStyle/>
           <a:p>
-            <a:endParaRPr lang="it-CH"/>
+            <a:endParaRPr lang="it-IT" noProof="1"/>
           </a:p>
         </p:txBody>
       </p:sp>
@@ -4607,7 +4436,7 @@
               <a:buNone/>
             </a:pPr>
             <a:r>
-              <a:rPr lang="en-US" sz="2200" b="1" dirty="0">
+              <a:rPr lang="it-IT" sz="2200" b="1" noProof="1">
                 <a:solidFill>
                   <a:srgbClr val="00B4D8"/>
                 </a:solidFill>
@@ -4617,7 +4446,7 @@
               </a:rPr>
               <a:t>Panoramica del Dataset</a:t>
             </a:r>
-            <a:endParaRPr lang="en-US" sz="2200" dirty="0"/>
+            <a:endParaRPr lang="it-IT" sz="2200" noProof="1"/>
           </a:p>
         </p:txBody>
       </p:sp>
@@ -4649,7 +4478,7 @@
           <a:bodyPr/>
           <a:lstStyle/>
           <a:p>
-            <a:endParaRPr lang="it-CH"/>
+            <a:endParaRPr lang="it-IT" noProof="1"/>
           </a:p>
         </p:txBody>
       </p:sp>
@@ -4678,7 +4507,7 @@
               <a:buNone/>
             </a:pPr>
             <a:r>
-              <a:rPr lang="en-US" sz="1300" b="1" dirty="0">
+              <a:rPr lang="it-IT" sz="1300" b="1" noProof="1">
                 <a:solidFill>
                   <a:srgbClr val="1A2744"/>
                 </a:solidFill>
@@ -4688,7 +4517,7 @@
               </a:rPr>
               <a:t>Cosa contiene?</a:t>
             </a:r>
-            <a:endParaRPr lang="en-US" sz="1300" dirty="0"/>
+            <a:endParaRPr lang="it-IT" sz="1300" noProof="1"/>
           </a:p>
         </p:txBody>
       </p:sp>
@@ -4720,7 +4549,7 @@
           <a:bodyPr/>
           <a:lstStyle/>
           <a:p>
-            <a:endParaRPr lang="it-CH"/>
+            <a:endParaRPr lang="it-IT" noProof="1"/>
           </a:p>
         </p:txBody>
       </p:sp>
@@ -4749,7 +4578,7 @@
               <a:buNone/>
             </a:pPr>
             <a:r>
-              <a:rPr lang="en-US" sz="1150" dirty="0">
+              <a:rPr lang="it-IT" sz="1150" noProof="1">
                 <a:solidFill>
                   <a:srgbClr val="FFFFFF"/>
                 </a:solidFill>
@@ -4759,7 +4588,7 @@
               </a:rPr>
               <a:t>⏱️  Data/ora misurazione</a:t>
             </a:r>
-            <a:endParaRPr lang="en-US" sz="1150" dirty="0"/>
+            <a:endParaRPr lang="it-IT" sz="1150" noProof="1"/>
           </a:p>
         </p:txBody>
       </p:sp>
@@ -4791,7 +4620,7 @@
           <a:bodyPr/>
           <a:lstStyle/>
           <a:p>
-            <a:endParaRPr lang="it-CH"/>
+            <a:endParaRPr lang="it-IT" noProof="1"/>
           </a:p>
         </p:txBody>
       </p:sp>
@@ -4820,7 +4649,7 @@
               <a:buNone/>
             </a:pPr>
             <a:r>
-              <a:rPr lang="en-US" sz="1150" dirty="0">
+              <a:rPr lang="it-IT" sz="1150" noProof="1">
                 <a:solidFill>
                   <a:srgbClr val="FFFFFF"/>
                 </a:solidFill>
@@ -4830,7 +4659,7 @@
               </a:rPr>
               <a:t>🚗  Velocità (km/h) per singolo veicolo</a:t>
             </a:r>
-            <a:endParaRPr lang="en-US" sz="1150" dirty="0"/>
+            <a:endParaRPr lang="it-IT" sz="1150" noProof="1"/>
           </a:p>
         </p:txBody>
       </p:sp>
@@ -4862,7 +4691,7 @@
           <a:bodyPr/>
           <a:lstStyle/>
           <a:p>
-            <a:endParaRPr lang="it-CH"/>
+            <a:endParaRPr lang="it-IT" noProof="1"/>
           </a:p>
         </p:txBody>
       </p:sp>
@@ -4891,7 +4720,7 @@
               <a:buNone/>
             </a:pPr>
             <a:r>
-              <a:rPr lang="en-US" sz="1150" dirty="0">
+              <a:rPr lang="it-IT" sz="1150" noProof="1">
                 <a:solidFill>
                   <a:srgbClr val="FFFFFF"/>
                 </a:solidFill>
@@ -4899,20 +4728,9 @@
                 <a:ea typeface="Calibri" pitchFamily="34" charset="-122"/>
                 <a:cs typeface="Calibri" pitchFamily="34" charset="-120"/>
               </a:rPr>
-              <a:t>📍  Coordinate </a:t>
-            </a:r>
-            <a:r>
-              <a:rPr lang="en-US" sz="1150" dirty="0" err="1">
-                <a:solidFill>
-                  <a:srgbClr val="FFFFFF"/>
-                </a:solidFill>
-                <a:latin typeface="Calibri" pitchFamily="34" charset="0"/>
-                <a:ea typeface="Calibri" pitchFamily="34" charset="-122"/>
-                <a:cs typeface="Calibri" pitchFamily="34" charset="-120"/>
-              </a:rPr>
-              <a:t>geografiche</a:t>
-            </a:r>
-            <a:endParaRPr lang="en-US" sz="1150" dirty="0"/>
+              <a:t>📍  Coordinate geografiche</a:t>
+            </a:r>
+            <a:endParaRPr lang="it-IT" sz="1150" noProof="1"/>
           </a:p>
         </p:txBody>
       </p:sp>
@@ -4944,7 +4762,7 @@
           <a:bodyPr/>
           <a:lstStyle/>
           <a:p>
-            <a:endParaRPr lang="it-CH"/>
+            <a:endParaRPr lang="it-IT" noProof="1"/>
           </a:p>
         </p:txBody>
       </p:sp>
@@ -4973,7 +4791,7 @@
               <a:buNone/>
             </a:pPr>
             <a:r>
-              <a:rPr lang="en-US" sz="1150" dirty="0">
+              <a:rPr lang="it-IT" sz="1150" noProof="1">
                 <a:solidFill>
                   <a:srgbClr val="FFFFFF"/>
                 </a:solidFill>
@@ -4983,7 +4801,7 @@
               </a:rPr>
               <a:t>🛣️  Zona limite (30/50 km/h), strada e direzione</a:t>
             </a:r>
-            <a:endParaRPr lang="en-US" sz="1150" dirty="0"/>
+            <a:endParaRPr lang="it-IT" sz="1150" noProof="1"/>
           </a:p>
         </p:txBody>
       </p:sp>
@@ -5015,7 +4833,7 @@
           <a:bodyPr/>
           <a:lstStyle/>
           <a:p>
-            <a:endParaRPr lang="it-CH"/>
+            <a:endParaRPr lang="it-IT" noProof="1"/>
           </a:p>
         </p:txBody>
       </p:sp>
@@ -5044,7 +4862,7 @@
               <a:buNone/>
             </a:pPr>
             <a:r>
-              <a:rPr lang="en-US" sz="1150" dirty="0">
+              <a:rPr lang="it-IT" sz="1150" noProof="1">
                 <a:solidFill>
                   <a:srgbClr val="FFFFFF"/>
                 </a:solidFill>
@@ -5054,7 +4872,7 @@
               </a:rPr>
               <a:t>📊  V50, V85 e tasso di infrazioni per postazione</a:t>
             </a:r>
-            <a:endParaRPr lang="en-US" sz="1150" dirty="0"/>
+            <a:endParaRPr lang="it-IT" sz="1150" noProof="1"/>
           </a:p>
         </p:txBody>
       </p:sp>
@@ -5086,7 +4904,7 @@
           <a:bodyPr/>
           <a:lstStyle/>
           <a:p>
-            <a:endParaRPr lang="it-CH"/>
+            <a:endParaRPr lang="it-IT" noProof="1"/>
           </a:p>
         </p:txBody>
       </p:sp>
@@ -5115,7 +4933,7 @@
               <a:buNone/>
             </a:pPr>
             <a:r>
-              <a:rPr lang="en-US" sz="1150" dirty="0">
+              <a:rPr lang="it-IT" sz="1150" noProof="1">
                 <a:solidFill>
                   <a:srgbClr val="FFFFFF"/>
                 </a:solidFill>
@@ -5125,7 +4943,7 @@
               </a:rPr>
               <a:t>📅  Inizio e fine periodo di misurazione</a:t>
             </a:r>
-            <a:endParaRPr lang="en-US" sz="1150" dirty="0"/>
+            <a:endParaRPr lang="it-IT" sz="1150" noProof="1"/>
           </a:p>
         </p:txBody>
       </p:sp>
@@ -5157,7 +4975,7 @@
           <a:bodyPr/>
           <a:lstStyle/>
           <a:p>
-            <a:endParaRPr lang="it-CH"/>
+            <a:endParaRPr lang="it-IT" noProof="1"/>
           </a:p>
         </p:txBody>
       </p:sp>
@@ -5186,7 +5004,7 @@
               <a:buNone/>
             </a:pPr>
             <a:r>
-              <a:rPr lang="en-US" sz="1150" dirty="0">
+              <a:rPr lang="it-IT" sz="1150" noProof="1">
                 <a:solidFill>
                   <a:srgbClr val="FFFFFF"/>
                 </a:solidFill>
@@ -5196,7 +5014,7 @@
               </a:rPr>
               <a:t>🔢  Conteggio veicoli e lunghezza media</a:t>
             </a:r>
-            <a:endParaRPr lang="en-US" sz="1150" dirty="0"/>
+            <a:endParaRPr lang="it-IT" sz="1150" noProof="1"/>
           </a:p>
         </p:txBody>
       </p:sp>
@@ -5228,7 +5046,7 @@
           <a:bodyPr/>
           <a:lstStyle/>
           <a:p>
-            <a:endParaRPr lang="it-CH"/>
+            <a:endParaRPr lang="it-IT" noProof="1"/>
           </a:p>
         </p:txBody>
       </p:sp>
@@ -5257,7 +5075,7 @@
               <a:buNone/>
             </a:pPr>
             <a:r>
-              <a:rPr lang="en-US" sz="1150" dirty="0">
+              <a:rPr lang="it-IT" sz="1150" noProof="1">
                 <a:solidFill>
                   <a:srgbClr val="FFFFFF"/>
                 </a:solidFill>
@@ -5267,7 +5085,7 @@
               </a:rPr>
               <a:t>🆔  ID misuratore con link alle statistiche</a:t>
             </a:r>
-            <a:endParaRPr lang="en-US" sz="1150" dirty="0"/>
+            <a:endParaRPr lang="it-IT" sz="1150" noProof="1"/>
           </a:p>
         </p:txBody>
       </p:sp>
@@ -5299,7 +5117,7 @@
           <a:bodyPr/>
           <a:lstStyle/>
           <a:p>
-            <a:endParaRPr lang="it-CH"/>
+            <a:endParaRPr lang="it-IT" noProof="1"/>
           </a:p>
         </p:txBody>
       </p:sp>
@@ -5328,7 +5146,7 @@
               <a:buNone/>
             </a:pPr>
             <a:r>
-              <a:rPr lang="en-US" sz="1300" b="1" dirty="0">
+              <a:rPr lang="it-IT" sz="1300" b="1" noProof="1">
                 <a:solidFill>
                   <a:srgbClr val="FFFFFF"/>
                 </a:solidFill>
@@ -5338,7 +5156,7 @@
               </a:rPr>
               <a:t>Numeri chiave</a:t>
             </a:r>
-            <a:endParaRPr lang="en-US" sz="1300" dirty="0"/>
+            <a:endParaRPr lang="it-IT" sz="1300" noProof="1"/>
           </a:p>
         </p:txBody>
       </p:sp>
@@ -5365,7 +5183,7 @@
           <a:p>
             <a:pPr algn="ctr"/>
             <a:r>
-              <a:rPr lang="en-US" sz="2400" b="1" dirty="0">
+              <a:rPr lang="it-IT" sz="2400" b="1" noProof="1">
                 <a:solidFill>
                   <a:srgbClr val="00B4D8"/>
                 </a:solidFill>
@@ -5373,33 +5191,61 @@
                 <a:ea typeface="Calibri" pitchFamily="34" charset="-122"/>
                 <a:cs typeface="Calibri" pitchFamily="34" charset="-120"/>
               </a:rPr>
-              <a:t>~5.5 </a:t>
-            </a:r>
-            <a:r>
-              <a:rPr lang="en-US" sz="2400" b="1" dirty="0" err="1">
-                <a:solidFill>
-                  <a:srgbClr val="00B4D8"/>
+              <a:t>~5.5 mln</a:t>
+            </a:r>
+            <a:endParaRPr lang="it-IT" sz="2400" noProof="1"/>
+          </a:p>
+        </p:txBody>
+      </p:sp>
+      <p:sp>
+        <p:nvSpPr>
+          <p:cNvPr id="25" name="Text 23"/>
+          <p:cNvSpPr/>
+          <p:nvPr/>
+        </p:nvSpPr>
+        <p:spPr>
+          <a:xfrm>
+            <a:off x="4937760" y="1700784"/>
+            <a:ext cx="3931920" cy="256032"/>
+          </a:xfrm>
+          <a:prstGeom prst="rect">
+            <a:avLst/>
+          </a:prstGeom>
+          <a:noFill/>
+          <a:ln/>
+        </p:spPr>
+        <p:txBody>
+          <a:bodyPr wrap="square" lIns="0" tIns="0" rIns="0" bIns="0" rtlCol="0" anchor="ctr"/>
+          <a:lstStyle/>
+          <a:p>
+            <a:pPr marL="0" indent="0" algn="ctr">
+              <a:buNone/>
+            </a:pPr>
+            <a:r>
+              <a:rPr lang="it-IT" sz="1200" noProof="1">
+                <a:solidFill>
+                  <a:srgbClr val="B0BEC5"/>
                 </a:solidFill>
                 <a:latin typeface="Calibri" pitchFamily="34" charset="0"/>
                 <a:ea typeface="Calibri" pitchFamily="34" charset="-122"/>
                 <a:cs typeface="Calibri" pitchFamily="34" charset="-120"/>
               </a:rPr>
-              <a:t>mln</a:t>
-            </a:r>
-            <a:endParaRPr lang="en-US" sz="2400" dirty="0"/>
-          </a:p>
-        </p:txBody>
-      </p:sp>
-      <p:sp>
-        <p:nvSpPr>
-          <p:cNvPr id="25" name="Text 23"/>
-          <p:cNvSpPr/>
-          <p:nvPr/>
-        </p:nvSpPr>
-        <p:spPr>
-          <a:xfrm>
-            <a:off x="4937760" y="1700784"/>
-            <a:ext cx="3931920" cy="256032"/>
+              <a:t>Misurazioni singole</a:t>
+            </a:r>
+            <a:endParaRPr lang="it-IT" sz="1200" noProof="1"/>
+          </a:p>
+        </p:txBody>
+      </p:sp>
+      <p:sp>
+        <p:nvSpPr>
+          <p:cNvPr id="26" name="Text 24"/>
+          <p:cNvSpPr/>
+          <p:nvPr/>
+        </p:nvSpPr>
+        <p:spPr>
+          <a:xfrm>
+            <a:off x="4937760" y="2020824"/>
+            <a:ext cx="3931920" cy="402336"/>
           </a:xfrm>
           <a:prstGeom prst="rect">
             <a:avLst/>
@@ -5415,7 +5261,45 @@
               <a:buNone/>
             </a:pPr>
             <a:r>
-              <a:rPr lang="en-US" sz="1200" dirty="0">
+              <a:rPr lang="it-IT" sz="2400" b="1" noProof="1">
+                <a:solidFill>
+                  <a:srgbClr val="00B4D8"/>
+                </a:solidFill>
+                <a:latin typeface="Calibri" pitchFamily="34" charset="0"/>
+                <a:cs typeface="Calibri" pitchFamily="34" charset="-120"/>
+              </a:rPr>
+              <a:t>295</a:t>
+            </a:r>
+            <a:endParaRPr lang="it-IT" sz="2400" noProof="1"/>
+          </a:p>
+        </p:txBody>
+      </p:sp>
+      <p:sp>
+        <p:nvSpPr>
+          <p:cNvPr id="27" name="Text 25"/>
+          <p:cNvSpPr/>
+          <p:nvPr/>
+        </p:nvSpPr>
+        <p:spPr>
+          <a:xfrm>
+            <a:off x="4937760" y="2414016"/>
+            <a:ext cx="3931920" cy="256032"/>
+          </a:xfrm>
+          <a:prstGeom prst="rect">
+            <a:avLst/>
+          </a:prstGeom>
+          <a:noFill/>
+          <a:ln/>
+        </p:spPr>
+        <p:txBody>
+          <a:bodyPr wrap="square" lIns="0" tIns="0" rIns="0" bIns="0" rtlCol="0" anchor="ctr"/>
+          <a:lstStyle/>
+          <a:p>
+            <a:pPr marL="0" indent="0" algn="ctr">
+              <a:buNone/>
+            </a:pPr>
+            <a:r>
+              <a:rPr lang="it-IT" sz="1200" noProof="1">
                 <a:solidFill>
                   <a:srgbClr val="B0BEC5"/>
                 </a:solidFill>
@@ -5423,21 +5307,21 @@
                 <a:ea typeface="Calibri" pitchFamily="34" charset="-122"/>
                 <a:cs typeface="Calibri" pitchFamily="34" charset="-120"/>
               </a:rPr>
-              <a:t>Misurazioni singole</a:t>
-            </a:r>
-            <a:endParaRPr lang="en-US" sz="1200" dirty="0"/>
-          </a:p>
-        </p:txBody>
-      </p:sp>
-      <p:sp>
-        <p:nvSpPr>
-          <p:cNvPr id="26" name="Text 24"/>
-          <p:cNvSpPr/>
-          <p:nvPr/>
-        </p:nvSpPr>
-        <p:spPr>
-          <a:xfrm>
-            <a:off x="4937760" y="2020824"/>
+              <a:t>Postazioni radar</a:t>
+            </a:r>
+            <a:endParaRPr lang="it-IT" sz="1200" noProof="1"/>
+          </a:p>
+        </p:txBody>
+      </p:sp>
+      <p:sp>
+        <p:nvSpPr>
+          <p:cNvPr id="28" name="Text 26"/>
+          <p:cNvSpPr/>
+          <p:nvPr/>
+        </p:nvSpPr>
+        <p:spPr>
+          <a:xfrm>
+            <a:off x="4937760" y="2734056"/>
             <a:ext cx="3931920" cy="402336"/>
           </a:xfrm>
           <a:prstGeom prst="rect">
@@ -5454,28 +5338,29 @@
               <a:buNone/>
             </a:pPr>
             <a:r>
-              <a:rPr lang="en-US" sz="2400" b="1" dirty="0">
+              <a:rPr lang="it-IT" sz="2400" b="1" noProof="1">
                 <a:solidFill>
                   <a:srgbClr val="00B4D8"/>
                 </a:solidFill>
                 <a:latin typeface="Calibri" pitchFamily="34" charset="0"/>
+                <a:ea typeface="Calibri" pitchFamily="34" charset="-122"/>
                 <a:cs typeface="Calibri" pitchFamily="34" charset="-120"/>
               </a:rPr>
-              <a:t>295</a:t>
-            </a:r>
-            <a:endParaRPr lang="en-US" sz="2400" dirty="0"/>
-          </a:p>
-        </p:txBody>
-      </p:sp>
-      <p:sp>
-        <p:nvSpPr>
-          <p:cNvPr id="27" name="Text 25"/>
-          <p:cNvSpPr/>
-          <p:nvPr/>
-        </p:nvSpPr>
-        <p:spPr>
-          <a:xfrm>
-            <a:off x="4937760" y="2414016"/>
+              <a:t>20/ 30 / 40 / 50 / 60 / 80</a:t>
+            </a:r>
+            <a:endParaRPr lang="it-IT" sz="2400" noProof="1"/>
+          </a:p>
+        </p:txBody>
+      </p:sp>
+      <p:sp>
+        <p:nvSpPr>
+          <p:cNvPr id="29" name="Text 27"/>
+          <p:cNvSpPr/>
+          <p:nvPr/>
+        </p:nvSpPr>
+        <p:spPr>
+          <a:xfrm>
+            <a:off x="4937760" y="3127248"/>
             <a:ext cx="3931920" cy="256032"/>
           </a:xfrm>
           <a:prstGeom prst="rect">
@@ -5492,7 +5377,7 @@
               <a:buNone/>
             </a:pPr>
             <a:r>
-              <a:rPr lang="en-US" sz="1200" dirty="0" err="1">
+              <a:rPr lang="it-IT" sz="1200" noProof="1">
                 <a:solidFill>
                   <a:srgbClr val="B0BEC5"/>
                 </a:solidFill>
@@ -5500,98 +5385,9 @@
                 <a:ea typeface="Calibri" pitchFamily="34" charset="-122"/>
                 <a:cs typeface="Calibri" pitchFamily="34" charset="-120"/>
               </a:rPr>
-              <a:t>Postazioni</a:t>
-            </a:r>
-            <a:r>
-              <a:rPr lang="en-US" sz="1200" dirty="0">
-                <a:solidFill>
-                  <a:srgbClr val="B0BEC5"/>
-                </a:solidFill>
-                <a:latin typeface="Calibri" pitchFamily="34" charset="0"/>
-                <a:ea typeface="Calibri" pitchFamily="34" charset="-122"/>
-                <a:cs typeface="Calibri" pitchFamily="34" charset="-120"/>
-              </a:rPr>
-              <a:t> radar</a:t>
-            </a:r>
-            <a:endParaRPr lang="en-US" sz="1200" dirty="0"/>
-          </a:p>
-        </p:txBody>
-      </p:sp>
-      <p:sp>
-        <p:nvSpPr>
-          <p:cNvPr id="28" name="Text 26"/>
-          <p:cNvSpPr/>
-          <p:nvPr/>
-        </p:nvSpPr>
-        <p:spPr>
-          <a:xfrm>
-            <a:off x="4937760" y="2734056"/>
-            <a:ext cx="3931920" cy="402336"/>
-          </a:xfrm>
-          <a:prstGeom prst="rect">
-            <a:avLst/>
-          </a:prstGeom>
-          <a:noFill/>
-          <a:ln/>
-        </p:spPr>
-        <p:txBody>
-          <a:bodyPr wrap="square" lIns="0" tIns="0" rIns="0" bIns="0" rtlCol="0" anchor="ctr"/>
-          <a:lstStyle/>
-          <a:p>
-            <a:pPr marL="0" indent="0" algn="ctr">
-              <a:buNone/>
-            </a:pPr>
-            <a:r>
-              <a:rPr lang="en-US" sz="2400" b="1" dirty="0">
-                <a:solidFill>
-                  <a:srgbClr val="00B4D8"/>
-                </a:solidFill>
-                <a:latin typeface="Calibri" pitchFamily="34" charset="0"/>
-                <a:ea typeface="Calibri" pitchFamily="34" charset="-122"/>
-                <a:cs typeface="Calibri" pitchFamily="34" charset="-120"/>
-              </a:rPr>
-              <a:t>20/ 30 / 40 / 50 / 60 / 80</a:t>
-            </a:r>
-            <a:endParaRPr lang="en-US" sz="2400" dirty="0"/>
-          </a:p>
-        </p:txBody>
-      </p:sp>
-      <p:sp>
-        <p:nvSpPr>
-          <p:cNvPr id="29" name="Text 27"/>
-          <p:cNvSpPr/>
-          <p:nvPr/>
-        </p:nvSpPr>
-        <p:spPr>
-          <a:xfrm>
-            <a:off x="4937760" y="3127248"/>
-            <a:ext cx="3931920" cy="256032"/>
-          </a:xfrm>
-          <a:prstGeom prst="rect">
-            <a:avLst/>
-          </a:prstGeom>
-          <a:noFill/>
-          <a:ln/>
-        </p:spPr>
-        <p:txBody>
-          <a:bodyPr wrap="square" lIns="0" tIns="0" rIns="0" bIns="0" rtlCol="0" anchor="ctr"/>
-          <a:lstStyle/>
-          <a:p>
-            <a:pPr marL="0" indent="0" algn="ctr">
-              <a:buNone/>
-            </a:pPr>
-            <a:r>
-              <a:rPr lang="en-US" sz="1200" dirty="0">
-                <a:solidFill>
-                  <a:srgbClr val="B0BEC5"/>
-                </a:solidFill>
-                <a:latin typeface="Calibri" pitchFamily="34" charset="0"/>
-                <a:ea typeface="Calibri" pitchFamily="34" charset="-122"/>
-                <a:cs typeface="Calibri" pitchFamily="34" charset="-120"/>
-              </a:rPr>
               <a:t>Zone limite (km/h)</a:t>
             </a:r>
-            <a:endParaRPr lang="en-US" sz="1200" dirty="0"/>
+            <a:endParaRPr lang="it-IT" sz="1200" noProof="1"/>
           </a:p>
         </p:txBody>
       </p:sp>
@@ -5626,7 +5422,7 @@
               <a:buNone/>
             </a:pPr>
             <a:r>
-              <a:rPr lang="en-US" sz="2400" b="1" dirty="0">
+              <a:rPr lang="it-IT" sz="2400" b="1" noProof="1">
                 <a:solidFill>
                   <a:srgbClr val="00B4D8"/>
                 </a:solidFill>
@@ -5636,7 +5432,7 @@
               </a:rPr>
               <a:t>3</a:t>
             </a:r>
-            <a:endParaRPr lang="en-US" sz="2400" dirty="0"/>
+            <a:endParaRPr lang="it-IT" sz="2400" noProof="1"/>
           </a:p>
         </p:txBody>
       </p:sp>
@@ -5671,7 +5467,7 @@
               <a:buNone/>
             </a:pPr>
             <a:r>
-              <a:rPr lang="en-US" sz="1200" dirty="0">
+              <a:rPr lang="it-IT" sz="1200" noProof="1">
                 <a:solidFill>
                   <a:srgbClr val="B0BEC5"/>
                 </a:solidFill>
@@ -5679,31 +5475,9 @@
                 <a:ea typeface="Calibri" pitchFamily="34" charset="-122"/>
                 <a:cs typeface="Calibri" pitchFamily="34" charset="-120"/>
               </a:rPr>
-              <a:t>Anni di </a:t>
-            </a:r>
-            <a:r>
-              <a:rPr lang="en-US" sz="1200" dirty="0" err="1">
-                <a:solidFill>
-                  <a:srgbClr val="B0BEC5"/>
-                </a:solidFill>
-                <a:latin typeface="Calibri" pitchFamily="34" charset="0"/>
-                <a:ea typeface="Calibri" pitchFamily="34" charset="-122"/>
-                <a:cs typeface="Calibri" pitchFamily="34" charset="-120"/>
-              </a:rPr>
-              <a:t>misurazioni</a:t>
-            </a:r>
-            <a:r>
-              <a:rPr lang="en-US" sz="1200" dirty="0">
-                <a:solidFill>
-                  <a:srgbClr val="B0BEC5"/>
-                </a:solidFill>
-                <a:latin typeface="Calibri" pitchFamily="34" charset="0"/>
-                <a:ea typeface="Calibri" pitchFamily="34" charset="-122"/>
-                <a:cs typeface="Calibri" pitchFamily="34" charset="-120"/>
-              </a:rPr>
-              <a:t> (dal 2024)</a:t>
-            </a:r>
-            <a:endParaRPr lang="en-US" sz="1200" dirty="0"/>
+              <a:t>Anni di misurazioni (dal 2024)</a:t>
+            </a:r>
+            <a:endParaRPr lang="it-IT" sz="1200" noProof="1"/>
           </a:p>
         </p:txBody>
       </p:sp>
@@ -5768,7 +5542,7 @@
           <a:bodyPr/>
           <a:lstStyle/>
           <a:p>
-            <a:endParaRPr lang="it-CH"/>
+            <a:endParaRPr lang="it-IT" noProof="1"/>
           </a:p>
         </p:txBody>
       </p:sp>
@@ -5797,7 +5571,7 @@
               <a:buNone/>
             </a:pPr>
             <a:r>
-              <a:rPr lang="en-US" sz="2200" b="1" dirty="0">
+              <a:rPr lang="it-IT" sz="2200" b="1" noProof="1">
                 <a:solidFill>
                   <a:srgbClr val="00B4D8"/>
                 </a:solidFill>
@@ -5805,75 +5579,9 @@
                 <a:ea typeface="Calibri" pitchFamily="34" charset="-122"/>
                 <a:cs typeface="Calibri" pitchFamily="34" charset="-120"/>
               </a:rPr>
-              <a:t>Top 15 </a:t>
-            </a:r>
-            <a:r>
-              <a:rPr lang="en-US" sz="2200" b="1" dirty="0" err="1">
-                <a:solidFill>
-                  <a:srgbClr val="00B4D8"/>
-                </a:solidFill>
-                <a:latin typeface="Calibri" pitchFamily="34" charset="0"/>
-                <a:ea typeface="Calibri" pitchFamily="34" charset="-122"/>
-                <a:cs typeface="Calibri" pitchFamily="34" charset="-120"/>
-              </a:rPr>
-              <a:t>Postazioni</a:t>
-            </a:r>
-            <a:r>
-              <a:rPr lang="en-US" sz="2200" b="1" dirty="0">
-                <a:solidFill>
-                  <a:srgbClr val="00B4D8"/>
-                </a:solidFill>
-                <a:latin typeface="Calibri" pitchFamily="34" charset="0"/>
-                <a:ea typeface="Calibri" pitchFamily="34" charset="-122"/>
-                <a:cs typeface="Calibri" pitchFamily="34" charset="-120"/>
-              </a:rPr>
-              <a:t> per Tasso di </a:t>
-            </a:r>
-            <a:r>
-              <a:rPr lang="en-US" sz="2200" b="1" dirty="0" err="1">
-                <a:solidFill>
-                  <a:srgbClr val="00B4D8"/>
-                </a:solidFill>
-                <a:latin typeface="Calibri" pitchFamily="34" charset="0"/>
-                <a:ea typeface="Calibri" pitchFamily="34" charset="-122"/>
-                <a:cs typeface="Calibri" pitchFamily="34" charset="-120"/>
-              </a:rPr>
-              <a:t>Infrazioni</a:t>
-            </a:r>
-            <a:r>
-              <a:rPr lang="en-US" sz="2200" b="1" dirty="0">
-                <a:solidFill>
-                  <a:srgbClr val="00B4D8"/>
-                </a:solidFill>
-                <a:latin typeface="Calibri" pitchFamily="34" charset="0"/>
-                <a:ea typeface="Calibri" pitchFamily="34" charset="-122"/>
-                <a:cs typeface="Calibri" pitchFamily="34" charset="-120"/>
-              </a:rPr>
-              <a:t> (</a:t>
-            </a:r>
-            <a:r>
-              <a:rPr lang="en-US" sz="2200" b="1" dirty="0" err="1">
-                <a:solidFill>
-                  <a:srgbClr val="00B4D8"/>
-                </a:solidFill>
-                <a:latin typeface="Calibri" pitchFamily="34" charset="0"/>
-                <a:ea typeface="Calibri" pitchFamily="34" charset="-122"/>
-                <a:cs typeface="Calibri" pitchFamily="34" charset="-120"/>
-              </a:rPr>
-              <a:t>precedente</a:t>
-            </a:r>
-            <a:r>
-              <a:rPr lang="en-US" sz="2200" b="1" dirty="0">
-                <a:solidFill>
-                  <a:srgbClr val="00B4D8"/>
-                </a:solidFill>
-                <a:latin typeface="Calibri" pitchFamily="34" charset="0"/>
-                <a:ea typeface="Calibri" pitchFamily="34" charset="-122"/>
-                <a:cs typeface="Calibri" pitchFamily="34" charset="-120"/>
-              </a:rPr>
-              <a:t>)</a:t>
-            </a:r>
-            <a:endParaRPr lang="en-US" sz="2200" dirty="0"/>
+              <a:t>Top 15 Postazioni per Tasso di Infrazioni (precedente)</a:t>
+            </a:r>
+            <a:endParaRPr lang="it-IT" sz="2200" noProof="1"/>
           </a:p>
         </p:txBody>
       </p:sp>
@@ -5902,76 +5610,16 @@
               <a:buNone/>
             </a:pPr>
             <a:r>
-              <a:rPr lang="en-US" sz="1300" i="1" dirty="0" err="1">
+              <a:rPr lang="it-IT" sz="1300" i="1" noProof="1">
                 <a:solidFill>
                   <a:srgbClr val="B0BEC5"/>
                 </a:solidFill>
                 <a:latin typeface="Calibri" pitchFamily="34" charset="0"/>
                 <a:cs typeface="Calibri" pitchFamily="34" charset="-120"/>
               </a:rPr>
-              <a:t>Postazioni</a:t>
-            </a:r>
-            <a:r>
-              <a:rPr lang="en-US" sz="1300" i="1" dirty="0">
-                <a:solidFill>
-                  <a:srgbClr val="B0BEC5"/>
-                </a:solidFill>
-                <a:latin typeface="Calibri" pitchFamily="34" charset="0"/>
-                <a:cs typeface="Calibri" pitchFamily="34" charset="-120"/>
-              </a:rPr>
-              <a:t> con la </a:t>
-            </a:r>
-            <a:r>
-              <a:rPr lang="en-US" sz="1300" i="1" dirty="0" err="1">
-                <a:solidFill>
-                  <a:srgbClr val="B0BEC5"/>
-                </a:solidFill>
-                <a:latin typeface="Calibri" pitchFamily="34" charset="0"/>
-                <a:cs typeface="Calibri" pitchFamily="34" charset="-120"/>
-              </a:rPr>
-              <a:t>maggior</a:t>
-            </a:r>
-            <a:r>
-              <a:rPr lang="en-US" sz="1300" i="1" dirty="0">
-                <a:solidFill>
-                  <a:srgbClr val="B0BEC5"/>
-                </a:solidFill>
-                <a:latin typeface="Calibri" pitchFamily="34" charset="0"/>
-                <a:cs typeface="Calibri" pitchFamily="34" charset="-120"/>
-              </a:rPr>
-              <a:t> </a:t>
-            </a:r>
-            <a:r>
-              <a:rPr lang="en-US" sz="1300" i="1" dirty="0" err="1">
-                <a:solidFill>
-                  <a:srgbClr val="B0BEC5"/>
-                </a:solidFill>
-                <a:latin typeface="Calibri" pitchFamily="34" charset="0"/>
-                <a:cs typeface="Calibri" pitchFamily="34" charset="-120"/>
-              </a:rPr>
-              <a:t>percentaule</a:t>
-            </a:r>
-            <a:r>
-              <a:rPr lang="en-US" sz="1300" i="1" dirty="0">
-                <a:solidFill>
-                  <a:srgbClr val="B0BEC5"/>
-                </a:solidFill>
-                <a:latin typeface="Calibri" pitchFamily="34" charset="0"/>
-                <a:cs typeface="Calibri" pitchFamily="34" charset="-120"/>
-              </a:rPr>
-              <a:t> di </a:t>
-            </a:r>
-            <a:r>
-              <a:rPr lang="en-US" sz="1300" i="1" dirty="0" err="1">
-                <a:solidFill>
-                  <a:srgbClr val="B0BEC5"/>
-                </a:solidFill>
-                <a:latin typeface="Calibri" pitchFamily="34" charset="0"/>
-                <a:cs typeface="Calibri" pitchFamily="34" charset="-120"/>
-              </a:rPr>
-              <a:t>infrazioni</a:t>
-            </a:r>
-            <a:endParaRPr lang="en-US" sz="1300" dirty="0"/>
+              <a:t>Postazioni con la maggior percentaule di infrazioni</a:t>
+            </a:r>
+            <a:endParaRPr lang="it-IT" sz="1300" noProof="1"/>
           </a:p>
         </p:txBody>
       </p:sp>
@@ -6003,7 +5651,7 @@
           <a:bodyPr/>
           <a:lstStyle/>
           <a:p>
-            <a:endParaRPr lang="it-CH"/>
+            <a:endParaRPr lang="it-IT" noProof="1"/>
           </a:p>
         </p:txBody>
       </p:sp>
@@ -6032,7 +5680,7 @@
               <a:buNone/>
             </a:pPr>
             <a:r>
-              <a:rPr lang="en-US" sz="1400" dirty="0">
+              <a:rPr lang="it-IT" sz="1400" noProof="1">
                 <a:solidFill>
                   <a:srgbClr val="2A4580"/>
                 </a:solidFill>
@@ -6042,7 +5690,7 @@
               </a:rPr>
               <a:t>[ grafico ]</a:t>
             </a:r>
-            <a:endParaRPr lang="en-US" sz="1400" dirty="0"/>
+            <a:endParaRPr lang="it-IT" sz="1400" noProof="1"/>
           </a:p>
         </p:txBody>
       </p:sp>
@@ -6076,6 +5724,62 @@
           </a:prstGeom>
         </p:spPr>
       </p:pic>
+      <p:sp>
+        <p:nvSpPr>
+          <p:cNvPr id="8" name="Grafico ad anello 7">
+            <a:extLst>
+              <a:ext uri="{FF2B5EF4-FFF2-40B4-BE49-F238E27FC236}">
+                <a16:creationId xmlns:a16="http://schemas.microsoft.com/office/drawing/2014/main" id="{33BAC926-7553-069E-BFFA-9AC4FE26396B}"/>
+              </a:ext>
+            </a:extLst>
+          </p:cNvPr>
+          <p:cNvSpPr/>
+          <p:nvPr/>
+        </p:nvSpPr>
+        <p:spPr>
+          <a:xfrm>
+            <a:off x="7780149" y="4130300"/>
+            <a:ext cx="294468" cy="286718"/>
+          </a:xfrm>
+          <a:prstGeom prst="donut">
+            <a:avLst>
+              <a:gd name="adj" fmla="val 4960"/>
+            </a:avLst>
+          </a:prstGeom>
+          <a:solidFill>
+            <a:srgbClr val="FF0000"/>
+          </a:solidFill>
+          <a:ln w="3175"/>
+        </p:spPr>
+        <p:style>
+          <a:lnRef idx="2">
+            <a:schemeClr val="accent1">
+              <a:shade val="15000"/>
+            </a:schemeClr>
+          </a:lnRef>
+          <a:fillRef idx="1">
+            <a:schemeClr val="accent1"/>
+          </a:fillRef>
+          <a:effectRef idx="0">
+            <a:schemeClr val="accent1"/>
+          </a:effectRef>
+          <a:fontRef idx="minor">
+            <a:schemeClr val="lt1"/>
+          </a:fontRef>
+        </p:style>
+        <p:txBody>
+          <a:bodyPr rtlCol="0" anchor="ctr"/>
+          <a:lstStyle/>
+          <a:p>
+            <a:pPr algn="ctr"/>
+            <a:endParaRPr lang="it-CH">
+              <a:solidFill>
+                <a:schemeClr val="tx1"/>
+              </a:solidFill>
+            </a:endParaRPr>
+          </a:p>
+        </p:txBody>
+      </p:sp>
     </p:spTree>
   </p:cSld>
   <p:clrMapOvr>
@@ -6149,7 +5853,7 @@
           <a:bodyPr/>
           <a:lstStyle/>
           <a:p>
-            <a:endParaRPr lang="it-CH"/>
+            <a:endParaRPr lang="it-IT" noProof="1"/>
           </a:p>
         </p:txBody>
       </p:sp>
@@ -6184,7 +5888,7 @@
               <a:buNone/>
             </a:pPr>
             <a:r>
-              <a:rPr lang="en-US" sz="2200" b="1" dirty="0">
+              <a:rPr lang="it-IT" sz="2200" b="1" noProof="1">
                 <a:solidFill>
                   <a:srgbClr val="00B4D8"/>
                 </a:solidFill>
@@ -6192,75 +5896,9 @@
                 <a:ea typeface="Calibri" pitchFamily="34" charset="-122"/>
                 <a:cs typeface="Calibri" pitchFamily="34" charset="-120"/>
               </a:rPr>
-              <a:t>Top 15 </a:t>
-            </a:r>
-            <a:r>
-              <a:rPr lang="en-US" sz="2200" b="1" dirty="0" err="1">
-                <a:solidFill>
-                  <a:srgbClr val="00B4D8"/>
-                </a:solidFill>
-                <a:latin typeface="Calibri" pitchFamily="34" charset="0"/>
-                <a:ea typeface="Calibri" pitchFamily="34" charset="-122"/>
-                <a:cs typeface="Calibri" pitchFamily="34" charset="-120"/>
-              </a:rPr>
-              <a:t>Postazioni</a:t>
-            </a:r>
-            <a:r>
-              <a:rPr lang="en-US" sz="2200" b="1" dirty="0">
-                <a:solidFill>
-                  <a:srgbClr val="00B4D8"/>
-                </a:solidFill>
-                <a:latin typeface="Calibri" pitchFamily="34" charset="0"/>
-                <a:ea typeface="Calibri" pitchFamily="34" charset="-122"/>
-                <a:cs typeface="Calibri" pitchFamily="34" charset="-120"/>
-              </a:rPr>
-              <a:t> per Tasso di </a:t>
-            </a:r>
-            <a:r>
-              <a:rPr lang="en-US" sz="2200" b="1" dirty="0" err="1">
-                <a:solidFill>
-                  <a:srgbClr val="00B4D8"/>
-                </a:solidFill>
-                <a:latin typeface="Calibri" pitchFamily="34" charset="0"/>
-                <a:ea typeface="Calibri" pitchFamily="34" charset="-122"/>
-                <a:cs typeface="Calibri" pitchFamily="34" charset="-120"/>
-              </a:rPr>
-              <a:t>Infrazioni</a:t>
-            </a:r>
-            <a:r>
-              <a:rPr lang="en-US" sz="2200" b="1" dirty="0">
-                <a:solidFill>
-                  <a:srgbClr val="00B4D8"/>
-                </a:solidFill>
-                <a:latin typeface="Calibri" pitchFamily="34" charset="0"/>
-                <a:ea typeface="Calibri" pitchFamily="34" charset="-122"/>
-                <a:cs typeface="Calibri" pitchFamily="34" charset="-120"/>
-              </a:rPr>
-              <a:t> (</a:t>
-            </a:r>
-            <a:r>
-              <a:rPr lang="en-US" sz="2200" b="1" dirty="0" err="1">
-                <a:solidFill>
-                  <a:srgbClr val="00B4D8"/>
-                </a:solidFill>
-                <a:latin typeface="Calibri" pitchFamily="34" charset="0"/>
-                <a:ea typeface="Calibri" pitchFamily="34" charset="-122"/>
-                <a:cs typeface="Calibri" pitchFamily="34" charset="-120"/>
-              </a:rPr>
-              <a:t>aggiornato</a:t>
-            </a:r>
-            <a:r>
-              <a:rPr lang="en-US" sz="2200" b="1" dirty="0">
-                <a:solidFill>
-                  <a:srgbClr val="00B4D8"/>
-                </a:solidFill>
-                <a:latin typeface="Calibri" pitchFamily="34" charset="0"/>
-                <a:ea typeface="Calibri" pitchFamily="34" charset="-122"/>
-                <a:cs typeface="Calibri" pitchFamily="34" charset="-120"/>
-              </a:rPr>
-              <a:t>)</a:t>
-            </a:r>
-            <a:endParaRPr lang="en-US" sz="2200" dirty="0"/>
+              <a:t>Top 15 Postazioni per Tasso di Infrazioni (aggiornato)</a:t>
+            </a:r>
+            <a:endParaRPr lang="it-IT" sz="2200" noProof="1"/>
           </a:p>
         </p:txBody>
       </p:sp>
@@ -6295,146 +5933,16 @@
               <a:buNone/>
             </a:pPr>
             <a:r>
-              <a:rPr lang="en-US" sz="1300" i="1" dirty="0" err="1">
+              <a:rPr lang="it-IT" sz="1300" i="1" noProof="1">
                 <a:solidFill>
                   <a:srgbClr val="B0BEC5"/>
                 </a:solidFill>
                 <a:latin typeface="Calibri" pitchFamily="34" charset="0"/>
                 <a:cs typeface="Calibri" pitchFamily="34" charset="-120"/>
               </a:rPr>
-              <a:t>Postazioni</a:t>
-            </a:r>
-            <a:r>
-              <a:rPr lang="en-US" sz="1300" i="1" dirty="0">
-                <a:solidFill>
-                  <a:srgbClr val="B0BEC5"/>
-                </a:solidFill>
-                <a:latin typeface="Calibri" pitchFamily="34" charset="0"/>
-                <a:cs typeface="Calibri" pitchFamily="34" charset="-120"/>
-              </a:rPr>
-              <a:t> con la </a:t>
-            </a:r>
-            <a:r>
-              <a:rPr lang="en-US" sz="1300" i="1" dirty="0" err="1">
-                <a:solidFill>
-                  <a:srgbClr val="B0BEC5"/>
-                </a:solidFill>
-                <a:latin typeface="Calibri" pitchFamily="34" charset="0"/>
-                <a:cs typeface="Calibri" pitchFamily="34" charset="-120"/>
-              </a:rPr>
-              <a:t>maggior</a:t>
-            </a:r>
-            <a:r>
-              <a:rPr lang="en-US" sz="1300" i="1" dirty="0">
-                <a:solidFill>
-                  <a:srgbClr val="B0BEC5"/>
-                </a:solidFill>
-                <a:latin typeface="Calibri" pitchFamily="34" charset="0"/>
-                <a:cs typeface="Calibri" pitchFamily="34" charset="-120"/>
-              </a:rPr>
-              <a:t> </a:t>
-            </a:r>
-            <a:r>
-              <a:rPr lang="en-US" sz="1300" i="1" dirty="0" err="1">
-                <a:solidFill>
-                  <a:srgbClr val="B0BEC5"/>
-                </a:solidFill>
-                <a:latin typeface="Calibri" pitchFamily="34" charset="0"/>
-                <a:cs typeface="Calibri" pitchFamily="34" charset="-120"/>
-              </a:rPr>
-              <a:t>percentaule</a:t>
-            </a:r>
-            <a:r>
-              <a:rPr lang="en-US" sz="1300" i="1" dirty="0">
-                <a:solidFill>
-                  <a:srgbClr val="B0BEC5"/>
-                </a:solidFill>
-                <a:latin typeface="Calibri" pitchFamily="34" charset="0"/>
-                <a:cs typeface="Calibri" pitchFamily="34" charset="-120"/>
-              </a:rPr>
-              <a:t> di </a:t>
-            </a:r>
-            <a:r>
-              <a:rPr lang="en-US" sz="1300" i="1" dirty="0" err="1">
-                <a:solidFill>
-                  <a:srgbClr val="B0BEC5"/>
-                </a:solidFill>
-                <a:latin typeface="Calibri" pitchFamily="34" charset="0"/>
-                <a:cs typeface="Calibri" pitchFamily="34" charset="-120"/>
-              </a:rPr>
-              <a:t>infrazioni</a:t>
-            </a:r>
-            <a:r>
-              <a:rPr lang="en-US" sz="1300" i="1" dirty="0">
-                <a:solidFill>
-                  <a:srgbClr val="B0BEC5"/>
-                </a:solidFill>
-                <a:latin typeface="Calibri" pitchFamily="34" charset="0"/>
-                <a:cs typeface="Calibri" pitchFamily="34" charset="-120"/>
-              </a:rPr>
-              <a:t> (</a:t>
-            </a:r>
-            <a:r>
-              <a:rPr lang="en-US" sz="1300" i="1" dirty="0" err="1">
-                <a:solidFill>
-                  <a:srgbClr val="B0BEC5"/>
-                </a:solidFill>
-                <a:latin typeface="Calibri" pitchFamily="34" charset="0"/>
-                <a:cs typeface="Calibri" pitchFamily="34" charset="-120"/>
-              </a:rPr>
-              <a:t>percentuale</a:t>
-            </a:r>
-            <a:r>
-              <a:rPr lang="en-US" sz="1300" i="1" dirty="0">
-                <a:solidFill>
-                  <a:srgbClr val="B0BEC5"/>
-                </a:solidFill>
-                <a:latin typeface="Calibri" pitchFamily="34" charset="0"/>
-                <a:cs typeface="Calibri" pitchFamily="34" charset="-120"/>
-              </a:rPr>
-              <a:t> </a:t>
-            </a:r>
-            <a:r>
-              <a:rPr lang="en-US" sz="1300" i="1" dirty="0" err="1">
-                <a:solidFill>
-                  <a:srgbClr val="B0BEC5"/>
-                </a:solidFill>
-                <a:latin typeface="Calibri" pitchFamily="34" charset="0"/>
-                <a:cs typeface="Calibri" pitchFamily="34" charset="-120"/>
-              </a:rPr>
-              <a:t>calcolata</a:t>
-            </a:r>
-            <a:r>
-              <a:rPr lang="en-US" sz="1300" i="1" dirty="0">
-                <a:solidFill>
-                  <a:srgbClr val="B0BEC5"/>
-                </a:solidFill>
-                <a:latin typeface="Calibri" pitchFamily="34" charset="0"/>
-                <a:cs typeface="Calibri" pitchFamily="34" charset="-120"/>
-              </a:rPr>
-              <a:t> </a:t>
-            </a:r>
-            <a:r>
-              <a:rPr lang="en-US" sz="1300" i="1" dirty="0" err="1">
-                <a:solidFill>
-                  <a:srgbClr val="B0BEC5"/>
-                </a:solidFill>
-                <a:latin typeface="Calibri" pitchFamily="34" charset="0"/>
-                <a:cs typeface="Calibri" pitchFamily="34" charset="-120"/>
-              </a:rPr>
-              <a:t>manualmente</a:t>
-            </a:r>
-            <a:r>
-              <a:rPr lang="en-US" sz="1300" i="1" dirty="0">
-                <a:solidFill>
-                  <a:srgbClr val="B0BEC5"/>
-                </a:solidFill>
-                <a:latin typeface="Calibri" pitchFamily="34" charset="0"/>
-                <a:cs typeface="Calibri" pitchFamily="34" charset="-120"/>
-              </a:rPr>
-              <a:t>).</a:t>
-            </a:r>
-            <a:endParaRPr lang="en-US" sz="1300" dirty="0"/>
+              <a:t>Postazioni con la maggior percentaule di infrazioni (percentuale calcolata manualmente).</a:t>
+            </a:r>
+            <a:endParaRPr lang="it-IT" sz="1300" noProof="1"/>
           </a:p>
         </p:txBody>
       </p:sp>
@@ -6472,7 +5980,7 @@
           <a:bodyPr/>
           <a:lstStyle/>
           <a:p>
-            <a:endParaRPr lang="it-CH"/>
+            <a:endParaRPr lang="it-IT" noProof="1"/>
           </a:p>
         </p:txBody>
       </p:sp>
@@ -6507,7 +6015,7 @@
               <a:buNone/>
             </a:pPr>
             <a:r>
-              <a:rPr lang="en-US" sz="1400" dirty="0">
+              <a:rPr lang="it-IT" sz="1400" noProof="1">
                 <a:solidFill>
                   <a:srgbClr val="2A4580"/>
                 </a:solidFill>
@@ -6517,7 +6025,7 @@
               </a:rPr>
               <a:t>[ grafico ]</a:t>
             </a:r>
-            <a:endParaRPr lang="en-US" sz="1400" dirty="0"/>
+            <a:endParaRPr lang="it-IT" sz="1400" noProof="1"/>
           </a:p>
         </p:txBody>
       </p:sp>
@@ -6551,6 +6059,120 @@
           </a:prstGeom>
         </p:spPr>
       </p:pic>
+      <p:sp>
+        <p:nvSpPr>
+          <p:cNvPr id="17" name="Grafico ad anello 16">
+            <a:extLst>
+              <a:ext uri="{FF2B5EF4-FFF2-40B4-BE49-F238E27FC236}">
+                <a16:creationId xmlns:a16="http://schemas.microsoft.com/office/drawing/2014/main" id="{65E660BF-947E-5E1F-8EA0-5BDB2FC41A05}"/>
+              </a:ext>
+            </a:extLst>
+          </p:cNvPr>
+          <p:cNvSpPr/>
+          <p:nvPr/>
+        </p:nvSpPr>
+        <p:spPr>
+          <a:xfrm>
+            <a:off x="7470182" y="4107052"/>
+            <a:ext cx="294468" cy="286718"/>
+          </a:xfrm>
+          <a:prstGeom prst="donut">
+            <a:avLst>
+              <a:gd name="adj" fmla="val 4960"/>
+            </a:avLst>
+          </a:prstGeom>
+          <a:solidFill>
+            <a:srgbClr val="FF0000"/>
+          </a:solidFill>
+          <a:ln w="3175"/>
+        </p:spPr>
+        <p:style>
+          <a:lnRef idx="2">
+            <a:schemeClr val="accent1">
+              <a:shade val="15000"/>
+            </a:schemeClr>
+          </a:lnRef>
+          <a:fillRef idx="1">
+            <a:schemeClr val="accent1"/>
+          </a:fillRef>
+          <a:effectRef idx="0">
+            <a:schemeClr val="accent1"/>
+          </a:effectRef>
+          <a:fontRef idx="minor">
+            <a:schemeClr val="lt1"/>
+          </a:fontRef>
+        </p:style>
+        <p:txBody>
+          <a:bodyPr rtlCol="0" anchor="ctr"/>
+          <a:lstStyle/>
+          <a:p>
+            <a:pPr algn="ctr"/>
+            <a:endParaRPr lang="it-CH">
+              <a:solidFill>
+                <a:schemeClr val="tx1"/>
+              </a:solidFill>
+            </a:endParaRPr>
+          </a:p>
+        </p:txBody>
+      </p:sp>
+      <p:sp>
+        <p:nvSpPr>
+          <p:cNvPr id="18" name="Grafico ad anello 17">
+            <a:extLst>
+              <a:ext uri="{FF2B5EF4-FFF2-40B4-BE49-F238E27FC236}">
+                <a16:creationId xmlns:a16="http://schemas.microsoft.com/office/drawing/2014/main" id="{BF7E5772-5F3D-56C2-91D2-008E74463E88}"/>
+              </a:ext>
+            </a:extLst>
+          </p:cNvPr>
+          <p:cNvSpPr/>
+          <p:nvPr/>
+        </p:nvSpPr>
+        <p:spPr>
+          <a:xfrm>
+            <a:off x="5982345" y="4107052"/>
+            <a:ext cx="294468" cy="286718"/>
+          </a:xfrm>
+          <a:prstGeom prst="donut">
+            <a:avLst>
+              <a:gd name="adj" fmla="val 4960"/>
+            </a:avLst>
+          </a:prstGeom>
+          <a:solidFill>
+            <a:schemeClr val="accent2">
+              <a:lumMod val="75000"/>
+            </a:schemeClr>
+          </a:solidFill>
+          <a:ln w="3175"/>
+        </p:spPr>
+        <p:style>
+          <a:lnRef idx="2">
+            <a:schemeClr val="accent1">
+              <a:shade val="15000"/>
+            </a:schemeClr>
+          </a:lnRef>
+          <a:fillRef idx="1">
+            <a:schemeClr val="accent1"/>
+          </a:fillRef>
+          <a:effectRef idx="0">
+            <a:schemeClr val="accent1"/>
+          </a:effectRef>
+          <a:fontRef idx="minor">
+            <a:schemeClr val="lt1"/>
+          </a:fontRef>
+        </p:style>
+        <p:txBody>
+          <a:bodyPr rtlCol="0" anchor="ctr"/>
+          <a:lstStyle/>
+          <a:p>
+            <a:pPr algn="ctr"/>
+            <a:endParaRPr lang="it-CH">
+              <a:solidFill>
+                <a:schemeClr val="tx1"/>
+              </a:solidFill>
+            </a:endParaRPr>
+          </a:p>
+        </p:txBody>
+      </p:sp>
     </p:spTree>
     <p:extLst>
       <p:ext uri="{BB962C8B-B14F-4D97-AF65-F5344CB8AC3E}">
@@ -6629,7 +6251,7 @@
           <a:bodyPr/>
           <a:lstStyle/>
           <a:p>
-            <a:endParaRPr lang="it-CH"/>
+            <a:endParaRPr lang="it-IT" noProof="1"/>
           </a:p>
         </p:txBody>
       </p:sp>
@@ -6664,7 +6286,7 @@
               <a:buNone/>
             </a:pPr>
             <a:r>
-              <a:rPr lang="en-US" sz="2200" b="1" dirty="0">
+              <a:rPr lang="it-IT" sz="2200" b="1" noProof="1">
                 <a:solidFill>
                   <a:srgbClr val="00B4D8"/>
                 </a:solidFill>
@@ -6672,64 +6294,9 @@
                 <a:ea typeface="Calibri" pitchFamily="34" charset="-122"/>
                 <a:cs typeface="Calibri" pitchFamily="34" charset="-120"/>
               </a:rPr>
-              <a:t>Distribuzione </a:t>
-            </a:r>
-            <a:r>
-              <a:rPr lang="en-US" sz="2200" b="1" dirty="0" err="1">
-                <a:solidFill>
-                  <a:srgbClr val="00B4D8"/>
-                </a:solidFill>
-                <a:latin typeface="Calibri" pitchFamily="34" charset="0"/>
-                <a:ea typeface="Calibri" pitchFamily="34" charset="-122"/>
-                <a:cs typeface="Calibri" pitchFamily="34" charset="-120"/>
-              </a:rPr>
-              <a:t>velocità</a:t>
-            </a:r>
-            <a:r>
-              <a:rPr lang="en-US" sz="2200" b="1" dirty="0">
-                <a:solidFill>
-                  <a:srgbClr val="00B4D8"/>
-                </a:solidFill>
-                <a:latin typeface="Calibri" pitchFamily="34" charset="0"/>
-                <a:ea typeface="Calibri" pitchFamily="34" charset="-122"/>
-                <a:cs typeface="Calibri" pitchFamily="34" charset="-120"/>
-              </a:rPr>
-              <a:t> – </a:t>
-            </a:r>
-            <a:r>
-              <a:rPr lang="en-US" sz="2200" b="1" dirty="0" err="1">
-                <a:solidFill>
-                  <a:srgbClr val="00B4D8"/>
-                </a:solidFill>
-                <a:latin typeface="Calibri" pitchFamily="34" charset="0"/>
-                <a:ea typeface="Calibri" pitchFamily="34" charset="-122"/>
-                <a:cs typeface="Calibri" pitchFamily="34" charset="-120"/>
-              </a:rPr>
-              <a:t>postazione</a:t>
-            </a:r>
-            <a:r>
-              <a:rPr lang="en-US" sz="2200" b="1" dirty="0">
-                <a:solidFill>
-                  <a:srgbClr val="00B4D8"/>
-                </a:solidFill>
-                <a:latin typeface="Calibri" pitchFamily="34" charset="0"/>
-                <a:ea typeface="Calibri" pitchFamily="34" charset="-122"/>
-                <a:cs typeface="Calibri" pitchFamily="34" charset="-120"/>
-              </a:rPr>
-              <a:t> </a:t>
-            </a:r>
-            <a:r>
-              <a:rPr lang="en-US" sz="2200" b="1" dirty="0" err="1">
-                <a:solidFill>
-                  <a:srgbClr val="00B4D8"/>
-                </a:solidFill>
-                <a:latin typeface="Calibri" pitchFamily="34" charset="0"/>
-                <a:ea typeface="Calibri" pitchFamily="34" charset="-122"/>
-                <a:cs typeface="Calibri" pitchFamily="34" charset="-120"/>
-              </a:rPr>
-              <a:t>peggiore</a:t>
-            </a:r>
-            <a:endParaRPr lang="en-US" sz="2200" dirty="0"/>
+              <a:t>Distribuzione velocità – postazione peggiore</a:t>
+            </a:r>
+            <a:endParaRPr lang="it-IT" sz="2200" noProof="1"/>
           </a:p>
         </p:txBody>
       </p:sp>
@@ -6761,106 +6328,16 @@
           <a:lstStyle/>
           <a:p>
             <a:r>
-              <a:rPr lang="en-US" sz="1300" i="1" dirty="0">
+              <a:rPr lang="it-IT" sz="1300" i="1" noProof="1">
                 <a:solidFill>
                   <a:srgbClr val="B0BEC5"/>
                 </a:solidFill>
                 <a:latin typeface="Calibri" pitchFamily="34" charset="0"/>
                 <a:cs typeface="Calibri" pitchFamily="34" charset="-120"/>
               </a:rPr>
-              <a:t>Distribuzione </a:t>
-            </a:r>
-            <a:r>
-              <a:rPr lang="en-US" sz="1300" i="1" dirty="0" err="1">
-                <a:solidFill>
-                  <a:srgbClr val="B0BEC5"/>
-                </a:solidFill>
-                <a:latin typeface="Calibri" pitchFamily="34" charset="0"/>
-                <a:cs typeface="Calibri" pitchFamily="34" charset="-120"/>
-              </a:rPr>
-              <a:t>velocità</a:t>
-            </a:r>
-            <a:r>
-              <a:rPr lang="en-US" sz="1300" i="1" dirty="0">
-                <a:solidFill>
-                  <a:srgbClr val="B0BEC5"/>
-                </a:solidFill>
-                <a:latin typeface="Calibri" pitchFamily="34" charset="0"/>
-                <a:cs typeface="Calibri" pitchFamily="34" charset="-120"/>
-              </a:rPr>
-              <a:t> della </a:t>
-            </a:r>
-            <a:r>
-              <a:rPr lang="en-US" sz="1300" i="1" dirty="0" err="1">
-                <a:solidFill>
-                  <a:srgbClr val="B0BEC5"/>
-                </a:solidFill>
-                <a:latin typeface="Calibri" pitchFamily="34" charset="0"/>
-                <a:cs typeface="Calibri" pitchFamily="34" charset="-120"/>
-              </a:rPr>
-              <a:t>postazione</a:t>
-            </a:r>
-            <a:r>
-              <a:rPr lang="en-US" sz="1300" i="1" dirty="0">
-                <a:solidFill>
-                  <a:srgbClr val="B0BEC5"/>
-                </a:solidFill>
-                <a:latin typeface="Calibri" pitchFamily="34" charset="0"/>
-                <a:cs typeface="Calibri" pitchFamily="34" charset="-120"/>
-              </a:rPr>
-              <a:t>  con la </a:t>
-            </a:r>
-            <a:r>
-              <a:rPr lang="en-US" sz="1300" i="1" dirty="0" err="1">
-                <a:solidFill>
-                  <a:srgbClr val="B0BEC5"/>
-                </a:solidFill>
-                <a:latin typeface="Calibri" pitchFamily="34" charset="0"/>
-                <a:cs typeface="Calibri" pitchFamily="34" charset="-120"/>
-              </a:rPr>
-              <a:t>maggior</a:t>
-            </a:r>
-            <a:r>
-              <a:rPr lang="en-US" sz="1300" i="1" dirty="0">
-                <a:solidFill>
-                  <a:srgbClr val="B0BEC5"/>
-                </a:solidFill>
-                <a:latin typeface="Calibri" pitchFamily="34" charset="0"/>
-                <a:cs typeface="Calibri" pitchFamily="34" charset="-120"/>
-              </a:rPr>
-              <a:t> </a:t>
-            </a:r>
-            <a:r>
-              <a:rPr lang="en-US" sz="1300" i="1" dirty="0" err="1">
-                <a:solidFill>
-                  <a:srgbClr val="B0BEC5"/>
-                </a:solidFill>
-                <a:latin typeface="Calibri" pitchFamily="34" charset="0"/>
-                <a:cs typeface="Calibri" pitchFamily="34" charset="-120"/>
-              </a:rPr>
-              <a:t>percentaule</a:t>
-            </a:r>
-            <a:r>
-              <a:rPr lang="en-US" sz="1300" i="1" dirty="0">
-                <a:solidFill>
-                  <a:srgbClr val="B0BEC5"/>
-                </a:solidFill>
-                <a:latin typeface="Calibri" pitchFamily="34" charset="0"/>
-                <a:cs typeface="Calibri" pitchFamily="34" charset="-120"/>
-              </a:rPr>
-              <a:t> di </a:t>
-            </a:r>
-            <a:r>
-              <a:rPr lang="en-US" sz="1300" i="1" dirty="0" err="1">
-                <a:solidFill>
-                  <a:srgbClr val="B0BEC5"/>
-                </a:solidFill>
-                <a:latin typeface="Calibri" pitchFamily="34" charset="0"/>
-                <a:cs typeface="Calibri" pitchFamily="34" charset="-120"/>
-              </a:rPr>
-              <a:t>infrazioni</a:t>
-            </a:r>
-            <a:endParaRPr lang="en-US" sz="1300" dirty="0"/>
+              <a:t>Distribuzione velocità della postazione  con la maggior percentaule di infrazioni</a:t>
+            </a:r>
+            <a:endParaRPr lang="it-IT" sz="1300" noProof="1"/>
           </a:p>
         </p:txBody>
       </p:sp>
@@ -6898,7 +6375,7 @@
           <a:bodyPr/>
           <a:lstStyle/>
           <a:p>
-            <a:endParaRPr lang="it-CH"/>
+            <a:endParaRPr lang="it-IT" noProof="1"/>
           </a:p>
         </p:txBody>
       </p:sp>
@@ -6933,7 +6410,7 @@
               <a:buNone/>
             </a:pPr>
             <a:r>
-              <a:rPr lang="en-US" sz="1400" dirty="0">
+              <a:rPr lang="it-IT" sz="1400" noProof="1">
                 <a:solidFill>
                   <a:srgbClr val="2A4580"/>
                 </a:solidFill>
@@ -6943,7 +6420,7 @@
               </a:rPr>
               <a:t>[ grafico ]</a:t>
             </a:r>
-            <a:endParaRPr lang="en-US" sz="1400" dirty="0"/>
+            <a:endParaRPr lang="it-IT" sz="1400" noProof="1"/>
           </a:p>
         </p:txBody>
       </p:sp>
@@ -7043,7 +6520,7 @@
           <a:bodyPr/>
           <a:lstStyle/>
           <a:p>
-            <a:endParaRPr lang="it-CH"/>
+            <a:endParaRPr lang="it-IT" noProof="1"/>
           </a:p>
         </p:txBody>
       </p:sp>
@@ -7072,7 +6549,7 @@
               <a:buNone/>
             </a:pPr>
             <a:r>
-              <a:rPr lang="en-US" sz="2200" b="1" dirty="0" err="1">
+              <a:rPr lang="it-IT" sz="2200" b="1" noProof="1">
                 <a:solidFill>
                   <a:srgbClr val="00B4D8"/>
                 </a:solidFill>
@@ -7080,136 +6557,48 @@
                 <a:ea typeface="Calibri" pitchFamily="34" charset="-122"/>
                 <a:cs typeface="Calibri" pitchFamily="34" charset="-120"/>
               </a:rPr>
-              <a:t>Misurazione</a:t>
-            </a:r>
-            <a:r>
-              <a:rPr lang="en-US" sz="2200" b="1" dirty="0">
-                <a:solidFill>
-                  <a:srgbClr val="00B4D8"/>
+              <a:t>Misurazione veicoli / giorno</a:t>
+            </a:r>
+            <a:endParaRPr lang="it-IT" sz="2200" noProof="1"/>
+          </a:p>
+        </p:txBody>
+      </p:sp>
+      <p:sp>
+        <p:nvSpPr>
+          <p:cNvPr id="4" name="Text 2"/>
+          <p:cNvSpPr/>
+          <p:nvPr/>
+        </p:nvSpPr>
+        <p:spPr>
+          <a:xfrm>
+            <a:off x="365760" y="804672"/>
+            <a:ext cx="8412480" cy="320040"/>
+          </a:xfrm>
+          <a:prstGeom prst="rect">
+            <a:avLst/>
+          </a:prstGeom>
+          <a:noFill/>
+          <a:ln/>
+        </p:spPr>
+        <p:txBody>
+          <a:bodyPr wrap="square" lIns="0" tIns="0" rIns="0" bIns="0" rtlCol="0" anchor="ctr"/>
+          <a:lstStyle/>
+          <a:p>
+            <a:pPr marL="0" indent="0">
+              <a:buNone/>
+            </a:pPr>
+            <a:r>
+              <a:rPr lang="it-IT" sz="1300" i="1" noProof="1">
+                <a:solidFill>
+                  <a:srgbClr val="B0BEC5"/>
                 </a:solidFill>
                 <a:latin typeface="Calibri" pitchFamily="34" charset="0"/>
                 <a:ea typeface="Calibri" pitchFamily="34" charset="-122"/>
                 <a:cs typeface="Calibri" pitchFamily="34" charset="-120"/>
               </a:rPr>
-              <a:t> </a:t>
-            </a:r>
-            <a:r>
-              <a:rPr lang="en-US" sz="2200" b="1" dirty="0" err="1">
-                <a:solidFill>
-                  <a:srgbClr val="00B4D8"/>
-                </a:solidFill>
-                <a:latin typeface="Calibri" pitchFamily="34" charset="0"/>
-                <a:ea typeface="Calibri" pitchFamily="34" charset="-122"/>
-                <a:cs typeface="Calibri" pitchFamily="34" charset="-120"/>
-              </a:rPr>
-              <a:t>veicoli</a:t>
-            </a:r>
-            <a:r>
-              <a:rPr lang="en-US" sz="2200" b="1" dirty="0">
-                <a:solidFill>
-                  <a:srgbClr val="00B4D8"/>
-                </a:solidFill>
-                <a:latin typeface="Calibri" pitchFamily="34" charset="0"/>
-                <a:ea typeface="Calibri" pitchFamily="34" charset="-122"/>
-                <a:cs typeface="Calibri" pitchFamily="34" charset="-120"/>
-              </a:rPr>
-              <a:t> / </a:t>
-            </a:r>
-            <a:r>
-              <a:rPr lang="en-US" sz="2200" b="1" dirty="0" err="1">
-                <a:solidFill>
-                  <a:srgbClr val="00B4D8"/>
-                </a:solidFill>
-                <a:latin typeface="Calibri" pitchFamily="34" charset="0"/>
-                <a:ea typeface="Calibri" pitchFamily="34" charset="-122"/>
-                <a:cs typeface="Calibri" pitchFamily="34" charset="-120"/>
-              </a:rPr>
-              <a:t>giorno</a:t>
-            </a:r>
-            <a:endParaRPr lang="en-US" sz="2200" dirty="0"/>
-          </a:p>
-        </p:txBody>
-      </p:sp>
-      <p:sp>
-        <p:nvSpPr>
-          <p:cNvPr id="4" name="Text 2"/>
-          <p:cNvSpPr/>
-          <p:nvPr/>
-        </p:nvSpPr>
-        <p:spPr>
-          <a:xfrm>
-            <a:off x="365760" y="804672"/>
-            <a:ext cx="8412480" cy="320040"/>
-          </a:xfrm>
-          <a:prstGeom prst="rect">
-            <a:avLst/>
-          </a:prstGeom>
-          <a:noFill/>
-          <a:ln/>
-        </p:spPr>
-        <p:txBody>
-          <a:bodyPr wrap="square" lIns="0" tIns="0" rIns="0" bIns="0" rtlCol="0" anchor="ctr"/>
-          <a:lstStyle/>
-          <a:p>
-            <a:pPr marL="0" indent="0">
-              <a:buNone/>
-            </a:pPr>
-            <a:r>
-              <a:rPr lang="en-US" sz="1300" i="1" dirty="0">
-                <a:solidFill>
-                  <a:srgbClr val="B0BEC5"/>
-                </a:solidFill>
-                <a:latin typeface="Calibri" pitchFamily="34" charset="0"/>
-                <a:ea typeface="Calibri" pitchFamily="34" charset="-122"/>
-                <a:cs typeface="Calibri" pitchFamily="34" charset="-120"/>
-              </a:rPr>
-              <a:t>Heatmap – media </a:t>
-            </a:r>
-            <a:r>
-              <a:rPr lang="en-US" sz="1300" i="1" dirty="0" err="1">
-                <a:solidFill>
-                  <a:srgbClr val="B0BEC5"/>
-                </a:solidFill>
-                <a:latin typeface="Calibri" pitchFamily="34" charset="0"/>
-                <a:ea typeface="Calibri" pitchFamily="34" charset="-122"/>
-                <a:cs typeface="Calibri" pitchFamily="34" charset="-120"/>
-              </a:rPr>
-              <a:t>misurazioni</a:t>
-            </a:r>
-            <a:r>
-              <a:rPr lang="en-US" sz="1300" i="1" dirty="0">
-                <a:solidFill>
-                  <a:srgbClr val="B0BEC5"/>
-                </a:solidFill>
-                <a:latin typeface="Calibri" pitchFamily="34" charset="0"/>
-                <a:ea typeface="Calibri" pitchFamily="34" charset="-122"/>
-                <a:cs typeface="Calibri" pitchFamily="34" charset="-120"/>
-              </a:rPr>
-              <a:t> per </a:t>
-            </a:r>
-            <a:r>
-              <a:rPr lang="en-US" sz="1300" i="1" dirty="0" err="1">
-                <a:solidFill>
-                  <a:srgbClr val="B0BEC5"/>
-                </a:solidFill>
-                <a:latin typeface="Calibri" pitchFamily="34" charset="0"/>
-                <a:ea typeface="Calibri" pitchFamily="34" charset="-122"/>
-                <a:cs typeface="Calibri" pitchFamily="34" charset="-120"/>
-              </a:rPr>
-              <a:t>giorno</a:t>
-            </a:r>
-            <a:r>
-              <a:rPr lang="en-US" sz="1300" i="1" dirty="0">
-                <a:solidFill>
-                  <a:srgbClr val="B0BEC5"/>
-                </a:solidFill>
-                <a:latin typeface="Calibri" pitchFamily="34" charset="0"/>
-                <a:ea typeface="Calibri" pitchFamily="34" charset="-122"/>
-                <a:cs typeface="Calibri" pitchFamily="34" charset="-120"/>
-              </a:rPr>
-              <a:t> × ora</a:t>
-            </a:r>
-            <a:endParaRPr lang="en-US" sz="1300" dirty="0"/>
+              <a:t>Heatmap – media misurazioni per giorno × ora</a:t>
+            </a:r>
+            <a:endParaRPr lang="it-IT" sz="1300" noProof="1"/>
           </a:p>
         </p:txBody>
       </p:sp>
@@ -7241,7 +6630,7 @@
           <a:bodyPr/>
           <a:lstStyle/>
           <a:p>
-            <a:endParaRPr lang="it-CH"/>
+            <a:endParaRPr lang="it-IT" noProof="1"/>
           </a:p>
         </p:txBody>
       </p:sp>
@@ -7270,7 +6659,7 @@
               <a:buNone/>
             </a:pPr>
             <a:r>
-              <a:rPr lang="en-US" sz="1400" dirty="0">
+              <a:rPr lang="it-IT" sz="1400" noProof="1">
                 <a:solidFill>
                   <a:srgbClr val="2A4580"/>
                 </a:solidFill>
@@ -7280,7 +6669,7 @@
               </a:rPr>
               <a:t>[ grafico ]</a:t>
             </a:r>
-            <a:endParaRPr lang="en-US" sz="1400" dirty="0"/>
+            <a:endParaRPr lang="it-IT" sz="1400" noProof="1"/>
           </a:p>
         </p:txBody>
       </p:sp>
@@ -7387,7 +6776,7 @@
           <a:bodyPr/>
           <a:lstStyle/>
           <a:p>
-            <a:endParaRPr lang="it-CH"/>
+            <a:endParaRPr lang="it-IT" noProof="1"/>
           </a:p>
         </p:txBody>
       </p:sp>
@@ -7422,7 +6811,7 @@
               <a:buNone/>
             </a:pPr>
             <a:r>
-              <a:rPr lang="en-US" sz="2200" b="1" dirty="0">
+              <a:rPr lang="it-IT" sz="2200" b="1" noProof="1">
                 <a:solidFill>
                   <a:srgbClr val="00B4D8"/>
                 </a:solidFill>
@@ -7430,42 +6819,9 @@
                 <a:ea typeface="Calibri" pitchFamily="34" charset="-122"/>
                 <a:cs typeface="Calibri" pitchFamily="34" charset="-120"/>
               </a:rPr>
-              <a:t>Mappa di Calore – Tasso </a:t>
-            </a:r>
-            <a:r>
-              <a:rPr lang="en-US" sz="2200" b="1" dirty="0" err="1">
-                <a:solidFill>
-                  <a:srgbClr val="00B4D8"/>
-                </a:solidFill>
-                <a:latin typeface="Calibri" pitchFamily="34" charset="0"/>
-                <a:ea typeface="Calibri" pitchFamily="34" charset="-122"/>
-                <a:cs typeface="Calibri" pitchFamily="34" charset="-120"/>
-              </a:rPr>
-              <a:t>infrazioni</a:t>
-            </a:r>
-            <a:r>
-              <a:rPr lang="en-US" sz="2200" b="1" dirty="0">
-                <a:solidFill>
-                  <a:srgbClr val="00B4D8"/>
-                </a:solidFill>
-                <a:latin typeface="Calibri" pitchFamily="34" charset="0"/>
-                <a:ea typeface="Calibri" pitchFamily="34" charset="-122"/>
-                <a:cs typeface="Calibri" pitchFamily="34" charset="-120"/>
-              </a:rPr>
-              <a:t> medio per </a:t>
-            </a:r>
-            <a:r>
-              <a:rPr lang="en-US" sz="2200" b="1" dirty="0" err="1">
-                <a:solidFill>
-                  <a:srgbClr val="00B4D8"/>
-                </a:solidFill>
-                <a:latin typeface="Calibri" pitchFamily="34" charset="0"/>
-                <a:ea typeface="Calibri" pitchFamily="34" charset="-122"/>
-                <a:cs typeface="Calibri" pitchFamily="34" charset="-120"/>
-              </a:rPr>
-              <a:t>orario</a:t>
-            </a:r>
-            <a:endParaRPr lang="en-US" sz="2200" dirty="0"/>
+              <a:t>Mappa di Calore – Tasso infrazioni medio per orario</a:t>
+            </a:r>
+            <a:endParaRPr lang="it-IT" sz="2200" noProof="1"/>
           </a:p>
         </p:txBody>
       </p:sp>
@@ -7500,7 +6856,7 @@
               <a:buNone/>
             </a:pPr>
             <a:r>
-              <a:rPr lang="en-US" sz="1300" i="1" dirty="0">
+              <a:rPr lang="it-IT" sz="1300" i="1" noProof="1">
                 <a:solidFill>
                   <a:srgbClr val="B0BEC5"/>
                 </a:solidFill>
@@ -7508,75 +6864,9 @@
                 <a:ea typeface="Calibri" pitchFamily="34" charset="-122"/>
                 <a:cs typeface="Calibri" pitchFamily="34" charset="-120"/>
               </a:rPr>
-              <a:t>Heatmap – </a:t>
-            </a:r>
-            <a:r>
-              <a:rPr lang="en-US" sz="1300" i="1" dirty="0" err="1">
-                <a:solidFill>
-                  <a:srgbClr val="B0BEC5"/>
-                </a:solidFill>
-                <a:latin typeface="Calibri" pitchFamily="34" charset="0"/>
-                <a:ea typeface="Calibri" pitchFamily="34" charset="-122"/>
-                <a:cs typeface="Calibri" pitchFamily="34" charset="-120"/>
-              </a:rPr>
-              <a:t>tasso</a:t>
-            </a:r>
-            <a:r>
-              <a:rPr lang="en-US" sz="1300" i="1" dirty="0">
-                <a:solidFill>
-                  <a:srgbClr val="B0BEC5"/>
-                </a:solidFill>
-                <a:latin typeface="Calibri" pitchFamily="34" charset="0"/>
-                <a:ea typeface="Calibri" pitchFamily="34" charset="-122"/>
-                <a:cs typeface="Calibri" pitchFamily="34" charset="-120"/>
-              </a:rPr>
-              <a:t> </a:t>
-            </a:r>
-            <a:r>
-              <a:rPr lang="en-US" sz="1300" i="1" dirty="0" err="1">
-                <a:solidFill>
-                  <a:srgbClr val="B0BEC5"/>
-                </a:solidFill>
-                <a:latin typeface="Calibri" pitchFamily="34" charset="0"/>
-                <a:ea typeface="Calibri" pitchFamily="34" charset="-122"/>
-                <a:cs typeface="Calibri" pitchFamily="34" charset="-120"/>
-              </a:rPr>
-              <a:t>infrazioni</a:t>
-            </a:r>
-            <a:r>
-              <a:rPr lang="en-US" sz="1300" i="1" dirty="0">
-                <a:solidFill>
-                  <a:srgbClr val="B0BEC5"/>
-                </a:solidFill>
-                <a:latin typeface="Calibri" pitchFamily="34" charset="0"/>
-                <a:ea typeface="Calibri" pitchFamily="34" charset="-122"/>
-                <a:cs typeface="Calibri" pitchFamily="34" charset="-120"/>
-              </a:rPr>
-              <a:t> per </a:t>
-            </a:r>
-            <a:r>
-              <a:rPr lang="en-US" sz="1300" i="1" dirty="0" err="1">
-                <a:solidFill>
-                  <a:srgbClr val="B0BEC5"/>
-                </a:solidFill>
-                <a:latin typeface="Calibri" pitchFamily="34" charset="0"/>
-                <a:ea typeface="Calibri" pitchFamily="34" charset="-122"/>
-                <a:cs typeface="Calibri" pitchFamily="34" charset="-120"/>
-              </a:rPr>
-              <a:t>giorno</a:t>
-            </a:r>
-            <a:r>
-              <a:rPr lang="en-US" sz="1300" i="1" dirty="0">
-                <a:solidFill>
-                  <a:srgbClr val="B0BEC5"/>
-                </a:solidFill>
-                <a:latin typeface="Calibri" pitchFamily="34" charset="0"/>
-                <a:ea typeface="Calibri" pitchFamily="34" charset="-122"/>
-                <a:cs typeface="Calibri" pitchFamily="34" charset="-120"/>
-              </a:rPr>
-              <a:t> × ora</a:t>
-            </a:r>
-            <a:endParaRPr lang="en-US" sz="1300" dirty="0"/>
+              <a:t>Heatmap – tasso infrazioni per giorno × ora</a:t>
+            </a:r>
+            <a:endParaRPr lang="it-IT" sz="1300" noProof="1"/>
           </a:p>
         </p:txBody>
       </p:sp>
@@ -7614,7 +6904,7 @@
           <a:bodyPr/>
           <a:lstStyle/>
           <a:p>
-            <a:endParaRPr lang="it-CH"/>
+            <a:endParaRPr lang="it-IT" noProof="1"/>
           </a:p>
         </p:txBody>
       </p:sp>
@@ -7649,7 +6939,7 @@
               <a:buNone/>
             </a:pPr>
             <a:r>
-              <a:rPr lang="en-US" sz="1400" dirty="0">
+              <a:rPr lang="it-IT" sz="1400" noProof="1">
                 <a:solidFill>
                   <a:srgbClr val="2A4580"/>
                 </a:solidFill>
@@ -7659,7 +6949,7 @@
               </a:rPr>
               <a:t>[ grafico ]</a:t>
             </a:r>
-            <a:endParaRPr lang="en-US" sz="1400" dirty="0"/>
+            <a:endParaRPr lang="it-IT" sz="1400" noProof="1"/>
           </a:p>
         </p:txBody>
       </p:sp>
@@ -7771,7 +7061,7 @@
           <a:bodyPr/>
           <a:lstStyle/>
           <a:p>
-            <a:endParaRPr lang="it-CH"/>
+            <a:endParaRPr lang="it-IT" noProof="1"/>
           </a:p>
         </p:txBody>
       </p:sp>
@@ -7806,7 +7096,7 @@
               <a:buNone/>
             </a:pPr>
             <a:r>
-              <a:rPr lang="en-US" sz="2200" b="1" dirty="0" err="1">
+              <a:rPr lang="it-IT" sz="2200" b="1" noProof="1">
                 <a:solidFill>
                   <a:srgbClr val="00B4D8"/>
                 </a:solidFill>
@@ -7814,53 +7104,9 @@
                 <a:ea typeface="Calibri" pitchFamily="34" charset="-122"/>
                 <a:cs typeface="Calibri" pitchFamily="34" charset="-120"/>
               </a:rPr>
-              <a:t>Infrazioni</a:t>
-            </a:r>
-            <a:r>
-              <a:rPr lang="en-US" sz="2200" b="1" dirty="0">
-                <a:solidFill>
-                  <a:srgbClr val="00B4D8"/>
-                </a:solidFill>
-                <a:latin typeface="Calibri" pitchFamily="34" charset="0"/>
-                <a:ea typeface="Calibri" pitchFamily="34" charset="-122"/>
-                <a:cs typeface="Calibri" pitchFamily="34" charset="-120"/>
-              </a:rPr>
-              <a:t>/Anno con </a:t>
-            </a:r>
-            <a:r>
-              <a:rPr lang="en-US" sz="2200" b="1" dirty="0" err="1">
-                <a:solidFill>
-                  <a:srgbClr val="00B4D8"/>
-                </a:solidFill>
-                <a:latin typeface="Calibri" pitchFamily="34" charset="0"/>
-                <a:ea typeface="Calibri" pitchFamily="34" charset="-122"/>
-                <a:cs typeface="Calibri" pitchFamily="34" charset="-120"/>
-              </a:rPr>
-              <a:t>categoria</a:t>
-            </a:r>
-            <a:r>
-              <a:rPr lang="en-US" sz="2200" b="1" dirty="0">
-                <a:solidFill>
-                  <a:srgbClr val="00B4D8"/>
-                </a:solidFill>
-                <a:latin typeface="Calibri" pitchFamily="34" charset="0"/>
-                <a:ea typeface="Calibri" pitchFamily="34" charset="-122"/>
-                <a:cs typeface="Calibri" pitchFamily="34" charset="-120"/>
-              </a:rPr>
-              <a:t> </a:t>
-            </a:r>
-            <a:r>
-              <a:rPr lang="en-US" sz="2200" b="1" dirty="0" err="1">
-                <a:solidFill>
-                  <a:srgbClr val="00B4D8"/>
-                </a:solidFill>
-                <a:latin typeface="Calibri" pitchFamily="34" charset="0"/>
-                <a:ea typeface="Calibri" pitchFamily="34" charset="-122"/>
-                <a:cs typeface="Calibri" pitchFamily="34" charset="-120"/>
-              </a:rPr>
-              <a:t>veicolo</a:t>
-            </a:r>
-            <a:endParaRPr lang="en-US" sz="2200" dirty="0"/>
+              <a:t>Infrazioni/Anno con categoria veicolo</a:t>
+            </a:r>
+            <a:endParaRPr lang="it-IT" sz="2200" noProof="1"/>
           </a:p>
         </p:txBody>
       </p:sp>
@@ -7895,7 +7141,7 @@
               <a:buNone/>
             </a:pPr>
             <a:r>
-              <a:rPr lang="en-US" sz="1300" i="1" dirty="0" err="1">
+              <a:rPr lang="it-IT" sz="1300" i="1" noProof="1">
                 <a:solidFill>
                   <a:srgbClr val="B0BEC5"/>
                 </a:solidFill>
@@ -7903,53 +7149,9 @@
                 <a:ea typeface="Calibri" pitchFamily="34" charset="-122"/>
                 <a:cs typeface="Calibri" pitchFamily="34" charset="-120"/>
               </a:rPr>
-              <a:t>SubPlot</a:t>
-            </a:r>
-            <a:r>
-              <a:rPr lang="en-US" sz="1300" i="1" dirty="0">
-                <a:solidFill>
-                  <a:srgbClr val="B0BEC5"/>
-                </a:solidFill>
-                <a:latin typeface="Calibri" pitchFamily="34" charset="0"/>
-                <a:ea typeface="Calibri" pitchFamily="34" charset="-122"/>
-                <a:cs typeface="Calibri" pitchFamily="34" charset="-120"/>
-              </a:rPr>
-              <a:t> – media annua </a:t>
-            </a:r>
-            <a:r>
-              <a:rPr lang="en-US" sz="1300" i="1" dirty="0" err="1">
-                <a:solidFill>
-                  <a:srgbClr val="B0BEC5"/>
-                </a:solidFill>
-                <a:latin typeface="Calibri" pitchFamily="34" charset="0"/>
-                <a:ea typeface="Calibri" pitchFamily="34" charset="-122"/>
-                <a:cs typeface="Calibri" pitchFamily="34" charset="-120"/>
-              </a:rPr>
-              <a:t>infrazioni</a:t>
-            </a:r>
-            <a:r>
-              <a:rPr lang="en-US" sz="1300" i="1" dirty="0">
-                <a:solidFill>
-                  <a:srgbClr val="B0BEC5"/>
-                </a:solidFill>
-                <a:latin typeface="Calibri" pitchFamily="34" charset="0"/>
-                <a:ea typeface="Calibri" pitchFamily="34" charset="-122"/>
-                <a:cs typeface="Calibri" pitchFamily="34" charset="-120"/>
-              </a:rPr>
-              <a:t> </a:t>
-            </a:r>
-            <a:r>
-              <a:rPr lang="en-US" sz="1300" i="1" dirty="0" err="1">
-                <a:solidFill>
-                  <a:srgbClr val="B0BEC5"/>
-                </a:solidFill>
-                <a:latin typeface="Calibri" pitchFamily="34" charset="0"/>
-                <a:ea typeface="Calibri" pitchFamily="34" charset="-122"/>
-                <a:cs typeface="Calibri" pitchFamily="34" charset="-120"/>
-              </a:rPr>
-              <a:t>veicoli</a:t>
-            </a:r>
-            <a:endParaRPr lang="en-US" sz="1300" dirty="0"/>
+              <a:t>SubPlot – media annua infrazioni veicoli</a:t>
+            </a:r>
+            <a:endParaRPr lang="it-IT" sz="1300" noProof="1"/>
           </a:p>
         </p:txBody>
       </p:sp>
@@ -7987,7 +7189,7 @@
           <a:bodyPr/>
           <a:lstStyle/>
           <a:p>
-            <a:endParaRPr lang="it-CH"/>
+            <a:endParaRPr lang="it-IT" noProof="1"/>
           </a:p>
         </p:txBody>
       </p:sp>
@@ -8022,7 +7224,7 @@
               <a:buNone/>
             </a:pPr>
             <a:r>
-              <a:rPr lang="en-US" sz="1400" dirty="0">
+              <a:rPr lang="it-IT" sz="1400" noProof="1">
                 <a:solidFill>
                   <a:srgbClr val="2A4580"/>
                 </a:solidFill>
@@ -8032,7 +7234,7 @@
               </a:rPr>
               <a:t>[ grafico ]</a:t>
             </a:r>
-            <a:endParaRPr lang="en-US" sz="1400" dirty="0"/>
+            <a:endParaRPr lang="it-IT" sz="1400" noProof="1"/>
           </a:p>
         </p:txBody>
       </p:sp>
@@ -8144,7 +7346,7 @@
           <a:bodyPr/>
           <a:lstStyle/>
           <a:p>
-            <a:endParaRPr lang="it-CH"/>
+            <a:endParaRPr lang="it-IT" noProof="1"/>
           </a:p>
         </p:txBody>
       </p:sp>
@@ -8179,96 +7381,16 @@
               <a:buNone/>
             </a:pPr>
             <a:r>
-              <a:rPr lang="en-US" sz="2200" b="1" dirty="0" err="1">
+              <a:rPr lang="it-IT" sz="2200" b="1" noProof="1">
                 <a:solidFill>
                   <a:srgbClr val="00B4D8"/>
                 </a:solidFill>
                 <a:latin typeface="Calibri" pitchFamily="34" charset="0"/>
                 <a:cs typeface="Calibri" pitchFamily="34" charset="-120"/>
               </a:rPr>
-              <a:t>Correlazione</a:t>
-            </a:r>
-            <a:r>
-              <a:rPr lang="en-US" sz="2200" b="1" dirty="0">
-                <a:solidFill>
-                  <a:srgbClr val="00B4D8"/>
-                </a:solidFill>
-                <a:latin typeface="Calibri" pitchFamily="34" charset="0"/>
-                <a:cs typeface="Calibri" pitchFamily="34" charset="-120"/>
-              </a:rPr>
-              <a:t> </a:t>
-            </a:r>
-            <a:r>
-              <a:rPr lang="en-US" sz="2200" b="1" dirty="0" err="1">
-                <a:solidFill>
-                  <a:srgbClr val="00B4D8"/>
-                </a:solidFill>
-                <a:latin typeface="Calibri" pitchFamily="34" charset="0"/>
-                <a:cs typeface="Calibri" pitchFamily="34" charset="-120"/>
-              </a:rPr>
-              <a:t>tra</a:t>
-            </a:r>
-            <a:r>
-              <a:rPr lang="en-US" sz="2200" b="1" dirty="0">
-                <a:solidFill>
-                  <a:srgbClr val="00B4D8"/>
-                </a:solidFill>
-                <a:latin typeface="Calibri" pitchFamily="34" charset="0"/>
-                <a:cs typeface="Calibri" pitchFamily="34" charset="-120"/>
-              </a:rPr>
-              <a:t> volume di </a:t>
-            </a:r>
-            <a:r>
-              <a:rPr lang="en-US" sz="2200" b="1" dirty="0" err="1">
-                <a:solidFill>
-                  <a:srgbClr val="00B4D8"/>
-                </a:solidFill>
-                <a:latin typeface="Calibri" pitchFamily="34" charset="0"/>
-                <a:cs typeface="Calibri" pitchFamily="34" charset="-120"/>
-              </a:rPr>
-              <a:t>traffico</a:t>
-            </a:r>
-            <a:r>
-              <a:rPr lang="en-US" sz="2200" b="1" dirty="0">
-                <a:solidFill>
-                  <a:srgbClr val="00B4D8"/>
-                </a:solidFill>
-                <a:latin typeface="Calibri" pitchFamily="34" charset="0"/>
-                <a:cs typeface="Calibri" pitchFamily="34" charset="-120"/>
-              </a:rPr>
-              <a:t> e </a:t>
-            </a:r>
-            <a:r>
-              <a:rPr lang="en-US" sz="2200" b="1" dirty="0" err="1">
-                <a:solidFill>
-                  <a:srgbClr val="00B4D8"/>
-                </a:solidFill>
-                <a:latin typeface="Calibri" pitchFamily="34" charset="0"/>
-                <a:cs typeface="Calibri" pitchFamily="34" charset="-120"/>
-              </a:rPr>
-              <a:t>numero</a:t>
-            </a:r>
-            <a:r>
-              <a:rPr lang="en-US" sz="2200" b="1" dirty="0">
-                <a:solidFill>
-                  <a:srgbClr val="00B4D8"/>
-                </a:solidFill>
-                <a:latin typeface="Calibri" pitchFamily="34" charset="0"/>
-                <a:cs typeface="Calibri" pitchFamily="34" charset="-120"/>
-              </a:rPr>
-              <a:t> di </a:t>
-            </a:r>
-            <a:r>
-              <a:rPr lang="en-US" sz="2200" b="1" dirty="0" err="1">
-                <a:solidFill>
-                  <a:srgbClr val="00B4D8"/>
-                </a:solidFill>
-                <a:latin typeface="Calibri" pitchFamily="34" charset="0"/>
-                <a:cs typeface="Calibri" pitchFamily="34" charset="-120"/>
-              </a:rPr>
-              <a:t>infrazioni</a:t>
-            </a:r>
-            <a:endParaRPr lang="en-US" sz="2200" dirty="0"/>
+              <a:t>Correlazione tra volume di traffico e numero di infrazioni</a:t>
+            </a:r>
+            <a:endParaRPr lang="it-IT" sz="2200" noProof="1"/>
           </a:p>
         </p:txBody>
       </p:sp>
@@ -8303,106 +7425,16 @@
               <a:buNone/>
             </a:pPr>
             <a:r>
-              <a:rPr lang="en-US" sz="1300" i="1" dirty="0" err="1">
+              <a:rPr lang="it-IT" sz="1300" i="1" noProof="1">
                 <a:solidFill>
                   <a:srgbClr val="B0BEC5"/>
                 </a:solidFill>
                 <a:latin typeface="Calibri" pitchFamily="34" charset="0"/>
                 <a:cs typeface="Calibri" pitchFamily="34" charset="-120"/>
               </a:rPr>
-              <a:t>Correlazione</a:t>
-            </a:r>
-            <a:r>
-              <a:rPr lang="en-US" sz="1300" i="1" dirty="0">
-                <a:solidFill>
-                  <a:srgbClr val="B0BEC5"/>
-                </a:solidFill>
-                <a:latin typeface="Calibri" pitchFamily="34" charset="0"/>
-                <a:cs typeface="Calibri" pitchFamily="34" charset="-120"/>
-              </a:rPr>
-              <a:t> </a:t>
-            </a:r>
-            <a:r>
-              <a:rPr lang="en-US" sz="1300" i="1" dirty="0" err="1">
-                <a:solidFill>
-                  <a:srgbClr val="B0BEC5"/>
-                </a:solidFill>
-                <a:latin typeface="Calibri" pitchFamily="34" charset="0"/>
-                <a:cs typeface="Calibri" pitchFamily="34" charset="-120"/>
-              </a:rPr>
-              <a:t>tra</a:t>
-            </a:r>
-            <a:r>
-              <a:rPr lang="en-US" sz="1300" i="1" dirty="0">
-                <a:solidFill>
-                  <a:srgbClr val="B0BEC5"/>
-                </a:solidFill>
-                <a:latin typeface="Calibri" pitchFamily="34" charset="0"/>
-                <a:cs typeface="Calibri" pitchFamily="34" charset="-120"/>
-              </a:rPr>
-              <a:t> volume di </a:t>
-            </a:r>
-            <a:r>
-              <a:rPr lang="en-US" sz="1300" i="1" dirty="0" err="1">
-                <a:solidFill>
-                  <a:srgbClr val="B0BEC5"/>
-                </a:solidFill>
-                <a:latin typeface="Calibri" pitchFamily="34" charset="0"/>
-                <a:cs typeface="Calibri" pitchFamily="34" charset="-120"/>
-              </a:rPr>
-              <a:t>traffico</a:t>
-            </a:r>
-            <a:r>
-              <a:rPr lang="en-US" sz="1300" i="1" dirty="0">
-                <a:solidFill>
-                  <a:srgbClr val="B0BEC5"/>
-                </a:solidFill>
-                <a:latin typeface="Calibri" pitchFamily="34" charset="0"/>
-                <a:cs typeface="Calibri" pitchFamily="34" charset="-120"/>
-              </a:rPr>
-              <a:t> e </a:t>
-            </a:r>
-            <a:r>
-              <a:rPr lang="en-US" sz="1300" i="1" dirty="0" err="1">
-                <a:solidFill>
-                  <a:srgbClr val="B0BEC5"/>
-                </a:solidFill>
-                <a:latin typeface="Calibri" pitchFamily="34" charset="0"/>
-                <a:cs typeface="Calibri" pitchFamily="34" charset="-120"/>
-              </a:rPr>
-              <a:t>numero</a:t>
-            </a:r>
-            <a:r>
-              <a:rPr lang="en-US" sz="1300" i="1" dirty="0">
-                <a:solidFill>
-                  <a:srgbClr val="B0BEC5"/>
-                </a:solidFill>
-                <a:latin typeface="Calibri" pitchFamily="34" charset="0"/>
-                <a:cs typeface="Calibri" pitchFamily="34" charset="-120"/>
-              </a:rPr>
-              <a:t> di </a:t>
-            </a:r>
-            <a:r>
-              <a:rPr lang="en-US" sz="1300" i="1" dirty="0" err="1">
-                <a:solidFill>
-                  <a:srgbClr val="B0BEC5"/>
-                </a:solidFill>
-                <a:latin typeface="Calibri" pitchFamily="34" charset="0"/>
-                <a:cs typeface="Calibri" pitchFamily="34" charset="-120"/>
-              </a:rPr>
-              <a:t>infrazioni</a:t>
-            </a:r>
-            <a:r>
-              <a:rPr lang="en-US" sz="1300" i="1" dirty="0">
-                <a:solidFill>
-                  <a:srgbClr val="B0BEC5"/>
-                </a:solidFill>
-                <a:latin typeface="Calibri" pitchFamily="34" charset="0"/>
-                <a:cs typeface="Calibri" pitchFamily="34" charset="-120"/>
-              </a:rPr>
-              <a:t> per radar. </a:t>
-            </a:r>
-            <a:endParaRPr lang="en-US" sz="1300" dirty="0"/>
+              <a:t>Correlazione tra volume di traffico e numero di infrazioni per radar. </a:t>
+            </a:r>
+            <a:endParaRPr lang="it-IT" sz="1300" noProof="1"/>
           </a:p>
         </p:txBody>
       </p:sp>
@@ -8440,7 +7472,7 @@
           <a:bodyPr/>
           <a:lstStyle/>
           <a:p>
-            <a:endParaRPr lang="it-CH" dirty="0"/>
+            <a:endParaRPr lang="it-IT" noProof="1"/>
           </a:p>
         </p:txBody>
       </p:sp>
@@ -8475,7 +7507,7 @@
               <a:buNone/>
             </a:pPr>
             <a:r>
-              <a:rPr lang="en-US" sz="1400" dirty="0">
+              <a:rPr lang="it-IT" sz="1400" noProof="1">
                 <a:solidFill>
                   <a:srgbClr val="2A4580"/>
                 </a:solidFill>
@@ -8485,7 +7517,7 @@
               </a:rPr>
               <a:t>[ grafico ]</a:t>
             </a:r>
-            <a:endParaRPr lang="en-US" sz="1400" dirty="0"/>
+            <a:endParaRPr lang="it-IT" sz="1400" noProof="1"/>
           </a:p>
         </p:txBody>
       </p:sp>
